--- a/99ref/blog.pptx
+++ b/99ref/blog.pptx
@@ -7,6 +7,9 @@
   <p:sldIdLst>
     <p:sldId id="256" r:id="rId2"/>
     <p:sldId id="257" r:id="rId3"/>
+    <p:sldId id="258" r:id="rId4"/>
+    <p:sldId id="259" r:id="rId5"/>
+    <p:sldId id="260" r:id="rId6"/>
   </p:sldIdLst>
   <p:sldSz cx="9720263" cy="8999538"/>
   <p:notesSz cx="6858000" cy="9144000"/>
@@ -3012,18 +3015,11 @@
           <a:lstStyle/>
           <a:p>
             <a:r>
-              <a:rPr lang="en-US" altLang="ko-KR" sz="1600" b="1" dirty="0" smtClean="0">
-                <a:solidFill>
-                  <a:schemeClr val="tx1"/>
-                </a:solidFill>
-                <a:latin typeface="+mn-ea"/>
-              </a:rPr>
-              <a:t>“</a:t>
-            </a:r>
-            <a:r>
               <a:rPr lang="en-US" altLang="ko-KR" sz="1600" b="1" dirty="0" err="1" smtClean="0">
                 <a:solidFill>
-                  <a:schemeClr val="tx1"/>
+                  <a:schemeClr val="accent1">
+                    <a:lumMod val="75000"/>
+                  </a:schemeClr>
                 </a:solidFill>
                 <a:latin typeface="+mn-ea"/>
               </a:rPr>
@@ -3032,24 +3028,30 @@
             <a:r>
               <a:rPr lang="ko-KR" altLang="en-US" sz="1600" b="1" dirty="0" smtClean="0">
                 <a:solidFill>
-                  <a:schemeClr val="tx1"/>
+                  <a:schemeClr val="accent1">
+                    <a:lumMod val="75000"/>
+                  </a:schemeClr>
                 </a:solidFill>
                 <a:latin typeface="+mn-ea"/>
               </a:rPr>
-              <a:t>란 무엇인가</a:t>
-            </a:r>
-            <a:r>
-              <a:rPr lang="en-US" altLang="ko-KR" sz="1600" b="1" dirty="0" smtClean="0">
+              <a:t>란 </a:t>
+            </a:r>
+            <a:r>
+              <a:rPr lang="ko-KR" altLang="en-US" sz="1600" b="1" dirty="0" smtClean="0">
                 <a:solidFill>
-                  <a:schemeClr val="tx1"/>
+                  <a:schemeClr val="accent1">
+                    <a:lumMod val="75000"/>
+                  </a:schemeClr>
                 </a:solidFill>
                 <a:latin typeface="+mn-ea"/>
               </a:rPr>
-              <a:t>”</a:t>
+              <a:t>무엇인가</a:t>
             </a:r>
             <a:endParaRPr lang="ko-KR" altLang="en-US" sz="1600" b="1" dirty="0">
               <a:solidFill>
-                <a:schemeClr val="tx1"/>
+                <a:schemeClr val="accent1">
+                  <a:lumMod val="75000"/>
+                </a:schemeClr>
               </a:solidFill>
               <a:latin typeface="+mn-ea"/>
             </a:endParaRPr>
@@ -3064,7 +3066,7 @@
         </p:nvSpPr>
         <p:spPr>
           <a:xfrm>
-            <a:off x="161471" y="468086"/>
+            <a:off x="161471" y="493486"/>
             <a:ext cx="9312729" cy="497114"/>
           </a:xfrm>
           <a:prstGeom prst="rect">
@@ -3193,7 +3195,7 @@
         </p:nvSpPr>
         <p:spPr>
           <a:xfrm>
-            <a:off x="516056" y="2534424"/>
+            <a:off x="516056" y="2559824"/>
             <a:ext cx="2129255" cy="244298"/>
           </a:xfrm>
           <a:prstGeom prst="rect">
@@ -3250,7 +3252,7 @@
         </p:blipFill>
         <p:spPr>
           <a:xfrm>
-            <a:off x="950683" y="1052280"/>
+            <a:off x="950683" y="1077680"/>
             <a:ext cx="1260000" cy="1260000"/>
           </a:xfrm>
           <a:prstGeom prst="rect">
@@ -3269,7 +3271,7 @@
         </p:nvSpPr>
         <p:spPr>
           <a:xfrm>
-            <a:off x="140683" y="3000867"/>
+            <a:off x="140683" y="3026267"/>
             <a:ext cx="2880000" cy="1406154"/>
           </a:xfrm>
           <a:prstGeom prst="rect">
@@ -4157,7 +4159,7 @@
         </p:nvSpPr>
         <p:spPr>
           <a:xfrm>
-            <a:off x="3410947" y="2542544"/>
+            <a:off x="3410947" y="2567944"/>
             <a:ext cx="2892462" cy="244298"/>
           </a:xfrm>
           <a:prstGeom prst="rect">
@@ -4214,7 +4216,7 @@
         </p:blipFill>
         <p:spPr>
           <a:xfrm>
-            <a:off x="4227178" y="1094260"/>
+            <a:off x="4227178" y="1119660"/>
             <a:ext cx="1260000" cy="1260000"/>
           </a:xfrm>
           <a:prstGeom prst="rect">
@@ -4233,7 +4235,7 @@
         </p:nvSpPr>
         <p:spPr>
           <a:xfrm>
-            <a:off x="3417178" y="3004154"/>
+            <a:off x="3417178" y="3029554"/>
             <a:ext cx="2880000" cy="1406154"/>
           </a:xfrm>
           <a:prstGeom prst="rect">
@@ -5126,7 +5128,7 @@
         </p:nvSpPr>
         <p:spPr>
           <a:xfrm>
-            <a:off x="7048799" y="2592151"/>
+            <a:off x="7048799" y="2617551"/>
             <a:ext cx="2169750" cy="244298"/>
           </a:xfrm>
           <a:prstGeom prst="rect">
@@ -5183,7 +5185,7 @@
         </p:blipFill>
         <p:spPr>
           <a:xfrm>
-            <a:off x="7503674" y="1129867"/>
+            <a:off x="7503674" y="1155267"/>
             <a:ext cx="1260000" cy="1260000"/>
           </a:xfrm>
           <a:prstGeom prst="rect">
@@ -5202,7 +5204,7 @@
         </p:nvSpPr>
         <p:spPr>
           <a:xfrm>
-            <a:off x="6693674" y="3038733"/>
+            <a:off x="6693674" y="3064133"/>
             <a:ext cx="2820440" cy="1186222"/>
           </a:xfrm>
           <a:prstGeom prst="rect">
@@ -6056,7 +6058,7 @@
         </p:nvSpPr>
         <p:spPr>
           <a:xfrm>
-            <a:off x="0" y="4392387"/>
+            <a:off x="0" y="4417787"/>
             <a:ext cx="2186829" cy="312964"/>
           </a:xfrm>
           <a:prstGeom prst="rect">
@@ -6088,27 +6090,22 @@
           <a:lstStyle/>
           <a:p>
             <a:r>
+              <a:rPr lang="en-US" altLang="ko-KR" sz="1600" b="1" dirty="0" err="1" smtClean="0">
+                <a:solidFill>
+                  <a:schemeClr val="accent1">
+                    <a:lumMod val="75000"/>
+                  </a:schemeClr>
+                </a:solidFill>
+                <a:latin typeface="+mn-ea"/>
+              </a:rPr>
+              <a:t>Vertica</a:t>
+            </a:r>
+            <a:r>
               <a:rPr lang="en-US" altLang="ko-KR" sz="1600" b="1" dirty="0" smtClean="0">
                 <a:solidFill>
-                  <a:schemeClr val="tx1"/>
-                </a:solidFill>
-                <a:latin typeface="+mn-ea"/>
-              </a:rPr>
-              <a:t>“</a:t>
-            </a:r>
-            <a:r>
-              <a:rPr lang="en-US" altLang="ko-KR" sz="1600" b="1" dirty="0" err="1" smtClean="0">
-                <a:solidFill>
-                  <a:schemeClr val="tx1"/>
-                </a:solidFill>
-                <a:latin typeface="+mn-ea"/>
-              </a:rPr>
-              <a:t>Vertica</a:t>
-            </a:r>
-            <a:r>
-              <a:rPr lang="en-US" altLang="ko-KR" sz="1600" b="1" dirty="0" smtClean="0">
-                <a:solidFill>
-                  <a:schemeClr val="tx1"/>
+                  <a:schemeClr val="accent1">
+                    <a:lumMod val="75000"/>
+                  </a:schemeClr>
                 </a:solidFill>
                 <a:latin typeface="+mn-ea"/>
               </a:rPr>
@@ -6117,24 +6114,30 @@
             <a:r>
               <a:rPr lang="ko-KR" altLang="en-US" sz="1600" b="1" dirty="0">
                 <a:solidFill>
-                  <a:schemeClr val="tx1"/>
+                  <a:schemeClr val="accent1">
+                    <a:lumMod val="75000"/>
+                  </a:schemeClr>
                 </a:solidFill>
                 <a:latin typeface="+mn-ea"/>
               </a:rPr>
-              <a:t>핵심 기술</a:t>
-            </a:r>
-            <a:r>
-              <a:rPr lang="en-US" altLang="ko-KR" sz="1600" b="1" dirty="0" smtClean="0">
+              <a:t>핵심 </a:t>
+            </a:r>
+            <a:r>
+              <a:rPr lang="ko-KR" altLang="en-US" sz="1600" b="1" dirty="0" smtClean="0">
                 <a:solidFill>
-                  <a:schemeClr val="tx1"/>
+                  <a:schemeClr val="accent1">
+                    <a:lumMod val="75000"/>
+                  </a:schemeClr>
                 </a:solidFill>
                 <a:latin typeface="+mn-ea"/>
               </a:rPr>
-              <a:t>”</a:t>
+              <a:t>기술</a:t>
             </a:r>
             <a:endParaRPr lang="ko-KR" altLang="en-US" sz="1600" b="1" dirty="0">
               <a:solidFill>
-                <a:schemeClr val="tx1"/>
+                <a:schemeClr val="accent1">
+                  <a:lumMod val="75000"/>
+                </a:schemeClr>
               </a:solidFill>
               <a:latin typeface="+mn-ea"/>
             </a:endParaRPr>
@@ -6149,7 +6152,7 @@
         </p:nvSpPr>
         <p:spPr>
           <a:xfrm>
-            <a:off x="9071" y="4735286"/>
+            <a:off x="9071" y="4760686"/>
             <a:ext cx="9873546" cy="497114"/>
           </a:xfrm>
           <a:prstGeom prst="rect">
@@ -6243,13 +6246,13 @@
           <p:nvPr>
             <p:extLst>
               <p:ext uri="{D42A27DB-BD31-4B8C-83A1-F6EECF244321}">
-                <p14:modId xmlns:p14="http://schemas.microsoft.com/office/powerpoint/2010/main" val="2440290811"/>
+                <p14:modId xmlns:p14="http://schemas.microsoft.com/office/powerpoint/2010/main" val="1735461271"/>
               </p:ext>
             </p:extLst>
           </p:nvPr>
         </p:nvGraphicFramePr>
         <p:xfrm>
-          <a:off x="246308" y="5432787"/>
+          <a:off x="246308" y="5458187"/>
           <a:ext cx="200863" cy="1310940"/>
         </p:xfrm>
         <a:graphic>
@@ -6400,13 +6403,13 @@
           <p:nvPr>
             <p:extLst>
               <p:ext uri="{D42A27DB-BD31-4B8C-83A1-F6EECF244321}">
-                <p14:modId xmlns:p14="http://schemas.microsoft.com/office/powerpoint/2010/main" val="196141353"/>
+                <p14:modId xmlns:p14="http://schemas.microsoft.com/office/powerpoint/2010/main" val="601713452"/>
               </p:ext>
             </p:extLst>
           </p:nvPr>
         </p:nvGraphicFramePr>
         <p:xfrm>
-          <a:off x="516052" y="5432787"/>
+          <a:off x="516052" y="5458187"/>
           <a:ext cx="200863" cy="1310940"/>
         </p:xfrm>
         <a:graphic>
@@ -6542,13 +6545,13 @@
           <p:nvPr>
             <p:extLst>
               <p:ext uri="{D42A27DB-BD31-4B8C-83A1-F6EECF244321}">
-                <p14:modId xmlns:p14="http://schemas.microsoft.com/office/powerpoint/2010/main" val="2280448626"/>
+                <p14:modId xmlns:p14="http://schemas.microsoft.com/office/powerpoint/2010/main" val="3706800928"/>
               </p:ext>
             </p:extLst>
           </p:nvPr>
         </p:nvGraphicFramePr>
         <p:xfrm>
-          <a:off x="761055" y="5432787"/>
+          <a:off x="761055" y="5458187"/>
           <a:ext cx="200863" cy="1310940"/>
         </p:xfrm>
         <a:graphic>
@@ -6694,13 +6697,13 @@
           <p:nvPr>
             <p:extLst>
               <p:ext uri="{D42A27DB-BD31-4B8C-83A1-F6EECF244321}">
-                <p14:modId xmlns:p14="http://schemas.microsoft.com/office/powerpoint/2010/main" val="3737004409"/>
+                <p14:modId xmlns:p14="http://schemas.microsoft.com/office/powerpoint/2010/main" val="3336143817"/>
               </p:ext>
             </p:extLst>
           </p:nvPr>
         </p:nvGraphicFramePr>
         <p:xfrm>
-          <a:off x="995218" y="5432787"/>
+          <a:off x="995218" y="5458187"/>
           <a:ext cx="200863" cy="1310940"/>
         </p:xfrm>
         <a:graphic>
@@ -6851,13 +6854,13 @@
           <p:nvPr>
             <p:extLst>
               <p:ext uri="{D42A27DB-BD31-4B8C-83A1-F6EECF244321}">
-                <p14:modId xmlns:p14="http://schemas.microsoft.com/office/powerpoint/2010/main" val="3851018502"/>
+                <p14:modId xmlns:p14="http://schemas.microsoft.com/office/powerpoint/2010/main" val="1728891744"/>
               </p:ext>
             </p:extLst>
           </p:nvPr>
         </p:nvGraphicFramePr>
         <p:xfrm>
-          <a:off x="1258304" y="5434507"/>
+          <a:off x="1258304" y="5459907"/>
           <a:ext cx="199782" cy="1309220"/>
         </p:xfrm>
         <a:graphic>
@@ -7007,7 +7010,7 @@
         </p:nvCxnSpPr>
         <p:spPr>
           <a:xfrm flipH="1">
-            <a:off x="337563" y="5656753"/>
+            <a:off x="337563" y="5682153"/>
             <a:ext cx="2" cy="1086974"/>
           </a:xfrm>
           <a:prstGeom prst="straightConnector1">
@@ -7044,7 +7047,7 @@
         </p:nvGrpSpPr>
         <p:grpSpPr>
           <a:xfrm>
-            <a:off x="7917832" y="5517449"/>
+            <a:off x="7917832" y="5542849"/>
             <a:ext cx="1546355" cy="1226278"/>
             <a:chOff x="8060037" y="1837974"/>
             <a:chExt cx="1458522" cy="1305922"/>
@@ -7706,7 +7709,7 @@
         </p:nvGrpSpPr>
         <p:grpSpPr>
           <a:xfrm>
-            <a:off x="3971921" y="5614179"/>
+            <a:off x="3971921" y="5639579"/>
             <a:ext cx="1298777" cy="1129548"/>
             <a:chOff x="1392799" y="8552193"/>
             <a:chExt cx="285312" cy="263081"/>
@@ -9137,7 +9140,7 @@
         </p:nvSpPr>
         <p:spPr bwMode="auto">
           <a:xfrm>
-            <a:off x="2173506" y="5474526"/>
+            <a:off x="2173506" y="5499926"/>
             <a:ext cx="1038585" cy="1269201"/>
           </a:xfrm>
           <a:custGeom>
@@ -10377,7 +10380,7 @@
         </p:nvSpPr>
         <p:spPr>
           <a:xfrm>
-            <a:off x="99782" y="6958968"/>
+            <a:off x="99782" y="6984368"/>
             <a:ext cx="1603053" cy="504000"/>
           </a:xfrm>
           <a:prstGeom prst="rect">
@@ -10443,7 +10446,7 @@
         </p:nvSpPr>
         <p:spPr>
           <a:xfrm>
-            <a:off x="2047610" y="6958968"/>
+            <a:off x="2047610" y="6984368"/>
             <a:ext cx="1603053" cy="504000"/>
           </a:xfrm>
           <a:prstGeom prst="rect">
@@ -10509,7 +10512,7 @@
         </p:nvSpPr>
         <p:spPr>
           <a:xfrm>
-            <a:off x="3995438" y="6958968"/>
+            <a:off x="3995438" y="6984368"/>
             <a:ext cx="1603053" cy="504000"/>
           </a:xfrm>
           <a:prstGeom prst="rect">
@@ -10563,7 +10566,7 @@
         </p:nvSpPr>
         <p:spPr>
           <a:xfrm>
-            <a:off x="5943266" y="6958968"/>
+            <a:off x="5943266" y="6984368"/>
             <a:ext cx="1603053" cy="504000"/>
           </a:xfrm>
           <a:prstGeom prst="rect">
@@ -10617,7 +10620,7 @@
         </p:nvSpPr>
         <p:spPr>
           <a:xfrm>
-            <a:off x="7891093" y="6958968"/>
+            <a:off x="7891093" y="6984368"/>
             <a:ext cx="1603053" cy="504000"/>
           </a:xfrm>
           <a:prstGeom prst="rect">
@@ -10671,7 +10674,7 @@
         </p:nvSpPr>
         <p:spPr>
           <a:xfrm>
-            <a:off x="42829" y="7561579"/>
+            <a:off x="42829" y="7586979"/>
             <a:ext cx="1723822" cy="382541"/>
           </a:xfrm>
           <a:prstGeom prst="rect">
@@ -10744,7 +10747,7 @@
         </p:nvSpPr>
         <p:spPr>
           <a:xfrm>
-            <a:off x="1880579" y="7561579"/>
+            <a:off x="1880579" y="7586979"/>
             <a:ext cx="1498137" cy="594522"/>
           </a:xfrm>
           <a:prstGeom prst="rect">
@@ -10831,7 +10834,7 @@
         </p:nvSpPr>
         <p:spPr>
           <a:xfrm>
-            <a:off x="3721113" y="7572465"/>
+            <a:off x="3721113" y="7597865"/>
             <a:ext cx="1830601" cy="1370119"/>
           </a:xfrm>
           <a:prstGeom prst="rect">
@@ -10996,7 +10999,7 @@
         </p:nvSpPr>
         <p:spPr>
           <a:xfrm>
-            <a:off x="5907535" y="7561579"/>
+            <a:off x="5907535" y="7586979"/>
             <a:ext cx="1749145" cy="381515"/>
           </a:xfrm>
           <a:prstGeom prst="rect">
@@ -11055,7 +11058,7 @@
         </p:nvSpPr>
         <p:spPr>
           <a:xfrm>
-            <a:off x="7822196" y="7561579"/>
+            <a:off x="7822196" y="7586979"/>
             <a:ext cx="1749145" cy="594522"/>
           </a:xfrm>
           <a:prstGeom prst="rect">
@@ -11142,7 +11145,7 @@
         </p:nvGrpSpPr>
         <p:grpSpPr>
           <a:xfrm rot="18900000">
-            <a:off x="6078731" y="5538201"/>
+            <a:off x="6078731" y="5563601"/>
             <a:ext cx="1296000" cy="1296000"/>
             <a:chOff x="7135913" y="1248230"/>
             <a:chExt cx="1851539" cy="1832402"/>
@@ -13867,6 +13870,76 @@
           </p:sp>
         </p:grpSp>
       </p:grpSp>
+      <p:cxnSp>
+        <p:nvCxnSpPr>
+          <p:cNvPr id="3" name="직선 연결선 2"/>
+          <p:cNvCxnSpPr/>
+          <p:nvPr/>
+        </p:nvCxnSpPr>
+        <p:spPr>
+          <a:xfrm flipV="1">
+            <a:off x="215900" y="469900"/>
+            <a:ext cx="9156700" cy="0"/>
+          </a:xfrm>
+          <a:prstGeom prst="line">
+            <a:avLst/>
+          </a:prstGeom>
+          <a:ln w="19050">
+            <a:solidFill>
+              <a:schemeClr val="accent1"/>
+            </a:solidFill>
+          </a:ln>
+        </p:spPr>
+        <p:style>
+          <a:lnRef idx="1">
+            <a:schemeClr val="accent1"/>
+          </a:lnRef>
+          <a:fillRef idx="0">
+            <a:schemeClr val="accent1"/>
+          </a:fillRef>
+          <a:effectRef idx="0">
+            <a:schemeClr val="accent1"/>
+          </a:effectRef>
+          <a:fontRef idx="minor">
+            <a:schemeClr val="tx1"/>
+          </a:fontRef>
+        </p:style>
+      </p:cxnSp>
+      <p:cxnSp>
+        <p:nvCxnSpPr>
+          <p:cNvPr id="76" name="직선 연결선 75"/>
+          <p:cNvCxnSpPr/>
+          <p:nvPr/>
+        </p:nvCxnSpPr>
+        <p:spPr>
+          <a:xfrm flipV="1">
+            <a:off x="114300" y="4775200"/>
+            <a:ext cx="9156700" cy="0"/>
+          </a:xfrm>
+          <a:prstGeom prst="line">
+            <a:avLst/>
+          </a:prstGeom>
+          <a:ln w="19050">
+            <a:solidFill>
+              <a:schemeClr val="accent1"/>
+            </a:solidFill>
+          </a:ln>
+        </p:spPr>
+        <p:style>
+          <a:lnRef idx="1">
+            <a:schemeClr val="accent1"/>
+          </a:lnRef>
+          <a:fillRef idx="0">
+            <a:schemeClr val="accent1"/>
+          </a:fillRef>
+          <a:effectRef idx="0">
+            <a:schemeClr val="accent1"/>
+          </a:effectRef>
+          <a:fontRef idx="minor">
+            <a:schemeClr val="tx1"/>
+          </a:fontRef>
+        </p:style>
+      </p:cxnSp>
     </p:spTree>
     <p:extLst>
       <p:ext uri="{BB962C8B-B14F-4D97-AF65-F5344CB8AC3E}">
@@ -14152,27 +14225,22 @@
           <a:lstStyle/>
           <a:p>
             <a:r>
-              <a:rPr lang="en-US" altLang="ko-KR" sz="1600" b="1" dirty="0">
+              <a:rPr lang="en-US" altLang="ko-KR" sz="1600" b="1" dirty="0" err="1" smtClean="0">
                 <a:solidFill>
-                  <a:schemeClr val="tx1"/>
+                  <a:schemeClr val="accent1">
+                    <a:lumMod val="75000"/>
+                  </a:schemeClr>
                 </a:solidFill>
                 <a:latin typeface="+mn-ea"/>
               </a:rPr>
-              <a:t>“</a:t>
-            </a:r>
-            <a:r>
-              <a:rPr lang="en-US" altLang="ko-KR" sz="1600" b="1" dirty="0" err="1">
+              <a:t>Vertica</a:t>
+            </a:r>
+            <a:r>
+              <a:rPr lang="en-US" altLang="ko-KR" sz="1600" b="1" dirty="0" smtClean="0">
                 <a:solidFill>
-                  <a:schemeClr val="tx1"/>
-                </a:solidFill>
-                <a:latin typeface="+mn-ea"/>
-              </a:rPr>
-              <a:t>Vertica</a:t>
-            </a:r>
-            <a:r>
-              <a:rPr lang="en-US" altLang="ko-KR" sz="1600" b="1" dirty="0">
-                <a:solidFill>
-                  <a:schemeClr val="tx1"/>
+                  <a:schemeClr val="accent1">
+                    <a:lumMod val="75000"/>
+                  </a:schemeClr>
                 </a:solidFill>
                 <a:latin typeface="+mn-ea"/>
               </a:rPr>
@@ -14181,24 +14249,19 @@
             <a:r>
               <a:rPr lang="ko-KR" altLang="en-US" sz="1600" b="1" dirty="0" smtClean="0">
                 <a:solidFill>
-                  <a:schemeClr val="tx1"/>
+                  <a:schemeClr val="accent1">
+                    <a:lumMod val="75000"/>
+                  </a:schemeClr>
                 </a:solidFill>
                 <a:latin typeface="+mn-ea"/>
               </a:rPr>
               <a:t>포트폴리오</a:t>
-            </a:r>
-            <a:r>
-              <a:rPr lang="en-US" altLang="ko-KR" sz="1600" b="1" dirty="0" smtClean="0">
-                <a:solidFill>
-                  <a:schemeClr val="tx1"/>
-                </a:solidFill>
-                <a:latin typeface="+mn-ea"/>
-              </a:rPr>
-              <a:t>”</a:t>
             </a:r>
             <a:endParaRPr lang="ko-KR" altLang="en-US" sz="1600" b="1" dirty="0">
               <a:solidFill>
-                <a:schemeClr val="tx1"/>
+                <a:schemeClr val="accent1">
+                  <a:lumMod val="75000"/>
+                </a:schemeClr>
               </a:solidFill>
               <a:latin typeface="+mn-ea"/>
             </a:endParaRPr>
@@ -15187,10 +15250,4922 @@
           </a:prstGeom>
         </p:spPr>
       </p:pic>
+      <p:cxnSp>
+        <p:nvCxnSpPr>
+          <p:cNvPr id="20" name="직선 연결선 19"/>
+          <p:cNvCxnSpPr/>
+          <p:nvPr/>
+        </p:nvCxnSpPr>
+        <p:spPr>
+          <a:xfrm flipV="1">
+            <a:off x="215900" y="469900"/>
+            <a:ext cx="9156700" cy="0"/>
+          </a:xfrm>
+          <a:prstGeom prst="line">
+            <a:avLst/>
+          </a:prstGeom>
+          <a:ln w="19050">
+            <a:solidFill>
+              <a:schemeClr val="accent1"/>
+            </a:solidFill>
+          </a:ln>
+        </p:spPr>
+        <p:style>
+          <a:lnRef idx="1">
+            <a:schemeClr val="accent1"/>
+          </a:lnRef>
+          <a:fillRef idx="0">
+            <a:schemeClr val="accent1"/>
+          </a:fillRef>
+          <a:effectRef idx="0">
+            <a:schemeClr val="accent1"/>
+          </a:effectRef>
+          <a:fontRef idx="minor">
+            <a:schemeClr val="tx1"/>
+          </a:fontRef>
+        </p:style>
+      </p:cxnSp>
     </p:spTree>
     <p:extLst>
       <p:ext uri="{BB962C8B-B14F-4D97-AF65-F5344CB8AC3E}">
         <p14:creationId xmlns:p14="http://schemas.microsoft.com/office/powerpoint/2010/main" val="3878386154"/>
+      </p:ext>
+    </p:extLst>
+  </p:cSld>
+  <p:clrMapOvr>
+    <a:masterClrMapping/>
+  </p:clrMapOvr>
+  <p:timing>
+    <p:tnLst>
+      <p:par>
+        <p:cTn id="1" dur="indefinite" restart="never" nodeType="tmRoot"/>
+      </p:par>
+    </p:tnLst>
+  </p:timing>
+</p:sld>
+</file>
+
+<file path=ppt/slides/slide3.xml><?xml version="1.0" encoding="utf-8"?>
+<p:sld xmlns:a="http://schemas.openxmlformats.org/drawingml/2006/main" xmlns:r="http://schemas.openxmlformats.org/officeDocument/2006/relationships" xmlns:p="http://schemas.openxmlformats.org/presentationml/2006/main">
+  <p:cSld>
+    <p:spTree>
+      <p:nvGrpSpPr>
+        <p:cNvPr id="1" name=""/>
+        <p:cNvGrpSpPr/>
+        <p:nvPr/>
+      </p:nvGrpSpPr>
+      <p:grpSpPr>
+        <a:xfrm>
+          <a:off x="0" y="0"/>
+          <a:ext cx="0" cy="0"/>
+          <a:chOff x="0" y="0"/>
+          <a:chExt cx="0" cy="0"/>
+        </a:xfrm>
+      </p:grpSpPr>
+      <p:sp>
+        <p:nvSpPr>
+          <p:cNvPr id="10" name="직사각형 9"/>
+          <p:cNvSpPr/>
+          <p:nvPr/>
+        </p:nvSpPr>
+        <p:spPr>
+          <a:xfrm>
+            <a:off x="152400" y="125187"/>
+            <a:ext cx="2667000" cy="312964"/>
+          </a:xfrm>
+          <a:prstGeom prst="rect">
+            <a:avLst/>
+          </a:prstGeom>
+          <a:noFill/>
+          <a:ln>
+            <a:noFill/>
+          </a:ln>
+        </p:spPr>
+        <p:style>
+          <a:lnRef idx="2">
+            <a:schemeClr val="accent1">
+              <a:shade val="50000"/>
+            </a:schemeClr>
+          </a:lnRef>
+          <a:fillRef idx="1">
+            <a:schemeClr val="accent1"/>
+          </a:fillRef>
+          <a:effectRef idx="0">
+            <a:schemeClr val="accent1"/>
+          </a:effectRef>
+          <a:fontRef idx="minor">
+            <a:schemeClr val="lt1"/>
+          </a:fontRef>
+        </p:style>
+        <p:txBody>
+          <a:bodyPr rtlCol="0" anchor="ctr"/>
+          <a:lstStyle/>
+          <a:p>
+            <a:r>
+              <a:rPr lang="en-US" altLang="ko-KR" sz="1600" b="1" dirty="0" err="1" smtClean="0">
+                <a:solidFill>
+                  <a:schemeClr val="accent1">
+                    <a:lumMod val="75000"/>
+                  </a:schemeClr>
+                </a:solidFill>
+                <a:latin typeface="+mn-ea"/>
+              </a:rPr>
+              <a:t>Vertica</a:t>
+            </a:r>
+            <a:r>
+              <a:rPr lang="en-US" altLang="ko-KR" sz="1600" b="1" dirty="0" smtClean="0">
+                <a:solidFill>
+                  <a:schemeClr val="accent1">
+                    <a:lumMod val="75000"/>
+                  </a:schemeClr>
+                </a:solidFill>
+                <a:latin typeface="+mn-ea"/>
+              </a:rPr>
+              <a:t> </a:t>
+            </a:r>
+            <a:r>
+              <a:rPr lang="ko-KR" altLang="en-US" sz="1600" b="1" dirty="0" smtClean="0">
+                <a:solidFill>
+                  <a:schemeClr val="accent1">
+                    <a:lumMod val="75000"/>
+                  </a:schemeClr>
+                </a:solidFill>
+                <a:latin typeface="+mn-ea"/>
+              </a:rPr>
+              <a:t>아키텍처</a:t>
+            </a:r>
+            <a:endParaRPr lang="ko-KR" altLang="en-US" sz="1600" b="1" dirty="0">
+              <a:solidFill>
+                <a:schemeClr val="accent1">
+                  <a:lumMod val="75000"/>
+                </a:schemeClr>
+              </a:solidFill>
+              <a:latin typeface="+mn-ea"/>
+            </a:endParaRPr>
+          </a:p>
+        </p:txBody>
+      </p:sp>
+      <p:sp>
+        <p:nvSpPr>
+          <p:cNvPr id="12" name="직사각형 11"/>
+          <p:cNvSpPr/>
+          <p:nvPr/>
+        </p:nvSpPr>
+        <p:spPr>
+          <a:xfrm>
+            <a:off x="301171" y="422730"/>
+            <a:ext cx="9312729" cy="357414"/>
+          </a:xfrm>
+          <a:prstGeom prst="rect">
+            <a:avLst/>
+          </a:prstGeom>
+          <a:noFill/>
+          <a:ln>
+            <a:noFill/>
+          </a:ln>
+        </p:spPr>
+        <p:style>
+          <a:lnRef idx="2">
+            <a:schemeClr val="accent1">
+              <a:shade val="50000"/>
+            </a:schemeClr>
+          </a:lnRef>
+          <a:fillRef idx="1">
+            <a:schemeClr val="accent1"/>
+          </a:fillRef>
+          <a:effectRef idx="0">
+            <a:schemeClr val="accent1"/>
+          </a:effectRef>
+          <a:fontRef idx="minor">
+            <a:schemeClr val="lt1"/>
+          </a:fontRef>
+        </p:style>
+        <p:txBody>
+          <a:bodyPr rtlCol="0" anchor="ctr"/>
+          <a:lstStyle/>
+          <a:p>
+            <a:r>
+              <a:rPr lang="en-US" altLang="ko-KR" sz="1400" dirty="0" err="1">
+                <a:solidFill>
+                  <a:schemeClr val="tx1"/>
+                </a:solidFill>
+                <a:latin typeface="+mn-ea"/>
+              </a:rPr>
+              <a:t>Vertica</a:t>
+            </a:r>
+            <a:r>
+              <a:rPr lang="ko-KR" altLang="en-US" sz="1400" dirty="0">
+                <a:solidFill>
+                  <a:schemeClr val="tx1"/>
+                </a:solidFill>
+                <a:latin typeface="+mn-ea"/>
+              </a:rPr>
+              <a:t>는 단순하고 효율적인 아키텍처로 대규모 데이터 분석을 지원합니다</a:t>
+            </a:r>
+            <a:r>
+              <a:rPr lang="en-US" altLang="ko-KR" sz="1400" dirty="0">
+                <a:solidFill>
+                  <a:schemeClr val="tx1"/>
+                </a:solidFill>
+                <a:latin typeface="+mn-ea"/>
+              </a:rPr>
+              <a:t>.</a:t>
+            </a:r>
+          </a:p>
+        </p:txBody>
+      </p:sp>
+      <p:sp>
+        <p:nvSpPr>
+          <p:cNvPr id="20" name="직사각형 19"/>
+          <p:cNvSpPr/>
+          <p:nvPr/>
+        </p:nvSpPr>
+        <p:spPr>
+          <a:xfrm>
+            <a:off x="407534" y="785585"/>
+            <a:ext cx="9312729" cy="1054100"/>
+          </a:xfrm>
+          <a:prstGeom prst="rect">
+            <a:avLst/>
+          </a:prstGeom>
+          <a:noFill/>
+          <a:ln>
+            <a:noFill/>
+          </a:ln>
+        </p:spPr>
+        <p:style>
+          <a:lnRef idx="2">
+            <a:schemeClr val="accent1">
+              <a:shade val="50000"/>
+            </a:schemeClr>
+          </a:lnRef>
+          <a:fillRef idx="1">
+            <a:schemeClr val="accent1"/>
+          </a:fillRef>
+          <a:effectRef idx="0">
+            <a:schemeClr val="accent1"/>
+          </a:effectRef>
+          <a:fontRef idx="minor">
+            <a:schemeClr val="lt1"/>
+          </a:fontRef>
+        </p:style>
+        <p:txBody>
+          <a:bodyPr rtlCol="0" anchor="ctr"/>
+          <a:lstStyle/>
+          <a:p>
+            <a:r>
+              <a:rPr lang="en-US" altLang="ko-KR" sz="1600" b="1" dirty="0" smtClean="0">
+                <a:solidFill>
+                  <a:schemeClr val="tx1"/>
+                </a:solidFill>
+                <a:latin typeface="+mn-ea"/>
+              </a:rPr>
+              <a:t>Pure-MPP (Massively Parallel Processing)</a:t>
+            </a:r>
+            <a:br>
+              <a:rPr lang="en-US" altLang="ko-KR" sz="1600" b="1" dirty="0" smtClean="0">
+                <a:solidFill>
+                  <a:schemeClr val="tx1"/>
+                </a:solidFill>
+                <a:latin typeface="+mn-ea"/>
+              </a:rPr>
+            </a:br>
+            <a:r>
+              <a:rPr lang="en-US" altLang="ko-KR" sz="1400" dirty="0" err="1">
+                <a:solidFill>
+                  <a:schemeClr val="tx1"/>
+                </a:solidFill>
+                <a:latin typeface="+mn-ea"/>
+              </a:rPr>
+              <a:t>Vertica</a:t>
+            </a:r>
+            <a:r>
+              <a:rPr lang="ko-KR" altLang="en-US" sz="1400" dirty="0">
+                <a:solidFill>
+                  <a:schemeClr val="tx1"/>
+                </a:solidFill>
+                <a:latin typeface="+mn-ea"/>
+              </a:rPr>
+              <a:t>는 별도의 마스터 </a:t>
+            </a:r>
+            <a:r>
+              <a:rPr lang="ko-KR" altLang="en-US" sz="1400" dirty="0" err="1">
+                <a:solidFill>
+                  <a:schemeClr val="tx1"/>
+                </a:solidFill>
+                <a:latin typeface="+mn-ea"/>
+              </a:rPr>
+              <a:t>노드를</a:t>
+            </a:r>
+            <a:r>
+              <a:rPr lang="ko-KR" altLang="en-US" sz="1400" dirty="0">
+                <a:solidFill>
+                  <a:schemeClr val="tx1"/>
+                </a:solidFill>
+                <a:latin typeface="+mn-ea"/>
+              </a:rPr>
+              <a:t> 분리하지 않고 모든 </a:t>
+            </a:r>
+            <a:r>
+              <a:rPr lang="ko-KR" altLang="en-US" sz="1400" dirty="0" err="1">
+                <a:solidFill>
+                  <a:schemeClr val="tx1"/>
+                </a:solidFill>
+                <a:latin typeface="+mn-ea"/>
+              </a:rPr>
+              <a:t>노드가</a:t>
+            </a:r>
+            <a:r>
+              <a:rPr lang="ko-KR" altLang="en-US" sz="1400" dirty="0">
+                <a:solidFill>
+                  <a:schemeClr val="tx1"/>
+                </a:solidFill>
+                <a:latin typeface="+mn-ea"/>
+              </a:rPr>
+              <a:t> 동일한 역할을 수행하는 </a:t>
+            </a:r>
+            <a:r>
+              <a:rPr lang="en-US" altLang="ko-KR" sz="1400" dirty="0">
+                <a:solidFill>
+                  <a:schemeClr val="tx1"/>
+                </a:solidFill>
+                <a:latin typeface="+mn-ea"/>
+              </a:rPr>
+              <a:t>pure-MPP </a:t>
+            </a:r>
+            <a:r>
+              <a:rPr lang="ko-KR" altLang="en-US" sz="1400" dirty="0">
+                <a:solidFill>
+                  <a:schemeClr val="tx1"/>
+                </a:solidFill>
+                <a:latin typeface="+mn-ea"/>
+              </a:rPr>
+              <a:t>구조입니다</a:t>
+            </a:r>
+            <a:r>
+              <a:rPr lang="en-US" altLang="ko-KR" sz="1400" dirty="0">
+                <a:solidFill>
+                  <a:schemeClr val="tx1"/>
+                </a:solidFill>
+                <a:latin typeface="+mn-ea"/>
+              </a:rPr>
+              <a:t>.</a:t>
+            </a:r>
+          </a:p>
+          <a:p>
+            <a:r>
+              <a:rPr lang="ko-KR" altLang="en-US" sz="1400" dirty="0">
+                <a:solidFill>
+                  <a:schemeClr val="tx1"/>
+                </a:solidFill>
+                <a:latin typeface="+mn-ea"/>
+              </a:rPr>
+              <a:t>또한 클러스터 구성이나 </a:t>
+            </a:r>
+            <a:r>
+              <a:rPr lang="ko-KR" altLang="en-US" sz="1400" dirty="0" err="1">
+                <a:solidFill>
+                  <a:schemeClr val="tx1"/>
+                </a:solidFill>
+                <a:latin typeface="+mn-ea"/>
+              </a:rPr>
+              <a:t>노드</a:t>
+            </a:r>
+            <a:r>
+              <a:rPr lang="ko-KR" altLang="en-US" sz="1400" dirty="0">
+                <a:solidFill>
+                  <a:schemeClr val="tx1"/>
+                </a:solidFill>
+                <a:latin typeface="+mn-ea"/>
+              </a:rPr>
+              <a:t> 구성에 특별한 하드웨어나 소프트웨어를 필요로 하지 않기 때문에 비용적인 강점이 있으며 복잡한 구성이 불필요하여 클러스터 구성 과정이 매우 간단하고 빠릅니다</a:t>
+            </a:r>
+            <a:r>
+              <a:rPr lang="en-US" altLang="ko-KR" sz="1400" dirty="0">
+                <a:solidFill>
+                  <a:schemeClr val="tx1"/>
+                </a:solidFill>
+                <a:latin typeface="+mn-ea"/>
+              </a:rPr>
+              <a:t>.</a:t>
+            </a:r>
+          </a:p>
+        </p:txBody>
+      </p:sp>
+      <p:grpSp>
+        <p:nvGrpSpPr>
+          <p:cNvPr id="21" name="그룹 20"/>
+          <p:cNvGrpSpPr/>
+          <p:nvPr/>
+        </p:nvGrpSpPr>
+        <p:grpSpPr>
+          <a:xfrm>
+            <a:off x="141102" y="1737731"/>
+            <a:ext cx="4366941" cy="2183652"/>
+            <a:chOff x="1088681" y="2547978"/>
+            <a:chExt cx="4366941" cy="2183652"/>
+          </a:xfrm>
+        </p:grpSpPr>
+        <p:grpSp>
+          <p:nvGrpSpPr>
+            <p:cNvPr id="22" name="그룹 21"/>
+            <p:cNvGrpSpPr/>
+            <p:nvPr/>
+          </p:nvGrpSpPr>
+          <p:grpSpPr>
+            <a:xfrm>
+              <a:off x="1088681" y="2986780"/>
+              <a:ext cx="4366941" cy="1744850"/>
+              <a:chOff x="1088681" y="2986780"/>
+              <a:chExt cx="4366941" cy="1744850"/>
+            </a:xfrm>
+          </p:grpSpPr>
+          <p:grpSp>
+            <p:nvGrpSpPr>
+              <p:cNvPr id="24" name="그룹 54"/>
+              <p:cNvGrpSpPr/>
+              <p:nvPr/>
+            </p:nvGrpSpPr>
+            <p:grpSpPr>
+              <a:xfrm>
+                <a:off x="2666944" y="2986780"/>
+                <a:ext cx="1463020" cy="1704455"/>
+                <a:chOff x="2763035" y="2506034"/>
+                <a:chExt cx="1594245" cy="1723318"/>
+              </a:xfrm>
+            </p:grpSpPr>
+            <p:sp>
+              <p:nvSpPr>
+                <p:cNvPr id="50" name="Rounded Rectangle 32"/>
+                <p:cNvSpPr/>
+                <p:nvPr/>
+              </p:nvSpPr>
+              <p:spPr>
+                <a:xfrm>
+                  <a:off x="2859399" y="3549755"/>
+                  <a:ext cx="418641" cy="415092"/>
+                </a:xfrm>
+                <a:prstGeom prst="roundRect">
+                  <a:avLst/>
+                </a:prstGeom>
+                <a:solidFill>
+                  <a:srgbClr val="F47E65"/>
+                </a:solidFill>
+                <a:ln>
+                  <a:noFill/>
+                </a:ln>
+                <a:effectLst/>
+              </p:spPr>
+              <p:style>
+                <a:lnRef idx="1">
+                  <a:schemeClr val="accent1"/>
+                </a:lnRef>
+                <a:fillRef idx="3">
+                  <a:schemeClr val="accent1"/>
+                </a:fillRef>
+                <a:effectRef idx="2">
+                  <a:schemeClr val="accent1"/>
+                </a:effectRef>
+                <a:fontRef idx="minor">
+                  <a:schemeClr val="lt1"/>
+                </a:fontRef>
+              </p:style>
+              <p:txBody>
+                <a:bodyPr rtlCol="0" anchor="ctr"/>
+                <a:lstStyle/>
+                <a:p>
+                  <a:pPr algn="ctr"/>
+                  <a:endParaRPr lang="en-US" sz="1100">
+                    <a:latin typeface="+mn-ea"/>
+                  </a:endParaRPr>
+                </a:p>
+              </p:txBody>
+            </p:sp>
+            <p:sp>
+              <p:nvSpPr>
+                <p:cNvPr id="51" name="Rounded Rectangle 33"/>
+                <p:cNvSpPr/>
+                <p:nvPr/>
+              </p:nvSpPr>
+              <p:spPr>
+                <a:xfrm>
+                  <a:off x="3362503" y="3549755"/>
+                  <a:ext cx="418641" cy="415092"/>
+                </a:xfrm>
+                <a:prstGeom prst="roundRect">
+                  <a:avLst/>
+                </a:prstGeom>
+                <a:solidFill>
+                  <a:srgbClr val="F47E65"/>
+                </a:solidFill>
+                <a:ln>
+                  <a:noFill/>
+                </a:ln>
+                <a:effectLst/>
+              </p:spPr>
+              <p:style>
+                <a:lnRef idx="1">
+                  <a:schemeClr val="accent1"/>
+                </a:lnRef>
+                <a:fillRef idx="3">
+                  <a:schemeClr val="accent1"/>
+                </a:fillRef>
+                <a:effectRef idx="2">
+                  <a:schemeClr val="accent1"/>
+                </a:effectRef>
+                <a:fontRef idx="minor">
+                  <a:schemeClr val="lt1"/>
+                </a:fontRef>
+              </p:style>
+              <p:txBody>
+                <a:bodyPr rtlCol="0" anchor="ctr"/>
+                <a:lstStyle/>
+                <a:p>
+                  <a:pPr algn="ctr"/>
+                  <a:endParaRPr lang="en-US" sz="1100">
+                    <a:latin typeface="+mn-ea"/>
+                  </a:endParaRPr>
+                </a:p>
+              </p:txBody>
+            </p:sp>
+            <p:sp>
+              <p:nvSpPr>
+                <p:cNvPr id="52" name="Rounded Rectangle 34"/>
+                <p:cNvSpPr/>
+                <p:nvPr/>
+              </p:nvSpPr>
+              <p:spPr>
+                <a:xfrm>
+                  <a:off x="3865607" y="3549755"/>
+                  <a:ext cx="418641" cy="415092"/>
+                </a:xfrm>
+                <a:prstGeom prst="roundRect">
+                  <a:avLst/>
+                </a:prstGeom>
+                <a:solidFill>
+                  <a:srgbClr val="F47E65"/>
+                </a:solidFill>
+                <a:ln>
+                  <a:noFill/>
+                </a:ln>
+                <a:effectLst/>
+              </p:spPr>
+              <p:style>
+                <a:lnRef idx="1">
+                  <a:schemeClr val="accent1"/>
+                </a:lnRef>
+                <a:fillRef idx="3">
+                  <a:schemeClr val="accent1"/>
+                </a:fillRef>
+                <a:effectRef idx="2">
+                  <a:schemeClr val="accent1"/>
+                </a:effectRef>
+                <a:fontRef idx="minor">
+                  <a:schemeClr val="lt1"/>
+                </a:fontRef>
+              </p:style>
+              <p:txBody>
+                <a:bodyPr rtlCol="0" anchor="ctr"/>
+                <a:lstStyle/>
+                <a:p>
+                  <a:pPr algn="ctr"/>
+                  <a:endParaRPr lang="en-US" sz="1100">
+                    <a:latin typeface="+mn-ea"/>
+                  </a:endParaRPr>
+                </a:p>
+              </p:txBody>
+            </p:sp>
+            <p:cxnSp>
+              <p:nvCxnSpPr>
+                <p:cNvPr id="53" name="Straight Connector 35"/>
+                <p:cNvCxnSpPr>
+                  <a:endCxn id="50" idx="0"/>
+                </p:cNvCxnSpPr>
+                <p:nvPr/>
+              </p:nvCxnSpPr>
+              <p:spPr>
+                <a:xfrm>
+                  <a:off x="3068719" y="3406619"/>
+                  <a:ext cx="1" cy="143136"/>
+                </a:xfrm>
+                <a:prstGeom prst="line">
+                  <a:avLst/>
+                </a:prstGeom>
+                <a:ln w="28575" cmpd="sng">
+                  <a:solidFill>
+                    <a:srgbClr val="FF0000"/>
+                  </a:solidFill>
+                </a:ln>
+                <a:effectLst/>
+              </p:spPr>
+              <p:style>
+                <a:lnRef idx="2">
+                  <a:schemeClr val="accent1"/>
+                </a:lnRef>
+                <a:fillRef idx="0">
+                  <a:schemeClr val="accent1"/>
+                </a:fillRef>
+                <a:effectRef idx="1">
+                  <a:schemeClr val="accent1"/>
+                </a:effectRef>
+                <a:fontRef idx="minor">
+                  <a:schemeClr val="tx1"/>
+                </a:fontRef>
+              </p:style>
+            </p:cxnSp>
+            <p:cxnSp>
+              <p:nvCxnSpPr>
+                <p:cNvPr id="54" name="Straight Connector 36"/>
+                <p:cNvCxnSpPr/>
+                <p:nvPr/>
+              </p:nvCxnSpPr>
+              <p:spPr>
+                <a:xfrm>
+                  <a:off x="3571822" y="3406619"/>
+                  <a:ext cx="0" cy="162043"/>
+                </a:xfrm>
+                <a:prstGeom prst="line">
+                  <a:avLst/>
+                </a:prstGeom>
+                <a:ln w="28575" cmpd="sng">
+                  <a:solidFill>
+                    <a:srgbClr val="FF0000"/>
+                  </a:solidFill>
+                </a:ln>
+                <a:effectLst/>
+              </p:spPr>
+              <p:style>
+                <a:lnRef idx="2">
+                  <a:schemeClr val="accent1"/>
+                </a:lnRef>
+                <a:fillRef idx="0">
+                  <a:schemeClr val="accent1"/>
+                </a:fillRef>
+                <a:effectRef idx="1">
+                  <a:schemeClr val="accent1"/>
+                </a:effectRef>
+                <a:fontRef idx="minor">
+                  <a:schemeClr val="tx1"/>
+                </a:fontRef>
+              </p:style>
+            </p:cxnSp>
+            <p:cxnSp>
+              <p:nvCxnSpPr>
+                <p:cNvPr id="55" name="Straight Connector 37"/>
+                <p:cNvCxnSpPr/>
+                <p:nvPr/>
+              </p:nvCxnSpPr>
+              <p:spPr>
+                <a:xfrm>
+                  <a:off x="4074927" y="3406619"/>
+                  <a:ext cx="0" cy="162043"/>
+                </a:xfrm>
+                <a:prstGeom prst="line">
+                  <a:avLst/>
+                </a:prstGeom>
+                <a:ln w="28575" cmpd="sng">
+                  <a:solidFill>
+                    <a:srgbClr val="FF0000"/>
+                  </a:solidFill>
+                </a:ln>
+                <a:effectLst/>
+              </p:spPr>
+              <p:style>
+                <a:lnRef idx="2">
+                  <a:schemeClr val="accent1"/>
+                </a:lnRef>
+                <a:fillRef idx="0">
+                  <a:schemeClr val="accent1"/>
+                </a:fillRef>
+                <a:effectRef idx="1">
+                  <a:schemeClr val="accent1"/>
+                </a:effectRef>
+                <a:fontRef idx="minor">
+                  <a:schemeClr val="tx1"/>
+                </a:fontRef>
+              </p:style>
+            </p:cxnSp>
+            <p:sp>
+              <p:nvSpPr>
+                <p:cNvPr id="56" name="Rounded Rectangle 38"/>
+                <p:cNvSpPr/>
+                <p:nvPr/>
+              </p:nvSpPr>
+              <p:spPr>
+                <a:xfrm>
+                  <a:off x="3068720" y="2831866"/>
+                  <a:ext cx="418641" cy="415092"/>
+                </a:xfrm>
+                <a:prstGeom prst="roundRect">
+                  <a:avLst/>
+                </a:prstGeom>
+                <a:solidFill>
+                  <a:srgbClr val="F47E65"/>
+                </a:solidFill>
+                <a:ln>
+                  <a:noFill/>
+                </a:ln>
+                <a:effectLst/>
+              </p:spPr>
+              <p:style>
+                <a:lnRef idx="1">
+                  <a:schemeClr val="accent1"/>
+                </a:lnRef>
+                <a:fillRef idx="3">
+                  <a:schemeClr val="accent1"/>
+                </a:fillRef>
+                <a:effectRef idx="2">
+                  <a:schemeClr val="accent1"/>
+                </a:effectRef>
+                <a:fontRef idx="minor">
+                  <a:schemeClr val="lt1"/>
+                </a:fontRef>
+              </p:style>
+              <p:txBody>
+                <a:bodyPr rtlCol="0" anchor="ctr"/>
+                <a:lstStyle/>
+                <a:p>
+                  <a:pPr algn="ctr"/>
+                  <a:endParaRPr lang="en-US" sz="1100">
+                    <a:latin typeface="+mn-ea"/>
+                  </a:endParaRPr>
+                </a:p>
+              </p:txBody>
+            </p:sp>
+            <p:cxnSp>
+              <p:nvCxnSpPr>
+                <p:cNvPr id="57" name="Straight Connector 39"/>
+                <p:cNvCxnSpPr/>
+                <p:nvPr/>
+              </p:nvCxnSpPr>
+              <p:spPr>
+                <a:xfrm>
+                  <a:off x="3278040" y="3246958"/>
+                  <a:ext cx="1" cy="159661"/>
+                </a:xfrm>
+                <a:prstGeom prst="line">
+                  <a:avLst/>
+                </a:prstGeom>
+                <a:ln w="28575" cmpd="sng">
+                  <a:solidFill>
+                    <a:srgbClr val="FF0000"/>
+                  </a:solidFill>
+                </a:ln>
+                <a:effectLst/>
+              </p:spPr>
+              <p:style>
+                <a:lnRef idx="2">
+                  <a:schemeClr val="accent1"/>
+                </a:lnRef>
+                <a:fillRef idx="0">
+                  <a:schemeClr val="accent1"/>
+                </a:fillRef>
+                <a:effectRef idx="1">
+                  <a:schemeClr val="accent1"/>
+                </a:effectRef>
+                <a:fontRef idx="minor">
+                  <a:schemeClr val="tx1"/>
+                </a:fontRef>
+              </p:style>
+            </p:cxnSp>
+            <p:cxnSp>
+              <p:nvCxnSpPr>
+                <p:cNvPr id="58" name="Straight Connector 40"/>
+                <p:cNvCxnSpPr>
+                  <a:stCxn id="59" idx="2"/>
+                </p:cNvCxnSpPr>
+                <p:nvPr/>
+              </p:nvCxnSpPr>
+              <p:spPr>
+                <a:xfrm>
+                  <a:off x="3823376" y="3246958"/>
+                  <a:ext cx="3626" cy="159661"/>
+                </a:xfrm>
+                <a:prstGeom prst="line">
+                  <a:avLst/>
+                </a:prstGeom>
+                <a:ln w="28575" cmpd="sng">
+                  <a:solidFill>
+                    <a:srgbClr val="FF0000"/>
+                  </a:solidFill>
+                </a:ln>
+                <a:effectLst/>
+              </p:spPr>
+              <p:style>
+                <a:lnRef idx="2">
+                  <a:schemeClr val="accent1"/>
+                </a:lnRef>
+                <a:fillRef idx="0">
+                  <a:schemeClr val="accent1"/>
+                </a:fillRef>
+                <a:effectRef idx="1">
+                  <a:schemeClr val="accent1"/>
+                </a:effectRef>
+                <a:fontRef idx="minor">
+                  <a:schemeClr val="tx1"/>
+                </a:fontRef>
+              </p:style>
+            </p:cxnSp>
+            <p:sp>
+              <p:nvSpPr>
+                <p:cNvPr id="59" name="Rounded Rectangle 41"/>
+                <p:cNvSpPr/>
+                <p:nvPr/>
+              </p:nvSpPr>
+              <p:spPr>
+                <a:xfrm>
+                  <a:off x="3614055" y="2831866"/>
+                  <a:ext cx="418641" cy="415092"/>
+                </a:xfrm>
+                <a:prstGeom prst="roundRect">
+                  <a:avLst/>
+                </a:prstGeom>
+                <a:solidFill>
+                  <a:srgbClr val="F47E65"/>
+                </a:solidFill>
+                <a:ln>
+                  <a:noFill/>
+                </a:ln>
+                <a:effectLst/>
+              </p:spPr>
+              <p:style>
+                <a:lnRef idx="1">
+                  <a:schemeClr val="accent1"/>
+                </a:lnRef>
+                <a:fillRef idx="3">
+                  <a:schemeClr val="accent1"/>
+                </a:fillRef>
+                <a:effectRef idx="2">
+                  <a:schemeClr val="accent1"/>
+                </a:effectRef>
+                <a:fontRef idx="minor">
+                  <a:schemeClr val="lt1"/>
+                </a:fontRef>
+              </p:style>
+              <p:txBody>
+                <a:bodyPr rtlCol="0" anchor="ctr"/>
+                <a:lstStyle/>
+                <a:p>
+                  <a:pPr algn="ctr"/>
+                  <a:endParaRPr lang="en-US" sz="1100">
+                    <a:latin typeface="+mn-ea"/>
+                  </a:endParaRPr>
+                </a:p>
+              </p:txBody>
+            </p:sp>
+            <p:sp>
+              <p:nvSpPr>
+                <p:cNvPr id="60" name="TextBox 59"/>
+                <p:cNvSpPr txBox="1"/>
+                <p:nvPr/>
+              </p:nvSpPr>
+              <p:spPr>
+                <a:xfrm>
+                  <a:off x="3095658" y="2506034"/>
+                  <a:ext cx="945359" cy="264505"/>
+                </a:xfrm>
+                <a:prstGeom prst="rect">
+                  <a:avLst/>
+                </a:prstGeom>
+                <a:noFill/>
+              </p:spPr>
+              <p:txBody>
+                <a:bodyPr wrap="none" rtlCol="0">
+                  <a:spAutoFit/>
+                </a:bodyPr>
+                <a:lstStyle/>
+                <a:p>
+                  <a:pPr defTabSz="430213">
+                    <a:spcAft>
+                      <a:spcPts val="400"/>
+                    </a:spcAft>
+                    <a:buSzPct val="100000"/>
+                  </a:pPr>
+                  <a:r>
+                    <a:rPr lang="en-US" sz="1100" b="1" dirty="0">
+                      <a:latin typeface="+mn-ea"/>
+                      <a:cs typeface="HP Simplified" pitchFamily="34" charset="0"/>
+                    </a:rPr>
+                    <a:t>DB Server</a:t>
+                  </a:r>
+                </a:p>
+              </p:txBody>
+            </p:sp>
+            <p:sp>
+              <p:nvSpPr>
+                <p:cNvPr id="61" name="TextBox 60"/>
+                <p:cNvSpPr txBox="1"/>
+                <p:nvPr/>
+              </p:nvSpPr>
+              <p:spPr>
+                <a:xfrm>
+                  <a:off x="3062564" y="3964847"/>
+                  <a:ext cx="1294716" cy="264505"/>
+                </a:xfrm>
+                <a:prstGeom prst="rect">
+                  <a:avLst/>
+                </a:prstGeom>
+                <a:noFill/>
+              </p:spPr>
+              <p:txBody>
+                <a:bodyPr wrap="none" rtlCol="0">
+                  <a:spAutoFit/>
+                </a:bodyPr>
+                <a:lstStyle/>
+                <a:p>
+                  <a:pPr defTabSz="430213">
+                    <a:spcAft>
+                      <a:spcPts val="400"/>
+                    </a:spcAft>
+                    <a:buSzPct val="100000"/>
+                  </a:pPr>
+                  <a:r>
+                    <a:rPr lang="en-US" sz="1100" b="1" dirty="0">
+                      <a:latin typeface="+mn-ea"/>
+                      <a:cs typeface="HP Simplified" pitchFamily="34" charset="0"/>
+                    </a:rPr>
+                    <a:t>Storage Server</a:t>
+                  </a:r>
+                </a:p>
+              </p:txBody>
+            </p:sp>
+            <p:sp>
+              <p:nvSpPr>
+                <p:cNvPr id="62" name="Rounded Rectangle 44"/>
+                <p:cNvSpPr/>
+                <p:nvPr/>
+              </p:nvSpPr>
+              <p:spPr>
+                <a:xfrm>
+                  <a:off x="2763035" y="3333144"/>
+                  <a:ext cx="1586536" cy="146950"/>
+                </a:xfrm>
+                <a:prstGeom prst="roundRect">
+                  <a:avLst/>
+                </a:prstGeom>
+                <a:solidFill>
+                  <a:srgbClr val="F05332"/>
+                </a:solidFill>
+                <a:ln>
+                  <a:noFill/>
+                </a:ln>
+                <a:effectLst/>
+              </p:spPr>
+              <p:style>
+                <a:lnRef idx="1">
+                  <a:schemeClr val="accent1"/>
+                </a:lnRef>
+                <a:fillRef idx="3">
+                  <a:schemeClr val="accent1"/>
+                </a:fillRef>
+                <a:effectRef idx="2">
+                  <a:schemeClr val="accent1"/>
+                </a:effectRef>
+                <a:fontRef idx="minor">
+                  <a:schemeClr val="lt1"/>
+                </a:fontRef>
+              </p:style>
+              <p:txBody>
+                <a:bodyPr rtlCol="0" anchor="ctr"/>
+                <a:lstStyle/>
+                <a:p>
+                  <a:pPr algn="ctr"/>
+                  <a:r>
+                    <a:rPr lang="en-US" sz="1000" dirty="0" err="1">
+                      <a:latin typeface="+mn-ea"/>
+                    </a:rPr>
+                    <a:t>InfiniBand</a:t>
+                  </a:r>
+                  <a:endParaRPr lang="en-US" sz="1000" dirty="0">
+                    <a:latin typeface="+mn-ea"/>
+                  </a:endParaRPr>
+                </a:p>
+              </p:txBody>
+            </p:sp>
+            <p:sp>
+              <p:nvSpPr>
+                <p:cNvPr id="63" name="Rounded Rectangle 45"/>
+                <p:cNvSpPr/>
+                <p:nvPr/>
+              </p:nvSpPr>
+              <p:spPr>
+                <a:xfrm>
+                  <a:off x="2905511" y="3591293"/>
+                  <a:ext cx="301791" cy="121280"/>
+                </a:xfrm>
+                <a:prstGeom prst="roundRect">
+                  <a:avLst/>
+                </a:prstGeom>
+                <a:solidFill>
+                  <a:srgbClr val="FBD4C0"/>
+                </a:solidFill>
+                <a:ln>
+                  <a:noFill/>
+                </a:ln>
+                <a:effectLst/>
+              </p:spPr>
+              <p:style>
+                <a:lnRef idx="1">
+                  <a:schemeClr val="accent1"/>
+                </a:lnRef>
+                <a:fillRef idx="3">
+                  <a:schemeClr val="accent1"/>
+                </a:fillRef>
+                <a:effectRef idx="2">
+                  <a:schemeClr val="accent1"/>
+                </a:effectRef>
+                <a:fontRef idx="minor">
+                  <a:schemeClr val="lt1"/>
+                </a:fontRef>
+              </p:style>
+              <p:txBody>
+                <a:bodyPr lIns="0" rIns="0" rtlCol="0" anchor="ctr"/>
+                <a:lstStyle/>
+                <a:p>
+                  <a:pPr algn="ctr"/>
+                  <a:r>
+                    <a:rPr lang="en-US" sz="1000" dirty="0">
+                      <a:solidFill>
+                        <a:srgbClr val="FF0000"/>
+                      </a:solidFill>
+                      <a:latin typeface="+mn-ea"/>
+                    </a:rPr>
+                    <a:t>SSD</a:t>
+                  </a:r>
+                </a:p>
+              </p:txBody>
+            </p:sp>
+            <p:sp>
+              <p:nvSpPr>
+                <p:cNvPr id="64" name="Rounded Rectangle 46"/>
+                <p:cNvSpPr/>
+                <p:nvPr/>
+              </p:nvSpPr>
+              <p:spPr>
+                <a:xfrm>
+                  <a:off x="3420928" y="3591293"/>
+                  <a:ext cx="301791" cy="121280"/>
+                </a:xfrm>
+                <a:prstGeom prst="roundRect">
+                  <a:avLst/>
+                </a:prstGeom>
+                <a:solidFill>
+                  <a:srgbClr val="FBD4C0"/>
+                </a:solidFill>
+                <a:ln>
+                  <a:noFill/>
+                </a:ln>
+                <a:effectLst/>
+              </p:spPr>
+              <p:style>
+                <a:lnRef idx="1">
+                  <a:schemeClr val="accent1"/>
+                </a:lnRef>
+                <a:fillRef idx="3">
+                  <a:schemeClr val="accent1"/>
+                </a:fillRef>
+                <a:effectRef idx="2">
+                  <a:schemeClr val="accent1"/>
+                </a:effectRef>
+                <a:fontRef idx="minor">
+                  <a:schemeClr val="lt1"/>
+                </a:fontRef>
+              </p:style>
+              <p:txBody>
+                <a:bodyPr lIns="0" rIns="0" rtlCol="0" anchor="ctr"/>
+                <a:lstStyle/>
+                <a:p>
+                  <a:pPr algn="ctr"/>
+                  <a:r>
+                    <a:rPr lang="en-US" sz="1000" dirty="0">
+                      <a:solidFill>
+                        <a:srgbClr val="FF0000"/>
+                      </a:solidFill>
+                      <a:latin typeface="+mn-ea"/>
+                    </a:rPr>
+                    <a:t>SSD</a:t>
+                  </a:r>
+                </a:p>
+              </p:txBody>
+            </p:sp>
+            <p:sp>
+              <p:nvSpPr>
+                <p:cNvPr id="65" name="Rounded Rectangle 47"/>
+                <p:cNvSpPr/>
+                <p:nvPr/>
+              </p:nvSpPr>
+              <p:spPr>
+                <a:xfrm>
+                  <a:off x="3924031" y="3591293"/>
+                  <a:ext cx="301791" cy="121280"/>
+                </a:xfrm>
+                <a:prstGeom prst="roundRect">
+                  <a:avLst/>
+                </a:prstGeom>
+                <a:solidFill>
+                  <a:srgbClr val="FBD4C0"/>
+                </a:solidFill>
+                <a:ln>
+                  <a:noFill/>
+                </a:ln>
+                <a:effectLst/>
+              </p:spPr>
+              <p:style>
+                <a:lnRef idx="1">
+                  <a:schemeClr val="accent1"/>
+                </a:lnRef>
+                <a:fillRef idx="3">
+                  <a:schemeClr val="accent1"/>
+                </a:fillRef>
+                <a:effectRef idx="2">
+                  <a:schemeClr val="accent1"/>
+                </a:effectRef>
+                <a:fontRef idx="minor">
+                  <a:schemeClr val="lt1"/>
+                </a:fontRef>
+              </p:style>
+              <p:txBody>
+                <a:bodyPr lIns="0" rIns="0" rtlCol="0" anchor="ctr"/>
+                <a:lstStyle/>
+                <a:p>
+                  <a:pPr algn="ctr"/>
+                  <a:r>
+                    <a:rPr lang="en-US" sz="1000" dirty="0">
+                      <a:solidFill>
+                        <a:srgbClr val="FF0000"/>
+                      </a:solidFill>
+                      <a:latin typeface="+mn-ea"/>
+                    </a:rPr>
+                    <a:t>SSD</a:t>
+                  </a:r>
+                </a:p>
+              </p:txBody>
+            </p:sp>
+          </p:grpSp>
+          <p:grpSp>
+            <p:nvGrpSpPr>
+              <p:cNvPr id="25" name="그룹 24"/>
+              <p:cNvGrpSpPr/>
+              <p:nvPr/>
+            </p:nvGrpSpPr>
+            <p:grpSpPr>
+              <a:xfrm>
+                <a:off x="1088681" y="2990108"/>
+                <a:ext cx="1307567" cy="1741522"/>
+                <a:chOff x="1088681" y="2990108"/>
+                <a:chExt cx="1307567" cy="1741522"/>
+              </a:xfrm>
+            </p:grpSpPr>
+            <p:sp>
+              <p:nvSpPr>
+                <p:cNvPr id="35" name="TextBox 34"/>
+                <p:cNvSpPr txBox="1"/>
+                <p:nvPr/>
+              </p:nvSpPr>
+              <p:spPr>
+                <a:xfrm>
+                  <a:off x="1237358" y="2990108"/>
+                  <a:ext cx="1122423" cy="261610"/>
+                </a:xfrm>
+                <a:prstGeom prst="rect">
+                  <a:avLst/>
+                </a:prstGeom>
+                <a:noFill/>
+              </p:spPr>
+              <p:txBody>
+                <a:bodyPr wrap="none" rtlCol="0">
+                  <a:spAutoFit/>
+                </a:bodyPr>
+                <a:lstStyle/>
+                <a:p>
+                  <a:pPr defTabSz="430213">
+                    <a:spcAft>
+                      <a:spcPts val="400"/>
+                    </a:spcAft>
+                    <a:buSzPct val="100000"/>
+                  </a:pPr>
+                  <a:r>
+                    <a:rPr lang="en-US" altLang="ko-KR" sz="1100" b="1" dirty="0">
+                      <a:latin typeface="+mn-ea"/>
+                      <a:cs typeface="HP Simplified" pitchFamily="34" charset="0"/>
+                    </a:rPr>
+                    <a:t>Master Server</a:t>
+                  </a:r>
+                  <a:endParaRPr lang="en-US" sz="1100" b="1" dirty="0">
+                    <a:latin typeface="+mn-ea"/>
+                    <a:cs typeface="HP Simplified" pitchFamily="34" charset="0"/>
+                  </a:endParaRPr>
+                </a:p>
+              </p:txBody>
+            </p:sp>
+            <p:grpSp>
+              <p:nvGrpSpPr>
+                <p:cNvPr id="36" name="그룹 35"/>
+                <p:cNvGrpSpPr/>
+                <p:nvPr/>
+              </p:nvGrpSpPr>
+              <p:grpSpPr>
+                <a:xfrm>
+                  <a:off x="1088681" y="3332572"/>
+                  <a:ext cx="1307567" cy="1120580"/>
+                  <a:chOff x="1088681" y="3332572"/>
+                  <a:chExt cx="1307567" cy="1120580"/>
+                </a:xfrm>
+              </p:grpSpPr>
+              <p:sp>
+                <p:nvSpPr>
+                  <p:cNvPr id="38" name="Rounded Rectangle 19"/>
+                  <p:cNvSpPr/>
+                  <p:nvPr/>
+                </p:nvSpPr>
+                <p:spPr>
+                  <a:xfrm>
+                    <a:off x="1088681" y="4042603"/>
+                    <a:ext cx="384182" cy="410549"/>
+                  </a:xfrm>
+                  <a:prstGeom prst="roundRect">
+                    <a:avLst/>
+                  </a:prstGeom>
+                  <a:solidFill>
+                    <a:srgbClr val="92D050"/>
+                  </a:solidFill>
+                  <a:ln>
+                    <a:noFill/>
+                  </a:ln>
+                  <a:effectLst/>
+                </p:spPr>
+                <p:style>
+                  <a:lnRef idx="1">
+                    <a:schemeClr val="accent1"/>
+                  </a:lnRef>
+                  <a:fillRef idx="3">
+                    <a:schemeClr val="accent1"/>
+                  </a:fillRef>
+                  <a:effectRef idx="2">
+                    <a:schemeClr val="accent1"/>
+                  </a:effectRef>
+                  <a:fontRef idx="minor">
+                    <a:schemeClr val="lt1"/>
+                  </a:fontRef>
+                </p:style>
+                <p:txBody>
+                  <a:bodyPr rtlCol="0" anchor="ctr"/>
+                  <a:lstStyle/>
+                  <a:p>
+                    <a:pPr algn="ctr"/>
+                    <a:endParaRPr lang="en-US" sz="1100">
+                      <a:latin typeface="+mn-ea"/>
+                    </a:endParaRPr>
+                  </a:p>
+                </p:txBody>
+              </p:sp>
+              <p:sp>
+                <p:nvSpPr>
+                  <p:cNvPr id="39" name="Rounded Rectangle 20"/>
+                  <p:cNvSpPr/>
+                  <p:nvPr/>
+                </p:nvSpPr>
+                <p:spPr>
+                  <a:xfrm>
+                    <a:off x="1550374" y="4042603"/>
+                    <a:ext cx="384182" cy="410549"/>
+                  </a:xfrm>
+                  <a:prstGeom prst="roundRect">
+                    <a:avLst/>
+                  </a:prstGeom>
+                  <a:solidFill>
+                    <a:srgbClr val="92D050"/>
+                  </a:solidFill>
+                  <a:ln>
+                    <a:noFill/>
+                  </a:ln>
+                  <a:effectLst/>
+                </p:spPr>
+                <p:style>
+                  <a:lnRef idx="1">
+                    <a:schemeClr val="accent1"/>
+                  </a:lnRef>
+                  <a:fillRef idx="3">
+                    <a:schemeClr val="accent1"/>
+                  </a:fillRef>
+                  <a:effectRef idx="2">
+                    <a:schemeClr val="accent1"/>
+                  </a:effectRef>
+                  <a:fontRef idx="minor">
+                    <a:schemeClr val="lt1"/>
+                  </a:fontRef>
+                </p:style>
+                <p:txBody>
+                  <a:bodyPr rtlCol="0" anchor="ctr"/>
+                  <a:lstStyle/>
+                  <a:p>
+                    <a:pPr algn="ctr"/>
+                    <a:endParaRPr lang="en-US" sz="1100">
+                      <a:latin typeface="+mn-ea"/>
+                    </a:endParaRPr>
+                  </a:p>
+                </p:txBody>
+              </p:sp>
+              <p:sp>
+                <p:nvSpPr>
+                  <p:cNvPr id="40" name="Rounded Rectangle 21"/>
+                  <p:cNvSpPr/>
+                  <p:nvPr/>
+                </p:nvSpPr>
+                <p:spPr>
+                  <a:xfrm>
+                    <a:off x="2012066" y="4042603"/>
+                    <a:ext cx="384182" cy="410549"/>
+                  </a:xfrm>
+                  <a:prstGeom prst="roundRect">
+                    <a:avLst/>
+                  </a:prstGeom>
+                  <a:solidFill>
+                    <a:srgbClr val="92D050"/>
+                  </a:solidFill>
+                  <a:ln>
+                    <a:noFill/>
+                  </a:ln>
+                  <a:effectLst/>
+                </p:spPr>
+                <p:style>
+                  <a:lnRef idx="1">
+                    <a:schemeClr val="accent1"/>
+                  </a:lnRef>
+                  <a:fillRef idx="3">
+                    <a:schemeClr val="accent1"/>
+                  </a:fillRef>
+                  <a:effectRef idx="2">
+                    <a:schemeClr val="accent1"/>
+                  </a:effectRef>
+                  <a:fontRef idx="minor">
+                    <a:schemeClr val="lt1"/>
+                  </a:fontRef>
+                </p:style>
+                <p:txBody>
+                  <a:bodyPr rtlCol="0" anchor="ctr"/>
+                  <a:lstStyle/>
+                  <a:p>
+                    <a:pPr algn="ctr"/>
+                    <a:endParaRPr lang="en-US" sz="1100">
+                      <a:latin typeface="+mn-ea"/>
+                    </a:endParaRPr>
+                  </a:p>
+                </p:txBody>
+              </p:sp>
+              <p:cxnSp>
+                <p:nvCxnSpPr>
+                  <p:cNvPr id="41" name="Straight Connector 22"/>
+                  <p:cNvCxnSpPr/>
+                  <p:nvPr/>
+                </p:nvCxnSpPr>
+                <p:spPr>
+                  <a:xfrm>
+                    <a:off x="1088681" y="3901034"/>
+                    <a:ext cx="1307567" cy="0"/>
+                  </a:xfrm>
+                  <a:prstGeom prst="line">
+                    <a:avLst/>
+                  </a:prstGeom>
+                  <a:ln w="28575" cmpd="sng">
+                    <a:solidFill>
+                      <a:srgbClr val="92D050"/>
+                    </a:solidFill>
+                  </a:ln>
+                  <a:effectLst/>
+                </p:spPr>
+                <p:style>
+                  <a:lnRef idx="2">
+                    <a:schemeClr val="accent1"/>
+                  </a:lnRef>
+                  <a:fillRef idx="0">
+                    <a:schemeClr val="accent1"/>
+                  </a:fillRef>
+                  <a:effectRef idx="1">
+                    <a:schemeClr val="accent1"/>
+                  </a:effectRef>
+                  <a:fontRef idx="minor">
+                    <a:schemeClr val="tx1"/>
+                  </a:fontRef>
+                </p:style>
+              </p:cxnSp>
+              <p:cxnSp>
+                <p:nvCxnSpPr>
+                  <p:cNvPr id="42" name="Straight Connector 23"/>
+                  <p:cNvCxnSpPr>
+                    <a:endCxn id="38" idx="0"/>
+                  </p:cNvCxnSpPr>
+                  <p:nvPr/>
+                </p:nvCxnSpPr>
+                <p:spPr>
+                  <a:xfrm>
+                    <a:off x="1280772" y="3901034"/>
+                    <a:ext cx="1" cy="141569"/>
+                  </a:xfrm>
+                  <a:prstGeom prst="line">
+                    <a:avLst/>
+                  </a:prstGeom>
+                  <a:ln w="28575" cmpd="sng">
+                    <a:solidFill>
+                      <a:srgbClr val="92D050"/>
+                    </a:solidFill>
+                  </a:ln>
+                  <a:effectLst/>
+                </p:spPr>
+                <p:style>
+                  <a:lnRef idx="2">
+                    <a:schemeClr val="accent1"/>
+                  </a:lnRef>
+                  <a:fillRef idx="0">
+                    <a:schemeClr val="accent1"/>
+                  </a:fillRef>
+                  <a:effectRef idx="1">
+                    <a:schemeClr val="accent1"/>
+                  </a:effectRef>
+                  <a:fontRef idx="minor">
+                    <a:schemeClr val="tx1"/>
+                  </a:fontRef>
+                </p:style>
+              </p:cxnSp>
+              <p:cxnSp>
+                <p:nvCxnSpPr>
+                  <p:cNvPr id="43" name="Straight Connector 24"/>
+                  <p:cNvCxnSpPr/>
+                  <p:nvPr/>
+                </p:nvCxnSpPr>
+                <p:spPr>
+                  <a:xfrm>
+                    <a:off x="1742463" y="3901034"/>
+                    <a:ext cx="0" cy="160269"/>
+                  </a:xfrm>
+                  <a:prstGeom prst="line">
+                    <a:avLst/>
+                  </a:prstGeom>
+                  <a:ln w="28575" cmpd="sng">
+                    <a:solidFill>
+                      <a:srgbClr val="92D050"/>
+                    </a:solidFill>
+                  </a:ln>
+                  <a:effectLst/>
+                </p:spPr>
+                <p:style>
+                  <a:lnRef idx="2">
+                    <a:schemeClr val="accent1"/>
+                  </a:lnRef>
+                  <a:fillRef idx="0">
+                    <a:schemeClr val="accent1"/>
+                  </a:fillRef>
+                  <a:effectRef idx="1">
+                    <a:schemeClr val="accent1"/>
+                  </a:effectRef>
+                  <a:fontRef idx="minor">
+                    <a:schemeClr val="tx1"/>
+                  </a:fontRef>
+                </p:style>
+              </p:cxnSp>
+              <p:cxnSp>
+                <p:nvCxnSpPr>
+                  <p:cNvPr id="44" name="Straight Connector 25"/>
+                  <p:cNvCxnSpPr/>
+                  <p:nvPr/>
+                </p:nvCxnSpPr>
+                <p:spPr>
+                  <a:xfrm>
+                    <a:off x="2204157" y="3901034"/>
+                    <a:ext cx="0" cy="160269"/>
+                  </a:xfrm>
+                  <a:prstGeom prst="line">
+                    <a:avLst/>
+                  </a:prstGeom>
+                  <a:ln w="28575" cmpd="sng">
+                    <a:solidFill>
+                      <a:srgbClr val="92D050"/>
+                    </a:solidFill>
+                  </a:ln>
+                  <a:effectLst/>
+                </p:spPr>
+                <p:style>
+                  <a:lnRef idx="2">
+                    <a:schemeClr val="accent1"/>
+                  </a:lnRef>
+                  <a:fillRef idx="0">
+                    <a:schemeClr val="accent1"/>
+                  </a:fillRef>
+                  <a:effectRef idx="1">
+                    <a:schemeClr val="accent1"/>
+                  </a:effectRef>
+                  <a:fontRef idx="minor">
+                    <a:schemeClr val="tx1"/>
+                  </a:fontRef>
+                </p:style>
+              </p:cxnSp>
+              <p:sp>
+                <p:nvSpPr>
+                  <p:cNvPr id="45" name="Rounded Rectangle 26"/>
+                  <p:cNvSpPr/>
+                  <p:nvPr/>
+                </p:nvSpPr>
+                <p:spPr>
+                  <a:xfrm>
+                    <a:off x="1308765" y="3332572"/>
+                    <a:ext cx="384182" cy="410549"/>
+                  </a:xfrm>
+                  <a:prstGeom prst="roundRect">
+                    <a:avLst/>
+                  </a:prstGeom>
+                  <a:solidFill>
+                    <a:srgbClr val="92D050"/>
+                  </a:solidFill>
+                  <a:ln>
+                    <a:noFill/>
+                  </a:ln>
+                  <a:effectLst/>
+                </p:spPr>
+                <p:style>
+                  <a:lnRef idx="1">
+                    <a:schemeClr val="accent1"/>
+                  </a:lnRef>
+                  <a:fillRef idx="3">
+                    <a:schemeClr val="accent1"/>
+                  </a:fillRef>
+                  <a:effectRef idx="2">
+                    <a:schemeClr val="accent1"/>
+                  </a:effectRef>
+                  <a:fontRef idx="minor">
+                    <a:schemeClr val="lt1"/>
+                  </a:fontRef>
+                </p:style>
+                <p:txBody>
+                  <a:bodyPr rtlCol="0" anchor="ctr"/>
+                  <a:lstStyle/>
+                  <a:p>
+                    <a:pPr algn="ctr"/>
+                    <a:endParaRPr lang="en-US" sz="1100">
+                      <a:latin typeface="+mn-ea"/>
+                    </a:endParaRPr>
+                  </a:p>
+                </p:txBody>
+              </p:sp>
+              <p:cxnSp>
+                <p:nvCxnSpPr>
+                  <p:cNvPr id="46" name="Straight Connector 27"/>
+                  <p:cNvCxnSpPr/>
+                  <p:nvPr/>
+                </p:nvCxnSpPr>
+                <p:spPr>
+                  <a:xfrm>
+                    <a:off x="1500856" y="3743121"/>
+                    <a:ext cx="1" cy="157913"/>
+                  </a:xfrm>
+                  <a:prstGeom prst="line">
+                    <a:avLst/>
+                  </a:prstGeom>
+                  <a:ln w="28575" cmpd="sng">
+                    <a:solidFill>
+                      <a:srgbClr val="92D050"/>
+                    </a:solidFill>
+                  </a:ln>
+                  <a:effectLst/>
+                </p:spPr>
+                <p:style>
+                  <a:lnRef idx="2">
+                    <a:schemeClr val="accent1"/>
+                  </a:lnRef>
+                  <a:fillRef idx="0">
+                    <a:schemeClr val="accent1"/>
+                  </a:fillRef>
+                  <a:effectRef idx="1">
+                    <a:schemeClr val="accent1"/>
+                  </a:effectRef>
+                  <a:fontRef idx="minor">
+                    <a:schemeClr val="tx1"/>
+                  </a:fontRef>
+                </p:style>
+              </p:cxnSp>
+              <p:cxnSp>
+                <p:nvCxnSpPr>
+                  <p:cNvPr id="47" name="Straight Connector 28"/>
+                  <p:cNvCxnSpPr>
+                    <a:stCxn id="48" idx="2"/>
+                  </p:cNvCxnSpPr>
+                  <p:nvPr/>
+                </p:nvCxnSpPr>
+                <p:spPr>
+                  <a:xfrm>
+                    <a:off x="2001305" y="3743121"/>
+                    <a:ext cx="3328" cy="157913"/>
+                  </a:xfrm>
+                  <a:prstGeom prst="line">
+                    <a:avLst/>
+                  </a:prstGeom>
+                  <a:ln w="28575" cmpd="sng">
+                    <a:solidFill>
+                      <a:srgbClr val="92D050"/>
+                    </a:solidFill>
+                  </a:ln>
+                  <a:effectLst/>
+                </p:spPr>
+                <p:style>
+                  <a:lnRef idx="2">
+                    <a:schemeClr val="accent1"/>
+                  </a:lnRef>
+                  <a:fillRef idx="0">
+                    <a:schemeClr val="accent1"/>
+                  </a:fillRef>
+                  <a:effectRef idx="1">
+                    <a:schemeClr val="accent1"/>
+                  </a:effectRef>
+                  <a:fontRef idx="minor">
+                    <a:schemeClr val="tx1"/>
+                  </a:fontRef>
+                </p:style>
+              </p:cxnSp>
+              <p:sp>
+                <p:nvSpPr>
+                  <p:cNvPr id="48" name="Rounded Rectangle 29"/>
+                  <p:cNvSpPr/>
+                  <p:nvPr/>
+                </p:nvSpPr>
+                <p:spPr>
+                  <a:xfrm>
+                    <a:off x="1809213" y="3332572"/>
+                    <a:ext cx="384182" cy="410549"/>
+                  </a:xfrm>
+                  <a:prstGeom prst="roundRect">
+                    <a:avLst/>
+                  </a:prstGeom>
+                  <a:solidFill>
+                    <a:srgbClr val="92D050"/>
+                  </a:solidFill>
+                  <a:ln>
+                    <a:noFill/>
+                  </a:ln>
+                  <a:effectLst/>
+                </p:spPr>
+                <p:style>
+                  <a:lnRef idx="1">
+                    <a:schemeClr val="accent1"/>
+                  </a:lnRef>
+                  <a:fillRef idx="3">
+                    <a:schemeClr val="accent1"/>
+                  </a:fillRef>
+                  <a:effectRef idx="2">
+                    <a:schemeClr val="accent1"/>
+                  </a:effectRef>
+                  <a:fontRef idx="minor">
+                    <a:schemeClr val="lt1"/>
+                  </a:fontRef>
+                </p:style>
+                <p:txBody>
+                  <a:bodyPr rtlCol="0" anchor="ctr"/>
+                  <a:lstStyle/>
+                  <a:p>
+                    <a:pPr algn="ctr"/>
+                    <a:endParaRPr lang="en-US" sz="1100">
+                      <a:latin typeface="+mn-ea"/>
+                    </a:endParaRPr>
+                  </a:p>
+                </p:txBody>
+              </p:sp>
+              <p:cxnSp>
+                <p:nvCxnSpPr>
+                  <p:cNvPr id="49" name="Straight Arrow Connector 31"/>
+                  <p:cNvCxnSpPr/>
+                  <p:nvPr/>
+                </p:nvCxnSpPr>
+                <p:spPr>
+                  <a:xfrm>
+                    <a:off x="1500857" y="3537846"/>
+                    <a:ext cx="539203" cy="0"/>
+                  </a:xfrm>
+                  <a:prstGeom prst="straightConnector1">
+                    <a:avLst/>
+                  </a:prstGeom>
+                  <a:ln w="12700" cmpd="sng">
+                    <a:solidFill>
+                      <a:srgbClr val="003300"/>
+                    </a:solidFill>
+                    <a:headEnd type="arrow"/>
+                    <a:tailEnd type="arrow"/>
+                  </a:ln>
+                  <a:effectLst/>
+                </p:spPr>
+                <p:style>
+                  <a:lnRef idx="2">
+                    <a:schemeClr val="accent1"/>
+                  </a:lnRef>
+                  <a:fillRef idx="0">
+                    <a:schemeClr val="accent1"/>
+                  </a:fillRef>
+                  <a:effectRef idx="1">
+                    <a:schemeClr val="accent1"/>
+                  </a:effectRef>
+                  <a:fontRef idx="minor">
+                    <a:schemeClr val="tx1"/>
+                  </a:fontRef>
+                </p:style>
+              </p:cxnSp>
+            </p:grpSp>
+            <p:sp>
+              <p:nvSpPr>
+                <p:cNvPr id="37" name="TextBox 36"/>
+                <p:cNvSpPr txBox="1"/>
+                <p:nvPr/>
+              </p:nvSpPr>
+              <p:spPr>
+                <a:xfrm>
+                  <a:off x="1339149" y="4470020"/>
+                  <a:ext cx="914033" cy="261610"/>
+                </a:xfrm>
+                <a:prstGeom prst="rect">
+                  <a:avLst/>
+                </a:prstGeom>
+                <a:noFill/>
+              </p:spPr>
+              <p:txBody>
+                <a:bodyPr wrap="none" rtlCol="0">
+                  <a:spAutoFit/>
+                </a:bodyPr>
+                <a:lstStyle/>
+                <a:p>
+                  <a:pPr defTabSz="430213">
+                    <a:spcAft>
+                      <a:spcPts val="400"/>
+                    </a:spcAft>
+                    <a:buSzPct val="100000"/>
+                  </a:pPr>
+                  <a:r>
+                    <a:rPr lang="en-US" altLang="ko-KR" sz="1100" b="1" dirty="0">
+                      <a:latin typeface="+mn-ea"/>
+                      <a:cs typeface="HP Simplified" pitchFamily="34" charset="0"/>
+                    </a:rPr>
+                    <a:t>Data Node</a:t>
+                  </a:r>
+                  <a:endParaRPr lang="en-US" sz="1100" b="1" dirty="0">
+                    <a:latin typeface="+mn-ea"/>
+                    <a:cs typeface="HP Simplified" pitchFamily="34" charset="0"/>
+                  </a:endParaRPr>
+                </a:p>
+              </p:txBody>
+            </p:sp>
+          </p:grpSp>
+          <p:grpSp>
+            <p:nvGrpSpPr>
+              <p:cNvPr id="26" name="그룹 125"/>
+              <p:cNvGrpSpPr/>
+              <p:nvPr/>
+            </p:nvGrpSpPr>
+            <p:grpSpPr>
+              <a:xfrm>
+                <a:off x="4393588" y="2986780"/>
+                <a:ext cx="1062034" cy="1704455"/>
+                <a:chOff x="3685766" y="2399156"/>
+                <a:chExt cx="1062034" cy="1704455"/>
+              </a:xfrm>
+            </p:grpSpPr>
+            <p:sp>
+              <p:nvSpPr>
+                <p:cNvPr id="27" name="Rounded Rectangle 33"/>
+                <p:cNvSpPr/>
+                <p:nvPr/>
+              </p:nvSpPr>
+              <p:spPr>
+                <a:xfrm>
+                  <a:off x="4001897" y="3431453"/>
+                  <a:ext cx="384182" cy="410549"/>
+                </a:xfrm>
+                <a:prstGeom prst="roundRect">
+                  <a:avLst/>
+                </a:prstGeom>
+                <a:solidFill>
+                  <a:srgbClr val="104E91"/>
+                </a:solidFill>
+                <a:ln>
+                  <a:noFill/>
+                </a:ln>
+                <a:effectLst/>
+              </p:spPr>
+              <p:style>
+                <a:lnRef idx="1">
+                  <a:schemeClr val="accent1"/>
+                </a:lnRef>
+                <a:fillRef idx="3">
+                  <a:schemeClr val="accent1"/>
+                </a:fillRef>
+                <a:effectRef idx="2">
+                  <a:schemeClr val="accent1"/>
+                </a:effectRef>
+                <a:fontRef idx="minor">
+                  <a:schemeClr val="lt1"/>
+                </a:fontRef>
+              </p:style>
+              <p:txBody>
+                <a:bodyPr rtlCol="0" anchor="ctr"/>
+                <a:lstStyle/>
+                <a:p>
+                  <a:pPr algn="ctr"/>
+                  <a:endParaRPr lang="en-US" sz="1100">
+                    <a:latin typeface="+mn-ea"/>
+                  </a:endParaRPr>
+                </a:p>
+              </p:txBody>
+            </p:sp>
+            <p:sp>
+              <p:nvSpPr>
+                <p:cNvPr id="28" name="Rounded Rectangle 38"/>
+                <p:cNvSpPr/>
+                <p:nvPr/>
+              </p:nvSpPr>
+              <p:spPr>
+                <a:xfrm>
+                  <a:off x="3744171" y="2721422"/>
+                  <a:ext cx="384182" cy="410549"/>
+                </a:xfrm>
+                <a:prstGeom prst="roundRect">
+                  <a:avLst/>
+                </a:prstGeom>
+                <a:solidFill>
+                  <a:srgbClr val="60A4ED"/>
+                </a:solidFill>
+                <a:ln>
+                  <a:noFill/>
+                </a:ln>
+                <a:effectLst/>
+              </p:spPr>
+              <p:style>
+                <a:lnRef idx="1">
+                  <a:schemeClr val="accent1"/>
+                </a:lnRef>
+                <a:fillRef idx="3">
+                  <a:schemeClr val="accent1"/>
+                </a:fillRef>
+                <a:effectRef idx="2">
+                  <a:schemeClr val="accent1"/>
+                </a:effectRef>
+                <a:fontRef idx="minor">
+                  <a:schemeClr val="lt1"/>
+                </a:fontRef>
+              </p:style>
+              <p:txBody>
+                <a:bodyPr rtlCol="0" anchor="ctr"/>
+                <a:lstStyle/>
+                <a:p>
+                  <a:pPr algn="ctr"/>
+                  <a:endParaRPr lang="en-US" sz="1100">
+                    <a:solidFill>
+                      <a:schemeClr val="accent4">
+                        <a:lumMod val="60000"/>
+                        <a:lumOff val="40000"/>
+                      </a:schemeClr>
+                    </a:solidFill>
+                    <a:latin typeface="+mn-ea"/>
+                  </a:endParaRPr>
+                </a:p>
+              </p:txBody>
+            </p:sp>
+            <p:cxnSp>
+              <p:nvCxnSpPr>
+                <p:cNvPr id="29" name="Straight Connector 39"/>
+                <p:cNvCxnSpPr>
+                  <a:endCxn id="27" idx="0"/>
+                </p:cNvCxnSpPr>
+                <p:nvPr/>
+              </p:nvCxnSpPr>
+              <p:spPr>
+                <a:xfrm>
+                  <a:off x="3924386" y="3131970"/>
+                  <a:ext cx="269602" cy="299483"/>
+                </a:xfrm>
+                <a:prstGeom prst="line">
+                  <a:avLst/>
+                </a:prstGeom>
+                <a:ln w="28575" cmpd="sng">
+                  <a:solidFill>
+                    <a:schemeClr val="accent4">
+                      <a:lumMod val="50000"/>
+                    </a:schemeClr>
+                  </a:solidFill>
+                </a:ln>
+                <a:effectLst/>
+              </p:spPr>
+              <p:style>
+                <a:lnRef idx="2">
+                  <a:schemeClr val="accent1"/>
+                </a:lnRef>
+                <a:fillRef idx="0">
+                  <a:schemeClr val="accent1"/>
+                </a:fillRef>
+                <a:effectRef idx="1">
+                  <a:schemeClr val="accent1"/>
+                </a:effectRef>
+                <a:fontRef idx="minor">
+                  <a:schemeClr val="tx1"/>
+                </a:fontRef>
+              </p:style>
+            </p:cxnSp>
+            <p:cxnSp>
+              <p:nvCxnSpPr>
+                <p:cNvPr id="30" name="Straight Connector 40"/>
+                <p:cNvCxnSpPr>
+                  <a:stCxn id="31" idx="2"/>
+                  <a:endCxn id="27" idx="0"/>
+                </p:cNvCxnSpPr>
+                <p:nvPr/>
+              </p:nvCxnSpPr>
+              <p:spPr>
+                <a:xfrm flipH="1">
+                  <a:off x="4193988" y="3131971"/>
+                  <a:ext cx="242721" cy="299482"/>
+                </a:xfrm>
+                <a:prstGeom prst="line">
+                  <a:avLst/>
+                </a:prstGeom>
+                <a:ln w="28575" cmpd="sng">
+                  <a:solidFill>
+                    <a:schemeClr val="accent4">
+                      <a:lumMod val="50000"/>
+                    </a:schemeClr>
+                  </a:solidFill>
+                </a:ln>
+                <a:effectLst/>
+              </p:spPr>
+              <p:style>
+                <a:lnRef idx="2">
+                  <a:schemeClr val="accent1"/>
+                </a:lnRef>
+                <a:fillRef idx="0">
+                  <a:schemeClr val="accent1"/>
+                </a:fillRef>
+                <a:effectRef idx="1">
+                  <a:schemeClr val="accent1"/>
+                </a:effectRef>
+                <a:fontRef idx="minor">
+                  <a:schemeClr val="tx1"/>
+                </a:fontRef>
+              </p:style>
+            </p:cxnSp>
+            <p:sp>
+              <p:nvSpPr>
+                <p:cNvPr id="31" name="Rounded Rectangle 41"/>
+                <p:cNvSpPr/>
+                <p:nvPr/>
+              </p:nvSpPr>
+              <p:spPr>
+                <a:xfrm>
+                  <a:off x="4244618" y="2721422"/>
+                  <a:ext cx="384182" cy="410549"/>
+                </a:xfrm>
+                <a:prstGeom prst="roundRect">
+                  <a:avLst/>
+                </a:prstGeom>
+                <a:solidFill>
+                  <a:srgbClr val="60A4ED"/>
+                </a:solidFill>
+                <a:ln>
+                  <a:noFill/>
+                </a:ln>
+                <a:effectLst/>
+              </p:spPr>
+              <p:style>
+                <a:lnRef idx="1">
+                  <a:schemeClr val="accent1"/>
+                </a:lnRef>
+                <a:fillRef idx="3">
+                  <a:schemeClr val="accent1"/>
+                </a:fillRef>
+                <a:effectRef idx="2">
+                  <a:schemeClr val="accent1"/>
+                </a:effectRef>
+                <a:fontRef idx="minor">
+                  <a:schemeClr val="lt1"/>
+                </a:fontRef>
+              </p:style>
+              <p:txBody>
+                <a:bodyPr rtlCol="0" anchor="ctr"/>
+                <a:lstStyle/>
+                <a:p>
+                  <a:pPr algn="ctr"/>
+                  <a:endParaRPr lang="en-US" sz="1100">
+                    <a:latin typeface="+mn-ea"/>
+                  </a:endParaRPr>
+                </a:p>
+              </p:txBody>
+            </p:sp>
+            <p:sp>
+              <p:nvSpPr>
+                <p:cNvPr id="32" name="TextBox 31"/>
+                <p:cNvSpPr txBox="1"/>
+                <p:nvPr/>
+              </p:nvSpPr>
+              <p:spPr>
+                <a:xfrm>
+                  <a:off x="3685766" y="2399156"/>
+                  <a:ext cx="458780" cy="261610"/>
+                </a:xfrm>
+                <a:prstGeom prst="rect">
+                  <a:avLst/>
+                </a:prstGeom>
+                <a:noFill/>
+              </p:spPr>
+              <p:txBody>
+                <a:bodyPr wrap="none" rtlCol="0">
+                  <a:spAutoFit/>
+                </a:bodyPr>
+                <a:lstStyle/>
+                <a:p>
+                  <a:pPr defTabSz="430213">
+                    <a:spcAft>
+                      <a:spcPts val="400"/>
+                    </a:spcAft>
+                    <a:buSzPct val="100000"/>
+                  </a:pPr>
+                  <a:r>
+                    <a:rPr lang="en-US" sz="1100" b="1" dirty="0">
+                      <a:latin typeface="+mn-ea"/>
+                      <a:cs typeface="HP Simplified" pitchFamily="34" charset="0"/>
+                    </a:rPr>
+                    <a:t>R/W</a:t>
+                  </a:r>
+                </a:p>
+              </p:txBody>
+            </p:sp>
+            <p:sp>
+              <p:nvSpPr>
+                <p:cNvPr id="33" name="TextBox 32"/>
+                <p:cNvSpPr txBox="1"/>
+                <p:nvPr/>
+              </p:nvSpPr>
+              <p:spPr>
+                <a:xfrm>
+                  <a:off x="3833521" y="3842001"/>
+                  <a:ext cx="710451" cy="261610"/>
+                </a:xfrm>
+                <a:prstGeom prst="rect">
+                  <a:avLst/>
+                </a:prstGeom>
+                <a:noFill/>
+              </p:spPr>
+              <p:txBody>
+                <a:bodyPr wrap="none" rtlCol="0">
+                  <a:spAutoFit/>
+                </a:bodyPr>
+                <a:lstStyle/>
+                <a:p>
+                  <a:pPr defTabSz="430213">
+                    <a:spcAft>
+                      <a:spcPts val="400"/>
+                    </a:spcAft>
+                    <a:buSzPct val="100000"/>
+                  </a:pPr>
+                  <a:r>
+                    <a:rPr lang="en-US" sz="1100" b="1" dirty="0">
+                      <a:latin typeface="+mn-ea"/>
+                      <a:cs typeface="HP Simplified" pitchFamily="34" charset="0"/>
+                    </a:rPr>
+                    <a:t>Storage</a:t>
+                  </a:r>
+                </a:p>
+              </p:txBody>
+            </p:sp>
+            <p:sp>
+              <p:nvSpPr>
+                <p:cNvPr id="34" name="TextBox 33"/>
+                <p:cNvSpPr txBox="1"/>
+                <p:nvPr/>
+              </p:nvSpPr>
+              <p:spPr>
+                <a:xfrm>
+                  <a:off x="4160780" y="2399156"/>
+                  <a:ext cx="587020" cy="261610"/>
+                </a:xfrm>
+                <a:prstGeom prst="rect">
+                  <a:avLst/>
+                </a:prstGeom>
+                <a:noFill/>
+              </p:spPr>
+              <p:txBody>
+                <a:bodyPr wrap="none" rtlCol="0">
+                  <a:spAutoFit/>
+                </a:bodyPr>
+                <a:lstStyle/>
+                <a:p>
+                  <a:pPr defTabSz="430213">
+                    <a:spcAft>
+                      <a:spcPts val="400"/>
+                    </a:spcAft>
+                    <a:buSzPct val="100000"/>
+                  </a:pPr>
+                  <a:r>
+                    <a:rPr lang="en-US" sz="1100" b="1" dirty="0">
+                      <a:latin typeface="+mn-ea"/>
+                      <a:cs typeface="HP Simplified" pitchFamily="34" charset="0"/>
+                    </a:rPr>
+                    <a:t>READ</a:t>
+                  </a:r>
+                </a:p>
+              </p:txBody>
+            </p:sp>
+          </p:grpSp>
+        </p:grpSp>
+        <p:sp>
+          <p:nvSpPr>
+            <p:cNvPr id="23" name="Rectangle 18"/>
+            <p:cNvSpPr/>
+            <p:nvPr/>
+          </p:nvSpPr>
+          <p:spPr>
+            <a:xfrm>
+              <a:off x="2415186" y="2547978"/>
+              <a:ext cx="1633781" cy="338554"/>
+            </a:xfrm>
+            <a:prstGeom prst="rect">
+              <a:avLst/>
+            </a:prstGeom>
+          </p:spPr>
+          <p:txBody>
+            <a:bodyPr wrap="none">
+              <a:spAutoFit/>
+            </a:bodyPr>
+            <a:lstStyle/>
+            <a:p>
+              <a:pPr algn="ctr" defTabSz="430213">
+                <a:spcAft>
+                  <a:spcPts val="400"/>
+                </a:spcAft>
+                <a:buSzPct val="100000"/>
+              </a:pPr>
+              <a:r>
+                <a:rPr lang="en-US" sz="1600" b="1" dirty="0">
+                  <a:latin typeface="+mn-ea"/>
+                  <a:cs typeface="HP Simplified" pitchFamily="34" charset="0"/>
+                </a:rPr>
+                <a:t>Other Systems</a:t>
+              </a:r>
+            </a:p>
+          </p:txBody>
+        </p:sp>
+      </p:grpSp>
+      <p:pic>
+        <p:nvPicPr>
+          <p:cNvPr id="66" name="Picture 2" descr="versus png에 대한 이미지 검색결과">
+            <a:extLst>
+              <a:ext uri="{FF2B5EF4-FFF2-40B4-BE49-F238E27FC236}">
+                <a16:creationId xmlns:a16="http://schemas.microsoft.com/office/drawing/2014/main" xmlns="" id="{7CF353E0-AD86-40C8-A8CD-549B85952746}"/>
+              </a:ext>
+            </a:extLst>
+          </p:cNvPr>
+          <p:cNvPicPr>
+            <a:picLocks noChangeAspect="1" noChangeArrowheads="1"/>
+          </p:cNvPicPr>
+          <p:nvPr/>
+        </p:nvPicPr>
+        <p:blipFill>
+          <a:blip r:embed="rId2">
+            <a:extLst>
+              <a:ext uri="{28A0092B-C50C-407E-A947-70E740481C1C}">
+                <a14:useLocalDpi xmlns:a14="http://schemas.microsoft.com/office/drawing/2010/main" val="0"/>
+              </a:ext>
+            </a:extLst>
+          </a:blip>
+          <a:srcRect/>
+          <a:stretch>
+            <a:fillRect/>
+          </a:stretch>
+        </p:blipFill>
+        <p:spPr bwMode="auto">
+          <a:xfrm>
+            <a:off x="4471009" y="2903897"/>
+            <a:ext cx="1170546" cy="1170546"/>
+          </a:xfrm>
+          <a:prstGeom prst="rect">
+            <a:avLst/>
+          </a:prstGeom>
+          <a:noFill/>
+          <a:extLst>
+            <a:ext uri="{909E8E84-426E-40DD-AFC4-6F175D3DCCD1}">
+              <a14:hiddenFill xmlns:a14="http://schemas.microsoft.com/office/drawing/2010/main">
+                <a:solidFill>
+                  <a:srgbClr val="FFFFFF"/>
+                </a:solidFill>
+              </a14:hiddenFill>
+            </a:ext>
+          </a:extLst>
+        </p:spPr>
+      </p:pic>
+      <p:grpSp>
+        <p:nvGrpSpPr>
+          <p:cNvPr id="67" name="그룹 66"/>
+          <p:cNvGrpSpPr/>
+          <p:nvPr/>
+        </p:nvGrpSpPr>
+        <p:grpSpPr>
+          <a:xfrm>
+            <a:off x="6283271" y="1779028"/>
+            <a:ext cx="2643013" cy="2270649"/>
+            <a:chOff x="7746031" y="2605603"/>
+            <a:chExt cx="2643013" cy="2270649"/>
+          </a:xfrm>
+        </p:grpSpPr>
+        <p:grpSp>
+          <p:nvGrpSpPr>
+            <p:cNvPr id="68" name="그룹 67"/>
+            <p:cNvGrpSpPr/>
+            <p:nvPr/>
+          </p:nvGrpSpPr>
+          <p:grpSpPr>
+            <a:xfrm>
+              <a:off x="7767471" y="3263550"/>
+              <a:ext cx="2566104" cy="649573"/>
+              <a:chOff x="7767471" y="3263550"/>
+              <a:chExt cx="2566104" cy="649573"/>
+            </a:xfrm>
+          </p:grpSpPr>
+          <p:cxnSp>
+            <p:nvCxnSpPr>
+              <p:cNvPr id="73" name="Straight Connector 8"/>
+              <p:cNvCxnSpPr/>
+              <p:nvPr/>
+            </p:nvCxnSpPr>
+            <p:spPr>
+              <a:xfrm>
+                <a:off x="7767471" y="3263550"/>
+                <a:ext cx="2566104" cy="0"/>
+              </a:xfrm>
+              <a:prstGeom prst="line">
+                <a:avLst/>
+              </a:prstGeom>
+              <a:ln w="28575" cmpd="sng">
+                <a:solidFill>
+                  <a:srgbClr val="0079EF"/>
+                </a:solidFill>
+              </a:ln>
+              <a:effectLst/>
+            </p:spPr>
+            <p:style>
+              <a:lnRef idx="2">
+                <a:schemeClr val="accent1"/>
+              </a:lnRef>
+              <a:fillRef idx="0">
+                <a:schemeClr val="accent1"/>
+              </a:fillRef>
+              <a:effectRef idx="1">
+                <a:schemeClr val="accent1"/>
+              </a:effectRef>
+              <a:fontRef idx="minor">
+                <a:schemeClr val="tx1"/>
+              </a:fontRef>
+            </p:style>
+          </p:cxnSp>
+          <p:grpSp>
+            <p:nvGrpSpPr>
+              <p:cNvPr id="74" name="그룹 73"/>
+              <p:cNvGrpSpPr/>
+              <p:nvPr/>
+            </p:nvGrpSpPr>
+            <p:grpSpPr>
+              <a:xfrm>
+                <a:off x="7815960" y="3263550"/>
+                <a:ext cx="418641" cy="649573"/>
+                <a:chOff x="8086547" y="3263550"/>
+                <a:chExt cx="418641" cy="649573"/>
+              </a:xfrm>
+            </p:grpSpPr>
+            <p:sp>
+              <p:nvSpPr>
+                <p:cNvPr id="84" name="Rounded Rectangle 4"/>
+                <p:cNvSpPr/>
+                <p:nvPr/>
+              </p:nvSpPr>
+              <p:spPr>
+                <a:xfrm>
+                  <a:off x="8086547" y="3498031"/>
+                  <a:ext cx="418641" cy="415092"/>
+                </a:xfrm>
+                <a:prstGeom prst="roundRect">
+                  <a:avLst/>
+                </a:prstGeom>
+                <a:solidFill>
+                  <a:srgbClr val="0079EF"/>
+                </a:solidFill>
+                <a:ln>
+                  <a:noFill/>
+                </a:ln>
+                <a:effectLst/>
+              </p:spPr>
+              <p:style>
+                <a:lnRef idx="1">
+                  <a:schemeClr val="accent1"/>
+                </a:lnRef>
+                <a:fillRef idx="3">
+                  <a:schemeClr val="accent1"/>
+                </a:fillRef>
+                <a:effectRef idx="2">
+                  <a:schemeClr val="accent1"/>
+                </a:effectRef>
+                <a:fontRef idx="minor">
+                  <a:schemeClr val="lt1"/>
+                </a:fontRef>
+              </p:style>
+              <p:txBody>
+                <a:bodyPr rtlCol="0" anchor="ctr"/>
+                <a:lstStyle/>
+                <a:p>
+                  <a:pPr algn="ctr"/>
+                  <a:endParaRPr lang="en-US">
+                    <a:latin typeface="+mn-ea"/>
+                  </a:endParaRPr>
+                </a:p>
+              </p:txBody>
+            </p:sp>
+            <p:cxnSp>
+              <p:nvCxnSpPr>
+                <p:cNvPr id="85" name="Straight Connector 9"/>
+                <p:cNvCxnSpPr/>
+                <p:nvPr/>
+              </p:nvCxnSpPr>
+              <p:spPr>
+                <a:xfrm>
+                  <a:off x="8295867" y="3263550"/>
+                  <a:ext cx="0" cy="253388"/>
+                </a:xfrm>
+                <a:prstGeom prst="line">
+                  <a:avLst/>
+                </a:prstGeom>
+                <a:ln w="28575" cmpd="sng">
+                  <a:solidFill>
+                    <a:srgbClr val="0079EF"/>
+                  </a:solidFill>
+                </a:ln>
+                <a:effectLst/>
+              </p:spPr>
+              <p:style>
+                <a:lnRef idx="2">
+                  <a:schemeClr val="accent1"/>
+                </a:lnRef>
+                <a:fillRef idx="0">
+                  <a:schemeClr val="accent1"/>
+                </a:fillRef>
+                <a:effectRef idx="1">
+                  <a:schemeClr val="accent1"/>
+                </a:effectRef>
+                <a:fontRef idx="minor">
+                  <a:schemeClr val="tx1"/>
+                </a:fontRef>
+              </p:style>
+            </p:cxnSp>
+          </p:grpSp>
+          <p:grpSp>
+            <p:nvGrpSpPr>
+              <p:cNvPr id="75" name="그룹 74"/>
+              <p:cNvGrpSpPr/>
+              <p:nvPr/>
+            </p:nvGrpSpPr>
+            <p:grpSpPr>
+              <a:xfrm>
+                <a:off x="8493237" y="3263550"/>
+                <a:ext cx="418641" cy="649573"/>
+                <a:chOff x="8589651" y="3263550"/>
+                <a:chExt cx="418641" cy="649573"/>
+              </a:xfrm>
+            </p:grpSpPr>
+            <p:sp>
+              <p:nvSpPr>
+                <p:cNvPr id="82" name="Rounded Rectangle 5"/>
+                <p:cNvSpPr/>
+                <p:nvPr/>
+              </p:nvSpPr>
+              <p:spPr>
+                <a:xfrm>
+                  <a:off x="8589651" y="3498031"/>
+                  <a:ext cx="418641" cy="415092"/>
+                </a:xfrm>
+                <a:prstGeom prst="roundRect">
+                  <a:avLst/>
+                </a:prstGeom>
+                <a:solidFill>
+                  <a:srgbClr val="0079EF"/>
+                </a:solidFill>
+                <a:ln>
+                  <a:noFill/>
+                </a:ln>
+                <a:effectLst/>
+              </p:spPr>
+              <p:style>
+                <a:lnRef idx="1">
+                  <a:schemeClr val="accent1"/>
+                </a:lnRef>
+                <a:fillRef idx="3">
+                  <a:schemeClr val="accent1"/>
+                </a:fillRef>
+                <a:effectRef idx="2">
+                  <a:schemeClr val="accent1"/>
+                </a:effectRef>
+                <a:fontRef idx="minor">
+                  <a:schemeClr val="lt1"/>
+                </a:fontRef>
+              </p:style>
+              <p:txBody>
+                <a:bodyPr rtlCol="0" anchor="ctr"/>
+                <a:lstStyle/>
+                <a:p>
+                  <a:pPr algn="ctr"/>
+                  <a:endParaRPr lang="en-US">
+                    <a:latin typeface="+mn-ea"/>
+                  </a:endParaRPr>
+                </a:p>
+              </p:txBody>
+            </p:sp>
+            <p:cxnSp>
+              <p:nvCxnSpPr>
+                <p:cNvPr id="83" name="Straight Connector 10"/>
+                <p:cNvCxnSpPr/>
+                <p:nvPr/>
+              </p:nvCxnSpPr>
+              <p:spPr>
+                <a:xfrm>
+                  <a:off x="8798970" y="3263550"/>
+                  <a:ext cx="0" cy="253388"/>
+                </a:xfrm>
+                <a:prstGeom prst="line">
+                  <a:avLst/>
+                </a:prstGeom>
+                <a:ln w="28575" cmpd="sng">
+                  <a:solidFill>
+                    <a:srgbClr val="0079EF"/>
+                  </a:solidFill>
+                </a:ln>
+                <a:effectLst/>
+              </p:spPr>
+              <p:style>
+                <a:lnRef idx="2">
+                  <a:schemeClr val="accent1"/>
+                </a:lnRef>
+                <a:fillRef idx="0">
+                  <a:schemeClr val="accent1"/>
+                </a:fillRef>
+                <a:effectRef idx="1">
+                  <a:schemeClr val="accent1"/>
+                </a:effectRef>
+                <a:fontRef idx="minor">
+                  <a:schemeClr val="tx1"/>
+                </a:fontRef>
+              </p:style>
+            </p:cxnSp>
+          </p:grpSp>
+          <p:grpSp>
+            <p:nvGrpSpPr>
+              <p:cNvPr id="76" name="그룹 75"/>
+              <p:cNvGrpSpPr/>
+              <p:nvPr/>
+            </p:nvGrpSpPr>
+            <p:grpSpPr>
+              <a:xfrm>
+                <a:off x="9170514" y="3263550"/>
+                <a:ext cx="418641" cy="649573"/>
+                <a:chOff x="9092755" y="3263550"/>
+                <a:chExt cx="418641" cy="649573"/>
+              </a:xfrm>
+            </p:grpSpPr>
+            <p:sp>
+              <p:nvSpPr>
+                <p:cNvPr id="80" name="Rounded Rectangle 6"/>
+                <p:cNvSpPr/>
+                <p:nvPr/>
+              </p:nvSpPr>
+              <p:spPr>
+                <a:xfrm>
+                  <a:off x="9092755" y="3498031"/>
+                  <a:ext cx="418641" cy="415092"/>
+                </a:xfrm>
+                <a:prstGeom prst="roundRect">
+                  <a:avLst/>
+                </a:prstGeom>
+                <a:solidFill>
+                  <a:srgbClr val="0079EF"/>
+                </a:solidFill>
+                <a:ln>
+                  <a:noFill/>
+                </a:ln>
+                <a:effectLst/>
+              </p:spPr>
+              <p:style>
+                <a:lnRef idx="1">
+                  <a:schemeClr val="accent1"/>
+                </a:lnRef>
+                <a:fillRef idx="3">
+                  <a:schemeClr val="accent1"/>
+                </a:fillRef>
+                <a:effectRef idx="2">
+                  <a:schemeClr val="accent1"/>
+                </a:effectRef>
+                <a:fontRef idx="minor">
+                  <a:schemeClr val="lt1"/>
+                </a:fontRef>
+              </p:style>
+              <p:txBody>
+                <a:bodyPr rtlCol="0" anchor="ctr"/>
+                <a:lstStyle/>
+                <a:p>
+                  <a:pPr algn="ctr"/>
+                  <a:endParaRPr lang="en-US">
+                    <a:latin typeface="+mn-ea"/>
+                  </a:endParaRPr>
+                </a:p>
+              </p:txBody>
+            </p:sp>
+            <p:cxnSp>
+              <p:nvCxnSpPr>
+                <p:cNvPr id="81" name="Straight Connector 11"/>
+                <p:cNvCxnSpPr/>
+                <p:nvPr/>
+              </p:nvCxnSpPr>
+              <p:spPr>
+                <a:xfrm>
+                  <a:off x="9302075" y="3263550"/>
+                  <a:ext cx="0" cy="253388"/>
+                </a:xfrm>
+                <a:prstGeom prst="line">
+                  <a:avLst/>
+                </a:prstGeom>
+                <a:ln w="28575" cmpd="sng">
+                  <a:solidFill>
+                    <a:srgbClr val="0079EF"/>
+                  </a:solidFill>
+                </a:ln>
+                <a:effectLst/>
+              </p:spPr>
+              <p:style>
+                <a:lnRef idx="2">
+                  <a:schemeClr val="accent1"/>
+                </a:lnRef>
+                <a:fillRef idx="0">
+                  <a:schemeClr val="accent1"/>
+                </a:fillRef>
+                <a:effectRef idx="1">
+                  <a:schemeClr val="accent1"/>
+                </a:effectRef>
+                <a:fontRef idx="minor">
+                  <a:schemeClr val="tx1"/>
+                </a:fontRef>
+              </p:style>
+            </p:cxnSp>
+          </p:grpSp>
+          <p:grpSp>
+            <p:nvGrpSpPr>
+              <p:cNvPr id="77" name="그룹 76"/>
+              <p:cNvGrpSpPr/>
+              <p:nvPr/>
+            </p:nvGrpSpPr>
+            <p:grpSpPr>
+              <a:xfrm>
+                <a:off x="9847791" y="3263550"/>
+                <a:ext cx="418641" cy="649573"/>
+                <a:chOff x="9595858" y="3263550"/>
+                <a:chExt cx="418641" cy="649573"/>
+              </a:xfrm>
+            </p:grpSpPr>
+            <p:sp>
+              <p:nvSpPr>
+                <p:cNvPr id="78" name="Rounded Rectangle 7"/>
+                <p:cNvSpPr/>
+                <p:nvPr/>
+              </p:nvSpPr>
+              <p:spPr>
+                <a:xfrm>
+                  <a:off x="9595858" y="3498031"/>
+                  <a:ext cx="418641" cy="415092"/>
+                </a:xfrm>
+                <a:prstGeom prst="roundRect">
+                  <a:avLst/>
+                </a:prstGeom>
+                <a:solidFill>
+                  <a:srgbClr val="0079EF"/>
+                </a:solidFill>
+                <a:ln>
+                  <a:noFill/>
+                </a:ln>
+                <a:effectLst/>
+              </p:spPr>
+              <p:style>
+                <a:lnRef idx="1">
+                  <a:schemeClr val="accent1"/>
+                </a:lnRef>
+                <a:fillRef idx="3">
+                  <a:schemeClr val="accent1"/>
+                </a:fillRef>
+                <a:effectRef idx="2">
+                  <a:schemeClr val="accent1"/>
+                </a:effectRef>
+                <a:fontRef idx="minor">
+                  <a:schemeClr val="lt1"/>
+                </a:fontRef>
+              </p:style>
+              <p:txBody>
+                <a:bodyPr rtlCol="0" anchor="ctr"/>
+                <a:lstStyle/>
+                <a:p>
+                  <a:pPr algn="ctr"/>
+                  <a:endParaRPr lang="en-US">
+                    <a:latin typeface="+mn-ea"/>
+                  </a:endParaRPr>
+                </a:p>
+              </p:txBody>
+            </p:sp>
+            <p:cxnSp>
+              <p:nvCxnSpPr>
+                <p:cNvPr id="79" name="Straight Connector 12"/>
+                <p:cNvCxnSpPr/>
+                <p:nvPr/>
+              </p:nvCxnSpPr>
+              <p:spPr>
+                <a:xfrm>
+                  <a:off x="9805178" y="3263550"/>
+                  <a:ext cx="0" cy="253388"/>
+                </a:xfrm>
+                <a:prstGeom prst="line">
+                  <a:avLst/>
+                </a:prstGeom>
+                <a:ln w="28575" cmpd="sng">
+                  <a:solidFill>
+                    <a:srgbClr val="0079EF"/>
+                  </a:solidFill>
+                </a:ln>
+                <a:effectLst/>
+              </p:spPr>
+              <p:style>
+                <a:lnRef idx="2">
+                  <a:schemeClr val="accent1"/>
+                </a:lnRef>
+                <a:fillRef idx="0">
+                  <a:schemeClr val="accent1"/>
+                </a:fillRef>
+                <a:effectRef idx="1">
+                  <a:schemeClr val="accent1"/>
+                </a:effectRef>
+                <a:fontRef idx="minor">
+                  <a:schemeClr val="tx1"/>
+                </a:fontRef>
+              </p:style>
+            </p:cxnSp>
+          </p:grpSp>
+        </p:grpSp>
+        <p:sp>
+          <p:nvSpPr>
+            <p:cNvPr id="69" name="TextBox 68"/>
+            <p:cNvSpPr txBox="1"/>
+            <p:nvPr/>
+          </p:nvSpPr>
+          <p:spPr>
+            <a:xfrm>
+              <a:off x="8238483" y="2972991"/>
+              <a:ext cx="1483098" cy="261610"/>
+            </a:xfrm>
+            <a:prstGeom prst="rect">
+              <a:avLst/>
+            </a:prstGeom>
+            <a:noFill/>
+          </p:spPr>
+          <p:txBody>
+            <a:bodyPr wrap="none" rtlCol="0">
+              <a:spAutoFit/>
+            </a:bodyPr>
+            <a:lstStyle/>
+            <a:p>
+              <a:pPr defTabSz="430213">
+                <a:spcAft>
+                  <a:spcPts val="400"/>
+                </a:spcAft>
+                <a:buSzPct val="100000"/>
+              </a:pPr>
+              <a:r>
+                <a:rPr lang="en-US" altLang="ko-KR" sz="1100" b="1" dirty="0">
+                  <a:latin typeface="+mn-ea"/>
+                  <a:cs typeface="HP Simplified" pitchFamily="34" charset="0"/>
+                </a:rPr>
+                <a:t>10G Ethernet N/W </a:t>
+              </a:r>
+              <a:endParaRPr lang="en-US" sz="1100" b="1" dirty="0">
+                <a:latin typeface="+mn-ea"/>
+                <a:cs typeface="HP Simplified" pitchFamily="34" charset="0"/>
+              </a:endParaRPr>
+            </a:p>
+          </p:txBody>
+        </p:sp>
+        <p:sp>
+          <p:nvSpPr>
+            <p:cNvPr id="70" name="TextBox 69"/>
+            <p:cNvSpPr txBox="1"/>
+            <p:nvPr/>
+          </p:nvSpPr>
+          <p:spPr>
+            <a:xfrm>
+              <a:off x="7970741" y="3574932"/>
+              <a:ext cx="2145870" cy="252000"/>
+            </a:xfrm>
+            <a:prstGeom prst="rect">
+              <a:avLst/>
+            </a:prstGeom>
+            <a:solidFill>
+              <a:schemeClr val="bg1"/>
+            </a:solidFill>
+          </p:spPr>
+          <p:txBody>
+            <a:bodyPr wrap="none" rtlCol="0">
+              <a:noAutofit/>
+            </a:bodyPr>
+            <a:lstStyle/>
+            <a:p>
+              <a:pPr algn="ctr" defTabSz="430213">
+                <a:spcAft>
+                  <a:spcPts val="400"/>
+                </a:spcAft>
+                <a:buSzPct val="100000"/>
+              </a:pPr>
+              <a:r>
+                <a:rPr lang="en-US" altLang="ko-KR" sz="1100" b="1" dirty="0">
+                  <a:latin typeface="+mn-ea"/>
+                  <a:cs typeface="HP Simplified" pitchFamily="34" charset="0"/>
+                </a:rPr>
+                <a:t>Commodity Servers</a:t>
+              </a:r>
+              <a:endParaRPr lang="en-US" sz="1100" b="1" dirty="0">
+                <a:latin typeface="+mn-ea"/>
+                <a:cs typeface="HP Simplified" pitchFamily="34" charset="0"/>
+              </a:endParaRPr>
+            </a:p>
+          </p:txBody>
+        </p:sp>
+        <p:sp>
+          <p:nvSpPr>
+            <p:cNvPr id="71" name="TextBox 70"/>
+            <p:cNvSpPr txBox="1"/>
+            <p:nvPr/>
+          </p:nvSpPr>
+          <p:spPr>
+            <a:xfrm>
+              <a:off x="7746031" y="4168366"/>
+              <a:ext cx="2643013" cy="707886"/>
+            </a:xfrm>
+            <a:prstGeom prst="rect">
+              <a:avLst/>
+            </a:prstGeom>
+            <a:noFill/>
+          </p:spPr>
+          <p:txBody>
+            <a:bodyPr wrap="square" rtlCol="0">
+              <a:spAutoFit/>
+            </a:bodyPr>
+            <a:lstStyle/>
+            <a:p>
+              <a:pPr marL="171450" indent="-171450" defTabSz="430213">
+                <a:lnSpc>
+                  <a:spcPts val="1200"/>
+                </a:lnSpc>
+                <a:buSzPct val="100000"/>
+                <a:buFont typeface="Wingdings" pitchFamily="2" charset="2"/>
+                <a:buChar char="§"/>
+              </a:pPr>
+              <a:r>
+                <a:rPr lang="en-US" altLang="ko-KR" sz="1100" dirty="0">
+                  <a:latin typeface="+mn-ea"/>
+                  <a:cs typeface="HP Simplified" pitchFamily="34" charset="0"/>
+                </a:rPr>
+                <a:t>No specialized nodes</a:t>
+              </a:r>
+            </a:p>
+            <a:p>
+              <a:pPr marL="171450" indent="-171450" defTabSz="430213">
+                <a:lnSpc>
+                  <a:spcPts val="1200"/>
+                </a:lnSpc>
+                <a:buSzPct val="100000"/>
+                <a:buFont typeface="Wingdings" pitchFamily="2" charset="2"/>
+                <a:buChar char="§"/>
+              </a:pPr>
+              <a:r>
+                <a:rPr lang="en-US" altLang="ko-KR" sz="1100" dirty="0">
+                  <a:latin typeface="+mn-ea"/>
+                  <a:cs typeface="HP Simplified" pitchFamily="34" charset="0"/>
+                </a:rPr>
+                <a:t>All nodes are peers</a:t>
+              </a:r>
+            </a:p>
+            <a:p>
+              <a:pPr marL="171450" indent="-171450" defTabSz="430213">
+                <a:lnSpc>
+                  <a:spcPts val="1200"/>
+                </a:lnSpc>
+                <a:buSzPct val="100000"/>
+                <a:buFont typeface="Wingdings" pitchFamily="2" charset="2"/>
+                <a:buChar char="§"/>
+              </a:pPr>
+              <a:r>
+                <a:rPr lang="en-US" altLang="ko-KR" sz="1100" dirty="0">
+                  <a:latin typeface="+mn-ea"/>
+                  <a:cs typeface="HP Simplified" pitchFamily="34" charset="0"/>
+                </a:rPr>
+                <a:t>Query/Load to any node</a:t>
+              </a:r>
+            </a:p>
+            <a:p>
+              <a:pPr marL="171450" indent="-171450" defTabSz="430213">
+                <a:lnSpc>
+                  <a:spcPts val="1200"/>
+                </a:lnSpc>
+                <a:buSzPct val="100000"/>
+                <a:buFont typeface="Wingdings" pitchFamily="2" charset="2"/>
+                <a:buChar char="§"/>
+              </a:pPr>
+              <a:r>
+                <a:rPr lang="en-US" altLang="ko-KR" sz="1100" dirty="0">
+                  <a:latin typeface="+mn-ea"/>
+                  <a:cs typeface="HP Simplified" pitchFamily="34" charset="0"/>
+                </a:rPr>
+                <a:t>Continuous/real-time load &amp; query</a:t>
+              </a:r>
+            </a:p>
+          </p:txBody>
+        </p:sp>
+        <p:sp>
+          <p:nvSpPr>
+            <p:cNvPr id="72" name="Rectangle 17"/>
+            <p:cNvSpPr/>
+            <p:nvPr/>
+          </p:nvSpPr>
+          <p:spPr>
+            <a:xfrm>
+              <a:off x="8488904" y="2605603"/>
+              <a:ext cx="1082348" cy="338554"/>
+            </a:xfrm>
+            <a:prstGeom prst="rect">
+              <a:avLst/>
+            </a:prstGeom>
+          </p:spPr>
+          <p:txBody>
+            <a:bodyPr wrap="none">
+              <a:spAutoFit/>
+            </a:bodyPr>
+            <a:lstStyle/>
+            <a:p>
+              <a:pPr defTabSz="430213">
+                <a:spcAft>
+                  <a:spcPts val="400"/>
+                </a:spcAft>
+                <a:buSzPct val="100000"/>
+              </a:pPr>
+              <a:r>
+                <a:rPr lang="en-US" sz="1600" b="1" dirty="0">
+                  <a:latin typeface="+mn-ea"/>
+                  <a:cs typeface="HP Simplified" pitchFamily="34" charset="0"/>
+                </a:rPr>
+                <a:t>VERTICA</a:t>
+              </a:r>
+            </a:p>
+          </p:txBody>
+        </p:sp>
+      </p:grpSp>
+      <p:graphicFrame>
+        <p:nvGraphicFramePr>
+          <p:cNvPr id="86" name="표 85"/>
+          <p:cNvGraphicFramePr>
+            <a:graphicFrameLocks noGrp="1"/>
+          </p:cNvGraphicFramePr>
+          <p:nvPr>
+            <p:extLst>
+              <p:ext uri="{D42A27DB-BD31-4B8C-83A1-F6EECF244321}">
+                <p14:modId xmlns:p14="http://schemas.microsoft.com/office/powerpoint/2010/main" val="559500335"/>
+              </p:ext>
+            </p:extLst>
+          </p:nvPr>
+        </p:nvGraphicFramePr>
+        <p:xfrm>
+          <a:off x="647127" y="4037317"/>
+          <a:ext cx="3351959" cy="1621036"/>
+        </p:xfrm>
+        <a:graphic>
+          <a:graphicData uri="http://schemas.openxmlformats.org/drawingml/2006/table">
+            <a:tbl>
+              <a:tblPr firstRow="1" bandRow="1">
+                <a:tableStyleId>{5C22544A-7EE6-4342-B048-85BDC9FD1C3A}</a:tableStyleId>
+              </a:tblPr>
+              <a:tblGrid>
+                <a:gridCol w="3351959">
+                  <a:extLst>
+                    <a:ext uri="{9D8B030D-6E8A-4147-A177-3AD203B41FA5}">
+                      <a16:colId xmlns:a16="http://schemas.microsoft.com/office/drawing/2014/main" xmlns="" val="20000"/>
+                    </a:ext>
+                  </a:extLst>
+                </a:gridCol>
+              </a:tblGrid>
+              <a:tr h="218465">
+                <a:tc>
+                  <a:txBody>
+                    <a:bodyPr/>
+                    <a:lstStyle/>
+                    <a:p>
+                      <a:pPr algn="ctr" latinLnBrk="1"/>
+                      <a:r>
+                        <a:rPr lang="en-US" altLang="ko-KR" sz="1400" dirty="0">
+                          <a:solidFill>
+                            <a:srgbClr val="0081CD"/>
+                          </a:solidFill>
+                          <a:latin typeface="+mn-ea"/>
+                          <a:ea typeface="+mn-ea"/>
+                        </a:rPr>
+                        <a:t>Other</a:t>
+                      </a:r>
+                      <a:r>
+                        <a:rPr lang="en-US" altLang="ko-KR" sz="1400" baseline="0" dirty="0">
+                          <a:solidFill>
+                            <a:srgbClr val="0081CD"/>
+                          </a:solidFill>
+                          <a:latin typeface="+mn-ea"/>
+                          <a:ea typeface="+mn-ea"/>
+                        </a:rPr>
+                        <a:t> System</a:t>
+                      </a:r>
+                      <a:endParaRPr lang="ko-KR" altLang="en-US" sz="1400" dirty="0">
+                        <a:solidFill>
+                          <a:srgbClr val="0081CD"/>
+                        </a:solidFill>
+                        <a:latin typeface="+mn-ea"/>
+                        <a:ea typeface="+mn-ea"/>
+                      </a:endParaRPr>
+                    </a:p>
+                  </a:txBody>
+                  <a:tcPr>
+                    <a:lnL w="12700" cap="flat" cmpd="sng" algn="ctr">
+                      <a:noFill/>
+                      <a:prstDash val="solid"/>
+                      <a:round/>
+                      <a:headEnd type="none" w="med" len="med"/>
+                      <a:tailEnd type="none" w="med" len="med"/>
+                    </a:lnL>
+                    <a:lnR w="12700" cap="flat" cmpd="sng" algn="ctr">
+                      <a:noFill/>
+                      <a:prstDash val="solid"/>
+                      <a:round/>
+                      <a:headEnd type="none" w="med" len="med"/>
+                      <a:tailEnd type="none" w="med" len="med"/>
+                    </a:lnR>
+                    <a:lnT w="12700" cap="flat" cmpd="sng" algn="ctr">
+                      <a:solidFill>
+                        <a:srgbClr val="0083CE"/>
+                      </a:solidFill>
+                      <a:prstDash val="solid"/>
+                      <a:round/>
+                      <a:headEnd type="none" w="med" len="med"/>
+                      <a:tailEnd type="none" w="med" len="med"/>
+                    </a:lnT>
+                    <a:lnB w="12700" cap="flat" cmpd="sng" algn="ctr">
+                      <a:solidFill>
+                        <a:srgbClr val="0083CE"/>
+                      </a:solidFill>
+                      <a:prstDash val="solid"/>
+                      <a:round/>
+                      <a:headEnd type="none" w="med" len="med"/>
+                      <a:tailEnd type="none" w="med" len="med"/>
+                    </a:lnB>
+                    <a:noFill/>
+                  </a:tcPr>
+                </a:tc>
+                <a:extLst>
+                  <a:ext uri="{0D108BD9-81ED-4DB2-BD59-A6C34878D82A}">
+                    <a16:rowId xmlns:a16="http://schemas.microsoft.com/office/drawing/2014/main" xmlns="" val="10000"/>
+                  </a:ext>
+                </a:extLst>
+              </a:tr>
+              <a:tr h="279916">
+                <a:tc>
+                  <a:txBody>
+                    <a:bodyPr/>
+                    <a:lstStyle/>
+                    <a:p>
+                      <a:pPr marL="0" marR="0" indent="0" algn="l" defTabSz="914400" rtl="0" eaLnBrk="1" fontAlgn="auto" latinLnBrk="1" hangingPunct="1">
+                        <a:lnSpc>
+                          <a:spcPct val="100000"/>
+                        </a:lnSpc>
+                        <a:spcBef>
+                          <a:spcPts val="0"/>
+                        </a:spcBef>
+                        <a:spcAft>
+                          <a:spcPts val="0"/>
+                        </a:spcAft>
+                        <a:buClrTx/>
+                        <a:buSzTx/>
+                        <a:buFontTx/>
+                        <a:buNone/>
+                        <a:tabLst/>
+                        <a:defRPr/>
+                      </a:pPr>
+                      <a:r>
+                        <a:rPr lang="ko-KR" altLang="en-US" sz="1100" kern="1200" dirty="0">
+                          <a:latin typeface="+mn-ea"/>
+                          <a:ea typeface="+mn-ea"/>
+                          <a:cs typeface="Pretendard Variable Light" panose="02000003000000020004" pitchFamily="2" charset="-127"/>
+                        </a:rPr>
+                        <a:t>두 종류 이상의 서버</a:t>
+                      </a:r>
+                      <a:endParaRPr lang="ko-KR" altLang="en-US" sz="1100" b="0" kern="1200" dirty="0">
+                        <a:solidFill>
+                          <a:srgbClr val="000000"/>
+                        </a:solidFill>
+                        <a:latin typeface="+mn-ea"/>
+                        <a:ea typeface="+mn-ea"/>
+                        <a:cs typeface="Pretendard Variable Light" panose="02000003000000020004" pitchFamily="2" charset="-127"/>
+                      </a:endParaRPr>
+                    </a:p>
+                  </a:txBody>
+                  <a:tcPr>
+                    <a:lnL w="12700" cap="flat" cmpd="sng" algn="ctr">
+                      <a:noFill/>
+                      <a:prstDash val="solid"/>
+                      <a:round/>
+                      <a:headEnd type="none" w="med" len="med"/>
+                      <a:tailEnd type="none" w="med" len="med"/>
+                    </a:lnL>
+                    <a:lnR w="12700" cap="flat" cmpd="sng" algn="ctr">
+                      <a:noFill/>
+                      <a:prstDash val="solid"/>
+                      <a:round/>
+                      <a:headEnd type="none" w="med" len="med"/>
+                      <a:tailEnd type="none" w="med" len="med"/>
+                    </a:lnR>
+                    <a:lnT w="12700" cap="flat" cmpd="sng" algn="ctr">
+                      <a:solidFill>
+                        <a:srgbClr val="0083CE"/>
+                      </a:solidFill>
+                      <a:prstDash val="solid"/>
+                      <a:round/>
+                      <a:headEnd type="none" w="med" len="med"/>
+                      <a:tailEnd type="none" w="med" len="med"/>
+                    </a:lnT>
+                    <a:lnB w="12700" cap="flat" cmpd="sng" algn="ctr">
+                      <a:solidFill>
+                        <a:schemeClr val="bg1"/>
+                      </a:solidFill>
+                      <a:prstDash val="solid"/>
+                      <a:round/>
+                      <a:headEnd type="none" w="med" len="med"/>
+                      <a:tailEnd type="none" w="med" len="med"/>
+                    </a:lnB>
+                    <a:noFill/>
+                  </a:tcPr>
+                </a:tc>
+                <a:extLst>
+                  <a:ext uri="{0D108BD9-81ED-4DB2-BD59-A6C34878D82A}">
+                    <a16:rowId xmlns:a16="http://schemas.microsoft.com/office/drawing/2014/main" xmlns="" val="10001"/>
+                  </a:ext>
+                </a:extLst>
+              </a:tr>
+              <a:tr h="150973">
+                <a:tc>
+                  <a:txBody>
+                    <a:bodyPr/>
+                    <a:lstStyle/>
+                    <a:p>
+                      <a:pPr marL="0" marR="0" indent="0" algn="l" defTabSz="914400" rtl="0" eaLnBrk="1" fontAlgn="auto" latinLnBrk="1" hangingPunct="1">
+                        <a:lnSpc>
+                          <a:spcPct val="100000"/>
+                        </a:lnSpc>
+                        <a:spcBef>
+                          <a:spcPts val="0"/>
+                        </a:spcBef>
+                        <a:spcAft>
+                          <a:spcPts val="0"/>
+                        </a:spcAft>
+                        <a:buClrTx/>
+                        <a:buSzTx/>
+                        <a:buFontTx/>
+                        <a:buNone/>
+                        <a:tabLst/>
+                        <a:defRPr/>
+                      </a:pPr>
+                      <a:r>
+                        <a:rPr lang="ko-KR" altLang="en-US" sz="1100" dirty="0">
+                          <a:latin typeface="+mn-ea"/>
+                          <a:ea typeface="+mn-ea"/>
+                          <a:cs typeface="Pretendard Variable Light" panose="02000003000000020004" pitchFamily="2" charset="-127"/>
+                        </a:rPr>
+                        <a:t>특별한 </a:t>
+                      </a:r>
+                      <a:r>
+                        <a:rPr lang="en-US" altLang="ko-KR" sz="1100" dirty="0">
+                          <a:latin typeface="+mn-ea"/>
+                          <a:ea typeface="+mn-ea"/>
+                          <a:cs typeface="Pretendard Variable Light" panose="02000003000000020004" pitchFamily="2" charset="-127"/>
+                        </a:rPr>
+                        <a:t>H/W </a:t>
+                      </a:r>
+                      <a:r>
+                        <a:rPr lang="ko-KR" altLang="en-US" sz="1100" dirty="0">
+                          <a:latin typeface="+mn-ea"/>
+                          <a:ea typeface="+mn-ea"/>
+                          <a:cs typeface="Pretendard Variable Light" panose="02000003000000020004" pitchFamily="2" charset="-127"/>
+                        </a:rPr>
+                        <a:t>사용으로 복잡도 증가</a:t>
+                      </a:r>
+                      <a:endParaRPr lang="en-US" sz="1100" b="0" dirty="0">
+                        <a:latin typeface="+mn-ea"/>
+                        <a:ea typeface="+mn-ea"/>
+                        <a:cs typeface="Pretendard Variable Light" panose="02000003000000020004" pitchFamily="2" charset="-127"/>
+                      </a:endParaRPr>
+                    </a:p>
+                  </a:txBody>
+                  <a:tcPr>
+                    <a:lnL w="12700" cap="flat" cmpd="sng" algn="ctr">
+                      <a:noFill/>
+                      <a:prstDash val="solid"/>
+                      <a:round/>
+                      <a:headEnd type="none" w="med" len="med"/>
+                      <a:tailEnd type="none" w="med" len="med"/>
+                    </a:lnL>
+                    <a:lnR w="12700" cap="flat" cmpd="sng" algn="ctr">
+                      <a:noFill/>
+                      <a:prstDash val="solid"/>
+                      <a:round/>
+                      <a:headEnd type="none" w="med" len="med"/>
+                      <a:tailEnd type="none" w="med" len="med"/>
+                    </a:lnR>
+                    <a:lnT w="12700" cap="flat" cmpd="sng" algn="ctr">
+                      <a:solidFill>
+                        <a:schemeClr val="bg1"/>
+                      </a:solidFill>
+                      <a:prstDash val="solid"/>
+                      <a:round/>
+                      <a:headEnd type="none" w="med" len="med"/>
+                      <a:tailEnd type="none" w="med" len="med"/>
+                    </a:lnT>
+                    <a:lnB w="12700" cap="flat" cmpd="sng" algn="ctr">
+                      <a:solidFill>
+                        <a:schemeClr val="bg1"/>
+                      </a:solidFill>
+                      <a:prstDash val="solid"/>
+                      <a:round/>
+                      <a:headEnd type="none" w="med" len="med"/>
+                      <a:tailEnd type="none" w="med" len="med"/>
+                    </a:lnB>
+                    <a:noFill/>
+                  </a:tcPr>
+                </a:tc>
+                <a:extLst>
+                  <a:ext uri="{0D108BD9-81ED-4DB2-BD59-A6C34878D82A}">
+                    <a16:rowId xmlns:a16="http://schemas.microsoft.com/office/drawing/2014/main" xmlns="" val="10002"/>
+                  </a:ext>
+                </a:extLst>
+              </a:tr>
+              <a:tr h="190680">
+                <a:tc>
+                  <a:txBody>
+                    <a:bodyPr/>
+                    <a:lstStyle/>
+                    <a:p>
+                      <a:pPr marL="0" marR="0" indent="0" algn="l" defTabSz="914400" rtl="0" eaLnBrk="1" fontAlgn="auto" latinLnBrk="1" hangingPunct="1">
+                        <a:lnSpc>
+                          <a:spcPct val="100000"/>
+                        </a:lnSpc>
+                        <a:spcBef>
+                          <a:spcPts val="0"/>
+                        </a:spcBef>
+                        <a:spcAft>
+                          <a:spcPts val="0"/>
+                        </a:spcAft>
+                        <a:buClrTx/>
+                        <a:buSzTx/>
+                        <a:buFontTx/>
+                        <a:buNone/>
+                        <a:tabLst/>
+                        <a:defRPr/>
+                      </a:pPr>
+                      <a:r>
+                        <a:rPr lang="ko-KR" altLang="en-US" sz="1100" kern="1200" dirty="0">
+                          <a:latin typeface="+mn-ea"/>
+                          <a:ea typeface="+mn-ea"/>
+                          <a:cs typeface="Pretendard Variable Light" panose="02000003000000020004" pitchFamily="2" charset="-127"/>
+                        </a:rPr>
+                        <a:t>마스터 서버를 통한 작업 수행</a:t>
+                      </a:r>
+                      <a:endParaRPr lang="en-US" sz="1100" b="0" dirty="0">
+                        <a:latin typeface="+mn-ea"/>
+                        <a:ea typeface="+mn-ea"/>
+                        <a:cs typeface="Pretendard Variable Light" panose="02000003000000020004" pitchFamily="2" charset="-127"/>
+                      </a:endParaRPr>
+                    </a:p>
+                  </a:txBody>
+                  <a:tcPr>
+                    <a:lnL w="12700" cap="flat" cmpd="sng" algn="ctr">
+                      <a:noFill/>
+                      <a:prstDash val="solid"/>
+                      <a:round/>
+                      <a:headEnd type="none" w="med" len="med"/>
+                      <a:tailEnd type="none" w="med" len="med"/>
+                    </a:lnL>
+                    <a:lnR w="12700" cap="flat" cmpd="sng" algn="ctr">
+                      <a:noFill/>
+                      <a:prstDash val="solid"/>
+                      <a:round/>
+                      <a:headEnd type="none" w="med" len="med"/>
+                      <a:tailEnd type="none" w="med" len="med"/>
+                    </a:lnR>
+                    <a:lnT w="12700" cap="flat" cmpd="sng" algn="ctr">
+                      <a:solidFill>
+                        <a:schemeClr val="bg1"/>
+                      </a:solidFill>
+                      <a:prstDash val="solid"/>
+                      <a:round/>
+                      <a:headEnd type="none" w="med" len="med"/>
+                      <a:tailEnd type="none" w="med" len="med"/>
+                    </a:lnT>
+                    <a:lnB w="12700" cap="flat" cmpd="sng" algn="ctr">
+                      <a:solidFill>
+                        <a:schemeClr val="bg1"/>
+                      </a:solidFill>
+                      <a:prstDash val="solid"/>
+                      <a:round/>
+                      <a:headEnd type="none" w="med" len="med"/>
+                      <a:tailEnd type="none" w="med" len="med"/>
+                    </a:lnB>
+                    <a:noFill/>
+                  </a:tcPr>
+                </a:tc>
+                <a:extLst>
+                  <a:ext uri="{0D108BD9-81ED-4DB2-BD59-A6C34878D82A}">
+                    <a16:rowId xmlns:a16="http://schemas.microsoft.com/office/drawing/2014/main" xmlns="" val="10003"/>
+                  </a:ext>
+                </a:extLst>
+              </a:tr>
+              <a:tr h="127518">
+                <a:tc>
+                  <a:txBody>
+                    <a:bodyPr/>
+                    <a:lstStyle/>
+                    <a:p>
+                      <a:pPr algn="l"/>
+                      <a:r>
+                        <a:rPr lang="ko-KR" altLang="en-US" sz="1100" dirty="0">
+                          <a:latin typeface="+mn-ea"/>
+                          <a:ea typeface="+mn-ea"/>
+                          <a:cs typeface="Pretendard Variable Light" panose="02000003000000020004" pitchFamily="2" charset="-127"/>
+                        </a:rPr>
+                        <a:t>저가형 서버 사용</a:t>
+                      </a:r>
+                      <a:endParaRPr lang="en-US" sz="1100" b="0" dirty="0">
+                        <a:latin typeface="+mn-ea"/>
+                        <a:ea typeface="+mn-ea"/>
+                        <a:cs typeface="Pretendard Variable Light" panose="02000003000000020004" pitchFamily="2" charset="-127"/>
+                      </a:endParaRPr>
+                    </a:p>
+                  </a:txBody>
+                  <a:tcPr>
+                    <a:lnL w="12700" cap="flat" cmpd="sng" algn="ctr">
+                      <a:noFill/>
+                      <a:prstDash val="solid"/>
+                      <a:round/>
+                      <a:headEnd type="none" w="med" len="med"/>
+                      <a:tailEnd type="none" w="med" len="med"/>
+                    </a:lnL>
+                    <a:lnR w="12700" cap="flat" cmpd="sng" algn="ctr">
+                      <a:noFill/>
+                      <a:prstDash val="solid"/>
+                      <a:round/>
+                      <a:headEnd type="none" w="med" len="med"/>
+                      <a:tailEnd type="none" w="med" len="med"/>
+                    </a:lnR>
+                    <a:lnT w="12700" cap="flat" cmpd="sng" algn="ctr">
+                      <a:solidFill>
+                        <a:schemeClr val="bg1"/>
+                      </a:solidFill>
+                      <a:prstDash val="solid"/>
+                      <a:round/>
+                      <a:headEnd type="none" w="med" len="med"/>
+                      <a:tailEnd type="none" w="med" len="med"/>
+                    </a:lnT>
+                    <a:lnB w="12700" cap="flat" cmpd="sng" algn="ctr">
+                      <a:solidFill>
+                        <a:schemeClr val="bg1"/>
+                      </a:solidFill>
+                      <a:prstDash val="solid"/>
+                      <a:round/>
+                      <a:headEnd type="none" w="med" len="med"/>
+                      <a:tailEnd type="none" w="med" len="med"/>
+                    </a:lnB>
+                    <a:noFill/>
+                  </a:tcPr>
+                </a:tc>
+                <a:extLst>
+                  <a:ext uri="{0D108BD9-81ED-4DB2-BD59-A6C34878D82A}">
+                    <a16:rowId xmlns:a16="http://schemas.microsoft.com/office/drawing/2014/main" xmlns="" val="10004"/>
+                  </a:ext>
+                </a:extLst>
+              </a:tr>
+              <a:tr h="127518">
+                <a:tc>
+                  <a:txBody>
+                    <a:bodyPr/>
+                    <a:lstStyle/>
+                    <a:p>
+                      <a:pPr algn="l"/>
+                      <a:r>
+                        <a:rPr lang="ko-KR" altLang="en-US" sz="1100" dirty="0">
+                          <a:latin typeface="+mn-ea"/>
+                          <a:ea typeface="+mn-ea"/>
+                          <a:cs typeface="Pretendard Variable Light" panose="02000003000000020004" pitchFamily="2" charset="-127"/>
+                        </a:rPr>
+                        <a:t>관리</a:t>
+                      </a:r>
+                      <a:r>
+                        <a:rPr lang="en-US" altLang="ko-KR" sz="1100" dirty="0">
+                          <a:latin typeface="+mn-ea"/>
+                          <a:ea typeface="+mn-ea"/>
+                          <a:cs typeface="Pretendard Variable Light" panose="02000003000000020004" pitchFamily="2" charset="-127"/>
+                        </a:rPr>
+                        <a:t>/</a:t>
+                      </a:r>
+                      <a:r>
+                        <a:rPr lang="ko-KR" altLang="en-US" sz="1100" dirty="0">
+                          <a:latin typeface="+mn-ea"/>
+                          <a:ea typeface="+mn-ea"/>
+                          <a:cs typeface="Pretendard Variable Light" panose="02000003000000020004" pitchFamily="2" charset="-127"/>
+                        </a:rPr>
+                        <a:t>운영에 다양한 고려사항 존재</a:t>
+                      </a:r>
+                      <a:endParaRPr lang="en-US" sz="1100" dirty="0">
+                        <a:latin typeface="+mn-ea"/>
+                        <a:ea typeface="+mn-ea"/>
+                        <a:cs typeface="Pretendard Variable Light" panose="02000003000000020004" pitchFamily="2" charset="-127"/>
+                      </a:endParaRPr>
+                    </a:p>
+                  </a:txBody>
+                  <a:tcPr>
+                    <a:lnL w="12700" cap="flat" cmpd="sng" algn="ctr">
+                      <a:noFill/>
+                      <a:prstDash val="solid"/>
+                      <a:round/>
+                      <a:headEnd type="none" w="med" len="med"/>
+                      <a:tailEnd type="none" w="med" len="med"/>
+                    </a:lnL>
+                    <a:lnR w="12700" cap="flat" cmpd="sng" algn="ctr">
+                      <a:noFill/>
+                      <a:prstDash val="solid"/>
+                      <a:round/>
+                      <a:headEnd type="none" w="med" len="med"/>
+                      <a:tailEnd type="none" w="med" len="med"/>
+                    </a:lnR>
+                    <a:lnT w="12700" cap="flat" cmpd="sng" algn="ctr">
+                      <a:solidFill>
+                        <a:schemeClr val="bg1"/>
+                      </a:solidFill>
+                      <a:prstDash val="solid"/>
+                      <a:round/>
+                      <a:headEnd type="none" w="med" len="med"/>
+                      <a:tailEnd type="none" w="med" len="med"/>
+                    </a:lnT>
+                    <a:lnB w="12700" cap="flat" cmpd="sng" algn="ctr">
+                      <a:solidFill>
+                        <a:srgbClr val="0083CE"/>
+                      </a:solidFill>
+                      <a:prstDash val="solid"/>
+                      <a:round/>
+                      <a:headEnd type="none" w="med" len="med"/>
+                      <a:tailEnd type="none" w="med" len="med"/>
+                    </a:lnB>
+                    <a:noFill/>
+                  </a:tcPr>
+                </a:tc>
+                <a:extLst>
+                  <a:ext uri="{0D108BD9-81ED-4DB2-BD59-A6C34878D82A}">
+                    <a16:rowId xmlns:a16="http://schemas.microsoft.com/office/drawing/2014/main" xmlns="" val="10005"/>
+                  </a:ext>
+                </a:extLst>
+              </a:tr>
+            </a:tbl>
+          </a:graphicData>
+        </a:graphic>
+      </p:graphicFrame>
+      <p:graphicFrame>
+        <p:nvGraphicFramePr>
+          <p:cNvPr id="87" name="표 86"/>
+          <p:cNvGraphicFramePr>
+            <a:graphicFrameLocks noGrp="1"/>
+          </p:cNvGraphicFramePr>
+          <p:nvPr>
+            <p:extLst>
+              <p:ext uri="{D42A27DB-BD31-4B8C-83A1-F6EECF244321}">
+                <p14:modId xmlns:p14="http://schemas.microsoft.com/office/powerpoint/2010/main" val="3158082494"/>
+              </p:ext>
+            </p:extLst>
+          </p:nvPr>
+        </p:nvGraphicFramePr>
+        <p:xfrm>
+          <a:off x="5717803" y="4070313"/>
+          <a:ext cx="3721808" cy="1621036"/>
+        </p:xfrm>
+        <a:graphic>
+          <a:graphicData uri="http://schemas.openxmlformats.org/drawingml/2006/table">
+            <a:tbl>
+              <a:tblPr firstRow="1" bandRow="1">
+                <a:tableStyleId>{5C22544A-7EE6-4342-B048-85BDC9FD1C3A}</a:tableStyleId>
+              </a:tblPr>
+              <a:tblGrid>
+                <a:gridCol w="3721808">
+                  <a:extLst>
+                    <a:ext uri="{9D8B030D-6E8A-4147-A177-3AD203B41FA5}">
+                      <a16:colId xmlns:a16="http://schemas.microsoft.com/office/drawing/2014/main" xmlns="" val="20000"/>
+                    </a:ext>
+                  </a:extLst>
+                </a:gridCol>
+              </a:tblGrid>
+              <a:tr h="218465">
+                <a:tc>
+                  <a:txBody>
+                    <a:bodyPr/>
+                    <a:lstStyle/>
+                    <a:p>
+                      <a:pPr algn="ctr" latinLnBrk="1"/>
+                      <a:r>
+                        <a:rPr lang="en-US" altLang="ko-KR" sz="1400" dirty="0">
+                          <a:solidFill>
+                            <a:srgbClr val="0081CD"/>
+                          </a:solidFill>
+                          <a:latin typeface="+mn-ea"/>
+                          <a:ea typeface="+mn-ea"/>
+                        </a:rPr>
+                        <a:t>VERTICA</a:t>
+                      </a:r>
+                      <a:endParaRPr lang="ko-KR" altLang="en-US" sz="1400" dirty="0">
+                        <a:solidFill>
+                          <a:srgbClr val="0081CD"/>
+                        </a:solidFill>
+                        <a:latin typeface="+mn-ea"/>
+                        <a:ea typeface="+mn-ea"/>
+                      </a:endParaRPr>
+                    </a:p>
+                  </a:txBody>
+                  <a:tcPr>
+                    <a:lnL w="12700" cap="flat" cmpd="sng" algn="ctr">
+                      <a:noFill/>
+                      <a:prstDash val="solid"/>
+                      <a:round/>
+                      <a:headEnd type="none" w="med" len="med"/>
+                      <a:tailEnd type="none" w="med" len="med"/>
+                    </a:lnL>
+                    <a:lnR w="12700" cap="flat" cmpd="sng" algn="ctr">
+                      <a:noFill/>
+                      <a:prstDash val="solid"/>
+                      <a:round/>
+                      <a:headEnd type="none" w="med" len="med"/>
+                      <a:tailEnd type="none" w="med" len="med"/>
+                    </a:lnR>
+                    <a:lnT w="12700" cap="flat" cmpd="sng" algn="ctr">
+                      <a:solidFill>
+                        <a:srgbClr val="0083CE"/>
+                      </a:solidFill>
+                      <a:prstDash val="solid"/>
+                      <a:round/>
+                      <a:headEnd type="none" w="med" len="med"/>
+                      <a:tailEnd type="none" w="med" len="med"/>
+                    </a:lnT>
+                    <a:lnB w="12700" cap="flat" cmpd="sng" algn="ctr">
+                      <a:solidFill>
+                        <a:srgbClr val="0083CE"/>
+                      </a:solidFill>
+                      <a:prstDash val="solid"/>
+                      <a:round/>
+                      <a:headEnd type="none" w="med" len="med"/>
+                      <a:tailEnd type="none" w="med" len="med"/>
+                    </a:lnB>
+                    <a:noFill/>
+                  </a:tcPr>
+                </a:tc>
+                <a:extLst>
+                  <a:ext uri="{0D108BD9-81ED-4DB2-BD59-A6C34878D82A}">
+                    <a16:rowId xmlns:a16="http://schemas.microsoft.com/office/drawing/2014/main" xmlns="" val="10000"/>
+                  </a:ext>
+                </a:extLst>
+              </a:tr>
+              <a:tr h="279916">
+                <a:tc>
+                  <a:txBody>
+                    <a:bodyPr/>
+                    <a:lstStyle/>
+                    <a:p>
+                      <a:pPr marL="0" marR="0" indent="0" algn="l" defTabSz="914400" rtl="0" eaLnBrk="1" fontAlgn="auto" latinLnBrk="1" hangingPunct="1">
+                        <a:lnSpc>
+                          <a:spcPct val="100000"/>
+                        </a:lnSpc>
+                        <a:spcBef>
+                          <a:spcPts val="0"/>
+                        </a:spcBef>
+                        <a:spcAft>
+                          <a:spcPts val="0"/>
+                        </a:spcAft>
+                        <a:buClrTx/>
+                        <a:buSzTx/>
+                        <a:buFontTx/>
+                        <a:buNone/>
+                        <a:tabLst/>
+                        <a:defRPr/>
+                      </a:pPr>
+                      <a:r>
+                        <a:rPr lang="ko-KR" altLang="en-US" sz="1100" kern="1200" dirty="0">
+                          <a:solidFill>
+                            <a:schemeClr val="dk1"/>
+                          </a:solidFill>
+                          <a:latin typeface="+mn-ea"/>
+                          <a:ea typeface="+mn-ea"/>
+                          <a:cs typeface="Pretendard Variable Light" panose="02000003000000020004" pitchFamily="2" charset="-127"/>
+                        </a:rPr>
+                        <a:t>동일 스펙 </a:t>
+                      </a:r>
+                      <a:r>
+                        <a:rPr lang="en-US" altLang="ko-KR" sz="1100" kern="1200" dirty="0">
+                          <a:solidFill>
+                            <a:schemeClr val="dk1"/>
+                          </a:solidFill>
+                          <a:latin typeface="+mn-ea"/>
+                          <a:ea typeface="+mn-ea"/>
+                          <a:cs typeface="Pretendard Variable Light" panose="02000003000000020004" pitchFamily="2" charset="-127"/>
+                        </a:rPr>
+                        <a:t>/ </a:t>
+                      </a:r>
+                      <a:r>
+                        <a:rPr lang="ko-KR" altLang="en-US" sz="1100" kern="1200" dirty="0">
+                          <a:solidFill>
+                            <a:schemeClr val="dk1"/>
+                          </a:solidFill>
+                          <a:latin typeface="+mn-ea"/>
+                          <a:ea typeface="+mn-ea"/>
+                          <a:cs typeface="Pretendard Variable Light" panose="02000003000000020004" pitchFamily="2" charset="-127"/>
+                        </a:rPr>
+                        <a:t>동일 구성의 서버</a:t>
+                      </a:r>
+                      <a:endParaRPr lang="en-US" altLang="ko-KR" sz="1100" kern="1200" dirty="0">
+                        <a:solidFill>
+                          <a:schemeClr val="dk1"/>
+                        </a:solidFill>
+                        <a:latin typeface="+mn-ea"/>
+                        <a:ea typeface="+mn-ea"/>
+                        <a:cs typeface="Pretendard Variable Light" panose="02000003000000020004" pitchFamily="2" charset="-127"/>
+                      </a:endParaRPr>
+                    </a:p>
+                  </a:txBody>
+                  <a:tcPr>
+                    <a:lnL w="12700" cap="flat" cmpd="sng" algn="ctr">
+                      <a:noFill/>
+                      <a:prstDash val="solid"/>
+                      <a:round/>
+                      <a:headEnd type="none" w="med" len="med"/>
+                      <a:tailEnd type="none" w="med" len="med"/>
+                    </a:lnL>
+                    <a:lnR w="12700" cap="flat" cmpd="sng" algn="ctr">
+                      <a:noFill/>
+                      <a:prstDash val="solid"/>
+                      <a:round/>
+                      <a:headEnd type="none" w="med" len="med"/>
+                      <a:tailEnd type="none" w="med" len="med"/>
+                    </a:lnR>
+                    <a:lnT w="12700" cap="flat" cmpd="sng" algn="ctr">
+                      <a:solidFill>
+                        <a:srgbClr val="0083CE"/>
+                      </a:solidFill>
+                      <a:prstDash val="solid"/>
+                      <a:round/>
+                      <a:headEnd type="none" w="med" len="med"/>
+                      <a:tailEnd type="none" w="med" len="med"/>
+                    </a:lnT>
+                    <a:lnB w="12700" cap="flat" cmpd="sng" algn="ctr">
+                      <a:solidFill>
+                        <a:schemeClr val="bg1"/>
+                      </a:solidFill>
+                      <a:prstDash val="solid"/>
+                      <a:round/>
+                      <a:headEnd type="none" w="med" len="med"/>
+                      <a:tailEnd type="none" w="med" len="med"/>
+                    </a:lnB>
+                    <a:noFill/>
+                  </a:tcPr>
+                </a:tc>
+                <a:extLst>
+                  <a:ext uri="{0D108BD9-81ED-4DB2-BD59-A6C34878D82A}">
+                    <a16:rowId xmlns:a16="http://schemas.microsoft.com/office/drawing/2014/main" xmlns="" val="10001"/>
+                  </a:ext>
+                </a:extLst>
+              </a:tr>
+              <a:tr h="150973">
+                <a:tc>
+                  <a:txBody>
+                    <a:bodyPr/>
+                    <a:lstStyle/>
+                    <a:p>
+                      <a:pPr marL="0" marR="0" indent="0" algn="l" defTabSz="914400" rtl="0" eaLnBrk="1" fontAlgn="auto" latinLnBrk="1" hangingPunct="1">
+                        <a:lnSpc>
+                          <a:spcPct val="100000"/>
+                        </a:lnSpc>
+                        <a:spcBef>
+                          <a:spcPts val="0"/>
+                        </a:spcBef>
+                        <a:spcAft>
+                          <a:spcPts val="0"/>
+                        </a:spcAft>
+                        <a:buClrTx/>
+                        <a:buSzTx/>
+                        <a:buFontTx/>
+                        <a:buNone/>
+                        <a:tabLst/>
+                        <a:defRPr/>
+                      </a:pPr>
+                      <a:r>
+                        <a:rPr lang="ko-KR" altLang="en-US" sz="1100" kern="1200" dirty="0">
+                          <a:solidFill>
+                            <a:schemeClr val="dk1"/>
+                          </a:solidFill>
+                          <a:latin typeface="+mn-ea"/>
+                          <a:ea typeface="+mn-ea"/>
+                          <a:cs typeface="Pretendard Variable Light" panose="02000003000000020004" pitchFamily="2" charset="-127"/>
+                        </a:rPr>
+                        <a:t>단순한 구성</a:t>
+                      </a:r>
+                    </a:p>
+                  </a:txBody>
+                  <a:tcPr>
+                    <a:lnL w="12700" cap="flat" cmpd="sng" algn="ctr">
+                      <a:noFill/>
+                      <a:prstDash val="solid"/>
+                      <a:round/>
+                      <a:headEnd type="none" w="med" len="med"/>
+                      <a:tailEnd type="none" w="med" len="med"/>
+                    </a:lnL>
+                    <a:lnR w="12700" cap="flat" cmpd="sng" algn="ctr">
+                      <a:noFill/>
+                      <a:prstDash val="solid"/>
+                      <a:round/>
+                      <a:headEnd type="none" w="med" len="med"/>
+                      <a:tailEnd type="none" w="med" len="med"/>
+                    </a:lnR>
+                    <a:lnT w="12700" cap="flat" cmpd="sng" algn="ctr">
+                      <a:solidFill>
+                        <a:schemeClr val="bg1"/>
+                      </a:solidFill>
+                      <a:prstDash val="solid"/>
+                      <a:round/>
+                      <a:headEnd type="none" w="med" len="med"/>
+                      <a:tailEnd type="none" w="med" len="med"/>
+                    </a:lnT>
+                    <a:lnB w="12700" cap="flat" cmpd="sng" algn="ctr">
+                      <a:solidFill>
+                        <a:schemeClr val="bg1"/>
+                      </a:solidFill>
+                      <a:prstDash val="solid"/>
+                      <a:round/>
+                      <a:headEnd type="none" w="med" len="med"/>
+                      <a:tailEnd type="none" w="med" len="med"/>
+                    </a:lnB>
+                    <a:noFill/>
+                  </a:tcPr>
+                </a:tc>
+                <a:extLst>
+                  <a:ext uri="{0D108BD9-81ED-4DB2-BD59-A6C34878D82A}">
+                    <a16:rowId xmlns:a16="http://schemas.microsoft.com/office/drawing/2014/main" xmlns="" val="10002"/>
+                  </a:ext>
+                </a:extLst>
+              </a:tr>
+              <a:tr h="190680">
+                <a:tc>
+                  <a:txBody>
+                    <a:bodyPr/>
+                    <a:lstStyle/>
+                    <a:p>
+                      <a:pPr marL="0" marR="0" indent="0" algn="l" defTabSz="914400" rtl="0" eaLnBrk="1" fontAlgn="auto" latinLnBrk="1" hangingPunct="1">
+                        <a:lnSpc>
+                          <a:spcPct val="100000"/>
+                        </a:lnSpc>
+                        <a:spcBef>
+                          <a:spcPts val="0"/>
+                        </a:spcBef>
+                        <a:spcAft>
+                          <a:spcPts val="0"/>
+                        </a:spcAft>
+                        <a:buClrTx/>
+                        <a:buSzTx/>
+                        <a:buFontTx/>
+                        <a:buNone/>
+                        <a:tabLst/>
+                        <a:defRPr/>
+                      </a:pPr>
+                      <a:r>
+                        <a:rPr lang="ko-KR" altLang="en-US" sz="1100" kern="1200" dirty="0">
+                          <a:solidFill>
+                            <a:schemeClr val="dk1"/>
+                          </a:solidFill>
+                          <a:latin typeface="+mn-ea"/>
+                          <a:ea typeface="+mn-ea"/>
+                          <a:cs typeface="Pretendard Variable Light" panose="02000003000000020004" pitchFamily="2" charset="-127"/>
+                        </a:rPr>
+                        <a:t>아무 서버에나 작업을 요청하면 전 노드가 병렬 수행</a:t>
+                      </a:r>
+                    </a:p>
+                  </a:txBody>
+                  <a:tcPr>
+                    <a:lnL w="12700" cap="flat" cmpd="sng" algn="ctr">
+                      <a:noFill/>
+                      <a:prstDash val="solid"/>
+                      <a:round/>
+                      <a:headEnd type="none" w="med" len="med"/>
+                      <a:tailEnd type="none" w="med" len="med"/>
+                    </a:lnL>
+                    <a:lnR w="12700" cap="flat" cmpd="sng" algn="ctr">
+                      <a:noFill/>
+                      <a:prstDash val="solid"/>
+                      <a:round/>
+                      <a:headEnd type="none" w="med" len="med"/>
+                      <a:tailEnd type="none" w="med" len="med"/>
+                    </a:lnR>
+                    <a:lnT w="12700" cap="flat" cmpd="sng" algn="ctr">
+                      <a:solidFill>
+                        <a:schemeClr val="bg1"/>
+                      </a:solidFill>
+                      <a:prstDash val="solid"/>
+                      <a:round/>
+                      <a:headEnd type="none" w="med" len="med"/>
+                      <a:tailEnd type="none" w="med" len="med"/>
+                    </a:lnT>
+                    <a:lnB w="12700" cap="flat" cmpd="sng" algn="ctr">
+                      <a:solidFill>
+                        <a:schemeClr val="bg1"/>
+                      </a:solidFill>
+                      <a:prstDash val="solid"/>
+                      <a:round/>
+                      <a:headEnd type="none" w="med" len="med"/>
+                      <a:tailEnd type="none" w="med" len="med"/>
+                    </a:lnB>
+                    <a:noFill/>
+                  </a:tcPr>
+                </a:tc>
+                <a:extLst>
+                  <a:ext uri="{0D108BD9-81ED-4DB2-BD59-A6C34878D82A}">
+                    <a16:rowId xmlns:a16="http://schemas.microsoft.com/office/drawing/2014/main" xmlns="" val="10003"/>
+                  </a:ext>
+                </a:extLst>
+              </a:tr>
+              <a:tr h="127518">
+                <a:tc>
+                  <a:txBody>
+                    <a:bodyPr/>
+                    <a:lstStyle/>
+                    <a:p>
+                      <a:pPr algn="l"/>
+                      <a:r>
+                        <a:rPr lang="ko-KR" altLang="en-US" sz="1100" kern="1200" dirty="0">
+                          <a:solidFill>
+                            <a:schemeClr val="dk1"/>
+                          </a:solidFill>
+                          <a:latin typeface="+mn-ea"/>
+                          <a:ea typeface="+mn-ea"/>
+                          <a:cs typeface="Pretendard Variable Light" panose="02000003000000020004" pitchFamily="2" charset="-127"/>
+                        </a:rPr>
+                        <a:t>시장의 신뢰도를 확보한 서버 사용</a:t>
+                      </a:r>
+                      <a:endParaRPr lang="en-US" sz="1100" kern="1200" dirty="0">
+                        <a:solidFill>
+                          <a:schemeClr val="dk1"/>
+                        </a:solidFill>
+                        <a:latin typeface="+mn-ea"/>
+                        <a:ea typeface="+mn-ea"/>
+                        <a:cs typeface="Pretendard Variable Light" panose="02000003000000020004" pitchFamily="2" charset="-127"/>
+                      </a:endParaRPr>
+                    </a:p>
+                  </a:txBody>
+                  <a:tcPr>
+                    <a:lnL w="12700" cap="flat" cmpd="sng" algn="ctr">
+                      <a:noFill/>
+                      <a:prstDash val="solid"/>
+                      <a:round/>
+                      <a:headEnd type="none" w="med" len="med"/>
+                      <a:tailEnd type="none" w="med" len="med"/>
+                    </a:lnL>
+                    <a:lnR w="12700" cap="flat" cmpd="sng" algn="ctr">
+                      <a:noFill/>
+                      <a:prstDash val="solid"/>
+                      <a:round/>
+                      <a:headEnd type="none" w="med" len="med"/>
+                      <a:tailEnd type="none" w="med" len="med"/>
+                    </a:lnR>
+                    <a:lnT w="12700" cap="flat" cmpd="sng" algn="ctr">
+                      <a:solidFill>
+                        <a:schemeClr val="bg1"/>
+                      </a:solidFill>
+                      <a:prstDash val="solid"/>
+                      <a:round/>
+                      <a:headEnd type="none" w="med" len="med"/>
+                      <a:tailEnd type="none" w="med" len="med"/>
+                    </a:lnT>
+                    <a:lnB w="12700" cap="flat" cmpd="sng" algn="ctr">
+                      <a:solidFill>
+                        <a:schemeClr val="bg1"/>
+                      </a:solidFill>
+                      <a:prstDash val="solid"/>
+                      <a:round/>
+                      <a:headEnd type="none" w="med" len="med"/>
+                      <a:tailEnd type="none" w="med" len="med"/>
+                    </a:lnB>
+                    <a:noFill/>
+                  </a:tcPr>
+                </a:tc>
+                <a:extLst>
+                  <a:ext uri="{0D108BD9-81ED-4DB2-BD59-A6C34878D82A}">
+                    <a16:rowId xmlns:a16="http://schemas.microsoft.com/office/drawing/2014/main" xmlns="" val="10004"/>
+                  </a:ext>
+                </a:extLst>
+              </a:tr>
+              <a:tr h="127518">
+                <a:tc>
+                  <a:txBody>
+                    <a:bodyPr/>
+                    <a:lstStyle/>
+                    <a:p>
+                      <a:pPr algn="l"/>
+                      <a:r>
+                        <a:rPr lang="ko-KR" altLang="en-US" sz="1100" kern="1200" dirty="0">
+                          <a:solidFill>
+                            <a:schemeClr val="dk1"/>
+                          </a:solidFill>
+                          <a:latin typeface="+mn-ea"/>
+                          <a:ea typeface="+mn-ea"/>
+                          <a:cs typeface="Pretendard Variable Light" panose="02000003000000020004" pitchFamily="2" charset="-127"/>
+                        </a:rPr>
+                        <a:t>관리 및 사용 용이성 확보</a:t>
+                      </a:r>
+                      <a:endParaRPr lang="en-US" sz="1100" kern="1200" dirty="0">
+                        <a:solidFill>
+                          <a:schemeClr val="dk1"/>
+                        </a:solidFill>
+                        <a:latin typeface="+mn-ea"/>
+                        <a:ea typeface="+mn-ea"/>
+                        <a:cs typeface="Pretendard Variable Light" panose="02000003000000020004" pitchFamily="2" charset="-127"/>
+                      </a:endParaRPr>
+                    </a:p>
+                  </a:txBody>
+                  <a:tcPr>
+                    <a:lnL w="12700" cap="flat" cmpd="sng" algn="ctr">
+                      <a:noFill/>
+                      <a:prstDash val="solid"/>
+                      <a:round/>
+                      <a:headEnd type="none" w="med" len="med"/>
+                      <a:tailEnd type="none" w="med" len="med"/>
+                    </a:lnL>
+                    <a:lnR w="12700" cap="flat" cmpd="sng" algn="ctr">
+                      <a:noFill/>
+                      <a:prstDash val="solid"/>
+                      <a:round/>
+                      <a:headEnd type="none" w="med" len="med"/>
+                      <a:tailEnd type="none" w="med" len="med"/>
+                    </a:lnR>
+                    <a:lnT w="12700" cap="flat" cmpd="sng" algn="ctr">
+                      <a:solidFill>
+                        <a:schemeClr val="bg1"/>
+                      </a:solidFill>
+                      <a:prstDash val="solid"/>
+                      <a:round/>
+                      <a:headEnd type="none" w="med" len="med"/>
+                      <a:tailEnd type="none" w="med" len="med"/>
+                    </a:lnT>
+                    <a:lnB w="12700" cap="flat" cmpd="sng" algn="ctr">
+                      <a:solidFill>
+                        <a:srgbClr val="0083CE"/>
+                      </a:solidFill>
+                      <a:prstDash val="solid"/>
+                      <a:round/>
+                      <a:headEnd type="none" w="med" len="med"/>
+                      <a:tailEnd type="none" w="med" len="med"/>
+                    </a:lnB>
+                    <a:noFill/>
+                  </a:tcPr>
+                </a:tc>
+                <a:extLst>
+                  <a:ext uri="{0D108BD9-81ED-4DB2-BD59-A6C34878D82A}">
+                    <a16:rowId xmlns:a16="http://schemas.microsoft.com/office/drawing/2014/main" xmlns="" val="10005"/>
+                  </a:ext>
+                </a:extLst>
+              </a:tr>
+            </a:tbl>
+          </a:graphicData>
+        </a:graphic>
+      </p:graphicFrame>
+      <p:pic>
+        <p:nvPicPr>
+          <p:cNvPr id="89" name="Picture 2"/>
+          <p:cNvPicPr>
+            <a:picLocks noChangeAspect="1" noChangeArrowheads="1"/>
+          </p:cNvPicPr>
+          <p:nvPr/>
+        </p:nvPicPr>
+        <p:blipFill>
+          <a:blip r:embed="rId3" cstate="print"/>
+          <a:srcRect/>
+          <a:stretch>
+            <a:fillRect/>
+          </a:stretch>
+        </p:blipFill>
+        <p:spPr bwMode="auto">
+          <a:xfrm>
+            <a:off x="331393" y="6623929"/>
+            <a:ext cx="4850208" cy="2371302"/>
+          </a:xfrm>
+          <a:prstGeom prst="rect">
+            <a:avLst/>
+          </a:prstGeom>
+          <a:noFill/>
+          <a:ln w="9525">
+            <a:noFill/>
+            <a:miter lim="800000"/>
+            <a:headEnd/>
+            <a:tailEnd/>
+          </a:ln>
+          <a:effectLst/>
+        </p:spPr>
+      </p:pic>
+      <p:sp>
+        <p:nvSpPr>
+          <p:cNvPr id="90" name="내용 개체 틀 2"/>
+          <p:cNvSpPr txBox="1">
+            <a:spLocks/>
+          </p:cNvSpPr>
+          <p:nvPr/>
+        </p:nvSpPr>
+        <p:spPr bwMode="auto">
+          <a:xfrm>
+            <a:off x="5290203" y="7000393"/>
+            <a:ext cx="4275845" cy="1846659"/>
+          </a:xfrm>
+          <a:prstGeom prst="rect">
+            <a:avLst/>
+          </a:prstGeom>
+          <a:solidFill>
+            <a:schemeClr val="bg1"/>
+          </a:solidFill>
+          <a:ln w="9525">
+            <a:noFill/>
+            <a:miter lim="800000"/>
+            <a:headEnd/>
+            <a:tailEnd/>
+          </a:ln>
+        </p:spPr>
+        <p:txBody>
+          <a:bodyPr vert="horz" wrap="square" lIns="91440" tIns="45720" rIns="91440" bIns="45720" numCol="1" anchor="t" anchorCtr="0" compatLnSpc="1">
+            <a:prstTxWarp prst="textNoShape">
+              <a:avLst/>
+            </a:prstTxWarp>
+            <a:spAutoFit/>
+          </a:bodyPr>
+          <a:lstStyle/>
+          <a:p>
+            <a:pPr marL="0" lvl="1">
+              <a:lnSpc>
+                <a:spcPct val="200000"/>
+              </a:lnSpc>
+              <a:buClr>
+                <a:schemeClr val="tx2"/>
+              </a:buClr>
+              <a:defRPr/>
+            </a:pPr>
+            <a:r>
+              <a:rPr lang="ko-KR" altLang="en-US" sz="1000" b="1" kern="0" dirty="0">
+                <a:solidFill>
+                  <a:srgbClr val="0083CE"/>
+                </a:solidFill>
+                <a:latin typeface="+mn-ea"/>
+                <a:cs typeface="Pretendard Variable SemiBold" panose="02000003000000020004" pitchFamily="2" charset="-127"/>
+              </a:rPr>
+              <a:t>◆</a:t>
+            </a:r>
+            <a:r>
+              <a:rPr lang="ko-KR" altLang="en-US" sz="1100" b="1" kern="0" dirty="0">
+                <a:latin typeface="+mn-ea"/>
+                <a:cs typeface="Pretendard Variable SemiBold" panose="02000003000000020004" pitchFamily="2" charset="-127"/>
+              </a:rPr>
+              <a:t> 압축과 질의가 물리적인 </a:t>
+            </a:r>
+            <a:r>
+              <a:rPr lang="en-US" altLang="ko-KR" sz="1100" b="1" kern="0" dirty="0">
+                <a:latin typeface="+mn-ea"/>
+                <a:cs typeface="Pretendard Variable SemiBold" panose="02000003000000020004" pitchFamily="2" charset="-127"/>
+              </a:rPr>
+              <a:t>I/O </a:t>
+            </a:r>
+            <a:r>
+              <a:rPr lang="ko-KR" altLang="en-US" sz="1100" b="1" kern="0" dirty="0">
+                <a:latin typeface="+mn-ea"/>
+                <a:cs typeface="Pretendard Variable SemiBold" panose="02000003000000020004" pitchFamily="2" charset="-127"/>
+              </a:rPr>
+              <a:t>레벨부터 컬럼 단위로 처리</a:t>
+            </a:r>
+          </a:p>
+          <a:p>
+            <a:pPr marL="0" lvl="1">
+              <a:lnSpc>
+                <a:spcPct val="200000"/>
+              </a:lnSpc>
+              <a:buClr>
+                <a:schemeClr val="tx2"/>
+              </a:buClr>
+              <a:defRPr/>
+            </a:pPr>
+            <a:r>
+              <a:rPr lang="ko-KR" altLang="en-US" sz="1000" b="1" kern="0" dirty="0">
+                <a:solidFill>
+                  <a:srgbClr val="0083CE"/>
+                </a:solidFill>
+                <a:latin typeface="+mn-ea"/>
+                <a:cs typeface="Pretendard Variable SemiBold" panose="02000003000000020004" pitchFamily="2" charset="-127"/>
+              </a:rPr>
+              <a:t>◆</a:t>
+            </a:r>
+            <a:r>
+              <a:rPr lang="ko-KR" altLang="en-US" sz="1100" b="1" kern="0" dirty="0">
+                <a:latin typeface="+mn-ea"/>
+                <a:cs typeface="Pretendard Variable SemiBold" panose="02000003000000020004" pitchFamily="2" charset="-127"/>
+              </a:rPr>
+              <a:t> </a:t>
+            </a:r>
+            <a:r>
+              <a:rPr lang="ko-KR" altLang="en-US" sz="1100" b="1" kern="0" dirty="0" err="1">
+                <a:latin typeface="+mn-ea"/>
+                <a:cs typeface="Pretendard Variable SemiBold" panose="02000003000000020004" pitchFamily="2" charset="-127"/>
+              </a:rPr>
+              <a:t>컬럼</a:t>
+            </a:r>
+            <a:r>
+              <a:rPr lang="ko-KR" altLang="en-US" sz="1100" b="1" kern="0" dirty="0">
+                <a:latin typeface="+mn-ea"/>
+                <a:cs typeface="Pretendard Variable SemiBold" panose="02000003000000020004" pitchFamily="2" charset="-127"/>
+              </a:rPr>
+              <a:t> 기반 저장 기술에 맞는 쿼리 옵티마이저</a:t>
+            </a:r>
+          </a:p>
+          <a:p>
+            <a:pPr marL="0" lvl="1">
+              <a:lnSpc>
+                <a:spcPct val="200000"/>
+              </a:lnSpc>
+              <a:buClr>
+                <a:schemeClr val="tx2"/>
+              </a:buClr>
+              <a:defRPr/>
+            </a:pPr>
+            <a:r>
+              <a:rPr lang="ko-KR" altLang="en-US" sz="1000" b="1" kern="0" dirty="0">
+                <a:solidFill>
+                  <a:srgbClr val="0083CE"/>
+                </a:solidFill>
+                <a:latin typeface="+mn-ea"/>
+                <a:cs typeface="Pretendard Variable SemiBold" panose="02000003000000020004" pitchFamily="2" charset="-127"/>
+              </a:rPr>
+              <a:t>◆</a:t>
+            </a:r>
+            <a:r>
+              <a:rPr lang="ko-KR" altLang="en-US" sz="1100" b="1" kern="0" dirty="0">
+                <a:latin typeface="+mn-ea"/>
+                <a:cs typeface="Pretendard Variable SemiBold" panose="02000003000000020004" pitchFamily="2" charset="-127"/>
+              </a:rPr>
+              <a:t> </a:t>
+            </a:r>
+            <a:r>
+              <a:rPr lang="ko-KR" altLang="en-US" sz="1100" b="1" kern="0" dirty="0" err="1">
+                <a:latin typeface="+mn-ea"/>
+                <a:cs typeface="Pretendard Variable SemiBold" panose="02000003000000020004" pitchFamily="2" charset="-127"/>
+              </a:rPr>
+              <a:t>컬럼</a:t>
+            </a:r>
+            <a:r>
+              <a:rPr lang="ko-KR" altLang="en-US" sz="1100" b="1" kern="0" dirty="0">
+                <a:latin typeface="+mn-ea"/>
+                <a:cs typeface="Pretendard Variable SemiBold" panose="02000003000000020004" pitchFamily="2" charset="-127"/>
+              </a:rPr>
+              <a:t> 단위 저장</a:t>
+            </a:r>
+            <a:r>
+              <a:rPr lang="en-US" altLang="ko-KR" sz="1100" b="1" kern="0" dirty="0">
+                <a:latin typeface="+mn-ea"/>
+                <a:cs typeface="Pretendard Variable SemiBold" panose="02000003000000020004" pitchFamily="2" charset="-127"/>
+              </a:rPr>
+              <a:t>, </a:t>
+            </a:r>
+            <a:r>
+              <a:rPr lang="ko-KR" altLang="en-US" sz="1100" b="1" kern="0" dirty="0">
+                <a:latin typeface="+mn-ea"/>
+                <a:cs typeface="Pretendard Variable SemiBold" panose="02000003000000020004" pitchFamily="2" charset="-127"/>
+              </a:rPr>
+              <a:t>처리를 위한 별도의 옵션이나 절차가 불필요</a:t>
+            </a:r>
+          </a:p>
+          <a:p>
+            <a:pPr marL="0" lvl="1">
+              <a:lnSpc>
+                <a:spcPct val="200000"/>
+              </a:lnSpc>
+              <a:buClr>
+                <a:schemeClr val="tx2"/>
+              </a:buClr>
+              <a:defRPr/>
+            </a:pPr>
+            <a:r>
+              <a:rPr lang="ko-KR" altLang="en-US" sz="1000" b="1" kern="0" dirty="0">
+                <a:solidFill>
+                  <a:srgbClr val="0083CE"/>
+                </a:solidFill>
+                <a:latin typeface="+mn-ea"/>
+                <a:cs typeface="Pretendard Variable SemiBold" panose="02000003000000020004" pitchFamily="2" charset="-127"/>
+              </a:rPr>
+              <a:t>◆</a:t>
+            </a:r>
+            <a:r>
+              <a:rPr lang="ko-KR" altLang="en-US" sz="1100" b="1" kern="0" dirty="0">
+                <a:latin typeface="+mn-ea"/>
+                <a:cs typeface="Pretendard Variable SemiBold" panose="02000003000000020004" pitchFamily="2" charset="-127"/>
+              </a:rPr>
+              <a:t> </a:t>
+            </a:r>
+            <a:r>
+              <a:rPr lang="ko-KR" altLang="en-US" sz="1100" b="1" kern="0" dirty="0" err="1">
+                <a:latin typeface="+mn-ea"/>
+                <a:cs typeface="Pretendard Variable SemiBold" panose="02000003000000020004" pitchFamily="2" charset="-127"/>
+              </a:rPr>
+              <a:t>컬럼</a:t>
+            </a:r>
+            <a:r>
+              <a:rPr lang="ko-KR" altLang="en-US" sz="1100" b="1" kern="0" dirty="0">
+                <a:latin typeface="+mn-ea"/>
+                <a:cs typeface="Pretendard Variable SemiBold" panose="02000003000000020004" pitchFamily="2" charset="-127"/>
+              </a:rPr>
+              <a:t> 저장 구조에 최적화된 데이터 적재와 트랜잭션 처리</a:t>
+            </a:r>
+          </a:p>
+          <a:p>
+            <a:pPr marL="0" lvl="1">
+              <a:lnSpc>
+                <a:spcPct val="200000"/>
+              </a:lnSpc>
+              <a:buClr>
+                <a:schemeClr val="tx2"/>
+              </a:buClr>
+              <a:defRPr/>
+            </a:pPr>
+            <a:r>
+              <a:rPr lang="ko-KR" altLang="en-US" sz="1000" b="1" kern="0" dirty="0">
+                <a:solidFill>
+                  <a:srgbClr val="0083CE"/>
+                </a:solidFill>
+                <a:latin typeface="+mn-ea"/>
+                <a:cs typeface="Pretendard Variable SemiBold" panose="02000003000000020004" pitchFamily="2" charset="-127"/>
+              </a:rPr>
+              <a:t>◆</a:t>
+            </a:r>
+            <a:r>
+              <a:rPr lang="ko-KR" altLang="en-US" sz="1100" b="1" kern="0" dirty="0">
+                <a:latin typeface="+mn-ea"/>
+                <a:cs typeface="Pretendard Variable SemiBold" panose="02000003000000020004" pitchFamily="2" charset="-127"/>
+              </a:rPr>
+              <a:t> 적은 하드웨어 리소스로 다른 </a:t>
+            </a:r>
+            <a:r>
+              <a:rPr lang="en-US" altLang="ko-KR" sz="1100" b="1" kern="0" dirty="0">
+                <a:latin typeface="+mn-ea"/>
+                <a:cs typeface="Pretendard Variable SemiBold" panose="02000003000000020004" pitchFamily="2" charset="-127"/>
+              </a:rPr>
+              <a:t>DBMS</a:t>
+            </a:r>
+            <a:r>
+              <a:rPr lang="ko-KR" altLang="en-US" sz="1100" b="1" kern="0" dirty="0">
+                <a:latin typeface="+mn-ea"/>
+                <a:cs typeface="Pretendard Variable SemiBold" panose="02000003000000020004" pitchFamily="2" charset="-127"/>
+              </a:rPr>
+              <a:t>와 동일한 작업 수행</a:t>
+            </a:r>
+          </a:p>
+        </p:txBody>
+      </p:sp>
+      <p:sp>
+        <p:nvSpPr>
+          <p:cNvPr id="88" name="직사각형 87"/>
+          <p:cNvSpPr/>
+          <p:nvPr/>
+        </p:nvSpPr>
+        <p:spPr>
+          <a:xfrm>
+            <a:off x="282348" y="5751289"/>
+            <a:ext cx="9312729" cy="1320800"/>
+          </a:xfrm>
+          <a:prstGeom prst="rect">
+            <a:avLst/>
+          </a:prstGeom>
+          <a:noFill/>
+          <a:ln>
+            <a:noFill/>
+          </a:ln>
+        </p:spPr>
+        <p:style>
+          <a:lnRef idx="2">
+            <a:schemeClr val="accent1">
+              <a:shade val="50000"/>
+            </a:schemeClr>
+          </a:lnRef>
+          <a:fillRef idx="1">
+            <a:schemeClr val="accent1"/>
+          </a:fillRef>
+          <a:effectRef idx="0">
+            <a:schemeClr val="accent1"/>
+          </a:effectRef>
+          <a:fontRef idx="minor">
+            <a:schemeClr val="lt1"/>
+          </a:fontRef>
+        </p:style>
+        <p:txBody>
+          <a:bodyPr rtlCol="0" anchor="ctr"/>
+          <a:lstStyle/>
+          <a:p>
+            <a:r>
+              <a:rPr lang="en-US" altLang="ko-KR" sz="1600" b="1" dirty="0" smtClean="0">
+                <a:solidFill>
+                  <a:schemeClr val="tx1"/>
+                </a:solidFill>
+                <a:latin typeface="+mn-ea"/>
+              </a:rPr>
+              <a:t>Native Columnar</a:t>
+            </a:r>
+            <a:br>
+              <a:rPr lang="en-US" altLang="ko-KR" sz="1600" b="1" dirty="0" smtClean="0">
+                <a:solidFill>
+                  <a:schemeClr val="tx1"/>
+                </a:solidFill>
+                <a:latin typeface="+mn-ea"/>
+              </a:rPr>
+            </a:br>
+            <a:r>
+              <a:rPr lang="ko-KR" altLang="en-US" sz="1400" dirty="0">
+                <a:solidFill>
+                  <a:schemeClr val="tx1"/>
+                </a:solidFill>
+                <a:latin typeface="+mn-ea"/>
+              </a:rPr>
+              <a:t>대용량 데이터를 관리하는 </a:t>
+            </a:r>
+            <a:r>
+              <a:rPr lang="en-US" altLang="ko-KR" sz="1400" dirty="0">
+                <a:solidFill>
+                  <a:schemeClr val="tx1"/>
+                </a:solidFill>
+                <a:latin typeface="+mn-ea"/>
+              </a:rPr>
+              <a:t>DW </a:t>
+            </a:r>
+            <a:r>
+              <a:rPr lang="ko-KR" altLang="en-US" sz="1400" dirty="0">
+                <a:solidFill>
+                  <a:schemeClr val="tx1"/>
+                </a:solidFill>
+                <a:latin typeface="+mn-ea"/>
+              </a:rPr>
+              <a:t>데이터베이스의 성능은 </a:t>
+            </a:r>
+            <a:r>
+              <a:rPr lang="en-US" altLang="ko-KR" sz="1400" dirty="0">
+                <a:solidFill>
+                  <a:schemeClr val="tx1"/>
+                </a:solidFill>
+                <a:latin typeface="+mn-ea"/>
+              </a:rPr>
+              <a:t>I/O</a:t>
+            </a:r>
+            <a:r>
+              <a:rPr lang="ko-KR" altLang="en-US" sz="1400" dirty="0">
+                <a:solidFill>
+                  <a:schemeClr val="tx1"/>
+                </a:solidFill>
+                <a:latin typeface="+mn-ea"/>
+              </a:rPr>
+              <a:t>를 얼마나 줄일 수 있느냐에 달려 있습니다</a:t>
+            </a:r>
+            <a:r>
+              <a:rPr lang="en-US" altLang="ko-KR" sz="1400" dirty="0">
+                <a:solidFill>
+                  <a:schemeClr val="tx1"/>
+                </a:solidFill>
+                <a:latin typeface="+mn-ea"/>
+              </a:rPr>
+              <a:t>. </a:t>
+            </a:r>
+          </a:p>
+          <a:p>
+            <a:r>
+              <a:rPr lang="en-US" altLang="ko-KR" sz="1400" dirty="0" err="1">
+                <a:solidFill>
+                  <a:schemeClr val="tx1"/>
+                </a:solidFill>
+                <a:latin typeface="+mn-ea"/>
+              </a:rPr>
+              <a:t>Vertica</a:t>
+            </a:r>
+            <a:r>
+              <a:rPr lang="en-US" altLang="ko-KR" sz="1400" dirty="0">
+                <a:solidFill>
+                  <a:schemeClr val="tx1"/>
+                </a:solidFill>
+                <a:latin typeface="+mn-ea"/>
+              </a:rPr>
+              <a:t> </a:t>
+            </a:r>
+            <a:r>
+              <a:rPr lang="ko-KR" altLang="en-US" sz="1400" dirty="0">
+                <a:solidFill>
+                  <a:schemeClr val="tx1"/>
+                </a:solidFill>
+                <a:latin typeface="+mn-ea"/>
+              </a:rPr>
+              <a:t>의 </a:t>
+            </a:r>
+            <a:r>
+              <a:rPr lang="en-US" altLang="ko-KR" sz="1400" dirty="0">
+                <a:solidFill>
+                  <a:schemeClr val="tx1"/>
+                </a:solidFill>
+                <a:latin typeface="+mn-ea"/>
+              </a:rPr>
+              <a:t>Columnar DBMS </a:t>
+            </a:r>
+            <a:r>
+              <a:rPr lang="ko-KR" altLang="en-US" sz="1400" dirty="0">
+                <a:solidFill>
+                  <a:schemeClr val="tx1"/>
+                </a:solidFill>
+                <a:latin typeface="+mn-ea"/>
+              </a:rPr>
+              <a:t>아키텍처는 </a:t>
+            </a:r>
+            <a:r>
+              <a:rPr lang="en-US" altLang="ko-KR" sz="1400" dirty="0">
+                <a:solidFill>
+                  <a:schemeClr val="tx1"/>
+                </a:solidFill>
+                <a:latin typeface="+mn-ea"/>
+              </a:rPr>
+              <a:t>Query </a:t>
+            </a:r>
+            <a:r>
+              <a:rPr lang="ko-KR" altLang="en-US" sz="1400" dirty="0">
+                <a:solidFill>
+                  <a:schemeClr val="tx1"/>
+                </a:solidFill>
+                <a:latin typeface="+mn-ea"/>
+              </a:rPr>
+              <a:t>수행에 필요한 </a:t>
+            </a:r>
+            <a:r>
+              <a:rPr lang="en-US" altLang="ko-KR" sz="1400" dirty="0">
+                <a:solidFill>
+                  <a:schemeClr val="tx1"/>
+                </a:solidFill>
+                <a:latin typeface="+mn-ea"/>
+              </a:rPr>
+              <a:t>Column </a:t>
+            </a:r>
+            <a:r>
+              <a:rPr lang="ko-KR" altLang="en-US" sz="1400" dirty="0">
+                <a:solidFill>
+                  <a:schemeClr val="tx1"/>
+                </a:solidFill>
+                <a:latin typeface="+mn-ea"/>
+              </a:rPr>
+              <a:t>만을 읽어 올 수 있도록 설계되었기 때문에</a:t>
+            </a:r>
+            <a:r>
+              <a:rPr lang="en-US" altLang="ko-KR" sz="1400" dirty="0">
+                <a:solidFill>
+                  <a:schemeClr val="tx1"/>
+                </a:solidFill>
+                <a:latin typeface="+mn-ea"/>
+              </a:rPr>
+              <a:t>, Query </a:t>
+            </a:r>
+            <a:r>
+              <a:rPr lang="ko-KR" altLang="en-US" sz="1400" dirty="0">
+                <a:solidFill>
+                  <a:schemeClr val="tx1"/>
+                </a:solidFill>
+                <a:latin typeface="+mn-ea"/>
+              </a:rPr>
+              <a:t>시 마다 모든</a:t>
+            </a:r>
+            <a:r>
+              <a:rPr lang="en-US" altLang="ko-KR" sz="1400" dirty="0">
+                <a:solidFill>
+                  <a:schemeClr val="tx1"/>
+                </a:solidFill>
+                <a:latin typeface="+mn-ea"/>
+              </a:rPr>
+              <a:t>` </a:t>
+            </a:r>
+            <a:r>
+              <a:rPr lang="ko-KR" altLang="en-US" sz="1400" dirty="0">
+                <a:solidFill>
+                  <a:schemeClr val="tx1"/>
+                </a:solidFill>
+                <a:latin typeface="+mn-ea"/>
+              </a:rPr>
+              <a:t>열을 읽어와야 하는 </a:t>
+            </a:r>
+            <a:r>
+              <a:rPr lang="en-US" altLang="ko-KR" sz="1400" dirty="0">
+                <a:solidFill>
+                  <a:schemeClr val="tx1"/>
+                </a:solidFill>
+                <a:latin typeface="+mn-ea"/>
+              </a:rPr>
+              <a:t>row </a:t>
+            </a:r>
+            <a:r>
+              <a:rPr lang="ko-KR" altLang="en-US" sz="1400" dirty="0">
+                <a:solidFill>
+                  <a:schemeClr val="tx1"/>
+                </a:solidFill>
+                <a:latin typeface="+mn-ea"/>
+              </a:rPr>
+              <a:t>기반 </a:t>
+            </a:r>
+            <a:r>
+              <a:rPr lang="en-US" altLang="ko-KR" sz="1400" dirty="0">
+                <a:solidFill>
+                  <a:schemeClr val="tx1"/>
+                </a:solidFill>
+                <a:latin typeface="+mn-ea"/>
+              </a:rPr>
+              <a:t>DBMS</a:t>
+            </a:r>
+            <a:r>
+              <a:rPr lang="ko-KR" altLang="en-US" sz="1400" dirty="0">
+                <a:solidFill>
+                  <a:schemeClr val="tx1"/>
+                </a:solidFill>
+                <a:latin typeface="+mn-ea"/>
+              </a:rPr>
+              <a:t>와 비교하여 </a:t>
+            </a:r>
+            <a:r>
+              <a:rPr lang="en-US" altLang="ko-KR" sz="1400" dirty="0">
+                <a:solidFill>
+                  <a:schemeClr val="tx1"/>
+                </a:solidFill>
+                <a:latin typeface="+mn-ea"/>
+              </a:rPr>
+              <a:t>I/O </a:t>
+            </a:r>
+            <a:r>
+              <a:rPr lang="ko-KR" altLang="en-US" sz="1400" dirty="0">
+                <a:solidFill>
+                  <a:schemeClr val="tx1"/>
+                </a:solidFill>
+                <a:latin typeface="+mn-ea"/>
+              </a:rPr>
+              <a:t>발생량을 획기적으로 감소시킬 수 있습니다</a:t>
+            </a:r>
+            <a:r>
+              <a:rPr lang="en-US" altLang="ko-KR" sz="1400" dirty="0">
+                <a:solidFill>
+                  <a:schemeClr val="tx1"/>
+                </a:solidFill>
+                <a:latin typeface="+mn-ea"/>
+              </a:rPr>
+              <a:t>.</a:t>
+            </a:r>
+          </a:p>
+          <a:p>
+            <a:endParaRPr lang="en-US" altLang="ko-KR" sz="1400" dirty="0">
+              <a:solidFill>
+                <a:schemeClr val="tx1"/>
+              </a:solidFill>
+              <a:latin typeface="+mn-ea"/>
+            </a:endParaRPr>
+          </a:p>
+        </p:txBody>
+      </p:sp>
+      <p:cxnSp>
+        <p:nvCxnSpPr>
+          <p:cNvPr id="91" name="직선 연결선 90"/>
+          <p:cNvCxnSpPr/>
+          <p:nvPr/>
+        </p:nvCxnSpPr>
+        <p:spPr>
+          <a:xfrm flipV="1">
+            <a:off x="215900" y="469900"/>
+            <a:ext cx="9156700" cy="0"/>
+          </a:xfrm>
+          <a:prstGeom prst="line">
+            <a:avLst/>
+          </a:prstGeom>
+          <a:ln w="19050">
+            <a:solidFill>
+              <a:schemeClr val="accent1"/>
+            </a:solidFill>
+          </a:ln>
+        </p:spPr>
+        <p:style>
+          <a:lnRef idx="1">
+            <a:schemeClr val="accent1"/>
+          </a:lnRef>
+          <a:fillRef idx="0">
+            <a:schemeClr val="accent1"/>
+          </a:fillRef>
+          <a:effectRef idx="0">
+            <a:schemeClr val="accent1"/>
+          </a:effectRef>
+          <a:fontRef idx="minor">
+            <a:schemeClr val="tx1"/>
+          </a:fontRef>
+        </p:style>
+      </p:cxnSp>
+    </p:spTree>
+    <p:extLst>
+      <p:ext uri="{BB962C8B-B14F-4D97-AF65-F5344CB8AC3E}">
+        <p14:creationId xmlns:p14="http://schemas.microsoft.com/office/powerpoint/2010/main" val="1716450510"/>
+      </p:ext>
+    </p:extLst>
+  </p:cSld>
+  <p:clrMapOvr>
+    <a:masterClrMapping/>
+  </p:clrMapOvr>
+  <p:timing>
+    <p:tnLst>
+      <p:par>
+        <p:cTn id="1" dur="indefinite" restart="never" nodeType="tmRoot"/>
+      </p:par>
+    </p:tnLst>
+  </p:timing>
+</p:sld>
+</file>
+
+<file path=ppt/slides/slide4.xml><?xml version="1.0" encoding="utf-8"?>
+<p:sld xmlns:a="http://schemas.openxmlformats.org/drawingml/2006/main" xmlns:r="http://schemas.openxmlformats.org/officeDocument/2006/relationships" xmlns:p="http://schemas.openxmlformats.org/presentationml/2006/main">
+  <p:cSld>
+    <p:spTree>
+      <p:nvGrpSpPr>
+        <p:cNvPr id="1" name=""/>
+        <p:cNvGrpSpPr/>
+        <p:nvPr/>
+      </p:nvGrpSpPr>
+      <p:grpSpPr>
+        <a:xfrm>
+          <a:off x="0" y="0"/>
+          <a:ext cx="0" cy="0"/>
+          <a:chOff x="0" y="0"/>
+          <a:chExt cx="0" cy="0"/>
+        </a:xfrm>
+      </p:grpSpPr>
+      <p:sp>
+        <p:nvSpPr>
+          <p:cNvPr id="90" name="직사각형 89"/>
+          <p:cNvSpPr/>
+          <p:nvPr/>
+        </p:nvSpPr>
+        <p:spPr>
+          <a:xfrm>
+            <a:off x="152400" y="125187"/>
+            <a:ext cx="2667000" cy="312964"/>
+          </a:xfrm>
+          <a:prstGeom prst="rect">
+            <a:avLst/>
+          </a:prstGeom>
+          <a:noFill/>
+          <a:ln>
+            <a:noFill/>
+          </a:ln>
+        </p:spPr>
+        <p:style>
+          <a:lnRef idx="2">
+            <a:schemeClr val="accent1">
+              <a:shade val="50000"/>
+            </a:schemeClr>
+          </a:lnRef>
+          <a:fillRef idx="1">
+            <a:schemeClr val="accent1"/>
+          </a:fillRef>
+          <a:effectRef idx="0">
+            <a:schemeClr val="accent1"/>
+          </a:effectRef>
+          <a:fontRef idx="minor">
+            <a:schemeClr val="lt1"/>
+          </a:fontRef>
+        </p:style>
+        <p:txBody>
+          <a:bodyPr rtlCol="0" anchor="ctr"/>
+          <a:lstStyle/>
+          <a:p>
+            <a:r>
+              <a:rPr lang="en-US" altLang="ko-KR" sz="1600" b="1" smtClean="0">
+                <a:solidFill>
+                  <a:schemeClr val="accent1">
+                    <a:lumMod val="75000"/>
+                  </a:schemeClr>
+                </a:solidFill>
+                <a:latin typeface="+mn-ea"/>
+              </a:rPr>
+              <a:t>xxx</a:t>
+            </a:r>
+            <a:endParaRPr lang="ko-KR" altLang="en-US" sz="1600" b="1" dirty="0">
+              <a:solidFill>
+                <a:schemeClr val="accent1">
+                  <a:lumMod val="75000"/>
+                </a:schemeClr>
+              </a:solidFill>
+              <a:latin typeface="+mn-ea"/>
+            </a:endParaRPr>
+          </a:p>
+        </p:txBody>
+      </p:sp>
+      <p:sp>
+        <p:nvSpPr>
+          <p:cNvPr id="91" name="직사각형 90"/>
+          <p:cNvSpPr/>
+          <p:nvPr/>
+        </p:nvSpPr>
+        <p:spPr>
+          <a:xfrm>
+            <a:off x="301171" y="422730"/>
+            <a:ext cx="9312729" cy="357414"/>
+          </a:xfrm>
+          <a:prstGeom prst="rect">
+            <a:avLst/>
+          </a:prstGeom>
+          <a:noFill/>
+          <a:ln>
+            <a:noFill/>
+          </a:ln>
+        </p:spPr>
+        <p:style>
+          <a:lnRef idx="2">
+            <a:schemeClr val="accent1">
+              <a:shade val="50000"/>
+            </a:schemeClr>
+          </a:lnRef>
+          <a:fillRef idx="1">
+            <a:schemeClr val="accent1"/>
+          </a:fillRef>
+          <a:effectRef idx="0">
+            <a:schemeClr val="accent1"/>
+          </a:effectRef>
+          <a:fontRef idx="minor">
+            <a:schemeClr val="lt1"/>
+          </a:fontRef>
+        </p:style>
+        <p:txBody>
+          <a:bodyPr rtlCol="0" anchor="ctr"/>
+          <a:lstStyle/>
+          <a:p>
+            <a:r>
+              <a:rPr lang="en-US" altLang="ko-KR" sz="1400" dirty="0" smtClean="0">
+                <a:solidFill>
+                  <a:schemeClr val="tx1"/>
+                </a:solidFill>
+                <a:latin typeface="+mn-ea"/>
+              </a:rPr>
+              <a:t>xxx</a:t>
+            </a:r>
+            <a:endParaRPr lang="en-US" altLang="ko-KR" sz="1400" dirty="0">
+              <a:solidFill>
+                <a:schemeClr val="tx1"/>
+              </a:solidFill>
+              <a:latin typeface="+mn-ea"/>
+            </a:endParaRPr>
+          </a:p>
+        </p:txBody>
+      </p:sp>
+      <p:cxnSp>
+        <p:nvCxnSpPr>
+          <p:cNvPr id="92" name="직선 연결선 91"/>
+          <p:cNvCxnSpPr/>
+          <p:nvPr/>
+        </p:nvCxnSpPr>
+        <p:spPr>
+          <a:xfrm flipV="1">
+            <a:off x="215900" y="469900"/>
+            <a:ext cx="9156700" cy="0"/>
+          </a:xfrm>
+          <a:prstGeom prst="line">
+            <a:avLst/>
+          </a:prstGeom>
+          <a:ln w="19050">
+            <a:solidFill>
+              <a:schemeClr val="accent1"/>
+            </a:solidFill>
+          </a:ln>
+        </p:spPr>
+        <p:style>
+          <a:lnRef idx="1">
+            <a:schemeClr val="accent1"/>
+          </a:lnRef>
+          <a:fillRef idx="0">
+            <a:schemeClr val="accent1"/>
+          </a:fillRef>
+          <a:effectRef idx="0">
+            <a:schemeClr val="accent1"/>
+          </a:effectRef>
+          <a:fontRef idx="minor">
+            <a:schemeClr val="tx1"/>
+          </a:fontRef>
+        </p:style>
+      </p:cxnSp>
+    </p:spTree>
+    <p:extLst>
+      <p:ext uri="{BB962C8B-B14F-4D97-AF65-F5344CB8AC3E}">
+        <p14:creationId xmlns:p14="http://schemas.microsoft.com/office/powerpoint/2010/main" val="1280853129"/>
+      </p:ext>
+    </p:extLst>
+  </p:cSld>
+  <p:clrMapOvr>
+    <a:masterClrMapping/>
+  </p:clrMapOvr>
+  <p:timing>
+    <p:tnLst>
+      <p:par>
+        <p:cTn id="1" dur="indefinite" restart="never" nodeType="tmRoot"/>
+      </p:par>
+    </p:tnLst>
+  </p:timing>
+</p:sld>
+</file>
+
+<file path=ppt/slides/slide5.xml><?xml version="1.0" encoding="utf-8"?>
+<p:sld xmlns:a="http://schemas.openxmlformats.org/drawingml/2006/main" xmlns:r="http://schemas.openxmlformats.org/officeDocument/2006/relationships" xmlns:p="http://schemas.openxmlformats.org/presentationml/2006/main">
+  <p:cSld>
+    <p:spTree>
+      <p:nvGrpSpPr>
+        <p:cNvPr id="1" name=""/>
+        <p:cNvGrpSpPr/>
+        <p:nvPr/>
+      </p:nvGrpSpPr>
+      <p:grpSpPr>
+        <a:xfrm>
+          <a:off x="0" y="0"/>
+          <a:ext cx="0" cy="0"/>
+          <a:chOff x="0" y="0"/>
+          <a:chExt cx="0" cy="0"/>
+        </a:xfrm>
+      </p:grpSpPr>
+      <p:sp>
+        <p:nvSpPr>
+          <p:cNvPr id="88" name="직사각형 87"/>
+          <p:cNvSpPr/>
+          <p:nvPr/>
+        </p:nvSpPr>
+        <p:spPr>
+          <a:xfrm>
+            <a:off x="152400" y="125187"/>
+            <a:ext cx="2667000" cy="312964"/>
+          </a:xfrm>
+          <a:prstGeom prst="rect">
+            <a:avLst/>
+          </a:prstGeom>
+          <a:noFill/>
+          <a:ln>
+            <a:noFill/>
+          </a:ln>
+        </p:spPr>
+        <p:style>
+          <a:lnRef idx="2">
+            <a:schemeClr val="accent1">
+              <a:shade val="50000"/>
+            </a:schemeClr>
+          </a:lnRef>
+          <a:fillRef idx="1">
+            <a:schemeClr val="accent1"/>
+          </a:fillRef>
+          <a:effectRef idx="0">
+            <a:schemeClr val="accent1"/>
+          </a:effectRef>
+          <a:fontRef idx="minor">
+            <a:schemeClr val="lt1"/>
+          </a:fontRef>
+        </p:style>
+        <p:txBody>
+          <a:bodyPr rtlCol="0" anchor="ctr"/>
+          <a:lstStyle/>
+          <a:p>
+            <a:r>
+              <a:rPr lang="en-US" altLang="ko-KR" sz="1600" b="1" dirty="0" smtClean="0">
+                <a:solidFill>
+                  <a:schemeClr val="accent1">
+                    <a:lumMod val="75000"/>
+                  </a:schemeClr>
+                </a:solidFill>
+                <a:latin typeface="+mn-ea"/>
+              </a:rPr>
+              <a:t>xxx</a:t>
+            </a:r>
+            <a:endParaRPr lang="ko-KR" altLang="en-US" sz="1600" b="1" dirty="0">
+              <a:solidFill>
+                <a:schemeClr val="accent1">
+                  <a:lumMod val="75000"/>
+                </a:schemeClr>
+              </a:solidFill>
+              <a:latin typeface="+mn-ea"/>
+            </a:endParaRPr>
+          </a:p>
+        </p:txBody>
+      </p:sp>
+      <p:sp>
+        <p:nvSpPr>
+          <p:cNvPr id="89" name="직사각형 88"/>
+          <p:cNvSpPr/>
+          <p:nvPr/>
+        </p:nvSpPr>
+        <p:spPr>
+          <a:xfrm>
+            <a:off x="301171" y="422730"/>
+            <a:ext cx="9312729" cy="357414"/>
+          </a:xfrm>
+          <a:prstGeom prst="rect">
+            <a:avLst/>
+          </a:prstGeom>
+          <a:noFill/>
+          <a:ln>
+            <a:noFill/>
+          </a:ln>
+        </p:spPr>
+        <p:style>
+          <a:lnRef idx="2">
+            <a:schemeClr val="accent1">
+              <a:shade val="50000"/>
+            </a:schemeClr>
+          </a:lnRef>
+          <a:fillRef idx="1">
+            <a:schemeClr val="accent1"/>
+          </a:fillRef>
+          <a:effectRef idx="0">
+            <a:schemeClr val="accent1"/>
+          </a:effectRef>
+          <a:fontRef idx="minor">
+            <a:schemeClr val="lt1"/>
+          </a:fontRef>
+        </p:style>
+        <p:txBody>
+          <a:bodyPr rtlCol="0" anchor="ctr"/>
+          <a:lstStyle/>
+          <a:p>
+            <a:r>
+              <a:rPr lang="en-US" altLang="ko-KR" sz="1400" dirty="0" smtClean="0">
+                <a:solidFill>
+                  <a:schemeClr val="tx1"/>
+                </a:solidFill>
+                <a:latin typeface="+mn-ea"/>
+              </a:rPr>
+              <a:t>xxx</a:t>
+            </a:r>
+            <a:endParaRPr lang="en-US" altLang="ko-KR" sz="1400" dirty="0">
+              <a:solidFill>
+                <a:schemeClr val="tx1"/>
+              </a:solidFill>
+              <a:latin typeface="+mn-ea"/>
+            </a:endParaRPr>
+          </a:p>
+        </p:txBody>
+      </p:sp>
+      <p:cxnSp>
+        <p:nvCxnSpPr>
+          <p:cNvPr id="90" name="직선 연결선 89"/>
+          <p:cNvCxnSpPr/>
+          <p:nvPr/>
+        </p:nvCxnSpPr>
+        <p:spPr>
+          <a:xfrm flipV="1">
+            <a:off x="215900" y="469900"/>
+            <a:ext cx="9156700" cy="0"/>
+          </a:xfrm>
+          <a:prstGeom prst="line">
+            <a:avLst/>
+          </a:prstGeom>
+          <a:ln w="19050">
+            <a:solidFill>
+              <a:schemeClr val="accent1"/>
+            </a:solidFill>
+          </a:ln>
+        </p:spPr>
+        <p:style>
+          <a:lnRef idx="1">
+            <a:schemeClr val="accent1"/>
+          </a:lnRef>
+          <a:fillRef idx="0">
+            <a:schemeClr val="accent1"/>
+          </a:fillRef>
+          <a:effectRef idx="0">
+            <a:schemeClr val="accent1"/>
+          </a:effectRef>
+          <a:fontRef idx="minor">
+            <a:schemeClr val="tx1"/>
+          </a:fontRef>
+        </p:style>
+      </p:cxnSp>
+    </p:spTree>
+    <p:extLst>
+      <p:ext uri="{BB962C8B-B14F-4D97-AF65-F5344CB8AC3E}">
+        <p14:creationId xmlns:p14="http://schemas.microsoft.com/office/powerpoint/2010/main" val="903049112"/>
       </p:ext>
     </p:extLst>
   </p:cSld>

--- a/99ref/blog.pptx
+++ b/99ref/blog.pptx
@@ -19859,7 +19859,7 @@
           <a:lstStyle/>
           <a:p>
             <a:r>
-              <a:rPr lang="en-US" altLang="ko-KR" sz="1600" b="1" smtClean="0">
+              <a:rPr lang="en-US" altLang="ko-KR" sz="1600" b="1" dirty="0" smtClean="0">
                 <a:solidFill>
                   <a:schemeClr val="accent1">
                     <a:lumMod val="75000"/>

--- a/99ref/blog.pptx
+++ b/99ref/blog.pptx
@@ -5,11 +5,12 @@
     <p:sldMasterId id="2147483672" r:id="rId1"/>
   </p:sldMasterIdLst>
   <p:sldIdLst>
-    <p:sldId id="256" r:id="rId2"/>
-    <p:sldId id="257" r:id="rId3"/>
-    <p:sldId id="258" r:id="rId4"/>
-    <p:sldId id="259" r:id="rId5"/>
-    <p:sldId id="260" r:id="rId6"/>
+    <p:sldId id="261" r:id="rId2"/>
+    <p:sldId id="256" r:id="rId3"/>
+    <p:sldId id="257" r:id="rId4"/>
+    <p:sldId id="258" r:id="rId5"/>
+    <p:sldId id="259" r:id="rId6"/>
+    <p:sldId id="260" r:id="rId7"/>
   </p:sldIdLst>
   <p:sldSz cx="9720263" cy="8999538"/>
   <p:notesSz cx="6858000" cy="9144000"/>
@@ -3066,7 +3067,7 @@
         </p:nvSpPr>
         <p:spPr>
           <a:xfrm>
-            <a:off x="161471" y="493486"/>
+            <a:off x="161471" y="556986"/>
             <a:ext cx="9312729" cy="497114"/>
           </a:xfrm>
           <a:prstGeom prst="rect">
@@ -3195,7 +3196,7 @@
         </p:nvSpPr>
         <p:spPr>
           <a:xfrm>
-            <a:off x="516056" y="2559824"/>
+            <a:off x="516056" y="2699524"/>
             <a:ext cx="2129255" cy="244298"/>
           </a:xfrm>
           <a:prstGeom prst="rect">
@@ -3252,7 +3253,7 @@
         </p:blipFill>
         <p:spPr>
           <a:xfrm>
-            <a:off x="950683" y="1077680"/>
+            <a:off x="950683" y="1179280"/>
             <a:ext cx="1260000" cy="1260000"/>
           </a:xfrm>
           <a:prstGeom prst="rect">
@@ -3271,7 +3272,7 @@
         </p:nvSpPr>
         <p:spPr>
           <a:xfrm>
-            <a:off x="140683" y="3026267"/>
+            <a:off x="140683" y="3204067"/>
             <a:ext cx="2880000" cy="1406154"/>
           </a:xfrm>
           <a:prstGeom prst="rect">
@@ -4159,7 +4160,7 @@
         </p:nvSpPr>
         <p:spPr>
           <a:xfrm>
-            <a:off x="3410947" y="2567944"/>
+            <a:off x="3410947" y="2707644"/>
             <a:ext cx="2892462" cy="244298"/>
           </a:xfrm>
           <a:prstGeom prst="rect">
@@ -4216,7 +4217,7 @@
         </p:blipFill>
         <p:spPr>
           <a:xfrm>
-            <a:off x="4227178" y="1119660"/>
+            <a:off x="4227178" y="1221260"/>
             <a:ext cx="1260000" cy="1260000"/>
           </a:xfrm>
           <a:prstGeom prst="rect">
@@ -4235,7 +4236,7 @@
         </p:nvSpPr>
         <p:spPr>
           <a:xfrm>
-            <a:off x="3417178" y="3029554"/>
+            <a:off x="3417178" y="3207354"/>
             <a:ext cx="2880000" cy="1406154"/>
           </a:xfrm>
           <a:prstGeom prst="rect">
@@ -5128,7 +5129,7 @@
         </p:nvSpPr>
         <p:spPr>
           <a:xfrm>
-            <a:off x="7048799" y="2617551"/>
+            <a:off x="7048799" y="2757251"/>
             <a:ext cx="2169750" cy="244298"/>
           </a:xfrm>
           <a:prstGeom prst="rect">
@@ -5185,7 +5186,7 @@
         </p:blipFill>
         <p:spPr>
           <a:xfrm>
-            <a:off x="7503674" y="1155267"/>
+            <a:off x="7503674" y="1256867"/>
             <a:ext cx="1260000" cy="1260000"/>
           </a:xfrm>
           <a:prstGeom prst="rect">
@@ -5204,7 +5205,7 @@
         </p:nvSpPr>
         <p:spPr>
           <a:xfrm>
-            <a:off x="6693674" y="3064133"/>
+            <a:off x="6693674" y="3241933"/>
             <a:ext cx="2820440" cy="1186222"/>
           </a:xfrm>
           <a:prstGeom prst="rect">
@@ -6050,6 +6051,78 @@
           </a:p>
         </p:txBody>
       </p:sp>
+      <p:cxnSp>
+        <p:nvCxnSpPr>
+          <p:cNvPr id="3" name="직선 연결선 2"/>
+          <p:cNvCxnSpPr/>
+          <p:nvPr/>
+        </p:nvCxnSpPr>
+        <p:spPr>
+          <a:xfrm flipV="1">
+            <a:off x="215900" y="495300"/>
+            <a:ext cx="9156700" cy="0"/>
+          </a:xfrm>
+          <a:prstGeom prst="line">
+            <a:avLst/>
+          </a:prstGeom>
+          <a:ln w="19050">
+            <a:solidFill>
+              <a:schemeClr val="accent1"/>
+            </a:solidFill>
+          </a:ln>
+        </p:spPr>
+        <p:style>
+          <a:lnRef idx="1">
+            <a:schemeClr val="accent1"/>
+          </a:lnRef>
+          <a:fillRef idx="0">
+            <a:schemeClr val="accent1"/>
+          </a:fillRef>
+          <a:effectRef idx="0">
+            <a:schemeClr val="accent1"/>
+          </a:effectRef>
+          <a:fontRef idx="minor">
+            <a:schemeClr val="tx1"/>
+          </a:fontRef>
+        </p:style>
+      </p:cxnSp>
+    </p:spTree>
+    <p:extLst>
+      <p:ext uri="{BB962C8B-B14F-4D97-AF65-F5344CB8AC3E}">
+        <p14:creationId xmlns:p14="http://schemas.microsoft.com/office/powerpoint/2010/main" val="3647370395"/>
+      </p:ext>
+    </p:extLst>
+  </p:cSld>
+  <p:clrMapOvr>
+    <a:masterClrMapping/>
+  </p:clrMapOvr>
+  <p:timing>
+    <p:tnLst>
+      <p:par>
+        <p:cTn id="1" dur="indefinite" restart="never" nodeType="tmRoot"/>
+      </p:par>
+    </p:tnLst>
+  </p:timing>
+</p:sld>
+</file>
+
+<file path=ppt/slides/slide2.xml><?xml version="1.0" encoding="utf-8"?>
+<p:sld xmlns:a="http://schemas.openxmlformats.org/drawingml/2006/main" xmlns:r="http://schemas.openxmlformats.org/officeDocument/2006/relationships" xmlns:p="http://schemas.openxmlformats.org/presentationml/2006/main">
+  <p:cSld>
+    <p:spTree>
+      <p:nvGrpSpPr>
+        <p:cNvPr id="1" name=""/>
+        <p:cNvGrpSpPr/>
+        <p:nvPr/>
+      </p:nvGrpSpPr>
+      <p:grpSpPr>
+        <a:xfrm>
+          <a:off x="0" y="0"/>
+          <a:ext cx="0" cy="0"/>
+          <a:chOff x="0" y="0"/>
+          <a:chExt cx="0" cy="0"/>
+        </a:xfrm>
+      </p:grpSpPr>
       <p:sp>
         <p:nvSpPr>
           <p:cNvPr id="14" name="직사각형 13"/>
@@ -6058,7 +6131,7 @@
         </p:nvSpPr>
         <p:spPr>
           <a:xfrm>
-            <a:off x="0" y="4417787"/>
+            <a:off x="0" y="36287"/>
             <a:ext cx="2186829" cy="312964"/>
           </a:xfrm>
           <a:prstGeom prst="rect">
@@ -6152,7 +6225,7 @@
         </p:nvSpPr>
         <p:spPr>
           <a:xfrm>
-            <a:off x="9071" y="4760686"/>
+            <a:off x="9071" y="455386"/>
             <a:ext cx="9873546" cy="497114"/>
           </a:xfrm>
           <a:prstGeom prst="rect">
@@ -6246,13 +6319,13 @@
           <p:nvPr>
             <p:extLst>
               <p:ext uri="{D42A27DB-BD31-4B8C-83A1-F6EECF244321}">
-                <p14:modId xmlns:p14="http://schemas.microsoft.com/office/powerpoint/2010/main" val="1735461271"/>
+                <p14:modId xmlns:p14="http://schemas.microsoft.com/office/powerpoint/2010/main" val="697670764"/>
               </p:ext>
             </p:extLst>
           </p:nvPr>
         </p:nvGraphicFramePr>
         <p:xfrm>
-          <a:off x="246308" y="5458187"/>
+          <a:off x="854318" y="1323204"/>
           <a:ext cx="200863" cy="1310940"/>
         </p:xfrm>
         <a:graphic>
@@ -6403,13 +6476,13 @@
           <p:nvPr>
             <p:extLst>
               <p:ext uri="{D42A27DB-BD31-4B8C-83A1-F6EECF244321}">
-                <p14:modId xmlns:p14="http://schemas.microsoft.com/office/powerpoint/2010/main" val="601713452"/>
+                <p14:modId xmlns:p14="http://schemas.microsoft.com/office/powerpoint/2010/main" val="1186017447"/>
               </p:ext>
             </p:extLst>
           </p:nvPr>
         </p:nvGraphicFramePr>
         <p:xfrm>
-          <a:off x="516052" y="5458187"/>
+          <a:off x="1124062" y="1323204"/>
           <a:ext cx="200863" cy="1310940"/>
         </p:xfrm>
         <a:graphic>
@@ -6545,13 +6618,13 @@
           <p:nvPr>
             <p:extLst>
               <p:ext uri="{D42A27DB-BD31-4B8C-83A1-F6EECF244321}">
-                <p14:modId xmlns:p14="http://schemas.microsoft.com/office/powerpoint/2010/main" val="3706800928"/>
+                <p14:modId xmlns:p14="http://schemas.microsoft.com/office/powerpoint/2010/main" val="906202153"/>
               </p:ext>
             </p:extLst>
           </p:nvPr>
         </p:nvGraphicFramePr>
         <p:xfrm>
-          <a:off x="761055" y="5458187"/>
+          <a:off x="1430594" y="1323204"/>
           <a:ext cx="200863" cy="1310940"/>
         </p:xfrm>
         <a:graphic>
@@ -6697,13 +6770,13 @@
           <p:nvPr>
             <p:extLst>
               <p:ext uri="{D42A27DB-BD31-4B8C-83A1-F6EECF244321}">
-                <p14:modId xmlns:p14="http://schemas.microsoft.com/office/powerpoint/2010/main" val="3336143817"/>
+                <p14:modId xmlns:p14="http://schemas.microsoft.com/office/powerpoint/2010/main" val="2359857303"/>
               </p:ext>
             </p:extLst>
           </p:nvPr>
         </p:nvGraphicFramePr>
         <p:xfrm>
-          <a:off x="995218" y="5458187"/>
+          <a:off x="1710385" y="1323204"/>
           <a:ext cx="200863" cy="1310940"/>
         </p:xfrm>
         <a:graphic>
@@ -6854,13 +6927,13 @@
           <p:nvPr>
             <p:extLst>
               <p:ext uri="{D42A27DB-BD31-4B8C-83A1-F6EECF244321}">
-                <p14:modId xmlns:p14="http://schemas.microsoft.com/office/powerpoint/2010/main" val="1728891744"/>
+                <p14:modId xmlns:p14="http://schemas.microsoft.com/office/powerpoint/2010/main" val="219103042"/>
               </p:ext>
             </p:extLst>
           </p:nvPr>
         </p:nvGraphicFramePr>
         <p:xfrm>
-          <a:off x="1258304" y="5459907"/>
+          <a:off x="1973471" y="1324064"/>
           <a:ext cx="199782" cy="1309220"/>
         </p:xfrm>
         <a:graphic>
@@ -7010,7 +7083,7 @@
         </p:nvCxnSpPr>
         <p:spPr>
           <a:xfrm flipH="1">
-            <a:off x="337563" y="5682153"/>
+            <a:off x="945573" y="1435187"/>
             <a:ext cx="2" cy="1086974"/>
           </a:xfrm>
           <a:prstGeom prst="straightConnector1">
@@ -7047,7 +7120,7 @@
         </p:nvGrpSpPr>
         <p:grpSpPr>
           <a:xfrm>
-            <a:off x="7917832" y="5542849"/>
+            <a:off x="7436328" y="1309491"/>
             <a:ext cx="1546355" cy="1226278"/>
             <a:chOff x="8060037" y="1837974"/>
             <a:chExt cx="1458522" cy="1305922"/>
@@ -7709,7 +7782,7 @@
         </p:nvGrpSpPr>
         <p:grpSpPr>
           <a:xfrm>
-            <a:off x="3971921" y="5639579"/>
+            <a:off x="7595813" y="4467874"/>
             <a:ext cx="1298777" cy="1129548"/>
             <a:chOff x="1392799" y="8552193"/>
             <a:chExt cx="285312" cy="263081"/>
@@ -9140,7 +9213,7 @@
         </p:nvSpPr>
         <p:spPr bwMode="auto">
           <a:xfrm>
-            <a:off x="2173506" y="5499926"/>
+            <a:off x="4511584" y="1344074"/>
             <a:ext cx="1038585" cy="1269201"/>
           </a:xfrm>
           <a:custGeom>
@@ -10380,7 +10453,7 @@
         </p:nvSpPr>
         <p:spPr>
           <a:xfrm>
-            <a:off x="99782" y="6984368"/>
+            <a:off x="731750" y="2755268"/>
             <a:ext cx="1603053" cy="504000"/>
           </a:xfrm>
           <a:prstGeom prst="rect">
@@ -10446,7 +10519,7 @@
         </p:nvSpPr>
         <p:spPr>
           <a:xfrm>
-            <a:off x="2047610" y="6984368"/>
+            <a:off x="4229350" y="2755268"/>
             <a:ext cx="1603053" cy="504000"/>
           </a:xfrm>
           <a:prstGeom prst="rect">
@@ -10512,7 +10585,7 @@
         </p:nvSpPr>
         <p:spPr>
           <a:xfrm>
-            <a:off x="3995438" y="6984368"/>
+            <a:off x="7443675" y="5752338"/>
             <a:ext cx="1603053" cy="504000"/>
           </a:xfrm>
           <a:prstGeom prst="rect">
@@ -10566,7 +10639,7 @@
         </p:nvSpPr>
         <p:spPr>
           <a:xfrm>
-            <a:off x="5943266" y="6984368"/>
+            <a:off x="731750" y="5752338"/>
             <a:ext cx="1603053" cy="504000"/>
           </a:xfrm>
           <a:prstGeom prst="rect">
@@ -10620,7 +10693,7 @@
         </p:nvSpPr>
         <p:spPr>
           <a:xfrm>
-            <a:off x="7891093" y="6984368"/>
+            <a:off x="7407979" y="2682697"/>
             <a:ext cx="1603053" cy="504000"/>
           </a:xfrm>
           <a:prstGeom prst="rect">
@@ -10674,8 +10747,8 @@
         </p:nvSpPr>
         <p:spPr>
           <a:xfrm>
-            <a:off x="42829" y="7586979"/>
-            <a:ext cx="1723822" cy="382541"/>
+            <a:off x="125076" y="3368765"/>
+            <a:ext cx="2808000" cy="400622"/>
           </a:xfrm>
           <a:prstGeom prst="rect">
             <a:avLst/>
@@ -10747,8 +10820,8 @@
         </p:nvSpPr>
         <p:spPr>
           <a:xfrm>
-            <a:off x="1880579" y="7586979"/>
-            <a:ext cx="1498137" cy="594522"/>
+            <a:off x="3622676" y="3368765"/>
+            <a:ext cx="2808000" cy="400622"/>
           </a:xfrm>
           <a:prstGeom prst="rect">
             <a:avLst/>
@@ -10834,8 +10907,8 @@
         </p:nvSpPr>
         <p:spPr>
           <a:xfrm>
-            <a:off x="3721113" y="7597865"/>
-            <a:ext cx="1830601" cy="1370119"/>
+            <a:off x="6815230" y="6365835"/>
+            <a:ext cx="2808000" cy="788421"/>
           </a:xfrm>
           <a:prstGeom prst="rect">
             <a:avLst/>
@@ -10982,7 +11055,28 @@
                 <a:latin typeface="+mn-ea"/>
                 <a:cs typeface="Pretendard Variable Medium" panose="02000003000000020004" pitchFamily="2" charset="-127"/>
               </a:rPr>
-              <a:t>수준의 확장성 제공</a:t>
+              <a:t>수준의 </a:t>
+            </a:r>
+            <a:r>
+              <a:rPr lang="ko-KR" altLang="en-US" sz="1050" dirty="0" err="1">
+                <a:latin typeface="+mn-ea"/>
+                <a:cs typeface="Pretendard Variable Medium" panose="02000003000000020004" pitchFamily="2" charset="-127"/>
+              </a:rPr>
+              <a:t>확장성</a:t>
+            </a:r>
+            <a:r>
+              <a:rPr lang="ko-KR" altLang="en-US" sz="1050" dirty="0">
+                <a:latin typeface="+mn-ea"/>
+                <a:cs typeface="Pretendard Variable Medium" panose="02000003000000020004" pitchFamily="2" charset="-127"/>
+              </a:rPr>
+              <a:t> </a:t>
+            </a:r>
+            <a:r>
+              <a:rPr lang="ko-KR" altLang="en-US" sz="1050" dirty="0" smtClean="0">
+                <a:latin typeface="+mn-ea"/>
+                <a:cs typeface="Pretendard Variable Medium" panose="02000003000000020004" pitchFamily="2" charset="-127"/>
+              </a:rPr>
+              <a:t>제공</a:t>
             </a:r>
             <a:endParaRPr lang="en-US" altLang="ko-KR" sz="1050" dirty="0">
               <a:latin typeface="+mn-ea"/>
@@ -10999,8 +11093,8 @@
         </p:nvSpPr>
         <p:spPr>
           <a:xfrm>
-            <a:off x="5907535" y="7586979"/>
-            <a:ext cx="1749145" cy="381515"/>
+            <a:off x="144076" y="6365835"/>
+            <a:ext cx="2808000" cy="381515"/>
           </a:xfrm>
           <a:prstGeom prst="rect">
             <a:avLst/>
@@ -11058,8 +11152,8 @@
         </p:nvSpPr>
         <p:spPr>
           <a:xfrm>
-            <a:off x="7822196" y="7586979"/>
-            <a:ext cx="1749145" cy="594522"/>
+            <a:off x="6820305" y="3372394"/>
+            <a:ext cx="2808000" cy="594522"/>
           </a:xfrm>
           <a:prstGeom prst="rect">
             <a:avLst/>
@@ -11145,7 +11239,7 @@
         </p:nvGrpSpPr>
         <p:grpSpPr>
           <a:xfrm rot="18900000">
-            <a:off x="6078731" y="5563601"/>
+            <a:off x="885276" y="4453258"/>
             <a:ext cx="1296000" cy="1296000"/>
             <a:chOff x="7135913" y="1248230"/>
             <a:chExt cx="1851539" cy="1832402"/>
@@ -13872,13 +13966,13 @@
       </p:grpSp>
       <p:cxnSp>
         <p:nvCxnSpPr>
-          <p:cNvPr id="3" name="직선 연결선 2"/>
+          <p:cNvPr id="76" name="직선 연결선 75"/>
           <p:cNvCxnSpPr/>
           <p:nvPr/>
         </p:nvCxnSpPr>
         <p:spPr>
           <a:xfrm flipV="1">
-            <a:off x="215900" y="469900"/>
+            <a:off x="114300" y="393700"/>
             <a:ext cx="9156700" cy="0"/>
           </a:xfrm>
           <a:prstGeom prst="line">
@@ -13905,41 +13999,521 @@
           </a:fontRef>
         </p:style>
       </p:cxnSp>
-      <p:cxnSp>
-        <p:nvCxnSpPr>
-          <p:cNvPr id="76" name="직선 연결선 75"/>
-          <p:cNvCxnSpPr/>
+      <p:sp>
+        <p:nvSpPr>
+          <p:cNvPr id="85" name="Rectangle 99"/>
+          <p:cNvSpPr/>
           <p:nvPr/>
-        </p:nvCxnSpPr>
+        </p:nvSpPr>
         <p:spPr>
-          <a:xfrm flipV="1">
-            <a:off x="114300" y="4775200"/>
-            <a:ext cx="9156700" cy="0"/>
+          <a:xfrm>
+            <a:off x="4265046" y="5752338"/>
+            <a:ext cx="1603053" cy="504000"/>
           </a:xfrm>
-          <a:prstGeom prst="line">
+          <a:prstGeom prst="rect">
             <a:avLst/>
           </a:prstGeom>
-          <a:ln w="19050">
-            <a:solidFill>
-              <a:schemeClr val="accent1"/>
-            </a:solidFill>
+          <a:solidFill>
+            <a:srgbClr val="0B3D84"/>
+          </a:solidFill>
+          <a:ln>
+            <a:noFill/>
           </a:ln>
         </p:spPr>
         <p:style>
-          <a:lnRef idx="1">
-            <a:schemeClr val="accent1"/>
+          <a:lnRef idx="2">
+            <a:schemeClr val="accent1">
+              <a:shade val="50000"/>
+            </a:schemeClr>
           </a:lnRef>
-          <a:fillRef idx="0">
+          <a:fillRef idx="1">
             <a:schemeClr val="accent1"/>
           </a:fillRef>
           <a:effectRef idx="0">
             <a:schemeClr val="accent1"/>
           </a:effectRef>
           <a:fontRef idx="minor">
-            <a:schemeClr val="tx1"/>
+            <a:schemeClr val="lt1"/>
           </a:fontRef>
         </p:style>
-      </p:cxnSp>
+        <p:txBody>
+          <a:bodyPr tIns="0" bIns="0" rtlCol="0" anchor="ctr"/>
+          <a:lstStyle/>
+          <a:p>
+            <a:pPr algn="ctr"/>
+            <a:r>
+              <a:rPr lang="en-US" sz="1200" b="1" dirty="0" smtClean="0">
+                <a:solidFill>
+                  <a:schemeClr val="bg1"/>
+                </a:solidFill>
+                <a:latin typeface="+mn-ea"/>
+              </a:rPr>
+              <a:t>MCP</a:t>
+            </a:r>
+            <a:r>
+              <a:rPr lang="en-US" sz="1200" b="1" dirty="0">
+                <a:solidFill>
+                  <a:schemeClr val="bg1"/>
+                </a:solidFill>
+                <a:latin typeface="+mn-ea"/>
+              </a:rPr>
+              <a:t> </a:t>
+            </a:r>
+            <a:r>
+              <a:rPr lang="en-US" sz="1200" b="1" dirty="0" err="1" smtClean="0">
+                <a:solidFill>
+                  <a:schemeClr val="bg1"/>
+                </a:solidFill>
+                <a:latin typeface="+mn-ea"/>
+              </a:rPr>
+              <a:t>Intergration</a:t>
+            </a:r>
+            <a:endParaRPr lang="en-US" sz="1200" b="1" dirty="0">
+              <a:solidFill>
+                <a:schemeClr val="bg1"/>
+              </a:solidFill>
+              <a:latin typeface="+mn-ea"/>
+            </a:endParaRPr>
+          </a:p>
+        </p:txBody>
+      </p:sp>
+      <p:sp>
+        <p:nvSpPr>
+          <p:cNvPr id="86" name="object 10"/>
+          <p:cNvSpPr txBox="1"/>
+          <p:nvPr/>
+        </p:nvSpPr>
+        <p:spPr>
+          <a:xfrm>
+            <a:off x="3677372" y="6365835"/>
+            <a:ext cx="2808000" cy="982320"/>
+          </a:xfrm>
+          <a:prstGeom prst="rect">
+            <a:avLst/>
+          </a:prstGeom>
+        </p:spPr>
+        <p:txBody>
+          <a:bodyPr vert="horz" wrap="square" lIns="0" tIns="12700" rIns="0" bIns="0" rtlCol="0">
+            <a:spAutoFit/>
+          </a:bodyPr>
+          <a:lstStyle/>
+          <a:p>
+            <a:pPr marL="180975" indent="-180975">
+              <a:lnSpc>
+                <a:spcPct val="120000"/>
+              </a:lnSpc>
+              <a:buClr>
+                <a:srgbClr val="1668C1"/>
+              </a:buClr>
+              <a:buFont typeface="Arial" panose="020B0604020202020204" pitchFamily="34" charset="0"/>
+              <a:buChar char="•"/>
+            </a:pPr>
+            <a:r>
+              <a:rPr lang="en-US" altLang="ko-KR" sz="1050" dirty="0" smtClean="0">
+                <a:latin typeface="+mn-ea"/>
+                <a:cs typeface="Pretendard Variable Medium" panose="02000003000000020004" pitchFamily="2" charset="-127"/>
+              </a:rPr>
+              <a:t>MCP </a:t>
+            </a:r>
+            <a:r>
+              <a:rPr lang="ko-KR" altLang="en-US" sz="1050" dirty="0" smtClean="0">
+                <a:latin typeface="+mn-ea"/>
+                <a:cs typeface="Pretendard Variable Medium" panose="02000003000000020004" pitchFamily="2" charset="-127"/>
+              </a:rPr>
+              <a:t>기반 자연어 질의 지원으로 </a:t>
+            </a:r>
+            <a:r>
+              <a:rPr lang="en-US" altLang="ko-KR" sz="1050" dirty="0" smtClean="0">
+                <a:latin typeface="+mn-ea"/>
+                <a:cs typeface="Pretendard Variable Medium" panose="02000003000000020004" pitchFamily="2" charset="-127"/>
+              </a:rPr>
+              <a:t>SQL</a:t>
+            </a:r>
+            <a:r>
+              <a:rPr lang="ko-KR" altLang="en-US" sz="1050" dirty="0" smtClean="0">
+                <a:latin typeface="+mn-ea"/>
+                <a:cs typeface="Pretendard Variable Medium" panose="02000003000000020004" pitchFamily="2" charset="-127"/>
+              </a:rPr>
+              <a:t>에 익숙하지 않은 사용자도 데이터 분석가능</a:t>
+            </a:r>
+            <a:endParaRPr lang="en-US" altLang="ko-KR" sz="1050" dirty="0" smtClean="0">
+              <a:latin typeface="+mn-ea"/>
+              <a:cs typeface="Pretendard Variable Medium" panose="02000003000000020004" pitchFamily="2" charset="-127"/>
+            </a:endParaRPr>
+          </a:p>
+          <a:p>
+            <a:pPr marL="180975" indent="-180975">
+              <a:lnSpc>
+                <a:spcPct val="120000"/>
+              </a:lnSpc>
+              <a:buClr>
+                <a:srgbClr val="1668C1"/>
+              </a:buClr>
+              <a:buFont typeface="Arial" panose="020B0604020202020204" pitchFamily="34" charset="0"/>
+              <a:buChar char="•"/>
+            </a:pPr>
+            <a:r>
+              <a:rPr lang="ko-KR" altLang="en-US" sz="1050" dirty="0" smtClean="0">
+                <a:latin typeface="+mn-ea"/>
+                <a:cs typeface="Pretendard Variable Medium" panose="02000003000000020004" pitchFamily="2" charset="-127"/>
+              </a:rPr>
+              <a:t>이미지</a:t>
+            </a:r>
+            <a:r>
+              <a:rPr lang="en-US" altLang="ko-KR" sz="1050" dirty="0" smtClean="0">
+                <a:latin typeface="+mn-ea"/>
+                <a:cs typeface="Pretendard Variable Medium" panose="02000003000000020004" pitchFamily="2" charset="-127"/>
+              </a:rPr>
+              <a:t>/ </a:t>
+            </a:r>
+            <a:r>
+              <a:rPr lang="ko-KR" altLang="en-US" sz="1050" dirty="0" smtClean="0">
+                <a:latin typeface="+mn-ea"/>
+                <a:cs typeface="Pretendard Variable Medium" panose="02000003000000020004" pitchFamily="2" charset="-127"/>
+              </a:rPr>
+              <a:t>비정형 데이터에 대한 고차원 </a:t>
+            </a:r>
+            <a:r>
+              <a:rPr lang="en-US" altLang="ko-KR" sz="1050" dirty="0" smtClean="0">
+                <a:latin typeface="+mn-ea"/>
+                <a:cs typeface="Pretendard Variable Medium" panose="02000003000000020004" pitchFamily="2" charset="-127"/>
+              </a:rPr>
+              <a:t>Vector Search </a:t>
+            </a:r>
+            <a:r>
+              <a:rPr lang="ko-KR" altLang="en-US" sz="1050" dirty="0" smtClean="0">
+                <a:latin typeface="+mn-ea"/>
+                <a:cs typeface="Pretendard Variable Medium" panose="02000003000000020004" pitchFamily="2" charset="-127"/>
+              </a:rPr>
+              <a:t>기능으로 유사도 기반 고속 검색 및 분석 가능</a:t>
+            </a:r>
+            <a:endParaRPr lang="en-US" altLang="ko-KR" sz="1050" dirty="0">
+              <a:latin typeface="+mn-ea"/>
+              <a:cs typeface="Pretendard Variable Medium" panose="02000003000000020004" pitchFamily="2" charset="-127"/>
+            </a:endParaRPr>
+          </a:p>
+        </p:txBody>
+      </p:sp>
+      <p:grpSp>
+        <p:nvGrpSpPr>
+          <p:cNvPr id="100" name="그룹 99"/>
+          <p:cNvGrpSpPr/>
+          <p:nvPr/>
+        </p:nvGrpSpPr>
+        <p:grpSpPr>
+          <a:xfrm>
+            <a:off x="4420856" y="4565847"/>
+            <a:ext cx="1296865" cy="1045583"/>
+            <a:chOff x="7561385" y="4865070"/>
+            <a:chExt cx="1363620" cy="1045583"/>
+          </a:xfrm>
+        </p:grpSpPr>
+        <p:grpSp>
+          <p:nvGrpSpPr>
+            <p:cNvPr id="96" name="그룹 95"/>
+            <p:cNvGrpSpPr/>
+            <p:nvPr/>
+          </p:nvGrpSpPr>
+          <p:grpSpPr>
+            <a:xfrm>
+              <a:off x="7561385" y="4865070"/>
+              <a:ext cx="1090245" cy="689287"/>
+              <a:chOff x="7408985" y="4888525"/>
+              <a:chExt cx="855784" cy="505613"/>
+            </a:xfrm>
+          </p:grpSpPr>
+          <p:sp>
+            <p:nvSpPr>
+              <p:cNvPr id="5" name="모서리가 둥근 사각형 설명선 4"/>
+              <p:cNvSpPr/>
+              <p:nvPr/>
+            </p:nvSpPr>
+            <p:spPr>
+              <a:xfrm>
+                <a:off x="7432430" y="4888525"/>
+                <a:ext cx="797171" cy="480646"/>
+              </a:xfrm>
+              <a:prstGeom prst="wedgeRoundRectCallout">
+                <a:avLst>
+                  <a:gd name="adj1" fmla="val -38392"/>
+                  <a:gd name="adj2" fmla="val 90421"/>
+                  <a:gd name="adj3" fmla="val 16667"/>
+                </a:avLst>
+              </a:prstGeom>
+              <a:noFill/>
+              <a:ln w="38100">
+                <a:solidFill>
+                  <a:srgbClr val="9BB9FE"/>
+                </a:solidFill>
+              </a:ln>
+            </p:spPr>
+            <p:style>
+              <a:lnRef idx="2">
+                <a:schemeClr val="accent1">
+                  <a:shade val="50000"/>
+                </a:schemeClr>
+              </a:lnRef>
+              <a:fillRef idx="1">
+                <a:schemeClr val="accent1"/>
+              </a:fillRef>
+              <a:effectRef idx="0">
+                <a:schemeClr val="accent1"/>
+              </a:effectRef>
+              <a:fontRef idx="minor">
+                <a:schemeClr val="lt1"/>
+              </a:fontRef>
+            </p:style>
+            <p:txBody>
+              <a:bodyPr rtlCol="0" anchor="b"/>
+              <a:lstStyle/>
+              <a:p>
+                <a:pPr algn="ctr">
+                  <a:lnSpc>
+                    <a:spcPct val="30000"/>
+                  </a:lnSpc>
+                </a:pPr>
+                <a:endParaRPr lang="en-US" altLang="ko-KR" sz="2400" b="1" dirty="0">
+                  <a:solidFill>
+                    <a:srgbClr val="9BB9FE"/>
+                  </a:solidFill>
+                </a:endParaRPr>
+              </a:p>
+            </p:txBody>
+          </p:sp>
+          <p:sp>
+            <p:nvSpPr>
+              <p:cNvPr id="94" name="TextBox 93"/>
+              <p:cNvSpPr txBox="1"/>
+              <p:nvPr/>
+            </p:nvSpPr>
+            <p:spPr>
+              <a:xfrm>
+                <a:off x="7408985" y="4948913"/>
+                <a:ext cx="855784" cy="445225"/>
+              </a:xfrm>
+              <a:prstGeom prst="rect">
+                <a:avLst/>
+              </a:prstGeom>
+              <a:noFill/>
+            </p:spPr>
+            <p:txBody>
+              <a:bodyPr wrap="square" rtlCol="0" anchor="b">
+                <a:spAutoFit/>
+              </a:bodyPr>
+              <a:lstStyle/>
+              <a:p>
+                <a:pPr algn="ctr">
+                  <a:lnSpc>
+                    <a:spcPct val="30000"/>
+                  </a:lnSpc>
+                </a:pPr>
+                <a:r>
+                  <a:rPr lang="en-US" altLang="ko-KR" sz="3600" b="1" dirty="0">
+                    <a:solidFill>
+                      <a:srgbClr val="9BB9FE"/>
+                    </a:solidFill>
+                  </a:rPr>
+                  <a:t>-----</a:t>
+                </a:r>
+              </a:p>
+              <a:p>
+                <a:pPr algn="ctr">
+                  <a:lnSpc>
+                    <a:spcPct val="30000"/>
+                  </a:lnSpc>
+                </a:pPr>
+                <a:r>
+                  <a:rPr lang="en-US" altLang="ko-KR" sz="3600" b="1" dirty="0">
+                    <a:solidFill>
+                      <a:srgbClr val="9BB9FE"/>
+                    </a:solidFill>
+                  </a:rPr>
+                  <a:t>-----</a:t>
+                </a:r>
+              </a:p>
+              <a:p>
+                <a:pPr algn="ctr">
+                  <a:lnSpc>
+                    <a:spcPct val="30000"/>
+                  </a:lnSpc>
+                </a:pPr>
+                <a:r>
+                  <a:rPr lang="en-US" altLang="ko-KR" sz="3600" b="1" dirty="0" smtClean="0">
+                    <a:solidFill>
+                      <a:srgbClr val="9BB9FE"/>
+                    </a:solidFill>
+                  </a:rPr>
+                  <a:t>-----</a:t>
+                </a:r>
+                <a:endParaRPr lang="en-US" altLang="ko-KR" sz="3600" b="1" dirty="0">
+                  <a:solidFill>
+                    <a:srgbClr val="9BB9FE"/>
+                  </a:solidFill>
+                </a:endParaRPr>
+              </a:p>
+            </p:txBody>
+          </p:sp>
+        </p:grpSp>
+        <p:grpSp>
+          <p:nvGrpSpPr>
+            <p:cNvPr id="99" name="그룹 98"/>
+            <p:cNvGrpSpPr/>
+            <p:nvPr/>
+          </p:nvGrpSpPr>
+          <p:grpSpPr>
+            <a:xfrm>
+              <a:off x="8172450" y="5175250"/>
+              <a:ext cx="752555" cy="735403"/>
+              <a:chOff x="8229600" y="5207000"/>
+              <a:chExt cx="752555" cy="735403"/>
+            </a:xfrm>
+          </p:grpSpPr>
+          <p:sp>
+            <p:nvSpPr>
+              <p:cNvPr id="93" name="뺄셈 기호 92"/>
+              <p:cNvSpPr/>
+              <p:nvPr/>
+            </p:nvSpPr>
+            <p:spPr>
+              <a:xfrm rot="2468983">
+                <a:off x="8546839" y="5539715"/>
+                <a:ext cx="435316" cy="402688"/>
+              </a:xfrm>
+              <a:prstGeom prst="mathMinus">
+                <a:avLst/>
+              </a:prstGeom>
+              <a:solidFill>
+                <a:schemeClr val="bg1"/>
+              </a:solidFill>
+              <a:ln w="38100">
+                <a:solidFill>
+                  <a:srgbClr val="9BB9FE"/>
+                </a:solidFill>
+              </a:ln>
+            </p:spPr>
+            <p:style>
+              <a:lnRef idx="2">
+                <a:schemeClr val="accent1">
+                  <a:shade val="50000"/>
+                </a:schemeClr>
+              </a:lnRef>
+              <a:fillRef idx="1">
+                <a:schemeClr val="accent1"/>
+              </a:fillRef>
+              <a:effectRef idx="0">
+                <a:schemeClr val="accent1"/>
+              </a:effectRef>
+              <a:fontRef idx="minor">
+                <a:schemeClr val="lt1"/>
+              </a:fontRef>
+            </p:style>
+            <p:txBody>
+              <a:bodyPr rtlCol="0" anchor="ctr"/>
+              <a:lstStyle/>
+              <a:p>
+                <a:pPr algn="ctr"/>
+                <a:endParaRPr lang="ko-KR" altLang="en-US"/>
+              </a:p>
+            </p:txBody>
+          </p:sp>
+          <p:sp>
+            <p:nvSpPr>
+              <p:cNvPr id="97" name="타원 96"/>
+              <p:cNvSpPr/>
+              <p:nvPr/>
+            </p:nvSpPr>
+            <p:spPr>
+              <a:xfrm>
+                <a:off x="8229600" y="5207000"/>
+                <a:ext cx="543600" cy="540000"/>
+              </a:xfrm>
+              <a:prstGeom prst="ellipse">
+                <a:avLst/>
+              </a:prstGeom>
+              <a:solidFill>
+                <a:schemeClr val="bg1"/>
+              </a:solidFill>
+              <a:ln w="38100">
+                <a:solidFill>
+                  <a:srgbClr val="9BB9FE"/>
+                </a:solidFill>
+              </a:ln>
+            </p:spPr>
+            <p:style>
+              <a:lnRef idx="2">
+                <a:schemeClr val="accent1">
+                  <a:shade val="50000"/>
+                </a:schemeClr>
+              </a:lnRef>
+              <a:fillRef idx="1">
+                <a:schemeClr val="accent1"/>
+              </a:fillRef>
+              <a:effectRef idx="0">
+                <a:schemeClr val="accent1"/>
+              </a:effectRef>
+              <a:fontRef idx="minor">
+                <a:schemeClr val="lt1"/>
+              </a:fontRef>
+            </p:style>
+            <p:txBody>
+              <a:bodyPr rtlCol="0" anchor="ctr"/>
+              <a:lstStyle/>
+              <a:p>
+                <a:pPr algn="ctr"/>
+                <a:endParaRPr lang="ko-KR" altLang="en-US"/>
+              </a:p>
+            </p:txBody>
+          </p:sp>
+          <p:sp>
+            <p:nvSpPr>
+              <p:cNvPr id="98" name="타원 97"/>
+              <p:cNvSpPr/>
+              <p:nvPr/>
+            </p:nvSpPr>
+            <p:spPr>
+              <a:xfrm>
+                <a:off x="8306687" y="5277100"/>
+                <a:ext cx="396000" cy="396000"/>
+              </a:xfrm>
+              <a:prstGeom prst="ellipse">
+                <a:avLst/>
+              </a:prstGeom>
+              <a:solidFill>
+                <a:schemeClr val="bg1"/>
+              </a:solidFill>
+              <a:ln w="38100">
+                <a:solidFill>
+                  <a:srgbClr val="9BB9FE"/>
+                </a:solidFill>
+              </a:ln>
+            </p:spPr>
+            <p:style>
+              <a:lnRef idx="2">
+                <a:schemeClr val="accent1">
+                  <a:shade val="50000"/>
+                </a:schemeClr>
+              </a:lnRef>
+              <a:fillRef idx="1">
+                <a:schemeClr val="accent1"/>
+              </a:fillRef>
+              <a:effectRef idx="0">
+                <a:schemeClr val="accent1"/>
+              </a:effectRef>
+              <a:fontRef idx="minor">
+                <a:schemeClr val="lt1"/>
+              </a:fontRef>
+            </p:style>
+            <p:txBody>
+              <a:bodyPr rtlCol="0" anchor="ctr"/>
+              <a:lstStyle/>
+              <a:p>
+                <a:pPr algn="ctr"/>
+                <a:endParaRPr lang="ko-KR" altLang="en-US"/>
+              </a:p>
+            </p:txBody>
+          </p:sp>
+        </p:grpSp>
+      </p:grpSp>
     </p:spTree>
     <p:extLst>
       <p:ext uri="{BB962C8B-B14F-4D97-AF65-F5344CB8AC3E}">
@@ -13960,7 +14534,7 @@
 </p:sld>
 </file>
 
-<file path=ppt/slides/slide2.xml><?xml version="1.0" encoding="utf-8"?>
+<file path=ppt/slides/slide3.xml><?xml version="1.0" encoding="utf-8"?>
 <p:sld xmlns:a="http://schemas.openxmlformats.org/drawingml/2006/main" xmlns:r="http://schemas.openxmlformats.org/officeDocument/2006/relationships" xmlns:p="http://schemas.openxmlformats.org/presentationml/2006/main">
   <p:cSld>
     <p:spTree>
@@ -15305,7 +15879,7 @@
 </p:sld>
 </file>
 
-<file path=ppt/slides/slide3.xml><?xml version="1.0" encoding="utf-8"?>
+<file path=ppt/slides/slide4.xml><?xml version="1.0" encoding="utf-8"?>
 <p:sld xmlns:a="http://schemas.openxmlformats.org/drawingml/2006/main" xmlns:r="http://schemas.openxmlformats.org/officeDocument/2006/relationships" xmlns:p="http://schemas.openxmlformats.org/presentationml/2006/main">
   <p:cSld>
     <p:spTree>
@@ -19802,7 +20376,7 @@
 </p:sld>
 </file>
 
-<file path=ppt/slides/slide4.xml><?xml version="1.0" encoding="utf-8"?>
+<file path=ppt/slides/slide5.xml><?xml version="1.0" encoding="utf-8"?>
 <p:sld xmlns:a="http://schemas.openxmlformats.org/drawingml/2006/main" xmlns:r="http://schemas.openxmlformats.org/officeDocument/2006/relationships" xmlns:p="http://schemas.openxmlformats.org/presentationml/2006/main">
   <p:cSld>
     <p:spTree>
@@ -19992,7 +20566,7 @@
 </p:sld>
 </file>
 
-<file path=ppt/slides/slide5.xml><?xml version="1.0" encoding="utf-8"?>
+<file path=ppt/slides/slide6.xml><?xml version="1.0" encoding="utf-8"?>
 <p:sld xmlns:a="http://schemas.openxmlformats.org/drawingml/2006/main" xmlns:r="http://schemas.openxmlformats.org/officeDocument/2006/relationships" xmlns:p="http://schemas.openxmlformats.org/presentationml/2006/main">
   <p:cSld>
     <p:spTree>

--- a/99ref/blog.pptx
+++ b/99ref/blog.pptx
@@ -9,8 +9,9 @@
     <p:sldId id="256" r:id="rId3"/>
     <p:sldId id="257" r:id="rId4"/>
     <p:sldId id="258" r:id="rId5"/>
-    <p:sldId id="259" r:id="rId6"/>
-    <p:sldId id="260" r:id="rId7"/>
+    <p:sldId id="262" r:id="rId6"/>
+    <p:sldId id="259" r:id="rId7"/>
+    <p:sldId id="260" r:id="rId8"/>
   </p:sldIdLst>
   <p:sldSz cx="9720263" cy="8999538"/>
   <p:notesSz cx="6858000" cy="9144000"/>
@@ -248,7 +249,7 @@
           <a:p>
             <a:fld id="{7BB46140-E90A-48B1-9E02-0E867CD1ADA8}" type="datetimeFigureOut">
               <a:rPr lang="ko-KR" altLang="en-US" smtClean="0"/>
-              <a:t>2026-04-17</a:t>
+              <a:t>2026-04-20</a:t>
             </a:fld>
             <a:endParaRPr lang="ko-KR" altLang="en-US"/>
           </a:p>
@@ -418,7 +419,7 @@
           <a:p>
             <a:fld id="{7BB46140-E90A-48B1-9E02-0E867CD1ADA8}" type="datetimeFigureOut">
               <a:rPr lang="ko-KR" altLang="en-US" smtClean="0"/>
-              <a:t>2026-04-17</a:t>
+              <a:t>2026-04-20</a:t>
             </a:fld>
             <a:endParaRPr lang="ko-KR" altLang="en-US"/>
           </a:p>
@@ -598,7 +599,7 @@
           <a:p>
             <a:fld id="{7BB46140-E90A-48B1-9E02-0E867CD1ADA8}" type="datetimeFigureOut">
               <a:rPr lang="ko-KR" altLang="en-US" smtClean="0"/>
-              <a:t>2026-04-17</a:t>
+              <a:t>2026-04-20</a:t>
             </a:fld>
             <a:endParaRPr lang="ko-KR" altLang="en-US"/>
           </a:p>
@@ -768,7 +769,7 @@
           <a:p>
             <a:fld id="{7BB46140-E90A-48B1-9E02-0E867CD1ADA8}" type="datetimeFigureOut">
               <a:rPr lang="ko-KR" altLang="en-US" smtClean="0"/>
-              <a:t>2026-04-17</a:t>
+              <a:t>2026-04-20</a:t>
             </a:fld>
             <a:endParaRPr lang="ko-KR" altLang="en-US"/>
           </a:p>
@@ -1012,7 +1013,7 @@
           <a:p>
             <a:fld id="{7BB46140-E90A-48B1-9E02-0E867CD1ADA8}" type="datetimeFigureOut">
               <a:rPr lang="ko-KR" altLang="en-US" smtClean="0"/>
-              <a:t>2026-04-17</a:t>
+              <a:t>2026-04-20</a:t>
             </a:fld>
             <a:endParaRPr lang="ko-KR" altLang="en-US"/>
           </a:p>
@@ -1244,7 +1245,7 @@
           <a:p>
             <a:fld id="{7BB46140-E90A-48B1-9E02-0E867CD1ADA8}" type="datetimeFigureOut">
               <a:rPr lang="ko-KR" altLang="en-US" smtClean="0"/>
-              <a:t>2026-04-17</a:t>
+              <a:t>2026-04-20</a:t>
             </a:fld>
             <a:endParaRPr lang="ko-KR" altLang="en-US"/>
           </a:p>
@@ -1611,7 +1612,7 @@
           <a:p>
             <a:fld id="{7BB46140-E90A-48B1-9E02-0E867CD1ADA8}" type="datetimeFigureOut">
               <a:rPr lang="ko-KR" altLang="en-US" smtClean="0"/>
-              <a:t>2026-04-17</a:t>
+              <a:t>2026-04-20</a:t>
             </a:fld>
             <a:endParaRPr lang="ko-KR" altLang="en-US"/>
           </a:p>
@@ -1729,7 +1730,7 @@
           <a:p>
             <a:fld id="{7BB46140-E90A-48B1-9E02-0E867CD1ADA8}" type="datetimeFigureOut">
               <a:rPr lang="ko-KR" altLang="en-US" smtClean="0"/>
-              <a:t>2026-04-17</a:t>
+              <a:t>2026-04-20</a:t>
             </a:fld>
             <a:endParaRPr lang="ko-KR" altLang="en-US"/>
           </a:p>
@@ -1824,7 +1825,7 @@
           <a:p>
             <a:fld id="{7BB46140-E90A-48B1-9E02-0E867CD1ADA8}" type="datetimeFigureOut">
               <a:rPr lang="ko-KR" altLang="en-US" smtClean="0"/>
-              <a:t>2026-04-17</a:t>
+              <a:t>2026-04-20</a:t>
             </a:fld>
             <a:endParaRPr lang="ko-KR" altLang="en-US"/>
           </a:p>
@@ -2101,7 +2102,7 @@
           <a:p>
             <a:fld id="{7BB46140-E90A-48B1-9E02-0E867CD1ADA8}" type="datetimeFigureOut">
               <a:rPr lang="ko-KR" altLang="en-US" smtClean="0"/>
-              <a:t>2026-04-17</a:t>
+              <a:t>2026-04-20</a:t>
             </a:fld>
             <a:endParaRPr lang="ko-KR" altLang="en-US"/>
           </a:p>
@@ -2358,7 +2359,7 @@
           <a:p>
             <a:fld id="{7BB46140-E90A-48B1-9E02-0E867CD1ADA8}" type="datetimeFigureOut">
               <a:rPr lang="ko-KR" altLang="en-US" smtClean="0"/>
-              <a:t>2026-04-17</a:t>
+              <a:t>2026-04-20</a:t>
             </a:fld>
             <a:endParaRPr lang="ko-KR" altLang="en-US"/>
           </a:p>
@@ -2571,7 +2572,7 @@
           <a:p>
             <a:fld id="{7BB46140-E90A-48B1-9E02-0E867CD1ADA8}" type="datetimeFigureOut">
               <a:rPr lang="ko-KR" altLang="en-US" smtClean="0"/>
-              <a:t>2026-04-17</a:t>
+              <a:t>2026-04-20</a:t>
             </a:fld>
             <a:endParaRPr lang="ko-KR" altLang="en-US"/>
           </a:p>
@@ -3035,18 +3036,7 @@
                 </a:solidFill>
                 <a:latin typeface="+mn-ea"/>
               </a:rPr>
-              <a:t>란 </a:t>
-            </a:r>
-            <a:r>
-              <a:rPr lang="ko-KR" altLang="en-US" sz="1600" b="1" dirty="0" smtClean="0">
-                <a:solidFill>
-                  <a:schemeClr val="accent1">
-                    <a:lumMod val="75000"/>
-                  </a:schemeClr>
-                </a:solidFill>
-                <a:latin typeface="+mn-ea"/>
-              </a:rPr>
-              <a:t>무엇인가</a:t>
+              <a:t>란 무엇인가</a:t>
             </a:r>
             <a:endParaRPr lang="ko-KR" altLang="en-US" sz="1600" b="1" dirty="0">
               <a:solidFill>
@@ -6338,7 +6328,7 @@
                 <a:gridCol w="200863">
                   <a:extLst>
                     <a:ext uri="{9D8B030D-6E8A-4147-A177-3AD203B41FA5}">
-                      <a16:colId xmlns="" xmlns:a16="http://schemas.microsoft.com/office/drawing/2014/main" val="20000"/>
+                      <a16:colId xmlns:a16="http://schemas.microsoft.com/office/drawing/2014/main" xmlns="" val="20000"/>
                     </a:ext>
                   </a:extLst>
                 </a:gridCol>
@@ -6363,7 +6353,7 @@
                 </a:tc>
                 <a:extLst>
                   <a:ext uri="{0D108BD9-81ED-4DB2-BD59-A6C34878D82A}">
-                    <a16:rowId xmlns="" xmlns:a16="http://schemas.microsoft.com/office/drawing/2014/main" val="10001"/>
+                    <a16:rowId xmlns:a16="http://schemas.microsoft.com/office/drawing/2014/main" xmlns="" val="10001"/>
                   </a:ext>
                 </a:extLst>
               </a:tr>
@@ -6387,7 +6377,7 @@
                 </a:tc>
                 <a:extLst>
                   <a:ext uri="{0D108BD9-81ED-4DB2-BD59-A6C34878D82A}">
-                    <a16:rowId xmlns="" xmlns:a16="http://schemas.microsoft.com/office/drawing/2014/main" val="10002"/>
+                    <a16:rowId xmlns:a16="http://schemas.microsoft.com/office/drawing/2014/main" xmlns="" val="10002"/>
                   </a:ext>
                 </a:extLst>
               </a:tr>
@@ -6411,7 +6401,7 @@
                 </a:tc>
                 <a:extLst>
                   <a:ext uri="{0D108BD9-81ED-4DB2-BD59-A6C34878D82A}">
-                    <a16:rowId xmlns="" xmlns:a16="http://schemas.microsoft.com/office/drawing/2014/main" val="10003"/>
+                    <a16:rowId xmlns:a16="http://schemas.microsoft.com/office/drawing/2014/main" xmlns="" val="10003"/>
                   </a:ext>
                 </a:extLst>
               </a:tr>
@@ -6435,7 +6425,7 @@
                 </a:tc>
                 <a:extLst>
                   <a:ext uri="{0D108BD9-81ED-4DB2-BD59-A6C34878D82A}">
-                    <a16:rowId xmlns="" xmlns:a16="http://schemas.microsoft.com/office/drawing/2014/main" val="10004"/>
+                    <a16:rowId xmlns:a16="http://schemas.microsoft.com/office/drawing/2014/main" xmlns="" val="10004"/>
                   </a:ext>
                 </a:extLst>
               </a:tr>
@@ -6459,7 +6449,7 @@
                 </a:tc>
                 <a:extLst>
                   <a:ext uri="{0D108BD9-81ED-4DB2-BD59-A6C34878D82A}">
-                    <a16:rowId xmlns="" xmlns:a16="http://schemas.microsoft.com/office/drawing/2014/main" val="10005"/>
+                    <a16:rowId xmlns:a16="http://schemas.microsoft.com/office/drawing/2014/main" xmlns="" val="10005"/>
                   </a:ext>
                 </a:extLst>
               </a:tr>
@@ -6495,7 +6485,7 @@
                 <a:gridCol w="200863">
                   <a:extLst>
                     <a:ext uri="{9D8B030D-6E8A-4147-A177-3AD203B41FA5}">
-                      <a16:colId xmlns="" xmlns:a16="http://schemas.microsoft.com/office/drawing/2014/main" val="20000"/>
+                      <a16:colId xmlns:a16="http://schemas.microsoft.com/office/drawing/2014/main" xmlns="" val="20000"/>
                     </a:ext>
                   </a:extLst>
                 </a:gridCol>
@@ -6517,7 +6507,7 @@
                 </a:tc>
                 <a:extLst>
                   <a:ext uri="{0D108BD9-81ED-4DB2-BD59-A6C34878D82A}">
-                    <a16:rowId xmlns="" xmlns:a16="http://schemas.microsoft.com/office/drawing/2014/main" val="10001"/>
+                    <a16:rowId xmlns:a16="http://schemas.microsoft.com/office/drawing/2014/main" xmlns="" val="10001"/>
                   </a:ext>
                 </a:extLst>
               </a:tr>
@@ -6538,7 +6528,7 @@
                 </a:tc>
                 <a:extLst>
                   <a:ext uri="{0D108BD9-81ED-4DB2-BD59-A6C34878D82A}">
-                    <a16:rowId xmlns="" xmlns:a16="http://schemas.microsoft.com/office/drawing/2014/main" val="10002"/>
+                    <a16:rowId xmlns:a16="http://schemas.microsoft.com/office/drawing/2014/main" xmlns="" val="10002"/>
                   </a:ext>
                 </a:extLst>
               </a:tr>
@@ -6559,7 +6549,7 @@
                 </a:tc>
                 <a:extLst>
                   <a:ext uri="{0D108BD9-81ED-4DB2-BD59-A6C34878D82A}">
-                    <a16:rowId xmlns="" xmlns:a16="http://schemas.microsoft.com/office/drawing/2014/main" val="10003"/>
+                    <a16:rowId xmlns:a16="http://schemas.microsoft.com/office/drawing/2014/main" xmlns="" val="10003"/>
                   </a:ext>
                 </a:extLst>
               </a:tr>
@@ -6580,7 +6570,7 @@
                 </a:tc>
                 <a:extLst>
                   <a:ext uri="{0D108BD9-81ED-4DB2-BD59-A6C34878D82A}">
-                    <a16:rowId xmlns="" xmlns:a16="http://schemas.microsoft.com/office/drawing/2014/main" val="10004"/>
+                    <a16:rowId xmlns:a16="http://schemas.microsoft.com/office/drawing/2014/main" xmlns="" val="10004"/>
                   </a:ext>
                 </a:extLst>
               </a:tr>
@@ -6601,7 +6591,7 @@
                 </a:tc>
                 <a:extLst>
                   <a:ext uri="{0D108BD9-81ED-4DB2-BD59-A6C34878D82A}">
-                    <a16:rowId xmlns="" xmlns:a16="http://schemas.microsoft.com/office/drawing/2014/main" val="10005"/>
+                    <a16:rowId xmlns:a16="http://schemas.microsoft.com/office/drawing/2014/main" xmlns="" val="10005"/>
                   </a:ext>
                 </a:extLst>
               </a:tr>
@@ -6637,7 +6627,7 @@
                 <a:gridCol w="200863">
                   <a:extLst>
                     <a:ext uri="{9D8B030D-6E8A-4147-A177-3AD203B41FA5}">
-                      <a16:colId xmlns="" xmlns:a16="http://schemas.microsoft.com/office/drawing/2014/main" val="20000"/>
+                      <a16:colId xmlns:a16="http://schemas.microsoft.com/office/drawing/2014/main" xmlns="" val="20000"/>
                     </a:ext>
                   </a:extLst>
                 </a:gridCol>
@@ -6661,7 +6651,7 @@
                 </a:tc>
                 <a:extLst>
                   <a:ext uri="{0D108BD9-81ED-4DB2-BD59-A6C34878D82A}">
-                    <a16:rowId xmlns="" xmlns:a16="http://schemas.microsoft.com/office/drawing/2014/main" val="10001"/>
+                    <a16:rowId xmlns:a16="http://schemas.microsoft.com/office/drawing/2014/main" xmlns="" val="10001"/>
                   </a:ext>
                 </a:extLst>
               </a:tr>
@@ -6684,7 +6674,7 @@
                 </a:tc>
                 <a:extLst>
                   <a:ext uri="{0D108BD9-81ED-4DB2-BD59-A6C34878D82A}">
-                    <a16:rowId xmlns="" xmlns:a16="http://schemas.microsoft.com/office/drawing/2014/main" val="10002"/>
+                    <a16:rowId xmlns:a16="http://schemas.microsoft.com/office/drawing/2014/main" xmlns="" val="10002"/>
                   </a:ext>
                 </a:extLst>
               </a:tr>
@@ -6707,7 +6697,7 @@
                 </a:tc>
                 <a:extLst>
                   <a:ext uri="{0D108BD9-81ED-4DB2-BD59-A6C34878D82A}">
-                    <a16:rowId xmlns="" xmlns:a16="http://schemas.microsoft.com/office/drawing/2014/main" val="10003"/>
+                    <a16:rowId xmlns:a16="http://schemas.microsoft.com/office/drawing/2014/main" xmlns="" val="10003"/>
                   </a:ext>
                 </a:extLst>
               </a:tr>
@@ -6730,7 +6720,7 @@
                 </a:tc>
                 <a:extLst>
                   <a:ext uri="{0D108BD9-81ED-4DB2-BD59-A6C34878D82A}">
-                    <a16:rowId xmlns="" xmlns:a16="http://schemas.microsoft.com/office/drawing/2014/main" val="10004"/>
+                    <a16:rowId xmlns:a16="http://schemas.microsoft.com/office/drawing/2014/main" xmlns="" val="10004"/>
                   </a:ext>
                 </a:extLst>
               </a:tr>
@@ -6753,7 +6743,7 @@
                 </a:tc>
                 <a:extLst>
                   <a:ext uri="{0D108BD9-81ED-4DB2-BD59-A6C34878D82A}">
-                    <a16:rowId xmlns="" xmlns:a16="http://schemas.microsoft.com/office/drawing/2014/main" val="10005"/>
+                    <a16:rowId xmlns:a16="http://schemas.microsoft.com/office/drawing/2014/main" xmlns="" val="10005"/>
                   </a:ext>
                 </a:extLst>
               </a:tr>
@@ -6789,7 +6779,7 @@
                 <a:gridCol w="200863">
                   <a:extLst>
                     <a:ext uri="{9D8B030D-6E8A-4147-A177-3AD203B41FA5}">
-                      <a16:colId xmlns="" xmlns:a16="http://schemas.microsoft.com/office/drawing/2014/main" val="20000"/>
+                      <a16:colId xmlns:a16="http://schemas.microsoft.com/office/drawing/2014/main" xmlns="" val="20000"/>
                     </a:ext>
                   </a:extLst>
                 </a:gridCol>
@@ -6814,7 +6804,7 @@
                 </a:tc>
                 <a:extLst>
                   <a:ext uri="{0D108BD9-81ED-4DB2-BD59-A6C34878D82A}">
-                    <a16:rowId xmlns="" xmlns:a16="http://schemas.microsoft.com/office/drawing/2014/main" val="10001"/>
+                    <a16:rowId xmlns:a16="http://schemas.microsoft.com/office/drawing/2014/main" xmlns="" val="10001"/>
                   </a:ext>
                 </a:extLst>
               </a:tr>
@@ -6838,7 +6828,7 @@
                 </a:tc>
                 <a:extLst>
                   <a:ext uri="{0D108BD9-81ED-4DB2-BD59-A6C34878D82A}">
-                    <a16:rowId xmlns="" xmlns:a16="http://schemas.microsoft.com/office/drawing/2014/main" val="10002"/>
+                    <a16:rowId xmlns:a16="http://schemas.microsoft.com/office/drawing/2014/main" xmlns="" val="10002"/>
                   </a:ext>
                 </a:extLst>
               </a:tr>
@@ -6862,7 +6852,7 @@
                 </a:tc>
                 <a:extLst>
                   <a:ext uri="{0D108BD9-81ED-4DB2-BD59-A6C34878D82A}">
-                    <a16:rowId xmlns="" xmlns:a16="http://schemas.microsoft.com/office/drawing/2014/main" val="10003"/>
+                    <a16:rowId xmlns:a16="http://schemas.microsoft.com/office/drawing/2014/main" xmlns="" val="10003"/>
                   </a:ext>
                 </a:extLst>
               </a:tr>
@@ -6886,7 +6876,7 @@
                 </a:tc>
                 <a:extLst>
                   <a:ext uri="{0D108BD9-81ED-4DB2-BD59-A6C34878D82A}">
-                    <a16:rowId xmlns="" xmlns:a16="http://schemas.microsoft.com/office/drawing/2014/main" val="10004"/>
+                    <a16:rowId xmlns:a16="http://schemas.microsoft.com/office/drawing/2014/main" xmlns="" val="10004"/>
                   </a:ext>
                 </a:extLst>
               </a:tr>
@@ -6910,7 +6900,7 @@
                 </a:tc>
                 <a:extLst>
                   <a:ext uri="{0D108BD9-81ED-4DB2-BD59-A6C34878D82A}">
-                    <a16:rowId xmlns="" xmlns:a16="http://schemas.microsoft.com/office/drawing/2014/main" val="10005"/>
+                    <a16:rowId xmlns:a16="http://schemas.microsoft.com/office/drawing/2014/main" xmlns="" val="10005"/>
                   </a:ext>
                 </a:extLst>
               </a:tr>
@@ -6946,7 +6936,7 @@
                 <a:gridCol w="199782">
                   <a:extLst>
                     <a:ext uri="{9D8B030D-6E8A-4147-A177-3AD203B41FA5}">
-                      <a16:colId xmlns="" xmlns:a16="http://schemas.microsoft.com/office/drawing/2014/main" val="20000"/>
+                      <a16:colId xmlns:a16="http://schemas.microsoft.com/office/drawing/2014/main" xmlns="" val="20000"/>
                     </a:ext>
                   </a:extLst>
                 </a:gridCol>
@@ -6971,7 +6961,7 @@
                 </a:tc>
                 <a:extLst>
                   <a:ext uri="{0D108BD9-81ED-4DB2-BD59-A6C34878D82A}">
-                    <a16:rowId xmlns="" xmlns:a16="http://schemas.microsoft.com/office/drawing/2014/main" val="10001"/>
+                    <a16:rowId xmlns:a16="http://schemas.microsoft.com/office/drawing/2014/main" xmlns="" val="10001"/>
                   </a:ext>
                 </a:extLst>
               </a:tr>
@@ -6995,7 +6985,7 @@
                 </a:tc>
                 <a:extLst>
                   <a:ext uri="{0D108BD9-81ED-4DB2-BD59-A6C34878D82A}">
-                    <a16:rowId xmlns="" xmlns:a16="http://schemas.microsoft.com/office/drawing/2014/main" val="10002"/>
+                    <a16:rowId xmlns:a16="http://schemas.microsoft.com/office/drawing/2014/main" xmlns="" val="10002"/>
                   </a:ext>
                 </a:extLst>
               </a:tr>
@@ -7019,7 +7009,7 @@
                 </a:tc>
                 <a:extLst>
                   <a:ext uri="{0D108BD9-81ED-4DB2-BD59-A6C34878D82A}">
-                    <a16:rowId xmlns="" xmlns:a16="http://schemas.microsoft.com/office/drawing/2014/main" val="10003"/>
+                    <a16:rowId xmlns:a16="http://schemas.microsoft.com/office/drawing/2014/main" xmlns="" val="10003"/>
                   </a:ext>
                 </a:extLst>
               </a:tr>
@@ -7043,7 +7033,7 @@
                 </a:tc>
                 <a:extLst>
                   <a:ext uri="{0D108BD9-81ED-4DB2-BD59-A6C34878D82A}">
-                    <a16:rowId xmlns="" xmlns:a16="http://schemas.microsoft.com/office/drawing/2014/main" val="10004"/>
+                    <a16:rowId xmlns:a16="http://schemas.microsoft.com/office/drawing/2014/main" xmlns="" val="10004"/>
                   </a:ext>
                 </a:extLst>
               </a:tr>
@@ -7067,7 +7057,7 @@
                 </a:tc>
                 <a:extLst>
                   <a:ext uri="{0D108BD9-81ED-4DB2-BD59-A6C34878D82A}">
-                    <a16:rowId xmlns="" xmlns:a16="http://schemas.microsoft.com/office/drawing/2014/main" val="10005"/>
+                    <a16:rowId xmlns:a16="http://schemas.microsoft.com/office/drawing/2014/main" xmlns="" val="10005"/>
                   </a:ext>
                 </a:extLst>
               </a:tr>
@@ -14667,7 +14657,7 @@
           <p:cNvPr id="5" name="그림 4">
             <a:extLst>
               <a:ext uri="{FF2B5EF4-FFF2-40B4-BE49-F238E27FC236}">
-                <a16:creationId xmlns:a16="http://schemas.microsoft.com/office/drawing/2014/main" xmlns="" id="{F25A3B3A-32C8-4401-A476-E8CCEB3258D5}"/>
+                <a16:creationId xmlns="" xmlns:a16="http://schemas.microsoft.com/office/drawing/2014/main" id="{F25A3B3A-32C8-4401-A476-E8CCEB3258D5}"/>
               </a:ext>
             </a:extLst>
           </p:cNvPr>
@@ -14710,7 +14700,7 @@
           <p:cNvPr id="6" name="Picture 4">
             <a:extLst>
               <a:ext uri="{FF2B5EF4-FFF2-40B4-BE49-F238E27FC236}">
-                <a16:creationId xmlns:a16="http://schemas.microsoft.com/office/drawing/2014/main" xmlns="" id="{051FB3A4-C7F9-45D0-A73B-557A6E1C4FDF}"/>
+                <a16:creationId xmlns="" xmlns:a16="http://schemas.microsoft.com/office/drawing/2014/main" id="{051FB3A4-C7F9-45D0-A73B-557A6E1C4FDF}"/>
               </a:ext>
             </a:extLst>
           </p:cNvPr>
@@ -17984,7 +17974,7 @@
           <p:cNvPr id="66" name="Picture 2" descr="versus png에 대한 이미지 검색결과">
             <a:extLst>
               <a:ext uri="{FF2B5EF4-FFF2-40B4-BE49-F238E27FC236}">
-                <a16:creationId xmlns:a16="http://schemas.microsoft.com/office/drawing/2014/main" xmlns="" id="{7CF353E0-AD86-40C8-A8CD-549B85952746}"/>
+                <a16:creationId xmlns="" xmlns:a16="http://schemas.microsoft.com/office/drawing/2014/main" id="{7CF353E0-AD86-40C8-A8CD-549B85952746}"/>
               </a:ext>
             </a:extLst>
           </p:cNvPr>
@@ -18726,7 +18716,7 @@
                 <a:gridCol w="3351959">
                   <a:extLst>
                     <a:ext uri="{9D8B030D-6E8A-4147-A177-3AD203B41FA5}">
-                      <a16:colId xmlns:a16="http://schemas.microsoft.com/office/drawing/2014/main" xmlns="" val="20000"/>
+                      <a16:colId xmlns="" xmlns:a16="http://schemas.microsoft.com/office/drawing/2014/main" val="20000"/>
                     </a:ext>
                   </a:extLst>
                 </a:gridCol>
@@ -18805,7 +18795,7 @@
                 </a:tc>
                 <a:extLst>
                   <a:ext uri="{0D108BD9-81ED-4DB2-BD59-A6C34878D82A}">
-                    <a16:rowId xmlns:a16="http://schemas.microsoft.com/office/drawing/2014/main" xmlns="" val="10000"/>
+                    <a16:rowId xmlns="" xmlns:a16="http://schemas.microsoft.com/office/drawing/2014/main" val="10000"/>
                   </a:ext>
                 </a:extLst>
               </a:tr>
@@ -18888,7 +18878,7 @@
                 </a:tc>
                 <a:extLst>
                   <a:ext uri="{0D108BD9-81ED-4DB2-BD59-A6C34878D82A}">
-                    <a16:rowId xmlns:a16="http://schemas.microsoft.com/office/drawing/2014/main" xmlns="" val="10001"/>
+                    <a16:rowId xmlns="" xmlns:a16="http://schemas.microsoft.com/office/drawing/2014/main" val="10001"/>
                   </a:ext>
                 </a:extLst>
               </a:tr>
@@ -18984,7 +18974,7 @@
                 </a:tc>
                 <a:extLst>
                   <a:ext uri="{0D108BD9-81ED-4DB2-BD59-A6C34878D82A}">
-                    <a16:rowId xmlns:a16="http://schemas.microsoft.com/office/drawing/2014/main" xmlns="" val="10002"/>
+                    <a16:rowId xmlns="" xmlns:a16="http://schemas.microsoft.com/office/drawing/2014/main" val="10002"/>
                   </a:ext>
                 </a:extLst>
               </a:tr>
@@ -19064,7 +19054,7 @@
                 </a:tc>
                 <a:extLst>
                   <a:ext uri="{0D108BD9-81ED-4DB2-BD59-A6C34878D82A}">
-                    <a16:rowId xmlns:a16="http://schemas.microsoft.com/office/drawing/2014/main" xmlns="" val="10003"/>
+                    <a16:rowId xmlns="" xmlns:a16="http://schemas.microsoft.com/office/drawing/2014/main" val="10003"/>
                   </a:ext>
                 </a:extLst>
               </a:tr>
@@ -19128,7 +19118,7 @@
                 </a:tc>
                 <a:extLst>
                   <a:ext uri="{0D108BD9-81ED-4DB2-BD59-A6C34878D82A}">
-                    <a16:rowId xmlns:a16="http://schemas.microsoft.com/office/drawing/2014/main" xmlns="" val="10004"/>
+                    <a16:rowId xmlns="" xmlns:a16="http://schemas.microsoft.com/office/drawing/2014/main" val="10004"/>
                   </a:ext>
                 </a:extLst>
               </a:tr>
@@ -19208,7 +19198,7 @@
                 </a:tc>
                 <a:extLst>
                   <a:ext uri="{0D108BD9-81ED-4DB2-BD59-A6C34878D82A}">
-                    <a16:rowId xmlns:a16="http://schemas.microsoft.com/office/drawing/2014/main" xmlns="" val="10005"/>
+                    <a16:rowId xmlns="" xmlns:a16="http://schemas.microsoft.com/office/drawing/2014/main" val="10005"/>
                   </a:ext>
                 </a:extLst>
               </a:tr>
@@ -19244,7 +19234,7 @@
                 <a:gridCol w="3721808">
                   <a:extLst>
                     <a:ext uri="{9D8B030D-6E8A-4147-A177-3AD203B41FA5}">
-                      <a16:colId xmlns:a16="http://schemas.microsoft.com/office/drawing/2014/main" xmlns="" val="20000"/>
+                      <a16:colId xmlns="" xmlns:a16="http://schemas.microsoft.com/office/drawing/2014/main" val="20000"/>
                     </a:ext>
                   </a:extLst>
                 </a:gridCol>
@@ -19313,7 +19303,7 @@
                 </a:tc>
                 <a:extLst>
                   <a:ext uri="{0D108BD9-81ED-4DB2-BD59-A6C34878D82A}">
-                    <a16:rowId xmlns:a16="http://schemas.microsoft.com/office/drawing/2014/main" xmlns="" val="10000"/>
+                    <a16:rowId xmlns="" xmlns:a16="http://schemas.microsoft.com/office/drawing/2014/main" val="10000"/>
                   </a:ext>
                 </a:extLst>
               </a:tr>
@@ -19421,7 +19411,7 @@
                 </a:tc>
                 <a:extLst>
                   <a:ext uri="{0D108BD9-81ED-4DB2-BD59-A6C34878D82A}">
-                    <a16:rowId xmlns:a16="http://schemas.microsoft.com/office/drawing/2014/main" xmlns="" val="10001"/>
+                    <a16:rowId xmlns="" xmlns:a16="http://schemas.microsoft.com/office/drawing/2014/main" val="10001"/>
                   </a:ext>
                 </a:extLst>
               </a:tr>
@@ -19499,7 +19489,7 @@
                 </a:tc>
                 <a:extLst>
                   <a:ext uri="{0D108BD9-81ED-4DB2-BD59-A6C34878D82A}">
-                    <a16:rowId xmlns:a16="http://schemas.microsoft.com/office/drawing/2014/main" xmlns="" val="10002"/>
+                    <a16:rowId xmlns="" xmlns:a16="http://schemas.microsoft.com/office/drawing/2014/main" val="10002"/>
                   </a:ext>
                 </a:extLst>
               </a:tr>
@@ -19577,7 +19567,7 @@
                 </a:tc>
                 <a:extLst>
                   <a:ext uri="{0D108BD9-81ED-4DB2-BD59-A6C34878D82A}">
-                    <a16:rowId xmlns:a16="http://schemas.microsoft.com/office/drawing/2014/main" xmlns="" val="10003"/>
+                    <a16:rowId xmlns="" xmlns:a16="http://schemas.microsoft.com/office/drawing/2014/main" val="10003"/>
                   </a:ext>
                 </a:extLst>
               </a:tr>
@@ -19647,7 +19637,7 @@
                 </a:tc>
                 <a:extLst>
                   <a:ext uri="{0D108BD9-81ED-4DB2-BD59-A6C34878D82A}">
-                    <a16:rowId xmlns:a16="http://schemas.microsoft.com/office/drawing/2014/main" xmlns="" val="10004"/>
+                    <a16:rowId xmlns="" xmlns:a16="http://schemas.microsoft.com/office/drawing/2014/main" val="10004"/>
                   </a:ext>
                 </a:extLst>
               </a:tr>
@@ -19717,7 +19707,7 @@
                 </a:tc>
                 <a:extLst>
                   <a:ext uri="{0D108BD9-81ED-4DB2-BD59-A6C34878D82A}">
-                    <a16:rowId xmlns:a16="http://schemas.microsoft.com/office/drawing/2014/main" xmlns="" val="10005"/>
+                    <a16:rowId xmlns="" xmlns:a16="http://schemas.microsoft.com/office/drawing/2014/main" val="10005"/>
                   </a:ext>
                 </a:extLst>
               </a:tr>
@@ -20395,6 +20385,3671 @@
       </p:grpSpPr>
       <p:sp>
         <p:nvSpPr>
+          <p:cNvPr id="10" name="직사각형 9"/>
+          <p:cNvSpPr/>
+          <p:nvPr/>
+        </p:nvSpPr>
+        <p:spPr>
+          <a:xfrm>
+            <a:off x="152400" y="125187"/>
+            <a:ext cx="2667000" cy="312964"/>
+          </a:xfrm>
+          <a:prstGeom prst="rect">
+            <a:avLst/>
+          </a:prstGeom>
+          <a:noFill/>
+          <a:ln>
+            <a:noFill/>
+          </a:ln>
+        </p:spPr>
+        <p:style>
+          <a:lnRef idx="2">
+            <a:schemeClr val="accent1">
+              <a:shade val="50000"/>
+            </a:schemeClr>
+          </a:lnRef>
+          <a:fillRef idx="1">
+            <a:schemeClr val="accent1"/>
+          </a:fillRef>
+          <a:effectRef idx="0">
+            <a:schemeClr val="accent1"/>
+          </a:effectRef>
+          <a:fontRef idx="minor">
+            <a:schemeClr val="lt1"/>
+          </a:fontRef>
+        </p:style>
+        <p:txBody>
+          <a:bodyPr rtlCol="0" anchor="ctr"/>
+          <a:lstStyle/>
+          <a:p>
+            <a:r>
+              <a:rPr lang="en-US" altLang="ko-KR" sz="1600" b="1" dirty="0" err="1" smtClean="0">
+                <a:solidFill>
+                  <a:schemeClr val="accent1">
+                    <a:lumMod val="75000"/>
+                  </a:schemeClr>
+                </a:solidFill>
+                <a:latin typeface="+mn-ea"/>
+              </a:rPr>
+              <a:t>Vertica</a:t>
+            </a:r>
+            <a:r>
+              <a:rPr lang="en-US" altLang="ko-KR" sz="1600" b="1" dirty="0" smtClean="0">
+                <a:solidFill>
+                  <a:schemeClr val="accent1">
+                    <a:lumMod val="75000"/>
+                  </a:schemeClr>
+                </a:solidFill>
+                <a:latin typeface="+mn-ea"/>
+              </a:rPr>
+              <a:t> </a:t>
+            </a:r>
+            <a:r>
+              <a:rPr lang="ko-KR" altLang="en-US" sz="1600" b="1" dirty="0" smtClean="0">
+                <a:solidFill>
+                  <a:schemeClr val="accent1">
+                    <a:lumMod val="75000"/>
+                  </a:schemeClr>
+                </a:solidFill>
+                <a:latin typeface="+mn-ea"/>
+              </a:rPr>
+              <a:t>아키텍처</a:t>
+            </a:r>
+            <a:endParaRPr lang="ko-KR" altLang="en-US" sz="1600" b="1" dirty="0">
+              <a:solidFill>
+                <a:schemeClr val="accent1">
+                  <a:lumMod val="75000"/>
+                </a:schemeClr>
+              </a:solidFill>
+              <a:latin typeface="+mn-ea"/>
+            </a:endParaRPr>
+          </a:p>
+        </p:txBody>
+      </p:sp>
+      <p:sp>
+        <p:nvSpPr>
+          <p:cNvPr id="12" name="직사각형 11"/>
+          <p:cNvSpPr/>
+          <p:nvPr/>
+        </p:nvSpPr>
+        <p:spPr>
+          <a:xfrm>
+            <a:off x="301171" y="422730"/>
+            <a:ext cx="9312729" cy="357414"/>
+          </a:xfrm>
+          <a:prstGeom prst="rect">
+            <a:avLst/>
+          </a:prstGeom>
+          <a:noFill/>
+          <a:ln>
+            <a:noFill/>
+          </a:ln>
+        </p:spPr>
+        <p:style>
+          <a:lnRef idx="2">
+            <a:schemeClr val="accent1">
+              <a:shade val="50000"/>
+            </a:schemeClr>
+          </a:lnRef>
+          <a:fillRef idx="1">
+            <a:schemeClr val="accent1"/>
+          </a:fillRef>
+          <a:effectRef idx="0">
+            <a:schemeClr val="accent1"/>
+          </a:effectRef>
+          <a:fontRef idx="minor">
+            <a:schemeClr val="lt1"/>
+          </a:fontRef>
+        </p:style>
+        <p:txBody>
+          <a:bodyPr rtlCol="0" anchor="ctr"/>
+          <a:lstStyle/>
+          <a:p>
+            <a:r>
+              <a:rPr lang="en-US" altLang="ko-KR" sz="1400" dirty="0" err="1">
+                <a:solidFill>
+                  <a:schemeClr val="tx1"/>
+                </a:solidFill>
+                <a:latin typeface="+mn-ea"/>
+              </a:rPr>
+              <a:t>Vertica</a:t>
+            </a:r>
+            <a:r>
+              <a:rPr lang="ko-KR" altLang="en-US" sz="1400" dirty="0">
+                <a:solidFill>
+                  <a:schemeClr val="tx1"/>
+                </a:solidFill>
+                <a:latin typeface="+mn-ea"/>
+              </a:rPr>
+              <a:t>는 단순하고 효율적인 아키텍처로 대규모 데이터 분석을 지원합니다</a:t>
+            </a:r>
+            <a:r>
+              <a:rPr lang="en-US" altLang="ko-KR" sz="1400" dirty="0">
+                <a:solidFill>
+                  <a:schemeClr val="tx1"/>
+                </a:solidFill>
+                <a:latin typeface="+mn-ea"/>
+              </a:rPr>
+              <a:t>.</a:t>
+            </a:r>
+          </a:p>
+        </p:txBody>
+      </p:sp>
+      <p:sp>
+        <p:nvSpPr>
+          <p:cNvPr id="20" name="직사각형 19"/>
+          <p:cNvSpPr/>
+          <p:nvPr/>
+        </p:nvSpPr>
+        <p:spPr>
+          <a:xfrm>
+            <a:off x="407534" y="785585"/>
+            <a:ext cx="9312729" cy="1054100"/>
+          </a:xfrm>
+          <a:prstGeom prst="rect">
+            <a:avLst/>
+          </a:prstGeom>
+          <a:noFill/>
+          <a:ln>
+            <a:noFill/>
+          </a:ln>
+        </p:spPr>
+        <p:style>
+          <a:lnRef idx="2">
+            <a:schemeClr val="accent1">
+              <a:shade val="50000"/>
+            </a:schemeClr>
+          </a:lnRef>
+          <a:fillRef idx="1">
+            <a:schemeClr val="accent1"/>
+          </a:fillRef>
+          <a:effectRef idx="0">
+            <a:schemeClr val="accent1"/>
+          </a:effectRef>
+          <a:fontRef idx="minor">
+            <a:schemeClr val="lt1"/>
+          </a:fontRef>
+        </p:style>
+        <p:txBody>
+          <a:bodyPr rtlCol="0" anchor="ctr"/>
+          <a:lstStyle/>
+          <a:p>
+            <a:r>
+              <a:rPr lang="en-US" altLang="ko-KR" sz="1600" b="1" dirty="0" smtClean="0">
+                <a:solidFill>
+                  <a:schemeClr val="tx1"/>
+                </a:solidFill>
+                <a:latin typeface="+mn-ea"/>
+              </a:rPr>
+              <a:t>Pure-MPP (Massively Parallel Processing)</a:t>
+            </a:r>
+            <a:br>
+              <a:rPr lang="en-US" altLang="ko-KR" sz="1600" b="1" dirty="0" smtClean="0">
+                <a:solidFill>
+                  <a:schemeClr val="tx1"/>
+                </a:solidFill>
+                <a:latin typeface="+mn-ea"/>
+              </a:rPr>
+            </a:br>
+            <a:r>
+              <a:rPr lang="en-US" altLang="ko-KR" sz="1400" dirty="0" err="1">
+                <a:solidFill>
+                  <a:schemeClr val="tx1"/>
+                </a:solidFill>
+                <a:latin typeface="+mn-ea"/>
+              </a:rPr>
+              <a:t>Vertica</a:t>
+            </a:r>
+            <a:r>
+              <a:rPr lang="ko-KR" altLang="en-US" sz="1400" dirty="0">
+                <a:solidFill>
+                  <a:schemeClr val="tx1"/>
+                </a:solidFill>
+                <a:latin typeface="+mn-ea"/>
+              </a:rPr>
+              <a:t>는 별도의 마스터 </a:t>
+            </a:r>
+            <a:r>
+              <a:rPr lang="ko-KR" altLang="en-US" sz="1400" dirty="0" err="1">
+                <a:solidFill>
+                  <a:schemeClr val="tx1"/>
+                </a:solidFill>
+                <a:latin typeface="+mn-ea"/>
+              </a:rPr>
+              <a:t>노드를</a:t>
+            </a:r>
+            <a:r>
+              <a:rPr lang="ko-KR" altLang="en-US" sz="1400" dirty="0">
+                <a:solidFill>
+                  <a:schemeClr val="tx1"/>
+                </a:solidFill>
+                <a:latin typeface="+mn-ea"/>
+              </a:rPr>
+              <a:t> 분리하지 않고 모든 </a:t>
+            </a:r>
+            <a:r>
+              <a:rPr lang="ko-KR" altLang="en-US" sz="1400" dirty="0" err="1">
+                <a:solidFill>
+                  <a:schemeClr val="tx1"/>
+                </a:solidFill>
+                <a:latin typeface="+mn-ea"/>
+              </a:rPr>
+              <a:t>노드가</a:t>
+            </a:r>
+            <a:r>
+              <a:rPr lang="ko-KR" altLang="en-US" sz="1400" dirty="0">
+                <a:solidFill>
+                  <a:schemeClr val="tx1"/>
+                </a:solidFill>
+                <a:latin typeface="+mn-ea"/>
+              </a:rPr>
+              <a:t> 동일한 역할을 수행하는 </a:t>
+            </a:r>
+            <a:r>
+              <a:rPr lang="en-US" altLang="ko-KR" sz="1400" dirty="0">
+                <a:solidFill>
+                  <a:schemeClr val="tx1"/>
+                </a:solidFill>
+                <a:latin typeface="+mn-ea"/>
+              </a:rPr>
+              <a:t>pure-MPP </a:t>
+            </a:r>
+            <a:r>
+              <a:rPr lang="ko-KR" altLang="en-US" sz="1400" dirty="0">
+                <a:solidFill>
+                  <a:schemeClr val="tx1"/>
+                </a:solidFill>
+                <a:latin typeface="+mn-ea"/>
+              </a:rPr>
+              <a:t>구조입니다</a:t>
+            </a:r>
+            <a:r>
+              <a:rPr lang="en-US" altLang="ko-KR" sz="1400" dirty="0">
+                <a:solidFill>
+                  <a:schemeClr val="tx1"/>
+                </a:solidFill>
+                <a:latin typeface="+mn-ea"/>
+              </a:rPr>
+              <a:t>.</a:t>
+            </a:r>
+          </a:p>
+          <a:p>
+            <a:r>
+              <a:rPr lang="ko-KR" altLang="en-US" sz="1400" dirty="0">
+                <a:solidFill>
+                  <a:schemeClr val="tx1"/>
+                </a:solidFill>
+                <a:latin typeface="+mn-ea"/>
+              </a:rPr>
+              <a:t>또한 클러스터 구성이나 </a:t>
+            </a:r>
+            <a:r>
+              <a:rPr lang="ko-KR" altLang="en-US" sz="1400" dirty="0" err="1">
+                <a:solidFill>
+                  <a:schemeClr val="tx1"/>
+                </a:solidFill>
+                <a:latin typeface="+mn-ea"/>
+              </a:rPr>
+              <a:t>노드</a:t>
+            </a:r>
+            <a:r>
+              <a:rPr lang="ko-KR" altLang="en-US" sz="1400" dirty="0">
+                <a:solidFill>
+                  <a:schemeClr val="tx1"/>
+                </a:solidFill>
+                <a:latin typeface="+mn-ea"/>
+              </a:rPr>
+              <a:t> 구성에 특별한 하드웨어나 소프트웨어를 필요로 하지 않기 때문에 비용적인 강점이 있으며 복잡한 구성이 불필요하여 클러스터 구성 과정이 매우 간단하고 빠릅니다</a:t>
+            </a:r>
+            <a:r>
+              <a:rPr lang="en-US" altLang="ko-KR" sz="1400" dirty="0">
+                <a:solidFill>
+                  <a:schemeClr val="tx1"/>
+                </a:solidFill>
+                <a:latin typeface="+mn-ea"/>
+              </a:rPr>
+              <a:t>.</a:t>
+            </a:r>
+          </a:p>
+        </p:txBody>
+      </p:sp>
+      <p:grpSp>
+        <p:nvGrpSpPr>
+          <p:cNvPr id="2" name="그룹 1"/>
+          <p:cNvGrpSpPr/>
+          <p:nvPr/>
+        </p:nvGrpSpPr>
+        <p:grpSpPr>
+          <a:xfrm>
+            <a:off x="6048238" y="2088979"/>
+            <a:ext cx="3192971" cy="1393647"/>
+            <a:chOff x="5918698" y="2256619"/>
+            <a:chExt cx="3192971" cy="1393647"/>
+          </a:xfrm>
+        </p:grpSpPr>
+        <p:sp>
+          <p:nvSpPr>
+            <p:cNvPr id="50" name="Rounded Rectangle 32"/>
+            <p:cNvSpPr/>
+            <p:nvPr/>
+          </p:nvSpPr>
+          <p:spPr>
+            <a:xfrm>
+              <a:off x="7124680" y="3081590"/>
+              <a:ext cx="306371" cy="327398"/>
+            </a:xfrm>
+            <a:prstGeom prst="roundRect">
+              <a:avLst/>
+            </a:prstGeom>
+            <a:solidFill>
+              <a:srgbClr val="F47E65"/>
+            </a:solidFill>
+            <a:ln>
+              <a:noFill/>
+            </a:ln>
+            <a:effectLst/>
+          </p:spPr>
+          <p:style>
+            <a:lnRef idx="1">
+              <a:schemeClr val="accent1"/>
+            </a:lnRef>
+            <a:fillRef idx="3">
+              <a:schemeClr val="accent1"/>
+            </a:fillRef>
+            <a:effectRef idx="2">
+              <a:schemeClr val="accent1"/>
+            </a:effectRef>
+            <a:fontRef idx="minor">
+              <a:schemeClr val="lt1"/>
+            </a:fontRef>
+          </p:style>
+          <p:txBody>
+            <a:bodyPr rtlCol="0" anchor="ctr"/>
+            <a:lstStyle/>
+            <a:p>
+              <a:pPr algn="ctr"/>
+              <a:endParaRPr lang="en-US" sz="1000">
+                <a:latin typeface="+mn-ea"/>
+              </a:endParaRPr>
+            </a:p>
+          </p:txBody>
+        </p:sp>
+        <p:sp>
+          <p:nvSpPr>
+            <p:cNvPr id="51" name="Rounded Rectangle 33"/>
+            <p:cNvSpPr/>
+            <p:nvPr/>
+          </p:nvSpPr>
+          <p:spPr>
+            <a:xfrm>
+              <a:off x="7492864" y="3081590"/>
+              <a:ext cx="306371" cy="327398"/>
+            </a:xfrm>
+            <a:prstGeom prst="roundRect">
+              <a:avLst/>
+            </a:prstGeom>
+            <a:solidFill>
+              <a:srgbClr val="F47E65"/>
+            </a:solidFill>
+            <a:ln>
+              <a:noFill/>
+            </a:ln>
+            <a:effectLst/>
+          </p:spPr>
+          <p:style>
+            <a:lnRef idx="1">
+              <a:schemeClr val="accent1"/>
+            </a:lnRef>
+            <a:fillRef idx="3">
+              <a:schemeClr val="accent1"/>
+            </a:fillRef>
+            <a:effectRef idx="2">
+              <a:schemeClr val="accent1"/>
+            </a:effectRef>
+            <a:fontRef idx="minor">
+              <a:schemeClr val="lt1"/>
+            </a:fontRef>
+          </p:style>
+          <p:txBody>
+            <a:bodyPr rtlCol="0" anchor="ctr"/>
+            <a:lstStyle/>
+            <a:p>
+              <a:pPr algn="ctr"/>
+              <a:endParaRPr lang="en-US" sz="1000">
+                <a:latin typeface="+mn-ea"/>
+              </a:endParaRPr>
+            </a:p>
+          </p:txBody>
+        </p:sp>
+        <p:sp>
+          <p:nvSpPr>
+            <p:cNvPr id="52" name="Rounded Rectangle 34"/>
+            <p:cNvSpPr/>
+            <p:nvPr/>
+          </p:nvSpPr>
+          <p:spPr>
+            <a:xfrm>
+              <a:off x="7861048" y="3081590"/>
+              <a:ext cx="306371" cy="327398"/>
+            </a:xfrm>
+            <a:prstGeom prst="roundRect">
+              <a:avLst/>
+            </a:prstGeom>
+            <a:solidFill>
+              <a:srgbClr val="F47E65"/>
+            </a:solidFill>
+            <a:ln>
+              <a:noFill/>
+            </a:ln>
+            <a:effectLst/>
+          </p:spPr>
+          <p:style>
+            <a:lnRef idx="1">
+              <a:schemeClr val="accent1"/>
+            </a:lnRef>
+            <a:fillRef idx="3">
+              <a:schemeClr val="accent1"/>
+            </a:fillRef>
+            <a:effectRef idx="2">
+              <a:schemeClr val="accent1"/>
+            </a:effectRef>
+            <a:fontRef idx="minor">
+              <a:schemeClr val="lt1"/>
+            </a:fontRef>
+          </p:style>
+          <p:txBody>
+            <a:bodyPr rtlCol="0" anchor="ctr"/>
+            <a:lstStyle/>
+            <a:p>
+              <a:pPr algn="ctr"/>
+              <a:endParaRPr lang="en-US" sz="1000">
+                <a:latin typeface="+mn-ea"/>
+              </a:endParaRPr>
+            </a:p>
+          </p:txBody>
+        </p:sp>
+        <p:cxnSp>
+          <p:nvCxnSpPr>
+            <p:cNvPr id="53" name="Straight Connector 35"/>
+            <p:cNvCxnSpPr>
+              <a:endCxn id="50" idx="0"/>
+            </p:cNvCxnSpPr>
+            <p:nvPr/>
+          </p:nvCxnSpPr>
+          <p:spPr>
+            <a:xfrm>
+              <a:off x="7277866" y="2971703"/>
+              <a:ext cx="0" cy="109887"/>
+            </a:xfrm>
+            <a:prstGeom prst="line">
+              <a:avLst/>
+            </a:prstGeom>
+            <a:ln w="28575" cmpd="sng">
+              <a:solidFill>
+                <a:srgbClr val="FF0000"/>
+              </a:solidFill>
+            </a:ln>
+            <a:effectLst/>
+          </p:spPr>
+          <p:style>
+            <a:lnRef idx="2">
+              <a:schemeClr val="accent1"/>
+            </a:lnRef>
+            <a:fillRef idx="0">
+              <a:schemeClr val="accent1"/>
+            </a:fillRef>
+            <a:effectRef idx="1">
+              <a:schemeClr val="accent1"/>
+            </a:effectRef>
+            <a:fontRef idx="minor">
+              <a:schemeClr val="tx1"/>
+            </a:fontRef>
+          </p:style>
+        </p:cxnSp>
+        <p:cxnSp>
+          <p:nvCxnSpPr>
+            <p:cNvPr id="54" name="Straight Connector 36"/>
+            <p:cNvCxnSpPr/>
+            <p:nvPr/>
+          </p:nvCxnSpPr>
+          <p:spPr>
+            <a:xfrm>
+              <a:off x="7646049" y="2976466"/>
+              <a:ext cx="0" cy="127809"/>
+            </a:xfrm>
+            <a:prstGeom prst="line">
+              <a:avLst/>
+            </a:prstGeom>
+            <a:ln w="28575" cmpd="sng">
+              <a:solidFill>
+                <a:srgbClr val="FF0000"/>
+              </a:solidFill>
+            </a:ln>
+            <a:effectLst/>
+          </p:spPr>
+          <p:style>
+            <a:lnRef idx="2">
+              <a:schemeClr val="accent1"/>
+            </a:lnRef>
+            <a:fillRef idx="0">
+              <a:schemeClr val="accent1"/>
+            </a:fillRef>
+            <a:effectRef idx="1">
+              <a:schemeClr val="accent1"/>
+            </a:effectRef>
+            <a:fontRef idx="minor">
+              <a:schemeClr val="tx1"/>
+            </a:fontRef>
+          </p:style>
+        </p:cxnSp>
+        <p:cxnSp>
+          <p:nvCxnSpPr>
+            <p:cNvPr id="55" name="Straight Connector 37"/>
+            <p:cNvCxnSpPr/>
+            <p:nvPr/>
+          </p:nvCxnSpPr>
+          <p:spPr>
+            <a:xfrm>
+              <a:off x="8014233" y="2976466"/>
+              <a:ext cx="0" cy="127809"/>
+            </a:xfrm>
+            <a:prstGeom prst="line">
+              <a:avLst/>
+            </a:prstGeom>
+            <a:ln w="28575" cmpd="sng">
+              <a:solidFill>
+                <a:srgbClr val="FF0000"/>
+              </a:solidFill>
+            </a:ln>
+            <a:effectLst/>
+          </p:spPr>
+          <p:style>
+            <a:lnRef idx="2">
+              <a:schemeClr val="accent1"/>
+            </a:lnRef>
+            <a:fillRef idx="0">
+              <a:schemeClr val="accent1"/>
+            </a:fillRef>
+            <a:effectRef idx="1">
+              <a:schemeClr val="accent1"/>
+            </a:effectRef>
+            <a:fontRef idx="minor">
+              <a:schemeClr val="tx1"/>
+            </a:fontRef>
+          </p:style>
+        </p:cxnSp>
+        <p:sp>
+          <p:nvSpPr>
+            <p:cNvPr id="56" name="Rounded Rectangle 38"/>
+            <p:cNvSpPr/>
+            <p:nvPr/>
+          </p:nvSpPr>
+          <p:spPr>
+            <a:xfrm>
+              <a:off x="7277867" y="2529655"/>
+              <a:ext cx="306371" cy="327398"/>
+            </a:xfrm>
+            <a:prstGeom prst="roundRect">
+              <a:avLst/>
+            </a:prstGeom>
+            <a:solidFill>
+              <a:srgbClr val="F47E65"/>
+            </a:solidFill>
+            <a:ln>
+              <a:noFill/>
+            </a:ln>
+            <a:effectLst/>
+          </p:spPr>
+          <p:style>
+            <a:lnRef idx="1">
+              <a:schemeClr val="accent1"/>
+            </a:lnRef>
+            <a:fillRef idx="3">
+              <a:schemeClr val="accent1"/>
+            </a:fillRef>
+            <a:effectRef idx="2">
+              <a:schemeClr val="accent1"/>
+            </a:effectRef>
+            <a:fontRef idx="minor">
+              <a:schemeClr val="lt1"/>
+            </a:fontRef>
+          </p:style>
+          <p:txBody>
+            <a:bodyPr rtlCol="0" anchor="ctr"/>
+            <a:lstStyle/>
+            <a:p>
+              <a:pPr algn="ctr"/>
+              <a:endParaRPr lang="en-US" sz="1000">
+                <a:latin typeface="+mn-ea"/>
+              </a:endParaRPr>
+            </a:p>
+          </p:txBody>
+        </p:sp>
+        <p:cxnSp>
+          <p:nvCxnSpPr>
+            <p:cNvPr id="57" name="Straight Connector 39"/>
+            <p:cNvCxnSpPr/>
+            <p:nvPr/>
+          </p:nvCxnSpPr>
+          <p:spPr>
+            <a:xfrm>
+              <a:off x="7431052" y="2850536"/>
+              <a:ext cx="1" cy="125930"/>
+            </a:xfrm>
+            <a:prstGeom prst="line">
+              <a:avLst/>
+            </a:prstGeom>
+            <a:ln w="28575" cmpd="sng">
+              <a:solidFill>
+                <a:srgbClr val="FF0000"/>
+              </a:solidFill>
+            </a:ln>
+            <a:effectLst/>
+          </p:spPr>
+          <p:style>
+            <a:lnRef idx="2">
+              <a:schemeClr val="accent1"/>
+            </a:lnRef>
+            <a:fillRef idx="0">
+              <a:schemeClr val="accent1"/>
+            </a:fillRef>
+            <a:effectRef idx="1">
+              <a:schemeClr val="accent1"/>
+            </a:effectRef>
+            <a:fontRef idx="minor">
+              <a:schemeClr val="tx1"/>
+            </a:fontRef>
+          </p:style>
+        </p:cxnSp>
+        <p:cxnSp>
+          <p:nvCxnSpPr>
+            <p:cNvPr id="58" name="Straight Connector 40"/>
+            <p:cNvCxnSpPr>
+              <a:stCxn id="59" idx="2"/>
+            </p:cNvCxnSpPr>
+            <p:nvPr/>
+          </p:nvCxnSpPr>
+          <p:spPr>
+            <a:xfrm>
+              <a:off x="7830142" y="2857053"/>
+              <a:ext cx="2654" cy="128939"/>
+            </a:xfrm>
+            <a:prstGeom prst="line">
+              <a:avLst/>
+            </a:prstGeom>
+            <a:ln w="28575" cmpd="sng">
+              <a:solidFill>
+                <a:srgbClr val="FF0000"/>
+              </a:solidFill>
+            </a:ln>
+            <a:effectLst/>
+          </p:spPr>
+          <p:style>
+            <a:lnRef idx="2">
+              <a:schemeClr val="accent1"/>
+            </a:lnRef>
+            <a:fillRef idx="0">
+              <a:schemeClr val="accent1"/>
+            </a:fillRef>
+            <a:effectRef idx="1">
+              <a:schemeClr val="accent1"/>
+            </a:effectRef>
+            <a:fontRef idx="minor">
+              <a:schemeClr val="tx1"/>
+            </a:fontRef>
+          </p:style>
+        </p:cxnSp>
+        <p:sp>
+          <p:nvSpPr>
+            <p:cNvPr id="59" name="Rounded Rectangle 41"/>
+            <p:cNvSpPr/>
+            <p:nvPr/>
+          </p:nvSpPr>
+          <p:spPr>
+            <a:xfrm>
+              <a:off x="7676956" y="2529655"/>
+              <a:ext cx="306371" cy="327398"/>
+            </a:xfrm>
+            <a:prstGeom prst="roundRect">
+              <a:avLst/>
+            </a:prstGeom>
+            <a:solidFill>
+              <a:srgbClr val="F47E65"/>
+            </a:solidFill>
+            <a:ln>
+              <a:noFill/>
+            </a:ln>
+            <a:effectLst/>
+          </p:spPr>
+          <p:style>
+            <a:lnRef idx="1">
+              <a:schemeClr val="accent1"/>
+            </a:lnRef>
+            <a:fillRef idx="3">
+              <a:schemeClr val="accent1"/>
+            </a:fillRef>
+            <a:effectRef idx="2">
+              <a:schemeClr val="accent1"/>
+            </a:effectRef>
+            <a:fontRef idx="minor">
+              <a:schemeClr val="lt1"/>
+            </a:fontRef>
+          </p:style>
+          <p:txBody>
+            <a:bodyPr rtlCol="0" anchor="ctr"/>
+            <a:lstStyle/>
+            <a:p>
+              <a:pPr algn="ctr"/>
+              <a:endParaRPr lang="en-US" sz="1000">
+                <a:latin typeface="+mn-ea"/>
+              </a:endParaRPr>
+            </a:p>
+          </p:txBody>
+        </p:sp>
+        <p:sp>
+          <p:nvSpPr>
+            <p:cNvPr id="60" name="TextBox 59"/>
+            <p:cNvSpPr txBox="1"/>
+            <p:nvPr/>
+          </p:nvSpPr>
+          <p:spPr>
+            <a:xfrm>
+              <a:off x="7227501" y="2264314"/>
+              <a:ext cx="801824" cy="246221"/>
+            </a:xfrm>
+            <a:prstGeom prst="rect">
+              <a:avLst/>
+            </a:prstGeom>
+            <a:noFill/>
+          </p:spPr>
+          <p:txBody>
+            <a:bodyPr wrap="none" rtlCol="0">
+              <a:spAutoFit/>
+            </a:bodyPr>
+            <a:lstStyle/>
+            <a:p>
+              <a:pPr defTabSz="430213">
+                <a:spcAft>
+                  <a:spcPts val="400"/>
+                </a:spcAft>
+                <a:buSzPct val="100000"/>
+              </a:pPr>
+              <a:r>
+                <a:rPr lang="en-US" sz="1000" b="1" dirty="0">
+                  <a:latin typeface="+mn-ea"/>
+                  <a:cs typeface="HP Simplified" pitchFamily="34" charset="0"/>
+                </a:rPr>
+                <a:t>DB Server</a:t>
+              </a:r>
+            </a:p>
+          </p:txBody>
+        </p:sp>
+        <p:sp>
+          <p:nvSpPr>
+            <p:cNvPr id="61" name="TextBox 60"/>
+            <p:cNvSpPr txBox="1"/>
+            <p:nvPr/>
+          </p:nvSpPr>
+          <p:spPr>
+            <a:xfrm>
+              <a:off x="7106672" y="3396350"/>
+              <a:ext cx="1091968" cy="246221"/>
+            </a:xfrm>
+            <a:prstGeom prst="rect">
+              <a:avLst/>
+            </a:prstGeom>
+            <a:noFill/>
+          </p:spPr>
+          <p:txBody>
+            <a:bodyPr wrap="none" rtlCol="0">
+              <a:spAutoFit/>
+            </a:bodyPr>
+            <a:lstStyle/>
+            <a:p>
+              <a:pPr defTabSz="430213">
+                <a:spcAft>
+                  <a:spcPts val="400"/>
+                </a:spcAft>
+                <a:buSzPct val="100000"/>
+              </a:pPr>
+              <a:r>
+                <a:rPr lang="en-US" sz="1000" b="1" dirty="0">
+                  <a:latin typeface="+mn-ea"/>
+                  <a:cs typeface="HP Simplified" pitchFamily="34" charset="0"/>
+                </a:rPr>
+                <a:t>Storage Server</a:t>
+              </a:r>
+            </a:p>
+          </p:txBody>
+        </p:sp>
+        <p:sp>
+          <p:nvSpPr>
+            <p:cNvPr id="62" name="Rounded Rectangle 44"/>
+            <p:cNvSpPr/>
+            <p:nvPr/>
+          </p:nvSpPr>
+          <p:spPr>
+            <a:xfrm>
+              <a:off x="7054159" y="2918514"/>
+              <a:ext cx="1161065" cy="115905"/>
+            </a:xfrm>
+            <a:prstGeom prst="roundRect">
+              <a:avLst/>
+            </a:prstGeom>
+            <a:solidFill>
+              <a:srgbClr val="F05332"/>
+            </a:solidFill>
+            <a:ln>
+              <a:noFill/>
+            </a:ln>
+            <a:effectLst/>
+          </p:spPr>
+          <p:style>
+            <a:lnRef idx="1">
+              <a:schemeClr val="accent1"/>
+            </a:lnRef>
+            <a:fillRef idx="3">
+              <a:schemeClr val="accent1"/>
+            </a:fillRef>
+            <a:effectRef idx="2">
+              <a:schemeClr val="accent1"/>
+            </a:effectRef>
+            <a:fontRef idx="minor">
+              <a:schemeClr val="lt1"/>
+            </a:fontRef>
+          </p:style>
+          <p:txBody>
+            <a:bodyPr rtlCol="0" anchor="ctr"/>
+            <a:lstStyle/>
+            <a:p>
+              <a:pPr algn="ctr"/>
+              <a:r>
+                <a:rPr lang="en-US" sz="800" dirty="0" err="1">
+                  <a:latin typeface="+mn-ea"/>
+                </a:rPr>
+                <a:t>InfiniBand</a:t>
+              </a:r>
+              <a:endParaRPr lang="en-US" sz="800" dirty="0">
+                <a:latin typeface="+mn-ea"/>
+              </a:endParaRPr>
+            </a:p>
+          </p:txBody>
+        </p:sp>
+        <p:sp>
+          <p:nvSpPr>
+            <p:cNvPr id="63" name="Rounded Rectangle 45"/>
+            <p:cNvSpPr/>
+            <p:nvPr/>
+          </p:nvSpPr>
+          <p:spPr>
+            <a:xfrm>
+              <a:off x="7158426" y="3122125"/>
+              <a:ext cx="220858" cy="95658"/>
+            </a:xfrm>
+            <a:prstGeom prst="roundRect">
+              <a:avLst/>
+            </a:prstGeom>
+            <a:solidFill>
+              <a:srgbClr val="FBD4C0"/>
+            </a:solidFill>
+            <a:ln>
+              <a:noFill/>
+            </a:ln>
+            <a:effectLst/>
+          </p:spPr>
+          <p:style>
+            <a:lnRef idx="1">
+              <a:schemeClr val="accent1"/>
+            </a:lnRef>
+            <a:fillRef idx="3">
+              <a:schemeClr val="accent1"/>
+            </a:fillRef>
+            <a:effectRef idx="2">
+              <a:schemeClr val="accent1"/>
+            </a:effectRef>
+            <a:fontRef idx="minor">
+              <a:schemeClr val="lt1"/>
+            </a:fontRef>
+          </p:style>
+          <p:txBody>
+            <a:bodyPr lIns="0" rIns="0" rtlCol="0" anchor="ctr"/>
+            <a:lstStyle/>
+            <a:p>
+              <a:pPr algn="ctr"/>
+              <a:r>
+                <a:rPr lang="en-US" sz="800" dirty="0">
+                  <a:solidFill>
+                    <a:srgbClr val="FF0000"/>
+                  </a:solidFill>
+                  <a:latin typeface="+mn-ea"/>
+                </a:rPr>
+                <a:t>SSD</a:t>
+              </a:r>
+            </a:p>
+          </p:txBody>
+        </p:sp>
+        <p:sp>
+          <p:nvSpPr>
+            <p:cNvPr id="64" name="Rounded Rectangle 46"/>
+            <p:cNvSpPr/>
+            <p:nvPr/>
+          </p:nvSpPr>
+          <p:spPr>
+            <a:xfrm>
+              <a:off x="7535621" y="3122125"/>
+              <a:ext cx="220858" cy="95658"/>
+            </a:xfrm>
+            <a:prstGeom prst="roundRect">
+              <a:avLst/>
+            </a:prstGeom>
+            <a:solidFill>
+              <a:srgbClr val="FBD4C0"/>
+            </a:solidFill>
+            <a:ln>
+              <a:noFill/>
+            </a:ln>
+            <a:effectLst/>
+          </p:spPr>
+          <p:style>
+            <a:lnRef idx="1">
+              <a:schemeClr val="accent1"/>
+            </a:lnRef>
+            <a:fillRef idx="3">
+              <a:schemeClr val="accent1"/>
+            </a:fillRef>
+            <a:effectRef idx="2">
+              <a:schemeClr val="accent1"/>
+            </a:effectRef>
+            <a:fontRef idx="minor">
+              <a:schemeClr val="lt1"/>
+            </a:fontRef>
+          </p:style>
+          <p:txBody>
+            <a:bodyPr lIns="0" rIns="0" rtlCol="0" anchor="ctr"/>
+            <a:lstStyle/>
+            <a:p>
+              <a:pPr algn="ctr"/>
+              <a:r>
+                <a:rPr lang="en-US" sz="800" dirty="0">
+                  <a:solidFill>
+                    <a:srgbClr val="FF0000"/>
+                  </a:solidFill>
+                  <a:latin typeface="+mn-ea"/>
+                </a:rPr>
+                <a:t>SSD</a:t>
+              </a:r>
+            </a:p>
+          </p:txBody>
+        </p:sp>
+        <p:sp>
+          <p:nvSpPr>
+            <p:cNvPr id="65" name="Rounded Rectangle 47"/>
+            <p:cNvSpPr/>
+            <p:nvPr/>
+          </p:nvSpPr>
+          <p:spPr>
+            <a:xfrm>
+              <a:off x="7903804" y="3122125"/>
+              <a:ext cx="220858" cy="95658"/>
+            </a:xfrm>
+            <a:prstGeom prst="roundRect">
+              <a:avLst/>
+            </a:prstGeom>
+            <a:solidFill>
+              <a:srgbClr val="FBD4C0"/>
+            </a:solidFill>
+            <a:ln>
+              <a:noFill/>
+            </a:ln>
+            <a:effectLst/>
+          </p:spPr>
+          <p:style>
+            <a:lnRef idx="1">
+              <a:schemeClr val="accent1"/>
+            </a:lnRef>
+            <a:fillRef idx="3">
+              <a:schemeClr val="accent1"/>
+            </a:fillRef>
+            <a:effectRef idx="2">
+              <a:schemeClr val="accent1"/>
+            </a:effectRef>
+            <a:fontRef idx="minor">
+              <a:schemeClr val="lt1"/>
+            </a:fontRef>
+          </p:style>
+          <p:txBody>
+            <a:bodyPr lIns="0" rIns="0" rtlCol="0" anchor="ctr"/>
+            <a:lstStyle/>
+            <a:p>
+              <a:pPr algn="ctr"/>
+              <a:r>
+                <a:rPr lang="en-US" sz="800" dirty="0">
+                  <a:solidFill>
+                    <a:srgbClr val="FF0000"/>
+                  </a:solidFill>
+                  <a:latin typeface="+mn-ea"/>
+                </a:rPr>
+                <a:t>SSD</a:t>
+              </a:r>
+            </a:p>
+          </p:txBody>
+        </p:sp>
+        <p:sp>
+          <p:nvSpPr>
+            <p:cNvPr id="35" name="TextBox 34"/>
+            <p:cNvSpPr txBox="1"/>
+            <p:nvPr/>
+          </p:nvSpPr>
+          <p:spPr>
+            <a:xfrm>
+              <a:off x="5934531" y="2264314"/>
+              <a:ext cx="1032656" cy="246221"/>
+            </a:xfrm>
+            <a:prstGeom prst="rect">
+              <a:avLst/>
+            </a:prstGeom>
+            <a:noFill/>
+          </p:spPr>
+          <p:txBody>
+            <a:bodyPr wrap="none" rtlCol="0">
+              <a:spAutoFit/>
+            </a:bodyPr>
+            <a:lstStyle/>
+            <a:p>
+              <a:pPr defTabSz="430213">
+                <a:spcAft>
+                  <a:spcPts val="400"/>
+                </a:spcAft>
+                <a:buSzPct val="100000"/>
+              </a:pPr>
+              <a:r>
+                <a:rPr lang="en-US" altLang="ko-KR" sz="1000" b="1" dirty="0">
+                  <a:latin typeface="+mn-ea"/>
+                  <a:cs typeface="HP Simplified" pitchFamily="34" charset="0"/>
+                </a:rPr>
+                <a:t>Master Server</a:t>
+              </a:r>
+              <a:endParaRPr lang="en-US" sz="1000" b="1" dirty="0">
+                <a:latin typeface="+mn-ea"/>
+                <a:cs typeface="HP Simplified" pitchFamily="34" charset="0"/>
+              </a:endParaRPr>
+            </a:p>
+          </p:txBody>
+        </p:sp>
+        <p:sp>
+          <p:nvSpPr>
+            <p:cNvPr id="38" name="Rounded Rectangle 19"/>
+            <p:cNvSpPr/>
+            <p:nvPr/>
+          </p:nvSpPr>
+          <p:spPr>
+            <a:xfrm>
+              <a:off x="5918698" y="3081590"/>
+              <a:ext cx="306371" cy="327398"/>
+            </a:xfrm>
+            <a:prstGeom prst="roundRect">
+              <a:avLst/>
+            </a:prstGeom>
+            <a:solidFill>
+              <a:srgbClr val="92D050"/>
+            </a:solidFill>
+            <a:ln>
+              <a:noFill/>
+            </a:ln>
+            <a:effectLst/>
+          </p:spPr>
+          <p:style>
+            <a:lnRef idx="1">
+              <a:schemeClr val="accent1"/>
+            </a:lnRef>
+            <a:fillRef idx="3">
+              <a:schemeClr val="accent1"/>
+            </a:fillRef>
+            <a:effectRef idx="2">
+              <a:schemeClr val="accent1"/>
+            </a:effectRef>
+            <a:fontRef idx="minor">
+              <a:schemeClr val="lt1"/>
+            </a:fontRef>
+          </p:style>
+          <p:txBody>
+            <a:bodyPr rtlCol="0" anchor="ctr"/>
+            <a:lstStyle/>
+            <a:p>
+              <a:pPr algn="ctr"/>
+              <a:endParaRPr lang="en-US" sz="1000">
+                <a:latin typeface="+mn-ea"/>
+              </a:endParaRPr>
+            </a:p>
+          </p:txBody>
+        </p:sp>
+        <p:sp>
+          <p:nvSpPr>
+            <p:cNvPr id="39" name="Rounded Rectangle 20"/>
+            <p:cNvSpPr/>
+            <p:nvPr/>
+          </p:nvSpPr>
+          <p:spPr>
+            <a:xfrm>
+              <a:off x="6286882" y="3081590"/>
+              <a:ext cx="306371" cy="327398"/>
+            </a:xfrm>
+            <a:prstGeom prst="roundRect">
+              <a:avLst/>
+            </a:prstGeom>
+            <a:solidFill>
+              <a:srgbClr val="92D050"/>
+            </a:solidFill>
+            <a:ln>
+              <a:noFill/>
+            </a:ln>
+            <a:effectLst/>
+          </p:spPr>
+          <p:style>
+            <a:lnRef idx="1">
+              <a:schemeClr val="accent1"/>
+            </a:lnRef>
+            <a:fillRef idx="3">
+              <a:schemeClr val="accent1"/>
+            </a:fillRef>
+            <a:effectRef idx="2">
+              <a:schemeClr val="accent1"/>
+            </a:effectRef>
+            <a:fontRef idx="minor">
+              <a:schemeClr val="lt1"/>
+            </a:fontRef>
+          </p:style>
+          <p:txBody>
+            <a:bodyPr rtlCol="0" anchor="ctr"/>
+            <a:lstStyle/>
+            <a:p>
+              <a:pPr algn="ctr"/>
+              <a:endParaRPr lang="en-US" sz="1000">
+                <a:latin typeface="+mn-ea"/>
+              </a:endParaRPr>
+            </a:p>
+          </p:txBody>
+        </p:sp>
+        <p:sp>
+          <p:nvSpPr>
+            <p:cNvPr id="40" name="Rounded Rectangle 21"/>
+            <p:cNvSpPr/>
+            <p:nvPr/>
+          </p:nvSpPr>
+          <p:spPr>
+            <a:xfrm>
+              <a:off x="6655065" y="3081590"/>
+              <a:ext cx="306371" cy="327398"/>
+            </a:xfrm>
+            <a:prstGeom prst="roundRect">
+              <a:avLst/>
+            </a:prstGeom>
+            <a:solidFill>
+              <a:srgbClr val="92D050"/>
+            </a:solidFill>
+            <a:ln>
+              <a:noFill/>
+            </a:ln>
+            <a:effectLst/>
+          </p:spPr>
+          <p:style>
+            <a:lnRef idx="1">
+              <a:schemeClr val="accent1"/>
+            </a:lnRef>
+            <a:fillRef idx="3">
+              <a:schemeClr val="accent1"/>
+            </a:fillRef>
+            <a:effectRef idx="2">
+              <a:schemeClr val="accent1"/>
+            </a:effectRef>
+            <a:fontRef idx="minor">
+              <a:schemeClr val="lt1"/>
+            </a:fontRef>
+          </p:style>
+          <p:txBody>
+            <a:bodyPr rtlCol="0" anchor="ctr"/>
+            <a:lstStyle/>
+            <a:p>
+              <a:pPr algn="ctr"/>
+              <a:endParaRPr lang="en-US" sz="1000">
+                <a:latin typeface="+mn-ea"/>
+              </a:endParaRPr>
+            </a:p>
+          </p:txBody>
+        </p:sp>
+        <p:cxnSp>
+          <p:nvCxnSpPr>
+            <p:cNvPr id="41" name="Straight Connector 22"/>
+            <p:cNvCxnSpPr/>
+            <p:nvPr/>
+          </p:nvCxnSpPr>
+          <p:spPr>
+            <a:xfrm>
+              <a:off x="5918698" y="2973457"/>
+              <a:ext cx="1042738" cy="0"/>
+            </a:xfrm>
+            <a:prstGeom prst="line">
+              <a:avLst/>
+            </a:prstGeom>
+            <a:ln w="28575" cmpd="sng">
+              <a:solidFill>
+                <a:srgbClr val="92D050"/>
+              </a:solidFill>
+            </a:ln>
+            <a:effectLst/>
+          </p:spPr>
+          <p:style>
+            <a:lnRef idx="2">
+              <a:schemeClr val="accent1"/>
+            </a:lnRef>
+            <a:fillRef idx="0">
+              <a:schemeClr val="accent1"/>
+            </a:fillRef>
+            <a:effectRef idx="1">
+              <a:schemeClr val="accent1"/>
+            </a:effectRef>
+            <a:fontRef idx="minor">
+              <a:schemeClr val="tx1"/>
+            </a:fontRef>
+          </p:style>
+        </p:cxnSp>
+        <p:cxnSp>
+          <p:nvCxnSpPr>
+            <p:cNvPr id="42" name="Straight Connector 23"/>
+            <p:cNvCxnSpPr>
+              <a:endCxn id="38" idx="0"/>
+            </p:cNvCxnSpPr>
+            <p:nvPr/>
+          </p:nvCxnSpPr>
+          <p:spPr>
+            <a:xfrm>
+              <a:off x="6071884" y="2968694"/>
+              <a:ext cx="0" cy="112896"/>
+            </a:xfrm>
+            <a:prstGeom prst="line">
+              <a:avLst/>
+            </a:prstGeom>
+            <a:ln w="28575" cmpd="sng">
+              <a:solidFill>
+                <a:srgbClr val="92D050"/>
+              </a:solidFill>
+            </a:ln>
+            <a:effectLst/>
+          </p:spPr>
+          <p:style>
+            <a:lnRef idx="2">
+              <a:schemeClr val="accent1"/>
+            </a:lnRef>
+            <a:fillRef idx="0">
+              <a:schemeClr val="accent1"/>
+            </a:fillRef>
+            <a:effectRef idx="1">
+              <a:schemeClr val="accent1"/>
+            </a:effectRef>
+            <a:fontRef idx="minor">
+              <a:schemeClr val="tx1"/>
+            </a:fontRef>
+          </p:style>
+        </p:cxnSp>
+        <p:cxnSp>
+          <p:nvCxnSpPr>
+            <p:cNvPr id="43" name="Straight Connector 24"/>
+            <p:cNvCxnSpPr/>
+            <p:nvPr/>
+          </p:nvCxnSpPr>
+          <p:spPr>
+            <a:xfrm>
+              <a:off x="6440066" y="2973457"/>
+              <a:ext cx="0" cy="127809"/>
+            </a:xfrm>
+            <a:prstGeom prst="line">
+              <a:avLst/>
+            </a:prstGeom>
+            <a:ln w="28575" cmpd="sng">
+              <a:solidFill>
+                <a:srgbClr val="92D050"/>
+              </a:solidFill>
+            </a:ln>
+            <a:effectLst/>
+          </p:spPr>
+          <p:style>
+            <a:lnRef idx="2">
+              <a:schemeClr val="accent1"/>
+            </a:lnRef>
+            <a:fillRef idx="0">
+              <a:schemeClr val="accent1"/>
+            </a:fillRef>
+            <a:effectRef idx="1">
+              <a:schemeClr val="accent1"/>
+            </a:effectRef>
+            <a:fontRef idx="minor">
+              <a:schemeClr val="tx1"/>
+            </a:fontRef>
+          </p:style>
+        </p:cxnSp>
+        <p:cxnSp>
+          <p:nvCxnSpPr>
+            <p:cNvPr id="44" name="Straight Connector 25"/>
+            <p:cNvCxnSpPr/>
+            <p:nvPr/>
+          </p:nvCxnSpPr>
+          <p:spPr>
+            <a:xfrm>
+              <a:off x="6808250" y="2973457"/>
+              <a:ext cx="0" cy="127809"/>
+            </a:xfrm>
+            <a:prstGeom prst="line">
+              <a:avLst/>
+            </a:prstGeom>
+            <a:ln w="28575" cmpd="sng">
+              <a:solidFill>
+                <a:srgbClr val="92D050"/>
+              </a:solidFill>
+            </a:ln>
+            <a:effectLst/>
+          </p:spPr>
+          <p:style>
+            <a:lnRef idx="2">
+              <a:schemeClr val="accent1"/>
+            </a:lnRef>
+            <a:fillRef idx="0">
+              <a:schemeClr val="accent1"/>
+            </a:fillRef>
+            <a:effectRef idx="1">
+              <a:schemeClr val="accent1"/>
+            </a:effectRef>
+            <a:fontRef idx="minor">
+              <a:schemeClr val="tx1"/>
+            </a:fontRef>
+          </p:style>
+        </p:cxnSp>
+        <p:sp>
+          <p:nvSpPr>
+            <p:cNvPr id="45" name="Rounded Rectangle 26"/>
+            <p:cNvSpPr/>
+            <p:nvPr/>
+          </p:nvSpPr>
+          <p:spPr>
+            <a:xfrm>
+              <a:off x="6094207" y="2529655"/>
+              <a:ext cx="306371" cy="327398"/>
+            </a:xfrm>
+            <a:prstGeom prst="roundRect">
+              <a:avLst/>
+            </a:prstGeom>
+            <a:solidFill>
+              <a:srgbClr val="92D050"/>
+            </a:solidFill>
+            <a:ln>
+              <a:noFill/>
+            </a:ln>
+            <a:effectLst/>
+          </p:spPr>
+          <p:style>
+            <a:lnRef idx="1">
+              <a:schemeClr val="accent1"/>
+            </a:lnRef>
+            <a:fillRef idx="3">
+              <a:schemeClr val="accent1"/>
+            </a:fillRef>
+            <a:effectRef idx="2">
+              <a:schemeClr val="accent1"/>
+            </a:effectRef>
+            <a:fontRef idx="minor">
+              <a:schemeClr val="lt1"/>
+            </a:fontRef>
+          </p:style>
+          <p:txBody>
+            <a:bodyPr rtlCol="0" anchor="ctr"/>
+            <a:lstStyle/>
+            <a:p>
+              <a:pPr algn="ctr"/>
+              <a:endParaRPr lang="en-US" sz="1000">
+                <a:latin typeface="+mn-ea"/>
+              </a:endParaRPr>
+            </a:p>
+          </p:txBody>
+        </p:sp>
+        <p:cxnSp>
+          <p:nvCxnSpPr>
+            <p:cNvPr id="46" name="Straight Connector 27"/>
+            <p:cNvCxnSpPr/>
+            <p:nvPr/>
+          </p:nvCxnSpPr>
+          <p:spPr>
+            <a:xfrm>
+              <a:off x="6247393" y="2847527"/>
+              <a:ext cx="1" cy="125930"/>
+            </a:xfrm>
+            <a:prstGeom prst="line">
+              <a:avLst/>
+            </a:prstGeom>
+            <a:ln w="28575" cmpd="sng">
+              <a:solidFill>
+                <a:srgbClr val="92D050"/>
+              </a:solidFill>
+            </a:ln>
+            <a:effectLst/>
+          </p:spPr>
+          <p:style>
+            <a:lnRef idx="2">
+              <a:schemeClr val="accent1"/>
+            </a:lnRef>
+            <a:fillRef idx="0">
+              <a:schemeClr val="accent1"/>
+            </a:fillRef>
+            <a:effectRef idx="1">
+              <a:schemeClr val="accent1"/>
+            </a:effectRef>
+            <a:fontRef idx="minor">
+              <a:schemeClr val="tx1"/>
+            </a:fontRef>
+          </p:style>
+        </p:cxnSp>
+        <p:cxnSp>
+          <p:nvCxnSpPr>
+            <p:cNvPr id="47" name="Straight Connector 28"/>
+            <p:cNvCxnSpPr>
+              <a:stCxn id="48" idx="2"/>
+            </p:cNvCxnSpPr>
+            <p:nvPr/>
+          </p:nvCxnSpPr>
+          <p:spPr>
+            <a:xfrm>
+              <a:off x="6646483" y="2857053"/>
+              <a:ext cx="2654" cy="125930"/>
+            </a:xfrm>
+            <a:prstGeom prst="line">
+              <a:avLst/>
+            </a:prstGeom>
+            <a:ln w="28575" cmpd="sng">
+              <a:solidFill>
+                <a:srgbClr val="92D050"/>
+              </a:solidFill>
+            </a:ln>
+            <a:effectLst/>
+          </p:spPr>
+          <p:style>
+            <a:lnRef idx="2">
+              <a:schemeClr val="accent1"/>
+            </a:lnRef>
+            <a:fillRef idx="0">
+              <a:schemeClr val="accent1"/>
+            </a:fillRef>
+            <a:effectRef idx="1">
+              <a:schemeClr val="accent1"/>
+            </a:effectRef>
+            <a:fontRef idx="minor">
+              <a:schemeClr val="tx1"/>
+            </a:fontRef>
+          </p:style>
+        </p:cxnSp>
+        <p:sp>
+          <p:nvSpPr>
+            <p:cNvPr id="48" name="Rounded Rectangle 29"/>
+            <p:cNvSpPr/>
+            <p:nvPr/>
+          </p:nvSpPr>
+          <p:spPr>
+            <a:xfrm>
+              <a:off x="6493297" y="2529655"/>
+              <a:ext cx="306371" cy="327398"/>
+            </a:xfrm>
+            <a:prstGeom prst="roundRect">
+              <a:avLst/>
+            </a:prstGeom>
+            <a:solidFill>
+              <a:srgbClr val="92D050"/>
+            </a:solidFill>
+            <a:ln>
+              <a:noFill/>
+            </a:ln>
+            <a:effectLst/>
+          </p:spPr>
+          <p:style>
+            <a:lnRef idx="1">
+              <a:schemeClr val="accent1"/>
+            </a:lnRef>
+            <a:fillRef idx="3">
+              <a:schemeClr val="accent1"/>
+            </a:fillRef>
+            <a:effectRef idx="2">
+              <a:schemeClr val="accent1"/>
+            </a:effectRef>
+            <a:fontRef idx="minor">
+              <a:schemeClr val="lt1"/>
+            </a:fontRef>
+          </p:style>
+          <p:txBody>
+            <a:bodyPr rtlCol="0" anchor="ctr"/>
+            <a:lstStyle/>
+            <a:p>
+              <a:pPr algn="ctr"/>
+              <a:endParaRPr lang="en-US" sz="1000">
+                <a:latin typeface="+mn-ea"/>
+              </a:endParaRPr>
+            </a:p>
+          </p:txBody>
+        </p:sp>
+        <p:cxnSp>
+          <p:nvCxnSpPr>
+            <p:cNvPr id="49" name="Straight Arrow Connector 31"/>
+            <p:cNvCxnSpPr/>
+            <p:nvPr/>
+          </p:nvCxnSpPr>
+          <p:spPr>
+            <a:xfrm>
+              <a:off x="6225622" y="2682059"/>
+              <a:ext cx="429996" cy="0"/>
+            </a:xfrm>
+            <a:prstGeom prst="straightConnector1">
+              <a:avLst/>
+            </a:prstGeom>
+            <a:ln w="12700" cmpd="sng">
+              <a:solidFill>
+                <a:srgbClr val="003300"/>
+              </a:solidFill>
+              <a:headEnd type="arrow"/>
+              <a:tailEnd type="arrow"/>
+            </a:ln>
+            <a:effectLst/>
+          </p:spPr>
+          <p:style>
+            <a:lnRef idx="2">
+              <a:schemeClr val="accent1"/>
+            </a:lnRef>
+            <a:fillRef idx="0">
+              <a:schemeClr val="accent1"/>
+            </a:fillRef>
+            <a:effectRef idx="1">
+              <a:schemeClr val="accent1"/>
+            </a:effectRef>
+            <a:fontRef idx="minor">
+              <a:schemeClr val="tx1"/>
+            </a:fontRef>
+          </p:style>
+        </p:cxnSp>
+        <p:sp>
+          <p:nvSpPr>
+            <p:cNvPr id="37" name="TextBox 36"/>
+            <p:cNvSpPr txBox="1"/>
+            <p:nvPr/>
+          </p:nvSpPr>
+          <p:spPr>
+            <a:xfrm>
+              <a:off x="6021140" y="3396350"/>
+              <a:ext cx="846707" cy="246221"/>
+            </a:xfrm>
+            <a:prstGeom prst="rect">
+              <a:avLst/>
+            </a:prstGeom>
+            <a:noFill/>
+          </p:spPr>
+          <p:txBody>
+            <a:bodyPr wrap="none" rtlCol="0">
+              <a:spAutoFit/>
+            </a:bodyPr>
+            <a:lstStyle/>
+            <a:p>
+              <a:pPr defTabSz="430213">
+                <a:spcAft>
+                  <a:spcPts val="400"/>
+                </a:spcAft>
+                <a:buSzPct val="100000"/>
+              </a:pPr>
+              <a:r>
+                <a:rPr lang="en-US" altLang="ko-KR" sz="1000" b="1" dirty="0">
+                  <a:latin typeface="+mn-ea"/>
+                  <a:cs typeface="HP Simplified" pitchFamily="34" charset="0"/>
+                </a:rPr>
+                <a:t>Data Node</a:t>
+              </a:r>
+              <a:endParaRPr lang="en-US" sz="1000" b="1" dirty="0">
+                <a:latin typeface="+mn-ea"/>
+                <a:cs typeface="HP Simplified" pitchFamily="34" charset="0"/>
+              </a:endParaRPr>
+            </a:p>
+          </p:txBody>
+        </p:sp>
+        <p:sp>
+          <p:nvSpPr>
+            <p:cNvPr id="27" name="Rounded Rectangle 33"/>
+            <p:cNvSpPr/>
+            <p:nvPr/>
+          </p:nvSpPr>
+          <p:spPr>
+            <a:xfrm>
+              <a:off x="8489978" y="3081590"/>
+              <a:ext cx="306372" cy="327398"/>
+            </a:xfrm>
+            <a:prstGeom prst="roundRect">
+              <a:avLst/>
+            </a:prstGeom>
+            <a:solidFill>
+              <a:srgbClr val="104E91"/>
+            </a:solidFill>
+            <a:ln>
+              <a:noFill/>
+            </a:ln>
+            <a:effectLst/>
+          </p:spPr>
+          <p:style>
+            <a:lnRef idx="1">
+              <a:schemeClr val="accent1"/>
+            </a:lnRef>
+            <a:fillRef idx="3">
+              <a:schemeClr val="accent1"/>
+            </a:fillRef>
+            <a:effectRef idx="2">
+              <a:schemeClr val="accent1"/>
+            </a:effectRef>
+            <a:fontRef idx="minor">
+              <a:schemeClr val="lt1"/>
+            </a:fontRef>
+          </p:style>
+          <p:txBody>
+            <a:bodyPr rtlCol="0" anchor="ctr"/>
+            <a:lstStyle/>
+            <a:p>
+              <a:pPr algn="ctr"/>
+              <a:endParaRPr lang="en-US" sz="1000">
+                <a:latin typeface="+mn-ea"/>
+              </a:endParaRPr>
+            </a:p>
+          </p:txBody>
+        </p:sp>
+        <p:sp>
+          <p:nvSpPr>
+            <p:cNvPr id="28" name="Rounded Rectangle 38"/>
+            <p:cNvSpPr/>
+            <p:nvPr/>
+          </p:nvSpPr>
+          <p:spPr>
+            <a:xfrm>
+              <a:off x="8284451" y="2529655"/>
+              <a:ext cx="306372" cy="327398"/>
+            </a:xfrm>
+            <a:prstGeom prst="roundRect">
+              <a:avLst/>
+            </a:prstGeom>
+            <a:solidFill>
+              <a:srgbClr val="60A4ED"/>
+            </a:solidFill>
+            <a:ln>
+              <a:noFill/>
+            </a:ln>
+            <a:effectLst/>
+          </p:spPr>
+          <p:style>
+            <a:lnRef idx="1">
+              <a:schemeClr val="accent1"/>
+            </a:lnRef>
+            <a:fillRef idx="3">
+              <a:schemeClr val="accent1"/>
+            </a:fillRef>
+            <a:effectRef idx="2">
+              <a:schemeClr val="accent1"/>
+            </a:effectRef>
+            <a:fontRef idx="minor">
+              <a:schemeClr val="lt1"/>
+            </a:fontRef>
+          </p:style>
+          <p:txBody>
+            <a:bodyPr rtlCol="0" anchor="ctr"/>
+            <a:lstStyle/>
+            <a:p>
+              <a:pPr algn="ctr"/>
+              <a:endParaRPr lang="en-US" sz="1000">
+                <a:solidFill>
+                  <a:schemeClr val="accent4">
+                    <a:lumMod val="60000"/>
+                    <a:lumOff val="40000"/>
+                  </a:schemeClr>
+                </a:solidFill>
+                <a:latin typeface="+mn-ea"/>
+              </a:endParaRPr>
+            </a:p>
+          </p:txBody>
+        </p:sp>
+        <p:cxnSp>
+          <p:nvCxnSpPr>
+            <p:cNvPr id="29" name="Straight Connector 39"/>
+            <p:cNvCxnSpPr>
+              <a:endCxn id="27" idx="0"/>
+            </p:cNvCxnSpPr>
+            <p:nvPr/>
+          </p:nvCxnSpPr>
+          <p:spPr>
+            <a:xfrm>
+              <a:off x="8428166" y="2845775"/>
+              <a:ext cx="214998" cy="235815"/>
+            </a:xfrm>
+            <a:prstGeom prst="line">
+              <a:avLst/>
+            </a:prstGeom>
+            <a:ln w="28575" cmpd="sng">
+              <a:solidFill>
+                <a:schemeClr val="accent4">
+                  <a:lumMod val="50000"/>
+                </a:schemeClr>
+              </a:solidFill>
+            </a:ln>
+            <a:effectLst/>
+          </p:spPr>
+          <p:style>
+            <a:lnRef idx="2">
+              <a:schemeClr val="accent1"/>
+            </a:lnRef>
+            <a:fillRef idx="0">
+              <a:schemeClr val="accent1"/>
+            </a:fillRef>
+            <a:effectRef idx="1">
+              <a:schemeClr val="accent1"/>
+            </a:effectRef>
+            <a:fontRef idx="minor">
+              <a:schemeClr val="tx1"/>
+            </a:fontRef>
+          </p:style>
+        </p:cxnSp>
+        <p:cxnSp>
+          <p:nvCxnSpPr>
+            <p:cNvPr id="30" name="Straight Connector 40"/>
+            <p:cNvCxnSpPr>
+              <a:stCxn id="31" idx="2"/>
+              <a:endCxn id="27" idx="0"/>
+            </p:cNvCxnSpPr>
+            <p:nvPr/>
+          </p:nvCxnSpPr>
+          <p:spPr>
+            <a:xfrm flipH="1">
+              <a:off x="8643164" y="2857053"/>
+              <a:ext cx="193562" cy="224537"/>
+            </a:xfrm>
+            <a:prstGeom prst="line">
+              <a:avLst/>
+            </a:prstGeom>
+            <a:ln w="28575" cmpd="sng">
+              <a:solidFill>
+                <a:schemeClr val="accent4">
+                  <a:lumMod val="50000"/>
+                </a:schemeClr>
+              </a:solidFill>
+            </a:ln>
+            <a:effectLst/>
+          </p:spPr>
+          <p:style>
+            <a:lnRef idx="2">
+              <a:schemeClr val="accent1"/>
+            </a:lnRef>
+            <a:fillRef idx="0">
+              <a:schemeClr val="accent1"/>
+            </a:fillRef>
+            <a:effectRef idx="1">
+              <a:schemeClr val="accent1"/>
+            </a:effectRef>
+            <a:fontRef idx="minor">
+              <a:schemeClr val="tx1"/>
+            </a:fontRef>
+          </p:style>
+        </p:cxnSp>
+        <p:sp>
+          <p:nvSpPr>
+            <p:cNvPr id="31" name="Rounded Rectangle 41"/>
+            <p:cNvSpPr/>
+            <p:nvPr/>
+          </p:nvSpPr>
+          <p:spPr>
+            <a:xfrm>
+              <a:off x="8683540" y="2529655"/>
+              <a:ext cx="306372" cy="327398"/>
+            </a:xfrm>
+            <a:prstGeom prst="roundRect">
+              <a:avLst/>
+            </a:prstGeom>
+            <a:solidFill>
+              <a:srgbClr val="60A4ED"/>
+            </a:solidFill>
+            <a:ln>
+              <a:noFill/>
+            </a:ln>
+            <a:effectLst/>
+          </p:spPr>
+          <p:style>
+            <a:lnRef idx="1">
+              <a:schemeClr val="accent1"/>
+            </a:lnRef>
+            <a:fillRef idx="3">
+              <a:schemeClr val="accent1"/>
+            </a:fillRef>
+            <a:effectRef idx="2">
+              <a:schemeClr val="accent1"/>
+            </a:effectRef>
+            <a:fontRef idx="minor">
+              <a:schemeClr val="lt1"/>
+            </a:fontRef>
+          </p:style>
+          <p:txBody>
+            <a:bodyPr rtlCol="0" anchor="ctr"/>
+            <a:lstStyle/>
+            <a:p>
+              <a:pPr algn="ctr"/>
+              <a:endParaRPr lang="en-US" sz="1000">
+                <a:latin typeface="+mn-ea"/>
+              </a:endParaRPr>
+            </a:p>
+          </p:txBody>
+        </p:sp>
+        <p:sp>
+          <p:nvSpPr>
+            <p:cNvPr id="32" name="TextBox 31"/>
+            <p:cNvSpPr txBox="1"/>
+            <p:nvPr/>
+          </p:nvSpPr>
+          <p:spPr>
+            <a:xfrm>
+              <a:off x="8212704" y="2256619"/>
+              <a:ext cx="445957" cy="253916"/>
+            </a:xfrm>
+            <a:prstGeom prst="rect">
+              <a:avLst/>
+            </a:prstGeom>
+            <a:noFill/>
+          </p:spPr>
+          <p:txBody>
+            <a:bodyPr wrap="none" rtlCol="0">
+              <a:spAutoFit/>
+            </a:bodyPr>
+            <a:lstStyle/>
+            <a:p>
+              <a:pPr defTabSz="430213">
+                <a:spcAft>
+                  <a:spcPts val="400"/>
+                </a:spcAft>
+                <a:buSzPct val="100000"/>
+              </a:pPr>
+              <a:r>
+                <a:rPr lang="en-US" sz="1000" b="1" dirty="0">
+                  <a:latin typeface="+mn-ea"/>
+                  <a:cs typeface="HP Simplified" pitchFamily="34" charset="0"/>
+                </a:rPr>
+                <a:t>R/W</a:t>
+              </a:r>
+            </a:p>
+          </p:txBody>
+        </p:sp>
+        <p:sp>
+          <p:nvSpPr>
+            <p:cNvPr id="33" name="TextBox 32"/>
+            <p:cNvSpPr txBox="1"/>
+            <p:nvPr/>
+          </p:nvSpPr>
+          <p:spPr>
+            <a:xfrm>
+              <a:off x="8312160" y="3396350"/>
+              <a:ext cx="686407" cy="253916"/>
+            </a:xfrm>
+            <a:prstGeom prst="rect">
+              <a:avLst/>
+            </a:prstGeom>
+            <a:noFill/>
+          </p:spPr>
+          <p:txBody>
+            <a:bodyPr wrap="none" rtlCol="0">
+              <a:spAutoFit/>
+            </a:bodyPr>
+            <a:lstStyle/>
+            <a:p>
+              <a:pPr defTabSz="430213">
+                <a:spcAft>
+                  <a:spcPts val="400"/>
+                </a:spcAft>
+                <a:buSzPct val="100000"/>
+              </a:pPr>
+              <a:r>
+                <a:rPr lang="en-US" sz="1000" b="1" dirty="0">
+                  <a:latin typeface="+mn-ea"/>
+                  <a:cs typeface="HP Simplified" pitchFamily="34" charset="0"/>
+                </a:rPr>
+                <a:t>Storage</a:t>
+              </a:r>
+            </a:p>
+          </p:txBody>
+        </p:sp>
+        <p:sp>
+          <p:nvSpPr>
+            <p:cNvPr id="34" name="TextBox 33"/>
+            <p:cNvSpPr txBox="1"/>
+            <p:nvPr/>
+          </p:nvSpPr>
+          <p:spPr>
+            <a:xfrm>
+              <a:off x="8543884" y="2256619"/>
+              <a:ext cx="567785" cy="253916"/>
+            </a:xfrm>
+            <a:prstGeom prst="rect">
+              <a:avLst/>
+            </a:prstGeom>
+            <a:noFill/>
+          </p:spPr>
+          <p:txBody>
+            <a:bodyPr wrap="none" rtlCol="0">
+              <a:spAutoFit/>
+            </a:bodyPr>
+            <a:lstStyle/>
+            <a:p>
+              <a:pPr defTabSz="430213">
+                <a:spcAft>
+                  <a:spcPts val="400"/>
+                </a:spcAft>
+                <a:buSzPct val="100000"/>
+              </a:pPr>
+              <a:r>
+                <a:rPr lang="en-US" sz="1000" b="1" dirty="0">
+                  <a:latin typeface="+mn-ea"/>
+                  <a:cs typeface="HP Simplified" pitchFamily="34" charset="0"/>
+                </a:rPr>
+                <a:t>READ</a:t>
+              </a:r>
+            </a:p>
+          </p:txBody>
+        </p:sp>
+      </p:grpSp>
+      <p:sp>
+        <p:nvSpPr>
+          <p:cNvPr id="23" name="Rectangle 18"/>
+          <p:cNvSpPr/>
+          <p:nvPr/>
+        </p:nvSpPr>
+        <p:spPr>
+          <a:xfrm>
+            <a:off x="400807" y="2031646"/>
+            <a:ext cx="1633781" cy="338554"/>
+          </a:xfrm>
+          <a:prstGeom prst="rect">
+            <a:avLst/>
+          </a:prstGeom>
+        </p:spPr>
+        <p:txBody>
+          <a:bodyPr wrap="none">
+            <a:spAutoFit/>
+          </a:bodyPr>
+          <a:lstStyle/>
+          <a:p>
+            <a:pPr algn="ctr" defTabSz="430213">
+              <a:spcAft>
+                <a:spcPts val="400"/>
+              </a:spcAft>
+              <a:buSzPct val="100000"/>
+            </a:pPr>
+            <a:r>
+              <a:rPr lang="en-US" sz="1600" b="1" dirty="0">
+                <a:latin typeface="+mn-ea"/>
+                <a:cs typeface="HP Simplified" pitchFamily="34" charset="0"/>
+              </a:rPr>
+              <a:t>Other Systems</a:t>
+            </a:r>
+          </a:p>
+        </p:txBody>
+      </p:sp>
+      <p:grpSp>
+        <p:nvGrpSpPr>
+          <p:cNvPr id="68" name="그룹 67"/>
+          <p:cNvGrpSpPr/>
+          <p:nvPr/>
+        </p:nvGrpSpPr>
+        <p:grpSpPr>
+          <a:xfrm>
+            <a:off x="6282940" y="4211346"/>
+            <a:ext cx="2566104" cy="649573"/>
+            <a:chOff x="7767471" y="3263550"/>
+            <a:chExt cx="2566104" cy="649573"/>
+          </a:xfrm>
+        </p:grpSpPr>
+        <p:cxnSp>
+          <p:nvCxnSpPr>
+            <p:cNvPr id="73" name="Straight Connector 8"/>
+            <p:cNvCxnSpPr/>
+            <p:nvPr/>
+          </p:nvCxnSpPr>
+          <p:spPr>
+            <a:xfrm>
+              <a:off x="7767471" y="3263550"/>
+              <a:ext cx="2566104" cy="0"/>
+            </a:xfrm>
+            <a:prstGeom prst="line">
+              <a:avLst/>
+            </a:prstGeom>
+            <a:ln w="28575" cmpd="sng">
+              <a:solidFill>
+                <a:srgbClr val="0079EF"/>
+              </a:solidFill>
+            </a:ln>
+            <a:effectLst/>
+          </p:spPr>
+          <p:style>
+            <a:lnRef idx="2">
+              <a:schemeClr val="accent1"/>
+            </a:lnRef>
+            <a:fillRef idx="0">
+              <a:schemeClr val="accent1"/>
+            </a:fillRef>
+            <a:effectRef idx="1">
+              <a:schemeClr val="accent1"/>
+            </a:effectRef>
+            <a:fontRef idx="minor">
+              <a:schemeClr val="tx1"/>
+            </a:fontRef>
+          </p:style>
+        </p:cxnSp>
+        <p:grpSp>
+          <p:nvGrpSpPr>
+            <p:cNvPr id="74" name="그룹 73"/>
+            <p:cNvGrpSpPr/>
+            <p:nvPr/>
+          </p:nvGrpSpPr>
+          <p:grpSpPr>
+            <a:xfrm>
+              <a:off x="7815960" y="3263550"/>
+              <a:ext cx="418641" cy="649573"/>
+              <a:chOff x="8086547" y="3263550"/>
+              <a:chExt cx="418641" cy="649573"/>
+            </a:xfrm>
+          </p:grpSpPr>
+          <p:sp>
+            <p:nvSpPr>
+              <p:cNvPr id="84" name="Rounded Rectangle 4"/>
+              <p:cNvSpPr/>
+              <p:nvPr/>
+            </p:nvSpPr>
+            <p:spPr>
+              <a:xfrm>
+                <a:off x="8086547" y="3498031"/>
+                <a:ext cx="418641" cy="415092"/>
+              </a:xfrm>
+              <a:prstGeom prst="roundRect">
+                <a:avLst/>
+              </a:prstGeom>
+              <a:solidFill>
+                <a:srgbClr val="0079EF"/>
+              </a:solidFill>
+              <a:ln>
+                <a:noFill/>
+              </a:ln>
+              <a:effectLst/>
+            </p:spPr>
+            <p:style>
+              <a:lnRef idx="1">
+                <a:schemeClr val="accent1"/>
+              </a:lnRef>
+              <a:fillRef idx="3">
+                <a:schemeClr val="accent1"/>
+              </a:fillRef>
+              <a:effectRef idx="2">
+                <a:schemeClr val="accent1"/>
+              </a:effectRef>
+              <a:fontRef idx="minor">
+                <a:schemeClr val="lt1"/>
+              </a:fontRef>
+            </p:style>
+            <p:txBody>
+              <a:bodyPr rtlCol="0" anchor="ctr"/>
+              <a:lstStyle/>
+              <a:p>
+                <a:pPr algn="ctr"/>
+                <a:endParaRPr lang="en-US">
+                  <a:latin typeface="+mn-ea"/>
+                </a:endParaRPr>
+              </a:p>
+            </p:txBody>
+          </p:sp>
+          <p:cxnSp>
+            <p:nvCxnSpPr>
+              <p:cNvPr id="85" name="Straight Connector 9"/>
+              <p:cNvCxnSpPr/>
+              <p:nvPr/>
+            </p:nvCxnSpPr>
+            <p:spPr>
+              <a:xfrm>
+                <a:off x="8295867" y="3263550"/>
+                <a:ext cx="0" cy="253388"/>
+              </a:xfrm>
+              <a:prstGeom prst="line">
+                <a:avLst/>
+              </a:prstGeom>
+              <a:ln w="28575" cmpd="sng">
+                <a:solidFill>
+                  <a:srgbClr val="0079EF"/>
+                </a:solidFill>
+              </a:ln>
+              <a:effectLst/>
+            </p:spPr>
+            <p:style>
+              <a:lnRef idx="2">
+                <a:schemeClr val="accent1"/>
+              </a:lnRef>
+              <a:fillRef idx="0">
+                <a:schemeClr val="accent1"/>
+              </a:fillRef>
+              <a:effectRef idx="1">
+                <a:schemeClr val="accent1"/>
+              </a:effectRef>
+              <a:fontRef idx="minor">
+                <a:schemeClr val="tx1"/>
+              </a:fontRef>
+            </p:style>
+          </p:cxnSp>
+        </p:grpSp>
+        <p:grpSp>
+          <p:nvGrpSpPr>
+            <p:cNvPr id="75" name="그룹 74"/>
+            <p:cNvGrpSpPr/>
+            <p:nvPr/>
+          </p:nvGrpSpPr>
+          <p:grpSpPr>
+            <a:xfrm>
+              <a:off x="8493237" y="3263550"/>
+              <a:ext cx="418641" cy="649573"/>
+              <a:chOff x="8589651" y="3263550"/>
+              <a:chExt cx="418641" cy="649573"/>
+            </a:xfrm>
+          </p:grpSpPr>
+          <p:sp>
+            <p:nvSpPr>
+              <p:cNvPr id="82" name="Rounded Rectangle 5"/>
+              <p:cNvSpPr/>
+              <p:nvPr/>
+            </p:nvSpPr>
+            <p:spPr>
+              <a:xfrm>
+                <a:off x="8589651" y="3498031"/>
+                <a:ext cx="418641" cy="415092"/>
+              </a:xfrm>
+              <a:prstGeom prst="roundRect">
+                <a:avLst/>
+              </a:prstGeom>
+              <a:solidFill>
+                <a:srgbClr val="0079EF"/>
+              </a:solidFill>
+              <a:ln>
+                <a:noFill/>
+              </a:ln>
+              <a:effectLst/>
+            </p:spPr>
+            <p:style>
+              <a:lnRef idx="1">
+                <a:schemeClr val="accent1"/>
+              </a:lnRef>
+              <a:fillRef idx="3">
+                <a:schemeClr val="accent1"/>
+              </a:fillRef>
+              <a:effectRef idx="2">
+                <a:schemeClr val="accent1"/>
+              </a:effectRef>
+              <a:fontRef idx="minor">
+                <a:schemeClr val="lt1"/>
+              </a:fontRef>
+            </p:style>
+            <p:txBody>
+              <a:bodyPr rtlCol="0" anchor="ctr"/>
+              <a:lstStyle/>
+              <a:p>
+                <a:pPr algn="ctr"/>
+                <a:endParaRPr lang="en-US">
+                  <a:latin typeface="+mn-ea"/>
+                </a:endParaRPr>
+              </a:p>
+            </p:txBody>
+          </p:sp>
+          <p:cxnSp>
+            <p:nvCxnSpPr>
+              <p:cNvPr id="83" name="Straight Connector 10"/>
+              <p:cNvCxnSpPr/>
+              <p:nvPr/>
+            </p:nvCxnSpPr>
+            <p:spPr>
+              <a:xfrm>
+                <a:off x="8798970" y="3263550"/>
+                <a:ext cx="0" cy="253388"/>
+              </a:xfrm>
+              <a:prstGeom prst="line">
+                <a:avLst/>
+              </a:prstGeom>
+              <a:ln w="28575" cmpd="sng">
+                <a:solidFill>
+                  <a:srgbClr val="0079EF"/>
+                </a:solidFill>
+              </a:ln>
+              <a:effectLst/>
+            </p:spPr>
+            <p:style>
+              <a:lnRef idx="2">
+                <a:schemeClr val="accent1"/>
+              </a:lnRef>
+              <a:fillRef idx="0">
+                <a:schemeClr val="accent1"/>
+              </a:fillRef>
+              <a:effectRef idx="1">
+                <a:schemeClr val="accent1"/>
+              </a:effectRef>
+              <a:fontRef idx="minor">
+                <a:schemeClr val="tx1"/>
+              </a:fontRef>
+            </p:style>
+          </p:cxnSp>
+        </p:grpSp>
+        <p:grpSp>
+          <p:nvGrpSpPr>
+            <p:cNvPr id="76" name="그룹 75"/>
+            <p:cNvGrpSpPr/>
+            <p:nvPr/>
+          </p:nvGrpSpPr>
+          <p:grpSpPr>
+            <a:xfrm>
+              <a:off x="9170514" y="3263550"/>
+              <a:ext cx="418641" cy="649573"/>
+              <a:chOff x="9092755" y="3263550"/>
+              <a:chExt cx="418641" cy="649573"/>
+            </a:xfrm>
+          </p:grpSpPr>
+          <p:sp>
+            <p:nvSpPr>
+              <p:cNvPr id="80" name="Rounded Rectangle 6"/>
+              <p:cNvSpPr/>
+              <p:nvPr/>
+            </p:nvSpPr>
+            <p:spPr>
+              <a:xfrm>
+                <a:off x="9092755" y="3498031"/>
+                <a:ext cx="418641" cy="415092"/>
+              </a:xfrm>
+              <a:prstGeom prst="roundRect">
+                <a:avLst/>
+              </a:prstGeom>
+              <a:solidFill>
+                <a:srgbClr val="0079EF"/>
+              </a:solidFill>
+              <a:ln>
+                <a:noFill/>
+              </a:ln>
+              <a:effectLst/>
+            </p:spPr>
+            <p:style>
+              <a:lnRef idx="1">
+                <a:schemeClr val="accent1"/>
+              </a:lnRef>
+              <a:fillRef idx="3">
+                <a:schemeClr val="accent1"/>
+              </a:fillRef>
+              <a:effectRef idx="2">
+                <a:schemeClr val="accent1"/>
+              </a:effectRef>
+              <a:fontRef idx="minor">
+                <a:schemeClr val="lt1"/>
+              </a:fontRef>
+            </p:style>
+            <p:txBody>
+              <a:bodyPr rtlCol="0" anchor="ctr"/>
+              <a:lstStyle/>
+              <a:p>
+                <a:pPr algn="ctr"/>
+                <a:endParaRPr lang="en-US">
+                  <a:latin typeface="+mn-ea"/>
+                </a:endParaRPr>
+              </a:p>
+            </p:txBody>
+          </p:sp>
+          <p:cxnSp>
+            <p:nvCxnSpPr>
+              <p:cNvPr id="81" name="Straight Connector 11"/>
+              <p:cNvCxnSpPr/>
+              <p:nvPr/>
+            </p:nvCxnSpPr>
+            <p:spPr>
+              <a:xfrm>
+                <a:off x="9302075" y="3263550"/>
+                <a:ext cx="0" cy="253388"/>
+              </a:xfrm>
+              <a:prstGeom prst="line">
+                <a:avLst/>
+              </a:prstGeom>
+              <a:ln w="28575" cmpd="sng">
+                <a:solidFill>
+                  <a:srgbClr val="0079EF"/>
+                </a:solidFill>
+              </a:ln>
+              <a:effectLst/>
+            </p:spPr>
+            <p:style>
+              <a:lnRef idx="2">
+                <a:schemeClr val="accent1"/>
+              </a:lnRef>
+              <a:fillRef idx="0">
+                <a:schemeClr val="accent1"/>
+              </a:fillRef>
+              <a:effectRef idx="1">
+                <a:schemeClr val="accent1"/>
+              </a:effectRef>
+              <a:fontRef idx="minor">
+                <a:schemeClr val="tx1"/>
+              </a:fontRef>
+            </p:style>
+          </p:cxnSp>
+        </p:grpSp>
+        <p:grpSp>
+          <p:nvGrpSpPr>
+            <p:cNvPr id="77" name="그룹 76"/>
+            <p:cNvGrpSpPr/>
+            <p:nvPr/>
+          </p:nvGrpSpPr>
+          <p:grpSpPr>
+            <a:xfrm>
+              <a:off x="9847791" y="3263550"/>
+              <a:ext cx="418641" cy="649573"/>
+              <a:chOff x="9595858" y="3263550"/>
+              <a:chExt cx="418641" cy="649573"/>
+            </a:xfrm>
+          </p:grpSpPr>
+          <p:sp>
+            <p:nvSpPr>
+              <p:cNvPr id="78" name="Rounded Rectangle 7"/>
+              <p:cNvSpPr/>
+              <p:nvPr/>
+            </p:nvSpPr>
+            <p:spPr>
+              <a:xfrm>
+                <a:off x="9595858" y="3498031"/>
+                <a:ext cx="418641" cy="415092"/>
+              </a:xfrm>
+              <a:prstGeom prst="roundRect">
+                <a:avLst/>
+              </a:prstGeom>
+              <a:solidFill>
+                <a:srgbClr val="0079EF"/>
+              </a:solidFill>
+              <a:ln>
+                <a:noFill/>
+              </a:ln>
+              <a:effectLst/>
+            </p:spPr>
+            <p:style>
+              <a:lnRef idx="1">
+                <a:schemeClr val="accent1"/>
+              </a:lnRef>
+              <a:fillRef idx="3">
+                <a:schemeClr val="accent1"/>
+              </a:fillRef>
+              <a:effectRef idx="2">
+                <a:schemeClr val="accent1"/>
+              </a:effectRef>
+              <a:fontRef idx="minor">
+                <a:schemeClr val="lt1"/>
+              </a:fontRef>
+            </p:style>
+            <p:txBody>
+              <a:bodyPr rtlCol="0" anchor="ctr"/>
+              <a:lstStyle/>
+              <a:p>
+                <a:pPr algn="ctr"/>
+                <a:endParaRPr lang="en-US">
+                  <a:latin typeface="+mn-ea"/>
+                </a:endParaRPr>
+              </a:p>
+            </p:txBody>
+          </p:sp>
+          <p:cxnSp>
+            <p:nvCxnSpPr>
+              <p:cNvPr id="79" name="Straight Connector 12"/>
+              <p:cNvCxnSpPr/>
+              <p:nvPr/>
+            </p:nvCxnSpPr>
+            <p:spPr>
+              <a:xfrm>
+                <a:off x="9805178" y="3263550"/>
+                <a:ext cx="0" cy="253388"/>
+              </a:xfrm>
+              <a:prstGeom prst="line">
+                <a:avLst/>
+              </a:prstGeom>
+              <a:ln w="28575" cmpd="sng">
+                <a:solidFill>
+                  <a:srgbClr val="0079EF"/>
+                </a:solidFill>
+              </a:ln>
+              <a:effectLst/>
+            </p:spPr>
+            <p:style>
+              <a:lnRef idx="2">
+                <a:schemeClr val="accent1"/>
+              </a:lnRef>
+              <a:fillRef idx="0">
+                <a:schemeClr val="accent1"/>
+              </a:fillRef>
+              <a:effectRef idx="1">
+                <a:schemeClr val="accent1"/>
+              </a:effectRef>
+              <a:fontRef idx="minor">
+                <a:schemeClr val="tx1"/>
+              </a:fontRef>
+            </p:style>
+          </p:cxnSp>
+        </p:grpSp>
+      </p:grpSp>
+      <p:sp>
+        <p:nvSpPr>
+          <p:cNvPr id="69" name="TextBox 68"/>
+          <p:cNvSpPr txBox="1"/>
+          <p:nvPr/>
+        </p:nvSpPr>
+        <p:spPr>
+          <a:xfrm>
+            <a:off x="6753952" y="3920787"/>
+            <a:ext cx="1483098" cy="261610"/>
+          </a:xfrm>
+          <a:prstGeom prst="rect">
+            <a:avLst/>
+          </a:prstGeom>
+          <a:noFill/>
+        </p:spPr>
+        <p:txBody>
+          <a:bodyPr wrap="none" rtlCol="0">
+            <a:spAutoFit/>
+          </a:bodyPr>
+          <a:lstStyle/>
+          <a:p>
+            <a:pPr defTabSz="430213">
+              <a:spcAft>
+                <a:spcPts val="400"/>
+              </a:spcAft>
+              <a:buSzPct val="100000"/>
+            </a:pPr>
+            <a:r>
+              <a:rPr lang="en-US" altLang="ko-KR" sz="1100" b="1" dirty="0">
+                <a:latin typeface="+mn-ea"/>
+                <a:cs typeface="HP Simplified" pitchFamily="34" charset="0"/>
+              </a:rPr>
+              <a:t>10G Ethernet N/W </a:t>
+            </a:r>
+            <a:endParaRPr lang="en-US" sz="1100" b="1" dirty="0">
+              <a:latin typeface="+mn-ea"/>
+              <a:cs typeface="HP Simplified" pitchFamily="34" charset="0"/>
+            </a:endParaRPr>
+          </a:p>
+        </p:txBody>
+      </p:sp>
+      <p:sp>
+        <p:nvSpPr>
+          <p:cNvPr id="70" name="TextBox 69"/>
+          <p:cNvSpPr txBox="1"/>
+          <p:nvPr/>
+        </p:nvSpPr>
+        <p:spPr>
+          <a:xfrm>
+            <a:off x="6486210" y="4522728"/>
+            <a:ext cx="2145870" cy="252000"/>
+          </a:xfrm>
+          <a:prstGeom prst="rect">
+            <a:avLst/>
+          </a:prstGeom>
+          <a:solidFill>
+            <a:schemeClr val="bg1"/>
+          </a:solidFill>
+        </p:spPr>
+        <p:txBody>
+          <a:bodyPr wrap="none" rtlCol="0">
+            <a:noAutofit/>
+          </a:bodyPr>
+          <a:lstStyle/>
+          <a:p>
+            <a:pPr algn="ctr" defTabSz="430213">
+              <a:spcAft>
+                <a:spcPts val="400"/>
+              </a:spcAft>
+              <a:buSzPct val="100000"/>
+            </a:pPr>
+            <a:r>
+              <a:rPr lang="en-US" altLang="ko-KR" sz="1100" b="1" dirty="0">
+                <a:latin typeface="+mn-ea"/>
+                <a:cs typeface="HP Simplified" pitchFamily="34" charset="0"/>
+              </a:rPr>
+              <a:t>Commodity Servers</a:t>
+            </a:r>
+            <a:endParaRPr lang="en-US" sz="1100" b="1" dirty="0">
+              <a:latin typeface="+mn-ea"/>
+              <a:cs typeface="HP Simplified" pitchFamily="34" charset="0"/>
+            </a:endParaRPr>
+          </a:p>
+        </p:txBody>
+      </p:sp>
+      <p:sp>
+        <p:nvSpPr>
+          <p:cNvPr id="71" name="TextBox 70"/>
+          <p:cNvSpPr txBox="1"/>
+          <p:nvPr/>
+        </p:nvSpPr>
+        <p:spPr>
+          <a:xfrm>
+            <a:off x="6261500" y="5029076"/>
+            <a:ext cx="2643013" cy="707886"/>
+          </a:xfrm>
+          <a:prstGeom prst="rect">
+            <a:avLst/>
+          </a:prstGeom>
+          <a:noFill/>
+        </p:spPr>
+        <p:txBody>
+          <a:bodyPr wrap="square" rtlCol="0">
+            <a:spAutoFit/>
+          </a:bodyPr>
+          <a:lstStyle/>
+          <a:p>
+            <a:pPr marL="171450" indent="-171450" defTabSz="430213">
+              <a:lnSpc>
+                <a:spcPts val="1200"/>
+              </a:lnSpc>
+              <a:buSzPct val="100000"/>
+              <a:buFont typeface="Wingdings" pitchFamily="2" charset="2"/>
+              <a:buChar char="§"/>
+            </a:pPr>
+            <a:r>
+              <a:rPr lang="en-US" altLang="ko-KR" sz="1100" dirty="0">
+                <a:latin typeface="+mn-ea"/>
+                <a:cs typeface="HP Simplified" pitchFamily="34" charset="0"/>
+              </a:rPr>
+              <a:t>No specialized nodes</a:t>
+            </a:r>
+          </a:p>
+          <a:p>
+            <a:pPr marL="171450" indent="-171450" defTabSz="430213">
+              <a:lnSpc>
+                <a:spcPts val="1200"/>
+              </a:lnSpc>
+              <a:buSzPct val="100000"/>
+              <a:buFont typeface="Wingdings" pitchFamily="2" charset="2"/>
+              <a:buChar char="§"/>
+            </a:pPr>
+            <a:r>
+              <a:rPr lang="en-US" altLang="ko-KR" sz="1100" dirty="0">
+                <a:latin typeface="+mn-ea"/>
+                <a:cs typeface="HP Simplified" pitchFamily="34" charset="0"/>
+              </a:rPr>
+              <a:t>All nodes are peers</a:t>
+            </a:r>
+          </a:p>
+          <a:p>
+            <a:pPr marL="171450" indent="-171450" defTabSz="430213">
+              <a:lnSpc>
+                <a:spcPts val="1200"/>
+              </a:lnSpc>
+              <a:buSzPct val="100000"/>
+              <a:buFont typeface="Wingdings" pitchFamily="2" charset="2"/>
+              <a:buChar char="§"/>
+            </a:pPr>
+            <a:r>
+              <a:rPr lang="en-US" altLang="ko-KR" sz="1100" dirty="0">
+                <a:latin typeface="+mn-ea"/>
+                <a:cs typeface="HP Simplified" pitchFamily="34" charset="0"/>
+              </a:rPr>
+              <a:t>Query/Load to any node</a:t>
+            </a:r>
+          </a:p>
+          <a:p>
+            <a:pPr marL="171450" indent="-171450" defTabSz="430213">
+              <a:lnSpc>
+                <a:spcPts val="1200"/>
+              </a:lnSpc>
+              <a:buSzPct val="100000"/>
+              <a:buFont typeface="Wingdings" pitchFamily="2" charset="2"/>
+              <a:buChar char="§"/>
+            </a:pPr>
+            <a:r>
+              <a:rPr lang="en-US" altLang="ko-KR" sz="1100" dirty="0">
+                <a:latin typeface="+mn-ea"/>
+                <a:cs typeface="HP Simplified" pitchFamily="34" charset="0"/>
+              </a:rPr>
+              <a:t>Continuous/real-time load &amp; query</a:t>
+            </a:r>
+          </a:p>
+        </p:txBody>
+      </p:sp>
+      <p:sp>
+        <p:nvSpPr>
+          <p:cNvPr id="72" name="Rectangle 17"/>
+          <p:cNvSpPr/>
+          <p:nvPr/>
+        </p:nvSpPr>
+        <p:spPr>
+          <a:xfrm>
+            <a:off x="549144" y="3488085"/>
+            <a:ext cx="1082348" cy="338554"/>
+          </a:xfrm>
+          <a:prstGeom prst="rect">
+            <a:avLst/>
+          </a:prstGeom>
+        </p:spPr>
+        <p:txBody>
+          <a:bodyPr wrap="none">
+            <a:spAutoFit/>
+          </a:bodyPr>
+          <a:lstStyle/>
+          <a:p>
+            <a:pPr defTabSz="430213">
+              <a:spcAft>
+                <a:spcPts val="400"/>
+              </a:spcAft>
+              <a:buSzPct val="100000"/>
+            </a:pPr>
+            <a:r>
+              <a:rPr lang="en-US" sz="1600" b="1" dirty="0">
+                <a:latin typeface="+mn-ea"/>
+                <a:cs typeface="HP Simplified" pitchFamily="34" charset="0"/>
+              </a:rPr>
+              <a:t>VERTICA</a:t>
+            </a:r>
+          </a:p>
+        </p:txBody>
+      </p:sp>
+      <p:pic>
+        <p:nvPicPr>
+          <p:cNvPr id="89" name="Picture 2"/>
+          <p:cNvPicPr>
+            <a:picLocks noChangeAspect="1" noChangeArrowheads="1"/>
+          </p:cNvPicPr>
+          <p:nvPr/>
+        </p:nvPicPr>
+        <p:blipFill>
+          <a:blip r:embed="rId2" cstate="print"/>
+          <a:srcRect/>
+          <a:stretch>
+            <a:fillRect/>
+          </a:stretch>
+        </p:blipFill>
+        <p:spPr bwMode="auto">
+          <a:xfrm>
+            <a:off x="331393" y="6623929"/>
+            <a:ext cx="4850208" cy="2371302"/>
+          </a:xfrm>
+          <a:prstGeom prst="rect">
+            <a:avLst/>
+          </a:prstGeom>
+          <a:noFill/>
+          <a:ln w="9525">
+            <a:noFill/>
+            <a:miter lim="800000"/>
+            <a:headEnd/>
+            <a:tailEnd/>
+          </a:ln>
+          <a:effectLst/>
+        </p:spPr>
+      </p:pic>
+      <p:sp>
+        <p:nvSpPr>
+          <p:cNvPr id="90" name="내용 개체 틀 2"/>
+          <p:cNvSpPr txBox="1">
+            <a:spLocks/>
+          </p:cNvSpPr>
+          <p:nvPr/>
+        </p:nvSpPr>
+        <p:spPr bwMode="auto">
+          <a:xfrm>
+            <a:off x="5290203" y="7000393"/>
+            <a:ext cx="4275845" cy="1846659"/>
+          </a:xfrm>
+          <a:prstGeom prst="rect">
+            <a:avLst/>
+          </a:prstGeom>
+          <a:solidFill>
+            <a:schemeClr val="bg1"/>
+          </a:solidFill>
+          <a:ln w="9525">
+            <a:noFill/>
+            <a:miter lim="800000"/>
+            <a:headEnd/>
+            <a:tailEnd/>
+          </a:ln>
+        </p:spPr>
+        <p:txBody>
+          <a:bodyPr vert="horz" wrap="square" lIns="91440" tIns="45720" rIns="91440" bIns="45720" numCol="1" anchor="t" anchorCtr="0" compatLnSpc="1">
+            <a:prstTxWarp prst="textNoShape">
+              <a:avLst/>
+            </a:prstTxWarp>
+            <a:spAutoFit/>
+          </a:bodyPr>
+          <a:lstStyle/>
+          <a:p>
+            <a:pPr marL="0" lvl="1">
+              <a:lnSpc>
+                <a:spcPct val="200000"/>
+              </a:lnSpc>
+              <a:buClr>
+                <a:schemeClr val="tx2"/>
+              </a:buClr>
+              <a:defRPr/>
+            </a:pPr>
+            <a:r>
+              <a:rPr lang="ko-KR" altLang="en-US" sz="1000" b="1" kern="0" dirty="0">
+                <a:solidFill>
+                  <a:srgbClr val="0083CE"/>
+                </a:solidFill>
+                <a:latin typeface="+mn-ea"/>
+                <a:cs typeface="Pretendard Variable SemiBold" panose="02000003000000020004" pitchFamily="2" charset="-127"/>
+              </a:rPr>
+              <a:t>◆</a:t>
+            </a:r>
+            <a:r>
+              <a:rPr lang="ko-KR" altLang="en-US" sz="1100" b="1" kern="0" dirty="0">
+                <a:latin typeface="+mn-ea"/>
+                <a:cs typeface="Pretendard Variable SemiBold" panose="02000003000000020004" pitchFamily="2" charset="-127"/>
+              </a:rPr>
+              <a:t> 압축과 질의가 물리적인 </a:t>
+            </a:r>
+            <a:r>
+              <a:rPr lang="en-US" altLang="ko-KR" sz="1100" b="1" kern="0" dirty="0">
+                <a:latin typeface="+mn-ea"/>
+                <a:cs typeface="Pretendard Variable SemiBold" panose="02000003000000020004" pitchFamily="2" charset="-127"/>
+              </a:rPr>
+              <a:t>I/O </a:t>
+            </a:r>
+            <a:r>
+              <a:rPr lang="ko-KR" altLang="en-US" sz="1100" b="1" kern="0" dirty="0">
+                <a:latin typeface="+mn-ea"/>
+                <a:cs typeface="Pretendard Variable SemiBold" panose="02000003000000020004" pitchFamily="2" charset="-127"/>
+              </a:rPr>
+              <a:t>레벨부터 컬럼 단위로 처리</a:t>
+            </a:r>
+          </a:p>
+          <a:p>
+            <a:pPr marL="0" lvl="1">
+              <a:lnSpc>
+                <a:spcPct val="200000"/>
+              </a:lnSpc>
+              <a:buClr>
+                <a:schemeClr val="tx2"/>
+              </a:buClr>
+              <a:defRPr/>
+            </a:pPr>
+            <a:r>
+              <a:rPr lang="ko-KR" altLang="en-US" sz="1000" b="1" kern="0" dirty="0">
+                <a:solidFill>
+                  <a:srgbClr val="0083CE"/>
+                </a:solidFill>
+                <a:latin typeface="+mn-ea"/>
+                <a:cs typeface="Pretendard Variable SemiBold" panose="02000003000000020004" pitchFamily="2" charset="-127"/>
+              </a:rPr>
+              <a:t>◆</a:t>
+            </a:r>
+            <a:r>
+              <a:rPr lang="ko-KR" altLang="en-US" sz="1100" b="1" kern="0" dirty="0">
+                <a:latin typeface="+mn-ea"/>
+                <a:cs typeface="Pretendard Variable SemiBold" panose="02000003000000020004" pitchFamily="2" charset="-127"/>
+              </a:rPr>
+              <a:t> </a:t>
+            </a:r>
+            <a:r>
+              <a:rPr lang="ko-KR" altLang="en-US" sz="1100" b="1" kern="0" dirty="0" err="1">
+                <a:latin typeface="+mn-ea"/>
+                <a:cs typeface="Pretendard Variable SemiBold" panose="02000003000000020004" pitchFamily="2" charset="-127"/>
+              </a:rPr>
+              <a:t>컬럼</a:t>
+            </a:r>
+            <a:r>
+              <a:rPr lang="ko-KR" altLang="en-US" sz="1100" b="1" kern="0" dirty="0">
+                <a:latin typeface="+mn-ea"/>
+                <a:cs typeface="Pretendard Variable SemiBold" panose="02000003000000020004" pitchFamily="2" charset="-127"/>
+              </a:rPr>
+              <a:t> 기반 저장 기술에 맞는 쿼리 옵티마이저</a:t>
+            </a:r>
+          </a:p>
+          <a:p>
+            <a:pPr marL="0" lvl="1">
+              <a:lnSpc>
+                <a:spcPct val="200000"/>
+              </a:lnSpc>
+              <a:buClr>
+                <a:schemeClr val="tx2"/>
+              </a:buClr>
+              <a:defRPr/>
+            </a:pPr>
+            <a:r>
+              <a:rPr lang="ko-KR" altLang="en-US" sz="1000" b="1" kern="0" dirty="0">
+                <a:solidFill>
+                  <a:srgbClr val="0083CE"/>
+                </a:solidFill>
+                <a:latin typeface="+mn-ea"/>
+                <a:cs typeface="Pretendard Variable SemiBold" panose="02000003000000020004" pitchFamily="2" charset="-127"/>
+              </a:rPr>
+              <a:t>◆</a:t>
+            </a:r>
+            <a:r>
+              <a:rPr lang="ko-KR" altLang="en-US" sz="1100" b="1" kern="0" dirty="0">
+                <a:latin typeface="+mn-ea"/>
+                <a:cs typeface="Pretendard Variable SemiBold" panose="02000003000000020004" pitchFamily="2" charset="-127"/>
+              </a:rPr>
+              <a:t> </a:t>
+            </a:r>
+            <a:r>
+              <a:rPr lang="ko-KR" altLang="en-US" sz="1100" b="1" kern="0" dirty="0" err="1">
+                <a:latin typeface="+mn-ea"/>
+                <a:cs typeface="Pretendard Variable SemiBold" panose="02000003000000020004" pitchFamily="2" charset="-127"/>
+              </a:rPr>
+              <a:t>컬럼</a:t>
+            </a:r>
+            <a:r>
+              <a:rPr lang="ko-KR" altLang="en-US" sz="1100" b="1" kern="0" dirty="0">
+                <a:latin typeface="+mn-ea"/>
+                <a:cs typeface="Pretendard Variable SemiBold" panose="02000003000000020004" pitchFamily="2" charset="-127"/>
+              </a:rPr>
+              <a:t> 단위 저장</a:t>
+            </a:r>
+            <a:r>
+              <a:rPr lang="en-US" altLang="ko-KR" sz="1100" b="1" kern="0" dirty="0">
+                <a:latin typeface="+mn-ea"/>
+                <a:cs typeface="Pretendard Variable SemiBold" panose="02000003000000020004" pitchFamily="2" charset="-127"/>
+              </a:rPr>
+              <a:t>, </a:t>
+            </a:r>
+            <a:r>
+              <a:rPr lang="ko-KR" altLang="en-US" sz="1100" b="1" kern="0" dirty="0">
+                <a:latin typeface="+mn-ea"/>
+                <a:cs typeface="Pretendard Variable SemiBold" panose="02000003000000020004" pitchFamily="2" charset="-127"/>
+              </a:rPr>
+              <a:t>처리를 위한 별도의 옵션이나 절차가 불필요</a:t>
+            </a:r>
+          </a:p>
+          <a:p>
+            <a:pPr marL="0" lvl="1">
+              <a:lnSpc>
+                <a:spcPct val="200000"/>
+              </a:lnSpc>
+              <a:buClr>
+                <a:schemeClr val="tx2"/>
+              </a:buClr>
+              <a:defRPr/>
+            </a:pPr>
+            <a:r>
+              <a:rPr lang="ko-KR" altLang="en-US" sz="1000" b="1" kern="0" dirty="0">
+                <a:solidFill>
+                  <a:srgbClr val="0083CE"/>
+                </a:solidFill>
+                <a:latin typeface="+mn-ea"/>
+                <a:cs typeface="Pretendard Variable SemiBold" panose="02000003000000020004" pitchFamily="2" charset="-127"/>
+              </a:rPr>
+              <a:t>◆</a:t>
+            </a:r>
+            <a:r>
+              <a:rPr lang="ko-KR" altLang="en-US" sz="1100" b="1" kern="0" dirty="0">
+                <a:latin typeface="+mn-ea"/>
+                <a:cs typeface="Pretendard Variable SemiBold" panose="02000003000000020004" pitchFamily="2" charset="-127"/>
+              </a:rPr>
+              <a:t> </a:t>
+            </a:r>
+            <a:r>
+              <a:rPr lang="ko-KR" altLang="en-US" sz="1100" b="1" kern="0" dirty="0" err="1">
+                <a:latin typeface="+mn-ea"/>
+                <a:cs typeface="Pretendard Variable SemiBold" panose="02000003000000020004" pitchFamily="2" charset="-127"/>
+              </a:rPr>
+              <a:t>컬럼</a:t>
+            </a:r>
+            <a:r>
+              <a:rPr lang="ko-KR" altLang="en-US" sz="1100" b="1" kern="0" dirty="0">
+                <a:latin typeface="+mn-ea"/>
+                <a:cs typeface="Pretendard Variable SemiBold" panose="02000003000000020004" pitchFamily="2" charset="-127"/>
+              </a:rPr>
+              <a:t> 저장 구조에 최적화된 데이터 적재와 트랜잭션 처리</a:t>
+            </a:r>
+          </a:p>
+          <a:p>
+            <a:pPr marL="0" lvl="1">
+              <a:lnSpc>
+                <a:spcPct val="200000"/>
+              </a:lnSpc>
+              <a:buClr>
+                <a:schemeClr val="tx2"/>
+              </a:buClr>
+              <a:defRPr/>
+            </a:pPr>
+            <a:r>
+              <a:rPr lang="ko-KR" altLang="en-US" sz="1000" b="1" kern="0" dirty="0">
+                <a:solidFill>
+                  <a:srgbClr val="0083CE"/>
+                </a:solidFill>
+                <a:latin typeface="+mn-ea"/>
+                <a:cs typeface="Pretendard Variable SemiBold" panose="02000003000000020004" pitchFamily="2" charset="-127"/>
+              </a:rPr>
+              <a:t>◆</a:t>
+            </a:r>
+            <a:r>
+              <a:rPr lang="ko-KR" altLang="en-US" sz="1100" b="1" kern="0" dirty="0">
+                <a:latin typeface="+mn-ea"/>
+                <a:cs typeface="Pretendard Variable SemiBold" panose="02000003000000020004" pitchFamily="2" charset="-127"/>
+              </a:rPr>
+              <a:t> 적은 하드웨어 리소스로 다른 </a:t>
+            </a:r>
+            <a:r>
+              <a:rPr lang="en-US" altLang="ko-KR" sz="1100" b="1" kern="0" dirty="0">
+                <a:latin typeface="+mn-ea"/>
+                <a:cs typeface="Pretendard Variable SemiBold" panose="02000003000000020004" pitchFamily="2" charset="-127"/>
+              </a:rPr>
+              <a:t>DBMS</a:t>
+            </a:r>
+            <a:r>
+              <a:rPr lang="ko-KR" altLang="en-US" sz="1100" b="1" kern="0" dirty="0">
+                <a:latin typeface="+mn-ea"/>
+                <a:cs typeface="Pretendard Variable SemiBold" panose="02000003000000020004" pitchFamily="2" charset="-127"/>
+              </a:rPr>
+              <a:t>와 동일한 작업 수행</a:t>
+            </a:r>
+          </a:p>
+        </p:txBody>
+      </p:sp>
+      <p:sp>
+        <p:nvSpPr>
+          <p:cNvPr id="88" name="직사각형 87"/>
+          <p:cNvSpPr/>
+          <p:nvPr/>
+        </p:nvSpPr>
+        <p:spPr>
+          <a:xfrm>
+            <a:off x="282348" y="5751289"/>
+            <a:ext cx="9312729" cy="1320800"/>
+          </a:xfrm>
+          <a:prstGeom prst="rect">
+            <a:avLst/>
+          </a:prstGeom>
+          <a:noFill/>
+          <a:ln>
+            <a:noFill/>
+          </a:ln>
+        </p:spPr>
+        <p:style>
+          <a:lnRef idx="2">
+            <a:schemeClr val="accent1">
+              <a:shade val="50000"/>
+            </a:schemeClr>
+          </a:lnRef>
+          <a:fillRef idx="1">
+            <a:schemeClr val="accent1"/>
+          </a:fillRef>
+          <a:effectRef idx="0">
+            <a:schemeClr val="accent1"/>
+          </a:effectRef>
+          <a:fontRef idx="minor">
+            <a:schemeClr val="lt1"/>
+          </a:fontRef>
+        </p:style>
+        <p:txBody>
+          <a:bodyPr rtlCol="0" anchor="ctr"/>
+          <a:lstStyle/>
+          <a:p>
+            <a:r>
+              <a:rPr lang="en-US" altLang="ko-KR" sz="1600" b="1" dirty="0" smtClean="0">
+                <a:solidFill>
+                  <a:schemeClr val="tx1"/>
+                </a:solidFill>
+                <a:latin typeface="+mn-ea"/>
+              </a:rPr>
+              <a:t>Native Columnar</a:t>
+            </a:r>
+            <a:br>
+              <a:rPr lang="en-US" altLang="ko-KR" sz="1600" b="1" dirty="0" smtClean="0">
+                <a:solidFill>
+                  <a:schemeClr val="tx1"/>
+                </a:solidFill>
+                <a:latin typeface="+mn-ea"/>
+              </a:rPr>
+            </a:br>
+            <a:r>
+              <a:rPr lang="ko-KR" altLang="en-US" sz="1400" dirty="0">
+                <a:solidFill>
+                  <a:schemeClr val="tx1"/>
+                </a:solidFill>
+                <a:latin typeface="+mn-ea"/>
+              </a:rPr>
+              <a:t>대용량 데이터를 관리하는 </a:t>
+            </a:r>
+            <a:r>
+              <a:rPr lang="en-US" altLang="ko-KR" sz="1400" dirty="0">
+                <a:solidFill>
+                  <a:schemeClr val="tx1"/>
+                </a:solidFill>
+                <a:latin typeface="+mn-ea"/>
+              </a:rPr>
+              <a:t>DW </a:t>
+            </a:r>
+            <a:r>
+              <a:rPr lang="ko-KR" altLang="en-US" sz="1400" dirty="0">
+                <a:solidFill>
+                  <a:schemeClr val="tx1"/>
+                </a:solidFill>
+                <a:latin typeface="+mn-ea"/>
+              </a:rPr>
+              <a:t>데이터베이스의 성능은 </a:t>
+            </a:r>
+            <a:r>
+              <a:rPr lang="en-US" altLang="ko-KR" sz="1400" dirty="0">
+                <a:solidFill>
+                  <a:schemeClr val="tx1"/>
+                </a:solidFill>
+                <a:latin typeface="+mn-ea"/>
+              </a:rPr>
+              <a:t>I/O</a:t>
+            </a:r>
+            <a:r>
+              <a:rPr lang="ko-KR" altLang="en-US" sz="1400" dirty="0">
+                <a:solidFill>
+                  <a:schemeClr val="tx1"/>
+                </a:solidFill>
+                <a:latin typeface="+mn-ea"/>
+              </a:rPr>
+              <a:t>를 얼마나 줄일 수 있느냐에 달려 있습니다</a:t>
+            </a:r>
+            <a:r>
+              <a:rPr lang="en-US" altLang="ko-KR" sz="1400" dirty="0">
+                <a:solidFill>
+                  <a:schemeClr val="tx1"/>
+                </a:solidFill>
+                <a:latin typeface="+mn-ea"/>
+              </a:rPr>
+              <a:t>. </a:t>
+            </a:r>
+          </a:p>
+          <a:p>
+            <a:r>
+              <a:rPr lang="en-US" altLang="ko-KR" sz="1400" dirty="0" err="1">
+                <a:solidFill>
+                  <a:schemeClr val="tx1"/>
+                </a:solidFill>
+                <a:latin typeface="+mn-ea"/>
+              </a:rPr>
+              <a:t>Vertica</a:t>
+            </a:r>
+            <a:r>
+              <a:rPr lang="en-US" altLang="ko-KR" sz="1400" dirty="0">
+                <a:solidFill>
+                  <a:schemeClr val="tx1"/>
+                </a:solidFill>
+                <a:latin typeface="+mn-ea"/>
+              </a:rPr>
+              <a:t> </a:t>
+            </a:r>
+            <a:r>
+              <a:rPr lang="ko-KR" altLang="en-US" sz="1400" dirty="0">
+                <a:solidFill>
+                  <a:schemeClr val="tx1"/>
+                </a:solidFill>
+                <a:latin typeface="+mn-ea"/>
+              </a:rPr>
+              <a:t>의 </a:t>
+            </a:r>
+            <a:r>
+              <a:rPr lang="en-US" altLang="ko-KR" sz="1400" dirty="0">
+                <a:solidFill>
+                  <a:schemeClr val="tx1"/>
+                </a:solidFill>
+                <a:latin typeface="+mn-ea"/>
+              </a:rPr>
+              <a:t>Columnar DBMS </a:t>
+            </a:r>
+            <a:r>
+              <a:rPr lang="ko-KR" altLang="en-US" sz="1400" dirty="0">
+                <a:solidFill>
+                  <a:schemeClr val="tx1"/>
+                </a:solidFill>
+                <a:latin typeface="+mn-ea"/>
+              </a:rPr>
+              <a:t>아키텍처는 </a:t>
+            </a:r>
+            <a:r>
+              <a:rPr lang="en-US" altLang="ko-KR" sz="1400" dirty="0">
+                <a:solidFill>
+                  <a:schemeClr val="tx1"/>
+                </a:solidFill>
+                <a:latin typeface="+mn-ea"/>
+              </a:rPr>
+              <a:t>Query </a:t>
+            </a:r>
+            <a:r>
+              <a:rPr lang="ko-KR" altLang="en-US" sz="1400" dirty="0">
+                <a:solidFill>
+                  <a:schemeClr val="tx1"/>
+                </a:solidFill>
+                <a:latin typeface="+mn-ea"/>
+              </a:rPr>
+              <a:t>수행에 필요한 </a:t>
+            </a:r>
+            <a:r>
+              <a:rPr lang="en-US" altLang="ko-KR" sz="1400" dirty="0">
+                <a:solidFill>
+                  <a:schemeClr val="tx1"/>
+                </a:solidFill>
+                <a:latin typeface="+mn-ea"/>
+              </a:rPr>
+              <a:t>Column </a:t>
+            </a:r>
+            <a:r>
+              <a:rPr lang="ko-KR" altLang="en-US" sz="1400" dirty="0">
+                <a:solidFill>
+                  <a:schemeClr val="tx1"/>
+                </a:solidFill>
+                <a:latin typeface="+mn-ea"/>
+              </a:rPr>
+              <a:t>만을 읽어 올 수 있도록 설계되었기 때문에</a:t>
+            </a:r>
+            <a:r>
+              <a:rPr lang="en-US" altLang="ko-KR" sz="1400" dirty="0">
+                <a:solidFill>
+                  <a:schemeClr val="tx1"/>
+                </a:solidFill>
+                <a:latin typeface="+mn-ea"/>
+              </a:rPr>
+              <a:t>, Query </a:t>
+            </a:r>
+            <a:r>
+              <a:rPr lang="ko-KR" altLang="en-US" sz="1400" dirty="0">
+                <a:solidFill>
+                  <a:schemeClr val="tx1"/>
+                </a:solidFill>
+                <a:latin typeface="+mn-ea"/>
+              </a:rPr>
+              <a:t>시 마다 모든</a:t>
+            </a:r>
+            <a:r>
+              <a:rPr lang="en-US" altLang="ko-KR" sz="1400" dirty="0">
+                <a:solidFill>
+                  <a:schemeClr val="tx1"/>
+                </a:solidFill>
+                <a:latin typeface="+mn-ea"/>
+              </a:rPr>
+              <a:t>` </a:t>
+            </a:r>
+            <a:r>
+              <a:rPr lang="ko-KR" altLang="en-US" sz="1400" dirty="0">
+                <a:solidFill>
+                  <a:schemeClr val="tx1"/>
+                </a:solidFill>
+                <a:latin typeface="+mn-ea"/>
+              </a:rPr>
+              <a:t>열을 읽어와야 하는 </a:t>
+            </a:r>
+            <a:r>
+              <a:rPr lang="en-US" altLang="ko-KR" sz="1400" dirty="0">
+                <a:solidFill>
+                  <a:schemeClr val="tx1"/>
+                </a:solidFill>
+                <a:latin typeface="+mn-ea"/>
+              </a:rPr>
+              <a:t>row </a:t>
+            </a:r>
+            <a:r>
+              <a:rPr lang="ko-KR" altLang="en-US" sz="1400" dirty="0">
+                <a:solidFill>
+                  <a:schemeClr val="tx1"/>
+                </a:solidFill>
+                <a:latin typeface="+mn-ea"/>
+              </a:rPr>
+              <a:t>기반 </a:t>
+            </a:r>
+            <a:r>
+              <a:rPr lang="en-US" altLang="ko-KR" sz="1400" dirty="0">
+                <a:solidFill>
+                  <a:schemeClr val="tx1"/>
+                </a:solidFill>
+                <a:latin typeface="+mn-ea"/>
+              </a:rPr>
+              <a:t>DBMS</a:t>
+            </a:r>
+            <a:r>
+              <a:rPr lang="ko-KR" altLang="en-US" sz="1400" dirty="0">
+                <a:solidFill>
+                  <a:schemeClr val="tx1"/>
+                </a:solidFill>
+                <a:latin typeface="+mn-ea"/>
+              </a:rPr>
+              <a:t>와 비교하여 </a:t>
+            </a:r>
+            <a:r>
+              <a:rPr lang="en-US" altLang="ko-KR" sz="1400" dirty="0">
+                <a:solidFill>
+                  <a:schemeClr val="tx1"/>
+                </a:solidFill>
+                <a:latin typeface="+mn-ea"/>
+              </a:rPr>
+              <a:t>I/O </a:t>
+            </a:r>
+            <a:r>
+              <a:rPr lang="ko-KR" altLang="en-US" sz="1400" dirty="0">
+                <a:solidFill>
+                  <a:schemeClr val="tx1"/>
+                </a:solidFill>
+                <a:latin typeface="+mn-ea"/>
+              </a:rPr>
+              <a:t>발생량을 획기적으로 감소시킬 수 있습니다</a:t>
+            </a:r>
+            <a:r>
+              <a:rPr lang="en-US" altLang="ko-KR" sz="1400" dirty="0">
+                <a:solidFill>
+                  <a:schemeClr val="tx1"/>
+                </a:solidFill>
+                <a:latin typeface="+mn-ea"/>
+              </a:rPr>
+              <a:t>.</a:t>
+            </a:r>
+          </a:p>
+          <a:p>
+            <a:endParaRPr lang="en-US" altLang="ko-KR" sz="1400" dirty="0">
+              <a:solidFill>
+                <a:schemeClr val="tx1"/>
+              </a:solidFill>
+              <a:latin typeface="+mn-ea"/>
+            </a:endParaRPr>
+          </a:p>
+        </p:txBody>
+      </p:sp>
+      <p:cxnSp>
+        <p:nvCxnSpPr>
+          <p:cNvPr id="91" name="직선 연결선 90"/>
+          <p:cNvCxnSpPr/>
+          <p:nvPr/>
+        </p:nvCxnSpPr>
+        <p:spPr>
+          <a:xfrm flipV="1">
+            <a:off x="215900" y="469900"/>
+            <a:ext cx="9156700" cy="0"/>
+          </a:xfrm>
+          <a:prstGeom prst="line">
+            <a:avLst/>
+          </a:prstGeom>
+          <a:ln w="19050">
+            <a:solidFill>
+              <a:schemeClr val="accent1"/>
+            </a:solidFill>
+          </a:ln>
+        </p:spPr>
+        <p:style>
+          <a:lnRef idx="1">
+            <a:schemeClr val="accent1"/>
+          </a:lnRef>
+          <a:fillRef idx="0">
+            <a:schemeClr val="accent1"/>
+          </a:fillRef>
+          <a:effectRef idx="0">
+            <a:schemeClr val="accent1"/>
+          </a:effectRef>
+          <a:fontRef idx="minor">
+            <a:schemeClr val="tx1"/>
+          </a:fontRef>
+        </p:style>
+      </p:cxnSp>
+      <p:sp>
+        <p:nvSpPr>
+          <p:cNvPr id="92" name="직사각형 91"/>
+          <p:cNvSpPr/>
+          <p:nvPr/>
+        </p:nvSpPr>
+        <p:spPr>
+          <a:xfrm>
+            <a:off x="331334" y="2354946"/>
+            <a:ext cx="9312729" cy="1084940"/>
+          </a:xfrm>
+          <a:prstGeom prst="rect">
+            <a:avLst/>
+          </a:prstGeom>
+          <a:noFill/>
+          <a:ln>
+            <a:noFill/>
+          </a:ln>
+        </p:spPr>
+        <p:style>
+          <a:lnRef idx="2">
+            <a:schemeClr val="accent1">
+              <a:shade val="50000"/>
+            </a:schemeClr>
+          </a:lnRef>
+          <a:fillRef idx="1">
+            <a:schemeClr val="accent1"/>
+          </a:fillRef>
+          <a:effectRef idx="0">
+            <a:schemeClr val="accent1"/>
+          </a:effectRef>
+          <a:fontRef idx="minor">
+            <a:schemeClr val="lt1"/>
+          </a:fontRef>
+        </p:style>
+        <p:txBody>
+          <a:bodyPr rtlCol="0" anchor="ctr"/>
+          <a:lstStyle/>
+          <a:p>
+            <a:pPr marL="285750" indent="-285750">
+              <a:buFont typeface="Arial" panose="020B0604020202020204" pitchFamily="34" charset="0"/>
+              <a:buChar char="•"/>
+            </a:pPr>
+            <a:r>
+              <a:rPr lang="ko-KR" altLang="en-US" sz="1200" dirty="0">
+                <a:solidFill>
+                  <a:schemeClr val="tx1"/>
+                </a:solidFill>
+                <a:latin typeface="+mn-ea"/>
+              </a:rPr>
+              <a:t>두 종류 이상의 서버</a:t>
+            </a:r>
+          </a:p>
+          <a:p>
+            <a:pPr marL="285750" indent="-285750">
+              <a:buFont typeface="Arial" panose="020B0604020202020204" pitchFamily="34" charset="0"/>
+              <a:buChar char="•"/>
+            </a:pPr>
+            <a:r>
+              <a:rPr lang="ko-KR" altLang="en-US" sz="1200" dirty="0">
+                <a:solidFill>
+                  <a:schemeClr val="tx1"/>
+                </a:solidFill>
+                <a:latin typeface="+mn-ea"/>
+              </a:rPr>
+              <a:t>특별한 </a:t>
+            </a:r>
+            <a:r>
+              <a:rPr lang="en-US" altLang="ko-KR" sz="1200" dirty="0">
+                <a:solidFill>
+                  <a:schemeClr val="tx1"/>
+                </a:solidFill>
+                <a:latin typeface="+mn-ea"/>
+              </a:rPr>
+              <a:t>H/W </a:t>
+            </a:r>
+            <a:r>
+              <a:rPr lang="ko-KR" altLang="en-US" sz="1200" dirty="0">
+                <a:solidFill>
+                  <a:schemeClr val="tx1"/>
+                </a:solidFill>
+                <a:latin typeface="+mn-ea"/>
+              </a:rPr>
+              <a:t>사용으로 복잡도 증가</a:t>
+            </a:r>
+          </a:p>
+          <a:p>
+            <a:pPr marL="285750" indent="-285750">
+              <a:buFont typeface="Arial" panose="020B0604020202020204" pitchFamily="34" charset="0"/>
+              <a:buChar char="•"/>
+            </a:pPr>
+            <a:r>
+              <a:rPr lang="ko-KR" altLang="en-US" sz="1200" dirty="0">
+                <a:solidFill>
+                  <a:schemeClr val="tx1"/>
+                </a:solidFill>
+                <a:latin typeface="+mn-ea"/>
+              </a:rPr>
+              <a:t>마스터 서버를 통한 작업 수행</a:t>
+            </a:r>
+          </a:p>
+          <a:p>
+            <a:pPr marL="285750" indent="-285750">
+              <a:buFont typeface="Arial" panose="020B0604020202020204" pitchFamily="34" charset="0"/>
+              <a:buChar char="•"/>
+            </a:pPr>
+            <a:r>
+              <a:rPr lang="ko-KR" altLang="en-US" sz="1200" dirty="0">
+                <a:solidFill>
+                  <a:schemeClr val="tx1"/>
+                </a:solidFill>
+                <a:latin typeface="+mn-ea"/>
+              </a:rPr>
+              <a:t>저가형 서버 사용</a:t>
+            </a:r>
+          </a:p>
+          <a:p>
+            <a:pPr marL="285750" indent="-285750">
+              <a:buFont typeface="Arial" panose="020B0604020202020204" pitchFamily="34" charset="0"/>
+              <a:buChar char="•"/>
+            </a:pPr>
+            <a:r>
+              <a:rPr lang="ko-KR" altLang="en-US" sz="1200" dirty="0">
+                <a:solidFill>
+                  <a:schemeClr val="tx1"/>
+                </a:solidFill>
+                <a:latin typeface="+mn-ea"/>
+              </a:rPr>
+              <a:t>관리</a:t>
+            </a:r>
+            <a:r>
+              <a:rPr lang="en-US" altLang="ko-KR" sz="1200" dirty="0">
+                <a:solidFill>
+                  <a:schemeClr val="tx1"/>
+                </a:solidFill>
+                <a:latin typeface="+mn-ea"/>
+              </a:rPr>
+              <a:t>/</a:t>
+            </a:r>
+            <a:r>
+              <a:rPr lang="ko-KR" altLang="en-US" sz="1200" dirty="0">
+                <a:solidFill>
+                  <a:schemeClr val="tx1"/>
+                </a:solidFill>
+                <a:latin typeface="+mn-ea"/>
+              </a:rPr>
+              <a:t>운영에 다양한 고려사항 존재</a:t>
+            </a:r>
+            <a:endParaRPr lang="en-US" altLang="ko-KR" sz="1100" dirty="0">
+              <a:solidFill>
+                <a:schemeClr val="tx1"/>
+              </a:solidFill>
+              <a:latin typeface="+mn-ea"/>
+            </a:endParaRPr>
+          </a:p>
+        </p:txBody>
+      </p:sp>
+      <p:sp>
+        <p:nvSpPr>
+          <p:cNvPr id="93" name="직사각형 92"/>
+          <p:cNvSpPr/>
+          <p:nvPr/>
+        </p:nvSpPr>
+        <p:spPr>
+          <a:xfrm>
+            <a:off x="320449" y="3955146"/>
+            <a:ext cx="9312729" cy="1084940"/>
+          </a:xfrm>
+          <a:prstGeom prst="rect">
+            <a:avLst/>
+          </a:prstGeom>
+          <a:noFill/>
+          <a:ln>
+            <a:noFill/>
+          </a:ln>
+        </p:spPr>
+        <p:style>
+          <a:lnRef idx="2">
+            <a:schemeClr val="accent1">
+              <a:shade val="50000"/>
+            </a:schemeClr>
+          </a:lnRef>
+          <a:fillRef idx="1">
+            <a:schemeClr val="accent1"/>
+          </a:fillRef>
+          <a:effectRef idx="0">
+            <a:schemeClr val="accent1"/>
+          </a:effectRef>
+          <a:fontRef idx="minor">
+            <a:schemeClr val="lt1"/>
+          </a:fontRef>
+        </p:style>
+        <p:txBody>
+          <a:bodyPr rtlCol="0" anchor="ctr"/>
+          <a:lstStyle/>
+          <a:p>
+            <a:pPr marL="285750" indent="-285750">
+              <a:buFont typeface="Arial" panose="020B0604020202020204" pitchFamily="34" charset="0"/>
+              <a:buChar char="•"/>
+            </a:pPr>
+            <a:r>
+              <a:rPr lang="ko-KR" altLang="en-US" sz="1200" dirty="0">
+                <a:solidFill>
+                  <a:schemeClr val="tx1"/>
+                </a:solidFill>
+                <a:latin typeface="+mn-ea"/>
+              </a:rPr>
+              <a:t>동일 </a:t>
+            </a:r>
+            <a:r>
+              <a:rPr lang="ko-KR" altLang="en-US" sz="1200" dirty="0" err="1">
+                <a:solidFill>
+                  <a:schemeClr val="tx1"/>
+                </a:solidFill>
+                <a:latin typeface="+mn-ea"/>
+              </a:rPr>
+              <a:t>스펙</a:t>
+            </a:r>
+            <a:r>
+              <a:rPr lang="ko-KR" altLang="en-US" sz="1200" dirty="0">
+                <a:solidFill>
+                  <a:schemeClr val="tx1"/>
+                </a:solidFill>
+                <a:latin typeface="+mn-ea"/>
+              </a:rPr>
+              <a:t> </a:t>
+            </a:r>
+            <a:r>
+              <a:rPr lang="en-US" altLang="ko-KR" sz="1200" dirty="0">
+                <a:solidFill>
+                  <a:schemeClr val="tx1"/>
+                </a:solidFill>
+                <a:latin typeface="+mn-ea"/>
+              </a:rPr>
+              <a:t>/ </a:t>
+            </a:r>
+            <a:r>
+              <a:rPr lang="ko-KR" altLang="en-US" sz="1200" dirty="0">
+                <a:solidFill>
+                  <a:schemeClr val="tx1"/>
+                </a:solidFill>
+                <a:latin typeface="+mn-ea"/>
+              </a:rPr>
+              <a:t>동일 구성의 서버</a:t>
+            </a:r>
+          </a:p>
+          <a:p>
+            <a:pPr marL="285750" indent="-285750">
+              <a:buFont typeface="Arial" panose="020B0604020202020204" pitchFamily="34" charset="0"/>
+              <a:buChar char="•"/>
+            </a:pPr>
+            <a:r>
+              <a:rPr lang="ko-KR" altLang="en-US" sz="1200" dirty="0">
+                <a:solidFill>
+                  <a:schemeClr val="tx1"/>
+                </a:solidFill>
+                <a:latin typeface="+mn-ea"/>
+              </a:rPr>
+              <a:t>단순한 구성</a:t>
+            </a:r>
+          </a:p>
+          <a:p>
+            <a:pPr marL="285750" indent="-285750">
+              <a:buFont typeface="Arial" panose="020B0604020202020204" pitchFamily="34" charset="0"/>
+              <a:buChar char="•"/>
+            </a:pPr>
+            <a:r>
+              <a:rPr lang="ko-KR" altLang="en-US" sz="1200" dirty="0">
+                <a:solidFill>
+                  <a:schemeClr val="tx1"/>
+                </a:solidFill>
+                <a:latin typeface="+mn-ea"/>
+              </a:rPr>
+              <a:t>아무 서버에나 작업을 요청하면 전 </a:t>
+            </a:r>
+            <a:r>
+              <a:rPr lang="ko-KR" altLang="en-US" sz="1200" dirty="0" err="1">
+                <a:solidFill>
+                  <a:schemeClr val="tx1"/>
+                </a:solidFill>
+                <a:latin typeface="+mn-ea"/>
+              </a:rPr>
+              <a:t>노드가</a:t>
+            </a:r>
+            <a:r>
+              <a:rPr lang="ko-KR" altLang="en-US" sz="1200" dirty="0">
+                <a:solidFill>
+                  <a:schemeClr val="tx1"/>
+                </a:solidFill>
+                <a:latin typeface="+mn-ea"/>
+              </a:rPr>
+              <a:t> 병렬 수행</a:t>
+            </a:r>
+          </a:p>
+          <a:p>
+            <a:pPr marL="285750" indent="-285750">
+              <a:buFont typeface="Arial" panose="020B0604020202020204" pitchFamily="34" charset="0"/>
+              <a:buChar char="•"/>
+            </a:pPr>
+            <a:r>
+              <a:rPr lang="ko-KR" altLang="en-US" sz="1200" dirty="0">
+                <a:solidFill>
+                  <a:schemeClr val="tx1"/>
+                </a:solidFill>
+                <a:latin typeface="+mn-ea"/>
+              </a:rPr>
+              <a:t>시장의 신뢰도를 확보한 서버 사용</a:t>
+            </a:r>
+          </a:p>
+          <a:p>
+            <a:pPr marL="285750" indent="-285750">
+              <a:buFont typeface="Arial" panose="020B0604020202020204" pitchFamily="34" charset="0"/>
+              <a:buChar char="•"/>
+            </a:pPr>
+            <a:r>
+              <a:rPr lang="ko-KR" altLang="en-US" sz="1200" dirty="0">
+                <a:solidFill>
+                  <a:schemeClr val="tx1"/>
+                </a:solidFill>
+                <a:latin typeface="+mn-ea"/>
+              </a:rPr>
+              <a:t>관리 및 사용 용이성 확보</a:t>
+            </a:r>
+            <a:endParaRPr lang="en-US" altLang="ko-KR" sz="1100" dirty="0">
+              <a:solidFill>
+                <a:schemeClr val="tx1"/>
+              </a:solidFill>
+              <a:latin typeface="+mn-ea"/>
+            </a:endParaRPr>
+          </a:p>
+        </p:txBody>
+      </p:sp>
+    </p:spTree>
+    <p:extLst>
+      <p:ext uri="{BB962C8B-B14F-4D97-AF65-F5344CB8AC3E}">
+        <p14:creationId xmlns:p14="http://schemas.microsoft.com/office/powerpoint/2010/main" val="844736661"/>
+      </p:ext>
+    </p:extLst>
+  </p:cSld>
+  <p:clrMapOvr>
+    <a:masterClrMapping/>
+  </p:clrMapOvr>
+  <p:timing>
+    <p:tnLst>
+      <p:par>
+        <p:cTn id="1" dur="indefinite" restart="never" nodeType="tmRoot"/>
+      </p:par>
+    </p:tnLst>
+  </p:timing>
+</p:sld>
+</file>
+
+<file path=ppt/slides/slide6.xml><?xml version="1.0" encoding="utf-8"?>
+<p:sld xmlns:a="http://schemas.openxmlformats.org/drawingml/2006/main" xmlns:r="http://schemas.openxmlformats.org/officeDocument/2006/relationships" xmlns:p="http://schemas.openxmlformats.org/presentationml/2006/main">
+  <p:cSld>
+    <p:spTree>
+      <p:nvGrpSpPr>
+        <p:cNvPr id="1" name=""/>
+        <p:cNvGrpSpPr/>
+        <p:nvPr/>
+      </p:nvGrpSpPr>
+      <p:grpSpPr>
+        <a:xfrm>
+          <a:off x="0" y="0"/>
+          <a:ext cx="0" cy="0"/>
+          <a:chOff x="0" y="0"/>
+          <a:chExt cx="0" cy="0"/>
+        </a:xfrm>
+      </p:grpSpPr>
+      <p:sp>
+        <p:nvSpPr>
           <p:cNvPr id="90" name="직사각형 89"/>
           <p:cNvSpPr/>
           <p:nvPr/>
@@ -20566,7 +24221,7 @@
 </p:sld>
 </file>
 
-<file path=ppt/slides/slide6.xml><?xml version="1.0" encoding="utf-8"?>
+<file path=ppt/slides/slide7.xml><?xml version="1.0" encoding="utf-8"?>
 <p:sld xmlns:a="http://schemas.openxmlformats.org/drawingml/2006/main" xmlns:r="http://schemas.openxmlformats.org/officeDocument/2006/relationships" xmlns:p="http://schemas.openxmlformats.org/presentationml/2006/main">
   <p:cSld>
     <p:spTree>

--- a/99ref/blog.pptx
+++ b/99ref/blog.pptx
@@ -8,10 +8,9 @@
     <p:sldId id="261" r:id="rId2"/>
     <p:sldId id="256" r:id="rId3"/>
     <p:sldId id="257" r:id="rId4"/>
-    <p:sldId id="258" r:id="rId5"/>
-    <p:sldId id="262" r:id="rId6"/>
-    <p:sldId id="259" r:id="rId7"/>
-    <p:sldId id="260" r:id="rId8"/>
+    <p:sldId id="262" r:id="rId5"/>
+    <p:sldId id="259" r:id="rId6"/>
+    <p:sldId id="260" r:id="rId7"/>
   </p:sldIdLst>
   <p:sldSz cx="9720263" cy="8999538"/>
   <p:notesSz cx="6858000" cy="9144000"/>
@@ -16046,7 +16045,7 @@
         </p:nvSpPr>
         <p:spPr>
           <a:xfrm>
-            <a:off x="407534" y="785585"/>
+            <a:off x="168047" y="633183"/>
             <a:ext cx="9312729" cy="1054100"/>
           </a:xfrm>
           <a:prstGeom prst="rect">
@@ -16078,7 +16077,7 @@
           <a:lstStyle/>
           <a:p>
             <a:r>
-              <a:rPr lang="en-US" altLang="ko-KR" sz="1600" b="1" dirty="0" smtClean="0">
+              <a:rPr lang="en-US" altLang="ko-KR" sz="1400" b="1" dirty="0" smtClean="0">
                 <a:solidFill>
                   <a:schemeClr val="tx1"/>
                 </a:solidFill>
@@ -16087,7 +16086,7 @@
               <a:t>Pure-MPP (Massively Parallel Processing)</a:t>
             </a:r>
             <a:br>
-              <a:rPr lang="en-US" altLang="ko-KR" sz="1600" b="1" dirty="0" smtClean="0">
+              <a:rPr lang="en-US" altLang="ko-KR" sz="1400" b="1" dirty="0" smtClean="0">
                 <a:solidFill>
                   <a:schemeClr val="tx1"/>
                 </a:solidFill>
@@ -16095,7 +16094,7 @@
               </a:rPr>
             </a:br>
             <a:r>
-              <a:rPr lang="en-US" altLang="ko-KR" sz="1400" dirty="0" err="1">
+              <a:rPr lang="en-US" altLang="ko-KR" sz="1200" dirty="0" err="1">
                 <a:solidFill>
                   <a:schemeClr val="tx1"/>
                 </a:solidFill>
@@ -16104,7 +16103,7 @@
               <a:t>Vertica</a:t>
             </a:r>
             <a:r>
-              <a:rPr lang="ko-KR" altLang="en-US" sz="1400" dirty="0">
+              <a:rPr lang="ko-KR" altLang="en-US" sz="1200" dirty="0">
                 <a:solidFill>
                   <a:schemeClr val="tx1"/>
                 </a:solidFill>
@@ -16113,7 +16112,7 @@
               <a:t>는 별도의 마스터 </a:t>
             </a:r>
             <a:r>
-              <a:rPr lang="ko-KR" altLang="en-US" sz="1400" dirty="0" err="1">
+              <a:rPr lang="ko-KR" altLang="en-US" sz="1200" dirty="0" err="1">
                 <a:solidFill>
                   <a:schemeClr val="tx1"/>
                 </a:solidFill>
@@ -16122,7 +16121,7 @@
               <a:t>노드를</a:t>
             </a:r>
             <a:r>
-              <a:rPr lang="ko-KR" altLang="en-US" sz="1400" dirty="0">
+              <a:rPr lang="ko-KR" altLang="en-US" sz="1200" dirty="0">
                 <a:solidFill>
                   <a:schemeClr val="tx1"/>
                 </a:solidFill>
@@ -16131,7 +16130,7 @@
               <a:t> 분리하지 않고 모든 </a:t>
             </a:r>
             <a:r>
-              <a:rPr lang="ko-KR" altLang="en-US" sz="1400" dirty="0" err="1">
+              <a:rPr lang="ko-KR" altLang="en-US" sz="1200" dirty="0" err="1">
                 <a:solidFill>
                   <a:schemeClr val="tx1"/>
                 </a:solidFill>
@@ -16140,7 +16139,7 @@
               <a:t>노드가</a:t>
             </a:r>
             <a:r>
-              <a:rPr lang="ko-KR" altLang="en-US" sz="1400" dirty="0">
+              <a:rPr lang="ko-KR" altLang="en-US" sz="1200" dirty="0">
                 <a:solidFill>
                   <a:schemeClr val="tx1"/>
                 </a:solidFill>
@@ -16149,7 +16148,7 @@
               <a:t> 동일한 역할을 수행하는 </a:t>
             </a:r>
             <a:r>
-              <a:rPr lang="en-US" altLang="ko-KR" sz="1400" dirty="0">
+              <a:rPr lang="en-US" altLang="ko-KR" sz="1200" dirty="0">
                 <a:solidFill>
                   <a:schemeClr val="tx1"/>
                 </a:solidFill>
@@ -16158,7 +16157,7 @@
               <a:t>pure-MPP </a:t>
             </a:r>
             <a:r>
-              <a:rPr lang="ko-KR" altLang="en-US" sz="1400" dirty="0">
+              <a:rPr lang="ko-KR" altLang="en-US" sz="1200" dirty="0">
                 <a:solidFill>
                   <a:schemeClr val="tx1"/>
                 </a:solidFill>
@@ -16167,7 +16166,7 @@
               <a:t>구조입니다</a:t>
             </a:r>
             <a:r>
-              <a:rPr lang="en-US" altLang="ko-KR" sz="1400" dirty="0">
+              <a:rPr lang="en-US" altLang="ko-KR" sz="1200" dirty="0">
                 <a:solidFill>
                   <a:schemeClr val="tx1"/>
                 </a:solidFill>
@@ -16178,7 +16177,7 @@
           </a:p>
           <a:p>
             <a:r>
-              <a:rPr lang="ko-KR" altLang="en-US" sz="1400" dirty="0">
+              <a:rPr lang="ko-KR" altLang="en-US" sz="1200" dirty="0">
                 <a:solidFill>
                   <a:schemeClr val="tx1"/>
                 </a:solidFill>
@@ -16187,7 +16186,7 @@
               <a:t>또한 클러스터 구성이나 </a:t>
             </a:r>
             <a:r>
-              <a:rPr lang="ko-KR" altLang="en-US" sz="1400" dirty="0" err="1">
+              <a:rPr lang="ko-KR" altLang="en-US" sz="1200" dirty="0" err="1">
                 <a:solidFill>
                   <a:schemeClr val="tx1"/>
                 </a:solidFill>
@@ -16196,7 +16195,7 @@
               <a:t>노드</a:t>
             </a:r>
             <a:r>
-              <a:rPr lang="ko-KR" altLang="en-US" sz="1400" dirty="0">
+              <a:rPr lang="ko-KR" altLang="en-US" sz="1200" dirty="0">
                 <a:solidFill>
                   <a:schemeClr val="tx1"/>
                 </a:solidFill>
@@ -16205,4504 +16204,7 @@
               <a:t> 구성에 특별한 하드웨어나 소프트웨어를 필요로 하지 않기 때문에 비용적인 강점이 있으며 복잡한 구성이 불필요하여 클러스터 구성 과정이 매우 간단하고 빠릅니다</a:t>
             </a:r>
             <a:r>
-              <a:rPr lang="en-US" altLang="ko-KR" sz="1400" dirty="0">
-                <a:solidFill>
-                  <a:schemeClr val="tx1"/>
-                </a:solidFill>
-                <a:latin typeface="+mn-ea"/>
-              </a:rPr>
-              <a:t>.</a:t>
-            </a:r>
-          </a:p>
-        </p:txBody>
-      </p:sp>
-      <p:grpSp>
-        <p:nvGrpSpPr>
-          <p:cNvPr id="21" name="그룹 20"/>
-          <p:cNvGrpSpPr/>
-          <p:nvPr/>
-        </p:nvGrpSpPr>
-        <p:grpSpPr>
-          <a:xfrm>
-            <a:off x="141102" y="1737731"/>
-            <a:ext cx="4366941" cy="2183652"/>
-            <a:chOff x="1088681" y="2547978"/>
-            <a:chExt cx="4366941" cy="2183652"/>
-          </a:xfrm>
-        </p:grpSpPr>
-        <p:grpSp>
-          <p:nvGrpSpPr>
-            <p:cNvPr id="22" name="그룹 21"/>
-            <p:cNvGrpSpPr/>
-            <p:nvPr/>
-          </p:nvGrpSpPr>
-          <p:grpSpPr>
-            <a:xfrm>
-              <a:off x="1088681" y="2986780"/>
-              <a:ext cx="4366941" cy="1744850"/>
-              <a:chOff x="1088681" y="2986780"/>
-              <a:chExt cx="4366941" cy="1744850"/>
-            </a:xfrm>
-          </p:grpSpPr>
-          <p:grpSp>
-            <p:nvGrpSpPr>
-              <p:cNvPr id="24" name="그룹 54"/>
-              <p:cNvGrpSpPr/>
-              <p:nvPr/>
-            </p:nvGrpSpPr>
-            <p:grpSpPr>
-              <a:xfrm>
-                <a:off x="2666944" y="2986780"/>
-                <a:ext cx="1463020" cy="1704455"/>
-                <a:chOff x="2763035" y="2506034"/>
-                <a:chExt cx="1594245" cy="1723318"/>
-              </a:xfrm>
-            </p:grpSpPr>
-            <p:sp>
-              <p:nvSpPr>
-                <p:cNvPr id="50" name="Rounded Rectangle 32"/>
-                <p:cNvSpPr/>
-                <p:nvPr/>
-              </p:nvSpPr>
-              <p:spPr>
-                <a:xfrm>
-                  <a:off x="2859399" y="3549755"/>
-                  <a:ext cx="418641" cy="415092"/>
-                </a:xfrm>
-                <a:prstGeom prst="roundRect">
-                  <a:avLst/>
-                </a:prstGeom>
-                <a:solidFill>
-                  <a:srgbClr val="F47E65"/>
-                </a:solidFill>
-                <a:ln>
-                  <a:noFill/>
-                </a:ln>
-                <a:effectLst/>
-              </p:spPr>
-              <p:style>
-                <a:lnRef idx="1">
-                  <a:schemeClr val="accent1"/>
-                </a:lnRef>
-                <a:fillRef idx="3">
-                  <a:schemeClr val="accent1"/>
-                </a:fillRef>
-                <a:effectRef idx="2">
-                  <a:schemeClr val="accent1"/>
-                </a:effectRef>
-                <a:fontRef idx="minor">
-                  <a:schemeClr val="lt1"/>
-                </a:fontRef>
-              </p:style>
-              <p:txBody>
-                <a:bodyPr rtlCol="0" anchor="ctr"/>
-                <a:lstStyle/>
-                <a:p>
-                  <a:pPr algn="ctr"/>
-                  <a:endParaRPr lang="en-US" sz="1100">
-                    <a:latin typeface="+mn-ea"/>
-                  </a:endParaRPr>
-                </a:p>
-              </p:txBody>
-            </p:sp>
-            <p:sp>
-              <p:nvSpPr>
-                <p:cNvPr id="51" name="Rounded Rectangle 33"/>
-                <p:cNvSpPr/>
-                <p:nvPr/>
-              </p:nvSpPr>
-              <p:spPr>
-                <a:xfrm>
-                  <a:off x="3362503" y="3549755"/>
-                  <a:ext cx="418641" cy="415092"/>
-                </a:xfrm>
-                <a:prstGeom prst="roundRect">
-                  <a:avLst/>
-                </a:prstGeom>
-                <a:solidFill>
-                  <a:srgbClr val="F47E65"/>
-                </a:solidFill>
-                <a:ln>
-                  <a:noFill/>
-                </a:ln>
-                <a:effectLst/>
-              </p:spPr>
-              <p:style>
-                <a:lnRef idx="1">
-                  <a:schemeClr val="accent1"/>
-                </a:lnRef>
-                <a:fillRef idx="3">
-                  <a:schemeClr val="accent1"/>
-                </a:fillRef>
-                <a:effectRef idx="2">
-                  <a:schemeClr val="accent1"/>
-                </a:effectRef>
-                <a:fontRef idx="minor">
-                  <a:schemeClr val="lt1"/>
-                </a:fontRef>
-              </p:style>
-              <p:txBody>
-                <a:bodyPr rtlCol="0" anchor="ctr"/>
-                <a:lstStyle/>
-                <a:p>
-                  <a:pPr algn="ctr"/>
-                  <a:endParaRPr lang="en-US" sz="1100">
-                    <a:latin typeface="+mn-ea"/>
-                  </a:endParaRPr>
-                </a:p>
-              </p:txBody>
-            </p:sp>
-            <p:sp>
-              <p:nvSpPr>
-                <p:cNvPr id="52" name="Rounded Rectangle 34"/>
-                <p:cNvSpPr/>
-                <p:nvPr/>
-              </p:nvSpPr>
-              <p:spPr>
-                <a:xfrm>
-                  <a:off x="3865607" y="3549755"/>
-                  <a:ext cx="418641" cy="415092"/>
-                </a:xfrm>
-                <a:prstGeom prst="roundRect">
-                  <a:avLst/>
-                </a:prstGeom>
-                <a:solidFill>
-                  <a:srgbClr val="F47E65"/>
-                </a:solidFill>
-                <a:ln>
-                  <a:noFill/>
-                </a:ln>
-                <a:effectLst/>
-              </p:spPr>
-              <p:style>
-                <a:lnRef idx="1">
-                  <a:schemeClr val="accent1"/>
-                </a:lnRef>
-                <a:fillRef idx="3">
-                  <a:schemeClr val="accent1"/>
-                </a:fillRef>
-                <a:effectRef idx="2">
-                  <a:schemeClr val="accent1"/>
-                </a:effectRef>
-                <a:fontRef idx="minor">
-                  <a:schemeClr val="lt1"/>
-                </a:fontRef>
-              </p:style>
-              <p:txBody>
-                <a:bodyPr rtlCol="0" anchor="ctr"/>
-                <a:lstStyle/>
-                <a:p>
-                  <a:pPr algn="ctr"/>
-                  <a:endParaRPr lang="en-US" sz="1100">
-                    <a:latin typeface="+mn-ea"/>
-                  </a:endParaRPr>
-                </a:p>
-              </p:txBody>
-            </p:sp>
-            <p:cxnSp>
-              <p:nvCxnSpPr>
-                <p:cNvPr id="53" name="Straight Connector 35"/>
-                <p:cNvCxnSpPr>
-                  <a:endCxn id="50" idx="0"/>
-                </p:cNvCxnSpPr>
-                <p:nvPr/>
-              </p:nvCxnSpPr>
-              <p:spPr>
-                <a:xfrm>
-                  <a:off x="3068719" y="3406619"/>
-                  <a:ext cx="1" cy="143136"/>
-                </a:xfrm>
-                <a:prstGeom prst="line">
-                  <a:avLst/>
-                </a:prstGeom>
-                <a:ln w="28575" cmpd="sng">
-                  <a:solidFill>
-                    <a:srgbClr val="FF0000"/>
-                  </a:solidFill>
-                </a:ln>
-                <a:effectLst/>
-              </p:spPr>
-              <p:style>
-                <a:lnRef idx="2">
-                  <a:schemeClr val="accent1"/>
-                </a:lnRef>
-                <a:fillRef idx="0">
-                  <a:schemeClr val="accent1"/>
-                </a:fillRef>
-                <a:effectRef idx="1">
-                  <a:schemeClr val="accent1"/>
-                </a:effectRef>
-                <a:fontRef idx="minor">
-                  <a:schemeClr val="tx1"/>
-                </a:fontRef>
-              </p:style>
-            </p:cxnSp>
-            <p:cxnSp>
-              <p:nvCxnSpPr>
-                <p:cNvPr id="54" name="Straight Connector 36"/>
-                <p:cNvCxnSpPr/>
-                <p:nvPr/>
-              </p:nvCxnSpPr>
-              <p:spPr>
-                <a:xfrm>
-                  <a:off x="3571822" y="3406619"/>
-                  <a:ext cx="0" cy="162043"/>
-                </a:xfrm>
-                <a:prstGeom prst="line">
-                  <a:avLst/>
-                </a:prstGeom>
-                <a:ln w="28575" cmpd="sng">
-                  <a:solidFill>
-                    <a:srgbClr val="FF0000"/>
-                  </a:solidFill>
-                </a:ln>
-                <a:effectLst/>
-              </p:spPr>
-              <p:style>
-                <a:lnRef idx="2">
-                  <a:schemeClr val="accent1"/>
-                </a:lnRef>
-                <a:fillRef idx="0">
-                  <a:schemeClr val="accent1"/>
-                </a:fillRef>
-                <a:effectRef idx="1">
-                  <a:schemeClr val="accent1"/>
-                </a:effectRef>
-                <a:fontRef idx="minor">
-                  <a:schemeClr val="tx1"/>
-                </a:fontRef>
-              </p:style>
-            </p:cxnSp>
-            <p:cxnSp>
-              <p:nvCxnSpPr>
-                <p:cNvPr id="55" name="Straight Connector 37"/>
-                <p:cNvCxnSpPr/>
-                <p:nvPr/>
-              </p:nvCxnSpPr>
-              <p:spPr>
-                <a:xfrm>
-                  <a:off x="4074927" y="3406619"/>
-                  <a:ext cx="0" cy="162043"/>
-                </a:xfrm>
-                <a:prstGeom prst="line">
-                  <a:avLst/>
-                </a:prstGeom>
-                <a:ln w="28575" cmpd="sng">
-                  <a:solidFill>
-                    <a:srgbClr val="FF0000"/>
-                  </a:solidFill>
-                </a:ln>
-                <a:effectLst/>
-              </p:spPr>
-              <p:style>
-                <a:lnRef idx="2">
-                  <a:schemeClr val="accent1"/>
-                </a:lnRef>
-                <a:fillRef idx="0">
-                  <a:schemeClr val="accent1"/>
-                </a:fillRef>
-                <a:effectRef idx="1">
-                  <a:schemeClr val="accent1"/>
-                </a:effectRef>
-                <a:fontRef idx="minor">
-                  <a:schemeClr val="tx1"/>
-                </a:fontRef>
-              </p:style>
-            </p:cxnSp>
-            <p:sp>
-              <p:nvSpPr>
-                <p:cNvPr id="56" name="Rounded Rectangle 38"/>
-                <p:cNvSpPr/>
-                <p:nvPr/>
-              </p:nvSpPr>
-              <p:spPr>
-                <a:xfrm>
-                  <a:off x="3068720" y="2831866"/>
-                  <a:ext cx="418641" cy="415092"/>
-                </a:xfrm>
-                <a:prstGeom prst="roundRect">
-                  <a:avLst/>
-                </a:prstGeom>
-                <a:solidFill>
-                  <a:srgbClr val="F47E65"/>
-                </a:solidFill>
-                <a:ln>
-                  <a:noFill/>
-                </a:ln>
-                <a:effectLst/>
-              </p:spPr>
-              <p:style>
-                <a:lnRef idx="1">
-                  <a:schemeClr val="accent1"/>
-                </a:lnRef>
-                <a:fillRef idx="3">
-                  <a:schemeClr val="accent1"/>
-                </a:fillRef>
-                <a:effectRef idx="2">
-                  <a:schemeClr val="accent1"/>
-                </a:effectRef>
-                <a:fontRef idx="minor">
-                  <a:schemeClr val="lt1"/>
-                </a:fontRef>
-              </p:style>
-              <p:txBody>
-                <a:bodyPr rtlCol="0" anchor="ctr"/>
-                <a:lstStyle/>
-                <a:p>
-                  <a:pPr algn="ctr"/>
-                  <a:endParaRPr lang="en-US" sz="1100">
-                    <a:latin typeface="+mn-ea"/>
-                  </a:endParaRPr>
-                </a:p>
-              </p:txBody>
-            </p:sp>
-            <p:cxnSp>
-              <p:nvCxnSpPr>
-                <p:cNvPr id="57" name="Straight Connector 39"/>
-                <p:cNvCxnSpPr/>
-                <p:nvPr/>
-              </p:nvCxnSpPr>
-              <p:spPr>
-                <a:xfrm>
-                  <a:off x="3278040" y="3246958"/>
-                  <a:ext cx="1" cy="159661"/>
-                </a:xfrm>
-                <a:prstGeom prst="line">
-                  <a:avLst/>
-                </a:prstGeom>
-                <a:ln w="28575" cmpd="sng">
-                  <a:solidFill>
-                    <a:srgbClr val="FF0000"/>
-                  </a:solidFill>
-                </a:ln>
-                <a:effectLst/>
-              </p:spPr>
-              <p:style>
-                <a:lnRef idx="2">
-                  <a:schemeClr val="accent1"/>
-                </a:lnRef>
-                <a:fillRef idx="0">
-                  <a:schemeClr val="accent1"/>
-                </a:fillRef>
-                <a:effectRef idx="1">
-                  <a:schemeClr val="accent1"/>
-                </a:effectRef>
-                <a:fontRef idx="minor">
-                  <a:schemeClr val="tx1"/>
-                </a:fontRef>
-              </p:style>
-            </p:cxnSp>
-            <p:cxnSp>
-              <p:nvCxnSpPr>
-                <p:cNvPr id="58" name="Straight Connector 40"/>
-                <p:cNvCxnSpPr>
-                  <a:stCxn id="59" idx="2"/>
-                </p:cNvCxnSpPr>
-                <p:nvPr/>
-              </p:nvCxnSpPr>
-              <p:spPr>
-                <a:xfrm>
-                  <a:off x="3823376" y="3246958"/>
-                  <a:ext cx="3626" cy="159661"/>
-                </a:xfrm>
-                <a:prstGeom prst="line">
-                  <a:avLst/>
-                </a:prstGeom>
-                <a:ln w="28575" cmpd="sng">
-                  <a:solidFill>
-                    <a:srgbClr val="FF0000"/>
-                  </a:solidFill>
-                </a:ln>
-                <a:effectLst/>
-              </p:spPr>
-              <p:style>
-                <a:lnRef idx="2">
-                  <a:schemeClr val="accent1"/>
-                </a:lnRef>
-                <a:fillRef idx="0">
-                  <a:schemeClr val="accent1"/>
-                </a:fillRef>
-                <a:effectRef idx="1">
-                  <a:schemeClr val="accent1"/>
-                </a:effectRef>
-                <a:fontRef idx="minor">
-                  <a:schemeClr val="tx1"/>
-                </a:fontRef>
-              </p:style>
-            </p:cxnSp>
-            <p:sp>
-              <p:nvSpPr>
-                <p:cNvPr id="59" name="Rounded Rectangle 41"/>
-                <p:cNvSpPr/>
-                <p:nvPr/>
-              </p:nvSpPr>
-              <p:spPr>
-                <a:xfrm>
-                  <a:off x="3614055" y="2831866"/>
-                  <a:ext cx="418641" cy="415092"/>
-                </a:xfrm>
-                <a:prstGeom prst="roundRect">
-                  <a:avLst/>
-                </a:prstGeom>
-                <a:solidFill>
-                  <a:srgbClr val="F47E65"/>
-                </a:solidFill>
-                <a:ln>
-                  <a:noFill/>
-                </a:ln>
-                <a:effectLst/>
-              </p:spPr>
-              <p:style>
-                <a:lnRef idx="1">
-                  <a:schemeClr val="accent1"/>
-                </a:lnRef>
-                <a:fillRef idx="3">
-                  <a:schemeClr val="accent1"/>
-                </a:fillRef>
-                <a:effectRef idx="2">
-                  <a:schemeClr val="accent1"/>
-                </a:effectRef>
-                <a:fontRef idx="minor">
-                  <a:schemeClr val="lt1"/>
-                </a:fontRef>
-              </p:style>
-              <p:txBody>
-                <a:bodyPr rtlCol="0" anchor="ctr"/>
-                <a:lstStyle/>
-                <a:p>
-                  <a:pPr algn="ctr"/>
-                  <a:endParaRPr lang="en-US" sz="1100">
-                    <a:latin typeface="+mn-ea"/>
-                  </a:endParaRPr>
-                </a:p>
-              </p:txBody>
-            </p:sp>
-            <p:sp>
-              <p:nvSpPr>
-                <p:cNvPr id="60" name="TextBox 59"/>
-                <p:cNvSpPr txBox="1"/>
-                <p:nvPr/>
-              </p:nvSpPr>
-              <p:spPr>
-                <a:xfrm>
-                  <a:off x="3095658" y="2506034"/>
-                  <a:ext cx="945359" cy="264505"/>
-                </a:xfrm>
-                <a:prstGeom prst="rect">
-                  <a:avLst/>
-                </a:prstGeom>
-                <a:noFill/>
-              </p:spPr>
-              <p:txBody>
-                <a:bodyPr wrap="none" rtlCol="0">
-                  <a:spAutoFit/>
-                </a:bodyPr>
-                <a:lstStyle/>
-                <a:p>
-                  <a:pPr defTabSz="430213">
-                    <a:spcAft>
-                      <a:spcPts val="400"/>
-                    </a:spcAft>
-                    <a:buSzPct val="100000"/>
-                  </a:pPr>
-                  <a:r>
-                    <a:rPr lang="en-US" sz="1100" b="1" dirty="0">
-                      <a:latin typeface="+mn-ea"/>
-                      <a:cs typeface="HP Simplified" pitchFamily="34" charset="0"/>
-                    </a:rPr>
-                    <a:t>DB Server</a:t>
-                  </a:r>
-                </a:p>
-              </p:txBody>
-            </p:sp>
-            <p:sp>
-              <p:nvSpPr>
-                <p:cNvPr id="61" name="TextBox 60"/>
-                <p:cNvSpPr txBox="1"/>
-                <p:nvPr/>
-              </p:nvSpPr>
-              <p:spPr>
-                <a:xfrm>
-                  <a:off x="3062564" y="3964847"/>
-                  <a:ext cx="1294716" cy="264505"/>
-                </a:xfrm>
-                <a:prstGeom prst="rect">
-                  <a:avLst/>
-                </a:prstGeom>
-                <a:noFill/>
-              </p:spPr>
-              <p:txBody>
-                <a:bodyPr wrap="none" rtlCol="0">
-                  <a:spAutoFit/>
-                </a:bodyPr>
-                <a:lstStyle/>
-                <a:p>
-                  <a:pPr defTabSz="430213">
-                    <a:spcAft>
-                      <a:spcPts val="400"/>
-                    </a:spcAft>
-                    <a:buSzPct val="100000"/>
-                  </a:pPr>
-                  <a:r>
-                    <a:rPr lang="en-US" sz="1100" b="1" dirty="0">
-                      <a:latin typeface="+mn-ea"/>
-                      <a:cs typeface="HP Simplified" pitchFamily="34" charset="0"/>
-                    </a:rPr>
-                    <a:t>Storage Server</a:t>
-                  </a:r>
-                </a:p>
-              </p:txBody>
-            </p:sp>
-            <p:sp>
-              <p:nvSpPr>
-                <p:cNvPr id="62" name="Rounded Rectangle 44"/>
-                <p:cNvSpPr/>
-                <p:nvPr/>
-              </p:nvSpPr>
-              <p:spPr>
-                <a:xfrm>
-                  <a:off x="2763035" y="3333144"/>
-                  <a:ext cx="1586536" cy="146950"/>
-                </a:xfrm>
-                <a:prstGeom prst="roundRect">
-                  <a:avLst/>
-                </a:prstGeom>
-                <a:solidFill>
-                  <a:srgbClr val="F05332"/>
-                </a:solidFill>
-                <a:ln>
-                  <a:noFill/>
-                </a:ln>
-                <a:effectLst/>
-              </p:spPr>
-              <p:style>
-                <a:lnRef idx="1">
-                  <a:schemeClr val="accent1"/>
-                </a:lnRef>
-                <a:fillRef idx="3">
-                  <a:schemeClr val="accent1"/>
-                </a:fillRef>
-                <a:effectRef idx="2">
-                  <a:schemeClr val="accent1"/>
-                </a:effectRef>
-                <a:fontRef idx="minor">
-                  <a:schemeClr val="lt1"/>
-                </a:fontRef>
-              </p:style>
-              <p:txBody>
-                <a:bodyPr rtlCol="0" anchor="ctr"/>
-                <a:lstStyle/>
-                <a:p>
-                  <a:pPr algn="ctr"/>
-                  <a:r>
-                    <a:rPr lang="en-US" sz="1000" dirty="0" err="1">
-                      <a:latin typeface="+mn-ea"/>
-                    </a:rPr>
-                    <a:t>InfiniBand</a:t>
-                  </a:r>
-                  <a:endParaRPr lang="en-US" sz="1000" dirty="0">
-                    <a:latin typeface="+mn-ea"/>
-                  </a:endParaRPr>
-                </a:p>
-              </p:txBody>
-            </p:sp>
-            <p:sp>
-              <p:nvSpPr>
-                <p:cNvPr id="63" name="Rounded Rectangle 45"/>
-                <p:cNvSpPr/>
-                <p:nvPr/>
-              </p:nvSpPr>
-              <p:spPr>
-                <a:xfrm>
-                  <a:off x="2905511" y="3591293"/>
-                  <a:ext cx="301791" cy="121280"/>
-                </a:xfrm>
-                <a:prstGeom prst="roundRect">
-                  <a:avLst/>
-                </a:prstGeom>
-                <a:solidFill>
-                  <a:srgbClr val="FBD4C0"/>
-                </a:solidFill>
-                <a:ln>
-                  <a:noFill/>
-                </a:ln>
-                <a:effectLst/>
-              </p:spPr>
-              <p:style>
-                <a:lnRef idx="1">
-                  <a:schemeClr val="accent1"/>
-                </a:lnRef>
-                <a:fillRef idx="3">
-                  <a:schemeClr val="accent1"/>
-                </a:fillRef>
-                <a:effectRef idx="2">
-                  <a:schemeClr val="accent1"/>
-                </a:effectRef>
-                <a:fontRef idx="minor">
-                  <a:schemeClr val="lt1"/>
-                </a:fontRef>
-              </p:style>
-              <p:txBody>
-                <a:bodyPr lIns="0" rIns="0" rtlCol="0" anchor="ctr"/>
-                <a:lstStyle/>
-                <a:p>
-                  <a:pPr algn="ctr"/>
-                  <a:r>
-                    <a:rPr lang="en-US" sz="1000" dirty="0">
-                      <a:solidFill>
-                        <a:srgbClr val="FF0000"/>
-                      </a:solidFill>
-                      <a:latin typeface="+mn-ea"/>
-                    </a:rPr>
-                    <a:t>SSD</a:t>
-                  </a:r>
-                </a:p>
-              </p:txBody>
-            </p:sp>
-            <p:sp>
-              <p:nvSpPr>
-                <p:cNvPr id="64" name="Rounded Rectangle 46"/>
-                <p:cNvSpPr/>
-                <p:nvPr/>
-              </p:nvSpPr>
-              <p:spPr>
-                <a:xfrm>
-                  <a:off x="3420928" y="3591293"/>
-                  <a:ext cx="301791" cy="121280"/>
-                </a:xfrm>
-                <a:prstGeom prst="roundRect">
-                  <a:avLst/>
-                </a:prstGeom>
-                <a:solidFill>
-                  <a:srgbClr val="FBD4C0"/>
-                </a:solidFill>
-                <a:ln>
-                  <a:noFill/>
-                </a:ln>
-                <a:effectLst/>
-              </p:spPr>
-              <p:style>
-                <a:lnRef idx="1">
-                  <a:schemeClr val="accent1"/>
-                </a:lnRef>
-                <a:fillRef idx="3">
-                  <a:schemeClr val="accent1"/>
-                </a:fillRef>
-                <a:effectRef idx="2">
-                  <a:schemeClr val="accent1"/>
-                </a:effectRef>
-                <a:fontRef idx="minor">
-                  <a:schemeClr val="lt1"/>
-                </a:fontRef>
-              </p:style>
-              <p:txBody>
-                <a:bodyPr lIns="0" rIns="0" rtlCol="0" anchor="ctr"/>
-                <a:lstStyle/>
-                <a:p>
-                  <a:pPr algn="ctr"/>
-                  <a:r>
-                    <a:rPr lang="en-US" sz="1000" dirty="0">
-                      <a:solidFill>
-                        <a:srgbClr val="FF0000"/>
-                      </a:solidFill>
-                      <a:latin typeface="+mn-ea"/>
-                    </a:rPr>
-                    <a:t>SSD</a:t>
-                  </a:r>
-                </a:p>
-              </p:txBody>
-            </p:sp>
-            <p:sp>
-              <p:nvSpPr>
-                <p:cNvPr id="65" name="Rounded Rectangle 47"/>
-                <p:cNvSpPr/>
-                <p:nvPr/>
-              </p:nvSpPr>
-              <p:spPr>
-                <a:xfrm>
-                  <a:off x="3924031" y="3591293"/>
-                  <a:ext cx="301791" cy="121280"/>
-                </a:xfrm>
-                <a:prstGeom prst="roundRect">
-                  <a:avLst/>
-                </a:prstGeom>
-                <a:solidFill>
-                  <a:srgbClr val="FBD4C0"/>
-                </a:solidFill>
-                <a:ln>
-                  <a:noFill/>
-                </a:ln>
-                <a:effectLst/>
-              </p:spPr>
-              <p:style>
-                <a:lnRef idx="1">
-                  <a:schemeClr val="accent1"/>
-                </a:lnRef>
-                <a:fillRef idx="3">
-                  <a:schemeClr val="accent1"/>
-                </a:fillRef>
-                <a:effectRef idx="2">
-                  <a:schemeClr val="accent1"/>
-                </a:effectRef>
-                <a:fontRef idx="minor">
-                  <a:schemeClr val="lt1"/>
-                </a:fontRef>
-              </p:style>
-              <p:txBody>
-                <a:bodyPr lIns="0" rIns="0" rtlCol="0" anchor="ctr"/>
-                <a:lstStyle/>
-                <a:p>
-                  <a:pPr algn="ctr"/>
-                  <a:r>
-                    <a:rPr lang="en-US" sz="1000" dirty="0">
-                      <a:solidFill>
-                        <a:srgbClr val="FF0000"/>
-                      </a:solidFill>
-                      <a:latin typeface="+mn-ea"/>
-                    </a:rPr>
-                    <a:t>SSD</a:t>
-                  </a:r>
-                </a:p>
-              </p:txBody>
-            </p:sp>
-          </p:grpSp>
-          <p:grpSp>
-            <p:nvGrpSpPr>
-              <p:cNvPr id="25" name="그룹 24"/>
-              <p:cNvGrpSpPr/>
-              <p:nvPr/>
-            </p:nvGrpSpPr>
-            <p:grpSpPr>
-              <a:xfrm>
-                <a:off x="1088681" y="2990108"/>
-                <a:ext cx="1307567" cy="1741522"/>
-                <a:chOff x="1088681" y="2990108"/>
-                <a:chExt cx="1307567" cy="1741522"/>
-              </a:xfrm>
-            </p:grpSpPr>
-            <p:sp>
-              <p:nvSpPr>
-                <p:cNvPr id="35" name="TextBox 34"/>
-                <p:cNvSpPr txBox="1"/>
-                <p:nvPr/>
-              </p:nvSpPr>
-              <p:spPr>
-                <a:xfrm>
-                  <a:off x="1237358" y="2990108"/>
-                  <a:ext cx="1122423" cy="261610"/>
-                </a:xfrm>
-                <a:prstGeom prst="rect">
-                  <a:avLst/>
-                </a:prstGeom>
-                <a:noFill/>
-              </p:spPr>
-              <p:txBody>
-                <a:bodyPr wrap="none" rtlCol="0">
-                  <a:spAutoFit/>
-                </a:bodyPr>
-                <a:lstStyle/>
-                <a:p>
-                  <a:pPr defTabSz="430213">
-                    <a:spcAft>
-                      <a:spcPts val="400"/>
-                    </a:spcAft>
-                    <a:buSzPct val="100000"/>
-                  </a:pPr>
-                  <a:r>
-                    <a:rPr lang="en-US" altLang="ko-KR" sz="1100" b="1" dirty="0">
-                      <a:latin typeface="+mn-ea"/>
-                      <a:cs typeface="HP Simplified" pitchFamily="34" charset="0"/>
-                    </a:rPr>
-                    <a:t>Master Server</a:t>
-                  </a:r>
-                  <a:endParaRPr lang="en-US" sz="1100" b="1" dirty="0">
-                    <a:latin typeface="+mn-ea"/>
-                    <a:cs typeface="HP Simplified" pitchFamily="34" charset="0"/>
-                  </a:endParaRPr>
-                </a:p>
-              </p:txBody>
-            </p:sp>
-            <p:grpSp>
-              <p:nvGrpSpPr>
-                <p:cNvPr id="36" name="그룹 35"/>
-                <p:cNvGrpSpPr/>
-                <p:nvPr/>
-              </p:nvGrpSpPr>
-              <p:grpSpPr>
-                <a:xfrm>
-                  <a:off x="1088681" y="3332572"/>
-                  <a:ext cx="1307567" cy="1120580"/>
-                  <a:chOff x="1088681" y="3332572"/>
-                  <a:chExt cx="1307567" cy="1120580"/>
-                </a:xfrm>
-              </p:grpSpPr>
-              <p:sp>
-                <p:nvSpPr>
-                  <p:cNvPr id="38" name="Rounded Rectangle 19"/>
-                  <p:cNvSpPr/>
-                  <p:nvPr/>
-                </p:nvSpPr>
-                <p:spPr>
-                  <a:xfrm>
-                    <a:off x="1088681" y="4042603"/>
-                    <a:ext cx="384182" cy="410549"/>
-                  </a:xfrm>
-                  <a:prstGeom prst="roundRect">
-                    <a:avLst/>
-                  </a:prstGeom>
-                  <a:solidFill>
-                    <a:srgbClr val="92D050"/>
-                  </a:solidFill>
-                  <a:ln>
-                    <a:noFill/>
-                  </a:ln>
-                  <a:effectLst/>
-                </p:spPr>
-                <p:style>
-                  <a:lnRef idx="1">
-                    <a:schemeClr val="accent1"/>
-                  </a:lnRef>
-                  <a:fillRef idx="3">
-                    <a:schemeClr val="accent1"/>
-                  </a:fillRef>
-                  <a:effectRef idx="2">
-                    <a:schemeClr val="accent1"/>
-                  </a:effectRef>
-                  <a:fontRef idx="minor">
-                    <a:schemeClr val="lt1"/>
-                  </a:fontRef>
-                </p:style>
-                <p:txBody>
-                  <a:bodyPr rtlCol="0" anchor="ctr"/>
-                  <a:lstStyle/>
-                  <a:p>
-                    <a:pPr algn="ctr"/>
-                    <a:endParaRPr lang="en-US" sz="1100">
-                      <a:latin typeface="+mn-ea"/>
-                    </a:endParaRPr>
-                  </a:p>
-                </p:txBody>
-              </p:sp>
-              <p:sp>
-                <p:nvSpPr>
-                  <p:cNvPr id="39" name="Rounded Rectangle 20"/>
-                  <p:cNvSpPr/>
-                  <p:nvPr/>
-                </p:nvSpPr>
-                <p:spPr>
-                  <a:xfrm>
-                    <a:off x="1550374" y="4042603"/>
-                    <a:ext cx="384182" cy="410549"/>
-                  </a:xfrm>
-                  <a:prstGeom prst="roundRect">
-                    <a:avLst/>
-                  </a:prstGeom>
-                  <a:solidFill>
-                    <a:srgbClr val="92D050"/>
-                  </a:solidFill>
-                  <a:ln>
-                    <a:noFill/>
-                  </a:ln>
-                  <a:effectLst/>
-                </p:spPr>
-                <p:style>
-                  <a:lnRef idx="1">
-                    <a:schemeClr val="accent1"/>
-                  </a:lnRef>
-                  <a:fillRef idx="3">
-                    <a:schemeClr val="accent1"/>
-                  </a:fillRef>
-                  <a:effectRef idx="2">
-                    <a:schemeClr val="accent1"/>
-                  </a:effectRef>
-                  <a:fontRef idx="minor">
-                    <a:schemeClr val="lt1"/>
-                  </a:fontRef>
-                </p:style>
-                <p:txBody>
-                  <a:bodyPr rtlCol="0" anchor="ctr"/>
-                  <a:lstStyle/>
-                  <a:p>
-                    <a:pPr algn="ctr"/>
-                    <a:endParaRPr lang="en-US" sz="1100">
-                      <a:latin typeface="+mn-ea"/>
-                    </a:endParaRPr>
-                  </a:p>
-                </p:txBody>
-              </p:sp>
-              <p:sp>
-                <p:nvSpPr>
-                  <p:cNvPr id="40" name="Rounded Rectangle 21"/>
-                  <p:cNvSpPr/>
-                  <p:nvPr/>
-                </p:nvSpPr>
-                <p:spPr>
-                  <a:xfrm>
-                    <a:off x="2012066" y="4042603"/>
-                    <a:ext cx="384182" cy="410549"/>
-                  </a:xfrm>
-                  <a:prstGeom prst="roundRect">
-                    <a:avLst/>
-                  </a:prstGeom>
-                  <a:solidFill>
-                    <a:srgbClr val="92D050"/>
-                  </a:solidFill>
-                  <a:ln>
-                    <a:noFill/>
-                  </a:ln>
-                  <a:effectLst/>
-                </p:spPr>
-                <p:style>
-                  <a:lnRef idx="1">
-                    <a:schemeClr val="accent1"/>
-                  </a:lnRef>
-                  <a:fillRef idx="3">
-                    <a:schemeClr val="accent1"/>
-                  </a:fillRef>
-                  <a:effectRef idx="2">
-                    <a:schemeClr val="accent1"/>
-                  </a:effectRef>
-                  <a:fontRef idx="minor">
-                    <a:schemeClr val="lt1"/>
-                  </a:fontRef>
-                </p:style>
-                <p:txBody>
-                  <a:bodyPr rtlCol="0" anchor="ctr"/>
-                  <a:lstStyle/>
-                  <a:p>
-                    <a:pPr algn="ctr"/>
-                    <a:endParaRPr lang="en-US" sz="1100">
-                      <a:latin typeface="+mn-ea"/>
-                    </a:endParaRPr>
-                  </a:p>
-                </p:txBody>
-              </p:sp>
-              <p:cxnSp>
-                <p:nvCxnSpPr>
-                  <p:cNvPr id="41" name="Straight Connector 22"/>
-                  <p:cNvCxnSpPr/>
-                  <p:nvPr/>
-                </p:nvCxnSpPr>
-                <p:spPr>
-                  <a:xfrm>
-                    <a:off x="1088681" y="3901034"/>
-                    <a:ext cx="1307567" cy="0"/>
-                  </a:xfrm>
-                  <a:prstGeom prst="line">
-                    <a:avLst/>
-                  </a:prstGeom>
-                  <a:ln w="28575" cmpd="sng">
-                    <a:solidFill>
-                      <a:srgbClr val="92D050"/>
-                    </a:solidFill>
-                  </a:ln>
-                  <a:effectLst/>
-                </p:spPr>
-                <p:style>
-                  <a:lnRef idx="2">
-                    <a:schemeClr val="accent1"/>
-                  </a:lnRef>
-                  <a:fillRef idx="0">
-                    <a:schemeClr val="accent1"/>
-                  </a:fillRef>
-                  <a:effectRef idx="1">
-                    <a:schemeClr val="accent1"/>
-                  </a:effectRef>
-                  <a:fontRef idx="minor">
-                    <a:schemeClr val="tx1"/>
-                  </a:fontRef>
-                </p:style>
-              </p:cxnSp>
-              <p:cxnSp>
-                <p:nvCxnSpPr>
-                  <p:cNvPr id="42" name="Straight Connector 23"/>
-                  <p:cNvCxnSpPr>
-                    <a:endCxn id="38" idx="0"/>
-                  </p:cNvCxnSpPr>
-                  <p:nvPr/>
-                </p:nvCxnSpPr>
-                <p:spPr>
-                  <a:xfrm>
-                    <a:off x="1280772" y="3901034"/>
-                    <a:ext cx="1" cy="141569"/>
-                  </a:xfrm>
-                  <a:prstGeom prst="line">
-                    <a:avLst/>
-                  </a:prstGeom>
-                  <a:ln w="28575" cmpd="sng">
-                    <a:solidFill>
-                      <a:srgbClr val="92D050"/>
-                    </a:solidFill>
-                  </a:ln>
-                  <a:effectLst/>
-                </p:spPr>
-                <p:style>
-                  <a:lnRef idx="2">
-                    <a:schemeClr val="accent1"/>
-                  </a:lnRef>
-                  <a:fillRef idx="0">
-                    <a:schemeClr val="accent1"/>
-                  </a:fillRef>
-                  <a:effectRef idx="1">
-                    <a:schemeClr val="accent1"/>
-                  </a:effectRef>
-                  <a:fontRef idx="minor">
-                    <a:schemeClr val="tx1"/>
-                  </a:fontRef>
-                </p:style>
-              </p:cxnSp>
-              <p:cxnSp>
-                <p:nvCxnSpPr>
-                  <p:cNvPr id="43" name="Straight Connector 24"/>
-                  <p:cNvCxnSpPr/>
-                  <p:nvPr/>
-                </p:nvCxnSpPr>
-                <p:spPr>
-                  <a:xfrm>
-                    <a:off x="1742463" y="3901034"/>
-                    <a:ext cx="0" cy="160269"/>
-                  </a:xfrm>
-                  <a:prstGeom prst="line">
-                    <a:avLst/>
-                  </a:prstGeom>
-                  <a:ln w="28575" cmpd="sng">
-                    <a:solidFill>
-                      <a:srgbClr val="92D050"/>
-                    </a:solidFill>
-                  </a:ln>
-                  <a:effectLst/>
-                </p:spPr>
-                <p:style>
-                  <a:lnRef idx="2">
-                    <a:schemeClr val="accent1"/>
-                  </a:lnRef>
-                  <a:fillRef idx="0">
-                    <a:schemeClr val="accent1"/>
-                  </a:fillRef>
-                  <a:effectRef idx="1">
-                    <a:schemeClr val="accent1"/>
-                  </a:effectRef>
-                  <a:fontRef idx="minor">
-                    <a:schemeClr val="tx1"/>
-                  </a:fontRef>
-                </p:style>
-              </p:cxnSp>
-              <p:cxnSp>
-                <p:nvCxnSpPr>
-                  <p:cNvPr id="44" name="Straight Connector 25"/>
-                  <p:cNvCxnSpPr/>
-                  <p:nvPr/>
-                </p:nvCxnSpPr>
-                <p:spPr>
-                  <a:xfrm>
-                    <a:off x="2204157" y="3901034"/>
-                    <a:ext cx="0" cy="160269"/>
-                  </a:xfrm>
-                  <a:prstGeom prst="line">
-                    <a:avLst/>
-                  </a:prstGeom>
-                  <a:ln w="28575" cmpd="sng">
-                    <a:solidFill>
-                      <a:srgbClr val="92D050"/>
-                    </a:solidFill>
-                  </a:ln>
-                  <a:effectLst/>
-                </p:spPr>
-                <p:style>
-                  <a:lnRef idx="2">
-                    <a:schemeClr val="accent1"/>
-                  </a:lnRef>
-                  <a:fillRef idx="0">
-                    <a:schemeClr val="accent1"/>
-                  </a:fillRef>
-                  <a:effectRef idx="1">
-                    <a:schemeClr val="accent1"/>
-                  </a:effectRef>
-                  <a:fontRef idx="minor">
-                    <a:schemeClr val="tx1"/>
-                  </a:fontRef>
-                </p:style>
-              </p:cxnSp>
-              <p:sp>
-                <p:nvSpPr>
-                  <p:cNvPr id="45" name="Rounded Rectangle 26"/>
-                  <p:cNvSpPr/>
-                  <p:nvPr/>
-                </p:nvSpPr>
-                <p:spPr>
-                  <a:xfrm>
-                    <a:off x="1308765" y="3332572"/>
-                    <a:ext cx="384182" cy="410549"/>
-                  </a:xfrm>
-                  <a:prstGeom prst="roundRect">
-                    <a:avLst/>
-                  </a:prstGeom>
-                  <a:solidFill>
-                    <a:srgbClr val="92D050"/>
-                  </a:solidFill>
-                  <a:ln>
-                    <a:noFill/>
-                  </a:ln>
-                  <a:effectLst/>
-                </p:spPr>
-                <p:style>
-                  <a:lnRef idx="1">
-                    <a:schemeClr val="accent1"/>
-                  </a:lnRef>
-                  <a:fillRef idx="3">
-                    <a:schemeClr val="accent1"/>
-                  </a:fillRef>
-                  <a:effectRef idx="2">
-                    <a:schemeClr val="accent1"/>
-                  </a:effectRef>
-                  <a:fontRef idx="minor">
-                    <a:schemeClr val="lt1"/>
-                  </a:fontRef>
-                </p:style>
-                <p:txBody>
-                  <a:bodyPr rtlCol="0" anchor="ctr"/>
-                  <a:lstStyle/>
-                  <a:p>
-                    <a:pPr algn="ctr"/>
-                    <a:endParaRPr lang="en-US" sz="1100">
-                      <a:latin typeface="+mn-ea"/>
-                    </a:endParaRPr>
-                  </a:p>
-                </p:txBody>
-              </p:sp>
-              <p:cxnSp>
-                <p:nvCxnSpPr>
-                  <p:cNvPr id="46" name="Straight Connector 27"/>
-                  <p:cNvCxnSpPr/>
-                  <p:nvPr/>
-                </p:nvCxnSpPr>
-                <p:spPr>
-                  <a:xfrm>
-                    <a:off x="1500856" y="3743121"/>
-                    <a:ext cx="1" cy="157913"/>
-                  </a:xfrm>
-                  <a:prstGeom prst="line">
-                    <a:avLst/>
-                  </a:prstGeom>
-                  <a:ln w="28575" cmpd="sng">
-                    <a:solidFill>
-                      <a:srgbClr val="92D050"/>
-                    </a:solidFill>
-                  </a:ln>
-                  <a:effectLst/>
-                </p:spPr>
-                <p:style>
-                  <a:lnRef idx="2">
-                    <a:schemeClr val="accent1"/>
-                  </a:lnRef>
-                  <a:fillRef idx="0">
-                    <a:schemeClr val="accent1"/>
-                  </a:fillRef>
-                  <a:effectRef idx="1">
-                    <a:schemeClr val="accent1"/>
-                  </a:effectRef>
-                  <a:fontRef idx="minor">
-                    <a:schemeClr val="tx1"/>
-                  </a:fontRef>
-                </p:style>
-              </p:cxnSp>
-              <p:cxnSp>
-                <p:nvCxnSpPr>
-                  <p:cNvPr id="47" name="Straight Connector 28"/>
-                  <p:cNvCxnSpPr>
-                    <a:stCxn id="48" idx="2"/>
-                  </p:cNvCxnSpPr>
-                  <p:nvPr/>
-                </p:nvCxnSpPr>
-                <p:spPr>
-                  <a:xfrm>
-                    <a:off x="2001305" y="3743121"/>
-                    <a:ext cx="3328" cy="157913"/>
-                  </a:xfrm>
-                  <a:prstGeom prst="line">
-                    <a:avLst/>
-                  </a:prstGeom>
-                  <a:ln w="28575" cmpd="sng">
-                    <a:solidFill>
-                      <a:srgbClr val="92D050"/>
-                    </a:solidFill>
-                  </a:ln>
-                  <a:effectLst/>
-                </p:spPr>
-                <p:style>
-                  <a:lnRef idx="2">
-                    <a:schemeClr val="accent1"/>
-                  </a:lnRef>
-                  <a:fillRef idx="0">
-                    <a:schemeClr val="accent1"/>
-                  </a:fillRef>
-                  <a:effectRef idx="1">
-                    <a:schemeClr val="accent1"/>
-                  </a:effectRef>
-                  <a:fontRef idx="minor">
-                    <a:schemeClr val="tx1"/>
-                  </a:fontRef>
-                </p:style>
-              </p:cxnSp>
-              <p:sp>
-                <p:nvSpPr>
-                  <p:cNvPr id="48" name="Rounded Rectangle 29"/>
-                  <p:cNvSpPr/>
-                  <p:nvPr/>
-                </p:nvSpPr>
-                <p:spPr>
-                  <a:xfrm>
-                    <a:off x="1809213" y="3332572"/>
-                    <a:ext cx="384182" cy="410549"/>
-                  </a:xfrm>
-                  <a:prstGeom prst="roundRect">
-                    <a:avLst/>
-                  </a:prstGeom>
-                  <a:solidFill>
-                    <a:srgbClr val="92D050"/>
-                  </a:solidFill>
-                  <a:ln>
-                    <a:noFill/>
-                  </a:ln>
-                  <a:effectLst/>
-                </p:spPr>
-                <p:style>
-                  <a:lnRef idx="1">
-                    <a:schemeClr val="accent1"/>
-                  </a:lnRef>
-                  <a:fillRef idx="3">
-                    <a:schemeClr val="accent1"/>
-                  </a:fillRef>
-                  <a:effectRef idx="2">
-                    <a:schemeClr val="accent1"/>
-                  </a:effectRef>
-                  <a:fontRef idx="minor">
-                    <a:schemeClr val="lt1"/>
-                  </a:fontRef>
-                </p:style>
-                <p:txBody>
-                  <a:bodyPr rtlCol="0" anchor="ctr"/>
-                  <a:lstStyle/>
-                  <a:p>
-                    <a:pPr algn="ctr"/>
-                    <a:endParaRPr lang="en-US" sz="1100">
-                      <a:latin typeface="+mn-ea"/>
-                    </a:endParaRPr>
-                  </a:p>
-                </p:txBody>
-              </p:sp>
-              <p:cxnSp>
-                <p:nvCxnSpPr>
-                  <p:cNvPr id="49" name="Straight Arrow Connector 31"/>
-                  <p:cNvCxnSpPr/>
-                  <p:nvPr/>
-                </p:nvCxnSpPr>
-                <p:spPr>
-                  <a:xfrm>
-                    <a:off x="1500857" y="3537846"/>
-                    <a:ext cx="539203" cy="0"/>
-                  </a:xfrm>
-                  <a:prstGeom prst="straightConnector1">
-                    <a:avLst/>
-                  </a:prstGeom>
-                  <a:ln w="12700" cmpd="sng">
-                    <a:solidFill>
-                      <a:srgbClr val="003300"/>
-                    </a:solidFill>
-                    <a:headEnd type="arrow"/>
-                    <a:tailEnd type="arrow"/>
-                  </a:ln>
-                  <a:effectLst/>
-                </p:spPr>
-                <p:style>
-                  <a:lnRef idx="2">
-                    <a:schemeClr val="accent1"/>
-                  </a:lnRef>
-                  <a:fillRef idx="0">
-                    <a:schemeClr val="accent1"/>
-                  </a:fillRef>
-                  <a:effectRef idx="1">
-                    <a:schemeClr val="accent1"/>
-                  </a:effectRef>
-                  <a:fontRef idx="minor">
-                    <a:schemeClr val="tx1"/>
-                  </a:fontRef>
-                </p:style>
-              </p:cxnSp>
-            </p:grpSp>
-            <p:sp>
-              <p:nvSpPr>
-                <p:cNvPr id="37" name="TextBox 36"/>
-                <p:cNvSpPr txBox="1"/>
-                <p:nvPr/>
-              </p:nvSpPr>
-              <p:spPr>
-                <a:xfrm>
-                  <a:off x="1339149" y="4470020"/>
-                  <a:ext cx="914033" cy="261610"/>
-                </a:xfrm>
-                <a:prstGeom prst="rect">
-                  <a:avLst/>
-                </a:prstGeom>
-                <a:noFill/>
-              </p:spPr>
-              <p:txBody>
-                <a:bodyPr wrap="none" rtlCol="0">
-                  <a:spAutoFit/>
-                </a:bodyPr>
-                <a:lstStyle/>
-                <a:p>
-                  <a:pPr defTabSz="430213">
-                    <a:spcAft>
-                      <a:spcPts val="400"/>
-                    </a:spcAft>
-                    <a:buSzPct val="100000"/>
-                  </a:pPr>
-                  <a:r>
-                    <a:rPr lang="en-US" altLang="ko-KR" sz="1100" b="1" dirty="0">
-                      <a:latin typeface="+mn-ea"/>
-                      <a:cs typeface="HP Simplified" pitchFamily="34" charset="0"/>
-                    </a:rPr>
-                    <a:t>Data Node</a:t>
-                  </a:r>
-                  <a:endParaRPr lang="en-US" sz="1100" b="1" dirty="0">
-                    <a:latin typeface="+mn-ea"/>
-                    <a:cs typeface="HP Simplified" pitchFamily="34" charset="0"/>
-                  </a:endParaRPr>
-                </a:p>
-              </p:txBody>
-            </p:sp>
-          </p:grpSp>
-          <p:grpSp>
-            <p:nvGrpSpPr>
-              <p:cNvPr id="26" name="그룹 125"/>
-              <p:cNvGrpSpPr/>
-              <p:nvPr/>
-            </p:nvGrpSpPr>
-            <p:grpSpPr>
-              <a:xfrm>
-                <a:off x="4393588" y="2986780"/>
-                <a:ext cx="1062034" cy="1704455"/>
-                <a:chOff x="3685766" y="2399156"/>
-                <a:chExt cx="1062034" cy="1704455"/>
-              </a:xfrm>
-            </p:grpSpPr>
-            <p:sp>
-              <p:nvSpPr>
-                <p:cNvPr id="27" name="Rounded Rectangle 33"/>
-                <p:cNvSpPr/>
-                <p:nvPr/>
-              </p:nvSpPr>
-              <p:spPr>
-                <a:xfrm>
-                  <a:off x="4001897" y="3431453"/>
-                  <a:ext cx="384182" cy="410549"/>
-                </a:xfrm>
-                <a:prstGeom prst="roundRect">
-                  <a:avLst/>
-                </a:prstGeom>
-                <a:solidFill>
-                  <a:srgbClr val="104E91"/>
-                </a:solidFill>
-                <a:ln>
-                  <a:noFill/>
-                </a:ln>
-                <a:effectLst/>
-              </p:spPr>
-              <p:style>
-                <a:lnRef idx="1">
-                  <a:schemeClr val="accent1"/>
-                </a:lnRef>
-                <a:fillRef idx="3">
-                  <a:schemeClr val="accent1"/>
-                </a:fillRef>
-                <a:effectRef idx="2">
-                  <a:schemeClr val="accent1"/>
-                </a:effectRef>
-                <a:fontRef idx="minor">
-                  <a:schemeClr val="lt1"/>
-                </a:fontRef>
-              </p:style>
-              <p:txBody>
-                <a:bodyPr rtlCol="0" anchor="ctr"/>
-                <a:lstStyle/>
-                <a:p>
-                  <a:pPr algn="ctr"/>
-                  <a:endParaRPr lang="en-US" sz="1100">
-                    <a:latin typeface="+mn-ea"/>
-                  </a:endParaRPr>
-                </a:p>
-              </p:txBody>
-            </p:sp>
-            <p:sp>
-              <p:nvSpPr>
-                <p:cNvPr id="28" name="Rounded Rectangle 38"/>
-                <p:cNvSpPr/>
-                <p:nvPr/>
-              </p:nvSpPr>
-              <p:spPr>
-                <a:xfrm>
-                  <a:off x="3744171" y="2721422"/>
-                  <a:ext cx="384182" cy="410549"/>
-                </a:xfrm>
-                <a:prstGeom prst="roundRect">
-                  <a:avLst/>
-                </a:prstGeom>
-                <a:solidFill>
-                  <a:srgbClr val="60A4ED"/>
-                </a:solidFill>
-                <a:ln>
-                  <a:noFill/>
-                </a:ln>
-                <a:effectLst/>
-              </p:spPr>
-              <p:style>
-                <a:lnRef idx="1">
-                  <a:schemeClr val="accent1"/>
-                </a:lnRef>
-                <a:fillRef idx="3">
-                  <a:schemeClr val="accent1"/>
-                </a:fillRef>
-                <a:effectRef idx="2">
-                  <a:schemeClr val="accent1"/>
-                </a:effectRef>
-                <a:fontRef idx="minor">
-                  <a:schemeClr val="lt1"/>
-                </a:fontRef>
-              </p:style>
-              <p:txBody>
-                <a:bodyPr rtlCol="0" anchor="ctr"/>
-                <a:lstStyle/>
-                <a:p>
-                  <a:pPr algn="ctr"/>
-                  <a:endParaRPr lang="en-US" sz="1100">
-                    <a:solidFill>
-                      <a:schemeClr val="accent4">
-                        <a:lumMod val="60000"/>
-                        <a:lumOff val="40000"/>
-                      </a:schemeClr>
-                    </a:solidFill>
-                    <a:latin typeface="+mn-ea"/>
-                  </a:endParaRPr>
-                </a:p>
-              </p:txBody>
-            </p:sp>
-            <p:cxnSp>
-              <p:nvCxnSpPr>
-                <p:cNvPr id="29" name="Straight Connector 39"/>
-                <p:cNvCxnSpPr>
-                  <a:endCxn id="27" idx="0"/>
-                </p:cNvCxnSpPr>
-                <p:nvPr/>
-              </p:nvCxnSpPr>
-              <p:spPr>
-                <a:xfrm>
-                  <a:off x="3924386" y="3131970"/>
-                  <a:ext cx="269602" cy="299483"/>
-                </a:xfrm>
-                <a:prstGeom prst="line">
-                  <a:avLst/>
-                </a:prstGeom>
-                <a:ln w="28575" cmpd="sng">
-                  <a:solidFill>
-                    <a:schemeClr val="accent4">
-                      <a:lumMod val="50000"/>
-                    </a:schemeClr>
-                  </a:solidFill>
-                </a:ln>
-                <a:effectLst/>
-              </p:spPr>
-              <p:style>
-                <a:lnRef idx="2">
-                  <a:schemeClr val="accent1"/>
-                </a:lnRef>
-                <a:fillRef idx="0">
-                  <a:schemeClr val="accent1"/>
-                </a:fillRef>
-                <a:effectRef idx="1">
-                  <a:schemeClr val="accent1"/>
-                </a:effectRef>
-                <a:fontRef idx="minor">
-                  <a:schemeClr val="tx1"/>
-                </a:fontRef>
-              </p:style>
-            </p:cxnSp>
-            <p:cxnSp>
-              <p:nvCxnSpPr>
-                <p:cNvPr id="30" name="Straight Connector 40"/>
-                <p:cNvCxnSpPr>
-                  <a:stCxn id="31" idx="2"/>
-                  <a:endCxn id="27" idx="0"/>
-                </p:cNvCxnSpPr>
-                <p:nvPr/>
-              </p:nvCxnSpPr>
-              <p:spPr>
-                <a:xfrm flipH="1">
-                  <a:off x="4193988" y="3131971"/>
-                  <a:ext cx="242721" cy="299482"/>
-                </a:xfrm>
-                <a:prstGeom prst="line">
-                  <a:avLst/>
-                </a:prstGeom>
-                <a:ln w="28575" cmpd="sng">
-                  <a:solidFill>
-                    <a:schemeClr val="accent4">
-                      <a:lumMod val="50000"/>
-                    </a:schemeClr>
-                  </a:solidFill>
-                </a:ln>
-                <a:effectLst/>
-              </p:spPr>
-              <p:style>
-                <a:lnRef idx="2">
-                  <a:schemeClr val="accent1"/>
-                </a:lnRef>
-                <a:fillRef idx="0">
-                  <a:schemeClr val="accent1"/>
-                </a:fillRef>
-                <a:effectRef idx="1">
-                  <a:schemeClr val="accent1"/>
-                </a:effectRef>
-                <a:fontRef idx="minor">
-                  <a:schemeClr val="tx1"/>
-                </a:fontRef>
-              </p:style>
-            </p:cxnSp>
-            <p:sp>
-              <p:nvSpPr>
-                <p:cNvPr id="31" name="Rounded Rectangle 41"/>
-                <p:cNvSpPr/>
-                <p:nvPr/>
-              </p:nvSpPr>
-              <p:spPr>
-                <a:xfrm>
-                  <a:off x="4244618" y="2721422"/>
-                  <a:ext cx="384182" cy="410549"/>
-                </a:xfrm>
-                <a:prstGeom prst="roundRect">
-                  <a:avLst/>
-                </a:prstGeom>
-                <a:solidFill>
-                  <a:srgbClr val="60A4ED"/>
-                </a:solidFill>
-                <a:ln>
-                  <a:noFill/>
-                </a:ln>
-                <a:effectLst/>
-              </p:spPr>
-              <p:style>
-                <a:lnRef idx="1">
-                  <a:schemeClr val="accent1"/>
-                </a:lnRef>
-                <a:fillRef idx="3">
-                  <a:schemeClr val="accent1"/>
-                </a:fillRef>
-                <a:effectRef idx="2">
-                  <a:schemeClr val="accent1"/>
-                </a:effectRef>
-                <a:fontRef idx="minor">
-                  <a:schemeClr val="lt1"/>
-                </a:fontRef>
-              </p:style>
-              <p:txBody>
-                <a:bodyPr rtlCol="0" anchor="ctr"/>
-                <a:lstStyle/>
-                <a:p>
-                  <a:pPr algn="ctr"/>
-                  <a:endParaRPr lang="en-US" sz="1100">
-                    <a:latin typeface="+mn-ea"/>
-                  </a:endParaRPr>
-                </a:p>
-              </p:txBody>
-            </p:sp>
-            <p:sp>
-              <p:nvSpPr>
-                <p:cNvPr id="32" name="TextBox 31"/>
-                <p:cNvSpPr txBox="1"/>
-                <p:nvPr/>
-              </p:nvSpPr>
-              <p:spPr>
-                <a:xfrm>
-                  <a:off x="3685766" y="2399156"/>
-                  <a:ext cx="458780" cy="261610"/>
-                </a:xfrm>
-                <a:prstGeom prst="rect">
-                  <a:avLst/>
-                </a:prstGeom>
-                <a:noFill/>
-              </p:spPr>
-              <p:txBody>
-                <a:bodyPr wrap="none" rtlCol="0">
-                  <a:spAutoFit/>
-                </a:bodyPr>
-                <a:lstStyle/>
-                <a:p>
-                  <a:pPr defTabSz="430213">
-                    <a:spcAft>
-                      <a:spcPts val="400"/>
-                    </a:spcAft>
-                    <a:buSzPct val="100000"/>
-                  </a:pPr>
-                  <a:r>
-                    <a:rPr lang="en-US" sz="1100" b="1" dirty="0">
-                      <a:latin typeface="+mn-ea"/>
-                      <a:cs typeface="HP Simplified" pitchFamily="34" charset="0"/>
-                    </a:rPr>
-                    <a:t>R/W</a:t>
-                  </a:r>
-                </a:p>
-              </p:txBody>
-            </p:sp>
-            <p:sp>
-              <p:nvSpPr>
-                <p:cNvPr id="33" name="TextBox 32"/>
-                <p:cNvSpPr txBox="1"/>
-                <p:nvPr/>
-              </p:nvSpPr>
-              <p:spPr>
-                <a:xfrm>
-                  <a:off x="3833521" y="3842001"/>
-                  <a:ext cx="710451" cy="261610"/>
-                </a:xfrm>
-                <a:prstGeom prst="rect">
-                  <a:avLst/>
-                </a:prstGeom>
-                <a:noFill/>
-              </p:spPr>
-              <p:txBody>
-                <a:bodyPr wrap="none" rtlCol="0">
-                  <a:spAutoFit/>
-                </a:bodyPr>
-                <a:lstStyle/>
-                <a:p>
-                  <a:pPr defTabSz="430213">
-                    <a:spcAft>
-                      <a:spcPts val="400"/>
-                    </a:spcAft>
-                    <a:buSzPct val="100000"/>
-                  </a:pPr>
-                  <a:r>
-                    <a:rPr lang="en-US" sz="1100" b="1" dirty="0">
-                      <a:latin typeface="+mn-ea"/>
-                      <a:cs typeface="HP Simplified" pitchFamily="34" charset="0"/>
-                    </a:rPr>
-                    <a:t>Storage</a:t>
-                  </a:r>
-                </a:p>
-              </p:txBody>
-            </p:sp>
-            <p:sp>
-              <p:nvSpPr>
-                <p:cNvPr id="34" name="TextBox 33"/>
-                <p:cNvSpPr txBox="1"/>
-                <p:nvPr/>
-              </p:nvSpPr>
-              <p:spPr>
-                <a:xfrm>
-                  <a:off x="4160780" y="2399156"/>
-                  <a:ext cx="587020" cy="261610"/>
-                </a:xfrm>
-                <a:prstGeom prst="rect">
-                  <a:avLst/>
-                </a:prstGeom>
-                <a:noFill/>
-              </p:spPr>
-              <p:txBody>
-                <a:bodyPr wrap="none" rtlCol="0">
-                  <a:spAutoFit/>
-                </a:bodyPr>
-                <a:lstStyle/>
-                <a:p>
-                  <a:pPr defTabSz="430213">
-                    <a:spcAft>
-                      <a:spcPts val="400"/>
-                    </a:spcAft>
-                    <a:buSzPct val="100000"/>
-                  </a:pPr>
-                  <a:r>
-                    <a:rPr lang="en-US" sz="1100" b="1" dirty="0">
-                      <a:latin typeface="+mn-ea"/>
-                      <a:cs typeface="HP Simplified" pitchFamily="34" charset="0"/>
-                    </a:rPr>
-                    <a:t>READ</a:t>
-                  </a:r>
-                </a:p>
-              </p:txBody>
-            </p:sp>
-          </p:grpSp>
-        </p:grpSp>
-        <p:sp>
-          <p:nvSpPr>
-            <p:cNvPr id="23" name="Rectangle 18"/>
-            <p:cNvSpPr/>
-            <p:nvPr/>
-          </p:nvSpPr>
-          <p:spPr>
-            <a:xfrm>
-              <a:off x="2415186" y="2547978"/>
-              <a:ext cx="1633781" cy="338554"/>
-            </a:xfrm>
-            <a:prstGeom prst="rect">
-              <a:avLst/>
-            </a:prstGeom>
-          </p:spPr>
-          <p:txBody>
-            <a:bodyPr wrap="none">
-              <a:spAutoFit/>
-            </a:bodyPr>
-            <a:lstStyle/>
-            <a:p>
-              <a:pPr algn="ctr" defTabSz="430213">
-                <a:spcAft>
-                  <a:spcPts val="400"/>
-                </a:spcAft>
-                <a:buSzPct val="100000"/>
-              </a:pPr>
-              <a:r>
-                <a:rPr lang="en-US" sz="1600" b="1" dirty="0">
-                  <a:latin typeface="+mn-ea"/>
-                  <a:cs typeface="HP Simplified" pitchFamily="34" charset="0"/>
-                </a:rPr>
-                <a:t>Other Systems</a:t>
-              </a:r>
-            </a:p>
-          </p:txBody>
-        </p:sp>
-      </p:grpSp>
-      <p:pic>
-        <p:nvPicPr>
-          <p:cNvPr id="66" name="Picture 2" descr="versus png에 대한 이미지 검색결과">
-            <a:extLst>
-              <a:ext uri="{FF2B5EF4-FFF2-40B4-BE49-F238E27FC236}">
-                <a16:creationId xmlns="" xmlns:a16="http://schemas.microsoft.com/office/drawing/2014/main" id="{7CF353E0-AD86-40C8-A8CD-549B85952746}"/>
-              </a:ext>
-            </a:extLst>
-          </p:cNvPr>
-          <p:cNvPicPr>
-            <a:picLocks noChangeAspect="1" noChangeArrowheads="1"/>
-          </p:cNvPicPr>
-          <p:nvPr/>
-        </p:nvPicPr>
-        <p:blipFill>
-          <a:blip r:embed="rId2">
-            <a:extLst>
-              <a:ext uri="{28A0092B-C50C-407E-A947-70E740481C1C}">
-                <a14:useLocalDpi xmlns:a14="http://schemas.microsoft.com/office/drawing/2010/main" val="0"/>
-              </a:ext>
-            </a:extLst>
-          </a:blip>
-          <a:srcRect/>
-          <a:stretch>
-            <a:fillRect/>
-          </a:stretch>
-        </p:blipFill>
-        <p:spPr bwMode="auto">
-          <a:xfrm>
-            <a:off x="4471009" y="2903897"/>
-            <a:ext cx="1170546" cy="1170546"/>
-          </a:xfrm>
-          <a:prstGeom prst="rect">
-            <a:avLst/>
-          </a:prstGeom>
-          <a:noFill/>
-          <a:extLst>
-            <a:ext uri="{909E8E84-426E-40DD-AFC4-6F175D3DCCD1}">
-              <a14:hiddenFill xmlns:a14="http://schemas.microsoft.com/office/drawing/2010/main">
-                <a:solidFill>
-                  <a:srgbClr val="FFFFFF"/>
-                </a:solidFill>
-              </a14:hiddenFill>
-            </a:ext>
-          </a:extLst>
-        </p:spPr>
-      </p:pic>
-      <p:grpSp>
-        <p:nvGrpSpPr>
-          <p:cNvPr id="67" name="그룹 66"/>
-          <p:cNvGrpSpPr/>
-          <p:nvPr/>
-        </p:nvGrpSpPr>
-        <p:grpSpPr>
-          <a:xfrm>
-            <a:off x="6283271" y="1779028"/>
-            <a:ext cx="2643013" cy="2270649"/>
-            <a:chOff x="7746031" y="2605603"/>
-            <a:chExt cx="2643013" cy="2270649"/>
-          </a:xfrm>
-        </p:grpSpPr>
-        <p:grpSp>
-          <p:nvGrpSpPr>
-            <p:cNvPr id="68" name="그룹 67"/>
-            <p:cNvGrpSpPr/>
-            <p:nvPr/>
-          </p:nvGrpSpPr>
-          <p:grpSpPr>
-            <a:xfrm>
-              <a:off x="7767471" y="3263550"/>
-              <a:ext cx="2566104" cy="649573"/>
-              <a:chOff x="7767471" y="3263550"/>
-              <a:chExt cx="2566104" cy="649573"/>
-            </a:xfrm>
-          </p:grpSpPr>
-          <p:cxnSp>
-            <p:nvCxnSpPr>
-              <p:cNvPr id="73" name="Straight Connector 8"/>
-              <p:cNvCxnSpPr/>
-              <p:nvPr/>
-            </p:nvCxnSpPr>
-            <p:spPr>
-              <a:xfrm>
-                <a:off x="7767471" y="3263550"/>
-                <a:ext cx="2566104" cy="0"/>
-              </a:xfrm>
-              <a:prstGeom prst="line">
-                <a:avLst/>
-              </a:prstGeom>
-              <a:ln w="28575" cmpd="sng">
-                <a:solidFill>
-                  <a:srgbClr val="0079EF"/>
-                </a:solidFill>
-              </a:ln>
-              <a:effectLst/>
-            </p:spPr>
-            <p:style>
-              <a:lnRef idx="2">
-                <a:schemeClr val="accent1"/>
-              </a:lnRef>
-              <a:fillRef idx="0">
-                <a:schemeClr val="accent1"/>
-              </a:fillRef>
-              <a:effectRef idx="1">
-                <a:schemeClr val="accent1"/>
-              </a:effectRef>
-              <a:fontRef idx="minor">
-                <a:schemeClr val="tx1"/>
-              </a:fontRef>
-            </p:style>
-          </p:cxnSp>
-          <p:grpSp>
-            <p:nvGrpSpPr>
-              <p:cNvPr id="74" name="그룹 73"/>
-              <p:cNvGrpSpPr/>
-              <p:nvPr/>
-            </p:nvGrpSpPr>
-            <p:grpSpPr>
-              <a:xfrm>
-                <a:off x="7815960" y="3263550"/>
-                <a:ext cx="418641" cy="649573"/>
-                <a:chOff x="8086547" y="3263550"/>
-                <a:chExt cx="418641" cy="649573"/>
-              </a:xfrm>
-            </p:grpSpPr>
-            <p:sp>
-              <p:nvSpPr>
-                <p:cNvPr id="84" name="Rounded Rectangle 4"/>
-                <p:cNvSpPr/>
-                <p:nvPr/>
-              </p:nvSpPr>
-              <p:spPr>
-                <a:xfrm>
-                  <a:off x="8086547" y="3498031"/>
-                  <a:ext cx="418641" cy="415092"/>
-                </a:xfrm>
-                <a:prstGeom prst="roundRect">
-                  <a:avLst/>
-                </a:prstGeom>
-                <a:solidFill>
-                  <a:srgbClr val="0079EF"/>
-                </a:solidFill>
-                <a:ln>
-                  <a:noFill/>
-                </a:ln>
-                <a:effectLst/>
-              </p:spPr>
-              <p:style>
-                <a:lnRef idx="1">
-                  <a:schemeClr val="accent1"/>
-                </a:lnRef>
-                <a:fillRef idx="3">
-                  <a:schemeClr val="accent1"/>
-                </a:fillRef>
-                <a:effectRef idx="2">
-                  <a:schemeClr val="accent1"/>
-                </a:effectRef>
-                <a:fontRef idx="minor">
-                  <a:schemeClr val="lt1"/>
-                </a:fontRef>
-              </p:style>
-              <p:txBody>
-                <a:bodyPr rtlCol="0" anchor="ctr"/>
-                <a:lstStyle/>
-                <a:p>
-                  <a:pPr algn="ctr"/>
-                  <a:endParaRPr lang="en-US">
-                    <a:latin typeface="+mn-ea"/>
-                  </a:endParaRPr>
-                </a:p>
-              </p:txBody>
-            </p:sp>
-            <p:cxnSp>
-              <p:nvCxnSpPr>
-                <p:cNvPr id="85" name="Straight Connector 9"/>
-                <p:cNvCxnSpPr/>
-                <p:nvPr/>
-              </p:nvCxnSpPr>
-              <p:spPr>
-                <a:xfrm>
-                  <a:off x="8295867" y="3263550"/>
-                  <a:ext cx="0" cy="253388"/>
-                </a:xfrm>
-                <a:prstGeom prst="line">
-                  <a:avLst/>
-                </a:prstGeom>
-                <a:ln w="28575" cmpd="sng">
-                  <a:solidFill>
-                    <a:srgbClr val="0079EF"/>
-                  </a:solidFill>
-                </a:ln>
-                <a:effectLst/>
-              </p:spPr>
-              <p:style>
-                <a:lnRef idx="2">
-                  <a:schemeClr val="accent1"/>
-                </a:lnRef>
-                <a:fillRef idx="0">
-                  <a:schemeClr val="accent1"/>
-                </a:fillRef>
-                <a:effectRef idx="1">
-                  <a:schemeClr val="accent1"/>
-                </a:effectRef>
-                <a:fontRef idx="minor">
-                  <a:schemeClr val="tx1"/>
-                </a:fontRef>
-              </p:style>
-            </p:cxnSp>
-          </p:grpSp>
-          <p:grpSp>
-            <p:nvGrpSpPr>
-              <p:cNvPr id="75" name="그룹 74"/>
-              <p:cNvGrpSpPr/>
-              <p:nvPr/>
-            </p:nvGrpSpPr>
-            <p:grpSpPr>
-              <a:xfrm>
-                <a:off x="8493237" y="3263550"/>
-                <a:ext cx="418641" cy="649573"/>
-                <a:chOff x="8589651" y="3263550"/>
-                <a:chExt cx="418641" cy="649573"/>
-              </a:xfrm>
-            </p:grpSpPr>
-            <p:sp>
-              <p:nvSpPr>
-                <p:cNvPr id="82" name="Rounded Rectangle 5"/>
-                <p:cNvSpPr/>
-                <p:nvPr/>
-              </p:nvSpPr>
-              <p:spPr>
-                <a:xfrm>
-                  <a:off x="8589651" y="3498031"/>
-                  <a:ext cx="418641" cy="415092"/>
-                </a:xfrm>
-                <a:prstGeom prst="roundRect">
-                  <a:avLst/>
-                </a:prstGeom>
-                <a:solidFill>
-                  <a:srgbClr val="0079EF"/>
-                </a:solidFill>
-                <a:ln>
-                  <a:noFill/>
-                </a:ln>
-                <a:effectLst/>
-              </p:spPr>
-              <p:style>
-                <a:lnRef idx="1">
-                  <a:schemeClr val="accent1"/>
-                </a:lnRef>
-                <a:fillRef idx="3">
-                  <a:schemeClr val="accent1"/>
-                </a:fillRef>
-                <a:effectRef idx="2">
-                  <a:schemeClr val="accent1"/>
-                </a:effectRef>
-                <a:fontRef idx="minor">
-                  <a:schemeClr val="lt1"/>
-                </a:fontRef>
-              </p:style>
-              <p:txBody>
-                <a:bodyPr rtlCol="0" anchor="ctr"/>
-                <a:lstStyle/>
-                <a:p>
-                  <a:pPr algn="ctr"/>
-                  <a:endParaRPr lang="en-US">
-                    <a:latin typeface="+mn-ea"/>
-                  </a:endParaRPr>
-                </a:p>
-              </p:txBody>
-            </p:sp>
-            <p:cxnSp>
-              <p:nvCxnSpPr>
-                <p:cNvPr id="83" name="Straight Connector 10"/>
-                <p:cNvCxnSpPr/>
-                <p:nvPr/>
-              </p:nvCxnSpPr>
-              <p:spPr>
-                <a:xfrm>
-                  <a:off x="8798970" y="3263550"/>
-                  <a:ext cx="0" cy="253388"/>
-                </a:xfrm>
-                <a:prstGeom prst="line">
-                  <a:avLst/>
-                </a:prstGeom>
-                <a:ln w="28575" cmpd="sng">
-                  <a:solidFill>
-                    <a:srgbClr val="0079EF"/>
-                  </a:solidFill>
-                </a:ln>
-                <a:effectLst/>
-              </p:spPr>
-              <p:style>
-                <a:lnRef idx="2">
-                  <a:schemeClr val="accent1"/>
-                </a:lnRef>
-                <a:fillRef idx="0">
-                  <a:schemeClr val="accent1"/>
-                </a:fillRef>
-                <a:effectRef idx="1">
-                  <a:schemeClr val="accent1"/>
-                </a:effectRef>
-                <a:fontRef idx="minor">
-                  <a:schemeClr val="tx1"/>
-                </a:fontRef>
-              </p:style>
-            </p:cxnSp>
-          </p:grpSp>
-          <p:grpSp>
-            <p:nvGrpSpPr>
-              <p:cNvPr id="76" name="그룹 75"/>
-              <p:cNvGrpSpPr/>
-              <p:nvPr/>
-            </p:nvGrpSpPr>
-            <p:grpSpPr>
-              <a:xfrm>
-                <a:off x="9170514" y="3263550"/>
-                <a:ext cx="418641" cy="649573"/>
-                <a:chOff x="9092755" y="3263550"/>
-                <a:chExt cx="418641" cy="649573"/>
-              </a:xfrm>
-            </p:grpSpPr>
-            <p:sp>
-              <p:nvSpPr>
-                <p:cNvPr id="80" name="Rounded Rectangle 6"/>
-                <p:cNvSpPr/>
-                <p:nvPr/>
-              </p:nvSpPr>
-              <p:spPr>
-                <a:xfrm>
-                  <a:off x="9092755" y="3498031"/>
-                  <a:ext cx="418641" cy="415092"/>
-                </a:xfrm>
-                <a:prstGeom prst="roundRect">
-                  <a:avLst/>
-                </a:prstGeom>
-                <a:solidFill>
-                  <a:srgbClr val="0079EF"/>
-                </a:solidFill>
-                <a:ln>
-                  <a:noFill/>
-                </a:ln>
-                <a:effectLst/>
-              </p:spPr>
-              <p:style>
-                <a:lnRef idx="1">
-                  <a:schemeClr val="accent1"/>
-                </a:lnRef>
-                <a:fillRef idx="3">
-                  <a:schemeClr val="accent1"/>
-                </a:fillRef>
-                <a:effectRef idx="2">
-                  <a:schemeClr val="accent1"/>
-                </a:effectRef>
-                <a:fontRef idx="minor">
-                  <a:schemeClr val="lt1"/>
-                </a:fontRef>
-              </p:style>
-              <p:txBody>
-                <a:bodyPr rtlCol="0" anchor="ctr"/>
-                <a:lstStyle/>
-                <a:p>
-                  <a:pPr algn="ctr"/>
-                  <a:endParaRPr lang="en-US">
-                    <a:latin typeface="+mn-ea"/>
-                  </a:endParaRPr>
-                </a:p>
-              </p:txBody>
-            </p:sp>
-            <p:cxnSp>
-              <p:nvCxnSpPr>
-                <p:cNvPr id="81" name="Straight Connector 11"/>
-                <p:cNvCxnSpPr/>
-                <p:nvPr/>
-              </p:nvCxnSpPr>
-              <p:spPr>
-                <a:xfrm>
-                  <a:off x="9302075" y="3263550"/>
-                  <a:ext cx="0" cy="253388"/>
-                </a:xfrm>
-                <a:prstGeom prst="line">
-                  <a:avLst/>
-                </a:prstGeom>
-                <a:ln w="28575" cmpd="sng">
-                  <a:solidFill>
-                    <a:srgbClr val="0079EF"/>
-                  </a:solidFill>
-                </a:ln>
-                <a:effectLst/>
-              </p:spPr>
-              <p:style>
-                <a:lnRef idx="2">
-                  <a:schemeClr val="accent1"/>
-                </a:lnRef>
-                <a:fillRef idx="0">
-                  <a:schemeClr val="accent1"/>
-                </a:fillRef>
-                <a:effectRef idx="1">
-                  <a:schemeClr val="accent1"/>
-                </a:effectRef>
-                <a:fontRef idx="minor">
-                  <a:schemeClr val="tx1"/>
-                </a:fontRef>
-              </p:style>
-            </p:cxnSp>
-          </p:grpSp>
-          <p:grpSp>
-            <p:nvGrpSpPr>
-              <p:cNvPr id="77" name="그룹 76"/>
-              <p:cNvGrpSpPr/>
-              <p:nvPr/>
-            </p:nvGrpSpPr>
-            <p:grpSpPr>
-              <a:xfrm>
-                <a:off x="9847791" y="3263550"/>
-                <a:ext cx="418641" cy="649573"/>
-                <a:chOff x="9595858" y="3263550"/>
-                <a:chExt cx="418641" cy="649573"/>
-              </a:xfrm>
-            </p:grpSpPr>
-            <p:sp>
-              <p:nvSpPr>
-                <p:cNvPr id="78" name="Rounded Rectangle 7"/>
-                <p:cNvSpPr/>
-                <p:nvPr/>
-              </p:nvSpPr>
-              <p:spPr>
-                <a:xfrm>
-                  <a:off x="9595858" y="3498031"/>
-                  <a:ext cx="418641" cy="415092"/>
-                </a:xfrm>
-                <a:prstGeom prst="roundRect">
-                  <a:avLst/>
-                </a:prstGeom>
-                <a:solidFill>
-                  <a:srgbClr val="0079EF"/>
-                </a:solidFill>
-                <a:ln>
-                  <a:noFill/>
-                </a:ln>
-                <a:effectLst/>
-              </p:spPr>
-              <p:style>
-                <a:lnRef idx="1">
-                  <a:schemeClr val="accent1"/>
-                </a:lnRef>
-                <a:fillRef idx="3">
-                  <a:schemeClr val="accent1"/>
-                </a:fillRef>
-                <a:effectRef idx="2">
-                  <a:schemeClr val="accent1"/>
-                </a:effectRef>
-                <a:fontRef idx="minor">
-                  <a:schemeClr val="lt1"/>
-                </a:fontRef>
-              </p:style>
-              <p:txBody>
-                <a:bodyPr rtlCol="0" anchor="ctr"/>
-                <a:lstStyle/>
-                <a:p>
-                  <a:pPr algn="ctr"/>
-                  <a:endParaRPr lang="en-US">
-                    <a:latin typeface="+mn-ea"/>
-                  </a:endParaRPr>
-                </a:p>
-              </p:txBody>
-            </p:sp>
-            <p:cxnSp>
-              <p:nvCxnSpPr>
-                <p:cNvPr id="79" name="Straight Connector 12"/>
-                <p:cNvCxnSpPr/>
-                <p:nvPr/>
-              </p:nvCxnSpPr>
-              <p:spPr>
-                <a:xfrm>
-                  <a:off x="9805178" y="3263550"/>
-                  <a:ext cx="0" cy="253388"/>
-                </a:xfrm>
-                <a:prstGeom prst="line">
-                  <a:avLst/>
-                </a:prstGeom>
-                <a:ln w="28575" cmpd="sng">
-                  <a:solidFill>
-                    <a:srgbClr val="0079EF"/>
-                  </a:solidFill>
-                </a:ln>
-                <a:effectLst/>
-              </p:spPr>
-              <p:style>
-                <a:lnRef idx="2">
-                  <a:schemeClr val="accent1"/>
-                </a:lnRef>
-                <a:fillRef idx="0">
-                  <a:schemeClr val="accent1"/>
-                </a:fillRef>
-                <a:effectRef idx="1">
-                  <a:schemeClr val="accent1"/>
-                </a:effectRef>
-                <a:fontRef idx="minor">
-                  <a:schemeClr val="tx1"/>
-                </a:fontRef>
-              </p:style>
-            </p:cxnSp>
-          </p:grpSp>
-        </p:grpSp>
-        <p:sp>
-          <p:nvSpPr>
-            <p:cNvPr id="69" name="TextBox 68"/>
-            <p:cNvSpPr txBox="1"/>
-            <p:nvPr/>
-          </p:nvSpPr>
-          <p:spPr>
-            <a:xfrm>
-              <a:off x="8238483" y="2972991"/>
-              <a:ext cx="1483098" cy="261610"/>
-            </a:xfrm>
-            <a:prstGeom prst="rect">
-              <a:avLst/>
-            </a:prstGeom>
-            <a:noFill/>
-          </p:spPr>
-          <p:txBody>
-            <a:bodyPr wrap="none" rtlCol="0">
-              <a:spAutoFit/>
-            </a:bodyPr>
-            <a:lstStyle/>
-            <a:p>
-              <a:pPr defTabSz="430213">
-                <a:spcAft>
-                  <a:spcPts val="400"/>
-                </a:spcAft>
-                <a:buSzPct val="100000"/>
-              </a:pPr>
-              <a:r>
-                <a:rPr lang="en-US" altLang="ko-KR" sz="1100" b="1" dirty="0">
-                  <a:latin typeface="+mn-ea"/>
-                  <a:cs typeface="HP Simplified" pitchFamily="34" charset="0"/>
-                </a:rPr>
-                <a:t>10G Ethernet N/W </a:t>
-              </a:r>
-              <a:endParaRPr lang="en-US" sz="1100" b="1" dirty="0">
-                <a:latin typeface="+mn-ea"/>
-                <a:cs typeface="HP Simplified" pitchFamily="34" charset="0"/>
-              </a:endParaRPr>
-            </a:p>
-          </p:txBody>
-        </p:sp>
-        <p:sp>
-          <p:nvSpPr>
-            <p:cNvPr id="70" name="TextBox 69"/>
-            <p:cNvSpPr txBox="1"/>
-            <p:nvPr/>
-          </p:nvSpPr>
-          <p:spPr>
-            <a:xfrm>
-              <a:off x="7970741" y="3574932"/>
-              <a:ext cx="2145870" cy="252000"/>
-            </a:xfrm>
-            <a:prstGeom prst="rect">
-              <a:avLst/>
-            </a:prstGeom>
-            <a:solidFill>
-              <a:schemeClr val="bg1"/>
-            </a:solidFill>
-          </p:spPr>
-          <p:txBody>
-            <a:bodyPr wrap="none" rtlCol="0">
-              <a:noAutofit/>
-            </a:bodyPr>
-            <a:lstStyle/>
-            <a:p>
-              <a:pPr algn="ctr" defTabSz="430213">
-                <a:spcAft>
-                  <a:spcPts val="400"/>
-                </a:spcAft>
-                <a:buSzPct val="100000"/>
-              </a:pPr>
-              <a:r>
-                <a:rPr lang="en-US" altLang="ko-KR" sz="1100" b="1" dirty="0">
-                  <a:latin typeface="+mn-ea"/>
-                  <a:cs typeface="HP Simplified" pitchFamily="34" charset="0"/>
-                </a:rPr>
-                <a:t>Commodity Servers</a:t>
-              </a:r>
-              <a:endParaRPr lang="en-US" sz="1100" b="1" dirty="0">
-                <a:latin typeface="+mn-ea"/>
-                <a:cs typeface="HP Simplified" pitchFamily="34" charset="0"/>
-              </a:endParaRPr>
-            </a:p>
-          </p:txBody>
-        </p:sp>
-        <p:sp>
-          <p:nvSpPr>
-            <p:cNvPr id="71" name="TextBox 70"/>
-            <p:cNvSpPr txBox="1"/>
-            <p:nvPr/>
-          </p:nvSpPr>
-          <p:spPr>
-            <a:xfrm>
-              <a:off x="7746031" y="4168366"/>
-              <a:ext cx="2643013" cy="707886"/>
-            </a:xfrm>
-            <a:prstGeom prst="rect">
-              <a:avLst/>
-            </a:prstGeom>
-            <a:noFill/>
-          </p:spPr>
-          <p:txBody>
-            <a:bodyPr wrap="square" rtlCol="0">
-              <a:spAutoFit/>
-            </a:bodyPr>
-            <a:lstStyle/>
-            <a:p>
-              <a:pPr marL="171450" indent="-171450" defTabSz="430213">
-                <a:lnSpc>
-                  <a:spcPts val="1200"/>
-                </a:lnSpc>
-                <a:buSzPct val="100000"/>
-                <a:buFont typeface="Wingdings" pitchFamily="2" charset="2"/>
-                <a:buChar char="§"/>
-              </a:pPr>
-              <a:r>
-                <a:rPr lang="en-US" altLang="ko-KR" sz="1100" dirty="0">
-                  <a:latin typeface="+mn-ea"/>
-                  <a:cs typeface="HP Simplified" pitchFamily="34" charset="0"/>
-                </a:rPr>
-                <a:t>No specialized nodes</a:t>
-              </a:r>
-            </a:p>
-            <a:p>
-              <a:pPr marL="171450" indent="-171450" defTabSz="430213">
-                <a:lnSpc>
-                  <a:spcPts val="1200"/>
-                </a:lnSpc>
-                <a:buSzPct val="100000"/>
-                <a:buFont typeface="Wingdings" pitchFamily="2" charset="2"/>
-                <a:buChar char="§"/>
-              </a:pPr>
-              <a:r>
-                <a:rPr lang="en-US" altLang="ko-KR" sz="1100" dirty="0">
-                  <a:latin typeface="+mn-ea"/>
-                  <a:cs typeface="HP Simplified" pitchFamily="34" charset="0"/>
-                </a:rPr>
-                <a:t>All nodes are peers</a:t>
-              </a:r>
-            </a:p>
-            <a:p>
-              <a:pPr marL="171450" indent="-171450" defTabSz="430213">
-                <a:lnSpc>
-                  <a:spcPts val="1200"/>
-                </a:lnSpc>
-                <a:buSzPct val="100000"/>
-                <a:buFont typeface="Wingdings" pitchFamily="2" charset="2"/>
-                <a:buChar char="§"/>
-              </a:pPr>
-              <a:r>
-                <a:rPr lang="en-US" altLang="ko-KR" sz="1100" dirty="0">
-                  <a:latin typeface="+mn-ea"/>
-                  <a:cs typeface="HP Simplified" pitchFamily="34" charset="0"/>
-                </a:rPr>
-                <a:t>Query/Load to any node</a:t>
-              </a:r>
-            </a:p>
-            <a:p>
-              <a:pPr marL="171450" indent="-171450" defTabSz="430213">
-                <a:lnSpc>
-                  <a:spcPts val="1200"/>
-                </a:lnSpc>
-                <a:buSzPct val="100000"/>
-                <a:buFont typeface="Wingdings" pitchFamily="2" charset="2"/>
-                <a:buChar char="§"/>
-              </a:pPr>
-              <a:r>
-                <a:rPr lang="en-US" altLang="ko-KR" sz="1100" dirty="0">
-                  <a:latin typeface="+mn-ea"/>
-                  <a:cs typeface="HP Simplified" pitchFamily="34" charset="0"/>
-                </a:rPr>
-                <a:t>Continuous/real-time load &amp; query</a:t>
-              </a:r>
-            </a:p>
-          </p:txBody>
-        </p:sp>
-        <p:sp>
-          <p:nvSpPr>
-            <p:cNvPr id="72" name="Rectangle 17"/>
-            <p:cNvSpPr/>
-            <p:nvPr/>
-          </p:nvSpPr>
-          <p:spPr>
-            <a:xfrm>
-              <a:off x="8488904" y="2605603"/>
-              <a:ext cx="1082348" cy="338554"/>
-            </a:xfrm>
-            <a:prstGeom prst="rect">
-              <a:avLst/>
-            </a:prstGeom>
-          </p:spPr>
-          <p:txBody>
-            <a:bodyPr wrap="none">
-              <a:spAutoFit/>
-            </a:bodyPr>
-            <a:lstStyle/>
-            <a:p>
-              <a:pPr defTabSz="430213">
-                <a:spcAft>
-                  <a:spcPts val="400"/>
-                </a:spcAft>
-                <a:buSzPct val="100000"/>
-              </a:pPr>
-              <a:r>
-                <a:rPr lang="en-US" sz="1600" b="1" dirty="0">
-                  <a:latin typeface="+mn-ea"/>
-                  <a:cs typeface="HP Simplified" pitchFamily="34" charset="0"/>
-                </a:rPr>
-                <a:t>VERTICA</a:t>
-              </a:r>
-            </a:p>
-          </p:txBody>
-        </p:sp>
-      </p:grpSp>
-      <p:graphicFrame>
-        <p:nvGraphicFramePr>
-          <p:cNvPr id="86" name="표 85"/>
-          <p:cNvGraphicFramePr>
-            <a:graphicFrameLocks noGrp="1"/>
-          </p:cNvGraphicFramePr>
-          <p:nvPr>
-            <p:extLst>
-              <p:ext uri="{D42A27DB-BD31-4B8C-83A1-F6EECF244321}">
-                <p14:modId xmlns:p14="http://schemas.microsoft.com/office/powerpoint/2010/main" val="559500335"/>
-              </p:ext>
-            </p:extLst>
-          </p:nvPr>
-        </p:nvGraphicFramePr>
-        <p:xfrm>
-          <a:off x="647127" y="4037317"/>
-          <a:ext cx="3351959" cy="1621036"/>
-        </p:xfrm>
-        <a:graphic>
-          <a:graphicData uri="http://schemas.openxmlformats.org/drawingml/2006/table">
-            <a:tbl>
-              <a:tblPr firstRow="1" bandRow="1">
-                <a:tableStyleId>{5C22544A-7EE6-4342-B048-85BDC9FD1C3A}</a:tableStyleId>
-              </a:tblPr>
-              <a:tblGrid>
-                <a:gridCol w="3351959">
-                  <a:extLst>
-                    <a:ext uri="{9D8B030D-6E8A-4147-A177-3AD203B41FA5}">
-                      <a16:colId xmlns="" xmlns:a16="http://schemas.microsoft.com/office/drawing/2014/main" val="20000"/>
-                    </a:ext>
-                  </a:extLst>
-                </a:gridCol>
-              </a:tblGrid>
-              <a:tr h="218465">
-                <a:tc>
-                  <a:txBody>
-                    <a:bodyPr/>
-                    <a:lstStyle/>
-                    <a:p>
-                      <a:pPr algn="ctr" latinLnBrk="1"/>
-                      <a:r>
-                        <a:rPr lang="en-US" altLang="ko-KR" sz="1400" dirty="0">
-                          <a:solidFill>
-                            <a:srgbClr val="0081CD"/>
-                          </a:solidFill>
-                          <a:latin typeface="+mn-ea"/>
-                          <a:ea typeface="+mn-ea"/>
-                        </a:rPr>
-                        <a:t>Other</a:t>
-                      </a:r>
-                      <a:r>
-                        <a:rPr lang="en-US" altLang="ko-KR" sz="1400" baseline="0" dirty="0">
-                          <a:solidFill>
-                            <a:srgbClr val="0081CD"/>
-                          </a:solidFill>
-                          <a:latin typeface="+mn-ea"/>
-                          <a:ea typeface="+mn-ea"/>
-                        </a:rPr>
-                        <a:t> System</a:t>
-                      </a:r>
-                      <a:endParaRPr lang="ko-KR" altLang="en-US" sz="1400" dirty="0">
-                        <a:solidFill>
-                          <a:srgbClr val="0081CD"/>
-                        </a:solidFill>
-                        <a:latin typeface="+mn-ea"/>
-                        <a:ea typeface="+mn-ea"/>
-                      </a:endParaRPr>
-                    </a:p>
-                  </a:txBody>
-                  <a:tcPr>
-                    <a:lnL w="12700" cap="flat" cmpd="sng" algn="ctr">
-                      <a:noFill/>
-                      <a:prstDash val="solid"/>
-                      <a:round/>
-                      <a:headEnd type="none" w="med" len="med"/>
-                      <a:tailEnd type="none" w="med" len="med"/>
-                    </a:lnL>
-                    <a:lnR w="12700" cap="flat" cmpd="sng" algn="ctr">
-                      <a:noFill/>
-                      <a:prstDash val="solid"/>
-                      <a:round/>
-                      <a:headEnd type="none" w="med" len="med"/>
-                      <a:tailEnd type="none" w="med" len="med"/>
-                    </a:lnR>
-                    <a:lnT w="12700" cap="flat" cmpd="sng" algn="ctr">
-                      <a:solidFill>
-                        <a:srgbClr val="0083CE"/>
-                      </a:solidFill>
-                      <a:prstDash val="solid"/>
-                      <a:round/>
-                      <a:headEnd type="none" w="med" len="med"/>
-                      <a:tailEnd type="none" w="med" len="med"/>
-                    </a:lnT>
-                    <a:lnB w="12700" cap="flat" cmpd="sng" algn="ctr">
-                      <a:solidFill>
-                        <a:srgbClr val="0083CE"/>
-                      </a:solidFill>
-                      <a:prstDash val="solid"/>
-                      <a:round/>
-                      <a:headEnd type="none" w="med" len="med"/>
-                      <a:tailEnd type="none" w="med" len="med"/>
-                    </a:lnB>
-                    <a:noFill/>
-                  </a:tcPr>
-                </a:tc>
-                <a:extLst>
-                  <a:ext uri="{0D108BD9-81ED-4DB2-BD59-A6C34878D82A}">
-                    <a16:rowId xmlns="" xmlns:a16="http://schemas.microsoft.com/office/drawing/2014/main" val="10000"/>
-                  </a:ext>
-                </a:extLst>
-              </a:tr>
-              <a:tr h="279916">
-                <a:tc>
-                  <a:txBody>
-                    <a:bodyPr/>
-                    <a:lstStyle/>
-                    <a:p>
-                      <a:pPr marL="0" marR="0" indent="0" algn="l" defTabSz="914400" rtl="0" eaLnBrk="1" fontAlgn="auto" latinLnBrk="1" hangingPunct="1">
-                        <a:lnSpc>
-                          <a:spcPct val="100000"/>
-                        </a:lnSpc>
-                        <a:spcBef>
-                          <a:spcPts val="0"/>
-                        </a:spcBef>
-                        <a:spcAft>
-                          <a:spcPts val="0"/>
-                        </a:spcAft>
-                        <a:buClrTx/>
-                        <a:buSzTx/>
-                        <a:buFontTx/>
-                        <a:buNone/>
-                        <a:tabLst/>
-                        <a:defRPr/>
-                      </a:pPr>
-                      <a:r>
-                        <a:rPr lang="ko-KR" altLang="en-US" sz="1100" kern="1200" dirty="0">
-                          <a:latin typeface="+mn-ea"/>
-                          <a:ea typeface="+mn-ea"/>
-                          <a:cs typeface="Pretendard Variable Light" panose="02000003000000020004" pitchFamily="2" charset="-127"/>
-                        </a:rPr>
-                        <a:t>두 종류 이상의 서버</a:t>
-                      </a:r>
-                      <a:endParaRPr lang="ko-KR" altLang="en-US" sz="1100" b="0" kern="1200" dirty="0">
-                        <a:solidFill>
-                          <a:srgbClr val="000000"/>
-                        </a:solidFill>
-                        <a:latin typeface="+mn-ea"/>
-                        <a:ea typeface="+mn-ea"/>
-                        <a:cs typeface="Pretendard Variable Light" panose="02000003000000020004" pitchFamily="2" charset="-127"/>
-                      </a:endParaRPr>
-                    </a:p>
-                  </a:txBody>
-                  <a:tcPr>
-                    <a:lnL w="12700" cap="flat" cmpd="sng" algn="ctr">
-                      <a:noFill/>
-                      <a:prstDash val="solid"/>
-                      <a:round/>
-                      <a:headEnd type="none" w="med" len="med"/>
-                      <a:tailEnd type="none" w="med" len="med"/>
-                    </a:lnL>
-                    <a:lnR w="12700" cap="flat" cmpd="sng" algn="ctr">
-                      <a:noFill/>
-                      <a:prstDash val="solid"/>
-                      <a:round/>
-                      <a:headEnd type="none" w="med" len="med"/>
-                      <a:tailEnd type="none" w="med" len="med"/>
-                    </a:lnR>
-                    <a:lnT w="12700" cap="flat" cmpd="sng" algn="ctr">
-                      <a:solidFill>
-                        <a:srgbClr val="0083CE"/>
-                      </a:solidFill>
-                      <a:prstDash val="solid"/>
-                      <a:round/>
-                      <a:headEnd type="none" w="med" len="med"/>
-                      <a:tailEnd type="none" w="med" len="med"/>
-                    </a:lnT>
-                    <a:lnB w="12700" cap="flat" cmpd="sng" algn="ctr">
-                      <a:solidFill>
-                        <a:schemeClr val="bg1"/>
-                      </a:solidFill>
-                      <a:prstDash val="solid"/>
-                      <a:round/>
-                      <a:headEnd type="none" w="med" len="med"/>
-                      <a:tailEnd type="none" w="med" len="med"/>
-                    </a:lnB>
-                    <a:noFill/>
-                  </a:tcPr>
-                </a:tc>
-                <a:extLst>
-                  <a:ext uri="{0D108BD9-81ED-4DB2-BD59-A6C34878D82A}">
-                    <a16:rowId xmlns="" xmlns:a16="http://schemas.microsoft.com/office/drawing/2014/main" val="10001"/>
-                  </a:ext>
-                </a:extLst>
-              </a:tr>
-              <a:tr h="150973">
-                <a:tc>
-                  <a:txBody>
-                    <a:bodyPr/>
-                    <a:lstStyle/>
-                    <a:p>
-                      <a:pPr marL="0" marR="0" indent="0" algn="l" defTabSz="914400" rtl="0" eaLnBrk="1" fontAlgn="auto" latinLnBrk="1" hangingPunct="1">
-                        <a:lnSpc>
-                          <a:spcPct val="100000"/>
-                        </a:lnSpc>
-                        <a:spcBef>
-                          <a:spcPts val="0"/>
-                        </a:spcBef>
-                        <a:spcAft>
-                          <a:spcPts val="0"/>
-                        </a:spcAft>
-                        <a:buClrTx/>
-                        <a:buSzTx/>
-                        <a:buFontTx/>
-                        <a:buNone/>
-                        <a:tabLst/>
-                        <a:defRPr/>
-                      </a:pPr>
-                      <a:r>
-                        <a:rPr lang="ko-KR" altLang="en-US" sz="1100" dirty="0">
-                          <a:latin typeface="+mn-ea"/>
-                          <a:ea typeface="+mn-ea"/>
-                          <a:cs typeface="Pretendard Variable Light" panose="02000003000000020004" pitchFamily="2" charset="-127"/>
-                        </a:rPr>
-                        <a:t>특별한 </a:t>
-                      </a:r>
-                      <a:r>
-                        <a:rPr lang="en-US" altLang="ko-KR" sz="1100" dirty="0">
-                          <a:latin typeface="+mn-ea"/>
-                          <a:ea typeface="+mn-ea"/>
-                          <a:cs typeface="Pretendard Variable Light" panose="02000003000000020004" pitchFamily="2" charset="-127"/>
-                        </a:rPr>
-                        <a:t>H/W </a:t>
-                      </a:r>
-                      <a:r>
-                        <a:rPr lang="ko-KR" altLang="en-US" sz="1100" dirty="0">
-                          <a:latin typeface="+mn-ea"/>
-                          <a:ea typeface="+mn-ea"/>
-                          <a:cs typeface="Pretendard Variable Light" panose="02000003000000020004" pitchFamily="2" charset="-127"/>
-                        </a:rPr>
-                        <a:t>사용으로 복잡도 증가</a:t>
-                      </a:r>
-                      <a:endParaRPr lang="en-US" sz="1100" b="0" dirty="0">
-                        <a:latin typeface="+mn-ea"/>
-                        <a:ea typeface="+mn-ea"/>
-                        <a:cs typeface="Pretendard Variable Light" panose="02000003000000020004" pitchFamily="2" charset="-127"/>
-                      </a:endParaRPr>
-                    </a:p>
-                  </a:txBody>
-                  <a:tcPr>
-                    <a:lnL w="12700" cap="flat" cmpd="sng" algn="ctr">
-                      <a:noFill/>
-                      <a:prstDash val="solid"/>
-                      <a:round/>
-                      <a:headEnd type="none" w="med" len="med"/>
-                      <a:tailEnd type="none" w="med" len="med"/>
-                    </a:lnL>
-                    <a:lnR w="12700" cap="flat" cmpd="sng" algn="ctr">
-                      <a:noFill/>
-                      <a:prstDash val="solid"/>
-                      <a:round/>
-                      <a:headEnd type="none" w="med" len="med"/>
-                      <a:tailEnd type="none" w="med" len="med"/>
-                    </a:lnR>
-                    <a:lnT w="12700" cap="flat" cmpd="sng" algn="ctr">
-                      <a:solidFill>
-                        <a:schemeClr val="bg1"/>
-                      </a:solidFill>
-                      <a:prstDash val="solid"/>
-                      <a:round/>
-                      <a:headEnd type="none" w="med" len="med"/>
-                      <a:tailEnd type="none" w="med" len="med"/>
-                    </a:lnT>
-                    <a:lnB w="12700" cap="flat" cmpd="sng" algn="ctr">
-                      <a:solidFill>
-                        <a:schemeClr val="bg1"/>
-                      </a:solidFill>
-                      <a:prstDash val="solid"/>
-                      <a:round/>
-                      <a:headEnd type="none" w="med" len="med"/>
-                      <a:tailEnd type="none" w="med" len="med"/>
-                    </a:lnB>
-                    <a:noFill/>
-                  </a:tcPr>
-                </a:tc>
-                <a:extLst>
-                  <a:ext uri="{0D108BD9-81ED-4DB2-BD59-A6C34878D82A}">
-                    <a16:rowId xmlns="" xmlns:a16="http://schemas.microsoft.com/office/drawing/2014/main" val="10002"/>
-                  </a:ext>
-                </a:extLst>
-              </a:tr>
-              <a:tr h="190680">
-                <a:tc>
-                  <a:txBody>
-                    <a:bodyPr/>
-                    <a:lstStyle/>
-                    <a:p>
-                      <a:pPr marL="0" marR="0" indent="0" algn="l" defTabSz="914400" rtl="0" eaLnBrk="1" fontAlgn="auto" latinLnBrk="1" hangingPunct="1">
-                        <a:lnSpc>
-                          <a:spcPct val="100000"/>
-                        </a:lnSpc>
-                        <a:spcBef>
-                          <a:spcPts val="0"/>
-                        </a:spcBef>
-                        <a:spcAft>
-                          <a:spcPts val="0"/>
-                        </a:spcAft>
-                        <a:buClrTx/>
-                        <a:buSzTx/>
-                        <a:buFontTx/>
-                        <a:buNone/>
-                        <a:tabLst/>
-                        <a:defRPr/>
-                      </a:pPr>
-                      <a:r>
-                        <a:rPr lang="ko-KR" altLang="en-US" sz="1100" kern="1200" dirty="0">
-                          <a:latin typeface="+mn-ea"/>
-                          <a:ea typeface="+mn-ea"/>
-                          <a:cs typeface="Pretendard Variable Light" panose="02000003000000020004" pitchFamily="2" charset="-127"/>
-                        </a:rPr>
-                        <a:t>마스터 서버를 통한 작업 수행</a:t>
-                      </a:r>
-                      <a:endParaRPr lang="en-US" sz="1100" b="0" dirty="0">
-                        <a:latin typeface="+mn-ea"/>
-                        <a:ea typeface="+mn-ea"/>
-                        <a:cs typeface="Pretendard Variable Light" panose="02000003000000020004" pitchFamily="2" charset="-127"/>
-                      </a:endParaRPr>
-                    </a:p>
-                  </a:txBody>
-                  <a:tcPr>
-                    <a:lnL w="12700" cap="flat" cmpd="sng" algn="ctr">
-                      <a:noFill/>
-                      <a:prstDash val="solid"/>
-                      <a:round/>
-                      <a:headEnd type="none" w="med" len="med"/>
-                      <a:tailEnd type="none" w="med" len="med"/>
-                    </a:lnL>
-                    <a:lnR w="12700" cap="flat" cmpd="sng" algn="ctr">
-                      <a:noFill/>
-                      <a:prstDash val="solid"/>
-                      <a:round/>
-                      <a:headEnd type="none" w="med" len="med"/>
-                      <a:tailEnd type="none" w="med" len="med"/>
-                    </a:lnR>
-                    <a:lnT w="12700" cap="flat" cmpd="sng" algn="ctr">
-                      <a:solidFill>
-                        <a:schemeClr val="bg1"/>
-                      </a:solidFill>
-                      <a:prstDash val="solid"/>
-                      <a:round/>
-                      <a:headEnd type="none" w="med" len="med"/>
-                      <a:tailEnd type="none" w="med" len="med"/>
-                    </a:lnT>
-                    <a:lnB w="12700" cap="flat" cmpd="sng" algn="ctr">
-                      <a:solidFill>
-                        <a:schemeClr val="bg1"/>
-                      </a:solidFill>
-                      <a:prstDash val="solid"/>
-                      <a:round/>
-                      <a:headEnd type="none" w="med" len="med"/>
-                      <a:tailEnd type="none" w="med" len="med"/>
-                    </a:lnB>
-                    <a:noFill/>
-                  </a:tcPr>
-                </a:tc>
-                <a:extLst>
-                  <a:ext uri="{0D108BD9-81ED-4DB2-BD59-A6C34878D82A}">
-                    <a16:rowId xmlns="" xmlns:a16="http://schemas.microsoft.com/office/drawing/2014/main" val="10003"/>
-                  </a:ext>
-                </a:extLst>
-              </a:tr>
-              <a:tr h="127518">
-                <a:tc>
-                  <a:txBody>
-                    <a:bodyPr/>
-                    <a:lstStyle/>
-                    <a:p>
-                      <a:pPr algn="l"/>
-                      <a:r>
-                        <a:rPr lang="ko-KR" altLang="en-US" sz="1100" dirty="0">
-                          <a:latin typeface="+mn-ea"/>
-                          <a:ea typeface="+mn-ea"/>
-                          <a:cs typeface="Pretendard Variable Light" panose="02000003000000020004" pitchFamily="2" charset="-127"/>
-                        </a:rPr>
-                        <a:t>저가형 서버 사용</a:t>
-                      </a:r>
-                      <a:endParaRPr lang="en-US" sz="1100" b="0" dirty="0">
-                        <a:latin typeface="+mn-ea"/>
-                        <a:ea typeface="+mn-ea"/>
-                        <a:cs typeface="Pretendard Variable Light" panose="02000003000000020004" pitchFamily="2" charset="-127"/>
-                      </a:endParaRPr>
-                    </a:p>
-                  </a:txBody>
-                  <a:tcPr>
-                    <a:lnL w="12700" cap="flat" cmpd="sng" algn="ctr">
-                      <a:noFill/>
-                      <a:prstDash val="solid"/>
-                      <a:round/>
-                      <a:headEnd type="none" w="med" len="med"/>
-                      <a:tailEnd type="none" w="med" len="med"/>
-                    </a:lnL>
-                    <a:lnR w="12700" cap="flat" cmpd="sng" algn="ctr">
-                      <a:noFill/>
-                      <a:prstDash val="solid"/>
-                      <a:round/>
-                      <a:headEnd type="none" w="med" len="med"/>
-                      <a:tailEnd type="none" w="med" len="med"/>
-                    </a:lnR>
-                    <a:lnT w="12700" cap="flat" cmpd="sng" algn="ctr">
-                      <a:solidFill>
-                        <a:schemeClr val="bg1"/>
-                      </a:solidFill>
-                      <a:prstDash val="solid"/>
-                      <a:round/>
-                      <a:headEnd type="none" w="med" len="med"/>
-                      <a:tailEnd type="none" w="med" len="med"/>
-                    </a:lnT>
-                    <a:lnB w="12700" cap="flat" cmpd="sng" algn="ctr">
-                      <a:solidFill>
-                        <a:schemeClr val="bg1"/>
-                      </a:solidFill>
-                      <a:prstDash val="solid"/>
-                      <a:round/>
-                      <a:headEnd type="none" w="med" len="med"/>
-                      <a:tailEnd type="none" w="med" len="med"/>
-                    </a:lnB>
-                    <a:noFill/>
-                  </a:tcPr>
-                </a:tc>
-                <a:extLst>
-                  <a:ext uri="{0D108BD9-81ED-4DB2-BD59-A6C34878D82A}">
-                    <a16:rowId xmlns="" xmlns:a16="http://schemas.microsoft.com/office/drawing/2014/main" val="10004"/>
-                  </a:ext>
-                </a:extLst>
-              </a:tr>
-              <a:tr h="127518">
-                <a:tc>
-                  <a:txBody>
-                    <a:bodyPr/>
-                    <a:lstStyle/>
-                    <a:p>
-                      <a:pPr algn="l"/>
-                      <a:r>
-                        <a:rPr lang="ko-KR" altLang="en-US" sz="1100" dirty="0">
-                          <a:latin typeface="+mn-ea"/>
-                          <a:ea typeface="+mn-ea"/>
-                          <a:cs typeface="Pretendard Variable Light" panose="02000003000000020004" pitchFamily="2" charset="-127"/>
-                        </a:rPr>
-                        <a:t>관리</a:t>
-                      </a:r>
-                      <a:r>
-                        <a:rPr lang="en-US" altLang="ko-KR" sz="1100" dirty="0">
-                          <a:latin typeface="+mn-ea"/>
-                          <a:ea typeface="+mn-ea"/>
-                          <a:cs typeface="Pretendard Variable Light" panose="02000003000000020004" pitchFamily="2" charset="-127"/>
-                        </a:rPr>
-                        <a:t>/</a:t>
-                      </a:r>
-                      <a:r>
-                        <a:rPr lang="ko-KR" altLang="en-US" sz="1100" dirty="0">
-                          <a:latin typeface="+mn-ea"/>
-                          <a:ea typeface="+mn-ea"/>
-                          <a:cs typeface="Pretendard Variable Light" panose="02000003000000020004" pitchFamily="2" charset="-127"/>
-                        </a:rPr>
-                        <a:t>운영에 다양한 고려사항 존재</a:t>
-                      </a:r>
-                      <a:endParaRPr lang="en-US" sz="1100" dirty="0">
-                        <a:latin typeface="+mn-ea"/>
-                        <a:ea typeface="+mn-ea"/>
-                        <a:cs typeface="Pretendard Variable Light" panose="02000003000000020004" pitchFamily="2" charset="-127"/>
-                      </a:endParaRPr>
-                    </a:p>
-                  </a:txBody>
-                  <a:tcPr>
-                    <a:lnL w="12700" cap="flat" cmpd="sng" algn="ctr">
-                      <a:noFill/>
-                      <a:prstDash val="solid"/>
-                      <a:round/>
-                      <a:headEnd type="none" w="med" len="med"/>
-                      <a:tailEnd type="none" w="med" len="med"/>
-                    </a:lnL>
-                    <a:lnR w="12700" cap="flat" cmpd="sng" algn="ctr">
-                      <a:noFill/>
-                      <a:prstDash val="solid"/>
-                      <a:round/>
-                      <a:headEnd type="none" w="med" len="med"/>
-                      <a:tailEnd type="none" w="med" len="med"/>
-                    </a:lnR>
-                    <a:lnT w="12700" cap="flat" cmpd="sng" algn="ctr">
-                      <a:solidFill>
-                        <a:schemeClr val="bg1"/>
-                      </a:solidFill>
-                      <a:prstDash val="solid"/>
-                      <a:round/>
-                      <a:headEnd type="none" w="med" len="med"/>
-                      <a:tailEnd type="none" w="med" len="med"/>
-                    </a:lnT>
-                    <a:lnB w="12700" cap="flat" cmpd="sng" algn="ctr">
-                      <a:solidFill>
-                        <a:srgbClr val="0083CE"/>
-                      </a:solidFill>
-                      <a:prstDash val="solid"/>
-                      <a:round/>
-                      <a:headEnd type="none" w="med" len="med"/>
-                      <a:tailEnd type="none" w="med" len="med"/>
-                    </a:lnB>
-                    <a:noFill/>
-                  </a:tcPr>
-                </a:tc>
-                <a:extLst>
-                  <a:ext uri="{0D108BD9-81ED-4DB2-BD59-A6C34878D82A}">
-                    <a16:rowId xmlns="" xmlns:a16="http://schemas.microsoft.com/office/drawing/2014/main" val="10005"/>
-                  </a:ext>
-                </a:extLst>
-              </a:tr>
-            </a:tbl>
-          </a:graphicData>
-        </a:graphic>
-      </p:graphicFrame>
-      <p:graphicFrame>
-        <p:nvGraphicFramePr>
-          <p:cNvPr id="87" name="표 86"/>
-          <p:cNvGraphicFramePr>
-            <a:graphicFrameLocks noGrp="1"/>
-          </p:cNvGraphicFramePr>
-          <p:nvPr>
-            <p:extLst>
-              <p:ext uri="{D42A27DB-BD31-4B8C-83A1-F6EECF244321}">
-                <p14:modId xmlns:p14="http://schemas.microsoft.com/office/powerpoint/2010/main" val="3158082494"/>
-              </p:ext>
-            </p:extLst>
-          </p:nvPr>
-        </p:nvGraphicFramePr>
-        <p:xfrm>
-          <a:off x="5717803" y="4070313"/>
-          <a:ext cx="3721808" cy="1621036"/>
-        </p:xfrm>
-        <a:graphic>
-          <a:graphicData uri="http://schemas.openxmlformats.org/drawingml/2006/table">
-            <a:tbl>
-              <a:tblPr firstRow="1" bandRow="1">
-                <a:tableStyleId>{5C22544A-7EE6-4342-B048-85BDC9FD1C3A}</a:tableStyleId>
-              </a:tblPr>
-              <a:tblGrid>
-                <a:gridCol w="3721808">
-                  <a:extLst>
-                    <a:ext uri="{9D8B030D-6E8A-4147-A177-3AD203B41FA5}">
-                      <a16:colId xmlns="" xmlns:a16="http://schemas.microsoft.com/office/drawing/2014/main" val="20000"/>
-                    </a:ext>
-                  </a:extLst>
-                </a:gridCol>
-              </a:tblGrid>
-              <a:tr h="218465">
-                <a:tc>
-                  <a:txBody>
-                    <a:bodyPr/>
-                    <a:lstStyle/>
-                    <a:p>
-                      <a:pPr algn="ctr" latinLnBrk="1"/>
-                      <a:r>
-                        <a:rPr lang="en-US" altLang="ko-KR" sz="1400" dirty="0">
-                          <a:solidFill>
-                            <a:srgbClr val="0081CD"/>
-                          </a:solidFill>
-                          <a:latin typeface="+mn-ea"/>
-                          <a:ea typeface="+mn-ea"/>
-                        </a:rPr>
-                        <a:t>VERTICA</a:t>
-                      </a:r>
-                      <a:endParaRPr lang="ko-KR" altLang="en-US" sz="1400" dirty="0">
-                        <a:solidFill>
-                          <a:srgbClr val="0081CD"/>
-                        </a:solidFill>
-                        <a:latin typeface="+mn-ea"/>
-                        <a:ea typeface="+mn-ea"/>
-                      </a:endParaRPr>
-                    </a:p>
-                  </a:txBody>
-                  <a:tcPr>
-                    <a:lnL w="12700" cap="flat" cmpd="sng" algn="ctr">
-                      <a:noFill/>
-                      <a:prstDash val="solid"/>
-                      <a:round/>
-                      <a:headEnd type="none" w="med" len="med"/>
-                      <a:tailEnd type="none" w="med" len="med"/>
-                    </a:lnL>
-                    <a:lnR w="12700" cap="flat" cmpd="sng" algn="ctr">
-                      <a:noFill/>
-                      <a:prstDash val="solid"/>
-                      <a:round/>
-                      <a:headEnd type="none" w="med" len="med"/>
-                      <a:tailEnd type="none" w="med" len="med"/>
-                    </a:lnR>
-                    <a:lnT w="12700" cap="flat" cmpd="sng" algn="ctr">
-                      <a:solidFill>
-                        <a:srgbClr val="0083CE"/>
-                      </a:solidFill>
-                      <a:prstDash val="solid"/>
-                      <a:round/>
-                      <a:headEnd type="none" w="med" len="med"/>
-                      <a:tailEnd type="none" w="med" len="med"/>
-                    </a:lnT>
-                    <a:lnB w="12700" cap="flat" cmpd="sng" algn="ctr">
-                      <a:solidFill>
-                        <a:srgbClr val="0083CE"/>
-                      </a:solidFill>
-                      <a:prstDash val="solid"/>
-                      <a:round/>
-                      <a:headEnd type="none" w="med" len="med"/>
-                      <a:tailEnd type="none" w="med" len="med"/>
-                    </a:lnB>
-                    <a:noFill/>
-                  </a:tcPr>
-                </a:tc>
-                <a:extLst>
-                  <a:ext uri="{0D108BD9-81ED-4DB2-BD59-A6C34878D82A}">
-                    <a16:rowId xmlns="" xmlns:a16="http://schemas.microsoft.com/office/drawing/2014/main" val="10000"/>
-                  </a:ext>
-                </a:extLst>
-              </a:tr>
-              <a:tr h="279916">
-                <a:tc>
-                  <a:txBody>
-                    <a:bodyPr/>
-                    <a:lstStyle/>
-                    <a:p>
-                      <a:pPr marL="0" marR="0" indent="0" algn="l" defTabSz="914400" rtl="0" eaLnBrk="1" fontAlgn="auto" latinLnBrk="1" hangingPunct="1">
-                        <a:lnSpc>
-                          <a:spcPct val="100000"/>
-                        </a:lnSpc>
-                        <a:spcBef>
-                          <a:spcPts val="0"/>
-                        </a:spcBef>
-                        <a:spcAft>
-                          <a:spcPts val="0"/>
-                        </a:spcAft>
-                        <a:buClrTx/>
-                        <a:buSzTx/>
-                        <a:buFontTx/>
-                        <a:buNone/>
-                        <a:tabLst/>
-                        <a:defRPr/>
-                      </a:pPr>
-                      <a:r>
-                        <a:rPr lang="ko-KR" altLang="en-US" sz="1100" kern="1200" dirty="0">
-                          <a:solidFill>
-                            <a:schemeClr val="dk1"/>
-                          </a:solidFill>
-                          <a:latin typeface="+mn-ea"/>
-                          <a:ea typeface="+mn-ea"/>
-                          <a:cs typeface="Pretendard Variable Light" panose="02000003000000020004" pitchFamily="2" charset="-127"/>
-                        </a:rPr>
-                        <a:t>동일 스펙 </a:t>
-                      </a:r>
-                      <a:r>
-                        <a:rPr lang="en-US" altLang="ko-KR" sz="1100" kern="1200" dirty="0">
-                          <a:solidFill>
-                            <a:schemeClr val="dk1"/>
-                          </a:solidFill>
-                          <a:latin typeface="+mn-ea"/>
-                          <a:ea typeface="+mn-ea"/>
-                          <a:cs typeface="Pretendard Variable Light" panose="02000003000000020004" pitchFamily="2" charset="-127"/>
-                        </a:rPr>
-                        <a:t>/ </a:t>
-                      </a:r>
-                      <a:r>
-                        <a:rPr lang="ko-KR" altLang="en-US" sz="1100" kern="1200" dirty="0">
-                          <a:solidFill>
-                            <a:schemeClr val="dk1"/>
-                          </a:solidFill>
-                          <a:latin typeface="+mn-ea"/>
-                          <a:ea typeface="+mn-ea"/>
-                          <a:cs typeface="Pretendard Variable Light" panose="02000003000000020004" pitchFamily="2" charset="-127"/>
-                        </a:rPr>
-                        <a:t>동일 구성의 서버</a:t>
-                      </a:r>
-                      <a:endParaRPr lang="en-US" altLang="ko-KR" sz="1100" kern="1200" dirty="0">
-                        <a:solidFill>
-                          <a:schemeClr val="dk1"/>
-                        </a:solidFill>
-                        <a:latin typeface="+mn-ea"/>
-                        <a:ea typeface="+mn-ea"/>
-                        <a:cs typeface="Pretendard Variable Light" panose="02000003000000020004" pitchFamily="2" charset="-127"/>
-                      </a:endParaRPr>
-                    </a:p>
-                  </a:txBody>
-                  <a:tcPr>
-                    <a:lnL w="12700" cap="flat" cmpd="sng" algn="ctr">
-                      <a:noFill/>
-                      <a:prstDash val="solid"/>
-                      <a:round/>
-                      <a:headEnd type="none" w="med" len="med"/>
-                      <a:tailEnd type="none" w="med" len="med"/>
-                    </a:lnL>
-                    <a:lnR w="12700" cap="flat" cmpd="sng" algn="ctr">
-                      <a:noFill/>
-                      <a:prstDash val="solid"/>
-                      <a:round/>
-                      <a:headEnd type="none" w="med" len="med"/>
-                      <a:tailEnd type="none" w="med" len="med"/>
-                    </a:lnR>
-                    <a:lnT w="12700" cap="flat" cmpd="sng" algn="ctr">
-                      <a:solidFill>
-                        <a:srgbClr val="0083CE"/>
-                      </a:solidFill>
-                      <a:prstDash val="solid"/>
-                      <a:round/>
-                      <a:headEnd type="none" w="med" len="med"/>
-                      <a:tailEnd type="none" w="med" len="med"/>
-                    </a:lnT>
-                    <a:lnB w="12700" cap="flat" cmpd="sng" algn="ctr">
-                      <a:solidFill>
-                        <a:schemeClr val="bg1"/>
-                      </a:solidFill>
-                      <a:prstDash val="solid"/>
-                      <a:round/>
-                      <a:headEnd type="none" w="med" len="med"/>
-                      <a:tailEnd type="none" w="med" len="med"/>
-                    </a:lnB>
-                    <a:noFill/>
-                  </a:tcPr>
-                </a:tc>
-                <a:extLst>
-                  <a:ext uri="{0D108BD9-81ED-4DB2-BD59-A6C34878D82A}">
-                    <a16:rowId xmlns="" xmlns:a16="http://schemas.microsoft.com/office/drawing/2014/main" val="10001"/>
-                  </a:ext>
-                </a:extLst>
-              </a:tr>
-              <a:tr h="150973">
-                <a:tc>
-                  <a:txBody>
-                    <a:bodyPr/>
-                    <a:lstStyle/>
-                    <a:p>
-                      <a:pPr marL="0" marR="0" indent="0" algn="l" defTabSz="914400" rtl="0" eaLnBrk="1" fontAlgn="auto" latinLnBrk="1" hangingPunct="1">
-                        <a:lnSpc>
-                          <a:spcPct val="100000"/>
-                        </a:lnSpc>
-                        <a:spcBef>
-                          <a:spcPts val="0"/>
-                        </a:spcBef>
-                        <a:spcAft>
-                          <a:spcPts val="0"/>
-                        </a:spcAft>
-                        <a:buClrTx/>
-                        <a:buSzTx/>
-                        <a:buFontTx/>
-                        <a:buNone/>
-                        <a:tabLst/>
-                        <a:defRPr/>
-                      </a:pPr>
-                      <a:r>
-                        <a:rPr lang="ko-KR" altLang="en-US" sz="1100" kern="1200" dirty="0">
-                          <a:solidFill>
-                            <a:schemeClr val="dk1"/>
-                          </a:solidFill>
-                          <a:latin typeface="+mn-ea"/>
-                          <a:ea typeface="+mn-ea"/>
-                          <a:cs typeface="Pretendard Variable Light" panose="02000003000000020004" pitchFamily="2" charset="-127"/>
-                        </a:rPr>
-                        <a:t>단순한 구성</a:t>
-                      </a:r>
-                    </a:p>
-                  </a:txBody>
-                  <a:tcPr>
-                    <a:lnL w="12700" cap="flat" cmpd="sng" algn="ctr">
-                      <a:noFill/>
-                      <a:prstDash val="solid"/>
-                      <a:round/>
-                      <a:headEnd type="none" w="med" len="med"/>
-                      <a:tailEnd type="none" w="med" len="med"/>
-                    </a:lnL>
-                    <a:lnR w="12700" cap="flat" cmpd="sng" algn="ctr">
-                      <a:noFill/>
-                      <a:prstDash val="solid"/>
-                      <a:round/>
-                      <a:headEnd type="none" w="med" len="med"/>
-                      <a:tailEnd type="none" w="med" len="med"/>
-                    </a:lnR>
-                    <a:lnT w="12700" cap="flat" cmpd="sng" algn="ctr">
-                      <a:solidFill>
-                        <a:schemeClr val="bg1"/>
-                      </a:solidFill>
-                      <a:prstDash val="solid"/>
-                      <a:round/>
-                      <a:headEnd type="none" w="med" len="med"/>
-                      <a:tailEnd type="none" w="med" len="med"/>
-                    </a:lnT>
-                    <a:lnB w="12700" cap="flat" cmpd="sng" algn="ctr">
-                      <a:solidFill>
-                        <a:schemeClr val="bg1"/>
-                      </a:solidFill>
-                      <a:prstDash val="solid"/>
-                      <a:round/>
-                      <a:headEnd type="none" w="med" len="med"/>
-                      <a:tailEnd type="none" w="med" len="med"/>
-                    </a:lnB>
-                    <a:noFill/>
-                  </a:tcPr>
-                </a:tc>
-                <a:extLst>
-                  <a:ext uri="{0D108BD9-81ED-4DB2-BD59-A6C34878D82A}">
-                    <a16:rowId xmlns="" xmlns:a16="http://schemas.microsoft.com/office/drawing/2014/main" val="10002"/>
-                  </a:ext>
-                </a:extLst>
-              </a:tr>
-              <a:tr h="190680">
-                <a:tc>
-                  <a:txBody>
-                    <a:bodyPr/>
-                    <a:lstStyle/>
-                    <a:p>
-                      <a:pPr marL="0" marR="0" indent="0" algn="l" defTabSz="914400" rtl="0" eaLnBrk="1" fontAlgn="auto" latinLnBrk="1" hangingPunct="1">
-                        <a:lnSpc>
-                          <a:spcPct val="100000"/>
-                        </a:lnSpc>
-                        <a:spcBef>
-                          <a:spcPts val="0"/>
-                        </a:spcBef>
-                        <a:spcAft>
-                          <a:spcPts val="0"/>
-                        </a:spcAft>
-                        <a:buClrTx/>
-                        <a:buSzTx/>
-                        <a:buFontTx/>
-                        <a:buNone/>
-                        <a:tabLst/>
-                        <a:defRPr/>
-                      </a:pPr>
-                      <a:r>
-                        <a:rPr lang="ko-KR" altLang="en-US" sz="1100" kern="1200" dirty="0">
-                          <a:solidFill>
-                            <a:schemeClr val="dk1"/>
-                          </a:solidFill>
-                          <a:latin typeface="+mn-ea"/>
-                          <a:ea typeface="+mn-ea"/>
-                          <a:cs typeface="Pretendard Variable Light" panose="02000003000000020004" pitchFamily="2" charset="-127"/>
-                        </a:rPr>
-                        <a:t>아무 서버에나 작업을 요청하면 전 노드가 병렬 수행</a:t>
-                      </a:r>
-                    </a:p>
-                  </a:txBody>
-                  <a:tcPr>
-                    <a:lnL w="12700" cap="flat" cmpd="sng" algn="ctr">
-                      <a:noFill/>
-                      <a:prstDash val="solid"/>
-                      <a:round/>
-                      <a:headEnd type="none" w="med" len="med"/>
-                      <a:tailEnd type="none" w="med" len="med"/>
-                    </a:lnL>
-                    <a:lnR w="12700" cap="flat" cmpd="sng" algn="ctr">
-                      <a:noFill/>
-                      <a:prstDash val="solid"/>
-                      <a:round/>
-                      <a:headEnd type="none" w="med" len="med"/>
-                      <a:tailEnd type="none" w="med" len="med"/>
-                    </a:lnR>
-                    <a:lnT w="12700" cap="flat" cmpd="sng" algn="ctr">
-                      <a:solidFill>
-                        <a:schemeClr val="bg1"/>
-                      </a:solidFill>
-                      <a:prstDash val="solid"/>
-                      <a:round/>
-                      <a:headEnd type="none" w="med" len="med"/>
-                      <a:tailEnd type="none" w="med" len="med"/>
-                    </a:lnT>
-                    <a:lnB w="12700" cap="flat" cmpd="sng" algn="ctr">
-                      <a:solidFill>
-                        <a:schemeClr val="bg1"/>
-                      </a:solidFill>
-                      <a:prstDash val="solid"/>
-                      <a:round/>
-                      <a:headEnd type="none" w="med" len="med"/>
-                      <a:tailEnd type="none" w="med" len="med"/>
-                    </a:lnB>
-                    <a:noFill/>
-                  </a:tcPr>
-                </a:tc>
-                <a:extLst>
-                  <a:ext uri="{0D108BD9-81ED-4DB2-BD59-A6C34878D82A}">
-                    <a16:rowId xmlns="" xmlns:a16="http://schemas.microsoft.com/office/drawing/2014/main" val="10003"/>
-                  </a:ext>
-                </a:extLst>
-              </a:tr>
-              <a:tr h="127518">
-                <a:tc>
-                  <a:txBody>
-                    <a:bodyPr/>
-                    <a:lstStyle/>
-                    <a:p>
-                      <a:pPr algn="l"/>
-                      <a:r>
-                        <a:rPr lang="ko-KR" altLang="en-US" sz="1100" kern="1200" dirty="0">
-                          <a:solidFill>
-                            <a:schemeClr val="dk1"/>
-                          </a:solidFill>
-                          <a:latin typeface="+mn-ea"/>
-                          <a:ea typeface="+mn-ea"/>
-                          <a:cs typeface="Pretendard Variable Light" panose="02000003000000020004" pitchFamily="2" charset="-127"/>
-                        </a:rPr>
-                        <a:t>시장의 신뢰도를 확보한 서버 사용</a:t>
-                      </a:r>
-                      <a:endParaRPr lang="en-US" sz="1100" kern="1200" dirty="0">
-                        <a:solidFill>
-                          <a:schemeClr val="dk1"/>
-                        </a:solidFill>
-                        <a:latin typeface="+mn-ea"/>
-                        <a:ea typeface="+mn-ea"/>
-                        <a:cs typeface="Pretendard Variable Light" panose="02000003000000020004" pitchFamily="2" charset="-127"/>
-                      </a:endParaRPr>
-                    </a:p>
-                  </a:txBody>
-                  <a:tcPr>
-                    <a:lnL w="12700" cap="flat" cmpd="sng" algn="ctr">
-                      <a:noFill/>
-                      <a:prstDash val="solid"/>
-                      <a:round/>
-                      <a:headEnd type="none" w="med" len="med"/>
-                      <a:tailEnd type="none" w="med" len="med"/>
-                    </a:lnL>
-                    <a:lnR w="12700" cap="flat" cmpd="sng" algn="ctr">
-                      <a:noFill/>
-                      <a:prstDash val="solid"/>
-                      <a:round/>
-                      <a:headEnd type="none" w="med" len="med"/>
-                      <a:tailEnd type="none" w="med" len="med"/>
-                    </a:lnR>
-                    <a:lnT w="12700" cap="flat" cmpd="sng" algn="ctr">
-                      <a:solidFill>
-                        <a:schemeClr val="bg1"/>
-                      </a:solidFill>
-                      <a:prstDash val="solid"/>
-                      <a:round/>
-                      <a:headEnd type="none" w="med" len="med"/>
-                      <a:tailEnd type="none" w="med" len="med"/>
-                    </a:lnT>
-                    <a:lnB w="12700" cap="flat" cmpd="sng" algn="ctr">
-                      <a:solidFill>
-                        <a:schemeClr val="bg1"/>
-                      </a:solidFill>
-                      <a:prstDash val="solid"/>
-                      <a:round/>
-                      <a:headEnd type="none" w="med" len="med"/>
-                      <a:tailEnd type="none" w="med" len="med"/>
-                    </a:lnB>
-                    <a:noFill/>
-                  </a:tcPr>
-                </a:tc>
-                <a:extLst>
-                  <a:ext uri="{0D108BD9-81ED-4DB2-BD59-A6C34878D82A}">
-                    <a16:rowId xmlns="" xmlns:a16="http://schemas.microsoft.com/office/drawing/2014/main" val="10004"/>
-                  </a:ext>
-                </a:extLst>
-              </a:tr>
-              <a:tr h="127518">
-                <a:tc>
-                  <a:txBody>
-                    <a:bodyPr/>
-                    <a:lstStyle/>
-                    <a:p>
-                      <a:pPr algn="l"/>
-                      <a:r>
-                        <a:rPr lang="ko-KR" altLang="en-US" sz="1100" kern="1200" dirty="0">
-                          <a:solidFill>
-                            <a:schemeClr val="dk1"/>
-                          </a:solidFill>
-                          <a:latin typeface="+mn-ea"/>
-                          <a:ea typeface="+mn-ea"/>
-                          <a:cs typeface="Pretendard Variable Light" panose="02000003000000020004" pitchFamily="2" charset="-127"/>
-                        </a:rPr>
-                        <a:t>관리 및 사용 용이성 확보</a:t>
-                      </a:r>
-                      <a:endParaRPr lang="en-US" sz="1100" kern="1200" dirty="0">
-                        <a:solidFill>
-                          <a:schemeClr val="dk1"/>
-                        </a:solidFill>
-                        <a:latin typeface="+mn-ea"/>
-                        <a:ea typeface="+mn-ea"/>
-                        <a:cs typeface="Pretendard Variable Light" panose="02000003000000020004" pitchFamily="2" charset="-127"/>
-                      </a:endParaRPr>
-                    </a:p>
-                  </a:txBody>
-                  <a:tcPr>
-                    <a:lnL w="12700" cap="flat" cmpd="sng" algn="ctr">
-                      <a:noFill/>
-                      <a:prstDash val="solid"/>
-                      <a:round/>
-                      <a:headEnd type="none" w="med" len="med"/>
-                      <a:tailEnd type="none" w="med" len="med"/>
-                    </a:lnL>
-                    <a:lnR w="12700" cap="flat" cmpd="sng" algn="ctr">
-                      <a:noFill/>
-                      <a:prstDash val="solid"/>
-                      <a:round/>
-                      <a:headEnd type="none" w="med" len="med"/>
-                      <a:tailEnd type="none" w="med" len="med"/>
-                    </a:lnR>
-                    <a:lnT w="12700" cap="flat" cmpd="sng" algn="ctr">
-                      <a:solidFill>
-                        <a:schemeClr val="bg1"/>
-                      </a:solidFill>
-                      <a:prstDash val="solid"/>
-                      <a:round/>
-                      <a:headEnd type="none" w="med" len="med"/>
-                      <a:tailEnd type="none" w="med" len="med"/>
-                    </a:lnT>
-                    <a:lnB w="12700" cap="flat" cmpd="sng" algn="ctr">
-                      <a:solidFill>
-                        <a:srgbClr val="0083CE"/>
-                      </a:solidFill>
-                      <a:prstDash val="solid"/>
-                      <a:round/>
-                      <a:headEnd type="none" w="med" len="med"/>
-                      <a:tailEnd type="none" w="med" len="med"/>
-                    </a:lnB>
-                    <a:noFill/>
-                  </a:tcPr>
-                </a:tc>
-                <a:extLst>
-                  <a:ext uri="{0D108BD9-81ED-4DB2-BD59-A6C34878D82A}">
-                    <a16:rowId xmlns="" xmlns:a16="http://schemas.microsoft.com/office/drawing/2014/main" val="10005"/>
-                  </a:ext>
-                </a:extLst>
-              </a:tr>
-            </a:tbl>
-          </a:graphicData>
-        </a:graphic>
-      </p:graphicFrame>
-      <p:pic>
-        <p:nvPicPr>
-          <p:cNvPr id="89" name="Picture 2"/>
-          <p:cNvPicPr>
-            <a:picLocks noChangeAspect="1" noChangeArrowheads="1"/>
-          </p:cNvPicPr>
-          <p:nvPr/>
-        </p:nvPicPr>
-        <p:blipFill>
-          <a:blip r:embed="rId3" cstate="print"/>
-          <a:srcRect/>
-          <a:stretch>
-            <a:fillRect/>
-          </a:stretch>
-        </p:blipFill>
-        <p:spPr bwMode="auto">
-          <a:xfrm>
-            <a:off x="331393" y="6623929"/>
-            <a:ext cx="4850208" cy="2371302"/>
-          </a:xfrm>
-          <a:prstGeom prst="rect">
-            <a:avLst/>
-          </a:prstGeom>
-          <a:noFill/>
-          <a:ln w="9525">
-            <a:noFill/>
-            <a:miter lim="800000"/>
-            <a:headEnd/>
-            <a:tailEnd/>
-          </a:ln>
-          <a:effectLst/>
-        </p:spPr>
-      </p:pic>
-      <p:sp>
-        <p:nvSpPr>
-          <p:cNvPr id="90" name="내용 개체 틀 2"/>
-          <p:cNvSpPr txBox="1">
-            <a:spLocks/>
-          </p:cNvSpPr>
-          <p:nvPr/>
-        </p:nvSpPr>
-        <p:spPr bwMode="auto">
-          <a:xfrm>
-            <a:off x="5290203" y="7000393"/>
-            <a:ext cx="4275845" cy="1846659"/>
-          </a:xfrm>
-          <a:prstGeom prst="rect">
-            <a:avLst/>
-          </a:prstGeom>
-          <a:solidFill>
-            <a:schemeClr val="bg1"/>
-          </a:solidFill>
-          <a:ln w="9525">
-            <a:noFill/>
-            <a:miter lim="800000"/>
-            <a:headEnd/>
-            <a:tailEnd/>
-          </a:ln>
-        </p:spPr>
-        <p:txBody>
-          <a:bodyPr vert="horz" wrap="square" lIns="91440" tIns="45720" rIns="91440" bIns="45720" numCol="1" anchor="t" anchorCtr="0" compatLnSpc="1">
-            <a:prstTxWarp prst="textNoShape">
-              <a:avLst/>
-            </a:prstTxWarp>
-            <a:spAutoFit/>
-          </a:bodyPr>
-          <a:lstStyle/>
-          <a:p>
-            <a:pPr marL="0" lvl="1">
-              <a:lnSpc>
-                <a:spcPct val="200000"/>
-              </a:lnSpc>
-              <a:buClr>
-                <a:schemeClr val="tx2"/>
-              </a:buClr>
-              <a:defRPr/>
-            </a:pPr>
-            <a:r>
-              <a:rPr lang="ko-KR" altLang="en-US" sz="1000" b="1" kern="0" dirty="0">
-                <a:solidFill>
-                  <a:srgbClr val="0083CE"/>
-                </a:solidFill>
-                <a:latin typeface="+mn-ea"/>
-                <a:cs typeface="Pretendard Variable SemiBold" panose="02000003000000020004" pitchFamily="2" charset="-127"/>
-              </a:rPr>
-              <a:t>◆</a:t>
-            </a:r>
-            <a:r>
-              <a:rPr lang="ko-KR" altLang="en-US" sz="1100" b="1" kern="0" dirty="0">
-                <a:latin typeface="+mn-ea"/>
-                <a:cs typeface="Pretendard Variable SemiBold" panose="02000003000000020004" pitchFamily="2" charset="-127"/>
-              </a:rPr>
-              <a:t> 압축과 질의가 물리적인 </a:t>
-            </a:r>
-            <a:r>
-              <a:rPr lang="en-US" altLang="ko-KR" sz="1100" b="1" kern="0" dirty="0">
-                <a:latin typeface="+mn-ea"/>
-                <a:cs typeface="Pretendard Variable SemiBold" panose="02000003000000020004" pitchFamily="2" charset="-127"/>
-              </a:rPr>
-              <a:t>I/O </a:t>
-            </a:r>
-            <a:r>
-              <a:rPr lang="ko-KR" altLang="en-US" sz="1100" b="1" kern="0" dirty="0">
-                <a:latin typeface="+mn-ea"/>
-                <a:cs typeface="Pretendard Variable SemiBold" panose="02000003000000020004" pitchFamily="2" charset="-127"/>
-              </a:rPr>
-              <a:t>레벨부터 컬럼 단위로 처리</a:t>
-            </a:r>
-          </a:p>
-          <a:p>
-            <a:pPr marL="0" lvl="1">
-              <a:lnSpc>
-                <a:spcPct val="200000"/>
-              </a:lnSpc>
-              <a:buClr>
-                <a:schemeClr val="tx2"/>
-              </a:buClr>
-              <a:defRPr/>
-            </a:pPr>
-            <a:r>
-              <a:rPr lang="ko-KR" altLang="en-US" sz="1000" b="1" kern="0" dirty="0">
-                <a:solidFill>
-                  <a:srgbClr val="0083CE"/>
-                </a:solidFill>
-                <a:latin typeface="+mn-ea"/>
-                <a:cs typeface="Pretendard Variable SemiBold" panose="02000003000000020004" pitchFamily="2" charset="-127"/>
-              </a:rPr>
-              <a:t>◆</a:t>
-            </a:r>
-            <a:r>
-              <a:rPr lang="ko-KR" altLang="en-US" sz="1100" b="1" kern="0" dirty="0">
-                <a:latin typeface="+mn-ea"/>
-                <a:cs typeface="Pretendard Variable SemiBold" panose="02000003000000020004" pitchFamily="2" charset="-127"/>
-              </a:rPr>
-              <a:t> </a:t>
-            </a:r>
-            <a:r>
-              <a:rPr lang="ko-KR" altLang="en-US" sz="1100" b="1" kern="0" dirty="0" err="1">
-                <a:latin typeface="+mn-ea"/>
-                <a:cs typeface="Pretendard Variable SemiBold" panose="02000003000000020004" pitchFamily="2" charset="-127"/>
-              </a:rPr>
-              <a:t>컬럼</a:t>
-            </a:r>
-            <a:r>
-              <a:rPr lang="ko-KR" altLang="en-US" sz="1100" b="1" kern="0" dirty="0">
-                <a:latin typeface="+mn-ea"/>
-                <a:cs typeface="Pretendard Variable SemiBold" panose="02000003000000020004" pitchFamily="2" charset="-127"/>
-              </a:rPr>
-              <a:t> 기반 저장 기술에 맞는 쿼리 옵티마이저</a:t>
-            </a:r>
-          </a:p>
-          <a:p>
-            <a:pPr marL="0" lvl="1">
-              <a:lnSpc>
-                <a:spcPct val="200000"/>
-              </a:lnSpc>
-              <a:buClr>
-                <a:schemeClr val="tx2"/>
-              </a:buClr>
-              <a:defRPr/>
-            </a:pPr>
-            <a:r>
-              <a:rPr lang="ko-KR" altLang="en-US" sz="1000" b="1" kern="0" dirty="0">
-                <a:solidFill>
-                  <a:srgbClr val="0083CE"/>
-                </a:solidFill>
-                <a:latin typeface="+mn-ea"/>
-                <a:cs typeface="Pretendard Variable SemiBold" panose="02000003000000020004" pitchFamily="2" charset="-127"/>
-              </a:rPr>
-              <a:t>◆</a:t>
-            </a:r>
-            <a:r>
-              <a:rPr lang="ko-KR" altLang="en-US" sz="1100" b="1" kern="0" dirty="0">
-                <a:latin typeface="+mn-ea"/>
-                <a:cs typeface="Pretendard Variable SemiBold" panose="02000003000000020004" pitchFamily="2" charset="-127"/>
-              </a:rPr>
-              <a:t> </a:t>
-            </a:r>
-            <a:r>
-              <a:rPr lang="ko-KR" altLang="en-US" sz="1100" b="1" kern="0" dirty="0" err="1">
-                <a:latin typeface="+mn-ea"/>
-                <a:cs typeface="Pretendard Variable SemiBold" panose="02000003000000020004" pitchFamily="2" charset="-127"/>
-              </a:rPr>
-              <a:t>컬럼</a:t>
-            </a:r>
-            <a:r>
-              <a:rPr lang="ko-KR" altLang="en-US" sz="1100" b="1" kern="0" dirty="0">
-                <a:latin typeface="+mn-ea"/>
-                <a:cs typeface="Pretendard Variable SemiBold" panose="02000003000000020004" pitchFamily="2" charset="-127"/>
-              </a:rPr>
-              <a:t> 단위 저장</a:t>
-            </a:r>
-            <a:r>
-              <a:rPr lang="en-US" altLang="ko-KR" sz="1100" b="1" kern="0" dirty="0">
-                <a:latin typeface="+mn-ea"/>
-                <a:cs typeface="Pretendard Variable SemiBold" panose="02000003000000020004" pitchFamily="2" charset="-127"/>
-              </a:rPr>
-              <a:t>, </a:t>
-            </a:r>
-            <a:r>
-              <a:rPr lang="ko-KR" altLang="en-US" sz="1100" b="1" kern="0" dirty="0">
-                <a:latin typeface="+mn-ea"/>
-                <a:cs typeface="Pretendard Variable SemiBold" panose="02000003000000020004" pitchFamily="2" charset="-127"/>
-              </a:rPr>
-              <a:t>처리를 위한 별도의 옵션이나 절차가 불필요</a:t>
-            </a:r>
-          </a:p>
-          <a:p>
-            <a:pPr marL="0" lvl="1">
-              <a:lnSpc>
-                <a:spcPct val="200000"/>
-              </a:lnSpc>
-              <a:buClr>
-                <a:schemeClr val="tx2"/>
-              </a:buClr>
-              <a:defRPr/>
-            </a:pPr>
-            <a:r>
-              <a:rPr lang="ko-KR" altLang="en-US" sz="1000" b="1" kern="0" dirty="0">
-                <a:solidFill>
-                  <a:srgbClr val="0083CE"/>
-                </a:solidFill>
-                <a:latin typeface="+mn-ea"/>
-                <a:cs typeface="Pretendard Variable SemiBold" panose="02000003000000020004" pitchFamily="2" charset="-127"/>
-              </a:rPr>
-              <a:t>◆</a:t>
-            </a:r>
-            <a:r>
-              <a:rPr lang="ko-KR" altLang="en-US" sz="1100" b="1" kern="0" dirty="0">
-                <a:latin typeface="+mn-ea"/>
-                <a:cs typeface="Pretendard Variable SemiBold" panose="02000003000000020004" pitchFamily="2" charset="-127"/>
-              </a:rPr>
-              <a:t> </a:t>
-            </a:r>
-            <a:r>
-              <a:rPr lang="ko-KR" altLang="en-US" sz="1100" b="1" kern="0" dirty="0" err="1">
-                <a:latin typeface="+mn-ea"/>
-                <a:cs typeface="Pretendard Variable SemiBold" panose="02000003000000020004" pitchFamily="2" charset="-127"/>
-              </a:rPr>
-              <a:t>컬럼</a:t>
-            </a:r>
-            <a:r>
-              <a:rPr lang="ko-KR" altLang="en-US" sz="1100" b="1" kern="0" dirty="0">
-                <a:latin typeface="+mn-ea"/>
-                <a:cs typeface="Pretendard Variable SemiBold" panose="02000003000000020004" pitchFamily="2" charset="-127"/>
-              </a:rPr>
-              <a:t> 저장 구조에 최적화된 데이터 적재와 트랜잭션 처리</a:t>
-            </a:r>
-          </a:p>
-          <a:p>
-            <a:pPr marL="0" lvl="1">
-              <a:lnSpc>
-                <a:spcPct val="200000"/>
-              </a:lnSpc>
-              <a:buClr>
-                <a:schemeClr val="tx2"/>
-              </a:buClr>
-              <a:defRPr/>
-            </a:pPr>
-            <a:r>
-              <a:rPr lang="ko-KR" altLang="en-US" sz="1000" b="1" kern="0" dirty="0">
-                <a:solidFill>
-                  <a:srgbClr val="0083CE"/>
-                </a:solidFill>
-                <a:latin typeface="+mn-ea"/>
-                <a:cs typeface="Pretendard Variable SemiBold" panose="02000003000000020004" pitchFamily="2" charset="-127"/>
-              </a:rPr>
-              <a:t>◆</a:t>
-            </a:r>
-            <a:r>
-              <a:rPr lang="ko-KR" altLang="en-US" sz="1100" b="1" kern="0" dirty="0">
-                <a:latin typeface="+mn-ea"/>
-                <a:cs typeface="Pretendard Variable SemiBold" panose="02000003000000020004" pitchFamily="2" charset="-127"/>
-              </a:rPr>
-              <a:t> 적은 하드웨어 리소스로 다른 </a:t>
-            </a:r>
-            <a:r>
-              <a:rPr lang="en-US" altLang="ko-KR" sz="1100" b="1" kern="0" dirty="0">
-                <a:latin typeface="+mn-ea"/>
-                <a:cs typeface="Pretendard Variable SemiBold" panose="02000003000000020004" pitchFamily="2" charset="-127"/>
-              </a:rPr>
-              <a:t>DBMS</a:t>
-            </a:r>
-            <a:r>
-              <a:rPr lang="ko-KR" altLang="en-US" sz="1100" b="1" kern="0" dirty="0">
-                <a:latin typeface="+mn-ea"/>
-                <a:cs typeface="Pretendard Variable SemiBold" panose="02000003000000020004" pitchFamily="2" charset="-127"/>
-              </a:rPr>
-              <a:t>와 동일한 작업 수행</a:t>
-            </a:r>
-          </a:p>
-        </p:txBody>
-      </p:sp>
-      <p:sp>
-        <p:nvSpPr>
-          <p:cNvPr id="88" name="직사각형 87"/>
-          <p:cNvSpPr/>
-          <p:nvPr/>
-        </p:nvSpPr>
-        <p:spPr>
-          <a:xfrm>
-            <a:off x="282348" y="5751289"/>
-            <a:ext cx="9312729" cy="1320800"/>
-          </a:xfrm>
-          <a:prstGeom prst="rect">
-            <a:avLst/>
-          </a:prstGeom>
-          <a:noFill/>
-          <a:ln>
-            <a:noFill/>
-          </a:ln>
-        </p:spPr>
-        <p:style>
-          <a:lnRef idx="2">
-            <a:schemeClr val="accent1">
-              <a:shade val="50000"/>
-            </a:schemeClr>
-          </a:lnRef>
-          <a:fillRef idx="1">
-            <a:schemeClr val="accent1"/>
-          </a:fillRef>
-          <a:effectRef idx="0">
-            <a:schemeClr val="accent1"/>
-          </a:effectRef>
-          <a:fontRef idx="minor">
-            <a:schemeClr val="lt1"/>
-          </a:fontRef>
-        </p:style>
-        <p:txBody>
-          <a:bodyPr rtlCol="0" anchor="ctr"/>
-          <a:lstStyle/>
-          <a:p>
-            <a:r>
-              <a:rPr lang="en-US" altLang="ko-KR" sz="1600" b="1" dirty="0" smtClean="0">
-                <a:solidFill>
-                  <a:schemeClr val="tx1"/>
-                </a:solidFill>
-                <a:latin typeface="+mn-ea"/>
-              </a:rPr>
-              <a:t>Native Columnar</a:t>
-            </a:r>
-            <a:br>
-              <a:rPr lang="en-US" altLang="ko-KR" sz="1600" b="1" dirty="0" smtClean="0">
-                <a:solidFill>
-                  <a:schemeClr val="tx1"/>
-                </a:solidFill>
-                <a:latin typeface="+mn-ea"/>
-              </a:rPr>
-            </a:br>
-            <a:r>
-              <a:rPr lang="ko-KR" altLang="en-US" sz="1400" dirty="0">
-                <a:solidFill>
-                  <a:schemeClr val="tx1"/>
-                </a:solidFill>
-                <a:latin typeface="+mn-ea"/>
-              </a:rPr>
-              <a:t>대용량 데이터를 관리하는 </a:t>
-            </a:r>
-            <a:r>
-              <a:rPr lang="en-US" altLang="ko-KR" sz="1400" dirty="0">
-                <a:solidFill>
-                  <a:schemeClr val="tx1"/>
-                </a:solidFill>
-                <a:latin typeface="+mn-ea"/>
-              </a:rPr>
-              <a:t>DW </a:t>
-            </a:r>
-            <a:r>
-              <a:rPr lang="ko-KR" altLang="en-US" sz="1400" dirty="0">
-                <a:solidFill>
-                  <a:schemeClr val="tx1"/>
-                </a:solidFill>
-                <a:latin typeface="+mn-ea"/>
-              </a:rPr>
-              <a:t>데이터베이스의 성능은 </a:t>
-            </a:r>
-            <a:r>
-              <a:rPr lang="en-US" altLang="ko-KR" sz="1400" dirty="0">
-                <a:solidFill>
-                  <a:schemeClr val="tx1"/>
-                </a:solidFill>
-                <a:latin typeface="+mn-ea"/>
-              </a:rPr>
-              <a:t>I/O</a:t>
-            </a:r>
-            <a:r>
-              <a:rPr lang="ko-KR" altLang="en-US" sz="1400" dirty="0">
-                <a:solidFill>
-                  <a:schemeClr val="tx1"/>
-                </a:solidFill>
-                <a:latin typeface="+mn-ea"/>
-              </a:rPr>
-              <a:t>를 얼마나 줄일 수 있느냐에 달려 있습니다</a:t>
-            </a:r>
-            <a:r>
-              <a:rPr lang="en-US" altLang="ko-KR" sz="1400" dirty="0">
-                <a:solidFill>
-                  <a:schemeClr val="tx1"/>
-                </a:solidFill>
-                <a:latin typeface="+mn-ea"/>
-              </a:rPr>
-              <a:t>. </a:t>
-            </a:r>
-          </a:p>
-          <a:p>
-            <a:r>
-              <a:rPr lang="en-US" altLang="ko-KR" sz="1400" dirty="0" err="1">
-                <a:solidFill>
-                  <a:schemeClr val="tx1"/>
-                </a:solidFill>
-                <a:latin typeface="+mn-ea"/>
-              </a:rPr>
-              <a:t>Vertica</a:t>
-            </a:r>
-            <a:r>
-              <a:rPr lang="en-US" altLang="ko-KR" sz="1400" dirty="0">
-                <a:solidFill>
-                  <a:schemeClr val="tx1"/>
-                </a:solidFill>
-                <a:latin typeface="+mn-ea"/>
-              </a:rPr>
-              <a:t> </a:t>
-            </a:r>
-            <a:r>
-              <a:rPr lang="ko-KR" altLang="en-US" sz="1400" dirty="0">
-                <a:solidFill>
-                  <a:schemeClr val="tx1"/>
-                </a:solidFill>
-                <a:latin typeface="+mn-ea"/>
-              </a:rPr>
-              <a:t>의 </a:t>
-            </a:r>
-            <a:r>
-              <a:rPr lang="en-US" altLang="ko-KR" sz="1400" dirty="0">
-                <a:solidFill>
-                  <a:schemeClr val="tx1"/>
-                </a:solidFill>
-                <a:latin typeface="+mn-ea"/>
-              </a:rPr>
-              <a:t>Columnar DBMS </a:t>
-            </a:r>
-            <a:r>
-              <a:rPr lang="ko-KR" altLang="en-US" sz="1400" dirty="0">
-                <a:solidFill>
-                  <a:schemeClr val="tx1"/>
-                </a:solidFill>
-                <a:latin typeface="+mn-ea"/>
-              </a:rPr>
-              <a:t>아키텍처는 </a:t>
-            </a:r>
-            <a:r>
-              <a:rPr lang="en-US" altLang="ko-KR" sz="1400" dirty="0">
-                <a:solidFill>
-                  <a:schemeClr val="tx1"/>
-                </a:solidFill>
-                <a:latin typeface="+mn-ea"/>
-              </a:rPr>
-              <a:t>Query </a:t>
-            </a:r>
-            <a:r>
-              <a:rPr lang="ko-KR" altLang="en-US" sz="1400" dirty="0">
-                <a:solidFill>
-                  <a:schemeClr val="tx1"/>
-                </a:solidFill>
-                <a:latin typeface="+mn-ea"/>
-              </a:rPr>
-              <a:t>수행에 필요한 </a:t>
-            </a:r>
-            <a:r>
-              <a:rPr lang="en-US" altLang="ko-KR" sz="1400" dirty="0">
-                <a:solidFill>
-                  <a:schemeClr val="tx1"/>
-                </a:solidFill>
-                <a:latin typeface="+mn-ea"/>
-              </a:rPr>
-              <a:t>Column </a:t>
-            </a:r>
-            <a:r>
-              <a:rPr lang="ko-KR" altLang="en-US" sz="1400" dirty="0">
-                <a:solidFill>
-                  <a:schemeClr val="tx1"/>
-                </a:solidFill>
-                <a:latin typeface="+mn-ea"/>
-              </a:rPr>
-              <a:t>만을 읽어 올 수 있도록 설계되었기 때문에</a:t>
-            </a:r>
-            <a:r>
-              <a:rPr lang="en-US" altLang="ko-KR" sz="1400" dirty="0">
-                <a:solidFill>
-                  <a:schemeClr val="tx1"/>
-                </a:solidFill>
-                <a:latin typeface="+mn-ea"/>
-              </a:rPr>
-              <a:t>, Query </a:t>
-            </a:r>
-            <a:r>
-              <a:rPr lang="ko-KR" altLang="en-US" sz="1400" dirty="0">
-                <a:solidFill>
-                  <a:schemeClr val="tx1"/>
-                </a:solidFill>
-                <a:latin typeface="+mn-ea"/>
-              </a:rPr>
-              <a:t>시 마다 모든</a:t>
-            </a:r>
-            <a:r>
-              <a:rPr lang="en-US" altLang="ko-KR" sz="1400" dirty="0">
-                <a:solidFill>
-                  <a:schemeClr val="tx1"/>
-                </a:solidFill>
-                <a:latin typeface="+mn-ea"/>
-              </a:rPr>
-              <a:t>` </a:t>
-            </a:r>
-            <a:r>
-              <a:rPr lang="ko-KR" altLang="en-US" sz="1400" dirty="0">
-                <a:solidFill>
-                  <a:schemeClr val="tx1"/>
-                </a:solidFill>
-                <a:latin typeface="+mn-ea"/>
-              </a:rPr>
-              <a:t>열을 읽어와야 하는 </a:t>
-            </a:r>
-            <a:r>
-              <a:rPr lang="en-US" altLang="ko-KR" sz="1400" dirty="0">
-                <a:solidFill>
-                  <a:schemeClr val="tx1"/>
-                </a:solidFill>
-                <a:latin typeface="+mn-ea"/>
-              </a:rPr>
-              <a:t>row </a:t>
-            </a:r>
-            <a:r>
-              <a:rPr lang="ko-KR" altLang="en-US" sz="1400" dirty="0">
-                <a:solidFill>
-                  <a:schemeClr val="tx1"/>
-                </a:solidFill>
-                <a:latin typeface="+mn-ea"/>
-              </a:rPr>
-              <a:t>기반 </a:t>
-            </a:r>
-            <a:r>
-              <a:rPr lang="en-US" altLang="ko-KR" sz="1400" dirty="0">
-                <a:solidFill>
-                  <a:schemeClr val="tx1"/>
-                </a:solidFill>
-                <a:latin typeface="+mn-ea"/>
-              </a:rPr>
-              <a:t>DBMS</a:t>
-            </a:r>
-            <a:r>
-              <a:rPr lang="ko-KR" altLang="en-US" sz="1400" dirty="0">
-                <a:solidFill>
-                  <a:schemeClr val="tx1"/>
-                </a:solidFill>
-                <a:latin typeface="+mn-ea"/>
-              </a:rPr>
-              <a:t>와 비교하여 </a:t>
-            </a:r>
-            <a:r>
-              <a:rPr lang="en-US" altLang="ko-KR" sz="1400" dirty="0">
-                <a:solidFill>
-                  <a:schemeClr val="tx1"/>
-                </a:solidFill>
-                <a:latin typeface="+mn-ea"/>
-              </a:rPr>
-              <a:t>I/O </a:t>
-            </a:r>
-            <a:r>
-              <a:rPr lang="ko-KR" altLang="en-US" sz="1400" dirty="0">
-                <a:solidFill>
-                  <a:schemeClr val="tx1"/>
-                </a:solidFill>
-                <a:latin typeface="+mn-ea"/>
-              </a:rPr>
-              <a:t>발생량을 획기적으로 감소시킬 수 있습니다</a:t>
-            </a:r>
-            <a:r>
-              <a:rPr lang="en-US" altLang="ko-KR" sz="1400" dirty="0">
-                <a:solidFill>
-                  <a:schemeClr val="tx1"/>
-                </a:solidFill>
-                <a:latin typeface="+mn-ea"/>
-              </a:rPr>
-              <a:t>.</a:t>
-            </a:r>
-          </a:p>
-          <a:p>
-            <a:endParaRPr lang="en-US" altLang="ko-KR" sz="1400" dirty="0">
-              <a:solidFill>
-                <a:schemeClr val="tx1"/>
-              </a:solidFill>
-              <a:latin typeface="+mn-ea"/>
-            </a:endParaRPr>
-          </a:p>
-        </p:txBody>
-      </p:sp>
-      <p:cxnSp>
-        <p:nvCxnSpPr>
-          <p:cNvPr id="91" name="직선 연결선 90"/>
-          <p:cNvCxnSpPr/>
-          <p:nvPr/>
-        </p:nvCxnSpPr>
-        <p:spPr>
-          <a:xfrm flipV="1">
-            <a:off x="215900" y="469900"/>
-            <a:ext cx="9156700" cy="0"/>
-          </a:xfrm>
-          <a:prstGeom prst="line">
-            <a:avLst/>
-          </a:prstGeom>
-          <a:ln w="19050">
-            <a:solidFill>
-              <a:schemeClr val="accent1"/>
-            </a:solidFill>
-          </a:ln>
-        </p:spPr>
-        <p:style>
-          <a:lnRef idx="1">
-            <a:schemeClr val="accent1"/>
-          </a:lnRef>
-          <a:fillRef idx="0">
-            <a:schemeClr val="accent1"/>
-          </a:fillRef>
-          <a:effectRef idx="0">
-            <a:schemeClr val="accent1"/>
-          </a:effectRef>
-          <a:fontRef idx="minor">
-            <a:schemeClr val="tx1"/>
-          </a:fontRef>
-        </p:style>
-      </p:cxnSp>
-    </p:spTree>
-    <p:extLst>
-      <p:ext uri="{BB962C8B-B14F-4D97-AF65-F5344CB8AC3E}">
-        <p14:creationId xmlns:p14="http://schemas.microsoft.com/office/powerpoint/2010/main" val="1716450510"/>
-      </p:ext>
-    </p:extLst>
-  </p:cSld>
-  <p:clrMapOvr>
-    <a:masterClrMapping/>
-  </p:clrMapOvr>
-  <p:timing>
-    <p:tnLst>
-      <p:par>
-        <p:cTn id="1" dur="indefinite" restart="never" nodeType="tmRoot"/>
-      </p:par>
-    </p:tnLst>
-  </p:timing>
-</p:sld>
-</file>
-
-<file path=ppt/slides/slide5.xml><?xml version="1.0" encoding="utf-8"?>
-<p:sld xmlns:a="http://schemas.openxmlformats.org/drawingml/2006/main" xmlns:r="http://schemas.openxmlformats.org/officeDocument/2006/relationships" xmlns:p="http://schemas.openxmlformats.org/presentationml/2006/main">
-  <p:cSld>
-    <p:spTree>
-      <p:nvGrpSpPr>
-        <p:cNvPr id="1" name=""/>
-        <p:cNvGrpSpPr/>
-        <p:nvPr/>
-      </p:nvGrpSpPr>
-      <p:grpSpPr>
-        <a:xfrm>
-          <a:off x="0" y="0"/>
-          <a:ext cx="0" cy="0"/>
-          <a:chOff x="0" y="0"/>
-          <a:chExt cx="0" cy="0"/>
-        </a:xfrm>
-      </p:grpSpPr>
-      <p:sp>
-        <p:nvSpPr>
-          <p:cNvPr id="10" name="직사각형 9"/>
-          <p:cNvSpPr/>
-          <p:nvPr/>
-        </p:nvSpPr>
-        <p:spPr>
-          <a:xfrm>
-            <a:off x="152400" y="125187"/>
-            <a:ext cx="2667000" cy="312964"/>
-          </a:xfrm>
-          <a:prstGeom prst="rect">
-            <a:avLst/>
-          </a:prstGeom>
-          <a:noFill/>
-          <a:ln>
-            <a:noFill/>
-          </a:ln>
-        </p:spPr>
-        <p:style>
-          <a:lnRef idx="2">
-            <a:schemeClr val="accent1">
-              <a:shade val="50000"/>
-            </a:schemeClr>
-          </a:lnRef>
-          <a:fillRef idx="1">
-            <a:schemeClr val="accent1"/>
-          </a:fillRef>
-          <a:effectRef idx="0">
-            <a:schemeClr val="accent1"/>
-          </a:effectRef>
-          <a:fontRef idx="minor">
-            <a:schemeClr val="lt1"/>
-          </a:fontRef>
-        </p:style>
-        <p:txBody>
-          <a:bodyPr rtlCol="0" anchor="ctr"/>
-          <a:lstStyle/>
-          <a:p>
-            <a:r>
-              <a:rPr lang="en-US" altLang="ko-KR" sz="1600" b="1" dirty="0" err="1" smtClean="0">
-                <a:solidFill>
-                  <a:schemeClr val="accent1">
-                    <a:lumMod val="75000"/>
-                  </a:schemeClr>
-                </a:solidFill>
-                <a:latin typeface="+mn-ea"/>
-              </a:rPr>
-              <a:t>Vertica</a:t>
-            </a:r>
-            <a:r>
-              <a:rPr lang="en-US" altLang="ko-KR" sz="1600" b="1" dirty="0" smtClean="0">
-                <a:solidFill>
-                  <a:schemeClr val="accent1">
-                    <a:lumMod val="75000"/>
-                  </a:schemeClr>
-                </a:solidFill>
-                <a:latin typeface="+mn-ea"/>
-              </a:rPr>
-              <a:t> </a:t>
-            </a:r>
-            <a:r>
-              <a:rPr lang="ko-KR" altLang="en-US" sz="1600" b="1" dirty="0" smtClean="0">
-                <a:solidFill>
-                  <a:schemeClr val="accent1">
-                    <a:lumMod val="75000"/>
-                  </a:schemeClr>
-                </a:solidFill>
-                <a:latin typeface="+mn-ea"/>
-              </a:rPr>
-              <a:t>아키텍처</a:t>
-            </a:r>
-            <a:endParaRPr lang="ko-KR" altLang="en-US" sz="1600" b="1" dirty="0">
-              <a:solidFill>
-                <a:schemeClr val="accent1">
-                  <a:lumMod val="75000"/>
-                </a:schemeClr>
-              </a:solidFill>
-              <a:latin typeface="+mn-ea"/>
-            </a:endParaRPr>
-          </a:p>
-        </p:txBody>
-      </p:sp>
-      <p:sp>
-        <p:nvSpPr>
-          <p:cNvPr id="12" name="직사각형 11"/>
-          <p:cNvSpPr/>
-          <p:nvPr/>
-        </p:nvSpPr>
-        <p:spPr>
-          <a:xfrm>
-            <a:off x="301171" y="422730"/>
-            <a:ext cx="9312729" cy="357414"/>
-          </a:xfrm>
-          <a:prstGeom prst="rect">
-            <a:avLst/>
-          </a:prstGeom>
-          <a:noFill/>
-          <a:ln>
-            <a:noFill/>
-          </a:ln>
-        </p:spPr>
-        <p:style>
-          <a:lnRef idx="2">
-            <a:schemeClr val="accent1">
-              <a:shade val="50000"/>
-            </a:schemeClr>
-          </a:lnRef>
-          <a:fillRef idx="1">
-            <a:schemeClr val="accent1"/>
-          </a:fillRef>
-          <a:effectRef idx="0">
-            <a:schemeClr val="accent1"/>
-          </a:effectRef>
-          <a:fontRef idx="minor">
-            <a:schemeClr val="lt1"/>
-          </a:fontRef>
-        </p:style>
-        <p:txBody>
-          <a:bodyPr rtlCol="0" anchor="ctr"/>
-          <a:lstStyle/>
-          <a:p>
-            <a:r>
-              <a:rPr lang="en-US" altLang="ko-KR" sz="1400" dirty="0" err="1">
-                <a:solidFill>
-                  <a:schemeClr val="tx1"/>
-                </a:solidFill>
-                <a:latin typeface="+mn-ea"/>
-              </a:rPr>
-              <a:t>Vertica</a:t>
-            </a:r>
-            <a:r>
-              <a:rPr lang="ko-KR" altLang="en-US" sz="1400" dirty="0">
-                <a:solidFill>
-                  <a:schemeClr val="tx1"/>
-                </a:solidFill>
-                <a:latin typeface="+mn-ea"/>
-              </a:rPr>
-              <a:t>는 단순하고 효율적인 아키텍처로 대규모 데이터 분석을 지원합니다</a:t>
-            </a:r>
-            <a:r>
-              <a:rPr lang="en-US" altLang="ko-KR" sz="1400" dirty="0">
-                <a:solidFill>
-                  <a:schemeClr val="tx1"/>
-                </a:solidFill>
-                <a:latin typeface="+mn-ea"/>
-              </a:rPr>
-              <a:t>.</a:t>
-            </a:r>
-          </a:p>
-        </p:txBody>
-      </p:sp>
-      <p:sp>
-        <p:nvSpPr>
-          <p:cNvPr id="20" name="직사각형 19"/>
-          <p:cNvSpPr/>
-          <p:nvPr/>
-        </p:nvSpPr>
-        <p:spPr>
-          <a:xfrm>
-            <a:off x="407534" y="785585"/>
-            <a:ext cx="9312729" cy="1054100"/>
-          </a:xfrm>
-          <a:prstGeom prst="rect">
-            <a:avLst/>
-          </a:prstGeom>
-          <a:noFill/>
-          <a:ln>
-            <a:noFill/>
-          </a:ln>
-        </p:spPr>
-        <p:style>
-          <a:lnRef idx="2">
-            <a:schemeClr val="accent1">
-              <a:shade val="50000"/>
-            </a:schemeClr>
-          </a:lnRef>
-          <a:fillRef idx="1">
-            <a:schemeClr val="accent1"/>
-          </a:fillRef>
-          <a:effectRef idx="0">
-            <a:schemeClr val="accent1"/>
-          </a:effectRef>
-          <a:fontRef idx="minor">
-            <a:schemeClr val="lt1"/>
-          </a:fontRef>
-        </p:style>
-        <p:txBody>
-          <a:bodyPr rtlCol="0" anchor="ctr"/>
-          <a:lstStyle/>
-          <a:p>
-            <a:r>
-              <a:rPr lang="en-US" altLang="ko-KR" sz="1600" b="1" dirty="0" smtClean="0">
-                <a:solidFill>
-                  <a:schemeClr val="tx1"/>
-                </a:solidFill>
-                <a:latin typeface="+mn-ea"/>
-              </a:rPr>
-              <a:t>Pure-MPP (Massively Parallel Processing)</a:t>
-            </a:r>
-            <a:br>
-              <a:rPr lang="en-US" altLang="ko-KR" sz="1600" b="1" dirty="0" smtClean="0">
-                <a:solidFill>
-                  <a:schemeClr val="tx1"/>
-                </a:solidFill>
-                <a:latin typeface="+mn-ea"/>
-              </a:rPr>
-            </a:br>
-            <a:r>
-              <a:rPr lang="en-US" altLang="ko-KR" sz="1400" dirty="0" err="1">
-                <a:solidFill>
-                  <a:schemeClr val="tx1"/>
-                </a:solidFill>
-                <a:latin typeface="+mn-ea"/>
-              </a:rPr>
-              <a:t>Vertica</a:t>
-            </a:r>
-            <a:r>
-              <a:rPr lang="ko-KR" altLang="en-US" sz="1400" dirty="0">
-                <a:solidFill>
-                  <a:schemeClr val="tx1"/>
-                </a:solidFill>
-                <a:latin typeface="+mn-ea"/>
-              </a:rPr>
-              <a:t>는 별도의 마스터 </a:t>
-            </a:r>
-            <a:r>
-              <a:rPr lang="ko-KR" altLang="en-US" sz="1400" dirty="0" err="1">
-                <a:solidFill>
-                  <a:schemeClr val="tx1"/>
-                </a:solidFill>
-                <a:latin typeface="+mn-ea"/>
-              </a:rPr>
-              <a:t>노드를</a:t>
-            </a:r>
-            <a:r>
-              <a:rPr lang="ko-KR" altLang="en-US" sz="1400" dirty="0">
-                <a:solidFill>
-                  <a:schemeClr val="tx1"/>
-                </a:solidFill>
-                <a:latin typeface="+mn-ea"/>
-              </a:rPr>
-              <a:t> 분리하지 않고 모든 </a:t>
-            </a:r>
-            <a:r>
-              <a:rPr lang="ko-KR" altLang="en-US" sz="1400" dirty="0" err="1">
-                <a:solidFill>
-                  <a:schemeClr val="tx1"/>
-                </a:solidFill>
-                <a:latin typeface="+mn-ea"/>
-              </a:rPr>
-              <a:t>노드가</a:t>
-            </a:r>
-            <a:r>
-              <a:rPr lang="ko-KR" altLang="en-US" sz="1400" dirty="0">
-                <a:solidFill>
-                  <a:schemeClr val="tx1"/>
-                </a:solidFill>
-                <a:latin typeface="+mn-ea"/>
-              </a:rPr>
-              <a:t> 동일한 역할을 수행하는 </a:t>
-            </a:r>
-            <a:r>
-              <a:rPr lang="en-US" altLang="ko-KR" sz="1400" dirty="0">
-                <a:solidFill>
-                  <a:schemeClr val="tx1"/>
-                </a:solidFill>
-                <a:latin typeface="+mn-ea"/>
-              </a:rPr>
-              <a:t>pure-MPP </a:t>
-            </a:r>
-            <a:r>
-              <a:rPr lang="ko-KR" altLang="en-US" sz="1400" dirty="0">
-                <a:solidFill>
-                  <a:schemeClr val="tx1"/>
-                </a:solidFill>
-                <a:latin typeface="+mn-ea"/>
-              </a:rPr>
-              <a:t>구조입니다</a:t>
-            </a:r>
-            <a:r>
-              <a:rPr lang="en-US" altLang="ko-KR" sz="1400" dirty="0">
-                <a:solidFill>
-                  <a:schemeClr val="tx1"/>
-                </a:solidFill>
-                <a:latin typeface="+mn-ea"/>
-              </a:rPr>
-              <a:t>.</a:t>
-            </a:r>
-          </a:p>
-          <a:p>
-            <a:r>
-              <a:rPr lang="ko-KR" altLang="en-US" sz="1400" dirty="0">
-                <a:solidFill>
-                  <a:schemeClr val="tx1"/>
-                </a:solidFill>
-                <a:latin typeface="+mn-ea"/>
-              </a:rPr>
-              <a:t>또한 클러스터 구성이나 </a:t>
-            </a:r>
-            <a:r>
-              <a:rPr lang="ko-KR" altLang="en-US" sz="1400" dirty="0" err="1">
-                <a:solidFill>
-                  <a:schemeClr val="tx1"/>
-                </a:solidFill>
-                <a:latin typeface="+mn-ea"/>
-              </a:rPr>
-              <a:t>노드</a:t>
-            </a:r>
-            <a:r>
-              <a:rPr lang="ko-KR" altLang="en-US" sz="1400" dirty="0">
-                <a:solidFill>
-                  <a:schemeClr val="tx1"/>
-                </a:solidFill>
-                <a:latin typeface="+mn-ea"/>
-              </a:rPr>
-              <a:t> 구성에 특별한 하드웨어나 소프트웨어를 필요로 하지 않기 때문에 비용적인 강점이 있으며 복잡한 구성이 불필요하여 클러스터 구성 과정이 매우 간단하고 빠릅니다</a:t>
-            </a:r>
-            <a:r>
-              <a:rPr lang="en-US" altLang="ko-KR" sz="1400" dirty="0">
+              <a:rPr lang="en-US" altLang="ko-KR" sz="1200" dirty="0">
                 <a:solidFill>
                   <a:schemeClr val="tx1"/>
                 </a:solidFill>
@@ -20721,7 +16223,7 @@
         </p:nvGrpSpPr>
         <p:grpSpPr>
           <a:xfrm>
-            <a:off x="6048238" y="2088979"/>
+            <a:off x="769050" y="1947465"/>
             <a:ext cx="3192971" cy="1393647"/>
             <a:chOff x="5918698" y="2256619"/>
             <a:chExt cx="3192971" cy="1393647"/>
@@ -22362,7 +17864,7 @@
         </p:nvSpPr>
         <p:spPr>
           <a:xfrm>
-            <a:off x="400807" y="2031646"/>
+            <a:off x="1548645" y="1607104"/>
             <a:ext cx="1633781" cy="338554"/>
           </a:xfrm>
           <a:prstGeom prst="rect">
@@ -22393,16 +17895,16 @@
       </p:sp>
       <p:grpSp>
         <p:nvGrpSpPr>
-          <p:cNvPr id="68" name="그룹 67"/>
+          <p:cNvPr id="3" name="그룹 2"/>
           <p:cNvGrpSpPr/>
           <p:nvPr/>
         </p:nvGrpSpPr>
         <p:grpSpPr>
           <a:xfrm>
-            <a:off x="6282940" y="4211346"/>
-            <a:ext cx="2566104" cy="649573"/>
-            <a:chOff x="7767471" y="3263550"/>
-            <a:chExt cx="2566104" cy="649573"/>
+            <a:off x="6229146" y="1972432"/>
+            <a:ext cx="2514330" cy="1482492"/>
+            <a:chOff x="6385195" y="3966698"/>
+            <a:chExt cx="2514330" cy="1482492"/>
           </a:xfrm>
         </p:grpSpPr>
         <p:cxnSp>
@@ -22413,8 +17915,8 @@
           </p:nvCxnSpPr>
           <p:spPr>
             <a:xfrm>
-              <a:off x="7767471" y="3263550"/>
-              <a:ext cx="2566104" cy="0"/>
+              <a:off x="6390704" y="4238626"/>
+              <a:ext cx="2350576" cy="0"/>
             </a:xfrm>
             <a:prstGeom prst="line">
               <a:avLst/>
@@ -22441,576 +17943,516 @@
             </a:fontRef>
           </p:style>
         </p:cxnSp>
-        <p:grpSp>
-          <p:nvGrpSpPr>
-            <p:cNvPr id="74" name="그룹 73"/>
-            <p:cNvGrpSpPr/>
+        <p:sp>
+          <p:nvSpPr>
+            <p:cNvPr id="84" name="Rounded Rectangle 4"/>
+            <p:cNvSpPr/>
             <p:nvPr/>
-          </p:nvGrpSpPr>
-          <p:grpSpPr>
+          </p:nvSpPr>
+          <p:spPr>
             <a:xfrm>
-              <a:off x="7815960" y="3263550"/>
-              <a:ext cx="418641" cy="649573"/>
-              <a:chOff x="8086547" y="3263550"/>
-              <a:chExt cx="418641" cy="649573"/>
+              <a:off x="6435120" y="4342287"/>
+              <a:ext cx="383479" cy="380228"/>
             </a:xfrm>
-          </p:grpSpPr>
-          <p:sp>
-            <p:nvSpPr>
-              <p:cNvPr id="84" name="Rounded Rectangle 4"/>
-              <p:cNvSpPr/>
-              <p:nvPr/>
-            </p:nvSpPr>
-            <p:spPr>
-              <a:xfrm>
-                <a:off x="8086547" y="3498031"/>
-                <a:ext cx="418641" cy="415092"/>
-              </a:xfrm>
-              <a:prstGeom prst="roundRect">
-                <a:avLst/>
-              </a:prstGeom>
+            <a:prstGeom prst="roundRect">
+              <a:avLst/>
+            </a:prstGeom>
+            <a:solidFill>
+              <a:srgbClr val="0079EF"/>
+            </a:solidFill>
+            <a:ln>
+              <a:noFill/>
+            </a:ln>
+            <a:effectLst/>
+          </p:spPr>
+          <p:style>
+            <a:lnRef idx="1">
+              <a:schemeClr val="accent1"/>
+            </a:lnRef>
+            <a:fillRef idx="3">
+              <a:schemeClr val="accent1"/>
+            </a:fillRef>
+            <a:effectRef idx="2">
+              <a:schemeClr val="accent1"/>
+            </a:effectRef>
+            <a:fontRef idx="minor">
+              <a:schemeClr val="lt1"/>
+            </a:fontRef>
+          </p:style>
+          <p:txBody>
+            <a:bodyPr rtlCol="0" anchor="ctr"/>
+            <a:lstStyle/>
+            <a:p>
+              <a:pPr algn="ctr"/>
+              <a:endParaRPr lang="en-US">
+                <a:latin typeface="+mn-ea"/>
+              </a:endParaRPr>
+            </a:p>
+          </p:txBody>
+        </p:sp>
+        <p:cxnSp>
+          <p:nvCxnSpPr>
+            <p:cNvPr id="85" name="Straight Connector 9"/>
+            <p:cNvCxnSpPr/>
+            <p:nvPr/>
+          </p:nvCxnSpPr>
+          <p:spPr>
+            <a:xfrm>
+              <a:off x="6626859" y="4238626"/>
+              <a:ext cx="0" cy="232105"/>
+            </a:xfrm>
+            <a:prstGeom prst="line">
+              <a:avLst/>
+            </a:prstGeom>
+            <a:ln w="28575" cmpd="sng">
               <a:solidFill>
                 <a:srgbClr val="0079EF"/>
               </a:solidFill>
-              <a:ln>
-                <a:noFill/>
-              </a:ln>
-              <a:effectLst/>
-            </p:spPr>
-            <p:style>
-              <a:lnRef idx="1">
-                <a:schemeClr val="accent1"/>
-              </a:lnRef>
-              <a:fillRef idx="3">
-                <a:schemeClr val="accent1"/>
-              </a:fillRef>
-              <a:effectRef idx="2">
-                <a:schemeClr val="accent1"/>
-              </a:effectRef>
-              <a:fontRef idx="minor">
-                <a:schemeClr val="lt1"/>
-              </a:fontRef>
-            </p:style>
-            <p:txBody>
-              <a:bodyPr rtlCol="0" anchor="ctr"/>
-              <a:lstStyle/>
-              <a:p>
-                <a:pPr algn="ctr"/>
-                <a:endParaRPr lang="en-US">
-                  <a:latin typeface="+mn-ea"/>
-                </a:endParaRPr>
-              </a:p>
-            </p:txBody>
-          </p:sp>
-          <p:cxnSp>
-            <p:nvCxnSpPr>
-              <p:cNvPr id="85" name="Straight Connector 9"/>
-              <p:cNvCxnSpPr/>
-              <p:nvPr/>
-            </p:nvCxnSpPr>
-            <p:spPr>
-              <a:xfrm>
-                <a:off x="8295867" y="3263550"/>
-                <a:ext cx="0" cy="253388"/>
-              </a:xfrm>
-              <a:prstGeom prst="line">
-                <a:avLst/>
-              </a:prstGeom>
-              <a:ln w="28575" cmpd="sng">
-                <a:solidFill>
-                  <a:srgbClr val="0079EF"/>
-                </a:solidFill>
-              </a:ln>
-              <a:effectLst/>
-            </p:spPr>
-            <p:style>
-              <a:lnRef idx="2">
-                <a:schemeClr val="accent1"/>
-              </a:lnRef>
-              <a:fillRef idx="0">
-                <a:schemeClr val="accent1"/>
-              </a:fillRef>
-              <a:effectRef idx="1">
-                <a:schemeClr val="accent1"/>
-              </a:effectRef>
-              <a:fontRef idx="minor">
-                <a:schemeClr val="tx1"/>
-              </a:fontRef>
-            </p:style>
-          </p:cxnSp>
-        </p:grpSp>
-        <p:grpSp>
-          <p:nvGrpSpPr>
-            <p:cNvPr id="75" name="그룹 74"/>
-            <p:cNvGrpSpPr/>
+            </a:ln>
+            <a:effectLst/>
+          </p:spPr>
+          <p:style>
+            <a:lnRef idx="2">
+              <a:schemeClr val="accent1"/>
+            </a:lnRef>
+            <a:fillRef idx="0">
+              <a:schemeClr val="accent1"/>
+            </a:fillRef>
+            <a:effectRef idx="1">
+              <a:schemeClr val="accent1"/>
+            </a:effectRef>
+            <a:fontRef idx="minor">
+              <a:schemeClr val="tx1"/>
+            </a:fontRef>
+          </p:style>
+        </p:cxnSp>
+        <p:sp>
+          <p:nvSpPr>
+            <p:cNvPr id="82" name="Rounded Rectangle 5"/>
+            <p:cNvSpPr/>
             <p:nvPr/>
-          </p:nvGrpSpPr>
-          <p:grpSpPr>
+          </p:nvSpPr>
+          <p:spPr>
             <a:xfrm>
-              <a:off x="8493237" y="3263550"/>
-              <a:ext cx="418641" cy="649573"/>
-              <a:chOff x="8589651" y="3263550"/>
-              <a:chExt cx="418641" cy="649573"/>
+              <a:off x="7055513" y="4342287"/>
+              <a:ext cx="383479" cy="380228"/>
             </a:xfrm>
-          </p:grpSpPr>
-          <p:sp>
-            <p:nvSpPr>
-              <p:cNvPr id="82" name="Rounded Rectangle 5"/>
-              <p:cNvSpPr/>
-              <p:nvPr/>
-            </p:nvSpPr>
-            <p:spPr>
-              <a:xfrm>
-                <a:off x="8589651" y="3498031"/>
-                <a:ext cx="418641" cy="415092"/>
-              </a:xfrm>
-              <a:prstGeom prst="roundRect">
-                <a:avLst/>
-              </a:prstGeom>
+            <a:prstGeom prst="roundRect">
+              <a:avLst/>
+            </a:prstGeom>
+            <a:solidFill>
+              <a:srgbClr val="0079EF"/>
+            </a:solidFill>
+            <a:ln>
+              <a:noFill/>
+            </a:ln>
+            <a:effectLst/>
+          </p:spPr>
+          <p:style>
+            <a:lnRef idx="1">
+              <a:schemeClr val="accent1"/>
+            </a:lnRef>
+            <a:fillRef idx="3">
+              <a:schemeClr val="accent1"/>
+            </a:fillRef>
+            <a:effectRef idx="2">
+              <a:schemeClr val="accent1"/>
+            </a:effectRef>
+            <a:fontRef idx="minor">
+              <a:schemeClr val="lt1"/>
+            </a:fontRef>
+          </p:style>
+          <p:txBody>
+            <a:bodyPr rtlCol="0" anchor="ctr"/>
+            <a:lstStyle/>
+            <a:p>
+              <a:pPr algn="ctr"/>
+              <a:endParaRPr lang="en-US">
+                <a:latin typeface="+mn-ea"/>
+              </a:endParaRPr>
+            </a:p>
+          </p:txBody>
+        </p:sp>
+        <p:cxnSp>
+          <p:nvCxnSpPr>
+            <p:cNvPr id="83" name="Straight Connector 10"/>
+            <p:cNvCxnSpPr/>
+            <p:nvPr/>
+          </p:nvCxnSpPr>
+          <p:spPr>
+            <a:xfrm>
+              <a:off x="7247251" y="4238626"/>
+              <a:ext cx="0" cy="232105"/>
+            </a:xfrm>
+            <a:prstGeom prst="line">
+              <a:avLst/>
+            </a:prstGeom>
+            <a:ln w="28575" cmpd="sng">
               <a:solidFill>
                 <a:srgbClr val="0079EF"/>
               </a:solidFill>
-              <a:ln>
-                <a:noFill/>
-              </a:ln>
-              <a:effectLst/>
-            </p:spPr>
-            <p:style>
-              <a:lnRef idx="1">
-                <a:schemeClr val="accent1"/>
-              </a:lnRef>
-              <a:fillRef idx="3">
-                <a:schemeClr val="accent1"/>
-              </a:fillRef>
-              <a:effectRef idx="2">
-                <a:schemeClr val="accent1"/>
-              </a:effectRef>
-              <a:fontRef idx="minor">
-                <a:schemeClr val="lt1"/>
-              </a:fontRef>
-            </p:style>
-            <p:txBody>
-              <a:bodyPr rtlCol="0" anchor="ctr"/>
-              <a:lstStyle/>
-              <a:p>
-                <a:pPr algn="ctr"/>
-                <a:endParaRPr lang="en-US">
-                  <a:latin typeface="+mn-ea"/>
-                </a:endParaRPr>
-              </a:p>
-            </p:txBody>
-          </p:sp>
-          <p:cxnSp>
-            <p:nvCxnSpPr>
-              <p:cNvPr id="83" name="Straight Connector 10"/>
-              <p:cNvCxnSpPr/>
-              <p:nvPr/>
-            </p:nvCxnSpPr>
-            <p:spPr>
-              <a:xfrm>
-                <a:off x="8798970" y="3263550"/>
-                <a:ext cx="0" cy="253388"/>
-              </a:xfrm>
-              <a:prstGeom prst="line">
-                <a:avLst/>
-              </a:prstGeom>
-              <a:ln w="28575" cmpd="sng">
-                <a:solidFill>
-                  <a:srgbClr val="0079EF"/>
-                </a:solidFill>
-              </a:ln>
-              <a:effectLst/>
-            </p:spPr>
-            <p:style>
-              <a:lnRef idx="2">
-                <a:schemeClr val="accent1"/>
-              </a:lnRef>
-              <a:fillRef idx="0">
-                <a:schemeClr val="accent1"/>
-              </a:fillRef>
-              <a:effectRef idx="1">
-                <a:schemeClr val="accent1"/>
-              </a:effectRef>
-              <a:fontRef idx="minor">
-                <a:schemeClr val="tx1"/>
-              </a:fontRef>
-            </p:style>
-          </p:cxnSp>
-        </p:grpSp>
-        <p:grpSp>
-          <p:nvGrpSpPr>
-            <p:cNvPr id="76" name="그룹 75"/>
-            <p:cNvGrpSpPr/>
+            </a:ln>
+            <a:effectLst/>
+          </p:spPr>
+          <p:style>
+            <a:lnRef idx="2">
+              <a:schemeClr val="accent1"/>
+            </a:lnRef>
+            <a:fillRef idx="0">
+              <a:schemeClr val="accent1"/>
+            </a:fillRef>
+            <a:effectRef idx="1">
+              <a:schemeClr val="accent1"/>
+            </a:effectRef>
+            <a:fontRef idx="minor">
+              <a:schemeClr val="tx1"/>
+            </a:fontRef>
+          </p:style>
+        </p:cxnSp>
+        <p:sp>
+          <p:nvSpPr>
+            <p:cNvPr id="80" name="Rounded Rectangle 6"/>
+            <p:cNvSpPr/>
             <p:nvPr/>
-          </p:nvGrpSpPr>
-          <p:grpSpPr>
+          </p:nvSpPr>
+          <p:spPr>
             <a:xfrm>
-              <a:off x="9170514" y="3263550"/>
-              <a:ext cx="418641" cy="649573"/>
-              <a:chOff x="9092755" y="3263550"/>
-              <a:chExt cx="418641" cy="649573"/>
+              <a:off x="7675905" y="4348637"/>
+              <a:ext cx="383479" cy="380228"/>
             </a:xfrm>
-          </p:grpSpPr>
-          <p:sp>
-            <p:nvSpPr>
-              <p:cNvPr id="80" name="Rounded Rectangle 6"/>
-              <p:cNvSpPr/>
-              <p:nvPr/>
-            </p:nvSpPr>
-            <p:spPr>
-              <a:xfrm>
-                <a:off x="9092755" y="3498031"/>
-                <a:ext cx="418641" cy="415092"/>
-              </a:xfrm>
-              <a:prstGeom prst="roundRect">
-                <a:avLst/>
-              </a:prstGeom>
+            <a:prstGeom prst="roundRect">
+              <a:avLst/>
+            </a:prstGeom>
+            <a:solidFill>
+              <a:srgbClr val="0079EF"/>
+            </a:solidFill>
+            <a:ln>
+              <a:noFill/>
+            </a:ln>
+            <a:effectLst/>
+          </p:spPr>
+          <p:style>
+            <a:lnRef idx="1">
+              <a:schemeClr val="accent1"/>
+            </a:lnRef>
+            <a:fillRef idx="3">
+              <a:schemeClr val="accent1"/>
+            </a:fillRef>
+            <a:effectRef idx="2">
+              <a:schemeClr val="accent1"/>
+            </a:effectRef>
+            <a:fontRef idx="minor">
+              <a:schemeClr val="lt1"/>
+            </a:fontRef>
+          </p:style>
+          <p:txBody>
+            <a:bodyPr rtlCol="0" anchor="ctr"/>
+            <a:lstStyle/>
+            <a:p>
+              <a:pPr algn="ctr"/>
+              <a:endParaRPr lang="en-US">
+                <a:latin typeface="+mn-ea"/>
+              </a:endParaRPr>
+            </a:p>
+          </p:txBody>
+        </p:sp>
+        <p:cxnSp>
+          <p:nvCxnSpPr>
+            <p:cNvPr id="81" name="Straight Connector 11"/>
+            <p:cNvCxnSpPr/>
+            <p:nvPr/>
+          </p:nvCxnSpPr>
+          <p:spPr>
+            <a:xfrm>
+              <a:off x="7867644" y="4232276"/>
+              <a:ext cx="0" cy="232105"/>
+            </a:xfrm>
+            <a:prstGeom prst="line">
+              <a:avLst/>
+            </a:prstGeom>
+            <a:ln w="28575" cmpd="sng">
               <a:solidFill>
                 <a:srgbClr val="0079EF"/>
               </a:solidFill>
-              <a:ln>
-                <a:noFill/>
-              </a:ln>
-              <a:effectLst/>
-            </p:spPr>
-            <p:style>
-              <a:lnRef idx="1">
-                <a:schemeClr val="accent1"/>
-              </a:lnRef>
-              <a:fillRef idx="3">
-                <a:schemeClr val="accent1"/>
-              </a:fillRef>
-              <a:effectRef idx="2">
-                <a:schemeClr val="accent1"/>
-              </a:effectRef>
-              <a:fontRef idx="minor">
-                <a:schemeClr val="lt1"/>
-              </a:fontRef>
-            </p:style>
-            <p:txBody>
-              <a:bodyPr rtlCol="0" anchor="ctr"/>
-              <a:lstStyle/>
-              <a:p>
-                <a:pPr algn="ctr"/>
-                <a:endParaRPr lang="en-US">
-                  <a:latin typeface="+mn-ea"/>
-                </a:endParaRPr>
-              </a:p>
-            </p:txBody>
-          </p:sp>
-          <p:cxnSp>
-            <p:nvCxnSpPr>
-              <p:cNvPr id="81" name="Straight Connector 11"/>
-              <p:cNvCxnSpPr/>
-              <p:nvPr/>
-            </p:nvCxnSpPr>
-            <p:spPr>
-              <a:xfrm>
-                <a:off x="9302075" y="3263550"/>
-                <a:ext cx="0" cy="253388"/>
-              </a:xfrm>
-              <a:prstGeom prst="line">
-                <a:avLst/>
-              </a:prstGeom>
-              <a:ln w="28575" cmpd="sng">
-                <a:solidFill>
-                  <a:srgbClr val="0079EF"/>
-                </a:solidFill>
-              </a:ln>
-              <a:effectLst/>
-            </p:spPr>
-            <p:style>
-              <a:lnRef idx="2">
-                <a:schemeClr val="accent1"/>
-              </a:lnRef>
-              <a:fillRef idx="0">
-                <a:schemeClr val="accent1"/>
-              </a:fillRef>
-              <a:effectRef idx="1">
-                <a:schemeClr val="accent1"/>
-              </a:effectRef>
-              <a:fontRef idx="minor">
-                <a:schemeClr val="tx1"/>
-              </a:fontRef>
-            </p:style>
-          </p:cxnSp>
-        </p:grpSp>
-        <p:grpSp>
-          <p:nvGrpSpPr>
-            <p:cNvPr id="77" name="그룹 76"/>
-            <p:cNvGrpSpPr/>
+            </a:ln>
+            <a:effectLst/>
+          </p:spPr>
+          <p:style>
+            <a:lnRef idx="2">
+              <a:schemeClr val="accent1"/>
+            </a:lnRef>
+            <a:fillRef idx="0">
+              <a:schemeClr val="accent1"/>
+            </a:fillRef>
+            <a:effectRef idx="1">
+              <a:schemeClr val="accent1"/>
+            </a:effectRef>
+            <a:fontRef idx="minor">
+              <a:schemeClr val="tx1"/>
+            </a:fontRef>
+          </p:style>
+        </p:cxnSp>
+        <p:sp>
+          <p:nvSpPr>
+            <p:cNvPr id="78" name="Rounded Rectangle 7"/>
+            <p:cNvSpPr/>
             <p:nvPr/>
-          </p:nvGrpSpPr>
-          <p:grpSpPr>
+          </p:nvSpPr>
+          <p:spPr>
             <a:xfrm>
-              <a:off x="9847791" y="3263550"/>
-              <a:ext cx="418641" cy="649573"/>
-              <a:chOff x="9595858" y="3263550"/>
-              <a:chExt cx="418641" cy="649573"/>
+              <a:off x="8296297" y="4342287"/>
+              <a:ext cx="383479" cy="380228"/>
             </a:xfrm>
-          </p:grpSpPr>
-          <p:sp>
-            <p:nvSpPr>
-              <p:cNvPr id="78" name="Rounded Rectangle 7"/>
-              <p:cNvSpPr/>
-              <p:nvPr/>
-            </p:nvSpPr>
-            <p:spPr>
-              <a:xfrm>
-                <a:off x="9595858" y="3498031"/>
-                <a:ext cx="418641" cy="415092"/>
-              </a:xfrm>
-              <a:prstGeom prst="roundRect">
-                <a:avLst/>
-              </a:prstGeom>
+            <a:prstGeom prst="roundRect">
+              <a:avLst/>
+            </a:prstGeom>
+            <a:solidFill>
+              <a:srgbClr val="0079EF"/>
+            </a:solidFill>
+            <a:ln>
+              <a:noFill/>
+            </a:ln>
+            <a:effectLst/>
+          </p:spPr>
+          <p:style>
+            <a:lnRef idx="1">
+              <a:schemeClr val="accent1"/>
+            </a:lnRef>
+            <a:fillRef idx="3">
+              <a:schemeClr val="accent1"/>
+            </a:fillRef>
+            <a:effectRef idx="2">
+              <a:schemeClr val="accent1"/>
+            </a:effectRef>
+            <a:fontRef idx="minor">
+              <a:schemeClr val="lt1"/>
+            </a:fontRef>
+          </p:style>
+          <p:txBody>
+            <a:bodyPr rtlCol="0" anchor="ctr"/>
+            <a:lstStyle/>
+            <a:p>
+              <a:pPr algn="ctr"/>
+              <a:endParaRPr lang="en-US">
+                <a:latin typeface="+mn-ea"/>
+              </a:endParaRPr>
+            </a:p>
+          </p:txBody>
+        </p:sp>
+        <p:cxnSp>
+          <p:nvCxnSpPr>
+            <p:cNvPr id="79" name="Straight Connector 12"/>
+            <p:cNvCxnSpPr/>
+            <p:nvPr/>
+          </p:nvCxnSpPr>
+          <p:spPr>
+            <a:xfrm>
+              <a:off x="8488036" y="4238626"/>
+              <a:ext cx="0" cy="232105"/>
+            </a:xfrm>
+            <a:prstGeom prst="line">
+              <a:avLst/>
+            </a:prstGeom>
+            <a:ln w="28575" cmpd="sng">
               <a:solidFill>
                 <a:srgbClr val="0079EF"/>
               </a:solidFill>
-              <a:ln>
-                <a:noFill/>
-              </a:ln>
-              <a:effectLst/>
-            </p:spPr>
-            <p:style>
-              <a:lnRef idx="1">
-                <a:schemeClr val="accent1"/>
-              </a:lnRef>
-              <a:fillRef idx="3">
-                <a:schemeClr val="accent1"/>
-              </a:fillRef>
-              <a:effectRef idx="2">
-                <a:schemeClr val="accent1"/>
-              </a:effectRef>
-              <a:fontRef idx="minor">
-                <a:schemeClr val="lt1"/>
-              </a:fontRef>
-            </p:style>
-            <p:txBody>
-              <a:bodyPr rtlCol="0" anchor="ctr"/>
-              <a:lstStyle/>
-              <a:p>
-                <a:pPr algn="ctr"/>
-                <a:endParaRPr lang="en-US">
+            </a:ln>
+            <a:effectLst/>
+          </p:spPr>
+          <p:style>
+            <a:lnRef idx="2">
+              <a:schemeClr val="accent1"/>
+            </a:lnRef>
+            <a:fillRef idx="0">
+              <a:schemeClr val="accent1"/>
+            </a:fillRef>
+            <a:effectRef idx="1">
+              <a:schemeClr val="accent1"/>
+            </a:effectRef>
+            <a:fontRef idx="minor">
+              <a:schemeClr val="tx1"/>
+            </a:fontRef>
+          </p:style>
+        </p:cxnSp>
+        <p:sp>
+          <p:nvSpPr>
+            <p:cNvPr id="69" name="TextBox 68"/>
+            <p:cNvSpPr txBox="1"/>
+            <p:nvPr/>
+          </p:nvSpPr>
+          <p:spPr>
+            <a:xfrm>
+              <a:off x="6860682" y="3966698"/>
+              <a:ext cx="1441943" cy="261610"/>
+            </a:xfrm>
+            <a:prstGeom prst="rect">
+              <a:avLst/>
+            </a:prstGeom>
+            <a:noFill/>
+          </p:spPr>
+          <p:txBody>
+            <a:bodyPr wrap="square" rtlCol="0">
+              <a:spAutoFit/>
+            </a:bodyPr>
+            <a:lstStyle/>
+            <a:p>
+              <a:pPr defTabSz="430213">
+                <a:spcAft>
+                  <a:spcPts val="400"/>
+                </a:spcAft>
+                <a:buSzPct val="100000"/>
+              </a:pPr>
+              <a:r>
+                <a:rPr lang="en-US" altLang="ko-KR" sz="1100" b="1" dirty="0">
                   <a:latin typeface="+mn-ea"/>
-                </a:endParaRPr>
-              </a:p>
-            </p:txBody>
-          </p:sp>
-          <p:cxnSp>
-            <p:nvCxnSpPr>
-              <p:cNvPr id="79" name="Straight Connector 12"/>
-              <p:cNvCxnSpPr/>
-              <p:nvPr/>
-            </p:nvCxnSpPr>
-            <p:spPr>
-              <a:xfrm>
-                <a:off x="9805178" y="3263550"/>
-                <a:ext cx="0" cy="253388"/>
-              </a:xfrm>
-              <a:prstGeom prst="line">
-                <a:avLst/>
-              </a:prstGeom>
-              <a:ln w="28575" cmpd="sng">
-                <a:solidFill>
-                  <a:srgbClr val="0079EF"/>
-                </a:solidFill>
-              </a:ln>
-              <a:effectLst/>
-            </p:spPr>
-            <p:style>
-              <a:lnRef idx="2">
-                <a:schemeClr val="accent1"/>
-              </a:lnRef>
-              <a:fillRef idx="0">
-                <a:schemeClr val="accent1"/>
-              </a:fillRef>
-              <a:effectRef idx="1">
-                <a:schemeClr val="accent1"/>
-              </a:effectRef>
-              <a:fontRef idx="minor">
-                <a:schemeClr val="tx1"/>
-              </a:fontRef>
-            </p:style>
-          </p:cxnSp>
-        </p:grpSp>
+                  <a:cs typeface="HP Simplified" pitchFamily="34" charset="0"/>
+                </a:rPr>
+                <a:t>10G Ethernet N/W </a:t>
+              </a:r>
+              <a:endParaRPr lang="en-US" sz="1100" b="1" dirty="0">
+                <a:latin typeface="+mn-ea"/>
+                <a:cs typeface="HP Simplified" pitchFamily="34" charset="0"/>
+              </a:endParaRPr>
+            </a:p>
+          </p:txBody>
+        </p:sp>
+        <p:sp>
+          <p:nvSpPr>
+            <p:cNvPr id="70" name="TextBox 69"/>
+            <p:cNvSpPr txBox="1"/>
+            <p:nvPr/>
+          </p:nvSpPr>
+          <p:spPr>
+            <a:xfrm>
+              <a:off x="6576328" y="4422186"/>
+              <a:ext cx="1965634" cy="230834"/>
+            </a:xfrm>
+            <a:prstGeom prst="rect">
+              <a:avLst/>
+            </a:prstGeom>
+            <a:solidFill>
+              <a:schemeClr val="bg1"/>
+            </a:solidFill>
+          </p:spPr>
+          <p:txBody>
+            <a:bodyPr wrap="none" rtlCol="0">
+              <a:noAutofit/>
+            </a:bodyPr>
+            <a:lstStyle/>
+            <a:p>
+              <a:pPr algn="ctr" defTabSz="430213">
+                <a:spcAft>
+                  <a:spcPts val="400"/>
+                </a:spcAft>
+                <a:buSzPct val="100000"/>
+              </a:pPr>
+              <a:r>
+                <a:rPr lang="en-US" altLang="ko-KR" sz="1100" b="1" dirty="0">
+                  <a:latin typeface="+mn-ea"/>
+                  <a:cs typeface="HP Simplified" pitchFamily="34" charset="0"/>
+                </a:rPr>
+                <a:t>Commodity Servers</a:t>
+              </a:r>
+              <a:endParaRPr lang="en-US" sz="1100" b="1" dirty="0">
+                <a:latin typeface="+mn-ea"/>
+                <a:cs typeface="HP Simplified" pitchFamily="34" charset="0"/>
+              </a:endParaRPr>
+            </a:p>
+          </p:txBody>
+        </p:sp>
+        <p:sp>
+          <p:nvSpPr>
+            <p:cNvPr id="71" name="TextBox 70"/>
+            <p:cNvSpPr txBox="1"/>
+            <p:nvPr/>
+          </p:nvSpPr>
+          <p:spPr>
+            <a:xfrm>
+              <a:off x="6385195" y="4741304"/>
+              <a:ext cx="2514330" cy="707886"/>
+            </a:xfrm>
+            <a:prstGeom prst="rect">
+              <a:avLst/>
+            </a:prstGeom>
+            <a:noFill/>
+          </p:spPr>
+          <p:txBody>
+            <a:bodyPr wrap="square" rtlCol="0">
+              <a:spAutoFit/>
+            </a:bodyPr>
+            <a:lstStyle/>
+            <a:p>
+              <a:pPr marL="171450" indent="-171450" defTabSz="430213">
+                <a:lnSpc>
+                  <a:spcPts val="1200"/>
+                </a:lnSpc>
+                <a:buSzPct val="100000"/>
+                <a:buFont typeface="Wingdings" pitchFamily="2" charset="2"/>
+                <a:buChar char="§"/>
+              </a:pPr>
+              <a:r>
+                <a:rPr lang="en-US" altLang="ko-KR" sz="1050" dirty="0">
+                  <a:latin typeface="+mn-ea"/>
+                  <a:cs typeface="HP Simplified" pitchFamily="34" charset="0"/>
+                </a:rPr>
+                <a:t>No specialized nodes</a:t>
+              </a:r>
+            </a:p>
+            <a:p>
+              <a:pPr marL="171450" indent="-171450" defTabSz="430213">
+                <a:lnSpc>
+                  <a:spcPts val="1200"/>
+                </a:lnSpc>
+                <a:buSzPct val="100000"/>
+                <a:buFont typeface="Wingdings" pitchFamily="2" charset="2"/>
+                <a:buChar char="§"/>
+              </a:pPr>
+              <a:r>
+                <a:rPr lang="en-US" altLang="ko-KR" sz="1050" dirty="0">
+                  <a:latin typeface="+mn-ea"/>
+                  <a:cs typeface="HP Simplified" pitchFamily="34" charset="0"/>
+                </a:rPr>
+                <a:t>All nodes are peers</a:t>
+              </a:r>
+            </a:p>
+            <a:p>
+              <a:pPr marL="171450" indent="-171450" defTabSz="430213">
+                <a:lnSpc>
+                  <a:spcPts val="1200"/>
+                </a:lnSpc>
+                <a:buSzPct val="100000"/>
+                <a:buFont typeface="Wingdings" pitchFamily="2" charset="2"/>
+                <a:buChar char="§"/>
+              </a:pPr>
+              <a:r>
+                <a:rPr lang="en-US" altLang="ko-KR" sz="1050" dirty="0">
+                  <a:latin typeface="+mn-ea"/>
+                  <a:cs typeface="HP Simplified" pitchFamily="34" charset="0"/>
+                </a:rPr>
+                <a:t>Query/Load to any node</a:t>
+              </a:r>
+            </a:p>
+            <a:p>
+              <a:pPr marL="171450" indent="-171450" defTabSz="430213">
+                <a:lnSpc>
+                  <a:spcPts val="1200"/>
+                </a:lnSpc>
+                <a:buSzPct val="100000"/>
+                <a:buFont typeface="Wingdings" pitchFamily="2" charset="2"/>
+                <a:buChar char="§"/>
+              </a:pPr>
+              <a:r>
+                <a:rPr lang="en-US" altLang="ko-KR" sz="1050" dirty="0">
+                  <a:latin typeface="+mn-ea"/>
+                  <a:cs typeface="HP Simplified" pitchFamily="34" charset="0"/>
+                </a:rPr>
+                <a:t>Continuous/real-time load &amp; query</a:t>
+              </a:r>
+            </a:p>
+          </p:txBody>
+        </p:sp>
       </p:grpSp>
-      <p:sp>
-        <p:nvSpPr>
-          <p:cNvPr id="69" name="TextBox 68"/>
-          <p:cNvSpPr txBox="1"/>
-          <p:nvPr/>
-        </p:nvSpPr>
-        <p:spPr>
-          <a:xfrm>
-            <a:off x="6753952" y="3920787"/>
-            <a:ext cx="1483098" cy="261610"/>
-          </a:xfrm>
-          <a:prstGeom prst="rect">
-            <a:avLst/>
-          </a:prstGeom>
-          <a:noFill/>
-        </p:spPr>
-        <p:txBody>
-          <a:bodyPr wrap="none" rtlCol="0">
-            <a:spAutoFit/>
-          </a:bodyPr>
-          <a:lstStyle/>
-          <a:p>
-            <a:pPr defTabSz="430213">
-              <a:spcAft>
-                <a:spcPts val="400"/>
-              </a:spcAft>
-              <a:buSzPct val="100000"/>
-            </a:pPr>
-            <a:r>
-              <a:rPr lang="en-US" altLang="ko-KR" sz="1100" b="1" dirty="0">
-                <a:latin typeface="+mn-ea"/>
-                <a:cs typeface="HP Simplified" pitchFamily="34" charset="0"/>
-              </a:rPr>
-              <a:t>10G Ethernet N/W </a:t>
-            </a:r>
-            <a:endParaRPr lang="en-US" sz="1100" b="1" dirty="0">
-              <a:latin typeface="+mn-ea"/>
-              <a:cs typeface="HP Simplified" pitchFamily="34" charset="0"/>
-            </a:endParaRPr>
-          </a:p>
-        </p:txBody>
-      </p:sp>
-      <p:sp>
-        <p:nvSpPr>
-          <p:cNvPr id="70" name="TextBox 69"/>
-          <p:cNvSpPr txBox="1"/>
-          <p:nvPr/>
-        </p:nvSpPr>
-        <p:spPr>
-          <a:xfrm>
-            <a:off x="6486210" y="4522728"/>
-            <a:ext cx="2145870" cy="252000"/>
-          </a:xfrm>
-          <a:prstGeom prst="rect">
-            <a:avLst/>
-          </a:prstGeom>
-          <a:solidFill>
-            <a:schemeClr val="bg1"/>
-          </a:solidFill>
-        </p:spPr>
-        <p:txBody>
-          <a:bodyPr wrap="none" rtlCol="0">
-            <a:noAutofit/>
-          </a:bodyPr>
-          <a:lstStyle/>
-          <a:p>
-            <a:pPr algn="ctr" defTabSz="430213">
-              <a:spcAft>
-                <a:spcPts val="400"/>
-              </a:spcAft>
-              <a:buSzPct val="100000"/>
-            </a:pPr>
-            <a:r>
-              <a:rPr lang="en-US" altLang="ko-KR" sz="1100" b="1" dirty="0">
-                <a:latin typeface="+mn-ea"/>
-                <a:cs typeface="HP Simplified" pitchFamily="34" charset="0"/>
-              </a:rPr>
-              <a:t>Commodity Servers</a:t>
-            </a:r>
-            <a:endParaRPr lang="en-US" sz="1100" b="1" dirty="0">
-              <a:latin typeface="+mn-ea"/>
-              <a:cs typeface="HP Simplified" pitchFamily="34" charset="0"/>
-            </a:endParaRPr>
-          </a:p>
-        </p:txBody>
-      </p:sp>
-      <p:sp>
-        <p:nvSpPr>
-          <p:cNvPr id="71" name="TextBox 70"/>
-          <p:cNvSpPr txBox="1"/>
-          <p:nvPr/>
-        </p:nvSpPr>
-        <p:spPr>
-          <a:xfrm>
-            <a:off x="6261500" y="5029076"/>
-            <a:ext cx="2643013" cy="707886"/>
-          </a:xfrm>
-          <a:prstGeom prst="rect">
-            <a:avLst/>
-          </a:prstGeom>
-          <a:noFill/>
-        </p:spPr>
-        <p:txBody>
-          <a:bodyPr wrap="square" rtlCol="0">
-            <a:spAutoFit/>
-          </a:bodyPr>
-          <a:lstStyle/>
-          <a:p>
-            <a:pPr marL="171450" indent="-171450" defTabSz="430213">
-              <a:lnSpc>
-                <a:spcPts val="1200"/>
-              </a:lnSpc>
-              <a:buSzPct val="100000"/>
-              <a:buFont typeface="Wingdings" pitchFamily="2" charset="2"/>
-              <a:buChar char="§"/>
-            </a:pPr>
-            <a:r>
-              <a:rPr lang="en-US" altLang="ko-KR" sz="1100" dirty="0">
-                <a:latin typeface="+mn-ea"/>
-                <a:cs typeface="HP Simplified" pitchFamily="34" charset="0"/>
-              </a:rPr>
-              <a:t>No specialized nodes</a:t>
-            </a:r>
-          </a:p>
-          <a:p>
-            <a:pPr marL="171450" indent="-171450" defTabSz="430213">
-              <a:lnSpc>
-                <a:spcPts val="1200"/>
-              </a:lnSpc>
-              <a:buSzPct val="100000"/>
-              <a:buFont typeface="Wingdings" pitchFamily="2" charset="2"/>
-              <a:buChar char="§"/>
-            </a:pPr>
-            <a:r>
-              <a:rPr lang="en-US" altLang="ko-KR" sz="1100" dirty="0">
-                <a:latin typeface="+mn-ea"/>
-                <a:cs typeface="HP Simplified" pitchFamily="34" charset="0"/>
-              </a:rPr>
-              <a:t>All nodes are peers</a:t>
-            </a:r>
-          </a:p>
-          <a:p>
-            <a:pPr marL="171450" indent="-171450" defTabSz="430213">
-              <a:lnSpc>
-                <a:spcPts val="1200"/>
-              </a:lnSpc>
-              <a:buSzPct val="100000"/>
-              <a:buFont typeface="Wingdings" pitchFamily="2" charset="2"/>
-              <a:buChar char="§"/>
-            </a:pPr>
-            <a:r>
-              <a:rPr lang="en-US" altLang="ko-KR" sz="1100" dirty="0">
-                <a:latin typeface="+mn-ea"/>
-                <a:cs typeface="HP Simplified" pitchFamily="34" charset="0"/>
-              </a:rPr>
-              <a:t>Query/Load to any node</a:t>
-            </a:r>
-          </a:p>
-          <a:p>
-            <a:pPr marL="171450" indent="-171450" defTabSz="430213">
-              <a:lnSpc>
-                <a:spcPts val="1200"/>
-              </a:lnSpc>
-              <a:buSzPct val="100000"/>
-              <a:buFont typeface="Wingdings" pitchFamily="2" charset="2"/>
-              <a:buChar char="§"/>
-            </a:pPr>
-            <a:r>
-              <a:rPr lang="en-US" altLang="ko-KR" sz="1100" dirty="0">
-                <a:latin typeface="+mn-ea"/>
-                <a:cs typeface="HP Simplified" pitchFamily="34" charset="0"/>
-              </a:rPr>
-              <a:t>Continuous/real-time load &amp; query</a:t>
-            </a:r>
-          </a:p>
-        </p:txBody>
-      </p:sp>
       <p:sp>
         <p:nvSpPr>
           <p:cNvPr id="72" name="Rectangle 17"/>
@@ -23019,7 +18461,7 @@
         </p:nvSpPr>
         <p:spPr>
           <a:xfrm>
-            <a:off x="549144" y="3488085"/>
+            <a:off x="6945137" y="1607104"/>
             <a:ext cx="1082348" cy="338554"/>
           </a:xfrm>
           <a:prstGeom prst="rect">
@@ -23065,7 +18507,7 @@
         </p:blipFill>
         <p:spPr bwMode="auto">
           <a:xfrm>
-            <a:off x="331393" y="6623929"/>
+            <a:off x="233421" y="5818386"/>
             <a:ext cx="4850208" cy="2371302"/>
           </a:xfrm>
           <a:prstGeom prst="rect">
@@ -23091,7 +18533,7 @@
         </p:nvSpPr>
         <p:spPr bwMode="auto">
           <a:xfrm>
-            <a:off x="5290203" y="7000393"/>
+            <a:off x="5214003" y="6183964"/>
             <a:ext cx="4275845" cy="1846659"/>
           </a:xfrm>
           <a:prstGeom prst="rect">
@@ -23349,8 +18791,8 @@
         </p:nvSpPr>
         <p:spPr>
           <a:xfrm>
-            <a:off x="282348" y="5751289"/>
-            <a:ext cx="9312729" cy="1320800"/>
+            <a:off x="140833" y="4651831"/>
+            <a:ext cx="9312729" cy="1030512"/>
           </a:xfrm>
           <a:prstGeom prst="rect">
             <a:avLst/>
@@ -23381,7 +18823,7 @@
           <a:lstStyle/>
           <a:p>
             <a:r>
-              <a:rPr lang="en-US" altLang="ko-KR" sz="1600" b="1" dirty="0" smtClean="0">
+              <a:rPr lang="en-US" altLang="ko-KR" sz="1400" b="1" dirty="0" smtClean="0">
                 <a:solidFill>
                   <a:schemeClr val="tx1"/>
                 </a:solidFill>
@@ -23390,7 +18832,7 @@
               <a:t>Native Columnar</a:t>
             </a:r>
             <a:br>
-              <a:rPr lang="en-US" altLang="ko-KR" sz="1600" b="1" dirty="0" smtClean="0">
+              <a:rPr lang="en-US" altLang="ko-KR" sz="1400" b="1" dirty="0" smtClean="0">
                 <a:solidFill>
                   <a:schemeClr val="tx1"/>
                 </a:solidFill>
@@ -23398,7 +18840,7 @@
               </a:rPr>
             </a:br>
             <a:r>
-              <a:rPr lang="ko-KR" altLang="en-US" sz="1400" dirty="0">
+              <a:rPr lang="ko-KR" altLang="en-US" sz="1200" dirty="0">
                 <a:solidFill>
                   <a:schemeClr val="tx1"/>
                 </a:solidFill>
@@ -23407,7 +18849,7 @@
               <a:t>대용량 데이터를 관리하는 </a:t>
             </a:r>
             <a:r>
-              <a:rPr lang="en-US" altLang="ko-KR" sz="1400" dirty="0">
+              <a:rPr lang="en-US" altLang="ko-KR" sz="1200" dirty="0">
                 <a:solidFill>
                   <a:schemeClr val="tx1"/>
                 </a:solidFill>
@@ -23416,7 +18858,7 @@
               <a:t>DW </a:t>
             </a:r>
             <a:r>
-              <a:rPr lang="ko-KR" altLang="en-US" sz="1400" dirty="0">
+              <a:rPr lang="ko-KR" altLang="en-US" sz="1200" dirty="0">
                 <a:solidFill>
                   <a:schemeClr val="tx1"/>
                 </a:solidFill>
@@ -23425,7 +18867,7 @@
               <a:t>데이터베이스의 성능은 </a:t>
             </a:r>
             <a:r>
-              <a:rPr lang="en-US" altLang="ko-KR" sz="1400" dirty="0">
+              <a:rPr lang="en-US" altLang="ko-KR" sz="1200" dirty="0">
                 <a:solidFill>
                   <a:schemeClr val="tx1"/>
                 </a:solidFill>
@@ -23434,7 +18876,7 @@
               <a:t>I/O</a:t>
             </a:r>
             <a:r>
-              <a:rPr lang="ko-KR" altLang="en-US" sz="1400" dirty="0">
+              <a:rPr lang="ko-KR" altLang="en-US" sz="1200" dirty="0">
                 <a:solidFill>
                   <a:schemeClr val="tx1"/>
                 </a:solidFill>
@@ -23443,7 +18885,7 @@
               <a:t>를 얼마나 줄일 수 있느냐에 달려 있습니다</a:t>
             </a:r>
             <a:r>
-              <a:rPr lang="en-US" altLang="ko-KR" sz="1400" dirty="0">
+              <a:rPr lang="en-US" altLang="ko-KR" sz="1200" dirty="0">
                 <a:solidFill>
                   <a:schemeClr val="tx1"/>
                 </a:solidFill>
@@ -23454,7 +18896,7 @@
           </a:p>
           <a:p>
             <a:r>
-              <a:rPr lang="en-US" altLang="ko-KR" sz="1400" dirty="0" err="1">
+              <a:rPr lang="en-US" altLang="ko-KR" sz="1200" dirty="0" err="1">
                 <a:solidFill>
                   <a:schemeClr val="tx1"/>
                 </a:solidFill>
@@ -23463,7 +18905,7 @@
               <a:t>Vertica</a:t>
             </a:r>
             <a:r>
-              <a:rPr lang="en-US" altLang="ko-KR" sz="1400" dirty="0">
+              <a:rPr lang="en-US" altLang="ko-KR" sz="1200" dirty="0">
                 <a:solidFill>
                   <a:schemeClr val="tx1"/>
                 </a:solidFill>
@@ -23472,7 +18914,7 @@
               <a:t> </a:t>
             </a:r>
             <a:r>
-              <a:rPr lang="ko-KR" altLang="en-US" sz="1400" dirty="0">
+              <a:rPr lang="ko-KR" altLang="en-US" sz="1200" dirty="0">
                 <a:solidFill>
                   <a:schemeClr val="tx1"/>
                 </a:solidFill>
@@ -23481,7 +18923,7 @@
               <a:t>의 </a:t>
             </a:r>
             <a:r>
-              <a:rPr lang="en-US" altLang="ko-KR" sz="1400" dirty="0">
+              <a:rPr lang="en-US" altLang="ko-KR" sz="1200" dirty="0">
                 <a:solidFill>
                   <a:schemeClr val="tx1"/>
                 </a:solidFill>
@@ -23490,7 +18932,7 @@
               <a:t>Columnar DBMS </a:t>
             </a:r>
             <a:r>
-              <a:rPr lang="ko-KR" altLang="en-US" sz="1400" dirty="0">
+              <a:rPr lang="ko-KR" altLang="en-US" sz="1200" dirty="0">
                 <a:solidFill>
                   <a:schemeClr val="tx1"/>
                 </a:solidFill>
@@ -23499,7 +18941,7 @@
               <a:t>아키텍처는 </a:t>
             </a:r>
             <a:r>
-              <a:rPr lang="en-US" altLang="ko-KR" sz="1400" dirty="0">
+              <a:rPr lang="en-US" altLang="ko-KR" sz="1200" dirty="0">
                 <a:solidFill>
                   <a:schemeClr val="tx1"/>
                 </a:solidFill>
@@ -23508,7 +18950,7 @@
               <a:t>Query </a:t>
             </a:r>
             <a:r>
-              <a:rPr lang="ko-KR" altLang="en-US" sz="1400" dirty="0">
+              <a:rPr lang="ko-KR" altLang="en-US" sz="1200" dirty="0">
                 <a:solidFill>
                   <a:schemeClr val="tx1"/>
                 </a:solidFill>
@@ -23517,7 +18959,7 @@
               <a:t>수행에 필요한 </a:t>
             </a:r>
             <a:r>
-              <a:rPr lang="en-US" altLang="ko-KR" sz="1400" dirty="0">
+              <a:rPr lang="en-US" altLang="ko-KR" sz="1200" dirty="0">
                 <a:solidFill>
                   <a:schemeClr val="tx1"/>
                 </a:solidFill>
@@ -23526,7 +18968,7 @@
               <a:t>Column </a:t>
             </a:r>
             <a:r>
-              <a:rPr lang="ko-KR" altLang="en-US" sz="1400" dirty="0">
+              <a:rPr lang="ko-KR" altLang="en-US" sz="1200" dirty="0">
                 <a:solidFill>
                   <a:schemeClr val="tx1"/>
                 </a:solidFill>
@@ -23535,7 +18977,7 @@
               <a:t>만을 읽어 올 수 있도록 설계되었기 때문에</a:t>
             </a:r>
             <a:r>
-              <a:rPr lang="en-US" altLang="ko-KR" sz="1400" dirty="0">
+              <a:rPr lang="en-US" altLang="ko-KR" sz="1200" dirty="0">
                 <a:solidFill>
                   <a:schemeClr val="tx1"/>
                 </a:solidFill>
@@ -23544,7 +18986,7 @@
               <a:t>, Query </a:t>
             </a:r>
             <a:r>
-              <a:rPr lang="ko-KR" altLang="en-US" sz="1400" dirty="0">
+              <a:rPr lang="ko-KR" altLang="en-US" sz="1200" dirty="0">
                 <a:solidFill>
                   <a:schemeClr val="tx1"/>
                 </a:solidFill>
@@ -23553,7 +18995,7 @@
               <a:t>시 마다 모든</a:t>
             </a:r>
             <a:r>
-              <a:rPr lang="en-US" altLang="ko-KR" sz="1400" dirty="0">
+              <a:rPr lang="en-US" altLang="ko-KR" sz="1200" dirty="0">
                 <a:solidFill>
                   <a:schemeClr val="tx1"/>
                 </a:solidFill>
@@ -23562,7 +19004,7 @@
               <a:t>` </a:t>
             </a:r>
             <a:r>
-              <a:rPr lang="ko-KR" altLang="en-US" sz="1400" dirty="0">
+              <a:rPr lang="ko-KR" altLang="en-US" sz="1200" dirty="0">
                 <a:solidFill>
                   <a:schemeClr val="tx1"/>
                 </a:solidFill>
@@ -23571,7 +19013,7 @@
               <a:t>열을 읽어와야 하는 </a:t>
             </a:r>
             <a:r>
-              <a:rPr lang="en-US" altLang="ko-KR" sz="1400" dirty="0">
+              <a:rPr lang="en-US" altLang="ko-KR" sz="1200" dirty="0">
                 <a:solidFill>
                   <a:schemeClr val="tx1"/>
                 </a:solidFill>
@@ -23580,7 +19022,7 @@
               <a:t>row </a:t>
             </a:r>
             <a:r>
-              <a:rPr lang="ko-KR" altLang="en-US" sz="1400" dirty="0">
+              <a:rPr lang="ko-KR" altLang="en-US" sz="1200" dirty="0">
                 <a:solidFill>
                   <a:schemeClr val="tx1"/>
                 </a:solidFill>
@@ -23589,7 +19031,7 @@
               <a:t>기반 </a:t>
             </a:r>
             <a:r>
-              <a:rPr lang="en-US" altLang="ko-KR" sz="1400" dirty="0">
+              <a:rPr lang="en-US" altLang="ko-KR" sz="1200" dirty="0">
                 <a:solidFill>
                   <a:schemeClr val="tx1"/>
                 </a:solidFill>
@@ -23598,7 +19040,7 @@
               <a:t>DBMS</a:t>
             </a:r>
             <a:r>
-              <a:rPr lang="ko-KR" altLang="en-US" sz="1400" dirty="0">
+              <a:rPr lang="ko-KR" altLang="en-US" sz="1200" dirty="0">
                 <a:solidFill>
                   <a:schemeClr val="tx1"/>
                 </a:solidFill>
@@ -23607,7 +19049,7 @@
               <a:t>와 비교하여 </a:t>
             </a:r>
             <a:r>
-              <a:rPr lang="en-US" altLang="ko-KR" sz="1400" dirty="0">
+              <a:rPr lang="en-US" altLang="ko-KR" sz="1200" dirty="0">
                 <a:solidFill>
                   <a:schemeClr val="tx1"/>
                 </a:solidFill>
@@ -23616,7 +19058,7 @@
               <a:t>I/O </a:t>
             </a:r>
             <a:r>
-              <a:rPr lang="ko-KR" altLang="en-US" sz="1400" dirty="0">
+              <a:rPr lang="ko-KR" altLang="en-US" sz="1200" dirty="0">
                 <a:solidFill>
                   <a:schemeClr val="tx1"/>
                 </a:solidFill>
@@ -23625,7 +19067,7 @@
               <a:t>발생량을 획기적으로 감소시킬 수 있습니다</a:t>
             </a:r>
             <a:r>
-              <a:rPr lang="en-US" altLang="ko-KR" sz="1400" dirty="0">
+              <a:rPr lang="en-US" altLang="ko-KR" sz="1200" dirty="0">
                 <a:solidFill>
                   <a:schemeClr val="tx1"/>
                 </a:solidFill>
@@ -23635,7 +19077,7 @@
             </a:r>
           </a:p>
           <a:p>
-            <a:endParaRPr lang="en-US" altLang="ko-KR" sz="1400" dirty="0">
+            <a:endParaRPr lang="en-US" altLang="ko-KR" sz="1200" dirty="0">
               <a:solidFill>
                 <a:schemeClr val="tx1"/>
               </a:solidFill>
@@ -23687,8 +19129,8 @@
         </p:nvSpPr>
         <p:spPr>
           <a:xfrm>
-            <a:off x="331334" y="2354946"/>
-            <a:ext cx="9312729" cy="1084940"/>
+            <a:off x="435702" y="3367317"/>
+            <a:ext cx="3859666" cy="1084940"/>
           </a:xfrm>
           <a:prstGeom prst="rect">
             <a:avLst/>
@@ -23844,8 +19286,8 @@
         </p:nvSpPr>
         <p:spPr>
           <a:xfrm>
-            <a:off x="320449" y="3955146"/>
-            <a:ext cx="9312729" cy="1084940"/>
+            <a:off x="5414965" y="3465287"/>
+            <a:ext cx="4142693" cy="1084940"/>
           </a:xfrm>
           <a:prstGeom prst="rect">
             <a:avLst/>
@@ -24031,7 +19473,7 @@
 </p:sld>
 </file>
 
-<file path=ppt/slides/slide6.xml><?xml version="1.0" encoding="utf-8"?>
+<file path=ppt/slides/slide5.xml><?xml version="1.0" encoding="utf-8"?>
 <p:sld xmlns:a="http://schemas.openxmlformats.org/drawingml/2006/main" xmlns:r="http://schemas.openxmlformats.org/officeDocument/2006/relationships" xmlns:p="http://schemas.openxmlformats.org/presentationml/2006/main">
   <p:cSld>
     <p:spTree>
@@ -24088,6 +19530,17 @@
           <a:lstStyle/>
           <a:p>
             <a:r>
+              <a:rPr lang="en-US" altLang="ko-KR" sz="1600" b="1" dirty="0" err="1" smtClean="0">
+                <a:solidFill>
+                  <a:schemeClr val="accent1">
+                    <a:lumMod val="75000"/>
+                  </a:schemeClr>
+                </a:solidFill>
+                <a:latin typeface="+mn-ea"/>
+              </a:rPr>
+              <a:t>Vertica</a:t>
+            </a:r>
+            <a:r>
               <a:rPr lang="en-US" altLang="ko-KR" sz="1600" b="1" dirty="0" smtClean="0">
                 <a:solidFill>
                   <a:schemeClr val="accent1">
@@ -24096,7 +19549,18 @@
                 </a:solidFill>
                 <a:latin typeface="+mn-ea"/>
               </a:rPr>
-              <a:t>xxx</a:t>
+              <a:t> </a:t>
+            </a:r>
+            <a:r>
+              <a:rPr lang="ko-KR" altLang="en-US" sz="1600" b="1" dirty="0" smtClean="0">
+                <a:solidFill>
+                  <a:schemeClr val="accent1">
+                    <a:lumMod val="75000"/>
+                  </a:schemeClr>
+                </a:solidFill>
+                <a:latin typeface="+mn-ea"/>
+              </a:rPr>
+              <a:t>연계</a:t>
             </a:r>
             <a:endParaRPr lang="ko-KR" altLang="en-US" sz="1600" b="1" dirty="0">
               <a:solidFill>
@@ -24221,7 +19685,7 @@
 </p:sld>
 </file>
 
-<file path=ppt/slides/slide7.xml><?xml version="1.0" encoding="utf-8"?>
+<file path=ppt/slides/slide6.xml><?xml version="1.0" encoding="utf-8"?>
 <p:sld xmlns:a="http://schemas.openxmlformats.org/drawingml/2006/main" xmlns:r="http://schemas.openxmlformats.org/officeDocument/2006/relationships" xmlns:p="http://schemas.openxmlformats.org/presentationml/2006/main">
   <p:cSld>
     <p:spTree>

--- a/99ref/blog.pptx
+++ b/99ref/blog.pptx
@@ -111,7 +111,18 @@
   </p:defaultTextStyle>
   <p:extLst>
     <p:ext uri="{EFAFB233-063F-42B5-8137-9DF3F51BA10A}">
-      <p15:sldGuideLst xmlns:p15="http://schemas.microsoft.com/office/powerpoint/2012/main"/>
+      <p15:sldGuideLst xmlns:p15="http://schemas.microsoft.com/office/powerpoint/2012/main">
+        <p15:guide id="1" orient="horz" pos="2834" userDrawn="1">
+          <p15:clr>
+            <a:srgbClr val="A4A3A4"/>
+          </p15:clr>
+        </p15:guide>
+        <p15:guide id="2" pos="3061" userDrawn="1">
+          <p15:clr>
+            <a:srgbClr val="A4A3A4"/>
+          </p15:clr>
+        </p15:guide>
+      </p15:sldGuideLst>
     </p:ext>
   </p:extLst>
 </p:presentation>
@@ -248,7 +259,7 @@
           <a:p>
             <a:fld id="{7BB46140-E90A-48B1-9E02-0E867CD1ADA8}" type="datetimeFigureOut">
               <a:rPr lang="ko-KR" altLang="en-US" smtClean="0"/>
-              <a:t>2026-04-20</a:t>
+              <a:t>2026-04-21</a:t>
             </a:fld>
             <a:endParaRPr lang="ko-KR" altLang="en-US"/>
           </a:p>
@@ -418,7 +429,7 @@
           <a:p>
             <a:fld id="{7BB46140-E90A-48B1-9E02-0E867CD1ADA8}" type="datetimeFigureOut">
               <a:rPr lang="ko-KR" altLang="en-US" smtClean="0"/>
-              <a:t>2026-04-20</a:t>
+              <a:t>2026-04-21</a:t>
             </a:fld>
             <a:endParaRPr lang="ko-KR" altLang="en-US"/>
           </a:p>
@@ -598,7 +609,7 @@
           <a:p>
             <a:fld id="{7BB46140-E90A-48B1-9E02-0E867CD1ADA8}" type="datetimeFigureOut">
               <a:rPr lang="ko-KR" altLang="en-US" smtClean="0"/>
-              <a:t>2026-04-20</a:t>
+              <a:t>2026-04-21</a:t>
             </a:fld>
             <a:endParaRPr lang="ko-KR" altLang="en-US"/>
           </a:p>
@@ -768,7 +779,7 @@
           <a:p>
             <a:fld id="{7BB46140-E90A-48B1-9E02-0E867CD1ADA8}" type="datetimeFigureOut">
               <a:rPr lang="ko-KR" altLang="en-US" smtClean="0"/>
-              <a:t>2026-04-20</a:t>
+              <a:t>2026-04-21</a:t>
             </a:fld>
             <a:endParaRPr lang="ko-KR" altLang="en-US"/>
           </a:p>
@@ -1012,7 +1023,7 @@
           <a:p>
             <a:fld id="{7BB46140-E90A-48B1-9E02-0E867CD1ADA8}" type="datetimeFigureOut">
               <a:rPr lang="ko-KR" altLang="en-US" smtClean="0"/>
-              <a:t>2026-04-20</a:t>
+              <a:t>2026-04-21</a:t>
             </a:fld>
             <a:endParaRPr lang="ko-KR" altLang="en-US"/>
           </a:p>
@@ -1244,7 +1255,7 @@
           <a:p>
             <a:fld id="{7BB46140-E90A-48B1-9E02-0E867CD1ADA8}" type="datetimeFigureOut">
               <a:rPr lang="ko-KR" altLang="en-US" smtClean="0"/>
-              <a:t>2026-04-20</a:t>
+              <a:t>2026-04-21</a:t>
             </a:fld>
             <a:endParaRPr lang="ko-KR" altLang="en-US"/>
           </a:p>
@@ -1611,7 +1622,7 @@
           <a:p>
             <a:fld id="{7BB46140-E90A-48B1-9E02-0E867CD1ADA8}" type="datetimeFigureOut">
               <a:rPr lang="ko-KR" altLang="en-US" smtClean="0"/>
-              <a:t>2026-04-20</a:t>
+              <a:t>2026-04-21</a:t>
             </a:fld>
             <a:endParaRPr lang="ko-KR" altLang="en-US"/>
           </a:p>
@@ -1729,7 +1740,7 @@
           <a:p>
             <a:fld id="{7BB46140-E90A-48B1-9E02-0E867CD1ADA8}" type="datetimeFigureOut">
               <a:rPr lang="ko-KR" altLang="en-US" smtClean="0"/>
-              <a:t>2026-04-20</a:t>
+              <a:t>2026-04-21</a:t>
             </a:fld>
             <a:endParaRPr lang="ko-KR" altLang="en-US"/>
           </a:p>
@@ -1824,7 +1835,7 @@
           <a:p>
             <a:fld id="{7BB46140-E90A-48B1-9E02-0E867CD1ADA8}" type="datetimeFigureOut">
               <a:rPr lang="ko-KR" altLang="en-US" smtClean="0"/>
-              <a:t>2026-04-20</a:t>
+              <a:t>2026-04-21</a:t>
             </a:fld>
             <a:endParaRPr lang="ko-KR" altLang="en-US"/>
           </a:p>
@@ -2101,7 +2112,7 @@
           <a:p>
             <a:fld id="{7BB46140-E90A-48B1-9E02-0E867CD1ADA8}" type="datetimeFigureOut">
               <a:rPr lang="ko-KR" altLang="en-US" smtClean="0"/>
-              <a:t>2026-04-20</a:t>
+              <a:t>2026-04-21</a:t>
             </a:fld>
             <a:endParaRPr lang="ko-KR" altLang="en-US"/>
           </a:p>
@@ -2358,7 +2369,7 @@
           <a:p>
             <a:fld id="{7BB46140-E90A-48B1-9E02-0E867CD1ADA8}" type="datetimeFigureOut">
               <a:rPr lang="ko-KR" altLang="en-US" smtClean="0"/>
-              <a:t>2026-04-20</a:t>
+              <a:t>2026-04-21</a:t>
             </a:fld>
             <a:endParaRPr lang="ko-KR" altLang="en-US"/>
           </a:p>
@@ -2571,7 +2582,7 @@
           <a:p>
             <a:fld id="{7BB46140-E90A-48B1-9E02-0E867CD1ADA8}" type="datetimeFigureOut">
               <a:rPr lang="ko-KR" altLang="en-US" smtClean="0"/>
-              <a:t>2026-04-20</a:t>
+              <a:t>2026-04-21</a:t>
             </a:fld>
             <a:endParaRPr lang="ko-KR" altLang="en-US"/>
           </a:p>
@@ -6327,7 +6338,7 @@
                 <a:gridCol w="200863">
                   <a:extLst>
                     <a:ext uri="{9D8B030D-6E8A-4147-A177-3AD203B41FA5}">
-                      <a16:colId xmlns:a16="http://schemas.microsoft.com/office/drawing/2014/main" xmlns="" val="20000"/>
+                      <a16:colId xmlns="" xmlns:a16="http://schemas.microsoft.com/office/drawing/2014/main" val="20000"/>
                     </a:ext>
                   </a:extLst>
                 </a:gridCol>
@@ -6352,7 +6363,7 @@
                 </a:tc>
                 <a:extLst>
                   <a:ext uri="{0D108BD9-81ED-4DB2-BD59-A6C34878D82A}">
-                    <a16:rowId xmlns:a16="http://schemas.microsoft.com/office/drawing/2014/main" xmlns="" val="10001"/>
+                    <a16:rowId xmlns="" xmlns:a16="http://schemas.microsoft.com/office/drawing/2014/main" val="10001"/>
                   </a:ext>
                 </a:extLst>
               </a:tr>
@@ -6376,7 +6387,7 @@
                 </a:tc>
                 <a:extLst>
                   <a:ext uri="{0D108BD9-81ED-4DB2-BD59-A6C34878D82A}">
-                    <a16:rowId xmlns:a16="http://schemas.microsoft.com/office/drawing/2014/main" xmlns="" val="10002"/>
+                    <a16:rowId xmlns="" xmlns:a16="http://schemas.microsoft.com/office/drawing/2014/main" val="10002"/>
                   </a:ext>
                 </a:extLst>
               </a:tr>
@@ -6400,7 +6411,7 @@
                 </a:tc>
                 <a:extLst>
                   <a:ext uri="{0D108BD9-81ED-4DB2-BD59-A6C34878D82A}">
-                    <a16:rowId xmlns:a16="http://schemas.microsoft.com/office/drawing/2014/main" xmlns="" val="10003"/>
+                    <a16:rowId xmlns="" xmlns:a16="http://schemas.microsoft.com/office/drawing/2014/main" val="10003"/>
                   </a:ext>
                 </a:extLst>
               </a:tr>
@@ -6424,7 +6435,7 @@
                 </a:tc>
                 <a:extLst>
                   <a:ext uri="{0D108BD9-81ED-4DB2-BD59-A6C34878D82A}">
-                    <a16:rowId xmlns:a16="http://schemas.microsoft.com/office/drawing/2014/main" xmlns="" val="10004"/>
+                    <a16:rowId xmlns="" xmlns:a16="http://schemas.microsoft.com/office/drawing/2014/main" val="10004"/>
                   </a:ext>
                 </a:extLst>
               </a:tr>
@@ -6448,7 +6459,7 @@
                 </a:tc>
                 <a:extLst>
                   <a:ext uri="{0D108BD9-81ED-4DB2-BD59-A6C34878D82A}">
-                    <a16:rowId xmlns:a16="http://schemas.microsoft.com/office/drawing/2014/main" xmlns="" val="10005"/>
+                    <a16:rowId xmlns="" xmlns:a16="http://schemas.microsoft.com/office/drawing/2014/main" val="10005"/>
                   </a:ext>
                 </a:extLst>
               </a:tr>
@@ -6484,7 +6495,7 @@
                 <a:gridCol w="200863">
                   <a:extLst>
                     <a:ext uri="{9D8B030D-6E8A-4147-A177-3AD203B41FA5}">
-                      <a16:colId xmlns:a16="http://schemas.microsoft.com/office/drawing/2014/main" xmlns="" val="20000"/>
+                      <a16:colId xmlns="" xmlns:a16="http://schemas.microsoft.com/office/drawing/2014/main" val="20000"/>
                     </a:ext>
                   </a:extLst>
                 </a:gridCol>
@@ -6506,7 +6517,7 @@
                 </a:tc>
                 <a:extLst>
                   <a:ext uri="{0D108BD9-81ED-4DB2-BD59-A6C34878D82A}">
-                    <a16:rowId xmlns:a16="http://schemas.microsoft.com/office/drawing/2014/main" xmlns="" val="10001"/>
+                    <a16:rowId xmlns="" xmlns:a16="http://schemas.microsoft.com/office/drawing/2014/main" val="10001"/>
                   </a:ext>
                 </a:extLst>
               </a:tr>
@@ -6527,7 +6538,7 @@
                 </a:tc>
                 <a:extLst>
                   <a:ext uri="{0D108BD9-81ED-4DB2-BD59-A6C34878D82A}">
-                    <a16:rowId xmlns:a16="http://schemas.microsoft.com/office/drawing/2014/main" xmlns="" val="10002"/>
+                    <a16:rowId xmlns="" xmlns:a16="http://schemas.microsoft.com/office/drawing/2014/main" val="10002"/>
                   </a:ext>
                 </a:extLst>
               </a:tr>
@@ -6548,7 +6559,7 @@
                 </a:tc>
                 <a:extLst>
                   <a:ext uri="{0D108BD9-81ED-4DB2-BD59-A6C34878D82A}">
-                    <a16:rowId xmlns:a16="http://schemas.microsoft.com/office/drawing/2014/main" xmlns="" val="10003"/>
+                    <a16:rowId xmlns="" xmlns:a16="http://schemas.microsoft.com/office/drawing/2014/main" val="10003"/>
                   </a:ext>
                 </a:extLst>
               </a:tr>
@@ -6569,7 +6580,7 @@
                 </a:tc>
                 <a:extLst>
                   <a:ext uri="{0D108BD9-81ED-4DB2-BD59-A6C34878D82A}">
-                    <a16:rowId xmlns:a16="http://schemas.microsoft.com/office/drawing/2014/main" xmlns="" val="10004"/>
+                    <a16:rowId xmlns="" xmlns:a16="http://schemas.microsoft.com/office/drawing/2014/main" val="10004"/>
                   </a:ext>
                 </a:extLst>
               </a:tr>
@@ -6590,7 +6601,7 @@
                 </a:tc>
                 <a:extLst>
                   <a:ext uri="{0D108BD9-81ED-4DB2-BD59-A6C34878D82A}">
-                    <a16:rowId xmlns:a16="http://schemas.microsoft.com/office/drawing/2014/main" xmlns="" val="10005"/>
+                    <a16:rowId xmlns="" xmlns:a16="http://schemas.microsoft.com/office/drawing/2014/main" val="10005"/>
                   </a:ext>
                 </a:extLst>
               </a:tr>
@@ -6626,7 +6637,7 @@
                 <a:gridCol w="200863">
                   <a:extLst>
                     <a:ext uri="{9D8B030D-6E8A-4147-A177-3AD203B41FA5}">
-                      <a16:colId xmlns:a16="http://schemas.microsoft.com/office/drawing/2014/main" xmlns="" val="20000"/>
+                      <a16:colId xmlns="" xmlns:a16="http://schemas.microsoft.com/office/drawing/2014/main" val="20000"/>
                     </a:ext>
                   </a:extLst>
                 </a:gridCol>
@@ -6650,7 +6661,7 @@
                 </a:tc>
                 <a:extLst>
                   <a:ext uri="{0D108BD9-81ED-4DB2-BD59-A6C34878D82A}">
-                    <a16:rowId xmlns:a16="http://schemas.microsoft.com/office/drawing/2014/main" xmlns="" val="10001"/>
+                    <a16:rowId xmlns="" xmlns:a16="http://schemas.microsoft.com/office/drawing/2014/main" val="10001"/>
                   </a:ext>
                 </a:extLst>
               </a:tr>
@@ -6673,7 +6684,7 @@
                 </a:tc>
                 <a:extLst>
                   <a:ext uri="{0D108BD9-81ED-4DB2-BD59-A6C34878D82A}">
-                    <a16:rowId xmlns:a16="http://schemas.microsoft.com/office/drawing/2014/main" xmlns="" val="10002"/>
+                    <a16:rowId xmlns="" xmlns:a16="http://schemas.microsoft.com/office/drawing/2014/main" val="10002"/>
                   </a:ext>
                 </a:extLst>
               </a:tr>
@@ -6696,7 +6707,7 @@
                 </a:tc>
                 <a:extLst>
                   <a:ext uri="{0D108BD9-81ED-4DB2-BD59-A6C34878D82A}">
-                    <a16:rowId xmlns:a16="http://schemas.microsoft.com/office/drawing/2014/main" xmlns="" val="10003"/>
+                    <a16:rowId xmlns="" xmlns:a16="http://schemas.microsoft.com/office/drawing/2014/main" val="10003"/>
                   </a:ext>
                 </a:extLst>
               </a:tr>
@@ -6719,7 +6730,7 @@
                 </a:tc>
                 <a:extLst>
                   <a:ext uri="{0D108BD9-81ED-4DB2-BD59-A6C34878D82A}">
-                    <a16:rowId xmlns:a16="http://schemas.microsoft.com/office/drawing/2014/main" xmlns="" val="10004"/>
+                    <a16:rowId xmlns="" xmlns:a16="http://schemas.microsoft.com/office/drawing/2014/main" val="10004"/>
                   </a:ext>
                 </a:extLst>
               </a:tr>
@@ -6742,7 +6753,7 @@
                 </a:tc>
                 <a:extLst>
                   <a:ext uri="{0D108BD9-81ED-4DB2-BD59-A6C34878D82A}">
-                    <a16:rowId xmlns:a16="http://schemas.microsoft.com/office/drawing/2014/main" xmlns="" val="10005"/>
+                    <a16:rowId xmlns="" xmlns:a16="http://schemas.microsoft.com/office/drawing/2014/main" val="10005"/>
                   </a:ext>
                 </a:extLst>
               </a:tr>
@@ -6778,7 +6789,7 @@
                 <a:gridCol w="200863">
                   <a:extLst>
                     <a:ext uri="{9D8B030D-6E8A-4147-A177-3AD203B41FA5}">
-                      <a16:colId xmlns:a16="http://schemas.microsoft.com/office/drawing/2014/main" xmlns="" val="20000"/>
+                      <a16:colId xmlns="" xmlns:a16="http://schemas.microsoft.com/office/drawing/2014/main" val="20000"/>
                     </a:ext>
                   </a:extLst>
                 </a:gridCol>
@@ -6803,7 +6814,7 @@
                 </a:tc>
                 <a:extLst>
                   <a:ext uri="{0D108BD9-81ED-4DB2-BD59-A6C34878D82A}">
-                    <a16:rowId xmlns:a16="http://schemas.microsoft.com/office/drawing/2014/main" xmlns="" val="10001"/>
+                    <a16:rowId xmlns="" xmlns:a16="http://schemas.microsoft.com/office/drawing/2014/main" val="10001"/>
                   </a:ext>
                 </a:extLst>
               </a:tr>
@@ -6827,7 +6838,7 @@
                 </a:tc>
                 <a:extLst>
                   <a:ext uri="{0D108BD9-81ED-4DB2-BD59-A6C34878D82A}">
-                    <a16:rowId xmlns:a16="http://schemas.microsoft.com/office/drawing/2014/main" xmlns="" val="10002"/>
+                    <a16:rowId xmlns="" xmlns:a16="http://schemas.microsoft.com/office/drawing/2014/main" val="10002"/>
                   </a:ext>
                 </a:extLst>
               </a:tr>
@@ -6851,7 +6862,7 @@
                 </a:tc>
                 <a:extLst>
                   <a:ext uri="{0D108BD9-81ED-4DB2-BD59-A6C34878D82A}">
-                    <a16:rowId xmlns:a16="http://schemas.microsoft.com/office/drawing/2014/main" xmlns="" val="10003"/>
+                    <a16:rowId xmlns="" xmlns:a16="http://schemas.microsoft.com/office/drawing/2014/main" val="10003"/>
                   </a:ext>
                 </a:extLst>
               </a:tr>
@@ -6875,7 +6886,7 @@
                 </a:tc>
                 <a:extLst>
                   <a:ext uri="{0D108BD9-81ED-4DB2-BD59-A6C34878D82A}">
-                    <a16:rowId xmlns:a16="http://schemas.microsoft.com/office/drawing/2014/main" xmlns="" val="10004"/>
+                    <a16:rowId xmlns="" xmlns:a16="http://schemas.microsoft.com/office/drawing/2014/main" val="10004"/>
                   </a:ext>
                 </a:extLst>
               </a:tr>
@@ -6899,7 +6910,7 @@
                 </a:tc>
                 <a:extLst>
                   <a:ext uri="{0D108BD9-81ED-4DB2-BD59-A6C34878D82A}">
-                    <a16:rowId xmlns:a16="http://schemas.microsoft.com/office/drawing/2014/main" xmlns="" val="10005"/>
+                    <a16:rowId xmlns="" xmlns:a16="http://schemas.microsoft.com/office/drawing/2014/main" val="10005"/>
                   </a:ext>
                 </a:extLst>
               </a:tr>
@@ -6935,7 +6946,7 @@
                 <a:gridCol w="199782">
                   <a:extLst>
                     <a:ext uri="{9D8B030D-6E8A-4147-A177-3AD203B41FA5}">
-                      <a16:colId xmlns:a16="http://schemas.microsoft.com/office/drawing/2014/main" xmlns="" val="20000"/>
+                      <a16:colId xmlns="" xmlns:a16="http://schemas.microsoft.com/office/drawing/2014/main" val="20000"/>
                     </a:ext>
                   </a:extLst>
                 </a:gridCol>
@@ -6960,7 +6971,7 @@
                 </a:tc>
                 <a:extLst>
                   <a:ext uri="{0D108BD9-81ED-4DB2-BD59-A6C34878D82A}">
-                    <a16:rowId xmlns:a16="http://schemas.microsoft.com/office/drawing/2014/main" xmlns="" val="10001"/>
+                    <a16:rowId xmlns="" xmlns:a16="http://schemas.microsoft.com/office/drawing/2014/main" val="10001"/>
                   </a:ext>
                 </a:extLst>
               </a:tr>
@@ -6984,7 +6995,7 @@
                 </a:tc>
                 <a:extLst>
                   <a:ext uri="{0D108BD9-81ED-4DB2-BD59-A6C34878D82A}">
-                    <a16:rowId xmlns:a16="http://schemas.microsoft.com/office/drawing/2014/main" xmlns="" val="10002"/>
+                    <a16:rowId xmlns="" xmlns:a16="http://schemas.microsoft.com/office/drawing/2014/main" val="10002"/>
                   </a:ext>
                 </a:extLst>
               </a:tr>
@@ -7008,7 +7019,7 @@
                 </a:tc>
                 <a:extLst>
                   <a:ext uri="{0D108BD9-81ED-4DB2-BD59-A6C34878D82A}">
-                    <a16:rowId xmlns:a16="http://schemas.microsoft.com/office/drawing/2014/main" xmlns="" val="10003"/>
+                    <a16:rowId xmlns="" xmlns:a16="http://schemas.microsoft.com/office/drawing/2014/main" val="10003"/>
                   </a:ext>
                 </a:extLst>
               </a:tr>
@@ -7032,7 +7043,7 @@
                 </a:tc>
                 <a:extLst>
                   <a:ext uri="{0D108BD9-81ED-4DB2-BD59-A6C34878D82A}">
-                    <a16:rowId xmlns:a16="http://schemas.microsoft.com/office/drawing/2014/main" xmlns="" val="10004"/>
+                    <a16:rowId xmlns="" xmlns:a16="http://schemas.microsoft.com/office/drawing/2014/main" val="10004"/>
                   </a:ext>
                 </a:extLst>
               </a:tr>
@@ -7056,7 +7067,7 @@
                 </a:tc>
                 <a:extLst>
                   <a:ext uri="{0D108BD9-81ED-4DB2-BD59-A6C34878D82A}">
-                    <a16:rowId xmlns:a16="http://schemas.microsoft.com/office/drawing/2014/main" xmlns="" val="10005"/>
+                    <a16:rowId xmlns="" xmlns:a16="http://schemas.microsoft.com/office/drawing/2014/main" val="10005"/>
                   </a:ext>
                 </a:extLst>
               </a:tr>
@@ -14656,7 +14667,7 @@
           <p:cNvPr id="5" name="그림 4">
             <a:extLst>
               <a:ext uri="{FF2B5EF4-FFF2-40B4-BE49-F238E27FC236}">
-                <a16:creationId xmlns="" xmlns:a16="http://schemas.microsoft.com/office/drawing/2014/main" id="{F25A3B3A-32C8-4401-A476-E8CCEB3258D5}"/>
+                <a16:creationId xmlns:a16="http://schemas.microsoft.com/office/drawing/2014/main" xmlns="" id="{F25A3B3A-32C8-4401-A476-E8CCEB3258D5}"/>
               </a:ext>
             </a:extLst>
           </p:cNvPr>
@@ -14699,7 +14710,7 @@
           <p:cNvPr id="6" name="Picture 4">
             <a:extLst>
               <a:ext uri="{FF2B5EF4-FFF2-40B4-BE49-F238E27FC236}">
-                <a16:creationId xmlns="" xmlns:a16="http://schemas.microsoft.com/office/drawing/2014/main" id="{051FB3A4-C7F9-45D0-A73B-557A6E1C4FDF}"/>
+                <a16:creationId xmlns:a16="http://schemas.microsoft.com/office/drawing/2014/main" xmlns="" id="{051FB3A4-C7F9-45D0-A73B-557A6E1C4FDF}"/>
               </a:ext>
             </a:extLst>
           </p:cNvPr>
@@ -19581,8 +19592,8 @@
         </p:nvSpPr>
         <p:spPr>
           <a:xfrm>
-            <a:off x="301171" y="422730"/>
-            <a:ext cx="9312729" cy="357414"/>
+            <a:off x="272142" y="435429"/>
+            <a:ext cx="9312729" cy="910772"/>
           </a:xfrm>
           <a:prstGeom prst="rect">
             <a:avLst/>
@@ -19613,13 +19624,66 @@
           <a:lstStyle/>
           <a:p>
             <a:r>
+              <a:rPr lang="en-US" altLang="ko-KR" sz="1400" b="1" dirty="0" smtClean="0">
+                <a:solidFill>
+                  <a:schemeClr val="tx1"/>
+                </a:solidFill>
+                <a:latin typeface="+mn-ea"/>
+              </a:rPr>
+              <a:t>Kafka </a:t>
+            </a:r>
+            <a:r>
+              <a:rPr lang="ko-KR" altLang="en-US" sz="1400" b="1" dirty="0" smtClean="0">
+                <a:solidFill>
+                  <a:schemeClr val="tx1"/>
+                </a:solidFill>
+                <a:latin typeface="+mn-ea"/>
+              </a:rPr>
+              <a:t>연계</a:t>
+            </a:r>
+            <a:endParaRPr lang="en-US" altLang="ko-KR" sz="1400" b="1" dirty="0" smtClean="0">
+              <a:solidFill>
+                <a:schemeClr val="tx1"/>
+              </a:solidFill>
+              <a:latin typeface="+mn-ea"/>
+            </a:endParaRPr>
+          </a:p>
+          <a:p>
+            <a:r>
+              <a:rPr lang="ko-KR" altLang="en-US" sz="1400" dirty="0">
+                <a:solidFill>
+                  <a:schemeClr val="tx1"/>
+                </a:solidFill>
+                <a:latin typeface="+mn-ea"/>
+              </a:rPr>
+              <a:t>다양한 채널 및 플랫폼에서 유입되는 데이터를 실시간으로 저장</a:t>
+            </a:r>
+            <a:r>
+              <a:rPr lang="en-US" altLang="ko-KR" sz="1400" dirty="0">
+                <a:solidFill>
+                  <a:schemeClr val="tx1"/>
+                </a:solidFill>
+                <a:latin typeface="+mn-ea"/>
+              </a:rPr>
+              <a:t>/</a:t>
+            </a:r>
+            <a:r>
+              <a:rPr lang="ko-KR" altLang="en-US" sz="1400" dirty="0">
+                <a:solidFill>
+                  <a:schemeClr val="tx1"/>
+                </a:solidFill>
+                <a:latin typeface="+mn-ea"/>
+              </a:rPr>
+              <a:t>분석하기 위해서는 데이터 파이프 라인 플랫폼과의 유기적인 연계가 필수적입니다</a:t>
+            </a:r>
+            <a:r>
               <a:rPr lang="en-US" altLang="ko-KR" sz="1400" dirty="0" smtClean="0">
                 <a:solidFill>
                   <a:schemeClr val="tx1"/>
                 </a:solidFill>
                 <a:latin typeface="+mn-ea"/>
               </a:rPr>
-              <a:t>xxx</a:t>
+              <a:t>.</a:t>
             </a:r>
             <a:endParaRPr lang="en-US" altLang="ko-KR" sz="1400" dirty="0">
               <a:solidFill>
@@ -19665,6 +19729,1490 @@
           </a:fontRef>
         </p:style>
       </p:cxnSp>
+      <p:grpSp>
+        <p:nvGrpSpPr>
+          <p:cNvPr id="133" name="그룹 132"/>
+          <p:cNvGrpSpPr/>
+          <p:nvPr/>
+        </p:nvGrpSpPr>
+        <p:grpSpPr>
+          <a:xfrm>
+            <a:off x="3974094" y="1254052"/>
+            <a:ext cx="5738411" cy="1200329"/>
+            <a:chOff x="3974094" y="1195996"/>
+            <a:chExt cx="5738411" cy="1200329"/>
+          </a:xfrm>
+        </p:grpSpPr>
+        <p:sp>
+          <p:nvSpPr>
+            <p:cNvPr id="97" name="타원 96">
+              <a:extLst>
+                <a:ext uri="{FF2B5EF4-FFF2-40B4-BE49-F238E27FC236}">
+                  <a16:creationId xmlns="" xmlns:a16="http://schemas.microsoft.com/office/drawing/2014/main" id="{2A6A11AC-31D1-C238-469B-B8065561C8B3}"/>
+                </a:ext>
+              </a:extLst>
+            </p:cNvPr>
+            <p:cNvSpPr/>
+            <p:nvPr/>
+          </p:nvSpPr>
+          <p:spPr>
+            <a:xfrm>
+              <a:off x="3974094" y="1232477"/>
+              <a:ext cx="189788" cy="189788"/>
+            </a:xfrm>
+            <a:prstGeom prst="ellipse">
+              <a:avLst/>
+            </a:prstGeom>
+            <a:solidFill>
+              <a:srgbClr val="C6179D"/>
+            </a:solidFill>
+            <a:ln w="12700" cap="flat" cmpd="sng" algn="ctr">
+              <a:noFill/>
+              <a:prstDash val="solid"/>
+              <a:miter lim="800000"/>
+            </a:ln>
+            <a:effectLst/>
+          </p:spPr>
+          <p:txBody>
+            <a:bodyPr rtlCol="0" anchor="ctr"/>
+            <a:lstStyle/>
+            <a:p>
+              <a:pPr marL="0" marR="0" lvl="0" indent="0" algn="ctr" defTabSz="914400" eaLnBrk="1" fontAlgn="auto" latinLnBrk="0" hangingPunct="1">
+                <a:lnSpc>
+                  <a:spcPct val="100000"/>
+                </a:lnSpc>
+                <a:spcBef>
+                  <a:spcPts val="0"/>
+                </a:spcBef>
+                <a:spcAft>
+                  <a:spcPts val="0"/>
+                </a:spcAft>
+                <a:buClrTx/>
+                <a:buSzTx/>
+                <a:buFontTx/>
+                <a:buNone/>
+                <a:tabLst/>
+                <a:defRPr/>
+              </a:pPr>
+              <a:r>
+                <a:rPr kumimoji="0" lang="en-GB" sz="1200" b="1" i="0" u="none" strike="noStrike" kern="0" cap="none" spc="0" normalizeH="0" baseline="0" noProof="0" dirty="0">
+                  <a:ln>
+                    <a:noFill/>
+                  </a:ln>
+                  <a:solidFill>
+                    <a:prstClr val="white"/>
+                  </a:solidFill>
+                  <a:effectLst/>
+                  <a:uLnTx/>
+                  <a:uFillTx/>
+                  <a:latin typeface="Calibri"/>
+                  <a:ea typeface="+mn-ea"/>
+                  <a:cs typeface="+mn-cs"/>
+                </a:rPr>
+                <a:t>1</a:t>
+              </a:r>
+            </a:p>
+          </p:txBody>
+        </p:sp>
+        <p:sp>
+          <p:nvSpPr>
+            <p:cNvPr id="98" name="TextBox 97">
+              <a:extLst>
+                <a:ext uri="{FF2B5EF4-FFF2-40B4-BE49-F238E27FC236}">
+                  <a16:creationId xmlns="" xmlns:a16="http://schemas.microsoft.com/office/drawing/2014/main" id="{370FDDD1-392F-C3F6-7926-8F5450602B51}"/>
+                </a:ext>
+              </a:extLst>
+            </p:cNvPr>
+            <p:cNvSpPr txBox="1"/>
+            <p:nvPr/>
+          </p:nvSpPr>
+          <p:spPr>
+            <a:xfrm>
+              <a:off x="4118111" y="1195996"/>
+              <a:ext cx="5594394" cy="1200329"/>
+            </a:xfrm>
+            <a:prstGeom prst="rect">
+              <a:avLst/>
+            </a:prstGeom>
+          </p:spPr>
+          <p:txBody>
+            <a:bodyPr vert="horz" wrap="square" lIns="91440" tIns="45720" rIns="91440" bIns="45720" rtlCol="0" anchor="t" anchorCtr="0">
+              <a:spAutoFit/>
+            </a:bodyPr>
+            <a:lstStyle/>
+            <a:p>
+              <a:pPr latinLnBrk="0"/>
+              <a:r>
+                <a:rPr lang="en-GB" sz="1200" b="1" dirty="0">
+                  <a:solidFill>
+                    <a:srgbClr val="1668C1"/>
+                  </a:solidFill>
+                  <a:latin typeface="+mn-ea"/>
+                  <a:cs typeface="Roboto Light" charset="0"/>
+                </a:rPr>
+                <a:t>Consume</a:t>
+              </a:r>
+            </a:p>
+            <a:p>
+              <a:pPr latinLnBrk="0">
+                <a:lnSpc>
+                  <a:spcPct val="150000"/>
+                </a:lnSpc>
+              </a:pPr>
+              <a:r>
+                <a:rPr lang="ko-KR" altLang="en-US" sz="1000" dirty="0">
+                  <a:solidFill>
+                    <a:srgbClr val="1668C1"/>
+                  </a:solidFill>
+                  <a:latin typeface="+mn-ea"/>
+                </a:rPr>
+                <a:t>별도의 솔루션이나 커넥터 없이 카프카 토픽을 적재하는 기능을 빌트인 함수로 제공</a:t>
+              </a:r>
+              <a:endParaRPr lang="en-GB" altLang="ko-KR" sz="1000" dirty="0">
+                <a:solidFill>
+                  <a:srgbClr val="1668C1"/>
+                </a:solidFill>
+                <a:latin typeface="+mn-ea"/>
+              </a:endParaRPr>
+            </a:p>
+            <a:p>
+              <a:pPr latinLnBrk="0">
+                <a:lnSpc>
+                  <a:spcPct val="150000"/>
+                </a:lnSpc>
+              </a:pPr>
+              <a:r>
+                <a:rPr lang="ko-KR" altLang="en-US" sz="1000" dirty="0">
+                  <a:solidFill>
+                    <a:srgbClr val="1668C1"/>
+                  </a:solidFill>
+                  <a:latin typeface="+mn-ea"/>
+                </a:rPr>
+                <a:t>카프카 토픽의 파티션을 병렬로 적재하여 실시간 스트리밍 데이터 처리에 최적화</a:t>
+              </a:r>
+              <a:endParaRPr lang="en-GB" altLang="ko-KR" sz="1000" dirty="0">
+                <a:solidFill>
+                  <a:srgbClr val="1668C1"/>
+                </a:solidFill>
+                <a:latin typeface="+mn-ea"/>
+              </a:endParaRPr>
+            </a:p>
+            <a:p>
+              <a:pPr latinLnBrk="0">
+                <a:lnSpc>
+                  <a:spcPct val="150000"/>
+                </a:lnSpc>
+              </a:pPr>
+              <a:r>
+                <a:rPr lang="ko-KR" altLang="en-US" sz="1000" dirty="0">
+                  <a:solidFill>
+                    <a:srgbClr val="1668C1"/>
+                  </a:solidFill>
+                  <a:latin typeface="+mn-ea"/>
+                </a:rPr>
+                <a:t>자동으로 지속적인 </a:t>
+              </a:r>
+              <a:r>
+                <a:rPr lang="ko-KR" altLang="en-US" sz="1000" dirty="0" err="1">
+                  <a:solidFill>
+                    <a:srgbClr val="1668C1"/>
+                  </a:solidFill>
+                  <a:latin typeface="+mn-ea"/>
+                </a:rPr>
+                <a:t>컨슈밍을</a:t>
+              </a:r>
+              <a:r>
+                <a:rPr lang="ko-KR" altLang="en-US" sz="1000" dirty="0">
+                  <a:solidFill>
+                    <a:srgbClr val="1668C1"/>
+                  </a:solidFill>
+                  <a:latin typeface="+mn-ea"/>
+                </a:rPr>
+                <a:t> 지원하기 위한 </a:t>
+              </a:r>
+              <a:r>
+                <a:rPr lang="ko-KR" altLang="en-US" sz="1000" dirty="0" err="1">
+                  <a:solidFill>
+                    <a:srgbClr val="1668C1"/>
+                  </a:solidFill>
+                  <a:latin typeface="+mn-ea"/>
+                </a:rPr>
+                <a:t>마이크로배치</a:t>
+              </a:r>
+              <a:r>
+                <a:rPr lang="ko-KR" altLang="en-US" sz="1000" dirty="0">
+                  <a:solidFill>
+                    <a:srgbClr val="1668C1"/>
+                  </a:solidFill>
+                  <a:latin typeface="+mn-ea"/>
+                </a:rPr>
+                <a:t> 기능 탑재</a:t>
+              </a:r>
+              <a:endParaRPr lang="en-GB" altLang="ko-KR" sz="1000" dirty="0">
+                <a:solidFill>
+                  <a:srgbClr val="1668C1"/>
+                </a:solidFill>
+                <a:latin typeface="+mn-ea"/>
+              </a:endParaRPr>
+            </a:p>
+            <a:p>
+              <a:pPr latinLnBrk="0">
+                <a:lnSpc>
+                  <a:spcPct val="150000"/>
+                </a:lnSpc>
+              </a:pPr>
+              <a:endParaRPr lang="en-GB" sz="1000" dirty="0">
+                <a:solidFill>
+                  <a:srgbClr val="1668C1"/>
+                </a:solidFill>
+                <a:latin typeface="+mn-ea"/>
+              </a:endParaRPr>
+            </a:p>
+          </p:txBody>
+        </p:sp>
+      </p:grpSp>
+      <p:grpSp>
+        <p:nvGrpSpPr>
+          <p:cNvPr id="131" name="그룹 130"/>
+          <p:cNvGrpSpPr/>
+          <p:nvPr/>
+        </p:nvGrpSpPr>
+        <p:grpSpPr>
+          <a:xfrm>
+            <a:off x="3926949" y="2735031"/>
+            <a:ext cx="5793314" cy="738664"/>
+            <a:chOff x="3926949" y="2618919"/>
+            <a:chExt cx="5793314" cy="738664"/>
+          </a:xfrm>
+        </p:grpSpPr>
+        <p:sp>
+          <p:nvSpPr>
+            <p:cNvPr id="99" name="타원 98">
+              <a:extLst>
+                <a:ext uri="{FF2B5EF4-FFF2-40B4-BE49-F238E27FC236}">
+                  <a16:creationId xmlns="" xmlns:a16="http://schemas.microsoft.com/office/drawing/2014/main" id="{8A596585-4EFC-7C6C-63D0-E577FBF1E255}"/>
+                </a:ext>
+              </a:extLst>
+            </p:cNvPr>
+            <p:cNvSpPr/>
+            <p:nvPr/>
+          </p:nvSpPr>
+          <p:spPr>
+            <a:xfrm>
+              <a:off x="3926949" y="2655400"/>
+              <a:ext cx="189788" cy="189788"/>
+            </a:xfrm>
+            <a:prstGeom prst="ellipse">
+              <a:avLst/>
+            </a:prstGeom>
+            <a:solidFill>
+              <a:srgbClr val="C6179D"/>
+            </a:solidFill>
+            <a:ln w="12700" cap="flat" cmpd="sng" algn="ctr">
+              <a:noFill/>
+              <a:prstDash val="solid"/>
+              <a:miter lim="800000"/>
+            </a:ln>
+            <a:effectLst/>
+          </p:spPr>
+          <p:txBody>
+            <a:bodyPr rtlCol="0" anchor="ctr"/>
+            <a:lstStyle/>
+            <a:p>
+              <a:pPr marL="0" marR="0" lvl="0" indent="0" algn="ctr" defTabSz="914400" eaLnBrk="1" fontAlgn="auto" latinLnBrk="0" hangingPunct="1">
+                <a:lnSpc>
+                  <a:spcPct val="100000"/>
+                </a:lnSpc>
+                <a:spcBef>
+                  <a:spcPts val="0"/>
+                </a:spcBef>
+                <a:spcAft>
+                  <a:spcPts val="0"/>
+                </a:spcAft>
+                <a:buClrTx/>
+                <a:buSzTx/>
+                <a:buFontTx/>
+                <a:buNone/>
+                <a:tabLst/>
+                <a:defRPr/>
+              </a:pPr>
+              <a:r>
+                <a:rPr kumimoji="0" lang="en-US" altLang="ko-KR" sz="1200" b="1" i="0" u="none" strike="noStrike" kern="0" cap="none" spc="0" normalizeH="0" baseline="0" noProof="0" dirty="0">
+                  <a:ln>
+                    <a:noFill/>
+                  </a:ln>
+                  <a:solidFill>
+                    <a:prstClr val="white"/>
+                  </a:solidFill>
+                  <a:effectLst/>
+                  <a:uLnTx/>
+                  <a:uFillTx/>
+                  <a:latin typeface="Calibri"/>
+                  <a:ea typeface="맑은 고딕" panose="020B0503020000020004" pitchFamily="50" charset="-127"/>
+                  <a:cs typeface="+mn-cs"/>
+                </a:rPr>
+                <a:t>3</a:t>
+              </a:r>
+              <a:endParaRPr kumimoji="0" lang="en-GB" sz="1200" b="1" i="0" u="none" strike="noStrike" kern="0" cap="none" spc="0" normalizeH="0" baseline="0" noProof="0" dirty="0">
+                <a:ln>
+                  <a:noFill/>
+                </a:ln>
+                <a:solidFill>
+                  <a:prstClr val="white"/>
+                </a:solidFill>
+                <a:effectLst/>
+                <a:uLnTx/>
+                <a:uFillTx/>
+                <a:latin typeface="Calibri"/>
+                <a:ea typeface="+mn-ea"/>
+                <a:cs typeface="+mn-cs"/>
+              </a:endParaRPr>
+            </a:p>
+          </p:txBody>
+        </p:sp>
+        <p:sp>
+          <p:nvSpPr>
+            <p:cNvPr id="100" name="TextBox 99">
+              <a:extLst>
+                <a:ext uri="{FF2B5EF4-FFF2-40B4-BE49-F238E27FC236}">
+                  <a16:creationId xmlns="" xmlns:a16="http://schemas.microsoft.com/office/drawing/2014/main" id="{A2DBD73D-1544-9997-4B5E-7BE89DA70BD5}"/>
+                </a:ext>
+              </a:extLst>
+            </p:cNvPr>
+            <p:cNvSpPr txBox="1"/>
+            <p:nvPr/>
+          </p:nvSpPr>
+          <p:spPr>
+            <a:xfrm>
+              <a:off x="4070965" y="2618919"/>
+              <a:ext cx="5649298" cy="738664"/>
+            </a:xfrm>
+            <a:prstGeom prst="rect">
+              <a:avLst/>
+            </a:prstGeom>
+          </p:spPr>
+          <p:txBody>
+            <a:bodyPr vert="horz" wrap="square" lIns="91440" tIns="45720" rIns="91440" bIns="45720" rtlCol="0" anchor="t" anchorCtr="0">
+              <a:spAutoFit/>
+            </a:bodyPr>
+            <a:lstStyle/>
+            <a:p>
+              <a:pPr latinLnBrk="0"/>
+              <a:r>
+                <a:rPr lang="en-US" altLang="ko-KR" sz="1200" b="1" dirty="0">
+                  <a:solidFill>
+                    <a:srgbClr val="1668C1"/>
+                  </a:solidFill>
+                  <a:latin typeface="+mn-ea"/>
+                  <a:cs typeface="Roboto Light" charset="0"/>
+                </a:rPr>
+                <a:t>Produce</a:t>
+              </a:r>
+              <a:endParaRPr lang="en-GB" sz="1200" b="1" dirty="0">
+                <a:solidFill>
+                  <a:srgbClr val="1668C1"/>
+                </a:solidFill>
+                <a:latin typeface="+mn-ea"/>
+                <a:cs typeface="Roboto Light" charset="0"/>
+              </a:endParaRPr>
+            </a:p>
+            <a:p>
+              <a:pPr latinLnBrk="0">
+                <a:lnSpc>
+                  <a:spcPct val="150000"/>
+                </a:lnSpc>
+              </a:pPr>
+              <a:r>
+                <a:rPr lang="ko-KR" altLang="en-US" sz="1000" dirty="0" err="1">
+                  <a:solidFill>
+                    <a:srgbClr val="1668C1"/>
+                  </a:solidFill>
+                  <a:latin typeface="+mn-ea"/>
+                </a:rPr>
+                <a:t>버티카에</a:t>
+              </a:r>
+              <a:r>
+                <a:rPr lang="ko-KR" altLang="en-US" sz="1000" dirty="0">
+                  <a:solidFill>
+                    <a:srgbClr val="1668C1"/>
+                  </a:solidFill>
+                  <a:latin typeface="+mn-ea"/>
+                </a:rPr>
+                <a:t> 저장된 데이터를 카프카로 추출하는 기능을 제공</a:t>
+              </a:r>
+              <a:endParaRPr lang="en-GB" altLang="ko-KR" sz="1000" dirty="0">
+                <a:solidFill>
+                  <a:srgbClr val="1668C1"/>
+                </a:solidFill>
+                <a:latin typeface="+mn-ea"/>
+              </a:endParaRPr>
+            </a:p>
+            <a:p>
+              <a:pPr latinLnBrk="0">
+                <a:lnSpc>
+                  <a:spcPct val="150000"/>
+                </a:lnSpc>
+              </a:pPr>
+              <a:r>
+                <a:rPr lang="ko-KR" altLang="en-US" sz="1000" dirty="0">
+                  <a:solidFill>
+                    <a:srgbClr val="1668C1"/>
+                  </a:solidFill>
+                  <a:latin typeface="+mn-ea"/>
+                </a:rPr>
+                <a:t>추가적인 구축 없이 데이터 파이프 라인과 양방향으로 데이터를 주고 받을 수 있는 아키텍처</a:t>
+              </a:r>
+              <a:endParaRPr lang="en-GB" sz="1000" dirty="0">
+                <a:solidFill>
+                  <a:srgbClr val="1668C1"/>
+                </a:solidFill>
+                <a:latin typeface="+mn-ea"/>
+              </a:endParaRPr>
+            </a:p>
+          </p:txBody>
+        </p:sp>
+      </p:grpSp>
+      <p:grpSp>
+        <p:nvGrpSpPr>
+          <p:cNvPr id="130" name="그룹 129"/>
+          <p:cNvGrpSpPr/>
+          <p:nvPr/>
+        </p:nvGrpSpPr>
+        <p:grpSpPr>
+          <a:xfrm>
+            <a:off x="3926949" y="3468892"/>
+            <a:ext cx="5793314" cy="1431161"/>
+            <a:chOff x="3926949" y="3338266"/>
+            <a:chExt cx="5793314" cy="1431161"/>
+          </a:xfrm>
+        </p:grpSpPr>
+        <p:sp>
+          <p:nvSpPr>
+            <p:cNvPr id="101" name="타원 100">
+              <a:extLst>
+                <a:ext uri="{FF2B5EF4-FFF2-40B4-BE49-F238E27FC236}">
+                  <a16:creationId xmlns="" xmlns:a16="http://schemas.microsoft.com/office/drawing/2014/main" id="{D7536991-A61A-F58E-EC18-61A6F108717B}"/>
+                </a:ext>
+              </a:extLst>
+            </p:cNvPr>
+            <p:cNvSpPr/>
+            <p:nvPr/>
+          </p:nvSpPr>
+          <p:spPr>
+            <a:xfrm>
+              <a:off x="3926949" y="3374747"/>
+              <a:ext cx="189788" cy="189788"/>
+            </a:xfrm>
+            <a:prstGeom prst="ellipse">
+              <a:avLst/>
+            </a:prstGeom>
+            <a:solidFill>
+              <a:srgbClr val="C6179D"/>
+            </a:solidFill>
+            <a:ln w="12700" cap="flat" cmpd="sng" algn="ctr">
+              <a:noFill/>
+              <a:prstDash val="solid"/>
+              <a:miter lim="800000"/>
+            </a:ln>
+            <a:effectLst/>
+          </p:spPr>
+          <p:txBody>
+            <a:bodyPr rtlCol="0" anchor="ctr"/>
+            <a:lstStyle/>
+            <a:p>
+              <a:pPr marL="0" marR="0" lvl="0" indent="0" algn="ctr" defTabSz="914400" eaLnBrk="1" fontAlgn="auto" latinLnBrk="0" hangingPunct="1">
+                <a:lnSpc>
+                  <a:spcPct val="100000"/>
+                </a:lnSpc>
+                <a:spcBef>
+                  <a:spcPts val="0"/>
+                </a:spcBef>
+                <a:spcAft>
+                  <a:spcPts val="0"/>
+                </a:spcAft>
+                <a:buClrTx/>
+                <a:buSzTx/>
+                <a:buFontTx/>
+                <a:buNone/>
+                <a:tabLst/>
+                <a:defRPr/>
+              </a:pPr>
+              <a:r>
+                <a:rPr kumimoji="0" lang="en-US" altLang="ko-KR" sz="1200" b="1" i="0" u="none" strike="noStrike" kern="0" cap="none" spc="0" normalizeH="0" baseline="0" noProof="0" dirty="0">
+                  <a:ln>
+                    <a:noFill/>
+                  </a:ln>
+                  <a:solidFill>
+                    <a:prstClr val="white"/>
+                  </a:solidFill>
+                  <a:effectLst/>
+                  <a:uLnTx/>
+                  <a:uFillTx/>
+                  <a:latin typeface="Calibri"/>
+                  <a:ea typeface="맑은 고딕" panose="020B0503020000020004" pitchFamily="50" charset="-127"/>
+                  <a:cs typeface="+mn-cs"/>
+                </a:rPr>
+                <a:t>4</a:t>
+              </a:r>
+              <a:endParaRPr kumimoji="0" lang="en-GB" sz="1200" b="1" i="0" u="none" strike="noStrike" kern="0" cap="none" spc="0" normalizeH="0" baseline="0" noProof="0" dirty="0">
+                <a:ln>
+                  <a:noFill/>
+                </a:ln>
+                <a:solidFill>
+                  <a:prstClr val="white"/>
+                </a:solidFill>
+                <a:effectLst/>
+                <a:uLnTx/>
+                <a:uFillTx/>
+                <a:latin typeface="Calibri"/>
+                <a:ea typeface="+mn-ea"/>
+                <a:cs typeface="+mn-cs"/>
+              </a:endParaRPr>
+            </a:p>
+          </p:txBody>
+        </p:sp>
+        <p:sp>
+          <p:nvSpPr>
+            <p:cNvPr id="102" name="TextBox 101">
+              <a:extLst>
+                <a:ext uri="{FF2B5EF4-FFF2-40B4-BE49-F238E27FC236}">
+                  <a16:creationId xmlns="" xmlns:a16="http://schemas.microsoft.com/office/drawing/2014/main" id="{688289CD-94AD-1B72-1500-6EAFBCF42BA0}"/>
+                </a:ext>
+              </a:extLst>
+            </p:cNvPr>
+            <p:cNvSpPr txBox="1"/>
+            <p:nvPr/>
+          </p:nvSpPr>
+          <p:spPr>
+            <a:xfrm>
+              <a:off x="4070966" y="3338266"/>
+              <a:ext cx="5649297" cy="1431161"/>
+            </a:xfrm>
+            <a:prstGeom prst="rect">
+              <a:avLst/>
+            </a:prstGeom>
+          </p:spPr>
+          <p:txBody>
+            <a:bodyPr vert="horz" wrap="square" lIns="91440" tIns="45720" rIns="91440" bIns="45720" rtlCol="0" anchor="t" anchorCtr="0">
+              <a:spAutoFit/>
+            </a:bodyPr>
+            <a:lstStyle/>
+            <a:p>
+              <a:pPr latinLnBrk="0"/>
+              <a:r>
+                <a:rPr lang="en-US" altLang="ko-KR" sz="1200" b="1" dirty="0">
+                  <a:solidFill>
+                    <a:srgbClr val="1668C1"/>
+                  </a:solidFill>
+                  <a:latin typeface="+mn-ea"/>
+                  <a:cs typeface="Roboto Light" charset="0"/>
+                </a:rPr>
+                <a:t>Spark integration</a:t>
+              </a:r>
+              <a:endParaRPr lang="en-GB" sz="1200" b="1" dirty="0">
+                <a:solidFill>
+                  <a:srgbClr val="1668C1"/>
+                </a:solidFill>
+                <a:latin typeface="+mn-ea"/>
+                <a:cs typeface="Roboto Light" charset="0"/>
+              </a:endParaRPr>
+            </a:p>
+            <a:p>
+              <a:pPr latinLnBrk="0">
+                <a:lnSpc>
+                  <a:spcPct val="150000"/>
+                </a:lnSpc>
+              </a:pPr>
+              <a:r>
+                <a:rPr lang="en-US" altLang="ko-KR" sz="1000" dirty="0">
+                  <a:solidFill>
+                    <a:srgbClr val="1668C1"/>
+                  </a:solidFill>
+                  <a:latin typeface="+mn-ea"/>
+                </a:rPr>
+                <a:t>Spark</a:t>
+              </a:r>
+              <a:r>
+                <a:rPr lang="ko-KR" altLang="en-US" sz="1000" dirty="0">
+                  <a:solidFill>
+                    <a:srgbClr val="1668C1"/>
+                  </a:solidFill>
+                  <a:latin typeface="+mn-ea"/>
+                </a:rPr>
+                <a:t> 연계를 위한 커넥터가 기본 제공</a:t>
+              </a:r>
+              <a:r>
+                <a:rPr lang="en-US" altLang="ko-KR" sz="1000" dirty="0">
+                  <a:solidFill>
+                    <a:srgbClr val="1668C1"/>
+                  </a:solidFill>
+                  <a:latin typeface="+mn-ea"/>
+                </a:rPr>
+                <a:t/>
+              </a:r>
+              <a:br>
+                <a:rPr lang="en-US" altLang="ko-KR" sz="1000" dirty="0">
+                  <a:solidFill>
+                    <a:srgbClr val="1668C1"/>
+                  </a:solidFill>
+                  <a:latin typeface="+mn-ea"/>
+                </a:rPr>
+              </a:br>
+              <a:r>
+                <a:rPr lang="en-US" altLang="ko-KR" sz="1000" dirty="0">
+                  <a:solidFill>
+                    <a:srgbClr val="1668C1"/>
+                  </a:solidFill>
+                  <a:latin typeface="+mn-ea"/>
+                </a:rPr>
+                <a:t>Spark</a:t>
+              </a:r>
+              <a:r>
+                <a:rPr lang="ko-KR" altLang="en-US" sz="1000" dirty="0">
+                  <a:solidFill>
+                    <a:srgbClr val="1668C1"/>
+                  </a:solidFill>
+                  <a:latin typeface="+mn-ea"/>
+                </a:rPr>
+                <a:t>에서 분석이 필요한 업무를 위해 빠르게 스파크 메모리로 </a:t>
+              </a:r>
+              <a:r>
+                <a:rPr lang="ko-KR" altLang="en-US" sz="1000" dirty="0" err="1">
+                  <a:solidFill>
+                    <a:srgbClr val="1668C1"/>
+                  </a:solidFill>
+                  <a:latin typeface="+mn-ea"/>
+                </a:rPr>
+                <a:t>버티카</a:t>
+              </a:r>
+              <a:r>
+                <a:rPr lang="ko-KR" altLang="en-US" sz="1000" dirty="0">
+                  <a:solidFill>
+                    <a:srgbClr val="1668C1"/>
+                  </a:solidFill>
+                  <a:latin typeface="+mn-ea"/>
+                </a:rPr>
+                <a:t> 데이터를 </a:t>
+              </a:r>
+              <a:r>
+                <a:rPr lang="ko-KR" altLang="en-US" sz="1000" dirty="0" err="1">
+                  <a:solidFill>
+                    <a:srgbClr val="1668C1"/>
+                  </a:solidFill>
+                  <a:latin typeface="+mn-ea"/>
+                </a:rPr>
+                <a:t>로드하여</a:t>
+              </a:r>
+              <a:r>
+                <a:rPr lang="ko-KR" altLang="en-US" sz="1000" dirty="0">
+                  <a:solidFill>
+                    <a:srgbClr val="1668C1"/>
+                  </a:solidFill>
+                  <a:latin typeface="+mn-ea"/>
+                </a:rPr>
+                <a:t> 실시간 분석 수행</a:t>
+              </a:r>
+              <a:endParaRPr lang="en-GB" altLang="ko-KR" sz="1000" dirty="0">
+                <a:solidFill>
+                  <a:srgbClr val="1668C1"/>
+                </a:solidFill>
+                <a:latin typeface="+mn-ea"/>
+              </a:endParaRPr>
+            </a:p>
+            <a:p>
+              <a:pPr latinLnBrk="0">
+                <a:lnSpc>
+                  <a:spcPct val="150000"/>
+                </a:lnSpc>
+              </a:pPr>
+              <a:r>
+                <a:rPr lang="ko-KR" altLang="en-US" sz="1000" dirty="0">
+                  <a:solidFill>
+                    <a:srgbClr val="1668C1"/>
+                  </a:solidFill>
+                  <a:latin typeface="+mn-ea"/>
+                </a:rPr>
+                <a:t>오브젝트 스토리지를 </a:t>
+              </a:r>
+              <a:r>
+                <a:rPr lang="ko-KR" altLang="en-US" sz="1000" dirty="0" err="1">
+                  <a:solidFill>
+                    <a:srgbClr val="1668C1"/>
+                  </a:solidFill>
+                  <a:latin typeface="+mn-ea"/>
+                </a:rPr>
+                <a:t>스테이징</a:t>
+              </a:r>
+              <a:r>
+                <a:rPr lang="ko-KR" altLang="en-US" sz="1000" dirty="0">
+                  <a:solidFill>
+                    <a:srgbClr val="1668C1"/>
+                  </a:solidFill>
+                  <a:latin typeface="+mn-ea"/>
+                </a:rPr>
+                <a:t> 파일 시스템으로 활용하여 병렬 추출 및</a:t>
+              </a:r>
+              <a:r>
+                <a:rPr lang="en-US" altLang="ko-KR" sz="1000" dirty="0">
+                  <a:solidFill>
+                    <a:srgbClr val="1668C1"/>
+                  </a:solidFill>
+                  <a:latin typeface="+mn-ea"/>
+                </a:rPr>
+                <a:t> </a:t>
+              </a:r>
+              <a:r>
+                <a:rPr lang="ko-KR" altLang="en-US" sz="1000" dirty="0">
+                  <a:solidFill>
+                    <a:srgbClr val="1668C1"/>
+                  </a:solidFill>
+                  <a:latin typeface="+mn-ea"/>
+                </a:rPr>
+                <a:t>병렬 적재 지원</a:t>
+              </a:r>
+              <a:endParaRPr lang="en-GB" altLang="ko-KR" sz="1000" dirty="0">
+                <a:solidFill>
+                  <a:srgbClr val="1668C1"/>
+                </a:solidFill>
+                <a:latin typeface="+mn-ea"/>
+              </a:endParaRPr>
+            </a:p>
+            <a:p>
+              <a:pPr latinLnBrk="0">
+                <a:lnSpc>
+                  <a:spcPct val="150000"/>
+                </a:lnSpc>
+              </a:pPr>
+              <a:r>
+                <a:rPr lang="ko-KR" altLang="en-US" sz="1000" dirty="0">
+                  <a:solidFill>
+                    <a:srgbClr val="1668C1"/>
+                  </a:solidFill>
+                  <a:latin typeface="+mn-ea"/>
+                </a:rPr>
+                <a:t>스파크에서 분석된 결과도 </a:t>
+              </a:r>
+              <a:r>
+                <a:rPr lang="ko-KR" altLang="en-US" sz="1000" dirty="0" err="1">
+                  <a:solidFill>
+                    <a:srgbClr val="1668C1"/>
+                  </a:solidFill>
+                  <a:latin typeface="+mn-ea"/>
+                </a:rPr>
+                <a:t>버티카로</a:t>
+              </a:r>
+              <a:r>
+                <a:rPr lang="ko-KR" altLang="en-US" sz="1000" dirty="0">
+                  <a:solidFill>
+                    <a:srgbClr val="1668C1"/>
+                  </a:solidFill>
+                  <a:latin typeface="+mn-ea"/>
+                </a:rPr>
+                <a:t> 병렬 추출 및 적재 수행</a:t>
+              </a:r>
+              <a:endParaRPr lang="en-GB" sz="1000" dirty="0">
+                <a:solidFill>
+                  <a:srgbClr val="1668C1"/>
+                </a:solidFill>
+                <a:latin typeface="+mn-ea"/>
+              </a:endParaRPr>
+            </a:p>
+          </p:txBody>
+        </p:sp>
+      </p:grpSp>
+      <p:grpSp>
+        <p:nvGrpSpPr>
+          <p:cNvPr id="132" name="그룹 131"/>
+          <p:cNvGrpSpPr/>
+          <p:nvPr/>
+        </p:nvGrpSpPr>
+        <p:grpSpPr>
+          <a:xfrm>
+            <a:off x="3926949" y="2249296"/>
+            <a:ext cx="5793314" cy="507831"/>
+            <a:chOff x="3926949" y="2162212"/>
+            <a:chExt cx="5793314" cy="507831"/>
+          </a:xfrm>
+        </p:grpSpPr>
+        <p:sp>
+          <p:nvSpPr>
+            <p:cNvPr id="103" name="타원 102">
+              <a:extLst>
+                <a:ext uri="{FF2B5EF4-FFF2-40B4-BE49-F238E27FC236}">
+                  <a16:creationId xmlns="" xmlns:a16="http://schemas.microsoft.com/office/drawing/2014/main" id="{F74DE22F-BE57-990F-10C7-5A28137FF97D}"/>
+                </a:ext>
+              </a:extLst>
+            </p:cNvPr>
+            <p:cNvSpPr/>
+            <p:nvPr/>
+          </p:nvSpPr>
+          <p:spPr>
+            <a:xfrm>
+              <a:off x="3926949" y="2198693"/>
+              <a:ext cx="189788" cy="189788"/>
+            </a:xfrm>
+            <a:prstGeom prst="ellipse">
+              <a:avLst/>
+            </a:prstGeom>
+            <a:solidFill>
+              <a:srgbClr val="C6179D"/>
+            </a:solidFill>
+            <a:ln w="12700" cap="flat" cmpd="sng" algn="ctr">
+              <a:noFill/>
+              <a:prstDash val="solid"/>
+              <a:miter lim="800000"/>
+            </a:ln>
+            <a:effectLst/>
+          </p:spPr>
+          <p:txBody>
+            <a:bodyPr rtlCol="0" anchor="ctr"/>
+            <a:lstStyle/>
+            <a:p>
+              <a:pPr marL="0" marR="0" lvl="0" indent="0" algn="ctr" defTabSz="914400" eaLnBrk="1" fontAlgn="auto" latinLnBrk="0" hangingPunct="1">
+                <a:lnSpc>
+                  <a:spcPct val="100000"/>
+                </a:lnSpc>
+                <a:spcBef>
+                  <a:spcPts val="0"/>
+                </a:spcBef>
+                <a:spcAft>
+                  <a:spcPts val="0"/>
+                </a:spcAft>
+                <a:buClrTx/>
+                <a:buSzTx/>
+                <a:buFontTx/>
+                <a:buNone/>
+                <a:tabLst/>
+                <a:defRPr/>
+              </a:pPr>
+              <a:r>
+                <a:rPr kumimoji="0" lang="en-US" altLang="ko-KR" sz="1200" b="1" i="0" u="none" strike="noStrike" kern="0" cap="none" spc="0" normalizeH="0" baseline="0" noProof="0" dirty="0">
+                  <a:ln>
+                    <a:noFill/>
+                  </a:ln>
+                  <a:solidFill>
+                    <a:prstClr val="white"/>
+                  </a:solidFill>
+                  <a:effectLst/>
+                  <a:uLnTx/>
+                  <a:uFillTx/>
+                  <a:latin typeface="Calibri"/>
+                  <a:ea typeface="맑은 고딕" panose="020B0503020000020004" pitchFamily="50" charset="-127"/>
+                  <a:cs typeface="+mn-cs"/>
+                </a:rPr>
+                <a:t>2</a:t>
+              </a:r>
+              <a:endParaRPr kumimoji="0" lang="en-GB" sz="1200" b="1" i="0" u="none" strike="noStrike" kern="0" cap="none" spc="0" normalizeH="0" baseline="0" noProof="0" dirty="0">
+                <a:ln>
+                  <a:noFill/>
+                </a:ln>
+                <a:solidFill>
+                  <a:prstClr val="white"/>
+                </a:solidFill>
+                <a:effectLst/>
+                <a:uLnTx/>
+                <a:uFillTx/>
+                <a:latin typeface="Calibri"/>
+                <a:ea typeface="+mn-ea"/>
+                <a:cs typeface="+mn-cs"/>
+              </a:endParaRPr>
+            </a:p>
+          </p:txBody>
+        </p:sp>
+        <p:sp>
+          <p:nvSpPr>
+            <p:cNvPr id="104" name="TextBox 103">
+              <a:extLst>
+                <a:ext uri="{FF2B5EF4-FFF2-40B4-BE49-F238E27FC236}">
+                  <a16:creationId xmlns="" xmlns:a16="http://schemas.microsoft.com/office/drawing/2014/main" id="{2709A4DE-7D99-060B-4332-72EAE25DA559}"/>
+                </a:ext>
+              </a:extLst>
+            </p:cNvPr>
+            <p:cNvSpPr txBox="1"/>
+            <p:nvPr/>
+          </p:nvSpPr>
+          <p:spPr>
+            <a:xfrm>
+              <a:off x="4070965" y="2162212"/>
+              <a:ext cx="5649298" cy="507831"/>
+            </a:xfrm>
+            <a:prstGeom prst="rect">
+              <a:avLst/>
+            </a:prstGeom>
+          </p:spPr>
+          <p:txBody>
+            <a:bodyPr vert="horz" wrap="square" lIns="91440" tIns="45720" rIns="91440" bIns="45720" rtlCol="0" anchor="t" anchorCtr="0">
+              <a:spAutoFit/>
+            </a:bodyPr>
+            <a:lstStyle/>
+            <a:p>
+              <a:pPr latinLnBrk="0"/>
+              <a:r>
+                <a:rPr lang="en-US" altLang="ko-KR" sz="1200" b="1" dirty="0">
+                  <a:solidFill>
+                    <a:srgbClr val="1668C1"/>
+                  </a:solidFill>
+                  <a:latin typeface="+mn-ea"/>
+                  <a:cs typeface="Roboto Light" charset="0"/>
+                </a:rPr>
+                <a:t>Realtime Analytics</a:t>
+              </a:r>
+              <a:endParaRPr lang="en-GB" sz="1200" b="1" dirty="0">
+                <a:solidFill>
+                  <a:srgbClr val="1668C1"/>
+                </a:solidFill>
+                <a:latin typeface="+mn-ea"/>
+                <a:cs typeface="Roboto Light" charset="0"/>
+              </a:endParaRPr>
+            </a:p>
+            <a:p>
+              <a:pPr latinLnBrk="0">
+                <a:lnSpc>
+                  <a:spcPct val="150000"/>
+                </a:lnSpc>
+              </a:pPr>
+              <a:r>
+                <a:rPr lang="ko-KR" altLang="en-US" sz="1000" dirty="0">
+                  <a:solidFill>
+                    <a:srgbClr val="1668C1"/>
+                  </a:solidFill>
+                  <a:latin typeface="+mn-ea"/>
+                </a:rPr>
+                <a:t>매우 짧은 주기로 적재되는 대용량 데이터를 </a:t>
+              </a:r>
+              <a:r>
+                <a:rPr lang="ko-KR" altLang="en-US" sz="1000" dirty="0" err="1">
+                  <a:solidFill>
+                    <a:srgbClr val="1668C1"/>
+                  </a:solidFill>
+                  <a:latin typeface="+mn-ea"/>
+                </a:rPr>
+                <a:t>버티카를</a:t>
+              </a:r>
+              <a:r>
+                <a:rPr lang="ko-KR" altLang="en-US" sz="1000" dirty="0">
+                  <a:solidFill>
+                    <a:srgbClr val="1668C1"/>
+                  </a:solidFill>
+                  <a:latin typeface="+mn-ea"/>
+                </a:rPr>
+                <a:t> 통해 분석 수행</a:t>
+              </a:r>
+              <a:endParaRPr lang="en-GB" sz="1000" dirty="0">
+                <a:solidFill>
+                  <a:srgbClr val="1668C1"/>
+                </a:solidFill>
+                <a:latin typeface="+mn-ea"/>
+              </a:endParaRPr>
+            </a:p>
+          </p:txBody>
+        </p:sp>
+      </p:grpSp>
+      <p:sp>
+        <p:nvSpPr>
+          <p:cNvPr id="105" name="직사각형 104"/>
+          <p:cNvSpPr/>
+          <p:nvPr/>
+        </p:nvSpPr>
+        <p:spPr>
+          <a:xfrm>
+            <a:off x="203481" y="5091724"/>
+            <a:ext cx="4532642" cy="910772"/>
+          </a:xfrm>
+          <a:prstGeom prst="rect">
+            <a:avLst/>
+          </a:prstGeom>
+          <a:noFill/>
+          <a:ln>
+            <a:noFill/>
+          </a:ln>
+        </p:spPr>
+        <p:style>
+          <a:lnRef idx="2">
+            <a:schemeClr val="accent1">
+              <a:shade val="50000"/>
+            </a:schemeClr>
+          </a:lnRef>
+          <a:fillRef idx="1">
+            <a:schemeClr val="accent1"/>
+          </a:fillRef>
+          <a:effectRef idx="0">
+            <a:schemeClr val="accent1"/>
+          </a:effectRef>
+          <a:fontRef idx="minor">
+            <a:schemeClr val="lt1"/>
+          </a:fontRef>
+        </p:style>
+        <p:txBody>
+          <a:bodyPr rtlCol="0" anchor="ctr"/>
+          <a:lstStyle/>
+          <a:p>
+            <a:r>
+              <a:rPr lang="en-US" altLang="ko-KR" sz="1400" b="1" dirty="0" smtClean="0">
+                <a:solidFill>
+                  <a:schemeClr val="tx1"/>
+                </a:solidFill>
+                <a:latin typeface="+mn-ea"/>
+              </a:rPr>
+              <a:t>HDFS </a:t>
+            </a:r>
+            <a:r>
+              <a:rPr lang="ko-KR" altLang="en-US" sz="1400" b="1" dirty="0" smtClean="0">
+                <a:solidFill>
+                  <a:schemeClr val="tx1"/>
+                </a:solidFill>
+                <a:latin typeface="+mn-ea"/>
+              </a:rPr>
+              <a:t>연계</a:t>
+            </a:r>
+            <a:endParaRPr lang="en-US" altLang="ko-KR" sz="1400" b="1" dirty="0" smtClean="0">
+              <a:solidFill>
+                <a:schemeClr val="tx1"/>
+              </a:solidFill>
+              <a:latin typeface="+mn-ea"/>
+            </a:endParaRPr>
+          </a:p>
+          <a:p>
+            <a:r>
+              <a:rPr lang="ko-KR" altLang="en-US" sz="1400" dirty="0">
+                <a:solidFill>
+                  <a:schemeClr val="tx1">
+                    <a:lumMod val="85000"/>
+                    <a:lumOff val="15000"/>
+                  </a:schemeClr>
+                </a:solidFill>
+                <a:latin typeface="Pretendard Variable Medium" panose="02000003000000020004" pitchFamily="2" charset="-127"/>
+                <a:ea typeface="Pretendard Variable Medium" panose="02000003000000020004" pitchFamily="2" charset="-127"/>
+                <a:cs typeface="Pretendard Variable Medium" panose="02000003000000020004" pitchFamily="2" charset="-127"/>
+              </a:rPr>
+              <a:t>추가적인 장비나 별도의 솔루션 설치 없이 </a:t>
+            </a:r>
+            <a:r>
+              <a:rPr lang="ko-KR" altLang="en-US" sz="1400" dirty="0" err="1">
+                <a:solidFill>
+                  <a:schemeClr val="tx1">
+                    <a:lumMod val="85000"/>
+                    <a:lumOff val="15000"/>
+                  </a:schemeClr>
+                </a:solidFill>
+                <a:latin typeface="Pretendard Variable Medium" panose="02000003000000020004" pitchFamily="2" charset="-127"/>
+                <a:ea typeface="Pretendard Variable Medium" panose="02000003000000020004" pitchFamily="2" charset="-127"/>
+                <a:cs typeface="Pretendard Variable Medium" panose="02000003000000020004" pitchFamily="2" charset="-127"/>
+              </a:rPr>
+              <a:t>하둡</a:t>
+            </a:r>
+            <a:r>
+              <a:rPr lang="ko-KR" altLang="en-US" sz="1400" dirty="0">
+                <a:solidFill>
+                  <a:schemeClr val="tx1">
+                    <a:lumMod val="85000"/>
+                    <a:lumOff val="15000"/>
+                  </a:schemeClr>
+                </a:solidFill>
+                <a:latin typeface="Pretendard Variable Medium" panose="02000003000000020004" pitchFamily="2" charset="-127"/>
+                <a:ea typeface="Pretendard Variable Medium" panose="02000003000000020004" pitchFamily="2" charset="-127"/>
+                <a:cs typeface="Pretendard Variable Medium" panose="02000003000000020004" pitchFamily="2" charset="-127"/>
+              </a:rPr>
+              <a:t> 연계를 지원하여 </a:t>
+            </a:r>
+            <a:r>
+              <a:rPr lang="ko-KR" altLang="en-US" sz="1400" dirty="0" err="1">
+                <a:solidFill>
+                  <a:schemeClr val="tx1">
+                    <a:lumMod val="85000"/>
+                    <a:lumOff val="15000"/>
+                  </a:schemeClr>
+                </a:solidFill>
+                <a:latin typeface="Pretendard Variable Medium" panose="02000003000000020004" pitchFamily="2" charset="-127"/>
+                <a:ea typeface="Pretendard Variable Medium" panose="02000003000000020004" pitchFamily="2" charset="-127"/>
+                <a:cs typeface="Pretendard Variable Medium" panose="02000003000000020004" pitchFamily="2" charset="-127"/>
+              </a:rPr>
+              <a:t>버티카를</a:t>
+            </a:r>
+            <a:r>
+              <a:rPr lang="ko-KR" altLang="en-US" sz="1400" dirty="0">
+                <a:solidFill>
+                  <a:schemeClr val="tx1">
+                    <a:lumMod val="85000"/>
+                    <a:lumOff val="15000"/>
+                  </a:schemeClr>
+                </a:solidFill>
+                <a:latin typeface="Pretendard Variable Medium" panose="02000003000000020004" pitchFamily="2" charset="-127"/>
+                <a:ea typeface="Pretendard Variable Medium" panose="02000003000000020004" pitchFamily="2" charset="-127"/>
+                <a:cs typeface="Pretendard Variable Medium" panose="02000003000000020004" pitchFamily="2" charset="-127"/>
+              </a:rPr>
+              <a:t> 통해 </a:t>
+            </a:r>
+            <a:r>
+              <a:rPr lang="en-US" altLang="ko-KR" sz="1400" dirty="0">
+                <a:solidFill>
+                  <a:schemeClr val="tx1">
+                    <a:lumMod val="85000"/>
+                    <a:lumOff val="15000"/>
+                  </a:schemeClr>
+                </a:solidFill>
+                <a:latin typeface="Pretendard Variable Medium" panose="02000003000000020004" pitchFamily="2" charset="-127"/>
+                <a:ea typeface="Pretendard Variable Medium" panose="02000003000000020004" pitchFamily="2" charset="-127"/>
+                <a:cs typeface="Pretendard Variable Medium" panose="02000003000000020004" pitchFamily="2" charset="-127"/>
+              </a:rPr>
+              <a:t>DW</a:t>
+            </a:r>
+            <a:r>
+              <a:rPr lang="ko-KR" altLang="en-US" sz="1400" dirty="0">
+                <a:solidFill>
+                  <a:schemeClr val="tx1">
+                    <a:lumMod val="85000"/>
+                    <a:lumOff val="15000"/>
+                  </a:schemeClr>
+                </a:solidFill>
+                <a:latin typeface="Pretendard Variable Medium" panose="02000003000000020004" pitchFamily="2" charset="-127"/>
+                <a:ea typeface="Pretendard Variable Medium" panose="02000003000000020004" pitchFamily="2" charset="-127"/>
+                <a:cs typeface="Pretendard Variable Medium" panose="02000003000000020004" pitchFamily="2" charset="-127"/>
+              </a:rPr>
+              <a:t>와 </a:t>
+            </a:r>
+            <a:r>
+              <a:rPr lang="ko-KR" altLang="en-US" sz="1400" dirty="0" err="1">
+                <a:solidFill>
+                  <a:schemeClr val="tx1">
+                    <a:lumMod val="85000"/>
+                    <a:lumOff val="15000"/>
+                  </a:schemeClr>
+                </a:solidFill>
+                <a:latin typeface="Pretendard Variable Medium" panose="02000003000000020004" pitchFamily="2" charset="-127"/>
+                <a:ea typeface="Pretendard Variable Medium" panose="02000003000000020004" pitchFamily="2" charset="-127"/>
+                <a:cs typeface="Pretendard Variable Medium" panose="02000003000000020004" pitchFamily="2" charset="-127"/>
+              </a:rPr>
+              <a:t>하둡</a:t>
+            </a:r>
+            <a:r>
+              <a:rPr lang="ko-KR" altLang="en-US" sz="1400" dirty="0">
+                <a:solidFill>
+                  <a:schemeClr val="tx1">
+                    <a:lumMod val="85000"/>
+                    <a:lumOff val="15000"/>
+                  </a:schemeClr>
+                </a:solidFill>
+                <a:latin typeface="Pretendard Variable Medium" panose="02000003000000020004" pitchFamily="2" charset="-127"/>
+                <a:ea typeface="Pretendard Variable Medium" panose="02000003000000020004" pitchFamily="2" charset="-127"/>
+                <a:cs typeface="Pretendard Variable Medium" panose="02000003000000020004" pitchFamily="2" charset="-127"/>
+              </a:rPr>
+              <a:t> 데이터 연계 분석을 </a:t>
+            </a:r>
+            <a:r>
+              <a:rPr lang="ko-KR" altLang="en-US" sz="1400" dirty="0" smtClean="0">
+                <a:solidFill>
+                  <a:schemeClr val="tx1">
+                    <a:lumMod val="85000"/>
+                    <a:lumOff val="15000"/>
+                  </a:schemeClr>
+                </a:solidFill>
+                <a:latin typeface="Pretendard Variable Medium" panose="02000003000000020004" pitchFamily="2" charset="-127"/>
+                <a:ea typeface="Pretendard Variable Medium" panose="02000003000000020004" pitchFamily="2" charset="-127"/>
+                <a:cs typeface="Pretendard Variable Medium" panose="02000003000000020004" pitchFamily="2" charset="-127"/>
+              </a:rPr>
+              <a:t>지원</a:t>
+            </a:r>
+            <a:r>
+              <a:rPr lang="ko-KR" altLang="en-US" sz="1400" dirty="0" smtClean="0">
+                <a:solidFill>
+                  <a:schemeClr val="tx1"/>
+                </a:solidFill>
+                <a:latin typeface="+mn-ea"/>
+              </a:rPr>
+              <a:t>합니다</a:t>
+            </a:r>
+            <a:r>
+              <a:rPr lang="en-US" altLang="ko-KR" sz="1400" dirty="0" smtClean="0">
+                <a:solidFill>
+                  <a:schemeClr val="tx1"/>
+                </a:solidFill>
+                <a:latin typeface="+mn-ea"/>
+              </a:rPr>
+              <a:t>.</a:t>
+            </a:r>
+            <a:endParaRPr lang="ko-KR" altLang="en-US" sz="1400" dirty="0">
+              <a:solidFill>
+                <a:schemeClr val="tx1">
+                  <a:lumMod val="85000"/>
+                  <a:lumOff val="15000"/>
+                </a:schemeClr>
+              </a:solidFill>
+              <a:latin typeface="Pretendard Variable Medium" panose="02000003000000020004" pitchFamily="2" charset="-127"/>
+              <a:ea typeface="Pretendard Variable Medium" panose="02000003000000020004" pitchFamily="2" charset="-127"/>
+              <a:cs typeface="Pretendard Variable Medium" panose="02000003000000020004" pitchFamily="2" charset="-127"/>
+            </a:endParaRPr>
+          </a:p>
+        </p:txBody>
+      </p:sp>
+      <p:pic>
+        <p:nvPicPr>
+          <p:cNvPr id="122" name="그림 121"/>
+          <p:cNvPicPr>
+            <a:picLocks noChangeAspect="1"/>
+          </p:cNvPicPr>
+          <p:nvPr/>
+        </p:nvPicPr>
+        <p:blipFill>
+          <a:blip r:embed="rId2">
+            <a:extLst>
+              <a:ext uri="{28A0092B-C50C-407E-A947-70E740481C1C}">
+                <a14:useLocalDpi xmlns:a14="http://schemas.microsoft.com/office/drawing/2010/main" val="0"/>
+              </a:ext>
+            </a:extLst>
+          </a:blip>
+          <a:stretch>
+            <a:fillRect/>
+          </a:stretch>
+        </p:blipFill>
+        <p:spPr>
+          <a:xfrm>
+            <a:off x="123600" y="1645763"/>
+            <a:ext cx="3896857" cy="2525976"/>
+          </a:xfrm>
+          <a:prstGeom prst="rect">
+            <a:avLst/>
+          </a:prstGeom>
+        </p:spPr>
+      </p:pic>
+      <p:sp>
+        <p:nvSpPr>
+          <p:cNvPr id="124" name="직사각형 123"/>
+          <p:cNvSpPr/>
+          <p:nvPr/>
+        </p:nvSpPr>
+        <p:spPr>
+          <a:xfrm>
+            <a:off x="4963049" y="5103445"/>
+            <a:ext cx="4567813" cy="1221153"/>
+          </a:xfrm>
+          <a:prstGeom prst="rect">
+            <a:avLst/>
+          </a:prstGeom>
+          <a:noFill/>
+          <a:ln>
+            <a:noFill/>
+          </a:ln>
+        </p:spPr>
+        <p:style>
+          <a:lnRef idx="2">
+            <a:schemeClr val="accent1">
+              <a:shade val="50000"/>
+            </a:schemeClr>
+          </a:lnRef>
+          <a:fillRef idx="1">
+            <a:schemeClr val="accent1"/>
+          </a:fillRef>
+          <a:effectRef idx="0">
+            <a:schemeClr val="accent1"/>
+          </a:effectRef>
+          <a:fontRef idx="minor">
+            <a:schemeClr val="lt1"/>
+          </a:fontRef>
+        </p:style>
+        <p:txBody>
+          <a:bodyPr rtlCol="0" anchor="ctr"/>
+          <a:lstStyle/>
+          <a:p>
+            <a:r>
+              <a:rPr lang="en-US" altLang="ko-KR" sz="1400" b="1" dirty="0">
+                <a:solidFill>
+                  <a:schemeClr val="tx1"/>
+                </a:solidFill>
+                <a:latin typeface="+mj-ea"/>
+                <a:ea typeface="+mj-ea"/>
+              </a:rPr>
+              <a:t>Object Storage </a:t>
+            </a:r>
+            <a:r>
+              <a:rPr lang="ko-KR" altLang="en-US" sz="1400" b="1" dirty="0" smtClean="0">
+                <a:solidFill>
+                  <a:schemeClr val="tx1"/>
+                </a:solidFill>
+                <a:latin typeface="+mj-ea"/>
+                <a:ea typeface="+mj-ea"/>
+              </a:rPr>
+              <a:t>연계</a:t>
+            </a:r>
+            <a:endParaRPr lang="en-US" altLang="ko-KR" sz="1400" b="1" dirty="0" smtClean="0">
+              <a:solidFill>
+                <a:schemeClr val="tx1"/>
+              </a:solidFill>
+              <a:latin typeface="+mj-ea"/>
+              <a:ea typeface="+mj-ea"/>
+            </a:endParaRPr>
+          </a:p>
+          <a:p>
+            <a:r>
+              <a:rPr lang="ko-KR" altLang="en-US" sz="1400" dirty="0">
+                <a:solidFill>
+                  <a:schemeClr val="tx1">
+                    <a:lumMod val="85000"/>
+                    <a:lumOff val="15000"/>
+                  </a:schemeClr>
+                </a:solidFill>
+                <a:latin typeface="+mj-ea"/>
+                <a:ea typeface="+mj-ea"/>
+                <a:cs typeface="Pretendard Variable Medium" panose="02000003000000020004" pitchFamily="2" charset="-127"/>
+              </a:rPr>
+              <a:t>추가적인 장비나 별도의 솔루션 설치 없이 </a:t>
+            </a:r>
+            <a:r>
+              <a:rPr lang="en-US" altLang="ko-KR" sz="1400" dirty="0">
+                <a:solidFill>
+                  <a:schemeClr val="tx1">
+                    <a:lumMod val="85000"/>
+                    <a:lumOff val="15000"/>
+                  </a:schemeClr>
+                </a:solidFill>
+                <a:latin typeface="+mj-ea"/>
+                <a:ea typeface="+mj-ea"/>
+                <a:cs typeface="Pretendard Variable Medium" panose="02000003000000020004" pitchFamily="2" charset="-127"/>
+              </a:rPr>
+              <a:t>Object Storage </a:t>
+            </a:r>
+            <a:r>
+              <a:rPr lang="ko-KR" altLang="en-US" sz="1400" dirty="0">
+                <a:solidFill>
+                  <a:schemeClr val="tx1">
+                    <a:lumMod val="85000"/>
+                    <a:lumOff val="15000"/>
+                  </a:schemeClr>
+                </a:solidFill>
+                <a:latin typeface="+mj-ea"/>
+                <a:ea typeface="+mj-ea"/>
+                <a:cs typeface="Pretendard Variable Medium" panose="02000003000000020004" pitchFamily="2" charset="-127"/>
+              </a:rPr>
+              <a:t>에 저장된 데이터를 직접 분석할 수 있으며</a:t>
+            </a:r>
+          </a:p>
+          <a:p>
+            <a:r>
+              <a:rPr lang="ko-KR" altLang="en-US" sz="1400" dirty="0" err="1">
+                <a:solidFill>
+                  <a:schemeClr val="tx1">
+                    <a:lumMod val="85000"/>
+                    <a:lumOff val="15000"/>
+                  </a:schemeClr>
+                </a:solidFill>
+                <a:latin typeface="+mj-ea"/>
+                <a:ea typeface="+mj-ea"/>
+                <a:cs typeface="Pretendard Variable Medium" panose="02000003000000020004" pitchFamily="2" charset="-127"/>
+              </a:rPr>
+              <a:t>버티카</a:t>
+            </a:r>
+            <a:r>
+              <a:rPr lang="ko-KR" altLang="en-US" sz="1400" dirty="0">
+                <a:solidFill>
+                  <a:schemeClr val="tx1">
+                    <a:lumMod val="85000"/>
+                    <a:lumOff val="15000"/>
+                  </a:schemeClr>
+                </a:solidFill>
+                <a:latin typeface="+mj-ea"/>
+                <a:ea typeface="+mj-ea"/>
+                <a:cs typeface="Pretendard Variable Medium" panose="02000003000000020004" pitchFamily="2" charset="-127"/>
+              </a:rPr>
+              <a:t> 데이터를 다양한 오픈 포맷으로 추출할 수 있어 타 시스템과 유연한 데이터 연계 지원</a:t>
+            </a:r>
+          </a:p>
+        </p:txBody>
+      </p:sp>
+      <p:cxnSp>
+        <p:nvCxnSpPr>
+          <p:cNvPr id="125" name="직선 연결선 124"/>
+          <p:cNvCxnSpPr/>
+          <p:nvPr/>
+        </p:nvCxnSpPr>
+        <p:spPr>
+          <a:xfrm>
+            <a:off x="4859338" y="5181599"/>
+            <a:ext cx="0" cy="3204000"/>
+          </a:xfrm>
+          <a:prstGeom prst="line">
+            <a:avLst/>
+          </a:prstGeom>
+          <a:ln w="19050">
+            <a:solidFill>
+              <a:schemeClr val="accent1"/>
+            </a:solidFill>
+          </a:ln>
+        </p:spPr>
+        <p:style>
+          <a:lnRef idx="1">
+            <a:schemeClr val="accent1"/>
+          </a:lnRef>
+          <a:fillRef idx="0">
+            <a:schemeClr val="accent1"/>
+          </a:fillRef>
+          <a:effectRef idx="0">
+            <a:schemeClr val="accent1"/>
+          </a:effectRef>
+          <a:fontRef idx="minor">
+            <a:schemeClr val="tx1"/>
+          </a:fontRef>
+        </p:style>
+      </p:cxnSp>
+      <p:pic>
+        <p:nvPicPr>
+          <p:cNvPr id="128" name="그림 127"/>
+          <p:cNvPicPr>
+            <a:picLocks noChangeAspect="1"/>
+          </p:cNvPicPr>
+          <p:nvPr/>
+        </p:nvPicPr>
+        <p:blipFill>
+          <a:blip r:embed="rId3">
+            <a:extLst>
+              <a:ext uri="{28A0092B-C50C-407E-A947-70E740481C1C}">
+                <a14:useLocalDpi xmlns:a14="http://schemas.microsoft.com/office/drawing/2010/main" val="0"/>
+              </a:ext>
+            </a:extLst>
+          </a:blip>
+          <a:stretch>
+            <a:fillRect/>
+          </a:stretch>
+        </p:blipFill>
+        <p:spPr>
+          <a:xfrm>
+            <a:off x="4908634" y="6337300"/>
+            <a:ext cx="4680000" cy="2170701"/>
+          </a:xfrm>
+          <a:prstGeom prst="rect">
+            <a:avLst/>
+          </a:prstGeom>
+        </p:spPr>
+      </p:pic>
+      <p:pic>
+        <p:nvPicPr>
+          <p:cNvPr id="129" name="그림 128"/>
+          <p:cNvPicPr>
+            <a:picLocks noChangeAspect="1"/>
+          </p:cNvPicPr>
+          <p:nvPr/>
+        </p:nvPicPr>
+        <p:blipFill>
+          <a:blip r:embed="rId4">
+            <a:extLst>
+              <a:ext uri="{28A0092B-C50C-407E-A947-70E740481C1C}">
+                <a14:useLocalDpi xmlns:a14="http://schemas.microsoft.com/office/drawing/2010/main" val="0"/>
+              </a:ext>
+            </a:extLst>
+          </a:blip>
+          <a:stretch>
+            <a:fillRect/>
+          </a:stretch>
+        </p:blipFill>
+        <p:spPr>
+          <a:xfrm>
+            <a:off x="134920" y="6197600"/>
+            <a:ext cx="4608000" cy="2281010"/>
+          </a:xfrm>
+          <a:prstGeom prst="rect">
+            <a:avLst/>
+          </a:prstGeom>
+        </p:spPr>
+      </p:pic>
     </p:spTree>
     <p:extLst>
       <p:ext uri="{BB962C8B-B14F-4D97-AF65-F5344CB8AC3E}">

--- a/99ref/blog.pptx
+++ b/99ref/blog.pptx
@@ -6338,7 +6338,7 @@
                 <a:gridCol w="200863">
                   <a:extLst>
                     <a:ext uri="{9D8B030D-6E8A-4147-A177-3AD203B41FA5}">
-                      <a16:colId xmlns="" xmlns:a16="http://schemas.microsoft.com/office/drawing/2014/main" val="20000"/>
+                      <a16:colId xmlns:a16="http://schemas.microsoft.com/office/drawing/2014/main" xmlns="" val="20000"/>
                     </a:ext>
                   </a:extLst>
                 </a:gridCol>
@@ -6363,7 +6363,7 @@
                 </a:tc>
                 <a:extLst>
                   <a:ext uri="{0D108BD9-81ED-4DB2-BD59-A6C34878D82A}">
-                    <a16:rowId xmlns="" xmlns:a16="http://schemas.microsoft.com/office/drawing/2014/main" val="10001"/>
+                    <a16:rowId xmlns:a16="http://schemas.microsoft.com/office/drawing/2014/main" xmlns="" val="10001"/>
                   </a:ext>
                 </a:extLst>
               </a:tr>
@@ -6387,7 +6387,7 @@
                 </a:tc>
                 <a:extLst>
                   <a:ext uri="{0D108BD9-81ED-4DB2-BD59-A6C34878D82A}">
-                    <a16:rowId xmlns="" xmlns:a16="http://schemas.microsoft.com/office/drawing/2014/main" val="10002"/>
+                    <a16:rowId xmlns:a16="http://schemas.microsoft.com/office/drawing/2014/main" xmlns="" val="10002"/>
                   </a:ext>
                 </a:extLst>
               </a:tr>
@@ -6411,7 +6411,7 @@
                 </a:tc>
                 <a:extLst>
                   <a:ext uri="{0D108BD9-81ED-4DB2-BD59-A6C34878D82A}">
-                    <a16:rowId xmlns="" xmlns:a16="http://schemas.microsoft.com/office/drawing/2014/main" val="10003"/>
+                    <a16:rowId xmlns:a16="http://schemas.microsoft.com/office/drawing/2014/main" xmlns="" val="10003"/>
                   </a:ext>
                 </a:extLst>
               </a:tr>
@@ -6435,7 +6435,7 @@
                 </a:tc>
                 <a:extLst>
                   <a:ext uri="{0D108BD9-81ED-4DB2-BD59-A6C34878D82A}">
-                    <a16:rowId xmlns="" xmlns:a16="http://schemas.microsoft.com/office/drawing/2014/main" val="10004"/>
+                    <a16:rowId xmlns:a16="http://schemas.microsoft.com/office/drawing/2014/main" xmlns="" val="10004"/>
                   </a:ext>
                 </a:extLst>
               </a:tr>
@@ -6459,7 +6459,7 @@
                 </a:tc>
                 <a:extLst>
                   <a:ext uri="{0D108BD9-81ED-4DB2-BD59-A6C34878D82A}">
-                    <a16:rowId xmlns="" xmlns:a16="http://schemas.microsoft.com/office/drawing/2014/main" val="10005"/>
+                    <a16:rowId xmlns:a16="http://schemas.microsoft.com/office/drawing/2014/main" xmlns="" val="10005"/>
                   </a:ext>
                 </a:extLst>
               </a:tr>
@@ -6495,7 +6495,7 @@
                 <a:gridCol w="200863">
                   <a:extLst>
                     <a:ext uri="{9D8B030D-6E8A-4147-A177-3AD203B41FA5}">
-                      <a16:colId xmlns="" xmlns:a16="http://schemas.microsoft.com/office/drawing/2014/main" val="20000"/>
+                      <a16:colId xmlns:a16="http://schemas.microsoft.com/office/drawing/2014/main" xmlns="" val="20000"/>
                     </a:ext>
                   </a:extLst>
                 </a:gridCol>
@@ -6517,7 +6517,7 @@
                 </a:tc>
                 <a:extLst>
                   <a:ext uri="{0D108BD9-81ED-4DB2-BD59-A6C34878D82A}">
-                    <a16:rowId xmlns="" xmlns:a16="http://schemas.microsoft.com/office/drawing/2014/main" val="10001"/>
+                    <a16:rowId xmlns:a16="http://schemas.microsoft.com/office/drawing/2014/main" xmlns="" val="10001"/>
                   </a:ext>
                 </a:extLst>
               </a:tr>
@@ -6538,7 +6538,7 @@
                 </a:tc>
                 <a:extLst>
                   <a:ext uri="{0D108BD9-81ED-4DB2-BD59-A6C34878D82A}">
-                    <a16:rowId xmlns="" xmlns:a16="http://schemas.microsoft.com/office/drawing/2014/main" val="10002"/>
+                    <a16:rowId xmlns:a16="http://schemas.microsoft.com/office/drawing/2014/main" xmlns="" val="10002"/>
                   </a:ext>
                 </a:extLst>
               </a:tr>
@@ -6559,7 +6559,7 @@
                 </a:tc>
                 <a:extLst>
                   <a:ext uri="{0D108BD9-81ED-4DB2-BD59-A6C34878D82A}">
-                    <a16:rowId xmlns="" xmlns:a16="http://schemas.microsoft.com/office/drawing/2014/main" val="10003"/>
+                    <a16:rowId xmlns:a16="http://schemas.microsoft.com/office/drawing/2014/main" xmlns="" val="10003"/>
                   </a:ext>
                 </a:extLst>
               </a:tr>
@@ -6580,7 +6580,7 @@
                 </a:tc>
                 <a:extLst>
                   <a:ext uri="{0D108BD9-81ED-4DB2-BD59-A6C34878D82A}">
-                    <a16:rowId xmlns="" xmlns:a16="http://schemas.microsoft.com/office/drawing/2014/main" val="10004"/>
+                    <a16:rowId xmlns:a16="http://schemas.microsoft.com/office/drawing/2014/main" xmlns="" val="10004"/>
                   </a:ext>
                 </a:extLst>
               </a:tr>
@@ -6601,7 +6601,7 @@
                 </a:tc>
                 <a:extLst>
                   <a:ext uri="{0D108BD9-81ED-4DB2-BD59-A6C34878D82A}">
-                    <a16:rowId xmlns="" xmlns:a16="http://schemas.microsoft.com/office/drawing/2014/main" val="10005"/>
+                    <a16:rowId xmlns:a16="http://schemas.microsoft.com/office/drawing/2014/main" xmlns="" val="10005"/>
                   </a:ext>
                 </a:extLst>
               </a:tr>
@@ -6637,7 +6637,7 @@
                 <a:gridCol w="200863">
                   <a:extLst>
                     <a:ext uri="{9D8B030D-6E8A-4147-A177-3AD203B41FA5}">
-                      <a16:colId xmlns="" xmlns:a16="http://schemas.microsoft.com/office/drawing/2014/main" val="20000"/>
+                      <a16:colId xmlns:a16="http://schemas.microsoft.com/office/drawing/2014/main" xmlns="" val="20000"/>
                     </a:ext>
                   </a:extLst>
                 </a:gridCol>
@@ -6661,7 +6661,7 @@
                 </a:tc>
                 <a:extLst>
                   <a:ext uri="{0D108BD9-81ED-4DB2-BD59-A6C34878D82A}">
-                    <a16:rowId xmlns="" xmlns:a16="http://schemas.microsoft.com/office/drawing/2014/main" val="10001"/>
+                    <a16:rowId xmlns:a16="http://schemas.microsoft.com/office/drawing/2014/main" xmlns="" val="10001"/>
                   </a:ext>
                 </a:extLst>
               </a:tr>
@@ -6684,7 +6684,7 @@
                 </a:tc>
                 <a:extLst>
                   <a:ext uri="{0D108BD9-81ED-4DB2-BD59-A6C34878D82A}">
-                    <a16:rowId xmlns="" xmlns:a16="http://schemas.microsoft.com/office/drawing/2014/main" val="10002"/>
+                    <a16:rowId xmlns:a16="http://schemas.microsoft.com/office/drawing/2014/main" xmlns="" val="10002"/>
                   </a:ext>
                 </a:extLst>
               </a:tr>
@@ -6707,7 +6707,7 @@
                 </a:tc>
                 <a:extLst>
                   <a:ext uri="{0D108BD9-81ED-4DB2-BD59-A6C34878D82A}">
-                    <a16:rowId xmlns="" xmlns:a16="http://schemas.microsoft.com/office/drawing/2014/main" val="10003"/>
+                    <a16:rowId xmlns:a16="http://schemas.microsoft.com/office/drawing/2014/main" xmlns="" val="10003"/>
                   </a:ext>
                 </a:extLst>
               </a:tr>
@@ -6730,7 +6730,7 @@
                 </a:tc>
                 <a:extLst>
                   <a:ext uri="{0D108BD9-81ED-4DB2-BD59-A6C34878D82A}">
-                    <a16:rowId xmlns="" xmlns:a16="http://schemas.microsoft.com/office/drawing/2014/main" val="10004"/>
+                    <a16:rowId xmlns:a16="http://schemas.microsoft.com/office/drawing/2014/main" xmlns="" val="10004"/>
                   </a:ext>
                 </a:extLst>
               </a:tr>
@@ -6753,7 +6753,7 @@
                 </a:tc>
                 <a:extLst>
                   <a:ext uri="{0D108BD9-81ED-4DB2-BD59-A6C34878D82A}">
-                    <a16:rowId xmlns="" xmlns:a16="http://schemas.microsoft.com/office/drawing/2014/main" val="10005"/>
+                    <a16:rowId xmlns:a16="http://schemas.microsoft.com/office/drawing/2014/main" xmlns="" val="10005"/>
                   </a:ext>
                 </a:extLst>
               </a:tr>
@@ -6789,7 +6789,7 @@
                 <a:gridCol w="200863">
                   <a:extLst>
                     <a:ext uri="{9D8B030D-6E8A-4147-A177-3AD203B41FA5}">
-                      <a16:colId xmlns="" xmlns:a16="http://schemas.microsoft.com/office/drawing/2014/main" val="20000"/>
+                      <a16:colId xmlns:a16="http://schemas.microsoft.com/office/drawing/2014/main" xmlns="" val="20000"/>
                     </a:ext>
                   </a:extLst>
                 </a:gridCol>
@@ -6814,7 +6814,7 @@
                 </a:tc>
                 <a:extLst>
                   <a:ext uri="{0D108BD9-81ED-4DB2-BD59-A6C34878D82A}">
-                    <a16:rowId xmlns="" xmlns:a16="http://schemas.microsoft.com/office/drawing/2014/main" val="10001"/>
+                    <a16:rowId xmlns:a16="http://schemas.microsoft.com/office/drawing/2014/main" xmlns="" val="10001"/>
                   </a:ext>
                 </a:extLst>
               </a:tr>
@@ -6838,7 +6838,7 @@
                 </a:tc>
                 <a:extLst>
                   <a:ext uri="{0D108BD9-81ED-4DB2-BD59-A6C34878D82A}">
-                    <a16:rowId xmlns="" xmlns:a16="http://schemas.microsoft.com/office/drawing/2014/main" val="10002"/>
+                    <a16:rowId xmlns:a16="http://schemas.microsoft.com/office/drawing/2014/main" xmlns="" val="10002"/>
                   </a:ext>
                 </a:extLst>
               </a:tr>
@@ -6862,7 +6862,7 @@
                 </a:tc>
                 <a:extLst>
                   <a:ext uri="{0D108BD9-81ED-4DB2-BD59-A6C34878D82A}">
-                    <a16:rowId xmlns="" xmlns:a16="http://schemas.microsoft.com/office/drawing/2014/main" val="10003"/>
+                    <a16:rowId xmlns:a16="http://schemas.microsoft.com/office/drawing/2014/main" xmlns="" val="10003"/>
                   </a:ext>
                 </a:extLst>
               </a:tr>
@@ -6886,7 +6886,7 @@
                 </a:tc>
                 <a:extLst>
                   <a:ext uri="{0D108BD9-81ED-4DB2-BD59-A6C34878D82A}">
-                    <a16:rowId xmlns="" xmlns:a16="http://schemas.microsoft.com/office/drawing/2014/main" val="10004"/>
+                    <a16:rowId xmlns:a16="http://schemas.microsoft.com/office/drawing/2014/main" xmlns="" val="10004"/>
                   </a:ext>
                 </a:extLst>
               </a:tr>
@@ -6910,7 +6910,7 @@
                 </a:tc>
                 <a:extLst>
                   <a:ext uri="{0D108BD9-81ED-4DB2-BD59-A6C34878D82A}">
-                    <a16:rowId xmlns="" xmlns:a16="http://schemas.microsoft.com/office/drawing/2014/main" val="10005"/>
+                    <a16:rowId xmlns:a16="http://schemas.microsoft.com/office/drawing/2014/main" xmlns="" val="10005"/>
                   </a:ext>
                 </a:extLst>
               </a:tr>
@@ -6946,7 +6946,7 @@
                 <a:gridCol w="199782">
                   <a:extLst>
                     <a:ext uri="{9D8B030D-6E8A-4147-A177-3AD203B41FA5}">
-                      <a16:colId xmlns="" xmlns:a16="http://schemas.microsoft.com/office/drawing/2014/main" val="20000"/>
+                      <a16:colId xmlns:a16="http://schemas.microsoft.com/office/drawing/2014/main" xmlns="" val="20000"/>
                     </a:ext>
                   </a:extLst>
                 </a:gridCol>
@@ -6971,7 +6971,7 @@
                 </a:tc>
                 <a:extLst>
                   <a:ext uri="{0D108BD9-81ED-4DB2-BD59-A6C34878D82A}">
-                    <a16:rowId xmlns="" xmlns:a16="http://schemas.microsoft.com/office/drawing/2014/main" val="10001"/>
+                    <a16:rowId xmlns:a16="http://schemas.microsoft.com/office/drawing/2014/main" xmlns="" val="10001"/>
                   </a:ext>
                 </a:extLst>
               </a:tr>
@@ -6995,7 +6995,7 @@
                 </a:tc>
                 <a:extLst>
                   <a:ext uri="{0D108BD9-81ED-4DB2-BD59-A6C34878D82A}">
-                    <a16:rowId xmlns="" xmlns:a16="http://schemas.microsoft.com/office/drawing/2014/main" val="10002"/>
+                    <a16:rowId xmlns:a16="http://schemas.microsoft.com/office/drawing/2014/main" xmlns="" val="10002"/>
                   </a:ext>
                 </a:extLst>
               </a:tr>
@@ -7019,7 +7019,7 @@
                 </a:tc>
                 <a:extLst>
                   <a:ext uri="{0D108BD9-81ED-4DB2-BD59-A6C34878D82A}">
-                    <a16:rowId xmlns="" xmlns:a16="http://schemas.microsoft.com/office/drawing/2014/main" val="10003"/>
+                    <a16:rowId xmlns:a16="http://schemas.microsoft.com/office/drawing/2014/main" xmlns="" val="10003"/>
                   </a:ext>
                 </a:extLst>
               </a:tr>
@@ -7043,7 +7043,7 @@
                 </a:tc>
                 <a:extLst>
                   <a:ext uri="{0D108BD9-81ED-4DB2-BD59-A6C34878D82A}">
-                    <a16:rowId xmlns="" xmlns:a16="http://schemas.microsoft.com/office/drawing/2014/main" val="10004"/>
+                    <a16:rowId xmlns:a16="http://schemas.microsoft.com/office/drawing/2014/main" xmlns="" val="10004"/>
                   </a:ext>
                 </a:extLst>
               </a:tr>
@@ -7067,7 +7067,7 @@
                 </a:tc>
                 <a:extLst>
                   <a:ext uri="{0D108BD9-81ED-4DB2-BD59-A6C34878D82A}">
-                    <a16:rowId xmlns="" xmlns:a16="http://schemas.microsoft.com/office/drawing/2014/main" val="10005"/>
+                    <a16:rowId xmlns:a16="http://schemas.microsoft.com/office/drawing/2014/main" xmlns="" val="10005"/>
                   </a:ext>
                 </a:extLst>
               </a:tr>
@@ -14667,7 +14667,7 @@
           <p:cNvPr id="5" name="그림 4">
             <a:extLst>
               <a:ext uri="{FF2B5EF4-FFF2-40B4-BE49-F238E27FC236}">
-                <a16:creationId xmlns:a16="http://schemas.microsoft.com/office/drawing/2014/main" xmlns="" id="{F25A3B3A-32C8-4401-A476-E8CCEB3258D5}"/>
+                <a16:creationId xmlns="" xmlns:a16="http://schemas.microsoft.com/office/drawing/2014/main" id="{F25A3B3A-32C8-4401-A476-E8CCEB3258D5}"/>
               </a:ext>
             </a:extLst>
           </p:cNvPr>
@@ -14710,7 +14710,7 @@
           <p:cNvPr id="6" name="Picture 4">
             <a:extLst>
               <a:ext uri="{FF2B5EF4-FFF2-40B4-BE49-F238E27FC236}">
-                <a16:creationId xmlns:a16="http://schemas.microsoft.com/office/drawing/2014/main" xmlns="" id="{051FB3A4-C7F9-45D0-A73B-557A6E1C4FDF}"/>
+                <a16:creationId xmlns="" xmlns:a16="http://schemas.microsoft.com/office/drawing/2014/main" id="{051FB3A4-C7F9-45D0-A73B-557A6E1C4FDF}"/>
               </a:ext>
             </a:extLst>
           </p:cNvPr>
@@ -19737,10 +19737,10 @@
         </p:nvGrpSpPr>
         <p:grpSpPr>
           <a:xfrm>
-            <a:off x="3974094" y="1254052"/>
-            <a:ext cx="5738411" cy="1200329"/>
+            <a:off x="111556" y="3616255"/>
+            <a:ext cx="4710817" cy="1200329"/>
             <a:chOff x="3974094" y="1195996"/>
-            <a:chExt cx="5738411" cy="1200329"/>
+            <a:chExt cx="5738410" cy="1200329"/>
           </a:xfrm>
         </p:grpSpPr>
         <p:sp>
@@ -19748,7 +19748,7 @@
             <p:cNvPr id="97" name="타원 96">
               <a:extLst>
                 <a:ext uri="{FF2B5EF4-FFF2-40B4-BE49-F238E27FC236}">
-                  <a16:creationId xmlns="" xmlns:a16="http://schemas.microsoft.com/office/drawing/2014/main" id="{2A6A11AC-31D1-C238-469B-B8065561C8B3}"/>
+                  <a16:creationId xmlns:a16="http://schemas.microsoft.com/office/drawing/2014/main" xmlns="" id="{2A6A11AC-31D1-C238-469B-B8065561C8B3}"/>
                 </a:ext>
               </a:extLst>
             </p:cNvPr>
@@ -19819,7 +19819,7 @@
             <p:cNvPr id="98" name="TextBox 97">
               <a:extLst>
                 <a:ext uri="{FF2B5EF4-FFF2-40B4-BE49-F238E27FC236}">
-                  <a16:creationId xmlns="" xmlns:a16="http://schemas.microsoft.com/office/drawing/2014/main" id="{370FDDD1-392F-C3F6-7926-8F5450602B51}"/>
+                  <a16:creationId xmlns:a16="http://schemas.microsoft.com/office/drawing/2014/main" xmlns="" id="{370FDDD1-392F-C3F6-7926-8F5450602B51}"/>
                 </a:ext>
               </a:extLst>
             </p:cNvPr>
@@ -19828,7 +19828,7 @@
           </p:nvSpPr>
           <p:spPr>
             <a:xfrm>
-              <a:off x="4118111" y="1195996"/>
+              <a:off x="4118110" y="1195996"/>
               <a:ext cx="5594394" cy="1200329"/>
             </a:xfrm>
             <a:prstGeom prst="rect">
@@ -19979,8 +19979,8 @@
         </p:nvGrpSpPr>
         <p:grpSpPr>
           <a:xfrm>
-            <a:off x="3926949" y="2735031"/>
-            <a:ext cx="5793314" cy="738664"/>
+            <a:off x="119744" y="5097233"/>
+            <a:ext cx="4755888" cy="738664"/>
             <a:chOff x="3926949" y="2618919"/>
             <a:chExt cx="5793314" cy="738664"/>
           </a:xfrm>
@@ -19990,7 +19990,7 @@
             <p:cNvPr id="99" name="타원 98">
               <a:extLst>
                 <a:ext uri="{FF2B5EF4-FFF2-40B4-BE49-F238E27FC236}">
-                  <a16:creationId xmlns="" xmlns:a16="http://schemas.microsoft.com/office/drawing/2014/main" id="{8A596585-4EFC-7C6C-63D0-E577FBF1E255}"/>
+                  <a16:creationId xmlns:a16="http://schemas.microsoft.com/office/drawing/2014/main" xmlns="" id="{8A596585-4EFC-7C6C-63D0-E577FBF1E255}"/>
                 </a:ext>
               </a:extLst>
             </p:cNvPr>
@@ -20075,7 +20075,7 @@
             <p:cNvPr id="100" name="TextBox 99">
               <a:extLst>
                 <a:ext uri="{FF2B5EF4-FFF2-40B4-BE49-F238E27FC236}">
-                  <a16:creationId xmlns="" xmlns:a16="http://schemas.microsoft.com/office/drawing/2014/main" id="{A2DBD73D-1544-9997-4B5E-7BE89DA70BD5}"/>
+                  <a16:creationId xmlns:a16="http://schemas.microsoft.com/office/drawing/2014/main" xmlns="" id="{A2DBD73D-1544-9997-4B5E-7BE89DA70BD5}"/>
                 </a:ext>
               </a:extLst>
             </p:cNvPr>
@@ -20180,8 +20180,8 @@
         </p:nvGrpSpPr>
         <p:grpSpPr>
           <a:xfrm>
-            <a:off x="3926949" y="3468892"/>
-            <a:ext cx="5793314" cy="1431161"/>
+            <a:off x="4974772" y="4448608"/>
+            <a:ext cx="4755888" cy="1431161"/>
             <a:chOff x="3926949" y="3338266"/>
             <a:chExt cx="5793314" cy="1431161"/>
           </a:xfrm>
@@ -20191,7 +20191,7 @@
             <p:cNvPr id="101" name="타원 100">
               <a:extLst>
                 <a:ext uri="{FF2B5EF4-FFF2-40B4-BE49-F238E27FC236}">
-                  <a16:creationId xmlns="" xmlns:a16="http://schemas.microsoft.com/office/drawing/2014/main" id="{D7536991-A61A-F58E-EC18-61A6F108717B}"/>
+                  <a16:creationId xmlns:a16="http://schemas.microsoft.com/office/drawing/2014/main" xmlns="" id="{D7536991-A61A-F58E-EC18-61A6F108717B}"/>
                 </a:ext>
               </a:extLst>
             </p:cNvPr>
@@ -20276,7 +20276,7 @@
             <p:cNvPr id="102" name="TextBox 101">
               <a:extLst>
                 <a:ext uri="{FF2B5EF4-FFF2-40B4-BE49-F238E27FC236}">
-                  <a16:creationId xmlns="" xmlns:a16="http://schemas.microsoft.com/office/drawing/2014/main" id="{688289CD-94AD-1B72-1500-6EAFBCF42BA0}"/>
+                  <a16:creationId xmlns:a16="http://schemas.microsoft.com/office/drawing/2014/main" xmlns="" id="{688289CD-94AD-1B72-1500-6EAFBCF42BA0}"/>
                 </a:ext>
               </a:extLst>
             </p:cNvPr>
@@ -20528,8 +20528,8 @@
         </p:nvGrpSpPr>
         <p:grpSpPr>
           <a:xfrm>
-            <a:off x="3926949" y="2249296"/>
-            <a:ext cx="5793314" cy="507831"/>
+            <a:off x="4963886" y="3903926"/>
+            <a:ext cx="4755888" cy="507831"/>
             <a:chOff x="3926949" y="2162212"/>
             <a:chExt cx="5793314" cy="507831"/>
           </a:xfrm>
@@ -20539,7 +20539,7 @@
             <p:cNvPr id="103" name="타원 102">
               <a:extLst>
                 <a:ext uri="{FF2B5EF4-FFF2-40B4-BE49-F238E27FC236}">
-                  <a16:creationId xmlns="" xmlns:a16="http://schemas.microsoft.com/office/drawing/2014/main" id="{F74DE22F-BE57-990F-10C7-5A28137FF97D}"/>
+                  <a16:creationId xmlns:a16="http://schemas.microsoft.com/office/drawing/2014/main" xmlns="" id="{F74DE22F-BE57-990F-10C7-5A28137FF97D}"/>
                 </a:ext>
               </a:extLst>
             </p:cNvPr>
@@ -20624,7 +20624,7 @@
             <p:cNvPr id="104" name="TextBox 103">
               <a:extLst>
                 <a:ext uri="{FF2B5EF4-FFF2-40B4-BE49-F238E27FC236}">
-                  <a16:creationId xmlns="" xmlns:a16="http://schemas.microsoft.com/office/drawing/2014/main" id="{2709A4DE-7D99-060B-4332-72EAE25DA559}"/>
+                  <a16:creationId xmlns:a16="http://schemas.microsoft.com/office/drawing/2014/main" xmlns="" id="{2709A4DE-7D99-060B-4332-72EAE25DA559}"/>
                 </a:ext>
               </a:extLst>
             </p:cNvPr>
@@ -20716,7 +20716,7 @@
         </p:nvSpPr>
         <p:spPr>
           <a:xfrm>
-            <a:off x="203481" y="5091724"/>
+            <a:off x="214367" y="6147642"/>
             <a:ext cx="4532642" cy="910772"/>
           </a:xfrm>
           <a:prstGeom prst="rect">
@@ -20967,8 +20967,8 @@
         </p:blipFill>
         <p:spPr>
           <a:xfrm>
-            <a:off x="123600" y="1645763"/>
-            <a:ext cx="3896857" cy="2525976"/>
+            <a:off x="2946874" y="1376132"/>
+            <a:ext cx="3421269" cy="2217696"/>
           </a:xfrm>
           <a:prstGeom prst="rect">
             <a:avLst/>
@@ -20983,7 +20983,7 @@
         </p:nvSpPr>
         <p:spPr>
           <a:xfrm>
-            <a:off x="4963049" y="5103445"/>
+            <a:off x="4973935" y="6159363"/>
             <a:ext cx="4567813" cy="1221153"/>
           </a:xfrm>
           <a:prstGeom prst="rect">
@@ -21126,8 +21126,8 @@
         </p:nvCxnSpPr>
         <p:spPr>
           <a:xfrm>
-            <a:off x="4859338" y="5181599"/>
-            <a:ext cx="0" cy="3204000"/>
+            <a:off x="4859338" y="6281057"/>
+            <a:ext cx="0" cy="2520000"/>
           </a:xfrm>
           <a:prstGeom prst="line">
             <a:avLst/>
@@ -21162,7 +21162,7 @@
           <p:nvPr/>
         </p:nvPicPr>
         <p:blipFill>
-          <a:blip r:embed="rId3">
+          <a:blip r:embed="rId3" cstate="print">
             <a:extLst>
               <a:ext uri="{28A0092B-C50C-407E-A947-70E740481C1C}">
                 <a14:useLocalDpi xmlns:a14="http://schemas.microsoft.com/office/drawing/2010/main" val="0"/>
@@ -21175,8 +21175,8 @@
         </p:blipFill>
         <p:spPr>
           <a:xfrm>
-            <a:off x="4908634" y="6337300"/>
-            <a:ext cx="4680000" cy="2170701"/>
+            <a:off x="5462126" y="7298586"/>
+            <a:ext cx="3549878" cy="1646522"/>
           </a:xfrm>
           <a:prstGeom prst="rect">
             <a:avLst/>
@@ -21192,7 +21192,7 @@
           <p:nvPr/>
         </p:nvPicPr>
         <p:blipFill>
-          <a:blip r:embed="rId4">
+          <a:blip r:embed="rId4" cstate="print">
             <a:extLst>
               <a:ext uri="{28A0092B-C50C-407E-A947-70E740481C1C}">
                 <a14:useLocalDpi xmlns:a14="http://schemas.microsoft.com/office/drawing/2010/main" val="0"/>
@@ -21205,8 +21205,8 @@
         </p:blipFill>
         <p:spPr>
           <a:xfrm>
-            <a:off x="134920" y="6197600"/>
-            <a:ext cx="4608000" cy="2281010"/>
+            <a:off x="681906" y="7175554"/>
+            <a:ext cx="3495266" cy="1730195"/>
           </a:xfrm>
           <a:prstGeom prst="rect">
             <a:avLst/>

--- a/99ref/blog.pptx
+++ b/99ref/blog.pptx
@@ -11,6 +11,9 @@
     <p:sldId id="262" r:id="rId5"/>
     <p:sldId id="259" r:id="rId6"/>
     <p:sldId id="260" r:id="rId7"/>
+    <p:sldId id="263" r:id="rId8"/>
+    <p:sldId id="264" r:id="rId9"/>
+    <p:sldId id="265" r:id="rId10"/>
   </p:sldIdLst>
   <p:sldSz cx="9720263" cy="8999538"/>
   <p:notesSz cx="6858000" cy="9144000"/>
@@ -259,7 +262,7 @@
           <a:p>
             <a:fld id="{7BB46140-E90A-48B1-9E02-0E867CD1ADA8}" type="datetimeFigureOut">
               <a:rPr lang="ko-KR" altLang="en-US" smtClean="0"/>
-              <a:t>2026-04-21</a:t>
+              <a:t>2026-04-22</a:t>
             </a:fld>
             <a:endParaRPr lang="ko-KR" altLang="en-US"/>
           </a:p>
@@ -429,7 +432,7 @@
           <a:p>
             <a:fld id="{7BB46140-E90A-48B1-9E02-0E867CD1ADA8}" type="datetimeFigureOut">
               <a:rPr lang="ko-KR" altLang="en-US" smtClean="0"/>
-              <a:t>2026-04-21</a:t>
+              <a:t>2026-04-22</a:t>
             </a:fld>
             <a:endParaRPr lang="ko-KR" altLang="en-US"/>
           </a:p>
@@ -609,7 +612,7 @@
           <a:p>
             <a:fld id="{7BB46140-E90A-48B1-9E02-0E867CD1ADA8}" type="datetimeFigureOut">
               <a:rPr lang="ko-KR" altLang="en-US" smtClean="0"/>
-              <a:t>2026-04-21</a:t>
+              <a:t>2026-04-22</a:t>
             </a:fld>
             <a:endParaRPr lang="ko-KR" altLang="en-US"/>
           </a:p>
@@ -779,7 +782,7 @@
           <a:p>
             <a:fld id="{7BB46140-E90A-48B1-9E02-0E867CD1ADA8}" type="datetimeFigureOut">
               <a:rPr lang="ko-KR" altLang="en-US" smtClean="0"/>
-              <a:t>2026-04-21</a:t>
+              <a:t>2026-04-22</a:t>
             </a:fld>
             <a:endParaRPr lang="ko-KR" altLang="en-US"/>
           </a:p>
@@ -1023,7 +1026,7 @@
           <a:p>
             <a:fld id="{7BB46140-E90A-48B1-9E02-0E867CD1ADA8}" type="datetimeFigureOut">
               <a:rPr lang="ko-KR" altLang="en-US" smtClean="0"/>
-              <a:t>2026-04-21</a:t>
+              <a:t>2026-04-22</a:t>
             </a:fld>
             <a:endParaRPr lang="ko-KR" altLang="en-US"/>
           </a:p>
@@ -1255,7 +1258,7 @@
           <a:p>
             <a:fld id="{7BB46140-E90A-48B1-9E02-0E867CD1ADA8}" type="datetimeFigureOut">
               <a:rPr lang="ko-KR" altLang="en-US" smtClean="0"/>
-              <a:t>2026-04-21</a:t>
+              <a:t>2026-04-22</a:t>
             </a:fld>
             <a:endParaRPr lang="ko-KR" altLang="en-US"/>
           </a:p>
@@ -1622,7 +1625,7 @@
           <a:p>
             <a:fld id="{7BB46140-E90A-48B1-9E02-0E867CD1ADA8}" type="datetimeFigureOut">
               <a:rPr lang="ko-KR" altLang="en-US" smtClean="0"/>
-              <a:t>2026-04-21</a:t>
+              <a:t>2026-04-22</a:t>
             </a:fld>
             <a:endParaRPr lang="ko-KR" altLang="en-US"/>
           </a:p>
@@ -1740,7 +1743,7 @@
           <a:p>
             <a:fld id="{7BB46140-E90A-48B1-9E02-0E867CD1ADA8}" type="datetimeFigureOut">
               <a:rPr lang="ko-KR" altLang="en-US" smtClean="0"/>
-              <a:t>2026-04-21</a:t>
+              <a:t>2026-04-22</a:t>
             </a:fld>
             <a:endParaRPr lang="ko-KR" altLang="en-US"/>
           </a:p>
@@ -1835,7 +1838,7 @@
           <a:p>
             <a:fld id="{7BB46140-E90A-48B1-9E02-0E867CD1ADA8}" type="datetimeFigureOut">
               <a:rPr lang="ko-KR" altLang="en-US" smtClean="0"/>
-              <a:t>2026-04-21</a:t>
+              <a:t>2026-04-22</a:t>
             </a:fld>
             <a:endParaRPr lang="ko-KR" altLang="en-US"/>
           </a:p>
@@ -2112,7 +2115,7 @@
           <a:p>
             <a:fld id="{7BB46140-E90A-48B1-9E02-0E867CD1ADA8}" type="datetimeFigureOut">
               <a:rPr lang="ko-KR" altLang="en-US" smtClean="0"/>
-              <a:t>2026-04-21</a:t>
+              <a:t>2026-04-22</a:t>
             </a:fld>
             <a:endParaRPr lang="ko-KR" altLang="en-US"/>
           </a:p>
@@ -2369,7 +2372,7 @@
           <a:p>
             <a:fld id="{7BB46140-E90A-48B1-9E02-0E867CD1ADA8}" type="datetimeFigureOut">
               <a:rPr lang="ko-KR" altLang="en-US" smtClean="0"/>
-              <a:t>2026-04-21</a:t>
+              <a:t>2026-04-22</a:t>
             </a:fld>
             <a:endParaRPr lang="ko-KR" altLang="en-US"/>
           </a:p>
@@ -2582,7 +2585,7 @@
           <a:p>
             <a:fld id="{7BB46140-E90A-48B1-9E02-0E867CD1ADA8}" type="datetimeFigureOut">
               <a:rPr lang="ko-KR" altLang="en-US" smtClean="0"/>
-              <a:t>2026-04-21</a:t>
+              <a:t>2026-04-22</a:t>
             </a:fld>
             <a:endParaRPr lang="ko-KR" altLang="en-US"/>
           </a:p>
@@ -6338,7 +6341,7 @@
                 <a:gridCol w="200863">
                   <a:extLst>
                     <a:ext uri="{9D8B030D-6E8A-4147-A177-3AD203B41FA5}">
-                      <a16:colId xmlns:a16="http://schemas.microsoft.com/office/drawing/2014/main" xmlns="" val="20000"/>
+                      <a16:colId xmlns="" xmlns:a16="http://schemas.microsoft.com/office/drawing/2014/main" val="20000"/>
                     </a:ext>
                   </a:extLst>
                 </a:gridCol>
@@ -6363,7 +6366,7 @@
                 </a:tc>
                 <a:extLst>
                   <a:ext uri="{0D108BD9-81ED-4DB2-BD59-A6C34878D82A}">
-                    <a16:rowId xmlns:a16="http://schemas.microsoft.com/office/drawing/2014/main" xmlns="" val="10001"/>
+                    <a16:rowId xmlns="" xmlns:a16="http://schemas.microsoft.com/office/drawing/2014/main" val="10001"/>
                   </a:ext>
                 </a:extLst>
               </a:tr>
@@ -6387,7 +6390,7 @@
                 </a:tc>
                 <a:extLst>
                   <a:ext uri="{0D108BD9-81ED-4DB2-BD59-A6C34878D82A}">
-                    <a16:rowId xmlns:a16="http://schemas.microsoft.com/office/drawing/2014/main" xmlns="" val="10002"/>
+                    <a16:rowId xmlns="" xmlns:a16="http://schemas.microsoft.com/office/drawing/2014/main" val="10002"/>
                   </a:ext>
                 </a:extLst>
               </a:tr>
@@ -6411,7 +6414,7 @@
                 </a:tc>
                 <a:extLst>
                   <a:ext uri="{0D108BD9-81ED-4DB2-BD59-A6C34878D82A}">
-                    <a16:rowId xmlns:a16="http://schemas.microsoft.com/office/drawing/2014/main" xmlns="" val="10003"/>
+                    <a16:rowId xmlns="" xmlns:a16="http://schemas.microsoft.com/office/drawing/2014/main" val="10003"/>
                   </a:ext>
                 </a:extLst>
               </a:tr>
@@ -6435,7 +6438,7 @@
                 </a:tc>
                 <a:extLst>
                   <a:ext uri="{0D108BD9-81ED-4DB2-BD59-A6C34878D82A}">
-                    <a16:rowId xmlns:a16="http://schemas.microsoft.com/office/drawing/2014/main" xmlns="" val="10004"/>
+                    <a16:rowId xmlns="" xmlns:a16="http://schemas.microsoft.com/office/drawing/2014/main" val="10004"/>
                   </a:ext>
                 </a:extLst>
               </a:tr>
@@ -6459,7 +6462,7 @@
                 </a:tc>
                 <a:extLst>
                   <a:ext uri="{0D108BD9-81ED-4DB2-BD59-A6C34878D82A}">
-                    <a16:rowId xmlns:a16="http://schemas.microsoft.com/office/drawing/2014/main" xmlns="" val="10005"/>
+                    <a16:rowId xmlns="" xmlns:a16="http://schemas.microsoft.com/office/drawing/2014/main" val="10005"/>
                   </a:ext>
                 </a:extLst>
               </a:tr>
@@ -6495,7 +6498,7 @@
                 <a:gridCol w="200863">
                   <a:extLst>
                     <a:ext uri="{9D8B030D-6E8A-4147-A177-3AD203B41FA5}">
-                      <a16:colId xmlns:a16="http://schemas.microsoft.com/office/drawing/2014/main" xmlns="" val="20000"/>
+                      <a16:colId xmlns="" xmlns:a16="http://schemas.microsoft.com/office/drawing/2014/main" val="20000"/>
                     </a:ext>
                   </a:extLst>
                 </a:gridCol>
@@ -6517,7 +6520,7 @@
                 </a:tc>
                 <a:extLst>
                   <a:ext uri="{0D108BD9-81ED-4DB2-BD59-A6C34878D82A}">
-                    <a16:rowId xmlns:a16="http://schemas.microsoft.com/office/drawing/2014/main" xmlns="" val="10001"/>
+                    <a16:rowId xmlns="" xmlns:a16="http://schemas.microsoft.com/office/drawing/2014/main" val="10001"/>
                   </a:ext>
                 </a:extLst>
               </a:tr>
@@ -6538,7 +6541,7 @@
                 </a:tc>
                 <a:extLst>
                   <a:ext uri="{0D108BD9-81ED-4DB2-BD59-A6C34878D82A}">
-                    <a16:rowId xmlns:a16="http://schemas.microsoft.com/office/drawing/2014/main" xmlns="" val="10002"/>
+                    <a16:rowId xmlns="" xmlns:a16="http://schemas.microsoft.com/office/drawing/2014/main" val="10002"/>
                   </a:ext>
                 </a:extLst>
               </a:tr>
@@ -6559,7 +6562,7 @@
                 </a:tc>
                 <a:extLst>
                   <a:ext uri="{0D108BD9-81ED-4DB2-BD59-A6C34878D82A}">
-                    <a16:rowId xmlns:a16="http://schemas.microsoft.com/office/drawing/2014/main" xmlns="" val="10003"/>
+                    <a16:rowId xmlns="" xmlns:a16="http://schemas.microsoft.com/office/drawing/2014/main" val="10003"/>
                   </a:ext>
                 </a:extLst>
               </a:tr>
@@ -6580,7 +6583,7 @@
                 </a:tc>
                 <a:extLst>
                   <a:ext uri="{0D108BD9-81ED-4DB2-BD59-A6C34878D82A}">
-                    <a16:rowId xmlns:a16="http://schemas.microsoft.com/office/drawing/2014/main" xmlns="" val="10004"/>
+                    <a16:rowId xmlns="" xmlns:a16="http://schemas.microsoft.com/office/drawing/2014/main" val="10004"/>
                   </a:ext>
                 </a:extLst>
               </a:tr>
@@ -6601,7 +6604,7 @@
                 </a:tc>
                 <a:extLst>
                   <a:ext uri="{0D108BD9-81ED-4DB2-BD59-A6C34878D82A}">
-                    <a16:rowId xmlns:a16="http://schemas.microsoft.com/office/drawing/2014/main" xmlns="" val="10005"/>
+                    <a16:rowId xmlns="" xmlns:a16="http://schemas.microsoft.com/office/drawing/2014/main" val="10005"/>
                   </a:ext>
                 </a:extLst>
               </a:tr>
@@ -6637,7 +6640,7 @@
                 <a:gridCol w="200863">
                   <a:extLst>
                     <a:ext uri="{9D8B030D-6E8A-4147-A177-3AD203B41FA5}">
-                      <a16:colId xmlns:a16="http://schemas.microsoft.com/office/drawing/2014/main" xmlns="" val="20000"/>
+                      <a16:colId xmlns="" xmlns:a16="http://schemas.microsoft.com/office/drawing/2014/main" val="20000"/>
                     </a:ext>
                   </a:extLst>
                 </a:gridCol>
@@ -6661,7 +6664,7 @@
                 </a:tc>
                 <a:extLst>
                   <a:ext uri="{0D108BD9-81ED-4DB2-BD59-A6C34878D82A}">
-                    <a16:rowId xmlns:a16="http://schemas.microsoft.com/office/drawing/2014/main" xmlns="" val="10001"/>
+                    <a16:rowId xmlns="" xmlns:a16="http://schemas.microsoft.com/office/drawing/2014/main" val="10001"/>
                   </a:ext>
                 </a:extLst>
               </a:tr>
@@ -6684,7 +6687,7 @@
                 </a:tc>
                 <a:extLst>
                   <a:ext uri="{0D108BD9-81ED-4DB2-BD59-A6C34878D82A}">
-                    <a16:rowId xmlns:a16="http://schemas.microsoft.com/office/drawing/2014/main" xmlns="" val="10002"/>
+                    <a16:rowId xmlns="" xmlns:a16="http://schemas.microsoft.com/office/drawing/2014/main" val="10002"/>
                   </a:ext>
                 </a:extLst>
               </a:tr>
@@ -6707,7 +6710,7 @@
                 </a:tc>
                 <a:extLst>
                   <a:ext uri="{0D108BD9-81ED-4DB2-BD59-A6C34878D82A}">
-                    <a16:rowId xmlns:a16="http://schemas.microsoft.com/office/drawing/2014/main" xmlns="" val="10003"/>
+                    <a16:rowId xmlns="" xmlns:a16="http://schemas.microsoft.com/office/drawing/2014/main" val="10003"/>
                   </a:ext>
                 </a:extLst>
               </a:tr>
@@ -6730,7 +6733,7 @@
                 </a:tc>
                 <a:extLst>
                   <a:ext uri="{0D108BD9-81ED-4DB2-BD59-A6C34878D82A}">
-                    <a16:rowId xmlns:a16="http://schemas.microsoft.com/office/drawing/2014/main" xmlns="" val="10004"/>
+                    <a16:rowId xmlns="" xmlns:a16="http://schemas.microsoft.com/office/drawing/2014/main" val="10004"/>
                   </a:ext>
                 </a:extLst>
               </a:tr>
@@ -6753,7 +6756,7 @@
                 </a:tc>
                 <a:extLst>
                   <a:ext uri="{0D108BD9-81ED-4DB2-BD59-A6C34878D82A}">
-                    <a16:rowId xmlns:a16="http://schemas.microsoft.com/office/drawing/2014/main" xmlns="" val="10005"/>
+                    <a16:rowId xmlns="" xmlns:a16="http://schemas.microsoft.com/office/drawing/2014/main" val="10005"/>
                   </a:ext>
                 </a:extLst>
               </a:tr>
@@ -6789,7 +6792,7 @@
                 <a:gridCol w="200863">
                   <a:extLst>
                     <a:ext uri="{9D8B030D-6E8A-4147-A177-3AD203B41FA5}">
-                      <a16:colId xmlns:a16="http://schemas.microsoft.com/office/drawing/2014/main" xmlns="" val="20000"/>
+                      <a16:colId xmlns="" xmlns:a16="http://schemas.microsoft.com/office/drawing/2014/main" val="20000"/>
                     </a:ext>
                   </a:extLst>
                 </a:gridCol>
@@ -6814,7 +6817,7 @@
                 </a:tc>
                 <a:extLst>
                   <a:ext uri="{0D108BD9-81ED-4DB2-BD59-A6C34878D82A}">
-                    <a16:rowId xmlns:a16="http://schemas.microsoft.com/office/drawing/2014/main" xmlns="" val="10001"/>
+                    <a16:rowId xmlns="" xmlns:a16="http://schemas.microsoft.com/office/drawing/2014/main" val="10001"/>
                   </a:ext>
                 </a:extLst>
               </a:tr>
@@ -6838,7 +6841,7 @@
                 </a:tc>
                 <a:extLst>
                   <a:ext uri="{0D108BD9-81ED-4DB2-BD59-A6C34878D82A}">
-                    <a16:rowId xmlns:a16="http://schemas.microsoft.com/office/drawing/2014/main" xmlns="" val="10002"/>
+                    <a16:rowId xmlns="" xmlns:a16="http://schemas.microsoft.com/office/drawing/2014/main" val="10002"/>
                   </a:ext>
                 </a:extLst>
               </a:tr>
@@ -6862,7 +6865,7 @@
                 </a:tc>
                 <a:extLst>
                   <a:ext uri="{0D108BD9-81ED-4DB2-BD59-A6C34878D82A}">
-                    <a16:rowId xmlns:a16="http://schemas.microsoft.com/office/drawing/2014/main" xmlns="" val="10003"/>
+                    <a16:rowId xmlns="" xmlns:a16="http://schemas.microsoft.com/office/drawing/2014/main" val="10003"/>
                   </a:ext>
                 </a:extLst>
               </a:tr>
@@ -6886,7 +6889,7 @@
                 </a:tc>
                 <a:extLst>
                   <a:ext uri="{0D108BD9-81ED-4DB2-BD59-A6C34878D82A}">
-                    <a16:rowId xmlns:a16="http://schemas.microsoft.com/office/drawing/2014/main" xmlns="" val="10004"/>
+                    <a16:rowId xmlns="" xmlns:a16="http://schemas.microsoft.com/office/drawing/2014/main" val="10004"/>
                   </a:ext>
                 </a:extLst>
               </a:tr>
@@ -6910,7 +6913,7 @@
                 </a:tc>
                 <a:extLst>
                   <a:ext uri="{0D108BD9-81ED-4DB2-BD59-A6C34878D82A}">
-                    <a16:rowId xmlns:a16="http://schemas.microsoft.com/office/drawing/2014/main" xmlns="" val="10005"/>
+                    <a16:rowId xmlns="" xmlns:a16="http://schemas.microsoft.com/office/drawing/2014/main" val="10005"/>
                   </a:ext>
                 </a:extLst>
               </a:tr>
@@ -6946,7 +6949,7 @@
                 <a:gridCol w="199782">
                   <a:extLst>
                     <a:ext uri="{9D8B030D-6E8A-4147-A177-3AD203B41FA5}">
-                      <a16:colId xmlns:a16="http://schemas.microsoft.com/office/drawing/2014/main" xmlns="" val="20000"/>
+                      <a16:colId xmlns="" xmlns:a16="http://schemas.microsoft.com/office/drawing/2014/main" val="20000"/>
                     </a:ext>
                   </a:extLst>
                 </a:gridCol>
@@ -6971,7 +6974,7 @@
                 </a:tc>
                 <a:extLst>
                   <a:ext uri="{0D108BD9-81ED-4DB2-BD59-A6C34878D82A}">
-                    <a16:rowId xmlns:a16="http://schemas.microsoft.com/office/drawing/2014/main" xmlns="" val="10001"/>
+                    <a16:rowId xmlns="" xmlns:a16="http://schemas.microsoft.com/office/drawing/2014/main" val="10001"/>
                   </a:ext>
                 </a:extLst>
               </a:tr>
@@ -6995,7 +6998,7 @@
                 </a:tc>
                 <a:extLst>
                   <a:ext uri="{0D108BD9-81ED-4DB2-BD59-A6C34878D82A}">
-                    <a16:rowId xmlns:a16="http://schemas.microsoft.com/office/drawing/2014/main" xmlns="" val="10002"/>
+                    <a16:rowId xmlns="" xmlns:a16="http://schemas.microsoft.com/office/drawing/2014/main" val="10002"/>
                   </a:ext>
                 </a:extLst>
               </a:tr>
@@ -7019,7 +7022,7 @@
                 </a:tc>
                 <a:extLst>
                   <a:ext uri="{0D108BD9-81ED-4DB2-BD59-A6C34878D82A}">
-                    <a16:rowId xmlns:a16="http://schemas.microsoft.com/office/drawing/2014/main" xmlns="" val="10003"/>
+                    <a16:rowId xmlns="" xmlns:a16="http://schemas.microsoft.com/office/drawing/2014/main" val="10003"/>
                   </a:ext>
                 </a:extLst>
               </a:tr>
@@ -7043,7 +7046,7 @@
                 </a:tc>
                 <a:extLst>
                   <a:ext uri="{0D108BD9-81ED-4DB2-BD59-A6C34878D82A}">
-                    <a16:rowId xmlns:a16="http://schemas.microsoft.com/office/drawing/2014/main" xmlns="" val="10004"/>
+                    <a16:rowId xmlns="" xmlns:a16="http://schemas.microsoft.com/office/drawing/2014/main" val="10004"/>
                   </a:ext>
                 </a:extLst>
               </a:tr>
@@ -7067,7 +7070,7 @@
                 </a:tc>
                 <a:extLst>
                   <a:ext uri="{0D108BD9-81ED-4DB2-BD59-A6C34878D82A}">
-                    <a16:rowId xmlns:a16="http://schemas.microsoft.com/office/drawing/2014/main" xmlns="" val="10005"/>
+                    <a16:rowId xmlns="" xmlns:a16="http://schemas.microsoft.com/office/drawing/2014/main" val="10005"/>
                   </a:ext>
                 </a:extLst>
               </a:tr>
@@ -14667,7 +14670,7 @@
           <p:cNvPr id="5" name="그림 4">
             <a:extLst>
               <a:ext uri="{FF2B5EF4-FFF2-40B4-BE49-F238E27FC236}">
-                <a16:creationId xmlns="" xmlns:a16="http://schemas.microsoft.com/office/drawing/2014/main" id="{F25A3B3A-32C8-4401-A476-E8CCEB3258D5}"/>
+                <a16:creationId xmlns:a16="http://schemas.microsoft.com/office/drawing/2014/main" xmlns="" id="{F25A3B3A-32C8-4401-A476-E8CCEB3258D5}"/>
               </a:ext>
             </a:extLst>
           </p:cNvPr>
@@ -14710,7 +14713,7 @@
           <p:cNvPr id="6" name="Picture 4">
             <a:extLst>
               <a:ext uri="{FF2B5EF4-FFF2-40B4-BE49-F238E27FC236}">
-                <a16:creationId xmlns="" xmlns:a16="http://schemas.microsoft.com/office/drawing/2014/main" id="{051FB3A4-C7F9-45D0-A73B-557A6E1C4FDF}"/>
+                <a16:creationId xmlns:a16="http://schemas.microsoft.com/office/drawing/2014/main" xmlns="" id="{051FB3A4-C7F9-45D0-A73B-557A6E1C4FDF}"/>
               </a:ext>
             </a:extLst>
           </p:cNvPr>
@@ -19624,13 +19627,13 @@
           <a:lstStyle/>
           <a:p>
             <a:r>
-              <a:rPr lang="en-US" altLang="ko-KR" sz="1400" b="1" dirty="0" smtClean="0">
+              <a:rPr lang="en-US" altLang="ko-KR" sz="1400" b="1" smtClean="0">
                 <a:solidFill>
                   <a:schemeClr val="tx1"/>
                 </a:solidFill>
                 <a:latin typeface="+mn-ea"/>
               </a:rPr>
-              <a:t>Kafka </a:t>
+              <a:t>Kafka / Spark </a:t>
             </a:r>
             <a:r>
               <a:rPr lang="ko-KR" altLang="en-US" sz="1400" b="1" dirty="0" smtClean="0">
@@ -19748,7 +19751,7 @@
             <p:cNvPr id="97" name="타원 96">
               <a:extLst>
                 <a:ext uri="{FF2B5EF4-FFF2-40B4-BE49-F238E27FC236}">
-                  <a16:creationId xmlns:a16="http://schemas.microsoft.com/office/drawing/2014/main" xmlns="" id="{2A6A11AC-31D1-C238-469B-B8065561C8B3}"/>
+                  <a16:creationId xmlns="" xmlns:a16="http://schemas.microsoft.com/office/drawing/2014/main" id="{2A6A11AC-31D1-C238-469B-B8065561C8B3}"/>
                 </a:ext>
               </a:extLst>
             </p:cNvPr>
@@ -19819,7 +19822,7 @@
             <p:cNvPr id="98" name="TextBox 97">
               <a:extLst>
                 <a:ext uri="{FF2B5EF4-FFF2-40B4-BE49-F238E27FC236}">
-                  <a16:creationId xmlns:a16="http://schemas.microsoft.com/office/drawing/2014/main" xmlns="" id="{370FDDD1-392F-C3F6-7926-8F5450602B51}"/>
+                  <a16:creationId xmlns="" xmlns:a16="http://schemas.microsoft.com/office/drawing/2014/main" id="{370FDDD1-392F-C3F6-7926-8F5450602B51}"/>
                 </a:ext>
               </a:extLst>
             </p:cNvPr>
@@ -19990,7 +19993,7 @@
             <p:cNvPr id="99" name="타원 98">
               <a:extLst>
                 <a:ext uri="{FF2B5EF4-FFF2-40B4-BE49-F238E27FC236}">
-                  <a16:creationId xmlns:a16="http://schemas.microsoft.com/office/drawing/2014/main" xmlns="" id="{8A596585-4EFC-7C6C-63D0-E577FBF1E255}"/>
+                  <a16:creationId xmlns="" xmlns:a16="http://schemas.microsoft.com/office/drawing/2014/main" id="{8A596585-4EFC-7C6C-63D0-E577FBF1E255}"/>
                 </a:ext>
               </a:extLst>
             </p:cNvPr>
@@ -20075,7 +20078,7 @@
             <p:cNvPr id="100" name="TextBox 99">
               <a:extLst>
                 <a:ext uri="{FF2B5EF4-FFF2-40B4-BE49-F238E27FC236}">
-                  <a16:creationId xmlns:a16="http://schemas.microsoft.com/office/drawing/2014/main" xmlns="" id="{A2DBD73D-1544-9997-4B5E-7BE89DA70BD5}"/>
+                  <a16:creationId xmlns="" xmlns:a16="http://schemas.microsoft.com/office/drawing/2014/main" id="{A2DBD73D-1544-9997-4B5E-7BE89DA70BD5}"/>
                 </a:ext>
               </a:extLst>
             </p:cNvPr>
@@ -20191,7 +20194,7 @@
             <p:cNvPr id="101" name="타원 100">
               <a:extLst>
                 <a:ext uri="{FF2B5EF4-FFF2-40B4-BE49-F238E27FC236}">
-                  <a16:creationId xmlns:a16="http://schemas.microsoft.com/office/drawing/2014/main" xmlns="" id="{D7536991-A61A-F58E-EC18-61A6F108717B}"/>
+                  <a16:creationId xmlns="" xmlns:a16="http://schemas.microsoft.com/office/drawing/2014/main" id="{D7536991-A61A-F58E-EC18-61A6F108717B}"/>
                 </a:ext>
               </a:extLst>
             </p:cNvPr>
@@ -20276,7 +20279,7 @@
             <p:cNvPr id="102" name="TextBox 101">
               <a:extLst>
                 <a:ext uri="{FF2B5EF4-FFF2-40B4-BE49-F238E27FC236}">
-                  <a16:creationId xmlns:a16="http://schemas.microsoft.com/office/drawing/2014/main" xmlns="" id="{688289CD-94AD-1B72-1500-6EAFBCF42BA0}"/>
+                  <a16:creationId xmlns="" xmlns:a16="http://schemas.microsoft.com/office/drawing/2014/main" id="{688289CD-94AD-1B72-1500-6EAFBCF42BA0}"/>
                 </a:ext>
               </a:extLst>
             </p:cNvPr>
@@ -20539,7 +20542,7 @@
             <p:cNvPr id="103" name="타원 102">
               <a:extLst>
                 <a:ext uri="{FF2B5EF4-FFF2-40B4-BE49-F238E27FC236}">
-                  <a16:creationId xmlns:a16="http://schemas.microsoft.com/office/drawing/2014/main" xmlns="" id="{F74DE22F-BE57-990F-10C7-5A28137FF97D}"/>
+                  <a16:creationId xmlns="" xmlns:a16="http://schemas.microsoft.com/office/drawing/2014/main" id="{F74DE22F-BE57-990F-10C7-5A28137FF97D}"/>
                 </a:ext>
               </a:extLst>
             </p:cNvPr>
@@ -20624,7 +20627,7 @@
             <p:cNvPr id="104" name="TextBox 103">
               <a:extLst>
                 <a:ext uri="{FF2B5EF4-FFF2-40B4-BE49-F238E27FC236}">
-                  <a16:creationId xmlns:a16="http://schemas.microsoft.com/office/drawing/2014/main" xmlns="" id="{2709A4DE-7D99-060B-4332-72EAE25DA559}"/>
+                  <a16:creationId xmlns="" xmlns:a16="http://schemas.microsoft.com/office/drawing/2014/main" id="{2709A4DE-7D99-060B-4332-72EAE25DA559}"/>
                 </a:ext>
               </a:extLst>
             </p:cNvPr>
@@ -21407,6 +21410,576 @@
     <p:extLst>
       <p:ext uri="{BB962C8B-B14F-4D97-AF65-F5344CB8AC3E}">
         <p14:creationId xmlns:p14="http://schemas.microsoft.com/office/powerpoint/2010/main" val="903049112"/>
+      </p:ext>
+    </p:extLst>
+  </p:cSld>
+  <p:clrMapOvr>
+    <a:masterClrMapping/>
+  </p:clrMapOvr>
+  <p:timing>
+    <p:tnLst>
+      <p:par>
+        <p:cTn id="1" dur="indefinite" restart="never" nodeType="tmRoot"/>
+      </p:par>
+    </p:tnLst>
+  </p:timing>
+</p:sld>
+</file>
+
+<file path=ppt/slides/slide7.xml><?xml version="1.0" encoding="utf-8"?>
+<p:sld xmlns:a="http://schemas.openxmlformats.org/drawingml/2006/main" xmlns:r="http://schemas.openxmlformats.org/officeDocument/2006/relationships" xmlns:p="http://schemas.openxmlformats.org/presentationml/2006/main">
+  <p:cSld>
+    <p:spTree>
+      <p:nvGrpSpPr>
+        <p:cNvPr id="1" name=""/>
+        <p:cNvGrpSpPr/>
+        <p:nvPr/>
+      </p:nvGrpSpPr>
+      <p:grpSpPr>
+        <a:xfrm>
+          <a:off x="0" y="0"/>
+          <a:ext cx="0" cy="0"/>
+          <a:chOff x="0" y="0"/>
+          <a:chExt cx="0" cy="0"/>
+        </a:xfrm>
+      </p:grpSpPr>
+      <p:sp>
+        <p:nvSpPr>
+          <p:cNvPr id="88" name="직사각형 87"/>
+          <p:cNvSpPr/>
+          <p:nvPr/>
+        </p:nvSpPr>
+        <p:spPr>
+          <a:xfrm>
+            <a:off x="152400" y="125187"/>
+            <a:ext cx="2667000" cy="312964"/>
+          </a:xfrm>
+          <a:prstGeom prst="rect">
+            <a:avLst/>
+          </a:prstGeom>
+          <a:noFill/>
+          <a:ln>
+            <a:noFill/>
+          </a:ln>
+        </p:spPr>
+        <p:style>
+          <a:lnRef idx="2">
+            <a:schemeClr val="accent1">
+              <a:shade val="50000"/>
+            </a:schemeClr>
+          </a:lnRef>
+          <a:fillRef idx="1">
+            <a:schemeClr val="accent1"/>
+          </a:fillRef>
+          <a:effectRef idx="0">
+            <a:schemeClr val="accent1"/>
+          </a:effectRef>
+          <a:fontRef idx="minor">
+            <a:schemeClr val="lt1"/>
+          </a:fontRef>
+        </p:style>
+        <p:txBody>
+          <a:bodyPr rtlCol="0" anchor="ctr"/>
+          <a:lstStyle/>
+          <a:p>
+            <a:r>
+              <a:rPr lang="en-US" altLang="ko-KR" sz="1600" b="1" dirty="0" smtClean="0">
+                <a:solidFill>
+                  <a:schemeClr val="accent1">
+                    <a:lumMod val="75000"/>
+                  </a:schemeClr>
+                </a:solidFill>
+                <a:latin typeface="+mn-ea"/>
+              </a:rPr>
+              <a:t>xxx</a:t>
+            </a:r>
+            <a:endParaRPr lang="ko-KR" altLang="en-US" sz="1600" b="1" dirty="0">
+              <a:solidFill>
+                <a:schemeClr val="accent1">
+                  <a:lumMod val="75000"/>
+                </a:schemeClr>
+              </a:solidFill>
+              <a:latin typeface="+mn-ea"/>
+            </a:endParaRPr>
+          </a:p>
+        </p:txBody>
+      </p:sp>
+      <p:sp>
+        <p:nvSpPr>
+          <p:cNvPr id="89" name="직사각형 88"/>
+          <p:cNvSpPr/>
+          <p:nvPr/>
+        </p:nvSpPr>
+        <p:spPr>
+          <a:xfrm>
+            <a:off x="301171" y="422730"/>
+            <a:ext cx="9312729" cy="357414"/>
+          </a:xfrm>
+          <a:prstGeom prst="rect">
+            <a:avLst/>
+          </a:prstGeom>
+          <a:noFill/>
+          <a:ln>
+            <a:noFill/>
+          </a:ln>
+        </p:spPr>
+        <p:style>
+          <a:lnRef idx="2">
+            <a:schemeClr val="accent1">
+              <a:shade val="50000"/>
+            </a:schemeClr>
+          </a:lnRef>
+          <a:fillRef idx="1">
+            <a:schemeClr val="accent1"/>
+          </a:fillRef>
+          <a:effectRef idx="0">
+            <a:schemeClr val="accent1"/>
+          </a:effectRef>
+          <a:fontRef idx="minor">
+            <a:schemeClr val="lt1"/>
+          </a:fontRef>
+        </p:style>
+        <p:txBody>
+          <a:bodyPr rtlCol="0" anchor="ctr"/>
+          <a:lstStyle/>
+          <a:p>
+            <a:r>
+              <a:rPr lang="en-US" altLang="ko-KR" sz="1400" dirty="0" smtClean="0">
+                <a:solidFill>
+                  <a:schemeClr val="tx1"/>
+                </a:solidFill>
+                <a:latin typeface="+mn-ea"/>
+              </a:rPr>
+              <a:t>xxx</a:t>
+            </a:r>
+            <a:endParaRPr lang="en-US" altLang="ko-KR" sz="1400" dirty="0">
+              <a:solidFill>
+                <a:schemeClr val="tx1"/>
+              </a:solidFill>
+              <a:latin typeface="+mn-ea"/>
+            </a:endParaRPr>
+          </a:p>
+        </p:txBody>
+      </p:sp>
+      <p:cxnSp>
+        <p:nvCxnSpPr>
+          <p:cNvPr id="90" name="직선 연결선 89"/>
+          <p:cNvCxnSpPr/>
+          <p:nvPr/>
+        </p:nvCxnSpPr>
+        <p:spPr>
+          <a:xfrm flipV="1">
+            <a:off x="215900" y="469900"/>
+            <a:ext cx="9156700" cy="0"/>
+          </a:xfrm>
+          <a:prstGeom prst="line">
+            <a:avLst/>
+          </a:prstGeom>
+          <a:ln w="19050">
+            <a:solidFill>
+              <a:schemeClr val="accent1"/>
+            </a:solidFill>
+          </a:ln>
+        </p:spPr>
+        <p:style>
+          <a:lnRef idx="1">
+            <a:schemeClr val="accent1"/>
+          </a:lnRef>
+          <a:fillRef idx="0">
+            <a:schemeClr val="accent1"/>
+          </a:fillRef>
+          <a:effectRef idx="0">
+            <a:schemeClr val="accent1"/>
+          </a:effectRef>
+          <a:fontRef idx="minor">
+            <a:schemeClr val="tx1"/>
+          </a:fontRef>
+        </p:style>
+      </p:cxnSp>
+    </p:spTree>
+    <p:extLst>
+      <p:ext uri="{BB962C8B-B14F-4D97-AF65-F5344CB8AC3E}">
+        <p14:creationId xmlns:p14="http://schemas.microsoft.com/office/powerpoint/2010/main" val="1784995460"/>
+      </p:ext>
+    </p:extLst>
+  </p:cSld>
+  <p:clrMapOvr>
+    <a:masterClrMapping/>
+  </p:clrMapOvr>
+  <p:timing>
+    <p:tnLst>
+      <p:par>
+        <p:cTn id="1" dur="indefinite" restart="never" nodeType="tmRoot"/>
+      </p:par>
+    </p:tnLst>
+  </p:timing>
+</p:sld>
+</file>
+
+<file path=ppt/slides/slide8.xml><?xml version="1.0" encoding="utf-8"?>
+<p:sld xmlns:a="http://schemas.openxmlformats.org/drawingml/2006/main" xmlns:r="http://schemas.openxmlformats.org/officeDocument/2006/relationships" xmlns:p="http://schemas.openxmlformats.org/presentationml/2006/main">
+  <p:cSld>
+    <p:spTree>
+      <p:nvGrpSpPr>
+        <p:cNvPr id="1" name=""/>
+        <p:cNvGrpSpPr/>
+        <p:nvPr/>
+      </p:nvGrpSpPr>
+      <p:grpSpPr>
+        <a:xfrm>
+          <a:off x="0" y="0"/>
+          <a:ext cx="0" cy="0"/>
+          <a:chOff x="0" y="0"/>
+          <a:chExt cx="0" cy="0"/>
+        </a:xfrm>
+      </p:grpSpPr>
+      <p:sp>
+        <p:nvSpPr>
+          <p:cNvPr id="88" name="직사각형 87"/>
+          <p:cNvSpPr/>
+          <p:nvPr/>
+        </p:nvSpPr>
+        <p:spPr>
+          <a:xfrm>
+            <a:off x="152400" y="125187"/>
+            <a:ext cx="2667000" cy="312964"/>
+          </a:xfrm>
+          <a:prstGeom prst="rect">
+            <a:avLst/>
+          </a:prstGeom>
+          <a:noFill/>
+          <a:ln>
+            <a:noFill/>
+          </a:ln>
+        </p:spPr>
+        <p:style>
+          <a:lnRef idx="2">
+            <a:schemeClr val="accent1">
+              <a:shade val="50000"/>
+            </a:schemeClr>
+          </a:lnRef>
+          <a:fillRef idx="1">
+            <a:schemeClr val="accent1"/>
+          </a:fillRef>
+          <a:effectRef idx="0">
+            <a:schemeClr val="accent1"/>
+          </a:effectRef>
+          <a:fontRef idx="minor">
+            <a:schemeClr val="lt1"/>
+          </a:fontRef>
+        </p:style>
+        <p:txBody>
+          <a:bodyPr rtlCol="0" anchor="ctr"/>
+          <a:lstStyle/>
+          <a:p>
+            <a:r>
+              <a:rPr lang="en-US" altLang="ko-KR" sz="1600" b="1" dirty="0" smtClean="0">
+                <a:solidFill>
+                  <a:schemeClr val="accent1">
+                    <a:lumMod val="75000"/>
+                  </a:schemeClr>
+                </a:solidFill>
+                <a:latin typeface="+mn-ea"/>
+              </a:rPr>
+              <a:t>xxx</a:t>
+            </a:r>
+            <a:endParaRPr lang="ko-KR" altLang="en-US" sz="1600" b="1" dirty="0">
+              <a:solidFill>
+                <a:schemeClr val="accent1">
+                  <a:lumMod val="75000"/>
+                </a:schemeClr>
+              </a:solidFill>
+              <a:latin typeface="+mn-ea"/>
+            </a:endParaRPr>
+          </a:p>
+        </p:txBody>
+      </p:sp>
+      <p:sp>
+        <p:nvSpPr>
+          <p:cNvPr id="89" name="직사각형 88"/>
+          <p:cNvSpPr/>
+          <p:nvPr/>
+        </p:nvSpPr>
+        <p:spPr>
+          <a:xfrm>
+            <a:off x="301171" y="422730"/>
+            <a:ext cx="9312729" cy="357414"/>
+          </a:xfrm>
+          <a:prstGeom prst="rect">
+            <a:avLst/>
+          </a:prstGeom>
+          <a:noFill/>
+          <a:ln>
+            <a:noFill/>
+          </a:ln>
+        </p:spPr>
+        <p:style>
+          <a:lnRef idx="2">
+            <a:schemeClr val="accent1">
+              <a:shade val="50000"/>
+            </a:schemeClr>
+          </a:lnRef>
+          <a:fillRef idx="1">
+            <a:schemeClr val="accent1"/>
+          </a:fillRef>
+          <a:effectRef idx="0">
+            <a:schemeClr val="accent1"/>
+          </a:effectRef>
+          <a:fontRef idx="minor">
+            <a:schemeClr val="lt1"/>
+          </a:fontRef>
+        </p:style>
+        <p:txBody>
+          <a:bodyPr rtlCol="0" anchor="ctr"/>
+          <a:lstStyle/>
+          <a:p>
+            <a:r>
+              <a:rPr lang="en-US" altLang="ko-KR" sz="1400" dirty="0" smtClean="0">
+                <a:solidFill>
+                  <a:schemeClr val="tx1"/>
+                </a:solidFill>
+                <a:latin typeface="+mn-ea"/>
+              </a:rPr>
+              <a:t>xxx</a:t>
+            </a:r>
+            <a:endParaRPr lang="en-US" altLang="ko-KR" sz="1400" dirty="0">
+              <a:solidFill>
+                <a:schemeClr val="tx1"/>
+              </a:solidFill>
+              <a:latin typeface="+mn-ea"/>
+            </a:endParaRPr>
+          </a:p>
+        </p:txBody>
+      </p:sp>
+      <p:cxnSp>
+        <p:nvCxnSpPr>
+          <p:cNvPr id="90" name="직선 연결선 89"/>
+          <p:cNvCxnSpPr/>
+          <p:nvPr/>
+        </p:nvCxnSpPr>
+        <p:spPr>
+          <a:xfrm flipV="1">
+            <a:off x="215900" y="469900"/>
+            <a:ext cx="9156700" cy="0"/>
+          </a:xfrm>
+          <a:prstGeom prst="line">
+            <a:avLst/>
+          </a:prstGeom>
+          <a:ln w="19050">
+            <a:solidFill>
+              <a:schemeClr val="accent1"/>
+            </a:solidFill>
+          </a:ln>
+        </p:spPr>
+        <p:style>
+          <a:lnRef idx="1">
+            <a:schemeClr val="accent1"/>
+          </a:lnRef>
+          <a:fillRef idx="0">
+            <a:schemeClr val="accent1"/>
+          </a:fillRef>
+          <a:effectRef idx="0">
+            <a:schemeClr val="accent1"/>
+          </a:effectRef>
+          <a:fontRef idx="minor">
+            <a:schemeClr val="tx1"/>
+          </a:fontRef>
+        </p:style>
+      </p:cxnSp>
+    </p:spTree>
+    <p:extLst>
+      <p:ext uri="{BB962C8B-B14F-4D97-AF65-F5344CB8AC3E}">
+        <p14:creationId xmlns:p14="http://schemas.microsoft.com/office/powerpoint/2010/main" val="1171376132"/>
+      </p:ext>
+    </p:extLst>
+  </p:cSld>
+  <p:clrMapOvr>
+    <a:masterClrMapping/>
+  </p:clrMapOvr>
+  <p:timing>
+    <p:tnLst>
+      <p:par>
+        <p:cTn id="1" dur="indefinite" restart="never" nodeType="tmRoot"/>
+      </p:par>
+    </p:tnLst>
+  </p:timing>
+</p:sld>
+</file>
+
+<file path=ppt/slides/slide9.xml><?xml version="1.0" encoding="utf-8"?>
+<p:sld xmlns:a="http://schemas.openxmlformats.org/drawingml/2006/main" xmlns:r="http://schemas.openxmlformats.org/officeDocument/2006/relationships" xmlns:p="http://schemas.openxmlformats.org/presentationml/2006/main">
+  <p:cSld>
+    <p:spTree>
+      <p:nvGrpSpPr>
+        <p:cNvPr id="1" name=""/>
+        <p:cNvGrpSpPr/>
+        <p:nvPr/>
+      </p:nvGrpSpPr>
+      <p:grpSpPr>
+        <a:xfrm>
+          <a:off x="0" y="0"/>
+          <a:ext cx="0" cy="0"/>
+          <a:chOff x="0" y="0"/>
+          <a:chExt cx="0" cy="0"/>
+        </a:xfrm>
+      </p:grpSpPr>
+      <p:sp>
+        <p:nvSpPr>
+          <p:cNvPr id="88" name="직사각형 87"/>
+          <p:cNvSpPr/>
+          <p:nvPr/>
+        </p:nvSpPr>
+        <p:spPr>
+          <a:xfrm>
+            <a:off x="152400" y="125187"/>
+            <a:ext cx="2667000" cy="312964"/>
+          </a:xfrm>
+          <a:prstGeom prst="rect">
+            <a:avLst/>
+          </a:prstGeom>
+          <a:noFill/>
+          <a:ln>
+            <a:noFill/>
+          </a:ln>
+        </p:spPr>
+        <p:style>
+          <a:lnRef idx="2">
+            <a:schemeClr val="accent1">
+              <a:shade val="50000"/>
+            </a:schemeClr>
+          </a:lnRef>
+          <a:fillRef idx="1">
+            <a:schemeClr val="accent1"/>
+          </a:fillRef>
+          <a:effectRef idx="0">
+            <a:schemeClr val="accent1"/>
+          </a:effectRef>
+          <a:fontRef idx="minor">
+            <a:schemeClr val="lt1"/>
+          </a:fontRef>
+        </p:style>
+        <p:txBody>
+          <a:bodyPr rtlCol="0" anchor="ctr"/>
+          <a:lstStyle/>
+          <a:p>
+            <a:r>
+              <a:rPr lang="en-US" altLang="ko-KR" sz="1600" b="1" dirty="0" smtClean="0">
+                <a:solidFill>
+                  <a:schemeClr val="accent1">
+                    <a:lumMod val="75000"/>
+                  </a:schemeClr>
+                </a:solidFill>
+                <a:latin typeface="+mn-ea"/>
+              </a:rPr>
+              <a:t>xxx</a:t>
+            </a:r>
+            <a:endParaRPr lang="ko-KR" altLang="en-US" sz="1600" b="1" dirty="0">
+              <a:solidFill>
+                <a:schemeClr val="accent1">
+                  <a:lumMod val="75000"/>
+                </a:schemeClr>
+              </a:solidFill>
+              <a:latin typeface="+mn-ea"/>
+            </a:endParaRPr>
+          </a:p>
+        </p:txBody>
+      </p:sp>
+      <p:sp>
+        <p:nvSpPr>
+          <p:cNvPr id="89" name="직사각형 88"/>
+          <p:cNvSpPr/>
+          <p:nvPr/>
+        </p:nvSpPr>
+        <p:spPr>
+          <a:xfrm>
+            <a:off x="301171" y="422730"/>
+            <a:ext cx="9312729" cy="357414"/>
+          </a:xfrm>
+          <a:prstGeom prst="rect">
+            <a:avLst/>
+          </a:prstGeom>
+          <a:noFill/>
+          <a:ln>
+            <a:noFill/>
+          </a:ln>
+        </p:spPr>
+        <p:style>
+          <a:lnRef idx="2">
+            <a:schemeClr val="accent1">
+              <a:shade val="50000"/>
+            </a:schemeClr>
+          </a:lnRef>
+          <a:fillRef idx="1">
+            <a:schemeClr val="accent1"/>
+          </a:fillRef>
+          <a:effectRef idx="0">
+            <a:schemeClr val="accent1"/>
+          </a:effectRef>
+          <a:fontRef idx="minor">
+            <a:schemeClr val="lt1"/>
+          </a:fontRef>
+        </p:style>
+        <p:txBody>
+          <a:bodyPr rtlCol="0" anchor="ctr"/>
+          <a:lstStyle/>
+          <a:p>
+            <a:r>
+              <a:rPr lang="en-US" altLang="ko-KR" sz="1400" dirty="0" smtClean="0">
+                <a:solidFill>
+                  <a:schemeClr val="tx1"/>
+                </a:solidFill>
+                <a:latin typeface="+mn-ea"/>
+              </a:rPr>
+              <a:t>xxx</a:t>
+            </a:r>
+            <a:endParaRPr lang="en-US" altLang="ko-KR" sz="1400" dirty="0">
+              <a:solidFill>
+                <a:schemeClr val="tx1"/>
+              </a:solidFill>
+              <a:latin typeface="+mn-ea"/>
+            </a:endParaRPr>
+          </a:p>
+        </p:txBody>
+      </p:sp>
+      <p:cxnSp>
+        <p:nvCxnSpPr>
+          <p:cNvPr id="90" name="직선 연결선 89"/>
+          <p:cNvCxnSpPr/>
+          <p:nvPr/>
+        </p:nvCxnSpPr>
+        <p:spPr>
+          <a:xfrm flipV="1">
+            <a:off x="215900" y="469900"/>
+            <a:ext cx="9156700" cy="0"/>
+          </a:xfrm>
+          <a:prstGeom prst="line">
+            <a:avLst/>
+          </a:prstGeom>
+          <a:ln w="19050">
+            <a:solidFill>
+              <a:schemeClr val="accent1"/>
+            </a:solidFill>
+          </a:ln>
+        </p:spPr>
+        <p:style>
+          <a:lnRef idx="1">
+            <a:schemeClr val="accent1"/>
+          </a:lnRef>
+          <a:fillRef idx="0">
+            <a:schemeClr val="accent1"/>
+          </a:fillRef>
+          <a:effectRef idx="0">
+            <a:schemeClr val="accent1"/>
+          </a:effectRef>
+          <a:fontRef idx="minor">
+            <a:schemeClr val="tx1"/>
+          </a:fontRef>
+        </p:style>
+      </p:cxnSp>
+    </p:spTree>
+    <p:extLst>
+      <p:ext uri="{BB962C8B-B14F-4D97-AF65-F5344CB8AC3E}">
+        <p14:creationId xmlns:p14="http://schemas.microsoft.com/office/powerpoint/2010/main" val="1177542108"/>
       </p:ext>
     </p:extLst>
   </p:cSld>

--- a/99ref/blog.pptx
+++ b/99ref/blog.pptx
@@ -11,9 +11,10 @@
     <p:sldId id="262" r:id="rId5"/>
     <p:sldId id="259" r:id="rId6"/>
     <p:sldId id="260" r:id="rId7"/>
-    <p:sldId id="263" r:id="rId8"/>
-    <p:sldId id="264" r:id="rId9"/>
-    <p:sldId id="265" r:id="rId10"/>
+    <p:sldId id="266" r:id="rId8"/>
+    <p:sldId id="263" r:id="rId9"/>
+    <p:sldId id="264" r:id="rId10"/>
+    <p:sldId id="265" r:id="rId11"/>
   </p:sldIdLst>
   <p:sldSz cx="9720263" cy="8999538"/>
   <p:notesSz cx="6858000" cy="9144000"/>
@@ -6093,6 +6094,196 @@
     <p:extLst>
       <p:ext uri="{BB962C8B-B14F-4D97-AF65-F5344CB8AC3E}">
         <p14:creationId xmlns:p14="http://schemas.microsoft.com/office/powerpoint/2010/main" val="3647370395"/>
+      </p:ext>
+    </p:extLst>
+  </p:cSld>
+  <p:clrMapOvr>
+    <a:masterClrMapping/>
+  </p:clrMapOvr>
+  <p:timing>
+    <p:tnLst>
+      <p:par>
+        <p:cTn id="1" dur="indefinite" restart="never" nodeType="tmRoot"/>
+      </p:par>
+    </p:tnLst>
+  </p:timing>
+</p:sld>
+</file>
+
+<file path=ppt/slides/slide10.xml><?xml version="1.0" encoding="utf-8"?>
+<p:sld xmlns:a="http://schemas.openxmlformats.org/drawingml/2006/main" xmlns:r="http://schemas.openxmlformats.org/officeDocument/2006/relationships" xmlns:p="http://schemas.openxmlformats.org/presentationml/2006/main">
+  <p:cSld>
+    <p:spTree>
+      <p:nvGrpSpPr>
+        <p:cNvPr id="1" name=""/>
+        <p:cNvGrpSpPr/>
+        <p:nvPr/>
+      </p:nvGrpSpPr>
+      <p:grpSpPr>
+        <a:xfrm>
+          <a:off x="0" y="0"/>
+          <a:ext cx="0" cy="0"/>
+          <a:chOff x="0" y="0"/>
+          <a:chExt cx="0" cy="0"/>
+        </a:xfrm>
+      </p:grpSpPr>
+      <p:sp>
+        <p:nvSpPr>
+          <p:cNvPr id="88" name="직사각형 87"/>
+          <p:cNvSpPr/>
+          <p:nvPr/>
+        </p:nvSpPr>
+        <p:spPr>
+          <a:xfrm>
+            <a:off x="152400" y="125187"/>
+            <a:ext cx="2667000" cy="312964"/>
+          </a:xfrm>
+          <a:prstGeom prst="rect">
+            <a:avLst/>
+          </a:prstGeom>
+          <a:noFill/>
+          <a:ln>
+            <a:noFill/>
+          </a:ln>
+        </p:spPr>
+        <p:style>
+          <a:lnRef idx="2">
+            <a:schemeClr val="accent1">
+              <a:shade val="50000"/>
+            </a:schemeClr>
+          </a:lnRef>
+          <a:fillRef idx="1">
+            <a:schemeClr val="accent1"/>
+          </a:fillRef>
+          <a:effectRef idx="0">
+            <a:schemeClr val="accent1"/>
+          </a:effectRef>
+          <a:fontRef idx="minor">
+            <a:schemeClr val="lt1"/>
+          </a:fontRef>
+        </p:style>
+        <p:txBody>
+          <a:bodyPr rtlCol="0" anchor="ctr"/>
+          <a:lstStyle/>
+          <a:p>
+            <a:r>
+              <a:rPr lang="en-US" altLang="ko-KR" sz="1600" b="1" dirty="0" smtClean="0">
+                <a:solidFill>
+                  <a:schemeClr val="accent1">
+                    <a:lumMod val="75000"/>
+                  </a:schemeClr>
+                </a:solidFill>
+                <a:latin typeface="+mn-ea"/>
+              </a:rPr>
+              <a:t>xxx</a:t>
+            </a:r>
+            <a:endParaRPr lang="ko-KR" altLang="en-US" sz="1600" b="1" dirty="0">
+              <a:solidFill>
+                <a:schemeClr val="accent1">
+                  <a:lumMod val="75000"/>
+                </a:schemeClr>
+              </a:solidFill>
+              <a:latin typeface="+mn-ea"/>
+            </a:endParaRPr>
+          </a:p>
+        </p:txBody>
+      </p:sp>
+      <p:sp>
+        <p:nvSpPr>
+          <p:cNvPr id="89" name="직사각형 88"/>
+          <p:cNvSpPr/>
+          <p:nvPr/>
+        </p:nvSpPr>
+        <p:spPr>
+          <a:xfrm>
+            <a:off x="301171" y="422730"/>
+            <a:ext cx="9312729" cy="357414"/>
+          </a:xfrm>
+          <a:prstGeom prst="rect">
+            <a:avLst/>
+          </a:prstGeom>
+          <a:noFill/>
+          <a:ln>
+            <a:noFill/>
+          </a:ln>
+        </p:spPr>
+        <p:style>
+          <a:lnRef idx="2">
+            <a:schemeClr val="accent1">
+              <a:shade val="50000"/>
+            </a:schemeClr>
+          </a:lnRef>
+          <a:fillRef idx="1">
+            <a:schemeClr val="accent1"/>
+          </a:fillRef>
+          <a:effectRef idx="0">
+            <a:schemeClr val="accent1"/>
+          </a:effectRef>
+          <a:fontRef idx="minor">
+            <a:schemeClr val="lt1"/>
+          </a:fontRef>
+        </p:style>
+        <p:txBody>
+          <a:bodyPr rtlCol="0" anchor="ctr"/>
+          <a:lstStyle/>
+          <a:p>
+            <a:r>
+              <a:rPr lang="en-US" altLang="ko-KR" sz="1400" dirty="0" smtClean="0">
+                <a:solidFill>
+                  <a:schemeClr val="tx1"/>
+                </a:solidFill>
+                <a:latin typeface="+mn-ea"/>
+              </a:rPr>
+              <a:t>xxx</a:t>
+            </a:r>
+            <a:endParaRPr lang="en-US" altLang="ko-KR" sz="1400" dirty="0">
+              <a:solidFill>
+                <a:schemeClr val="tx1"/>
+              </a:solidFill>
+              <a:latin typeface="+mn-ea"/>
+            </a:endParaRPr>
+          </a:p>
+        </p:txBody>
+      </p:sp>
+      <p:cxnSp>
+        <p:nvCxnSpPr>
+          <p:cNvPr id="90" name="직선 연결선 89"/>
+          <p:cNvCxnSpPr/>
+          <p:nvPr/>
+        </p:nvCxnSpPr>
+        <p:spPr>
+          <a:xfrm flipV="1">
+            <a:off x="215900" y="469900"/>
+            <a:ext cx="9156700" cy="0"/>
+          </a:xfrm>
+          <a:prstGeom prst="line">
+            <a:avLst/>
+          </a:prstGeom>
+          <a:ln w="19050">
+            <a:solidFill>
+              <a:schemeClr val="accent1"/>
+            </a:solidFill>
+          </a:ln>
+        </p:spPr>
+        <p:style>
+          <a:lnRef idx="1">
+            <a:schemeClr val="accent1"/>
+          </a:lnRef>
+          <a:fillRef idx="0">
+            <a:schemeClr val="accent1"/>
+          </a:fillRef>
+          <a:effectRef idx="0">
+            <a:schemeClr val="accent1"/>
+          </a:effectRef>
+          <a:fontRef idx="minor">
+            <a:schemeClr val="tx1"/>
+          </a:fontRef>
+        </p:style>
+      </p:cxnSp>
+    </p:spTree>
+    <p:extLst>
+      <p:ext uri="{BB962C8B-B14F-4D97-AF65-F5344CB8AC3E}">
+        <p14:creationId xmlns:p14="http://schemas.microsoft.com/office/powerpoint/2010/main" val="1177542108"/>
       </p:ext>
     </p:extLst>
   </p:cSld>
@@ -19627,7 +19818,7 @@
           <a:lstStyle/>
           <a:p>
             <a:r>
-              <a:rPr lang="en-US" altLang="ko-KR" sz="1400" b="1" smtClean="0">
+              <a:rPr lang="en-US" altLang="ko-KR" sz="1400" b="1" dirty="0" smtClean="0">
                 <a:solidFill>
                   <a:schemeClr val="tx1"/>
                 </a:solidFill>
@@ -21293,7 +21484,7 @@
           <a:lstStyle/>
           <a:p>
             <a:r>
-              <a:rPr lang="en-US" altLang="ko-KR" sz="1600" b="1" dirty="0" smtClean="0">
+              <a:rPr lang="en-US" altLang="ko-KR" sz="1600" b="1" dirty="0" err="1" smtClean="0">
                 <a:solidFill>
                   <a:schemeClr val="accent1">
                     <a:lumMod val="75000"/>
@@ -21301,7 +21492,29 @@
                 </a:solidFill>
                 <a:latin typeface="+mn-ea"/>
               </a:rPr>
-              <a:t>xxx</a:t>
+              <a:t>Vertica</a:t>
+            </a:r>
+            <a:r>
+              <a:rPr lang="en-US" altLang="ko-KR" sz="1600" b="1" dirty="0" smtClean="0">
+                <a:solidFill>
+                  <a:schemeClr val="accent1">
+                    <a:lumMod val="75000"/>
+                  </a:schemeClr>
+                </a:solidFill>
+                <a:latin typeface="+mn-ea"/>
+              </a:rPr>
+              <a:t> </a:t>
+            </a:r>
+            <a:r>
+              <a:rPr lang="en-US" altLang="ko-KR" sz="1600" b="1" dirty="0" err="1" smtClean="0">
+                <a:solidFill>
+                  <a:schemeClr val="accent1">
+                    <a:lumMod val="75000"/>
+                  </a:schemeClr>
+                </a:solidFill>
+                <a:latin typeface="+mn-ea"/>
+              </a:rPr>
+              <a:t>EonMode</a:t>
             </a:r>
             <a:endParaRPr lang="ko-KR" altLang="en-US" sz="1600" b="1" dirty="0">
               <a:solidFill>
@@ -21323,7 +21536,7 @@
         <p:spPr>
           <a:xfrm>
             <a:off x="301171" y="422730"/>
-            <a:ext cx="9312729" cy="357414"/>
+            <a:ext cx="9312729" cy="878532"/>
           </a:xfrm>
           <a:prstGeom prst="rect">
             <a:avLst/>
@@ -21354,13 +21567,157 @@
           <a:lstStyle/>
           <a:p>
             <a:r>
+              <a:rPr lang="en-US" altLang="ko-KR" sz="1400" dirty="0">
+                <a:solidFill>
+                  <a:schemeClr val="tx1"/>
+                </a:solidFill>
+                <a:latin typeface="+mn-ea"/>
+              </a:rPr>
+              <a:t>Eon Mode</a:t>
+            </a:r>
+            <a:r>
+              <a:rPr lang="ko-KR" altLang="en-US" sz="1400" dirty="0">
+                <a:solidFill>
+                  <a:schemeClr val="tx1"/>
+                </a:solidFill>
+                <a:latin typeface="+mn-ea"/>
+              </a:rPr>
+              <a:t>는 </a:t>
+            </a:r>
+            <a:r>
+              <a:rPr lang="ko-KR" altLang="en-US" sz="1400" dirty="0" err="1">
+                <a:solidFill>
+                  <a:schemeClr val="tx1"/>
+                </a:solidFill>
+                <a:latin typeface="+mn-ea"/>
+              </a:rPr>
+              <a:t>클라우드</a:t>
+            </a:r>
+            <a:r>
+              <a:rPr lang="ko-KR" altLang="en-US" sz="1400" dirty="0">
+                <a:solidFill>
+                  <a:schemeClr val="tx1"/>
+                </a:solidFill>
+                <a:latin typeface="+mn-ea"/>
+              </a:rPr>
+              <a:t> 이코노믹스의 동적 워크로드 및 효율적인 확장 요구에 대응하기 위해 설계된 컴퓨팅</a:t>
+            </a:r>
+            <a:r>
+              <a:rPr lang="en-US" altLang="ko-KR" sz="1400" dirty="0">
+                <a:solidFill>
+                  <a:schemeClr val="tx1"/>
+                </a:solidFill>
+                <a:latin typeface="+mn-ea"/>
+              </a:rPr>
+              <a:t>/</a:t>
+            </a:r>
+            <a:r>
+              <a:rPr lang="ko-KR" altLang="en-US" sz="1400" dirty="0">
+                <a:solidFill>
+                  <a:schemeClr val="tx1"/>
+                </a:solidFill>
+                <a:latin typeface="+mn-ea"/>
+              </a:rPr>
+              <a:t>스토리지</a:t>
+            </a:r>
+            <a:r>
+              <a:rPr lang="en-US" altLang="ko-KR" sz="1400" dirty="0">
+                <a:solidFill>
+                  <a:schemeClr val="tx1"/>
+                </a:solidFill>
+                <a:latin typeface="+mn-ea"/>
+              </a:rPr>
+              <a:t>(C/S) </a:t>
+            </a:r>
+            <a:r>
+              <a:rPr lang="ko-KR" altLang="en-US" sz="1400" dirty="0">
+                <a:solidFill>
+                  <a:schemeClr val="tx1"/>
+                </a:solidFill>
+                <a:latin typeface="+mn-ea"/>
+              </a:rPr>
+              <a:t>분리 </a:t>
+            </a:r>
+            <a:r>
+              <a:rPr lang="ko-KR" altLang="en-US" sz="1400" dirty="0" smtClean="0">
+                <a:solidFill>
+                  <a:schemeClr val="tx1"/>
+                </a:solidFill>
+                <a:latin typeface="+mn-ea"/>
+              </a:rPr>
+              <a:t>아키텍처입니다</a:t>
+            </a:r>
+            <a:r>
               <a:rPr lang="en-US" altLang="ko-KR" sz="1400" dirty="0" smtClean="0">
                 <a:solidFill>
                   <a:schemeClr val="tx1"/>
                 </a:solidFill>
                 <a:latin typeface="+mn-ea"/>
               </a:rPr>
-              <a:t>xxx</a:t>
+              <a:t>. </a:t>
+            </a:r>
+            <a:r>
+              <a:rPr lang="ko-KR" altLang="en-US" sz="1400" dirty="0" err="1">
+                <a:solidFill>
+                  <a:schemeClr val="tx1"/>
+                </a:solidFill>
+                <a:latin typeface="+mn-ea"/>
+              </a:rPr>
+              <a:t>페타바이트</a:t>
+            </a:r>
+            <a:r>
+              <a:rPr lang="ko-KR" altLang="en-US" sz="1400" dirty="0">
+                <a:solidFill>
+                  <a:schemeClr val="tx1"/>
+                </a:solidFill>
+                <a:latin typeface="+mn-ea"/>
+              </a:rPr>
+              <a:t> 규모 이상의 통합 데이터 </a:t>
+            </a:r>
+            <a:r>
+              <a:rPr lang="ko-KR" altLang="en-US" sz="1400" dirty="0" err="1">
+                <a:solidFill>
+                  <a:schemeClr val="tx1"/>
+                </a:solidFill>
+                <a:latin typeface="+mn-ea"/>
+              </a:rPr>
+              <a:t>레이크하우스</a:t>
+            </a:r>
+            <a:r>
+              <a:rPr lang="en-US" altLang="ko-KR" sz="1400" dirty="0">
+                <a:solidFill>
+                  <a:schemeClr val="tx1"/>
+                </a:solidFill>
+                <a:latin typeface="+mn-ea"/>
+              </a:rPr>
+              <a:t>(</a:t>
+            </a:r>
+            <a:r>
+              <a:rPr lang="en-US" altLang="ko-KR" sz="1400" dirty="0" err="1">
+                <a:solidFill>
+                  <a:schemeClr val="tx1"/>
+                </a:solidFill>
+                <a:latin typeface="+mn-ea"/>
+              </a:rPr>
+              <a:t>Lakehouse</a:t>
+            </a:r>
+            <a:r>
+              <a:rPr lang="en-US" altLang="ko-KR" sz="1400" dirty="0">
+                <a:solidFill>
+                  <a:schemeClr val="tx1"/>
+                </a:solidFill>
+                <a:latin typeface="+mn-ea"/>
+              </a:rPr>
+              <a:t>) </a:t>
+            </a:r>
+            <a:r>
+              <a:rPr lang="ko-KR" altLang="en-US" sz="1400" dirty="0">
+                <a:solidFill>
+                  <a:schemeClr val="tx1"/>
+                </a:solidFill>
+                <a:latin typeface="+mn-ea"/>
+              </a:rPr>
+              <a:t>플랫폼을 구축하는 데 최적화되어 있습니다</a:t>
             </a:r>
             <a:endParaRPr lang="en-US" altLang="ko-KR" sz="1400" dirty="0">
               <a:solidFill>
@@ -21406,6 +21763,3241 @@
           </a:fontRef>
         </p:style>
       </p:cxnSp>
+      <p:sp>
+        <p:nvSpPr>
+          <p:cNvPr id="5" name="직사각형 4"/>
+          <p:cNvSpPr/>
+          <p:nvPr/>
+        </p:nvSpPr>
+        <p:spPr>
+          <a:xfrm>
+            <a:off x="191493" y="1113830"/>
+            <a:ext cx="9312729" cy="410170"/>
+          </a:xfrm>
+          <a:prstGeom prst="rect">
+            <a:avLst/>
+          </a:prstGeom>
+          <a:noFill/>
+          <a:ln>
+            <a:noFill/>
+          </a:ln>
+        </p:spPr>
+        <p:style>
+          <a:lnRef idx="2">
+            <a:schemeClr val="accent1">
+              <a:shade val="50000"/>
+            </a:schemeClr>
+          </a:lnRef>
+          <a:fillRef idx="1">
+            <a:schemeClr val="accent1"/>
+          </a:fillRef>
+          <a:effectRef idx="0">
+            <a:schemeClr val="accent1"/>
+          </a:effectRef>
+          <a:fontRef idx="minor">
+            <a:schemeClr val="lt1"/>
+          </a:fontRef>
+        </p:style>
+        <p:txBody>
+          <a:bodyPr rtlCol="0" anchor="ctr"/>
+          <a:lstStyle/>
+          <a:p>
+            <a:r>
+              <a:rPr lang="en-US" altLang="ko-KR" sz="1400" b="1" dirty="0" smtClean="0">
+                <a:solidFill>
+                  <a:schemeClr val="tx1"/>
+                </a:solidFill>
+                <a:latin typeface="+mn-ea"/>
+              </a:rPr>
+              <a:t>Eon Mode</a:t>
+            </a:r>
+            <a:r>
+              <a:rPr lang="ko-KR" altLang="en-US" sz="1400" b="1" dirty="0" smtClean="0">
+                <a:solidFill>
+                  <a:schemeClr val="tx1"/>
+                </a:solidFill>
+                <a:latin typeface="+mn-ea"/>
+              </a:rPr>
+              <a:t>의 </a:t>
+            </a:r>
+            <a:r>
+              <a:rPr lang="en-US" altLang="ko-KR" sz="1400" b="1" dirty="0" smtClean="0">
+                <a:solidFill>
+                  <a:schemeClr val="tx1"/>
+                </a:solidFill>
+                <a:latin typeface="+mn-ea"/>
+              </a:rPr>
+              <a:t>3</a:t>
+            </a:r>
+            <a:r>
+              <a:rPr lang="ko-KR" altLang="en-US" sz="1400" b="1" dirty="0" smtClean="0">
+                <a:solidFill>
+                  <a:schemeClr val="tx1"/>
+                </a:solidFill>
+                <a:latin typeface="+mn-ea"/>
+              </a:rPr>
+              <a:t>대 핵심이점</a:t>
+            </a:r>
+            <a:endParaRPr lang="en-US" altLang="ko-KR" sz="1200" dirty="0">
+              <a:solidFill>
+                <a:schemeClr val="tx1"/>
+              </a:solidFill>
+              <a:latin typeface="+mn-ea"/>
+            </a:endParaRPr>
+          </a:p>
+        </p:txBody>
+      </p:sp>
+      <p:pic>
+        <p:nvPicPr>
+          <p:cNvPr id="6" name="Picture 11" descr="Sandbox Software – In the Cloud | FortiSandbox Cloud">
+            <a:extLst>
+              <a:ext uri="{FF2B5EF4-FFF2-40B4-BE49-F238E27FC236}">
+                <a16:creationId xmlns:a16="http://schemas.microsoft.com/office/drawing/2014/main" xmlns="" id="{73BBF3D0-6B40-E280-BA30-1E77B5C4F45A}"/>
+              </a:ext>
+            </a:extLst>
+          </p:cNvPr>
+          <p:cNvPicPr>
+            <a:picLocks noChangeAspect="1" noChangeArrowheads="1"/>
+          </p:cNvPicPr>
+          <p:nvPr/>
+        </p:nvPicPr>
+        <p:blipFill>
+          <a:blip r:embed="rId2" cstate="print">
+            <a:duotone>
+              <a:prstClr val="black"/>
+              <a:schemeClr val="accent1">
+                <a:tint val="45000"/>
+                <a:satMod val="400000"/>
+              </a:schemeClr>
+            </a:duotone>
+            <a:extLst>
+              <a:ext uri="{BEBA8EAE-BF5A-486C-A8C5-ECC9F3942E4B}">
+                <a14:imgProps xmlns:a14="http://schemas.microsoft.com/office/drawing/2010/main">
+                  <a14:imgLayer r:embed="rId3">
+                    <a14:imgEffect>
+                      <a14:artisticPhotocopy/>
+                    </a14:imgEffect>
+                  </a14:imgLayer>
+                </a14:imgProps>
+              </a:ext>
+              <a:ext uri="{28A0092B-C50C-407E-A947-70E740481C1C}">
+                <a14:useLocalDpi xmlns:a14="http://schemas.microsoft.com/office/drawing/2010/main" val="0"/>
+              </a:ext>
+            </a:extLst>
+          </a:blip>
+          <a:srcRect/>
+          <a:stretch>
+            <a:fillRect/>
+          </a:stretch>
+        </p:blipFill>
+        <p:spPr bwMode="auto">
+          <a:xfrm>
+            <a:off x="908598" y="1375180"/>
+            <a:ext cx="1503786" cy="946202"/>
+          </a:xfrm>
+          <a:prstGeom prst="rect">
+            <a:avLst/>
+          </a:prstGeom>
+          <a:noFill/>
+          <a:extLst>
+            <a:ext uri="{909E8E84-426E-40DD-AFC4-6F175D3DCCD1}">
+              <a14:hiddenFill xmlns:a14="http://schemas.microsoft.com/office/drawing/2010/main">
+                <a:solidFill>
+                  <a:srgbClr val="FFFFFF"/>
+                </a:solidFill>
+              </a14:hiddenFill>
+            </a:ext>
+          </a:extLst>
+        </p:spPr>
+      </p:pic>
+      <p:pic>
+        <p:nvPicPr>
+          <p:cNvPr id="7" name="Picture 8" descr="cost Icon - Free PNG &amp; SVG 930448 - Noun Project">
+            <a:extLst>
+              <a:ext uri="{FF2B5EF4-FFF2-40B4-BE49-F238E27FC236}">
+                <a16:creationId xmlns:a16="http://schemas.microsoft.com/office/drawing/2014/main" xmlns="" id="{B89FFE28-AD15-4FA1-FDD1-8DF6F4744923}"/>
+              </a:ext>
+            </a:extLst>
+          </p:cNvPr>
+          <p:cNvPicPr>
+            <a:picLocks noChangeAspect="1" noChangeArrowheads="1"/>
+          </p:cNvPicPr>
+          <p:nvPr/>
+        </p:nvPicPr>
+        <p:blipFill>
+          <a:blip r:embed="rId4">
+            <a:duotone>
+              <a:prstClr val="black"/>
+              <a:schemeClr val="accent1">
+                <a:tint val="45000"/>
+                <a:satMod val="400000"/>
+              </a:schemeClr>
+            </a:duotone>
+            <a:extLst>
+              <a:ext uri="{BEBA8EAE-BF5A-486C-A8C5-ECC9F3942E4B}">
+                <a14:imgProps xmlns:a14="http://schemas.microsoft.com/office/drawing/2010/main">
+                  <a14:imgLayer r:embed="rId5">
+                    <a14:imgEffect>
+                      <a14:artisticPhotocopy/>
+                    </a14:imgEffect>
+                    <a14:imgEffect>
+                      <a14:saturation sat="0"/>
+                    </a14:imgEffect>
+                  </a14:imgLayer>
+                </a14:imgProps>
+              </a:ext>
+              <a:ext uri="{28A0092B-C50C-407E-A947-70E740481C1C}">
+                <a14:useLocalDpi xmlns:a14="http://schemas.microsoft.com/office/drawing/2010/main" val="0"/>
+              </a:ext>
+            </a:extLst>
+          </a:blip>
+          <a:srcRect/>
+          <a:stretch>
+            <a:fillRect/>
+          </a:stretch>
+        </p:blipFill>
+        <p:spPr bwMode="auto">
+          <a:xfrm>
+            <a:off x="4293346" y="1312987"/>
+            <a:ext cx="1064752" cy="1064752"/>
+          </a:xfrm>
+          <a:prstGeom prst="rect">
+            <a:avLst/>
+          </a:prstGeom>
+          <a:noFill/>
+          <a:extLst>
+            <a:ext uri="{909E8E84-426E-40DD-AFC4-6F175D3DCCD1}">
+              <a14:hiddenFill xmlns:a14="http://schemas.microsoft.com/office/drawing/2010/main">
+                <a:solidFill>
+                  <a:srgbClr val="FFFFFF"/>
+                </a:solidFill>
+              </a14:hiddenFill>
+            </a:ext>
+          </a:extLst>
+        </p:spPr>
+      </p:pic>
+      <p:pic>
+        <p:nvPicPr>
+          <p:cNvPr id="8" name="Picture 6" descr="Project Cargo Services | CFA">
+            <a:extLst>
+              <a:ext uri="{FF2B5EF4-FFF2-40B4-BE49-F238E27FC236}">
+                <a16:creationId xmlns:a16="http://schemas.microsoft.com/office/drawing/2014/main" xmlns="" id="{A9578F59-39A1-6B09-C1A4-24DA78C49B39}"/>
+              </a:ext>
+            </a:extLst>
+          </p:cNvPr>
+          <p:cNvPicPr>
+            <a:picLocks noChangeAspect="1" noChangeArrowheads="1"/>
+          </p:cNvPicPr>
+          <p:nvPr/>
+        </p:nvPicPr>
+        <p:blipFill>
+          <a:blip r:embed="rId6" cstate="print">
+            <a:duotone>
+              <a:prstClr val="black"/>
+              <a:schemeClr val="accent1">
+                <a:tint val="45000"/>
+                <a:satMod val="400000"/>
+              </a:schemeClr>
+            </a:duotone>
+            <a:extLst>
+              <a:ext uri="{BEBA8EAE-BF5A-486C-A8C5-ECC9F3942E4B}">
+                <a14:imgProps xmlns:a14="http://schemas.microsoft.com/office/drawing/2010/main">
+                  <a14:imgLayer r:embed="rId7">
+                    <a14:imgEffect>
+                      <a14:artisticPhotocopy/>
+                    </a14:imgEffect>
+                  </a14:imgLayer>
+                </a14:imgProps>
+              </a:ext>
+              <a:ext uri="{28A0092B-C50C-407E-A947-70E740481C1C}">
+                <a14:useLocalDpi xmlns:a14="http://schemas.microsoft.com/office/drawing/2010/main" val="0"/>
+              </a:ext>
+            </a:extLst>
+          </a:blip>
+          <a:srcRect/>
+          <a:stretch>
+            <a:fillRect/>
+          </a:stretch>
+        </p:blipFill>
+        <p:spPr bwMode="auto">
+          <a:xfrm>
+            <a:off x="7395443" y="1313809"/>
+            <a:ext cx="1003450" cy="1003448"/>
+          </a:xfrm>
+          <a:prstGeom prst="rect">
+            <a:avLst/>
+          </a:prstGeom>
+          <a:noFill/>
+          <a:extLst>
+            <a:ext uri="{909E8E84-426E-40DD-AFC4-6F175D3DCCD1}">
+              <a14:hiddenFill xmlns:a14="http://schemas.microsoft.com/office/drawing/2010/main">
+                <a:solidFill>
+                  <a:srgbClr val="FFFFFF"/>
+                </a:solidFill>
+              </a14:hiddenFill>
+            </a:ext>
+          </a:extLst>
+        </p:spPr>
+      </p:pic>
+      <p:sp>
+        <p:nvSpPr>
+          <p:cNvPr id="10" name="직사각형 9"/>
+          <p:cNvSpPr/>
+          <p:nvPr/>
+        </p:nvSpPr>
+        <p:spPr>
+          <a:xfrm>
+            <a:off x="237812" y="2250839"/>
+            <a:ext cx="3079818" cy="1793624"/>
+          </a:xfrm>
+          <a:prstGeom prst="rect">
+            <a:avLst/>
+          </a:prstGeom>
+          <a:noFill/>
+          <a:ln>
+            <a:noFill/>
+          </a:ln>
+        </p:spPr>
+        <p:style>
+          <a:lnRef idx="2">
+            <a:schemeClr val="accent1">
+              <a:shade val="50000"/>
+            </a:schemeClr>
+          </a:lnRef>
+          <a:fillRef idx="1">
+            <a:schemeClr val="accent1"/>
+          </a:fillRef>
+          <a:effectRef idx="0">
+            <a:schemeClr val="accent1"/>
+          </a:effectRef>
+          <a:fontRef idx="minor">
+            <a:schemeClr val="lt1"/>
+          </a:fontRef>
+        </p:style>
+        <p:txBody>
+          <a:bodyPr rtlCol="0" anchor="ctr"/>
+          <a:lstStyle/>
+          <a:p>
+            <a:pPr algn="ctr"/>
+            <a:r>
+              <a:rPr lang="ko-KR" altLang="en-US" sz="1400" b="1" dirty="0">
+                <a:solidFill>
+                  <a:schemeClr val="tx1"/>
+                </a:solidFill>
+                <a:latin typeface="+mn-ea"/>
+              </a:rPr>
+              <a:t>뛰어난 </a:t>
+            </a:r>
+            <a:r>
+              <a:rPr lang="ko-KR" altLang="en-US" sz="1400" b="1" dirty="0" err="1">
+                <a:solidFill>
+                  <a:schemeClr val="tx1"/>
+                </a:solidFill>
+                <a:latin typeface="+mn-ea"/>
+              </a:rPr>
+              <a:t>확장성</a:t>
+            </a:r>
+            <a:r>
+              <a:rPr lang="ko-KR" altLang="en-US" sz="1400" b="1" dirty="0">
+                <a:solidFill>
+                  <a:schemeClr val="tx1"/>
+                </a:solidFill>
+                <a:latin typeface="+mn-ea"/>
+              </a:rPr>
+              <a:t> </a:t>
+            </a:r>
+            <a:endParaRPr lang="en-US" altLang="ko-KR" sz="1400" b="1" dirty="0" smtClean="0">
+              <a:solidFill>
+                <a:schemeClr val="tx1"/>
+              </a:solidFill>
+              <a:latin typeface="+mn-ea"/>
+            </a:endParaRPr>
+          </a:p>
+          <a:p>
+            <a:pPr algn="ctr"/>
+            <a:r>
+              <a:rPr lang="en-US" altLang="ko-KR" sz="1400" b="1" dirty="0" smtClean="0">
+                <a:solidFill>
+                  <a:schemeClr val="tx1"/>
+                </a:solidFill>
+                <a:latin typeface="+mn-ea"/>
+              </a:rPr>
+              <a:t>(</a:t>
+            </a:r>
+            <a:r>
+              <a:rPr lang="en-US" altLang="ko-KR" sz="1400" b="1" dirty="0">
+                <a:solidFill>
+                  <a:schemeClr val="tx1"/>
+                </a:solidFill>
+                <a:latin typeface="+mn-ea"/>
+              </a:rPr>
+              <a:t>Scalability)</a:t>
+            </a:r>
+          </a:p>
+          <a:p>
+            <a:r>
+              <a:rPr lang="en-US" altLang="ko-KR" sz="1200" dirty="0" smtClean="0">
+                <a:solidFill>
+                  <a:schemeClr val="tx1"/>
+                </a:solidFill>
+                <a:latin typeface="+mn-ea"/>
+              </a:rPr>
+              <a:t>- </a:t>
+            </a:r>
+            <a:r>
+              <a:rPr lang="ko-KR" altLang="en-US" sz="1200" dirty="0" err="1" smtClean="0">
+                <a:solidFill>
+                  <a:schemeClr val="tx1"/>
+                </a:solidFill>
+                <a:latin typeface="+mn-ea"/>
+              </a:rPr>
+              <a:t>스토리지와</a:t>
+            </a:r>
+            <a:r>
+              <a:rPr lang="ko-KR" altLang="en-US" sz="1200" dirty="0" smtClean="0">
+                <a:solidFill>
+                  <a:schemeClr val="tx1"/>
+                </a:solidFill>
+                <a:latin typeface="+mn-ea"/>
+              </a:rPr>
+              <a:t> </a:t>
+            </a:r>
+            <a:r>
+              <a:rPr lang="ko-KR" altLang="en-US" sz="1200" dirty="0">
+                <a:solidFill>
+                  <a:schemeClr val="tx1"/>
+                </a:solidFill>
+                <a:latin typeface="+mn-ea"/>
+              </a:rPr>
+              <a:t>컴퓨팅이 분리되어 있어</a:t>
+            </a:r>
+            <a:r>
+              <a:rPr lang="en-US" altLang="ko-KR" sz="1200" dirty="0">
+                <a:solidFill>
+                  <a:schemeClr val="tx1"/>
+                </a:solidFill>
+                <a:latin typeface="+mn-ea"/>
+              </a:rPr>
+              <a:t>, </a:t>
+            </a:r>
+            <a:r>
+              <a:rPr lang="ko-KR" altLang="en-US" sz="1200" dirty="0">
+                <a:solidFill>
+                  <a:schemeClr val="tx1"/>
+                </a:solidFill>
+                <a:latin typeface="+mn-ea"/>
+              </a:rPr>
+              <a:t>데이터 </a:t>
+            </a:r>
+            <a:r>
+              <a:rPr lang="ko-KR" altLang="en-US" sz="1200" dirty="0" err="1">
+                <a:solidFill>
+                  <a:schemeClr val="tx1"/>
+                </a:solidFill>
+                <a:latin typeface="+mn-ea"/>
+              </a:rPr>
+              <a:t>재분산</a:t>
+            </a:r>
+            <a:r>
+              <a:rPr lang="en-US" altLang="ko-KR" sz="1200" dirty="0">
+                <a:solidFill>
+                  <a:schemeClr val="tx1"/>
+                </a:solidFill>
+                <a:latin typeface="+mn-ea"/>
+              </a:rPr>
+              <a:t>(Rebalancing)</a:t>
+            </a:r>
+            <a:r>
+              <a:rPr lang="ko-KR" altLang="en-US" sz="1200" dirty="0">
+                <a:solidFill>
+                  <a:schemeClr val="tx1"/>
+                </a:solidFill>
+                <a:latin typeface="+mn-ea"/>
+              </a:rPr>
+              <a:t>이나 조정 작업 없이 필요 시 즉각적으로 컴퓨팅 </a:t>
+            </a:r>
+            <a:r>
+              <a:rPr lang="ko-KR" altLang="en-US" sz="1200" dirty="0" err="1">
+                <a:solidFill>
+                  <a:schemeClr val="tx1"/>
+                </a:solidFill>
+                <a:latin typeface="+mn-ea"/>
+              </a:rPr>
+              <a:t>노드를</a:t>
+            </a:r>
+            <a:r>
+              <a:rPr lang="ko-KR" altLang="en-US" sz="1200" dirty="0">
+                <a:solidFill>
+                  <a:schemeClr val="tx1"/>
+                </a:solidFill>
+                <a:latin typeface="+mn-ea"/>
+              </a:rPr>
+              <a:t> 확장할 수 </a:t>
+            </a:r>
+            <a:r>
+              <a:rPr lang="ko-KR" altLang="en-US" sz="1200" dirty="0" smtClean="0">
+                <a:solidFill>
+                  <a:schemeClr val="tx1"/>
+                </a:solidFill>
+                <a:latin typeface="+mn-ea"/>
+              </a:rPr>
+              <a:t>있습니다</a:t>
+            </a:r>
+            <a:r>
+              <a:rPr lang="en-US" altLang="ko-KR" sz="1200" dirty="0" smtClean="0">
+                <a:solidFill>
+                  <a:schemeClr val="tx1"/>
+                </a:solidFill>
+                <a:latin typeface="+mn-ea"/>
+              </a:rPr>
+              <a:t>.</a:t>
+            </a:r>
+            <a:endParaRPr lang="en-US" altLang="ko-KR" sz="1200" dirty="0">
+              <a:solidFill>
+                <a:schemeClr val="tx1"/>
+              </a:solidFill>
+              <a:latin typeface="+mn-ea"/>
+            </a:endParaRPr>
+          </a:p>
+          <a:p>
+            <a:r>
+              <a:rPr lang="en-US" altLang="ko-KR" sz="1200" dirty="0" smtClean="0">
+                <a:solidFill>
+                  <a:schemeClr val="tx1"/>
+                </a:solidFill>
+                <a:latin typeface="+mn-ea"/>
+              </a:rPr>
+              <a:t>- </a:t>
+            </a:r>
+            <a:r>
+              <a:rPr lang="ko-KR" altLang="en-US" sz="1200" dirty="0" smtClean="0">
+                <a:solidFill>
+                  <a:schemeClr val="tx1"/>
+                </a:solidFill>
+                <a:latin typeface="+mn-ea"/>
+              </a:rPr>
+              <a:t>컴퓨팅 </a:t>
+            </a:r>
+            <a:r>
+              <a:rPr lang="ko-KR" altLang="en-US" sz="1200" dirty="0">
+                <a:solidFill>
+                  <a:schemeClr val="tx1"/>
+                </a:solidFill>
+                <a:latin typeface="+mn-ea"/>
+              </a:rPr>
+              <a:t>자원과 완전히 독립적으로 </a:t>
+            </a:r>
+            <a:r>
+              <a:rPr lang="ko-KR" altLang="en-US" sz="1200" dirty="0" err="1">
+                <a:solidFill>
+                  <a:schemeClr val="tx1"/>
+                </a:solidFill>
+                <a:latin typeface="+mn-ea"/>
+              </a:rPr>
+              <a:t>스토리지를</a:t>
+            </a:r>
+            <a:r>
+              <a:rPr lang="ko-KR" altLang="en-US" sz="1200" dirty="0">
+                <a:solidFill>
+                  <a:schemeClr val="tx1"/>
+                </a:solidFill>
+                <a:latin typeface="+mn-ea"/>
+              </a:rPr>
+              <a:t> 무한 확장할 수 </a:t>
+            </a:r>
+            <a:r>
+              <a:rPr lang="ko-KR" altLang="en-US" sz="1200" dirty="0" smtClean="0">
+                <a:solidFill>
+                  <a:schemeClr val="tx1"/>
+                </a:solidFill>
+                <a:latin typeface="+mn-ea"/>
+              </a:rPr>
+              <a:t>있습니다</a:t>
+            </a:r>
+            <a:r>
+              <a:rPr lang="en-US" altLang="ko-KR" sz="1200" dirty="0" smtClean="0">
+                <a:solidFill>
+                  <a:schemeClr val="tx1"/>
+                </a:solidFill>
+                <a:latin typeface="+mn-ea"/>
+              </a:rPr>
+              <a:t>.</a:t>
+            </a:r>
+            <a:endParaRPr lang="ko-KR" altLang="en-US" sz="1200" dirty="0">
+              <a:solidFill>
+                <a:schemeClr val="tx1">
+                  <a:lumMod val="85000"/>
+                  <a:lumOff val="15000"/>
+                </a:schemeClr>
+              </a:solidFill>
+              <a:latin typeface="Pretendard Variable Medium" panose="02000003000000020004" pitchFamily="2" charset="-127"/>
+              <a:ea typeface="Pretendard Variable Medium" panose="02000003000000020004" pitchFamily="2" charset="-127"/>
+              <a:cs typeface="Pretendard Variable Medium" panose="02000003000000020004" pitchFamily="2" charset="-127"/>
+            </a:endParaRPr>
+          </a:p>
+        </p:txBody>
+      </p:sp>
+      <p:sp>
+        <p:nvSpPr>
+          <p:cNvPr id="11" name="직사각형 10"/>
+          <p:cNvSpPr/>
+          <p:nvPr/>
+        </p:nvSpPr>
+        <p:spPr>
+          <a:xfrm>
+            <a:off x="3367874" y="2250839"/>
+            <a:ext cx="3079818" cy="1793624"/>
+          </a:xfrm>
+          <a:prstGeom prst="rect">
+            <a:avLst/>
+          </a:prstGeom>
+          <a:noFill/>
+          <a:ln>
+            <a:noFill/>
+          </a:ln>
+        </p:spPr>
+        <p:style>
+          <a:lnRef idx="2">
+            <a:schemeClr val="accent1">
+              <a:shade val="50000"/>
+            </a:schemeClr>
+          </a:lnRef>
+          <a:fillRef idx="1">
+            <a:schemeClr val="accent1"/>
+          </a:fillRef>
+          <a:effectRef idx="0">
+            <a:schemeClr val="accent1"/>
+          </a:effectRef>
+          <a:fontRef idx="minor">
+            <a:schemeClr val="lt1"/>
+          </a:fontRef>
+        </p:style>
+        <p:txBody>
+          <a:bodyPr rtlCol="0" anchor="ctr"/>
+          <a:lstStyle/>
+          <a:p>
+            <a:pPr algn="ctr"/>
+            <a:r>
+              <a:rPr lang="ko-KR" altLang="en-US" sz="1400" b="1" dirty="0">
+                <a:solidFill>
+                  <a:schemeClr val="tx1"/>
+                </a:solidFill>
+                <a:latin typeface="+mn-ea"/>
+              </a:rPr>
+              <a:t>비용 효율성 </a:t>
+            </a:r>
+            <a:endParaRPr lang="en-US" altLang="ko-KR" sz="1400" b="1" dirty="0" smtClean="0">
+              <a:solidFill>
+                <a:schemeClr val="tx1"/>
+              </a:solidFill>
+              <a:latin typeface="+mn-ea"/>
+            </a:endParaRPr>
+          </a:p>
+          <a:p>
+            <a:pPr algn="ctr"/>
+            <a:r>
+              <a:rPr lang="en-US" altLang="ko-KR" sz="1400" b="1" dirty="0" smtClean="0">
+                <a:solidFill>
+                  <a:schemeClr val="tx1"/>
+                </a:solidFill>
+                <a:latin typeface="+mn-ea"/>
+              </a:rPr>
+              <a:t>(</a:t>
+            </a:r>
+            <a:r>
+              <a:rPr lang="en-US" altLang="ko-KR" sz="1400" b="1" dirty="0">
+                <a:solidFill>
+                  <a:schemeClr val="tx1"/>
+                </a:solidFill>
+                <a:latin typeface="+mn-ea"/>
+              </a:rPr>
+              <a:t>Cost)</a:t>
+            </a:r>
+          </a:p>
+          <a:p>
+            <a:r>
+              <a:rPr lang="en-US" altLang="ko-KR" sz="1200" dirty="0" smtClean="0">
+                <a:solidFill>
+                  <a:schemeClr val="tx1"/>
+                </a:solidFill>
+                <a:latin typeface="+mn-ea"/>
+              </a:rPr>
+              <a:t>- </a:t>
+            </a:r>
+            <a:r>
+              <a:rPr lang="ko-KR" altLang="en-US" sz="1200" dirty="0" smtClean="0">
+                <a:solidFill>
+                  <a:schemeClr val="tx1"/>
+                </a:solidFill>
+                <a:latin typeface="+mn-ea"/>
+              </a:rPr>
+              <a:t>대용량의 </a:t>
+            </a:r>
+            <a:r>
+              <a:rPr lang="ko-KR" altLang="en-US" sz="1200" dirty="0">
+                <a:solidFill>
+                  <a:schemeClr val="tx1"/>
+                </a:solidFill>
+                <a:latin typeface="+mn-ea"/>
+              </a:rPr>
+              <a:t>영구 데이터를 비용 효율적인 오픈 오브젝트 </a:t>
+            </a:r>
+            <a:r>
+              <a:rPr lang="ko-KR" altLang="en-US" sz="1200" dirty="0" err="1">
+                <a:solidFill>
+                  <a:schemeClr val="tx1"/>
+                </a:solidFill>
+                <a:latin typeface="+mn-ea"/>
+              </a:rPr>
+              <a:t>스토리지에</a:t>
+            </a:r>
+            <a:r>
+              <a:rPr lang="ko-KR" altLang="en-US" sz="1200" dirty="0">
+                <a:solidFill>
+                  <a:schemeClr val="tx1"/>
+                </a:solidFill>
+                <a:latin typeface="+mn-ea"/>
+              </a:rPr>
+              <a:t> 저장하여 전체 스토리지 비용을 </a:t>
+            </a:r>
+            <a:r>
+              <a:rPr lang="ko-KR" altLang="en-US" sz="1200" dirty="0" smtClean="0">
+                <a:solidFill>
+                  <a:schemeClr val="tx1"/>
+                </a:solidFill>
+                <a:latin typeface="+mn-ea"/>
+              </a:rPr>
+              <a:t>최적화합니다</a:t>
+            </a:r>
+            <a:r>
+              <a:rPr lang="en-US" altLang="ko-KR" sz="1200" dirty="0" smtClean="0">
+                <a:solidFill>
+                  <a:schemeClr val="tx1"/>
+                </a:solidFill>
+                <a:latin typeface="+mn-ea"/>
+              </a:rPr>
+              <a:t>.</a:t>
+            </a:r>
+            <a:endParaRPr lang="en-US" altLang="ko-KR" sz="1200" dirty="0">
+              <a:solidFill>
+                <a:schemeClr val="tx1"/>
+              </a:solidFill>
+              <a:latin typeface="+mn-ea"/>
+            </a:endParaRPr>
+          </a:p>
+          <a:p>
+            <a:r>
+              <a:rPr lang="en-US" altLang="ko-KR" sz="1200" dirty="0" smtClean="0">
+                <a:solidFill>
+                  <a:schemeClr val="tx1"/>
+                </a:solidFill>
+                <a:latin typeface="+mn-ea"/>
+              </a:rPr>
+              <a:t>- </a:t>
+            </a:r>
+            <a:r>
+              <a:rPr lang="ko-KR" altLang="en-US" sz="1200" dirty="0" smtClean="0">
+                <a:solidFill>
+                  <a:schemeClr val="tx1"/>
+                </a:solidFill>
+                <a:latin typeface="+mn-ea"/>
+              </a:rPr>
+              <a:t>컴퓨팅 </a:t>
+            </a:r>
+            <a:r>
+              <a:rPr lang="ko-KR" altLang="en-US" sz="1200" dirty="0">
+                <a:solidFill>
+                  <a:schemeClr val="tx1"/>
+                </a:solidFill>
+                <a:latin typeface="+mn-ea"/>
+              </a:rPr>
+              <a:t>파워가 필요한 순간에만 동적으로 자원을 할당하고 활용하여 효율적인 컴퓨팅 비용 모델을 </a:t>
+            </a:r>
+            <a:r>
+              <a:rPr lang="ko-KR" altLang="en-US" sz="1200" dirty="0" smtClean="0">
+                <a:solidFill>
+                  <a:schemeClr val="tx1"/>
+                </a:solidFill>
+                <a:latin typeface="+mn-ea"/>
+              </a:rPr>
+              <a:t>제공합니다</a:t>
+            </a:r>
+            <a:endParaRPr lang="ko-KR" altLang="en-US" sz="1100" dirty="0">
+              <a:solidFill>
+                <a:schemeClr val="tx1">
+                  <a:lumMod val="85000"/>
+                  <a:lumOff val="15000"/>
+                </a:schemeClr>
+              </a:solidFill>
+              <a:latin typeface="Pretendard Variable Medium" panose="02000003000000020004" pitchFamily="2" charset="-127"/>
+              <a:ea typeface="Pretendard Variable Medium" panose="02000003000000020004" pitchFamily="2" charset="-127"/>
+              <a:cs typeface="Pretendard Variable Medium" panose="02000003000000020004" pitchFamily="2" charset="-127"/>
+            </a:endParaRPr>
+          </a:p>
+        </p:txBody>
+      </p:sp>
+      <p:sp>
+        <p:nvSpPr>
+          <p:cNvPr id="12" name="직사각형 11"/>
+          <p:cNvSpPr/>
+          <p:nvPr/>
+        </p:nvSpPr>
+        <p:spPr>
+          <a:xfrm>
+            <a:off x="6474489" y="2250839"/>
+            <a:ext cx="3079818" cy="1793624"/>
+          </a:xfrm>
+          <a:prstGeom prst="rect">
+            <a:avLst/>
+          </a:prstGeom>
+          <a:noFill/>
+          <a:ln>
+            <a:noFill/>
+          </a:ln>
+        </p:spPr>
+        <p:style>
+          <a:lnRef idx="2">
+            <a:schemeClr val="accent1">
+              <a:shade val="50000"/>
+            </a:schemeClr>
+          </a:lnRef>
+          <a:fillRef idx="1">
+            <a:schemeClr val="accent1"/>
+          </a:fillRef>
+          <a:effectRef idx="0">
+            <a:schemeClr val="accent1"/>
+          </a:effectRef>
+          <a:fontRef idx="minor">
+            <a:schemeClr val="lt1"/>
+          </a:fontRef>
+        </p:style>
+        <p:txBody>
+          <a:bodyPr rtlCol="0" anchor="ctr"/>
+          <a:lstStyle/>
+          <a:p>
+            <a:pPr algn="ctr"/>
+            <a:r>
+              <a:rPr lang="ko-KR" altLang="en-US" sz="1400" b="1" dirty="0" err="1">
+                <a:solidFill>
+                  <a:schemeClr val="tx1"/>
+                </a:solidFill>
+                <a:latin typeface="+mn-ea"/>
+              </a:rPr>
+              <a:t>고가용성</a:t>
+            </a:r>
+            <a:r>
+              <a:rPr lang="ko-KR" altLang="en-US" sz="1400" b="1" dirty="0">
+                <a:solidFill>
+                  <a:schemeClr val="tx1"/>
+                </a:solidFill>
+                <a:latin typeface="+mn-ea"/>
+              </a:rPr>
+              <a:t> 보장 </a:t>
+            </a:r>
+            <a:endParaRPr lang="en-US" altLang="ko-KR" sz="1400" b="1" dirty="0" smtClean="0">
+              <a:solidFill>
+                <a:schemeClr val="tx1"/>
+              </a:solidFill>
+              <a:latin typeface="+mn-ea"/>
+            </a:endParaRPr>
+          </a:p>
+          <a:p>
+            <a:pPr algn="ctr"/>
+            <a:r>
+              <a:rPr lang="en-US" altLang="ko-KR" sz="1400" b="1" dirty="0" smtClean="0">
+                <a:solidFill>
+                  <a:schemeClr val="tx1"/>
+                </a:solidFill>
+                <a:latin typeface="+mn-ea"/>
+              </a:rPr>
+              <a:t>(</a:t>
+            </a:r>
+            <a:r>
+              <a:rPr lang="en-US" altLang="ko-KR" sz="1400" b="1" dirty="0">
+                <a:solidFill>
+                  <a:schemeClr val="tx1"/>
+                </a:solidFill>
+                <a:latin typeface="+mn-ea"/>
+              </a:rPr>
+              <a:t>Availability)</a:t>
+            </a:r>
+          </a:p>
+          <a:p>
+            <a:r>
+              <a:rPr lang="en-US" altLang="ko-KR" sz="1200" dirty="0" smtClean="0">
+                <a:solidFill>
+                  <a:schemeClr val="tx1"/>
+                </a:solidFill>
+                <a:latin typeface="+mn-ea"/>
+              </a:rPr>
+              <a:t>- </a:t>
+            </a:r>
+            <a:r>
+              <a:rPr lang="ko-KR" altLang="en-US" sz="1200" dirty="0" err="1" smtClean="0">
+                <a:solidFill>
+                  <a:schemeClr val="tx1"/>
+                </a:solidFill>
+                <a:latin typeface="+mn-ea"/>
+              </a:rPr>
+              <a:t>퍼블릭</a:t>
+            </a:r>
+            <a:r>
+              <a:rPr lang="ko-KR" altLang="en-US" sz="1200" dirty="0" smtClean="0">
+                <a:solidFill>
+                  <a:schemeClr val="tx1"/>
+                </a:solidFill>
+                <a:latin typeface="+mn-ea"/>
+              </a:rPr>
+              <a:t> </a:t>
+            </a:r>
+            <a:r>
+              <a:rPr lang="ko-KR" altLang="en-US" sz="1200" dirty="0" err="1">
+                <a:solidFill>
+                  <a:schemeClr val="tx1"/>
+                </a:solidFill>
+                <a:latin typeface="+mn-ea"/>
+              </a:rPr>
+              <a:t>클라우드</a:t>
+            </a:r>
+            <a:r>
+              <a:rPr lang="ko-KR" altLang="en-US" sz="1200" dirty="0">
+                <a:solidFill>
+                  <a:schemeClr val="tx1"/>
+                </a:solidFill>
+                <a:latin typeface="+mn-ea"/>
+              </a:rPr>
+              <a:t> 및 </a:t>
+            </a:r>
+            <a:r>
+              <a:rPr lang="ko-KR" altLang="en-US" sz="1200" dirty="0" err="1">
+                <a:solidFill>
+                  <a:schemeClr val="tx1"/>
+                </a:solidFill>
+                <a:latin typeface="+mn-ea"/>
+              </a:rPr>
+              <a:t>엔터프라이즈급</a:t>
+            </a:r>
+            <a:r>
+              <a:rPr lang="ko-KR" altLang="en-US" sz="1200" dirty="0">
+                <a:solidFill>
+                  <a:schemeClr val="tx1"/>
+                </a:solidFill>
+                <a:latin typeface="+mn-ea"/>
+              </a:rPr>
+              <a:t> 오브젝트 </a:t>
+            </a:r>
+            <a:r>
+              <a:rPr lang="ko-KR" altLang="en-US" sz="1200" dirty="0" err="1">
+                <a:solidFill>
+                  <a:schemeClr val="tx1"/>
+                </a:solidFill>
+                <a:latin typeface="+mn-ea"/>
+              </a:rPr>
+              <a:t>스토리지의</a:t>
+            </a:r>
+            <a:r>
+              <a:rPr lang="ko-KR" altLang="en-US" sz="1200" dirty="0">
+                <a:solidFill>
+                  <a:schemeClr val="tx1"/>
+                </a:solidFill>
+                <a:latin typeface="+mn-ea"/>
+              </a:rPr>
+              <a:t> 최고 수준 </a:t>
+            </a:r>
+            <a:r>
+              <a:rPr lang="en-US" altLang="ko-KR" sz="1200" dirty="0">
+                <a:solidFill>
+                  <a:schemeClr val="tx1"/>
+                </a:solidFill>
+                <a:latin typeface="+mn-ea"/>
+              </a:rPr>
+              <a:t>SLA</a:t>
+            </a:r>
+            <a:r>
+              <a:rPr lang="ko-KR" altLang="en-US" sz="1200" dirty="0">
+                <a:solidFill>
+                  <a:schemeClr val="tx1"/>
+                </a:solidFill>
+                <a:latin typeface="+mn-ea"/>
+              </a:rPr>
+              <a:t>를 그대로 </a:t>
+            </a:r>
+            <a:r>
+              <a:rPr lang="ko-KR" altLang="en-US" sz="1200" dirty="0" smtClean="0">
+                <a:solidFill>
+                  <a:schemeClr val="tx1"/>
+                </a:solidFill>
+                <a:latin typeface="+mn-ea"/>
+              </a:rPr>
+              <a:t>상속받습니다</a:t>
+            </a:r>
+            <a:r>
+              <a:rPr lang="en-US" altLang="ko-KR" sz="1200" dirty="0" smtClean="0">
+                <a:solidFill>
+                  <a:schemeClr val="tx1"/>
+                </a:solidFill>
+                <a:latin typeface="+mn-ea"/>
+              </a:rPr>
+              <a:t>.</a:t>
+            </a:r>
+            <a:endParaRPr lang="en-US" altLang="ko-KR" sz="1200" dirty="0">
+              <a:solidFill>
+                <a:schemeClr val="tx1"/>
+              </a:solidFill>
+              <a:latin typeface="+mn-ea"/>
+            </a:endParaRPr>
+          </a:p>
+          <a:p>
+            <a:r>
+              <a:rPr lang="en-US" altLang="ko-KR" sz="1200" dirty="0" smtClean="0">
+                <a:solidFill>
+                  <a:schemeClr val="tx1"/>
+                </a:solidFill>
+                <a:latin typeface="+mn-ea"/>
+              </a:rPr>
+              <a:t>- </a:t>
+            </a:r>
+            <a:r>
+              <a:rPr lang="ko-KR" altLang="en-US" sz="1200" dirty="0" smtClean="0">
+                <a:solidFill>
+                  <a:schemeClr val="tx1"/>
+                </a:solidFill>
+                <a:latin typeface="+mn-ea"/>
+              </a:rPr>
+              <a:t>영구 </a:t>
+            </a:r>
+            <a:r>
+              <a:rPr lang="ko-KR" altLang="en-US" sz="1200" dirty="0">
+                <a:solidFill>
+                  <a:schemeClr val="tx1"/>
+                </a:solidFill>
+                <a:latin typeface="+mn-ea"/>
+              </a:rPr>
+              <a:t>데이터가 로컬 디스크가 아닌 중앙 오브젝트 </a:t>
+            </a:r>
+            <a:r>
+              <a:rPr lang="ko-KR" altLang="en-US" sz="1200" dirty="0" err="1">
+                <a:solidFill>
+                  <a:schemeClr val="tx1"/>
+                </a:solidFill>
+                <a:latin typeface="+mn-ea"/>
+              </a:rPr>
+              <a:t>스토리지에</a:t>
+            </a:r>
+            <a:r>
+              <a:rPr lang="ko-KR" altLang="en-US" sz="1200" dirty="0">
+                <a:solidFill>
+                  <a:schemeClr val="tx1"/>
+                </a:solidFill>
+                <a:latin typeface="+mn-ea"/>
+              </a:rPr>
+              <a:t> 저장되므로</a:t>
+            </a:r>
+            <a:r>
+              <a:rPr lang="en-US" altLang="ko-KR" sz="1200" dirty="0">
+                <a:solidFill>
+                  <a:schemeClr val="tx1"/>
+                </a:solidFill>
+                <a:latin typeface="+mn-ea"/>
+              </a:rPr>
+              <a:t>, </a:t>
+            </a:r>
+            <a:r>
+              <a:rPr lang="ko-KR" altLang="en-US" sz="1200" dirty="0">
+                <a:solidFill>
+                  <a:schemeClr val="tx1"/>
+                </a:solidFill>
+                <a:latin typeface="+mn-ea"/>
+              </a:rPr>
+              <a:t>특정 컴퓨팅 </a:t>
+            </a:r>
+            <a:r>
+              <a:rPr lang="ko-KR" altLang="en-US" sz="1200" dirty="0" err="1">
+                <a:solidFill>
+                  <a:schemeClr val="tx1"/>
+                </a:solidFill>
+                <a:latin typeface="+mn-ea"/>
+              </a:rPr>
+              <a:t>노드에</a:t>
+            </a:r>
+            <a:r>
+              <a:rPr lang="ko-KR" altLang="en-US" sz="1200" dirty="0">
+                <a:solidFill>
+                  <a:schemeClr val="tx1"/>
+                </a:solidFill>
+                <a:latin typeface="+mn-ea"/>
+              </a:rPr>
+              <a:t> 장애가 발생하거나 훼손되어도 데이터 유실이 전혀 </a:t>
+            </a:r>
+            <a:r>
+              <a:rPr lang="ko-KR" altLang="en-US" sz="1200" dirty="0" smtClean="0">
+                <a:solidFill>
+                  <a:schemeClr val="tx1"/>
+                </a:solidFill>
+                <a:latin typeface="+mn-ea"/>
+              </a:rPr>
+              <a:t>없습니다</a:t>
+            </a:r>
+            <a:r>
+              <a:rPr lang="en-US" altLang="ko-KR" sz="1200" dirty="0" smtClean="0">
+                <a:solidFill>
+                  <a:schemeClr val="tx1"/>
+                </a:solidFill>
+                <a:latin typeface="+mn-ea"/>
+              </a:rPr>
+              <a:t>.</a:t>
+            </a:r>
+            <a:endParaRPr lang="ko-KR" altLang="en-US" sz="1100" dirty="0">
+              <a:solidFill>
+                <a:schemeClr val="tx1">
+                  <a:lumMod val="85000"/>
+                  <a:lumOff val="15000"/>
+                </a:schemeClr>
+              </a:solidFill>
+              <a:latin typeface="Pretendard Variable Medium" panose="02000003000000020004" pitchFamily="2" charset="-127"/>
+              <a:ea typeface="Pretendard Variable Medium" panose="02000003000000020004" pitchFamily="2" charset="-127"/>
+              <a:cs typeface="Pretendard Variable Medium" panose="02000003000000020004" pitchFamily="2" charset="-127"/>
+            </a:endParaRPr>
+          </a:p>
+        </p:txBody>
+      </p:sp>
+      <p:sp>
+        <p:nvSpPr>
+          <p:cNvPr id="14" name="직사각형 13"/>
+          <p:cNvSpPr/>
+          <p:nvPr/>
+        </p:nvSpPr>
+        <p:spPr>
+          <a:xfrm>
+            <a:off x="168047" y="3985986"/>
+            <a:ext cx="9312729" cy="410170"/>
+          </a:xfrm>
+          <a:prstGeom prst="rect">
+            <a:avLst/>
+          </a:prstGeom>
+          <a:noFill/>
+          <a:ln>
+            <a:noFill/>
+          </a:ln>
+        </p:spPr>
+        <p:style>
+          <a:lnRef idx="2">
+            <a:schemeClr val="accent1">
+              <a:shade val="50000"/>
+            </a:schemeClr>
+          </a:lnRef>
+          <a:fillRef idx="1">
+            <a:schemeClr val="accent1"/>
+          </a:fillRef>
+          <a:effectRef idx="0">
+            <a:schemeClr val="accent1"/>
+          </a:effectRef>
+          <a:fontRef idx="minor">
+            <a:schemeClr val="lt1"/>
+          </a:fontRef>
+        </p:style>
+        <p:txBody>
+          <a:bodyPr rtlCol="0" anchor="ctr"/>
+          <a:lstStyle/>
+          <a:p>
+            <a:r>
+              <a:rPr lang="ko-KR" altLang="en-US" sz="1400" b="1" dirty="0">
+                <a:solidFill>
+                  <a:schemeClr val="tx1"/>
+                </a:solidFill>
+                <a:latin typeface="+mn-ea"/>
+              </a:rPr>
+              <a:t>혁신적인 컴퓨팅 및 스토리지 아키텍처</a:t>
+            </a:r>
+          </a:p>
+        </p:txBody>
+      </p:sp>
+      <p:sp>
+        <p:nvSpPr>
+          <p:cNvPr id="15" name="직사각형 14"/>
+          <p:cNvSpPr/>
+          <p:nvPr/>
+        </p:nvSpPr>
+        <p:spPr>
+          <a:xfrm>
+            <a:off x="50246" y="4232037"/>
+            <a:ext cx="1848894" cy="1817074"/>
+          </a:xfrm>
+          <a:prstGeom prst="rect">
+            <a:avLst/>
+          </a:prstGeom>
+          <a:noFill/>
+          <a:ln>
+            <a:noFill/>
+          </a:ln>
+        </p:spPr>
+        <p:style>
+          <a:lnRef idx="2">
+            <a:schemeClr val="accent1">
+              <a:shade val="50000"/>
+            </a:schemeClr>
+          </a:lnRef>
+          <a:fillRef idx="1">
+            <a:schemeClr val="accent1"/>
+          </a:fillRef>
+          <a:effectRef idx="0">
+            <a:schemeClr val="accent1"/>
+          </a:effectRef>
+          <a:fontRef idx="minor">
+            <a:schemeClr val="lt1"/>
+          </a:fontRef>
+        </p:style>
+        <p:txBody>
+          <a:bodyPr rtlCol="0" anchor="ctr"/>
+          <a:lstStyle/>
+          <a:p>
+            <a:r>
+              <a:rPr lang="ko-KR" altLang="en-US" sz="1200" dirty="0" smtClean="0">
+                <a:solidFill>
+                  <a:schemeClr val="tx1"/>
+                </a:solidFill>
+                <a:latin typeface="+mn-ea"/>
+              </a:rPr>
+              <a:t>🔹 스마트 </a:t>
+            </a:r>
+            <a:r>
+              <a:rPr lang="ko-KR" altLang="en-US" sz="1200" dirty="0" err="1">
+                <a:solidFill>
+                  <a:schemeClr val="tx1"/>
+                </a:solidFill>
+                <a:latin typeface="+mn-ea"/>
+              </a:rPr>
+              <a:t>캐싱</a:t>
+            </a:r>
+            <a:r>
+              <a:rPr lang="ko-KR" altLang="en-US" sz="1200" dirty="0">
+                <a:solidFill>
+                  <a:schemeClr val="tx1"/>
+                </a:solidFill>
+                <a:latin typeface="+mn-ea"/>
+              </a:rPr>
+              <a:t> </a:t>
+            </a:r>
+            <a:endParaRPr lang="en-US" altLang="ko-KR" sz="1200" dirty="0" smtClean="0">
+              <a:solidFill>
+                <a:schemeClr val="tx1"/>
+              </a:solidFill>
+              <a:latin typeface="+mn-ea"/>
+            </a:endParaRPr>
+          </a:p>
+          <a:p>
+            <a:r>
+              <a:rPr lang="en-US" altLang="ko-KR" sz="1200" dirty="0" smtClean="0">
+                <a:solidFill>
+                  <a:schemeClr val="tx1"/>
+                </a:solidFill>
+                <a:latin typeface="+mn-ea"/>
+              </a:rPr>
+              <a:t>(</a:t>
+            </a:r>
+            <a:r>
+              <a:rPr lang="en-US" altLang="ko-KR" sz="1200" dirty="0">
+                <a:solidFill>
+                  <a:schemeClr val="tx1"/>
+                </a:solidFill>
+                <a:latin typeface="+mn-ea"/>
+              </a:rPr>
+              <a:t>Compute Architecture</a:t>
+            </a:r>
+            <a:r>
+              <a:rPr lang="en-US" altLang="ko-KR" sz="1200" dirty="0" smtClean="0">
+                <a:solidFill>
+                  <a:schemeClr val="tx1"/>
+                </a:solidFill>
+                <a:latin typeface="+mn-ea"/>
+              </a:rPr>
+              <a:t>):</a:t>
+            </a:r>
+          </a:p>
+          <a:p>
+            <a:endParaRPr lang="en-US" altLang="ko-KR" sz="1200" dirty="0" smtClean="0">
+              <a:solidFill>
+                <a:schemeClr val="tx1"/>
+              </a:solidFill>
+              <a:latin typeface="+mn-ea"/>
+            </a:endParaRPr>
+          </a:p>
+          <a:p>
+            <a:endParaRPr lang="en-US" altLang="ko-KR" sz="1200" dirty="0" smtClean="0">
+              <a:solidFill>
+                <a:schemeClr val="tx1"/>
+              </a:solidFill>
+              <a:latin typeface="+mn-ea"/>
+            </a:endParaRPr>
+          </a:p>
+          <a:p>
+            <a:r>
+              <a:rPr lang="ko-KR" altLang="en-US" sz="1200" dirty="0" smtClean="0">
+                <a:solidFill>
+                  <a:schemeClr val="tx1"/>
+                </a:solidFill>
+                <a:latin typeface="+mn-ea"/>
+              </a:rPr>
+              <a:t>🔹 완벽한 트랜잭션 지원 </a:t>
+            </a:r>
+            <a:endParaRPr lang="en-US" altLang="ko-KR" sz="1200" dirty="0" smtClean="0">
+              <a:solidFill>
+                <a:schemeClr val="tx1"/>
+              </a:solidFill>
+              <a:latin typeface="+mn-ea"/>
+            </a:endParaRPr>
+          </a:p>
+          <a:p>
+            <a:r>
+              <a:rPr lang="en-US" altLang="ko-KR" sz="1200" dirty="0" smtClean="0">
+                <a:solidFill>
+                  <a:schemeClr val="tx1"/>
+                </a:solidFill>
+                <a:latin typeface="+mn-ea"/>
+              </a:rPr>
+              <a:t>(Storage Architecture):</a:t>
+            </a:r>
+          </a:p>
+          <a:p>
+            <a:endParaRPr lang="en-US" altLang="ko-KR" sz="1200" dirty="0" smtClean="0">
+              <a:solidFill>
+                <a:schemeClr val="tx1"/>
+              </a:solidFill>
+              <a:latin typeface="+mn-ea"/>
+            </a:endParaRPr>
+          </a:p>
+          <a:p>
+            <a:endParaRPr lang="en-US" altLang="ko-KR" sz="1200" dirty="0" smtClean="0">
+              <a:solidFill>
+                <a:schemeClr val="tx1"/>
+              </a:solidFill>
+              <a:latin typeface="+mn-ea"/>
+            </a:endParaRPr>
+          </a:p>
+          <a:p>
+            <a:r>
+              <a:rPr lang="ko-KR" altLang="en-US" sz="1200" dirty="0" smtClean="0">
+                <a:solidFill>
+                  <a:schemeClr val="tx1"/>
+                </a:solidFill>
+                <a:latin typeface="+mn-ea"/>
+              </a:rPr>
+              <a:t>🔹 인프라 </a:t>
+            </a:r>
+            <a:r>
+              <a:rPr lang="ko-KR" altLang="en-US" sz="1200" dirty="0">
+                <a:solidFill>
+                  <a:schemeClr val="tx1"/>
+                </a:solidFill>
+                <a:latin typeface="+mn-ea"/>
+              </a:rPr>
+              <a:t>종속성 </a:t>
+            </a:r>
+            <a:r>
+              <a:rPr lang="ko-KR" altLang="en-US" sz="1200" dirty="0" smtClean="0">
+                <a:solidFill>
+                  <a:schemeClr val="tx1"/>
+                </a:solidFill>
+                <a:latin typeface="+mn-ea"/>
+              </a:rPr>
+              <a:t>탈피</a:t>
+            </a:r>
+            <a:r>
+              <a:rPr lang="en-US" altLang="ko-KR" sz="1200" dirty="0" smtClean="0">
+                <a:solidFill>
+                  <a:schemeClr val="tx1"/>
+                </a:solidFill>
+                <a:latin typeface="+mn-ea"/>
+              </a:rPr>
+              <a:t>:</a:t>
+            </a:r>
+            <a:endParaRPr lang="ko-KR" altLang="en-US" sz="1100" dirty="0">
+              <a:solidFill>
+                <a:schemeClr val="tx1">
+                  <a:lumMod val="85000"/>
+                  <a:lumOff val="15000"/>
+                </a:schemeClr>
+              </a:solidFill>
+              <a:latin typeface="Pretendard Variable Medium" panose="02000003000000020004" pitchFamily="2" charset="-127"/>
+              <a:ea typeface="Pretendard Variable Medium" panose="02000003000000020004" pitchFamily="2" charset="-127"/>
+              <a:cs typeface="Pretendard Variable Medium" panose="02000003000000020004" pitchFamily="2" charset="-127"/>
+            </a:endParaRPr>
+          </a:p>
+        </p:txBody>
+      </p:sp>
+      <p:sp>
+        <p:nvSpPr>
+          <p:cNvPr id="17" name="직사각형 16"/>
+          <p:cNvSpPr/>
+          <p:nvPr/>
+        </p:nvSpPr>
+        <p:spPr>
+          <a:xfrm>
+            <a:off x="1828800" y="3997575"/>
+            <a:ext cx="7891463" cy="2309446"/>
+          </a:xfrm>
+          <a:prstGeom prst="rect">
+            <a:avLst/>
+          </a:prstGeom>
+          <a:noFill/>
+          <a:ln>
+            <a:noFill/>
+          </a:ln>
+        </p:spPr>
+        <p:style>
+          <a:lnRef idx="2">
+            <a:schemeClr val="accent1">
+              <a:shade val="50000"/>
+            </a:schemeClr>
+          </a:lnRef>
+          <a:fillRef idx="1">
+            <a:schemeClr val="accent1"/>
+          </a:fillRef>
+          <a:effectRef idx="0">
+            <a:schemeClr val="accent1"/>
+          </a:effectRef>
+          <a:fontRef idx="minor">
+            <a:schemeClr val="lt1"/>
+          </a:fontRef>
+        </p:style>
+        <p:txBody>
+          <a:bodyPr rtlCol="0" anchor="ctr"/>
+          <a:lstStyle/>
+          <a:p>
+            <a:r>
+              <a:rPr lang="ko-KR" altLang="en-US" sz="1200" dirty="0" smtClean="0">
+                <a:solidFill>
+                  <a:schemeClr val="tx1"/>
+                </a:solidFill>
+                <a:latin typeface="+mn-ea"/>
+              </a:rPr>
+              <a:t>각 </a:t>
+            </a:r>
+            <a:r>
+              <a:rPr lang="ko-KR" altLang="en-US" sz="1200" dirty="0">
+                <a:solidFill>
+                  <a:schemeClr val="tx1"/>
+                </a:solidFill>
+                <a:latin typeface="+mn-ea"/>
+              </a:rPr>
+              <a:t>컴퓨팅 </a:t>
+            </a:r>
+            <a:r>
+              <a:rPr lang="ko-KR" altLang="en-US" sz="1200" dirty="0" err="1">
+                <a:solidFill>
+                  <a:schemeClr val="tx1"/>
+                </a:solidFill>
+                <a:latin typeface="+mn-ea"/>
+              </a:rPr>
+              <a:t>노드는</a:t>
+            </a:r>
+            <a:r>
+              <a:rPr lang="ko-KR" altLang="en-US" sz="1200" dirty="0">
+                <a:solidFill>
+                  <a:schemeClr val="tx1"/>
+                </a:solidFill>
+                <a:latin typeface="+mn-ea"/>
+              </a:rPr>
+              <a:t> 영구 데이터를 자체 보관하지 않습니다</a:t>
+            </a:r>
+            <a:r>
+              <a:rPr lang="en-US" altLang="ko-KR" sz="1200" dirty="0">
+                <a:solidFill>
+                  <a:schemeClr val="tx1"/>
+                </a:solidFill>
+                <a:latin typeface="+mn-ea"/>
+              </a:rPr>
+              <a:t>[cite: 991]. </a:t>
+            </a:r>
+            <a:r>
+              <a:rPr lang="ko-KR" altLang="en-US" sz="1200" dirty="0">
+                <a:solidFill>
+                  <a:schemeClr val="tx1"/>
+                </a:solidFill>
+                <a:latin typeface="+mn-ea"/>
+              </a:rPr>
+              <a:t>대신 자주 활용되는 </a:t>
+            </a:r>
+            <a:r>
+              <a:rPr lang="ko-KR" altLang="en-US" sz="1200" dirty="0" err="1">
+                <a:solidFill>
+                  <a:schemeClr val="tx1"/>
+                </a:solidFill>
+                <a:latin typeface="+mn-ea"/>
+              </a:rPr>
+              <a:t>핫</a:t>
+            </a:r>
+            <a:r>
+              <a:rPr lang="ko-KR" altLang="en-US" sz="1200" dirty="0">
+                <a:solidFill>
+                  <a:schemeClr val="tx1"/>
+                </a:solidFill>
+                <a:latin typeface="+mn-ea"/>
+              </a:rPr>
+              <a:t> 데이터</a:t>
+            </a:r>
+            <a:r>
+              <a:rPr lang="en-US" altLang="ko-KR" sz="1200" dirty="0">
+                <a:solidFill>
+                  <a:schemeClr val="tx1"/>
+                </a:solidFill>
+                <a:latin typeface="+mn-ea"/>
+              </a:rPr>
+              <a:t>(Hot Data)</a:t>
+            </a:r>
+            <a:r>
+              <a:rPr lang="ko-KR" altLang="en-US" sz="1200" dirty="0">
+                <a:solidFill>
+                  <a:schemeClr val="tx1"/>
+                </a:solidFill>
+                <a:latin typeface="+mn-ea"/>
+              </a:rPr>
+              <a:t>만 로컬 디스크 캐시에 보관하며 </a:t>
+            </a:r>
+            <a:r>
+              <a:rPr lang="en-US" altLang="ko-KR" sz="1200" dirty="0">
+                <a:solidFill>
+                  <a:schemeClr val="tx1"/>
+                </a:solidFill>
+                <a:latin typeface="+mn-ea"/>
+              </a:rPr>
+              <a:t>LRU(Least Recently Used) </a:t>
+            </a:r>
+            <a:r>
+              <a:rPr lang="ko-KR" altLang="en-US" sz="1200" dirty="0">
+                <a:solidFill>
+                  <a:schemeClr val="tx1"/>
+                </a:solidFill>
+                <a:latin typeface="+mn-ea"/>
+              </a:rPr>
+              <a:t>알고리즘으로 관리하여 쿼리 성능을 </a:t>
+            </a:r>
+            <a:r>
+              <a:rPr lang="ko-KR" altLang="en-US" sz="1200" dirty="0" smtClean="0">
+                <a:solidFill>
+                  <a:schemeClr val="tx1"/>
+                </a:solidFill>
+                <a:latin typeface="+mn-ea"/>
+              </a:rPr>
+              <a:t>극대화합니다</a:t>
+            </a:r>
+            <a:r>
+              <a:rPr lang="en-US" altLang="ko-KR" sz="1200" dirty="0" smtClean="0">
+                <a:solidFill>
+                  <a:schemeClr val="tx1"/>
+                </a:solidFill>
+                <a:latin typeface="+mn-ea"/>
+              </a:rPr>
+              <a:t>.</a:t>
+            </a:r>
+          </a:p>
+          <a:p>
+            <a:endParaRPr lang="en-US" altLang="ko-KR" sz="1200" dirty="0">
+              <a:solidFill>
+                <a:schemeClr val="tx1"/>
+              </a:solidFill>
+              <a:latin typeface="+mn-ea"/>
+            </a:endParaRPr>
+          </a:p>
+          <a:p>
+            <a:r>
+              <a:rPr lang="ko-KR" altLang="en-US" sz="1200" dirty="0" smtClean="0">
+                <a:solidFill>
+                  <a:schemeClr val="tx1"/>
+                </a:solidFill>
+                <a:latin typeface="+mn-ea"/>
+              </a:rPr>
+              <a:t>오브젝트 </a:t>
+            </a:r>
+            <a:r>
+              <a:rPr lang="ko-KR" altLang="en-US" sz="1200" dirty="0" err="1">
+                <a:solidFill>
+                  <a:schemeClr val="tx1"/>
+                </a:solidFill>
+                <a:latin typeface="+mn-ea"/>
+              </a:rPr>
+              <a:t>스토리지를</a:t>
+            </a:r>
+            <a:r>
+              <a:rPr lang="ko-KR" altLang="en-US" sz="1200" dirty="0">
+                <a:solidFill>
+                  <a:schemeClr val="tx1"/>
+                </a:solidFill>
+                <a:latin typeface="+mn-ea"/>
+              </a:rPr>
+              <a:t> 사용함에도 </a:t>
+            </a:r>
+            <a:r>
+              <a:rPr lang="en-US" altLang="ko-KR" sz="1200" dirty="0">
+                <a:solidFill>
+                  <a:schemeClr val="tx1"/>
+                </a:solidFill>
+                <a:latin typeface="+mn-ea"/>
+              </a:rPr>
+              <a:t>Write-Once </a:t>
+            </a:r>
+            <a:r>
+              <a:rPr lang="ko-KR" altLang="en-US" sz="1200" dirty="0">
+                <a:solidFill>
+                  <a:schemeClr val="tx1"/>
+                </a:solidFill>
+                <a:latin typeface="+mn-ea"/>
+              </a:rPr>
+              <a:t>기반으로 동작하여 </a:t>
+            </a:r>
+            <a:r>
+              <a:rPr lang="en-US" altLang="ko-KR" sz="1200" dirty="0">
+                <a:solidFill>
+                  <a:schemeClr val="tx1"/>
+                </a:solidFill>
+                <a:latin typeface="+mn-ea"/>
+              </a:rPr>
+              <a:t>DML(</a:t>
+            </a:r>
+            <a:r>
+              <a:rPr lang="ko-KR" altLang="en-US" sz="1200" dirty="0">
+                <a:solidFill>
+                  <a:schemeClr val="tx1"/>
+                </a:solidFill>
+                <a:latin typeface="+mn-ea"/>
+              </a:rPr>
+              <a:t>갱신</a:t>
+            </a:r>
+            <a:r>
+              <a:rPr lang="en-US" altLang="ko-KR" sz="1200" dirty="0">
+                <a:solidFill>
+                  <a:schemeClr val="tx1"/>
+                </a:solidFill>
+                <a:latin typeface="+mn-ea"/>
+              </a:rPr>
+              <a:t>/</a:t>
+            </a:r>
+            <a:r>
+              <a:rPr lang="ko-KR" altLang="en-US" sz="1200" dirty="0">
+                <a:solidFill>
+                  <a:schemeClr val="tx1"/>
+                </a:solidFill>
+                <a:latin typeface="+mn-ea"/>
+              </a:rPr>
+              <a:t>삭제 등</a:t>
+            </a:r>
+            <a:r>
+              <a:rPr lang="en-US" altLang="ko-KR" sz="1200" dirty="0">
+                <a:solidFill>
+                  <a:schemeClr val="tx1"/>
+                </a:solidFill>
+                <a:latin typeface="+mn-ea"/>
+              </a:rPr>
+              <a:t>) </a:t>
+            </a:r>
+            <a:r>
+              <a:rPr lang="ko-KR" altLang="en-US" sz="1200" dirty="0">
+                <a:solidFill>
+                  <a:schemeClr val="tx1"/>
+                </a:solidFill>
+                <a:latin typeface="+mn-ea"/>
+              </a:rPr>
+              <a:t>처리에 제약이 </a:t>
+            </a:r>
+            <a:r>
+              <a:rPr lang="ko-KR" altLang="en-US" sz="1200" dirty="0" smtClean="0">
+                <a:solidFill>
+                  <a:schemeClr val="tx1"/>
+                </a:solidFill>
+                <a:latin typeface="+mn-ea"/>
+              </a:rPr>
+              <a:t>없습니다</a:t>
+            </a:r>
+            <a:r>
+              <a:rPr lang="en-US" altLang="ko-KR" sz="1200" dirty="0" smtClean="0">
+                <a:solidFill>
+                  <a:schemeClr val="tx1"/>
+                </a:solidFill>
+                <a:latin typeface="+mn-ea"/>
+              </a:rPr>
+              <a:t>. </a:t>
+            </a:r>
+            <a:r>
+              <a:rPr lang="ko-KR" altLang="en-US" sz="1200" dirty="0" smtClean="0">
+                <a:solidFill>
+                  <a:schemeClr val="tx1"/>
+                </a:solidFill>
+                <a:latin typeface="+mn-ea"/>
+              </a:rPr>
+              <a:t>트랜잭션 </a:t>
+            </a:r>
+            <a:r>
+              <a:rPr lang="ko-KR" altLang="en-US" sz="1200" dirty="0">
+                <a:solidFill>
+                  <a:schemeClr val="tx1"/>
+                </a:solidFill>
+                <a:latin typeface="+mn-ea"/>
+              </a:rPr>
+              <a:t>발생 시 </a:t>
+            </a:r>
+            <a:r>
+              <a:rPr lang="ko-KR" altLang="en-US" sz="1200" dirty="0" err="1">
+                <a:solidFill>
+                  <a:schemeClr val="tx1"/>
+                </a:solidFill>
+                <a:latin typeface="+mn-ea"/>
+              </a:rPr>
+              <a:t>커밋</a:t>
+            </a:r>
+            <a:r>
+              <a:rPr lang="en-US" altLang="ko-KR" sz="1200" dirty="0">
+                <a:solidFill>
+                  <a:schemeClr val="tx1"/>
+                </a:solidFill>
+                <a:latin typeface="+mn-ea"/>
+              </a:rPr>
+              <a:t>(Commit)</a:t>
+            </a:r>
+            <a:r>
+              <a:rPr lang="ko-KR" altLang="en-US" sz="1200" dirty="0">
+                <a:solidFill>
+                  <a:schemeClr val="tx1"/>
+                </a:solidFill>
+                <a:latin typeface="+mn-ea"/>
+              </a:rPr>
+              <a:t>된 데이터는 </a:t>
+            </a:r>
+            <a:r>
+              <a:rPr lang="ko-KR" altLang="en-US" sz="1200" dirty="0" err="1">
+                <a:solidFill>
+                  <a:schemeClr val="tx1"/>
+                </a:solidFill>
+                <a:latin typeface="+mn-ea"/>
+              </a:rPr>
+              <a:t>노드</a:t>
+            </a:r>
+            <a:r>
+              <a:rPr lang="ko-KR" altLang="en-US" sz="1200" dirty="0">
+                <a:solidFill>
+                  <a:schemeClr val="tx1"/>
+                </a:solidFill>
+                <a:latin typeface="+mn-ea"/>
+              </a:rPr>
+              <a:t> 수에 맞춘 최적의 조각으로 나뉘어 저장되며</a:t>
+            </a:r>
+            <a:r>
+              <a:rPr lang="en-US" altLang="ko-KR" sz="1200" dirty="0">
+                <a:solidFill>
+                  <a:schemeClr val="tx1"/>
+                </a:solidFill>
+                <a:latin typeface="+mn-ea"/>
+              </a:rPr>
+              <a:t>, </a:t>
+            </a:r>
+            <a:r>
+              <a:rPr lang="ko-KR" altLang="en-US" sz="1200" dirty="0">
+                <a:solidFill>
+                  <a:schemeClr val="tx1"/>
+                </a:solidFill>
+                <a:latin typeface="+mn-ea"/>
+              </a:rPr>
+              <a:t>즉시 모든 서브클러스터에서 동시에 조회할 수 </a:t>
+            </a:r>
+            <a:r>
+              <a:rPr lang="ko-KR" altLang="en-US" sz="1200" dirty="0" smtClean="0">
+                <a:solidFill>
+                  <a:schemeClr val="tx1"/>
+                </a:solidFill>
+                <a:latin typeface="+mn-ea"/>
+              </a:rPr>
+              <a:t>있습니다</a:t>
+            </a:r>
+            <a:r>
+              <a:rPr lang="en-US" altLang="ko-KR" sz="1200" dirty="0" smtClean="0">
+                <a:solidFill>
+                  <a:schemeClr val="tx1"/>
+                </a:solidFill>
+                <a:latin typeface="+mn-ea"/>
+              </a:rPr>
+              <a:t>.</a:t>
+            </a:r>
+          </a:p>
+          <a:p>
+            <a:endParaRPr lang="en-US" altLang="ko-KR" sz="1200" dirty="0" smtClean="0">
+              <a:solidFill>
+                <a:schemeClr val="tx1"/>
+              </a:solidFill>
+              <a:latin typeface="+mn-ea"/>
+            </a:endParaRPr>
+          </a:p>
+          <a:p>
+            <a:r>
+              <a:rPr lang="ko-KR" altLang="en-US" sz="1200" dirty="0" smtClean="0">
+                <a:solidFill>
+                  <a:schemeClr val="tx1"/>
+                </a:solidFill>
+                <a:latin typeface="+mn-ea"/>
+              </a:rPr>
+              <a:t>특정 </a:t>
+            </a:r>
+            <a:r>
+              <a:rPr lang="ko-KR" altLang="en-US" sz="1200" dirty="0">
+                <a:solidFill>
+                  <a:schemeClr val="tx1"/>
+                </a:solidFill>
+                <a:latin typeface="+mn-ea"/>
+              </a:rPr>
+              <a:t>하드웨어에 종속되지 않고 </a:t>
+            </a:r>
+            <a:r>
+              <a:rPr lang="en-US" altLang="ko-KR" sz="1200" dirty="0">
+                <a:solidFill>
+                  <a:schemeClr val="tx1"/>
+                </a:solidFill>
+                <a:latin typeface="+mn-ea"/>
+              </a:rPr>
+              <a:t>AWS, Azure, GCP </a:t>
+            </a:r>
+            <a:r>
+              <a:rPr lang="ko-KR" altLang="en-US" sz="1200" dirty="0">
+                <a:solidFill>
+                  <a:schemeClr val="tx1"/>
+                </a:solidFill>
+                <a:latin typeface="+mn-ea"/>
+              </a:rPr>
+              <a:t>같은 </a:t>
+            </a:r>
+            <a:r>
+              <a:rPr lang="ko-KR" altLang="en-US" sz="1200" dirty="0" err="1">
+                <a:solidFill>
+                  <a:schemeClr val="tx1"/>
+                </a:solidFill>
+                <a:latin typeface="+mn-ea"/>
+              </a:rPr>
+              <a:t>퍼블릭</a:t>
+            </a:r>
+            <a:r>
+              <a:rPr lang="ko-KR" altLang="en-US" sz="1200" dirty="0">
+                <a:solidFill>
+                  <a:schemeClr val="tx1"/>
+                </a:solidFill>
+                <a:latin typeface="+mn-ea"/>
+              </a:rPr>
+              <a:t> </a:t>
+            </a:r>
+            <a:r>
+              <a:rPr lang="ko-KR" altLang="en-US" sz="1200" dirty="0" err="1">
+                <a:solidFill>
+                  <a:schemeClr val="tx1"/>
+                </a:solidFill>
+                <a:latin typeface="+mn-ea"/>
+              </a:rPr>
+              <a:t>클라우드는</a:t>
+            </a:r>
+            <a:r>
+              <a:rPr lang="ko-KR" altLang="en-US" sz="1200" dirty="0">
+                <a:solidFill>
+                  <a:schemeClr val="tx1"/>
+                </a:solidFill>
+                <a:latin typeface="+mn-ea"/>
+              </a:rPr>
+              <a:t> 물론 </a:t>
+            </a:r>
+            <a:r>
+              <a:rPr lang="en-US" altLang="ko-KR" sz="1200" dirty="0" err="1">
+                <a:solidFill>
+                  <a:schemeClr val="tx1"/>
+                </a:solidFill>
+                <a:latin typeface="+mn-ea"/>
+              </a:rPr>
+              <a:t>Kubernetes</a:t>
+            </a:r>
+            <a:r>
+              <a:rPr lang="en-US" altLang="ko-KR" sz="1200" dirty="0">
+                <a:solidFill>
+                  <a:schemeClr val="tx1"/>
+                </a:solidFill>
+                <a:latin typeface="+mn-ea"/>
+              </a:rPr>
+              <a:t> </a:t>
+            </a:r>
+            <a:r>
+              <a:rPr lang="ko-KR" altLang="en-US" sz="1200" dirty="0">
+                <a:solidFill>
+                  <a:schemeClr val="tx1"/>
+                </a:solidFill>
+                <a:latin typeface="+mn-ea"/>
+              </a:rPr>
+              <a:t>환경</a:t>
+            </a:r>
+            <a:r>
+              <a:rPr lang="en-US" altLang="ko-KR" sz="1200" dirty="0">
+                <a:solidFill>
+                  <a:schemeClr val="tx1"/>
+                </a:solidFill>
+                <a:latin typeface="+mn-ea"/>
+              </a:rPr>
+              <a:t>, VMware, </a:t>
+            </a:r>
+            <a:r>
+              <a:rPr lang="ko-KR" altLang="en-US" sz="1200" dirty="0">
+                <a:solidFill>
+                  <a:schemeClr val="tx1"/>
+                </a:solidFill>
+                <a:latin typeface="+mn-ea"/>
+              </a:rPr>
+              <a:t>그리고 </a:t>
+            </a:r>
+            <a:r>
+              <a:rPr lang="ko-KR" altLang="en-US" sz="1200" dirty="0" err="1">
+                <a:solidFill>
+                  <a:schemeClr val="tx1"/>
+                </a:solidFill>
+                <a:latin typeface="+mn-ea"/>
+              </a:rPr>
+              <a:t>온프레미스</a:t>
+            </a:r>
+            <a:r>
+              <a:rPr lang="en-US" altLang="ko-KR" sz="1200" dirty="0">
+                <a:solidFill>
+                  <a:schemeClr val="tx1"/>
+                </a:solidFill>
+                <a:latin typeface="+mn-ea"/>
+              </a:rPr>
+              <a:t>(Dell, </a:t>
+            </a:r>
+            <a:r>
+              <a:rPr lang="en-US" altLang="ko-KR" sz="1200" dirty="0" err="1">
+                <a:solidFill>
+                  <a:schemeClr val="tx1"/>
+                </a:solidFill>
+                <a:latin typeface="+mn-ea"/>
+              </a:rPr>
+              <a:t>PureStorage</a:t>
+            </a:r>
+            <a:r>
+              <a:rPr lang="en-US" altLang="ko-KR" sz="1200" dirty="0">
+                <a:solidFill>
+                  <a:schemeClr val="tx1"/>
+                </a:solidFill>
+                <a:latin typeface="+mn-ea"/>
+              </a:rPr>
+              <a:t>, </a:t>
+            </a:r>
+            <a:r>
+              <a:rPr lang="en-US" altLang="ko-KR" sz="1200" dirty="0" err="1">
+                <a:solidFill>
+                  <a:schemeClr val="tx1"/>
+                </a:solidFill>
+                <a:latin typeface="+mn-ea"/>
+              </a:rPr>
+              <a:t>MinIO</a:t>
+            </a:r>
+            <a:r>
+              <a:rPr lang="en-US" altLang="ko-KR" sz="1200" dirty="0">
+                <a:solidFill>
+                  <a:schemeClr val="tx1"/>
+                </a:solidFill>
+                <a:latin typeface="+mn-ea"/>
+              </a:rPr>
+              <a:t> </a:t>
+            </a:r>
+            <a:r>
+              <a:rPr lang="ko-KR" altLang="en-US" sz="1200" dirty="0">
+                <a:solidFill>
+                  <a:schemeClr val="tx1"/>
+                </a:solidFill>
+                <a:latin typeface="+mn-ea"/>
+              </a:rPr>
+              <a:t>등</a:t>
+            </a:r>
+            <a:r>
+              <a:rPr lang="en-US" altLang="ko-KR" sz="1200" dirty="0">
+                <a:solidFill>
+                  <a:schemeClr val="tx1"/>
+                </a:solidFill>
+                <a:latin typeface="+mn-ea"/>
+              </a:rPr>
+              <a:t>) </a:t>
+            </a:r>
+            <a:r>
+              <a:rPr lang="ko-KR" altLang="en-US" sz="1200" dirty="0" err="1">
+                <a:solidFill>
+                  <a:schemeClr val="tx1"/>
+                </a:solidFill>
+                <a:latin typeface="+mn-ea"/>
+              </a:rPr>
+              <a:t>하이브리드</a:t>
+            </a:r>
+            <a:r>
+              <a:rPr lang="ko-KR" altLang="en-US" sz="1200" dirty="0">
+                <a:solidFill>
+                  <a:schemeClr val="tx1"/>
+                </a:solidFill>
+                <a:latin typeface="+mn-ea"/>
+              </a:rPr>
+              <a:t> 구성을 완벽하게 </a:t>
+            </a:r>
+            <a:r>
+              <a:rPr lang="ko-KR" altLang="en-US" sz="1200" dirty="0" smtClean="0">
+                <a:solidFill>
+                  <a:schemeClr val="tx1"/>
+                </a:solidFill>
+                <a:latin typeface="+mn-ea"/>
+              </a:rPr>
+              <a:t>지원합니다</a:t>
+            </a:r>
+            <a:r>
+              <a:rPr lang="en-US" altLang="ko-KR" sz="1200" dirty="0" smtClean="0">
+                <a:solidFill>
+                  <a:schemeClr val="tx1"/>
+                </a:solidFill>
+                <a:latin typeface="+mn-ea"/>
+              </a:rPr>
+              <a:t>.</a:t>
+            </a:r>
+            <a:endParaRPr lang="ko-KR" altLang="en-US" sz="1100" dirty="0">
+              <a:solidFill>
+                <a:schemeClr val="tx1">
+                  <a:lumMod val="85000"/>
+                  <a:lumOff val="15000"/>
+                </a:schemeClr>
+              </a:solidFill>
+              <a:latin typeface="Pretendard Variable Medium" panose="02000003000000020004" pitchFamily="2" charset="-127"/>
+              <a:ea typeface="Pretendard Variable Medium" panose="02000003000000020004" pitchFamily="2" charset="-127"/>
+              <a:cs typeface="Pretendard Variable Medium" panose="02000003000000020004" pitchFamily="2" charset="-127"/>
+            </a:endParaRPr>
+          </a:p>
+        </p:txBody>
+      </p:sp>
+      <p:sp>
+        <p:nvSpPr>
+          <p:cNvPr id="20" name="직사각형 19"/>
+          <p:cNvSpPr/>
+          <p:nvPr/>
+        </p:nvSpPr>
+        <p:spPr>
+          <a:xfrm>
+            <a:off x="0" y="6063759"/>
+            <a:ext cx="9312729" cy="410170"/>
+          </a:xfrm>
+          <a:prstGeom prst="rect">
+            <a:avLst/>
+          </a:prstGeom>
+          <a:noFill/>
+          <a:ln>
+            <a:noFill/>
+          </a:ln>
+        </p:spPr>
+        <p:style>
+          <a:lnRef idx="2">
+            <a:schemeClr val="accent1">
+              <a:shade val="50000"/>
+            </a:schemeClr>
+          </a:lnRef>
+          <a:fillRef idx="1">
+            <a:schemeClr val="accent1"/>
+          </a:fillRef>
+          <a:effectRef idx="0">
+            <a:schemeClr val="accent1"/>
+          </a:effectRef>
+          <a:fontRef idx="minor">
+            <a:schemeClr val="lt1"/>
+          </a:fontRef>
+        </p:style>
+        <p:txBody>
+          <a:bodyPr rtlCol="0" anchor="ctr"/>
+          <a:lstStyle/>
+          <a:p>
+            <a:r>
+              <a:rPr lang="ko-KR" altLang="en-US" sz="1400" b="1" dirty="0">
+                <a:solidFill>
+                  <a:schemeClr val="tx1"/>
+                </a:solidFill>
+                <a:latin typeface="+mn-ea"/>
+              </a:rPr>
+              <a:t>실전 </a:t>
+            </a:r>
+            <a:r>
+              <a:rPr lang="en-US" altLang="ko-KR" sz="1400" b="1" dirty="0">
+                <a:solidFill>
+                  <a:schemeClr val="tx1"/>
+                </a:solidFill>
+                <a:latin typeface="+mn-ea"/>
+              </a:rPr>
+              <a:t>Use Case: </a:t>
+            </a:r>
+            <a:r>
+              <a:rPr lang="ko-KR" altLang="en-US" sz="1400" b="1" dirty="0">
+                <a:solidFill>
+                  <a:schemeClr val="tx1"/>
+                </a:solidFill>
+                <a:latin typeface="+mn-ea"/>
+              </a:rPr>
+              <a:t>동시성 확보 및 운영 단순화</a:t>
+            </a:r>
+          </a:p>
+        </p:txBody>
+      </p:sp>
+      <p:sp>
+        <p:nvSpPr>
+          <p:cNvPr id="21" name="직사각형 20"/>
+          <p:cNvSpPr/>
+          <p:nvPr/>
+        </p:nvSpPr>
+        <p:spPr>
+          <a:xfrm>
+            <a:off x="148475" y="6150709"/>
+            <a:ext cx="4692596" cy="3001106"/>
+          </a:xfrm>
+          <a:prstGeom prst="rect">
+            <a:avLst/>
+          </a:prstGeom>
+          <a:noFill/>
+          <a:ln>
+            <a:noFill/>
+          </a:ln>
+        </p:spPr>
+        <p:style>
+          <a:lnRef idx="2">
+            <a:schemeClr val="accent1">
+              <a:shade val="50000"/>
+            </a:schemeClr>
+          </a:lnRef>
+          <a:fillRef idx="1">
+            <a:schemeClr val="accent1"/>
+          </a:fillRef>
+          <a:effectRef idx="0">
+            <a:schemeClr val="accent1"/>
+          </a:effectRef>
+          <a:fontRef idx="minor">
+            <a:schemeClr val="lt1"/>
+          </a:fontRef>
+        </p:style>
+        <p:txBody>
+          <a:bodyPr rtlCol="0" anchor="ctr"/>
+          <a:lstStyle/>
+          <a:p>
+            <a:pPr algn="ctr"/>
+            <a:r>
+              <a:rPr lang="ko-KR" altLang="en-US" sz="1200" b="1" dirty="0">
+                <a:solidFill>
+                  <a:schemeClr val="tx1"/>
+                </a:solidFill>
+                <a:latin typeface="+mn-ea"/>
+              </a:rPr>
+              <a:t>서브클러스터</a:t>
+            </a:r>
+            <a:r>
+              <a:rPr lang="en-US" altLang="ko-KR" sz="1200" b="1" dirty="0">
+                <a:solidFill>
+                  <a:schemeClr val="tx1"/>
+                </a:solidFill>
+                <a:latin typeface="+mn-ea"/>
+              </a:rPr>
+              <a:t>(</a:t>
+            </a:r>
+            <a:r>
+              <a:rPr lang="en-US" altLang="ko-KR" sz="1200" b="1" dirty="0" err="1">
+                <a:solidFill>
+                  <a:schemeClr val="tx1"/>
+                </a:solidFill>
+                <a:latin typeface="+mn-ea"/>
+              </a:rPr>
+              <a:t>Subcluster</a:t>
+            </a:r>
+            <a:r>
+              <a:rPr lang="en-US" altLang="ko-KR" sz="1200" b="1" dirty="0">
+                <a:solidFill>
+                  <a:schemeClr val="tx1"/>
+                </a:solidFill>
+                <a:latin typeface="+mn-ea"/>
+              </a:rPr>
+              <a:t>) </a:t>
+            </a:r>
+            <a:r>
+              <a:rPr lang="ko-KR" altLang="en-US" sz="1200" b="1" dirty="0">
+                <a:solidFill>
+                  <a:schemeClr val="tx1"/>
+                </a:solidFill>
+                <a:latin typeface="+mn-ea"/>
+              </a:rPr>
+              <a:t>기반 워크로드 </a:t>
+            </a:r>
+            <a:r>
+              <a:rPr lang="ko-KR" altLang="en-US" sz="1200" b="1" dirty="0" smtClean="0">
+                <a:solidFill>
+                  <a:schemeClr val="tx1"/>
+                </a:solidFill>
+                <a:latin typeface="+mn-ea"/>
+              </a:rPr>
+              <a:t>격리</a:t>
+            </a:r>
+            <a:endParaRPr lang="en-US" altLang="ko-KR" sz="1200" b="1" dirty="0" smtClean="0">
+              <a:solidFill>
+                <a:schemeClr val="tx1"/>
+              </a:solidFill>
+              <a:latin typeface="+mn-ea"/>
+            </a:endParaRPr>
+          </a:p>
+          <a:p>
+            <a:pPr algn="ctr"/>
+            <a:endParaRPr lang="en-US" altLang="ko-KR" sz="1200" b="1" dirty="0" smtClean="0">
+              <a:solidFill>
+                <a:schemeClr val="tx1"/>
+              </a:solidFill>
+              <a:latin typeface="+mn-ea"/>
+            </a:endParaRPr>
+          </a:p>
+          <a:p>
+            <a:r>
+              <a:rPr lang="ko-KR" altLang="en-US" sz="1200" dirty="0">
+                <a:solidFill>
+                  <a:schemeClr val="tx1"/>
+                </a:solidFill>
+                <a:latin typeface="+mn-ea"/>
+              </a:rPr>
+              <a:t>전통적 방식에서는 운영 업무 </a:t>
+            </a:r>
+            <a:r>
+              <a:rPr lang="en-US" altLang="ko-KR" sz="1200" dirty="0">
+                <a:solidFill>
+                  <a:schemeClr val="tx1"/>
+                </a:solidFill>
+                <a:latin typeface="+mn-ea"/>
+              </a:rPr>
+              <a:t>SLA</a:t>
+            </a:r>
+            <a:r>
+              <a:rPr lang="ko-KR" altLang="en-US" sz="1200" dirty="0">
+                <a:solidFill>
+                  <a:schemeClr val="tx1"/>
+                </a:solidFill>
+                <a:latin typeface="+mn-ea"/>
+              </a:rPr>
+              <a:t>를 지키기 위해 분석 업무나 새로운 워크로드를 제약해야만 </a:t>
+            </a:r>
+            <a:r>
+              <a:rPr lang="ko-KR" altLang="en-US" sz="1200" dirty="0" smtClean="0">
+                <a:solidFill>
+                  <a:schemeClr val="tx1"/>
+                </a:solidFill>
+                <a:latin typeface="+mn-ea"/>
+              </a:rPr>
+              <a:t>했습니다</a:t>
+            </a:r>
+            <a:r>
+              <a:rPr lang="en-US" altLang="ko-KR" sz="1200" dirty="0" smtClean="0">
+                <a:solidFill>
+                  <a:schemeClr val="tx1"/>
+                </a:solidFill>
+                <a:latin typeface="+mn-ea"/>
+              </a:rPr>
+              <a:t>.</a:t>
+            </a:r>
+            <a:endParaRPr lang="en-US" altLang="ko-KR" sz="1200" dirty="0">
+              <a:solidFill>
+                <a:schemeClr val="tx1"/>
+              </a:solidFill>
+              <a:latin typeface="+mn-ea"/>
+            </a:endParaRPr>
+          </a:p>
+          <a:p>
+            <a:endParaRPr lang="en-US" altLang="ko-KR" sz="1200" dirty="0">
+              <a:solidFill>
+                <a:schemeClr val="tx1"/>
+              </a:solidFill>
+              <a:latin typeface="+mn-ea"/>
+            </a:endParaRPr>
+          </a:p>
+          <a:p>
+            <a:r>
+              <a:rPr lang="en-US" altLang="ko-KR" sz="1200" dirty="0" smtClean="0">
+                <a:solidFill>
+                  <a:schemeClr val="tx1"/>
+                </a:solidFill>
+                <a:latin typeface="+mn-ea"/>
+              </a:rPr>
+              <a:t>+ </a:t>
+            </a:r>
+            <a:r>
+              <a:rPr lang="ko-KR" altLang="en-US" sz="1200" b="1" dirty="0" smtClean="0">
+                <a:solidFill>
+                  <a:schemeClr val="tx1"/>
+                </a:solidFill>
+                <a:latin typeface="+mn-ea"/>
+              </a:rPr>
+              <a:t>독립적인 </a:t>
+            </a:r>
+            <a:r>
+              <a:rPr lang="ko-KR" altLang="en-US" sz="1200" b="1" dirty="0">
+                <a:solidFill>
+                  <a:schemeClr val="tx1"/>
+                </a:solidFill>
+                <a:latin typeface="+mn-ea"/>
+              </a:rPr>
+              <a:t>리소스 구성</a:t>
+            </a:r>
+            <a:r>
+              <a:rPr lang="en-US" altLang="ko-KR" sz="1200" dirty="0">
+                <a:solidFill>
+                  <a:schemeClr val="tx1"/>
+                </a:solidFill>
+                <a:latin typeface="+mn-ea"/>
+              </a:rPr>
+              <a:t>: </a:t>
+            </a:r>
+            <a:r>
+              <a:rPr lang="ko-KR" altLang="en-US" sz="1200" dirty="0">
+                <a:solidFill>
+                  <a:schemeClr val="tx1"/>
+                </a:solidFill>
+                <a:latin typeface="+mn-ea"/>
+              </a:rPr>
+              <a:t>각 서브클러스터는 다른 </a:t>
+            </a:r>
+            <a:r>
+              <a:rPr lang="ko-KR" altLang="en-US" sz="1200" dirty="0" err="1">
+                <a:solidFill>
+                  <a:schemeClr val="tx1"/>
+                </a:solidFill>
+                <a:latin typeface="+mn-ea"/>
+              </a:rPr>
+              <a:t>노드</a:t>
+            </a:r>
+            <a:r>
+              <a:rPr lang="ko-KR" altLang="en-US" sz="1200" dirty="0">
+                <a:solidFill>
+                  <a:schemeClr val="tx1"/>
+                </a:solidFill>
+                <a:latin typeface="+mn-ea"/>
+              </a:rPr>
+              <a:t> 수</a:t>
+            </a:r>
+            <a:r>
+              <a:rPr lang="en-US" altLang="ko-KR" sz="1200" dirty="0">
+                <a:solidFill>
+                  <a:schemeClr val="tx1"/>
+                </a:solidFill>
+                <a:latin typeface="+mn-ea"/>
+              </a:rPr>
+              <a:t>, CPU, Memory </a:t>
+            </a:r>
+            <a:r>
+              <a:rPr lang="ko-KR" altLang="en-US" sz="1200" dirty="0">
+                <a:solidFill>
+                  <a:schemeClr val="tx1"/>
+                </a:solidFill>
+                <a:latin typeface="+mn-ea"/>
+              </a:rPr>
+              <a:t>등 개별적인 리소스로 구성할 수 </a:t>
+            </a:r>
+            <a:r>
+              <a:rPr lang="ko-KR" altLang="en-US" sz="1200" dirty="0" smtClean="0">
+                <a:solidFill>
+                  <a:schemeClr val="tx1"/>
+                </a:solidFill>
+                <a:latin typeface="+mn-ea"/>
+              </a:rPr>
+              <a:t>있습니다</a:t>
+            </a:r>
+            <a:r>
+              <a:rPr lang="en-US" altLang="ko-KR" sz="1200" dirty="0" smtClean="0">
+                <a:solidFill>
+                  <a:schemeClr val="tx1"/>
+                </a:solidFill>
+                <a:latin typeface="+mn-ea"/>
+              </a:rPr>
+              <a:t>.</a:t>
+            </a:r>
+            <a:endParaRPr lang="en-US" altLang="ko-KR" sz="1200" dirty="0">
+              <a:solidFill>
+                <a:schemeClr val="tx1"/>
+              </a:solidFill>
+              <a:latin typeface="+mn-ea"/>
+            </a:endParaRPr>
+          </a:p>
+          <a:p>
+            <a:r>
+              <a:rPr lang="en-US" altLang="ko-KR" sz="1200" dirty="0">
+                <a:solidFill>
+                  <a:schemeClr val="tx1"/>
+                </a:solidFill>
+                <a:latin typeface="+mn-ea"/>
+              </a:rPr>
+              <a:t>+ </a:t>
+            </a:r>
+            <a:r>
+              <a:rPr lang="ko-KR" altLang="en-US" sz="1200" b="1" dirty="0" smtClean="0">
+                <a:solidFill>
+                  <a:schemeClr val="tx1"/>
+                </a:solidFill>
+                <a:latin typeface="+mn-ea"/>
+              </a:rPr>
+              <a:t>멀티 </a:t>
+            </a:r>
+            <a:r>
+              <a:rPr lang="ko-KR" altLang="en-US" sz="1200" b="1" dirty="0">
+                <a:solidFill>
+                  <a:schemeClr val="tx1"/>
+                </a:solidFill>
+                <a:latin typeface="+mn-ea"/>
+              </a:rPr>
+              <a:t>클러스터 동시성 확장</a:t>
+            </a:r>
+            <a:r>
+              <a:rPr lang="en-US" altLang="ko-KR" sz="1200" dirty="0">
+                <a:solidFill>
+                  <a:schemeClr val="tx1"/>
+                </a:solidFill>
+                <a:latin typeface="+mn-ea"/>
+              </a:rPr>
+              <a:t>: </a:t>
+            </a:r>
+            <a:r>
+              <a:rPr lang="ko-KR" altLang="en-US" sz="1200" dirty="0">
+                <a:solidFill>
+                  <a:schemeClr val="tx1"/>
+                </a:solidFill>
+                <a:latin typeface="+mn-ea"/>
+              </a:rPr>
+              <a:t>주간 </a:t>
+            </a:r>
+            <a:r>
+              <a:rPr lang="en-US" altLang="ko-KR" sz="1200" dirty="0">
+                <a:solidFill>
+                  <a:schemeClr val="tx1"/>
+                </a:solidFill>
+                <a:latin typeface="+mn-ea"/>
+              </a:rPr>
+              <a:t>Batch, BI </a:t>
+            </a:r>
+            <a:r>
+              <a:rPr lang="ko-KR" altLang="en-US" sz="1200" dirty="0" err="1">
+                <a:solidFill>
+                  <a:schemeClr val="tx1"/>
+                </a:solidFill>
+                <a:latin typeface="+mn-ea"/>
+              </a:rPr>
+              <a:t>대시보드</a:t>
+            </a:r>
+            <a:r>
+              <a:rPr lang="en-US" altLang="ko-KR" sz="1200" dirty="0">
+                <a:solidFill>
+                  <a:schemeClr val="tx1"/>
+                </a:solidFill>
+                <a:latin typeface="+mn-ea"/>
+              </a:rPr>
+              <a:t>, ML </a:t>
+            </a:r>
+            <a:r>
+              <a:rPr lang="ko-KR" altLang="en-US" sz="1200" dirty="0">
+                <a:solidFill>
+                  <a:schemeClr val="tx1"/>
+                </a:solidFill>
+                <a:latin typeface="+mn-ea"/>
+              </a:rPr>
+              <a:t>분석</a:t>
+            </a:r>
+            <a:r>
+              <a:rPr lang="en-US" altLang="ko-KR" sz="1200" dirty="0">
+                <a:solidFill>
+                  <a:schemeClr val="tx1"/>
+                </a:solidFill>
+                <a:latin typeface="+mn-ea"/>
+              </a:rPr>
+              <a:t>, Spark </a:t>
+            </a:r>
+            <a:r>
+              <a:rPr lang="ko-KR" altLang="en-US" sz="1200" dirty="0">
+                <a:solidFill>
+                  <a:schemeClr val="tx1"/>
+                </a:solidFill>
+                <a:latin typeface="+mn-ea"/>
+              </a:rPr>
+              <a:t>연계 등 용도별로 서브클러스터를 분리하여 워크로드 간의 간섭을 원천 </a:t>
+            </a:r>
+            <a:r>
+              <a:rPr lang="ko-KR" altLang="en-US" sz="1200" dirty="0" smtClean="0">
+                <a:solidFill>
+                  <a:schemeClr val="tx1"/>
+                </a:solidFill>
+                <a:latin typeface="+mn-ea"/>
+              </a:rPr>
+              <a:t>차단합니다</a:t>
+            </a:r>
+            <a:r>
+              <a:rPr lang="en-US" altLang="ko-KR" sz="1200" dirty="0" smtClean="0">
+                <a:solidFill>
+                  <a:schemeClr val="tx1"/>
+                </a:solidFill>
+                <a:latin typeface="+mn-ea"/>
+              </a:rPr>
+              <a:t>.</a:t>
+            </a:r>
+            <a:endParaRPr lang="en-US" altLang="ko-KR" sz="1200" dirty="0">
+              <a:solidFill>
+                <a:schemeClr val="tx1"/>
+              </a:solidFill>
+              <a:latin typeface="+mn-ea"/>
+            </a:endParaRPr>
+          </a:p>
+          <a:p>
+            <a:r>
+              <a:rPr lang="en-US" altLang="ko-KR" sz="1200" dirty="0">
+                <a:solidFill>
+                  <a:schemeClr val="tx1"/>
+                </a:solidFill>
+                <a:latin typeface="+mn-ea"/>
+              </a:rPr>
+              <a:t>+ </a:t>
+            </a:r>
+            <a:r>
+              <a:rPr lang="ko-KR" altLang="en-US" sz="1200" b="1" dirty="0" smtClean="0">
+                <a:solidFill>
+                  <a:schemeClr val="tx1"/>
+                </a:solidFill>
+                <a:latin typeface="+mn-ea"/>
+              </a:rPr>
+              <a:t>빠른 </a:t>
+            </a:r>
+            <a:r>
+              <a:rPr lang="ko-KR" altLang="en-US" sz="1200" b="1" dirty="0">
+                <a:solidFill>
+                  <a:schemeClr val="tx1"/>
+                </a:solidFill>
+                <a:latin typeface="+mn-ea"/>
+              </a:rPr>
+              <a:t>확장</a:t>
+            </a:r>
+            <a:r>
+              <a:rPr lang="en-US" altLang="ko-KR" sz="1200" dirty="0">
+                <a:solidFill>
+                  <a:schemeClr val="tx1"/>
+                </a:solidFill>
+                <a:latin typeface="+mn-ea"/>
+              </a:rPr>
+              <a:t>: </a:t>
+            </a:r>
+            <a:r>
+              <a:rPr lang="ko-KR" altLang="en-US" sz="1200" dirty="0">
+                <a:solidFill>
+                  <a:schemeClr val="tx1"/>
+                </a:solidFill>
+                <a:latin typeface="+mn-ea"/>
+              </a:rPr>
+              <a:t>새로운 클러스터나 </a:t>
+            </a:r>
+            <a:r>
+              <a:rPr lang="ko-KR" altLang="en-US" sz="1200" dirty="0" err="1">
+                <a:solidFill>
+                  <a:schemeClr val="tx1"/>
+                </a:solidFill>
+                <a:latin typeface="+mn-ea"/>
+              </a:rPr>
+              <a:t>노드를</a:t>
+            </a:r>
+            <a:r>
+              <a:rPr lang="ko-KR" altLang="en-US" sz="1200" dirty="0">
+                <a:solidFill>
+                  <a:schemeClr val="tx1"/>
+                </a:solidFill>
+                <a:latin typeface="+mn-ea"/>
+              </a:rPr>
+              <a:t> 추가할 때 가장 오래 걸리는 </a:t>
+            </a:r>
+            <a:r>
+              <a:rPr lang="en-US" altLang="ko-KR" sz="1200" dirty="0">
+                <a:solidFill>
+                  <a:schemeClr val="tx1"/>
+                </a:solidFill>
+                <a:latin typeface="+mn-ea"/>
+              </a:rPr>
+              <a:t>'</a:t>
+            </a:r>
+            <a:r>
+              <a:rPr lang="ko-KR" altLang="en-US" sz="1200" dirty="0">
+                <a:solidFill>
+                  <a:schemeClr val="tx1"/>
+                </a:solidFill>
+                <a:latin typeface="+mn-ea"/>
+              </a:rPr>
+              <a:t>데이터 </a:t>
+            </a:r>
+            <a:r>
+              <a:rPr lang="ko-KR" altLang="en-US" sz="1200" dirty="0" err="1">
+                <a:solidFill>
+                  <a:schemeClr val="tx1"/>
+                </a:solidFill>
+                <a:latin typeface="+mn-ea"/>
+              </a:rPr>
+              <a:t>리밸런싱</a:t>
+            </a:r>
+            <a:r>
+              <a:rPr lang="en-US" altLang="ko-KR" sz="1200" dirty="0">
+                <a:solidFill>
+                  <a:schemeClr val="tx1"/>
+                </a:solidFill>
+                <a:latin typeface="+mn-ea"/>
+              </a:rPr>
+              <a:t>(Data Rebalancing)' </a:t>
+            </a:r>
+            <a:r>
+              <a:rPr lang="ko-KR" altLang="en-US" sz="1200" dirty="0">
+                <a:solidFill>
+                  <a:schemeClr val="tx1"/>
+                </a:solidFill>
+                <a:latin typeface="+mn-ea"/>
+              </a:rPr>
+              <a:t>및 </a:t>
+            </a:r>
+            <a:r>
+              <a:rPr lang="en-US" altLang="ko-KR" sz="1200" dirty="0">
+                <a:solidFill>
+                  <a:schemeClr val="tx1"/>
+                </a:solidFill>
+                <a:latin typeface="+mn-ea"/>
+              </a:rPr>
+              <a:t>'</a:t>
+            </a:r>
+            <a:r>
+              <a:rPr lang="ko-KR" altLang="en-US" sz="1200" dirty="0">
+                <a:solidFill>
+                  <a:schemeClr val="tx1"/>
+                </a:solidFill>
+                <a:latin typeface="+mn-ea"/>
+              </a:rPr>
+              <a:t>클러스터 간 데이터 동기화</a:t>
+            </a:r>
+            <a:r>
+              <a:rPr lang="en-US" altLang="ko-KR" sz="1200" dirty="0">
+                <a:solidFill>
+                  <a:schemeClr val="tx1"/>
+                </a:solidFill>
+                <a:latin typeface="+mn-ea"/>
+              </a:rPr>
+              <a:t>' </a:t>
+            </a:r>
+            <a:r>
+              <a:rPr lang="ko-KR" altLang="en-US" sz="1200" dirty="0">
+                <a:solidFill>
+                  <a:schemeClr val="tx1"/>
+                </a:solidFill>
+                <a:latin typeface="+mn-ea"/>
+              </a:rPr>
+              <a:t>과정이 </a:t>
+            </a:r>
+            <a:r>
+              <a:rPr lang="ko-KR" altLang="en-US" sz="1200" dirty="0" smtClean="0">
+                <a:solidFill>
+                  <a:schemeClr val="tx1"/>
+                </a:solidFill>
+                <a:latin typeface="+mn-ea"/>
+              </a:rPr>
+              <a:t>불필요합니다</a:t>
+            </a:r>
+            <a:r>
+              <a:rPr lang="en-US" altLang="ko-KR" sz="1200" dirty="0" smtClean="0">
+                <a:solidFill>
+                  <a:schemeClr val="tx1"/>
+                </a:solidFill>
+                <a:latin typeface="+mn-ea"/>
+              </a:rPr>
+              <a:t>.</a:t>
+            </a:r>
+            <a:endParaRPr lang="ko-KR" altLang="en-US" sz="1200" dirty="0">
+              <a:solidFill>
+                <a:schemeClr val="tx1"/>
+              </a:solidFill>
+              <a:latin typeface="+mn-ea"/>
+            </a:endParaRPr>
+          </a:p>
+        </p:txBody>
+      </p:sp>
+      <p:sp>
+        <p:nvSpPr>
+          <p:cNvPr id="22" name="직사각형 21"/>
+          <p:cNvSpPr/>
+          <p:nvPr/>
+        </p:nvSpPr>
+        <p:spPr>
+          <a:xfrm>
+            <a:off x="4843289" y="6183087"/>
+            <a:ext cx="4692596" cy="3001106"/>
+          </a:xfrm>
+          <a:prstGeom prst="rect">
+            <a:avLst/>
+          </a:prstGeom>
+          <a:noFill/>
+          <a:ln>
+            <a:noFill/>
+          </a:ln>
+        </p:spPr>
+        <p:style>
+          <a:lnRef idx="2">
+            <a:schemeClr val="accent1">
+              <a:shade val="50000"/>
+            </a:schemeClr>
+          </a:lnRef>
+          <a:fillRef idx="1">
+            <a:schemeClr val="accent1"/>
+          </a:fillRef>
+          <a:effectRef idx="0">
+            <a:schemeClr val="accent1"/>
+          </a:effectRef>
+          <a:fontRef idx="minor">
+            <a:schemeClr val="lt1"/>
+          </a:fontRef>
+        </p:style>
+        <p:txBody>
+          <a:bodyPr rtlCol="0" anchor="ctr"/>
+          <a:lstStyle/>
+          <a:p>
+            <a:pPr algn="ctr"/>
+            <a:r>
+              <a:rPr lang="en-US" altLang="ko-KR" sz="1200" b="1" dirty="0">
+                <a:solidFill>
+                  <a:schemeClr val="tx1"/>
+                </a:solidFill>
+                <a:latin typeface="+mn-ea"/>
+              </a:rPr>
+              <a:t>Revive</a:t>
+            </a:r>
+            <a:r>
+              <a:rPr lang="ko-KR" altLang="en-US" sz="1200" b="1" dirty="0">
+                <a:solidFill>
+                  <a:schemeClr val="tx1"/>
+                </a:solidFill>
+                <a:latin typeface="+mn-ea"/>
+              </a:rPr>
+              <a:t>를 통한 제로 다운타임</a:t>
+            </a:r>
+            <a:r>
+              <a:rPr lang="en-US" altLang="ko-KR" sz="1200" b="1" dirty="0">
+                <a:solidFill>
+                  <a:schemeClr val="tx1"/>
+                </a:solidFill>
+                <a:latin typeface="+mn-ea"/>
+              </a:rPr>
+              <a:t>(Zero Downtime) </a:t>
+            </a:r>
+            <a:r>
+              <a:rPr lang="ko-KR" altLang="en-US" sz="1200" b="1" dirty="0" err="1" smtClean="0">
+                <a:solidFill>
+                  <a:schemeClr val="tx1"/>
+                </a:solidFill>
+                <a:latin typeface="+mn-ea"/>
+              </a:rPr>
+              <a:t>마이그레이션</a:t>
+            </a:r>
+            <a:endParaRPr lang="en-US" altLang="ko-KR" sz="1200" b="1" dirty="0" smtClean="0">
+              <a:solidFill>
+                <a:schemeClr val="tx1"/>
+              </a:solidFill>
+              <a:latin typeface="+mn-ea"/>
+            </a:endParaRPr>
+          </a:p>
+          <a:p>
+            <a:pPr algn="ctr"/>
+            <a:endParaRPr lang="ko-KR" altLang="en-US" sz="1200" b="1" dirty="0">
+              <a:solidFill>
+                <a:schemeClr val="tx1"/>
+              </a:solidFill>
+              <a:latin typeface="+mn-ea"/>
+            </a:endParaRPr>
+          </a:p>
+          <a:p>
+            <a:pPr algn="ctr"/>
+            <a:r>
+              <a:rPr lang="ko-KR" altLang="en-US" sz="1200" dirty="0">
+                <a:solidFill>
+                  <a:schemeClr val="tx1"/>
+                </a:solidFill>
+                <a:latin typeface="+mn-ea"/>
+              </a:rPr>
+              <a:t>하드웨어 </a:t>
+            </a:r>
+            <a:r>
+              <a:rPr lang="en-US" altLang="ko-KR" sz="1200" dirty="0">
+                <a:solidFill>
+                  <a:schemeClr val="tx1"/>
+                </a:solidFill>
+                <a:latin typeface="+mn-ea"/>
+              </a:rPr>
+              <a:t>EOL(End of Life)</a:t>
+            </a:r>
+            <a:r>
+              <a:rPr lang="ko-KR" altLang="en-US" sz="1200" dirty="0">
+                <a:solidFill>
+                  <a:schemeClr val="tx1"/>
+                </a:solidFill>
+                <a:latin typeface="+mn-ea"/>
+              </a:rPr>
+              <a:t>이나 </a:t>
+            </a:r>
+            <a:r>
+              <a:rPr lang="ko-KR" altLang="en-US" sz="1200" dirty="0" err="1">
+                <a:solidFill>
+                  <a:schemeClr val="tx1"/>
+                </a:solidFill>
+                <a:latin typeface="+mn-ea"/>
+              </a:rPr>
+              <a:t>클라우드</a:t>
+            </a:r>
+            <a:r>
+              <a:rPr lang="ko-KR" altLang="en-US" sz="1200" dirty="0">
+                <a:solidFill>
+                  <a:schemeClr val="tx1"/>
+                </a:solidFill>
+                <a:latin typeface="+mn-ea"/>
+              </a:rPr>
+              <a:t> 전환 시 막대한 데이터 이관</a:t>
+            </a:r>
+            <a:r>
+              <a:rPr lang="en-US" altLang="ko-KR" sz="1200" dirty="0">
+                <a:solidFill>
+                  <a:schemeClr val="tx1"/>
+                </a:solidFill>
+                <a:latin typeface="+mn-ea"/>
+              </a:rPr>
+              <a:t>(Migration)</a:t>
+            </a:r>
+            <a:r>
+              <a:rPr lang="ko-KR" altLang="en-US" sz="1200" dirty="0">
+                <a:solidFill>
+                  <a:schemeClr val="tx1"/>
+                </a:solidFill>
+                <a:latin typeface="+mn-ea"/>
+              </a:rPr>
+              <a:t>에 대한 부담을 </a:t>
+            </a:r>
+            <a:r>
+              <a:rPr lang="ko-KR" altLang="en-US" sz="1200" dirty="0" smtClean="0">
+                <a:solidFill>
+                  <a:schemeClr val="tx1"/>
+                </a:solidFill>
+                <a:latin typeface="+mn-ea"/>
+              </a:rPr>
+              <a:t>해소합니다</a:t>
+            </a:r>
+            <a:r>
+              <a:rPr lang="en-US" altLang="ko-KR" sz="1200" dirty="0" smtClean="0">
+                <a:solidFill>
+                  <a:schemeClr val="tx1"/>
+                </a:solidFill>
+                <a:latin typeface="+mn-ea"/>
+              </a:rPr>
+              <a:t>.</a:t>
+            </a:r>
+            <a:endParaRPr lang="en-US" altLang="ko-KR" sz="1200" dirty="0">
+              <a:solidFill>
+                <a:schemeClr val="tx1"/>
+              </a:solidFill>
+              <a:latin typeface="+mn-ea"/>
+            </a:endParaRPr>
+          </a:p>
+          <a:p>
+            <a:pPr algn="ctr"/>
+            <a:endParaRPr lang="en-US" altLang="ko-KR" sz="1200" dirty="0">
+              <a:solidFill>
+                <a:schemeClr val="tx1"/>
+              </a:solidFill>
+              <a:latin typeface="+mn-ea"/>
+            </a:endParaRPr>
+          </a:p>
+          <a:p>
+            <a:r>
+              <a:rPr lang="en-US" altLang="ko-KR" sz="1200" dirty="0" smtClean="0">
+                <a:solidFill>
+                  <a:schemeClr val="tx1"/>
+                </a:solidFill>
+                <a:latin typeface="+mn-ea"/>
+              </a:rPr>
+              <a:t>+ </a:t>
+            </a:r>
+            <a:r>
+              <a:rPr lang="en-US" altLang="ko-KR" sz="1200" b="1" dirty="0" smtClean="0">
+                <a:solidFill>
+                  <a:schemeClr val="tx1"/>
+                </a:solidFill>
+                <a:latin typeface="+mn-ea"/>
+              </a:rPr>
+              <a:t>OS </a:t>
+            </a:r>
+            <a:r>
+              <a:rPr lang="ko-KR" altLang="en-US" sz="1200" b="1" dirty="0">
+                <a:solidFill>
+                  <a:schemeClr val="tx1"/>
+                </a:solidFill>
+                <a:latin typeface="+mn-ea"/>
+              </a:rPr>
+              <a:t>및 데이터 </a:t>
+            </a:r>
+            <a:r>
+              <a:rPr lang="ko-KR" altLang="en-US" sz="1200" b="1" dirty="0" err="1">
+                <a:solidFill>
+                  <a:schemeClr val="tx1"/>
+                </a:solidFill>
+                <a:latin typeface="+mn-ea"/>
+              </a:rPr>
+              <a:t>무의존성</a:t>
+            </a:r>
+            <a:r>
+              <a:rPr lang="en-US" altLang="ko-KR" sz="1200" dirty="0">
+                <a:solidFill>
+                  <a:schemeClr val="tx1"/>
+                </a:solidFill>
+                <a:latin typeface="+mn-ea"/>
+              </a:rPr>
+              <a:t>: </a:t>
+            </a:r>
+            <a:r>
+              <a:rPr lang="ko-KR" altLang="en-US" sz="1200" dirty="0">
+                <a:solidFill>
+                  <a:schemeClr val="tx1"/>
+                </a:solidFill>
+                <a:latin typeface="+mn-ea"/>
+              </a:rPr>
+              <a:t>메타데이터와 영구 데이터는 모두 오브젝트 </a:t>
+            </a:r>
+            <a:r>
+              <a:rPr lang="ko-KR" altLang="en-US" sz="1200" dirty="0" err="1">
+                <a:solidFill>
+                  <a:schemeClr val="tx1"/>
+                </a:solidFill>
+                <a:latin typeface="+mn-ea"/>
+              </a:rPr>
+              <a:t>스토리지에</a:t>
+            </a:r>
+            <a:r>
+              <a:rPr lang="ko-KR" altLang="en-US" sz="1200" dirty="0">
+                <a:solidFill>
+                  <a:schemeClr val="tx1"/>
+                </a:solidFill>
+                <a:latin typeface="+mn-ea"/>
+              </a:rPr>
+              <a:t> 있으므로 컴퓨팅 </a:t>
+            </a:r>
+            <a:r>
+              <a:rPr lang="ko-KR" altLang="en-US" sz="1200" dirty="0" err="1">
+                <a:solidFill>
+                  <a:schemeClr val="tx1"/>
+                </a:solidFill>
+                <a:latin typeface="+mn-ea"/>
+              </a:rPr>
+              <a:t>노드의</a:t>
+            </a:r>
+            <a:r>
+              <a:rPr lang="ko-KR" altLang="en-US" sz="1200" dirty="0">
+                <a:solidFill>
+                  <a:schemeClr val="tx1"/>
+                </a:solidFill>
+                <a:latin typeface="+mn-ea"/>
+              </a:rPr>
+              <a:t> </a:t>
+            </a:r>
+            <a:r>
+              <a:rPr lang="en-US" altLang="ko-KR" sz="1200" dirty="0">
+                <a:solidFill>
+                  <a:schemeClr val="tx1"/>
+                </a:solidFill>
+                <a:latin typeface="+mn-ea"/>
+              </a:rPr>
+              <a:t>OS</a:t>
+            </a:r>
+            <a:r>
+              <a:rPr lang="ko-KR" altLang="en-US" sz="1200" dirty="0">
+                <a:solidFill>
+                  <a:schemeClr val="tx1"/>
+                </a:solidFill>
+                <a:latin typeface="+mn-ea"/>
+              </a:rPr>
+              <a:t>나 인프라 환경에 얽매이지 </a:t>
+            </a:r>
+            <a:r>
+              <a:rPr lang="ko-KR" altLang="en-US" sz="1200" dirty="0" smtClean="0">
+                <a:solidFill>
+                  <a:schemeClr val="tx1"/>
+                </a:solidFill>
+                <a:latin typeface="+mn-ea"/>
+              </a:rPr>
+              <a:t>않습니</a:t>
+            </a:r>
+            <a:r>
+              <a:rPr lang="ko-KR" altLang="en-US" sz="1200" dirty="0">
+                <a:solidFill>
+                  <a:schemeClr val="tx1"/>
+                </a:solidFill>
+                <a:latin typeface="+mn-ea"/>
+              </a:rPr>
+              <a:t>다</a:t>
+            </a:r>
+            <a:r>
+              <a:rPr lang="en-US" altLang="ko-KR" sz="1200" dirty="0" smtClean="0">
+                <a:solidFill>
+                  <a:schemeClr val="tx1"/>
+                </a:solidFill>
+                <a:latin typeface="+mn-ea"/>
+              </a:rPr>
+              <a:t>.</a:t>
+            </a:r>
+          </a:p>
+          <a:p>
+            <a:r>
+              <a:rPr lang="en-US" altLang="ko-KR" sz="1200" dirty="0" smtClean="0">
+                <a:solidFill>
+                  <a:schemeClr val="tx1"/>
+                </a:solidFill>
+                <a:latin typeface="+mn-ea"/>
+              </a:rPr>
+              <a:t>+ </a:t>
+            </a:r>
+            <a:r>
+              <a:rPr lang="ko-KR" altLang="en-US" sz="1200" b="1" dirty="0" smtClean="0">
+                <a:solidFill>
+                  <a:schemeClr val="tx1"/>
+                </a:solidFill>
+                <a:latin typeface="+mn-ea"/>
+              </a:rPr>
+              <a:t>데이터 </a:t>
+            </a:r>
+            <a:r>
+              <a:rPr lang="ko-KR" altLang="en-US" sz="1200" b="1" dirty="0">
+                <a:solidFill>
+                  <a:schemeClr val="tx1"/>
+                </a:solidFill>
+                <a:latin typeface="+mn-ea"/>
+              </a:rPr>
+              <a:t>이관</a:t>
+            </a:r>
+            <a:r>
+              <a:rPr lang="en-US" altLang="ko-KR" sz="1200" b="1" dirty="0">
+                <a:solidFill>
+                  <a:schemeClr val="tx1"/>
+                </a:solidFill>
+                <a:latin typeface="+mn-ea"/>
+              </a:rPr>
+              <a:t>(Migration) </a:t>
+            </a:r>
+            <a:r>
+              <a:rPr lang="ko-KR" altLang="en-US" sz="1200" b="1" dirty="0">
+                <a:solidFill>
+                  <a:schemeClr val="tx1"/>
+                </a:solidFill>
+                <a:latin typeface="+mn-ea"/>
+              </a:rPr>
+              <a:t>불필요</a:t>
+            </a:r>
+            <a:r>
+              <a:rPr lang="en-US" altLang="ko-KR" sz="1200" dirty="0">
+                <a:solidFill>
+                  <a:schemeClr val="tx1"/>
+                </a:solidFill>
+                <a:latin typeface="+mn-ea"/>
+              </a:rPr>
+              <a:t>: </a:t>
+            </a:r>
+            <a:r>
+              <a:rPr lang="ko-KR" altLang="en-US" sz="1200" dirty="0">
+                <a:solidFill>
+                  <a:schemeClr val="tx1"/>
+                </a:solidFill>
+                <a:latin typeface="+mn-ea"/>
+              </a:rPr>
+              <a:t>새로운 인프라나 </a:t>
+            </a:r>
+            <a:r>
+              <a:rPr lang="ko-KR" altLang="en-US" sz="1200" dirty="0" err="1">
+                <a:solidFill>
+                  <a:schemeClr val="tx1"/>
+                </a:solidFill>
+                <a:latin typeface="+mn-ea"/>
+              </a:rPr>
+              <a:t>클라우드에</a:t>
+            </a:r>
+            <a:r>
+              <a:rPr lang="ko-KR" altLang="en-US" sz="1200" dirty="0">
+                <a:solidFill>
+                  <a:schemeClr val="tx1"/>
+                </a:solidFill>
+                <a:latin typeface="+mn-ea"/>
+              </a:rPr>
+              <a:t> 빈 클러스터를 띄운 후</a:t>
+            </a:r>
+            <a:r>
+              <a:rPr lang="en-US" altLang="ko-KR" sz="1200" dirty="0">
+                <a:solidFill>
+                  <a:schemeClr val="tx1"/>
+                </a:solidFill>
+                <a:latin typeface="+mn-ea"/>
+              </a:rPr>
+              <a:t>, </a:t>
+            </a:r>
+            <a:r>
+              <a:rPr lang="ko-KR" altLang="en-US" sz="1200" dirty="0">
+                <a:solidFill>
+                  <a:schemeClr val="tx1"/>
+                </a:solidFill>
+                <a:latin typeface="+mn-ea"/>
+              </a:rPr>
+              <a:t>기존 오브젝트 </a:t>
+            </a:r>
+            <a:r>
+              <a:rPr lang="ko-KR" altLang="en-US" sz="1200" dirty="0" err="1">
+                <a:solidFill>
+                  <a:schemeClr val="tx1"/>
+                </a:solidFill>
+                <a:latin typeface="+mn-ea"/>
+              </a:rPr>
+              <a:t>스토리지의</a:t>
+            </a:r>
+            <a:r>
+              <a:rPr lang="ko-KR" altLang="en-US" sz="1200" dirty="0">
+                <a:solidFill>
+                  <a:schemeClr val="tx1"/>
+                </a:solidFill>
+                <a:latin typeface="+mn-ea"/>
+              </a:rPr>
+              <a:t> 메타 정보만 동기화</a:t>
+            </a:r>
+            <a:r>
+              <a:rPr lang="en-US" altLang="ko-KR" sz="1200" dirty="0">
+                <a:solidFill>
+                  <a:schemeClr val="tx1"/>
+                </a:solidFill>
+                <a:latin typeface="+mn-ea"/>
+              </a:rPr>
+              <a:t>(Revive)</a:t>
+            </a:r>
+            <a:r>
+              <a:rPr lang="ko-KR" altLang="en-US" sz="1200" dirty="0">
+                <a:solidFill>
+                  <a:schemeClr val="tx1"/>
+                </a:solidFill>
+                <a:latin typeface="+mn-ea"/>
+              </a:rPr>
+              <a:t>하면 즉시 </a:t>
+            </a:r>
+            <a:r>
+              <a:rPr lang="en-US" altLang="ko-KR" sz="1200" dirty="0">
+                <a:solidFill>
+                  <a:schemeClr val="tx1"/>
+                </a:solidFill>
+                <a:latin typeface="+mn-ea"/>
+              </a:rPr>
+              <a:t>DB</a:t>
+            </a:r>
+            <a:r>
+              <a:rPr lang="ko-KR" altLang="en-US" sz="1200" dirty="0">
+                <a:solidFill>
+                  <a:schemeClr val="tx1"/>
+                </a:solidFill>
+                <a:latin typeface="+mn-ea"/>
+              </a:rPr>
+              <a:t>가 </a:t>
+            </a:r>
+            <a:r>
+              <a:rPr lang="ko-KR" altLang="en-US" sz="1200" dirty="0" smtClean="0">
+                <a:solidFill>
+                  <a:schemeClr val="tx1"/>
+                </a:solidFill>
+                <a:latin typeface="+mn-ea"/>
+              </a:rPr>
+              <a:t>복구됩니다</a:t>
+            </a:r>
+            <a:r>
+              <a:rPr lang="en-US" altLang="ko-KR" sz="1200" dirty="0" smtClean="0">
+                <a:solidFill>
+                  <a:schemeClr val="tx1"/>
+                </a:solidFill>
+                <a:latin typeface="+mn-ea"/>
+              </a:rPr>
+              <a:t>.</a:t>
+            </a:r>
+            <a:endParaRPr lang="en-US" altLang="ko-KR" sz="1200" dirty="0">
+              <a:solidFill>
+                <a:schemeClr val="tx1"/>
+              </a:solidFill>
+              <a:latin typeface="+mn-ea"/>
+            </a:endParaRPr>
+          </a:p>
+          <a:p>
+            <a:r>
+              <a:rPr lang="en-US" altLang="ko-KR" sz="1200" dirty="0" smtClean="0">
+                <a:solidFill>
+                  <a:schemeClr val="tx1"/>
+                </a:solidFill>
+                <a:latin typeface="+mn-ea"/>
+              </a:rPr>
+              <a:t>+ </a:t>
+            </a:r>
+            <a:r>
+              <a:rPr lang="ko-KR" altLang="en-US" sz="1200" b="1" dirty="0" smtClean="0">
+                <a:solidFill>
+                  <a:schemeClr val="tx1"/>
+                </a:solidFill>
+                <a:latin typeface="+mn-ea"/>
+              </a:rPr>
+              <a:t>서비스 </a:t>
+            </a:r>
+            <a:r>
+              <a:rPr lang="ko-KR" altLang="en-US" sz="1200" b="1" dirty="0">
+                <a:solidFill>
+                  <a:schemeClr val="tx1"/>
+                </a:solidFill>
+                <a:latin typeface="+mn-ea"/>
+              </a:rPr>
+              <a:t>중단 최소화</a:t>
+            </a:r>
+            <a:r>
+              <a:rPr lang="en-US" altLang="ko-KR" sz="1200" b="1" dirty="0">
+                <a:solidFill>
+                  <a:schemeClr val="tx1"/>
+                </a:solidFill>
+                <a:latin typeface="+mn-ea"/>
+              </a:rPr>
+              <a:t>:</a:t>
+            </a:r>
+            <a:r>
+              <a:rPr lang="en-US" altLang="ko-KR" sz="1200" dirty="0">
+                <a:solidFill>
+                  <a:schemeClr val="tx1"/>
+                </a:solidFill>
+                <a:latin typeface="+mn-ea"/>
+              </a:rPr>
+              <a:t> </a:t>
+            </a:r>
+            <a:r>
+              <a:rPr lang="ko-KR" altLang="en-US" sz="1200" dirty="0">
+                <a:solidFill>
+                  <a:schemeClr val="tx1"/>
+                </a:solidFill>
+                <a:latin typeface="+mn-ea"/>
+              </a:rPr>
+              <a:t>기존 시스템을 중단할 필요 없이 백그라운드에서 신규 구성을 완료한 뒤 전환할 수 있어 다운타임을 수 분 이내로 </a:t>
+            </a:r>
+            <a:r>
+              <a:rPr lang="ko-KR" altLang="en-US" sz="1200" dirty="0" smtClean="0">
+                <a:solidFill>
+                  <a:schemeClr val="tx1"/>
+                </a:solidFill>
+                <a:latin typeface="+mn-ea"/>
+              </a:rPr>
+              <a:t>최소화합니다</a:t>
+            </a:r>
+            <a:r>
+              <a:rPr lang="en-US" altLang="ko-KR" sz="1200" dirty="0" smtClean="0">
+                <a:solidFill>
+                  <a:schemeClr val="tx1"/>
+                </a:solidFill>
+                <a:latin typeface="+mn-ea"/>
+              </a:rPr>
+              <a:t>.</a:t>
+            </a:r>
+            <a:endParaRPr lang="ko-KR" altLang="en-US" sz="1200" dirty="0">
+              <a:solidFill>
+                <a:schemeClr val="tx1"/>
+              </a:solidFill>
+              <a:latin typeface="+mn-ea"/>
+            </a:endParaRPr>
+          </a:p>
+        </p:txBody>
+      </p:sp>
     </p:spTree>
     <p:extLst>
       <p:ext uri="{BB962C8B-B14F-4D97-AF65-F5344CB8AC3E}">
@@ -21483,7 +25075,7 @@
           <a:lstStyle/>
           <a:p>
             <a:r>
-              <a:rPr lang="en-US" altLang="ko-KR" sz="1600" b="1" dirty="0" smtClean="0">
+              <a:rPr lang="en-US" altLang="ko-KR" sz="1600" b="1" dirty="0" err="1" smtClean="0">
                 <a:solidFill>
                   <a:schemeClr val="accent1">
                     <a:lumMod val="75000"/>
@@ -21491,7 +25083,29 @@
                 </a:solidFill>
                 <a:latin typeface="+mn-ea"/>
               </a:rPr>
-              <a:t>xxx</a:t>
+              <a:t>Vertica</a:t>
+            </a:r>
+            <a:r>
+              <a:rPr lang="en-US" altLang="ko-KR" sz="1600" b="1" dirty="0" smtClean="0">
+                <a:solidFill>
+                  <a:schemeClr val="accent1">
+                    <a:lumMod val="75000"/>
+                  </a:schemeClr>
+                </a:solidFill>
+                <a:latin typeface="+mn-ea"/>
+              </a:rPr>
+              <a:t> </a:t>
+            </a:r>
+            <a:r>
+              <a:rPr lang="en-US" altLang="ko-KR" sz="1600" b="1" dirty="0" err="1" smtClean="0">
+                <a:solidFill>
+                  <a:schemeClr val="accent1">
+                    <a:lumMod val="75000"/>
+                  </a:schemeClr>
+                </a:solidFill>
+                <a:latin typeface="+mn-ea"/>
+              </a:rPr>
+              <a:t>EonMode</a:t>
             </a:r>
             <a:endParaRPr lang="ko-KR" altLang="en-US" sz="1600" b="1" dirty="0">
               <a:solidFill>
@@ -21513,7 +25127,7 @@
         <p:spPr>
           <a:xfrm>
             <a:off x="301171" y="422730"/>
-            <a:ext cx="9312729" cy="357414"/>
+            <a:ext cx="9312729" cy="878532"/>
           </a:xfrm>
           <a:prstGeom prst="rect">
             <a:avLst/>
@@ -21544,13 +25158,157 @@
           <a:lstStyle/>
           <a:p>
             <a:r>
+              <a:rPr lang="en-US" altLang="ko-KR" sz="1400" dirty="0">
+                <a:solidFill>
+                  <a:schemeClr val="tx1"/>
+                </a:solidFill>
+                <a:latin typeface="+mn-ea"/>
+              </a:rPr>
+              <a:t>Eon Mode</a:t>
+            </a:r>
+            <a:r>
+              <a:rPr lang="ko-KR" altLang="en-US" sz="1400" dirty="0">
+                <a:solidFill>
+                  <a:schemeClr val="tx1"/>
+                </a:solidFill>
+                <a:latin typeface="+mn-ea"/>
+              </a:rPr>
+              <a:t>는 </a:t>
+            </a:r>
+            <a:r>
+              <a:rPr lang="ko-KR" altLang="en-US" sz="1400" dirty="0" err="1">
+                <a:solidFill>
+                  <a:schemeClr val="tx1"/>
+                </a:solidFill>
+                <a:latin typeface="+mn-ea"/>
+              </a:rPr>
+              <a:t>클라우드</a:t>
+            </a:r>
+            <a:r>
+              <a:rPr lang="ko-KR" altLang="en-US" sz="1400" dirty="0">
+                <a:solidFill>
+                  <a:schemeClr val="tx1"/>
+                </a:solidFill>
+                <a:latin typeface="+mn-ea"/>
+              </a:rPr>
+              <a:t> 이코노믹스의 동적 워크로드 및 효율적인 확장 요구에 대응하기 위해 설계된 컴퓨팅</a:t>
+            </a:r>
+            <a:r>
+              <a:rPr lang="en-US" altLang="ko-KR" sz="1400" dirty="0">
+                <a:solidFill>
+                  <a:schemeClr val="tx1"/>
+                </a:solidFill>
+                <a:latin typeface="+mn-ea"/>
+              </a:rPr>
+              <a:t>/</a:t>
+            </a:r>
+            <a:r>
+              <a:rPr lang="ko-KR" altLang="en-US" sz="1400" dirty="0">
+                <a:solidFill>
+                  <a:schemeClr val="tx1"/>
+                </a:solidFill>
+                <a:latin typeface="+mn-ea"/>
+              </a:rPr>
+              <a:t>스토리지</a:t>
+            </a:r>
+            <a:r>
+              <a:rPr lang="en-US" altLang="ko-KR" sz="1400" dirty="0">
+                <a:solidFill>
+                  <a:schemeClr val="tx1"/>
+                </a:solidFill>
+                <a:latin typeface="+mn-ea"/>
+              </a:rPr>
+              <a:t>(C/S) </a:t>
+            </a:r>
+            <a:r>
+              <a:rPr lang="ko-KR" altLang="en-US" sz="1400" dirty="0">
+                <a:solidFill>
+                  <a:schemeClr val="tx1"/>
+                </a:solidFill>
+                <a:latin typeface="+mn-ea"/>
+              </a:rPr>
+              <a:t>분리 </a:t>
+            </a:r>
+            <a:r>
+              <a:rPr lang="ko-KR" altLang="en-US" sz="1400" dirty="0" smtClean="0">
+                <a:solidFill>
+                  <a:schemeClr val="tx1"/>
+                </a:solidFill>
+                <a:latin typeface="+mn-ea"/>
+              </a:rPr>
+              <a:t>아키텍처입니다</a:t>
+            </a:r>
+            <a:r>
               <a:rPr lang="en-US" altLang="ko-KR" sz="1400" dirty="0" smtClean="0">
                 <a:solidFill>
                   <a:schemeClr val="tx1"/>
                 </a:solidFill>
                 <a:latin typeface="+mn-ea"/>
               </a:rPr>
-              <a:t>xxx</a:t>
+              <a:t>. </a:t>
+            </a:r>
+            <a:r>
+              <a:rPr lang="ko-KR" altLang="en-US" sz="1400" dirty="0" err="1">
+                <a:solidFill>
+                  <a:schemeClr val="tx1"/>
+                </a:solidFill>
+                <a:latin typeface="+mn-ea"/>
+              </a:rPr>
+              <a:t>페타바이트</a:t>
+            </a:r>
+            <a:r>
+              <a:rPr lang="ko-KR" altLang="en-US" sz="1400" dirty="0">
+                <a:solidFill>
+                  <a:schemeClr val="tx1"/>
+                </a:solidFill>
+                <a:latin typeface="+mn-ea"/>
+              </a:rPr>
+              <a:t> 규모 이상의 통합 데이터 </a:t>
+            </a:r>
+            <a:r>
+              <a:rPr lang="ko-KR" altLang="en-US" sz="1400" dirty="0" err="1">
+                <a:solidFill>
+                  <a:schemeClr val="tx1"/>
+                </a:solidFill>
+                <a:latin typeface="+mn-ea"/>
+              </a:rPr>
+              <a:t>레이크하우스</a:t>
+            </a:r>
+            <a:r>
+              <a:rPr lang="en-US" altLang="ko-KR" sz="1400" dirty="0">
+                <a:solidFill>
+                  <a:schemeClr val="tx1"/>
+                </a:solidFill>
+                <a:latin typeface="+mn-ea"/>
+              </a:rPr>
+              <a:t>(</a:t>
+            </a:r>
+            <a:r>
+              <a:rPr lang="en-US" altLang="ko-KR" sz="1400" dirty="0" err="1">
+                <a:solidFill>
+                  <a:schemeClr val="tx1"/>
+                </a:solidFill>
+                <a:latin typeface="+mn-ea"/>
+              </a:rPr>
+              <a:t>Lakehouse</a:t>
+            </a:r>
+            <a:r>
+              <a:rPr lang="en-US" altLang="ko-KR" sz="1400" dirty="0">
+                <a:solidFill>
+                  <a:schemeClr val="tx1"/>
+                </a:solidFill>
+                <a:latin typeface="+mn-ea"/>
+              </a:rPr>
+              <a:t>) </a:t>
+            </a:r>
+            <a:r>
+              <a:rPr lang="ko-KR" altLang="en-US" sz="1400" dirty="0">
+                <a:solidFill>
+                  <a:schemeClr val="tx1"/>
+                </a:solidFill>
+                <a:latin typeface="+mn-ea"/>
+              </a:rPr>
+              <a:t>플랫폼을 구축하는 데 최적화되어 있습니다</a:t>
             </a:r>
             <a:endParaRPr lang="en-US" altLang="ko-KR" sz="1400" dirty="0">
               <a:solidFill>
@@ -21599,7 +25357,7 @@
     </p:spTree>
     <p:extLst>
       <p:ext uri="{BB962C8B-B14F-4D97-AF65-F5344CB8AC3E}">
-        <p14:creationId xmlns:p14="http://schemas.microsoft.com/office/powerpoint/2010/main" val="1784995460"/>
+        <p14:creationId xmlns:p14="http://schemas.microsoft.com/office/powerpoint/2010/main" val="2249290787"/>
       </p:ext>
     </p:extLst>
   </p:cSld>
@@ -21789,7 +25547,7 @@
     </p:spTree>
     <p:extLst>
       <p:ext uri="{BB962C8B-B14F-4D97-AF65-F5344CB8AC3E}">
-        <p14:creationId xmlns:p14="http://schemas.microsoft.com/office/powerpoint/2010/main" val="1171376132"/>
+        <p14:creationId xmlns:p14="http://schemas.microsoft.com/office/powerpoint/2010/main" val="1784995460"/>
       </p:ext>
     </p:extLst>
   </p:cSld>
@@ -21979,7 +25737,7 @@
     </p:spTree>
     <p:extLst>
       <p:ext uri="{BB962C8B-B14F-4D97-AF65-F5344CB8AC3E}">
-        <p14:creationId xmlns:p14="http://schemas.microsoft.com/office/powerpoint/2010/main" val="1177542108"/>
+        <p14:creationId xmlns:p14="http://schemas.microsoft.com/office/powerpoint/2010/main" val="1171376132"/>
       </p:ext>
     </p:extLst>
   </p:cSld>
